--- a/samples/VK_Tech_шаблон__split.pptx
+++ b/samples/VK_Tech_шаблон__split.pptx
@@ -279,7 +279,7 @@
               <c:strCache>
                 <c:ptCount val="1"/>
                 <c:pt idx="0">
-                  <c:v>Время сборки</c:v>
+                  <c:v>Время</c:v>
                 </c:pt>
               </c:strCache>
             </c:strRef>
@@ -300,10 +300,10 @@
               <c:strCache>
                 <c:ptCount val="2"/>
                 <c:pt idx="0">
-                  <c:v>Текущий</c:v>
+                  <c:v>Сборка</c:v>
                 </c:pt>
                 <c:pt idx="1">
-                  <c:v>Пилот</c:v>
+                  <c:v>Правки</c:v>
                 </c:pt>
               </c:strCache>
             </c:strRef>
@@ -318,7 +318,7 @@
                   <c:v>186.0</c:v>
                 </c:pt>
                 <c:pt idx="1">
-                  <c:v>4.0</c:v>
+                  <c:v>74.0</c:v>
                 </c:pt>
               </c:numCache>
             </c:numRef>
@@ -393,193 +393,6 @@
                 </a:pPr>
                 <a:r>
                   <a:t>мин</a:t>
-                </a:r>
-              </a:p>
-            </c:rich>
-          </c:tx>
-          <c:layout/>
-          <c:overlay val="0"/>
-        </c:title>
-        <c:majorTickMark val="out"/>
-        <c:minorTickMark val="none"/>
-        <c:tickLblPos val="nextTo"/>
-        <c:txPr>
-          <a:bodyPr/>
-          <a:lstStyle/>
-          <a:p>
-            <a:pPr>
-              <a:defRPr sz="1100" b="0">
-                <a:solidFill>
-                  <a:srgbClr val="000000"/>
-                </a:solidFill>
-                <a:latin typeface="Play"/>
-                <a:ea typeface="Play"/>
-                <a:cs typeface="Play"/>
-              </a:defRPr>
-            </a:pPr>
-          </a:p>
-        </c:txPr>
-        <c:crossAx val="-2068027336"/>
-        <c:crosses val="autoZero"/>
-      </c:valAx>
-    </c:plotArea>
-    <c:dispBlanksAs val="gap"/>
-  </c:chart>
-  <c:txPr>
-    <a:bodyPr/>
-    <a:lstStyle/>
-    <a:p>
-      <a:pPr>
-        <a:defRPr sz="1200" b="0">
-          <a:solidFill>
-            <a:srgbClr val="000000"/>
-          </a:solidFill>
-          <a:latin typeface="Play"/>
-          <a:ea typeface="Play"/>
-          <a:cs typeface="Play"/>
-        </a:defRPr>
-      </a:pPr>
-      <a:endParaRPr lang="en-US"/>
-    </a:p>
-  </c:txPr>
-  <c:externalData r:id="rId1">
-    <c:autoUpdate val="0"/>
-  </c:externalData>
-</c:chartSpace>
-</file>
-
-<file path=ppt/charts/chart2.xml><?xml version="1.0" encoding="utf-8"?>
-<c:chartSpace xmlns:c="http://schemas.openxmlformats.org/drawingml/2006/chart" xmlns:a="http://schemas.openxmlformats.org/drawingml/2006/main" xmlns:r="http://schemas.openxmlformats.org/officeDocument/2006/relationships">
-  <c:date1904 val="0"/>
-  <c:chart>
-    <c:autoTitleDeleted val="1"/>
-    <c:plotArea>
-      <c:barChart>
-        <c:barDir val="col"/>
-        <c:grouping val="clustered"/>
-        <c:ser>
-          <c:idx val="0"/>
-          <c:order val="0"/>
-          <c:tx>
-            <c:strRef>
-              <c:f>Sheet1!$B$1</c:f>
-              <c:strCache>
-                <c:ptCount val="1"/>
-                <c:pt idx="0">
-                  <c:v>Время до первой версии</c:v>
-                </c:pt>
-              </c:strCache>
-            </c:strRef>
-          </c:tx>
-          <c:spPr>
-            <a:solidFill>
-              <a:srgbClr val="0077FF"/>
-            </a:solidFill>
-            <a:ln>
-              <a:solidFill>
-                <a:srgbClr val="0077FF"/>
-              </a:solidFill>
-            </a:ln>
-          </c:spPr>
-          <c:cat>
-            <c:strRef>
-              <c:f>Sheet1!$A$2:$A$3</c:f>
-              <c:strCache>
-                <c:ptCount val="2"/>
-                <c:pt idx="0">
-                  <c:v>Текущий</c:v>
-                </c:pt>
-                <c:pt idx="1">
-                  <c:v>Пилот</c:v>
-                </c:pt>
-              </c:strCache>
-            </c:strRef>
-          </c:cat>
-          <c:val>
-            <c:numRef>
-              <c:f>Sheet1!$B$2:$B$3</c:f>
-              <c:numCache>
-                <c:formatCode>General</c:formatCode>
-                <c:ptCount val="2"/>
-                <c:pt idx="0">
-                  <c:v>6.0</c:v>
-                </c:pt>
-                <c:pt idx="1">
-                  <c:v>1.0</c:v>
-                </c:pt>
-              </c:numCache>
-            </c:numRef>
-          </c:val>
-        </c:ser>
-        <c:gapWidth val="60"/>
-        <c:axId val="-2068027336"/>
-        <c:axId val="-2113994440"/>
-      </c:barChart>
-      <c:catAx>
-        <c:axId val="-2068027336"/>
-        <c:scaling>
-          <c:orientation val="minMax"/>
-        </c:scaling>
-        <c:delete val="0"/>
-        <c:axPos val="b"/>
-        <c:majorTickMark val="out"/>
-        <c:minorTickMark val="none"/>
-        <c:tickLblPos val="nextTo"/>
-        <c:txPr>
-          <a:bodyPr/>
-          <a:lstStyle/>
-          <a:p>
-            <a:pPr>
-              <a:defRPr sz="1100" b="0">
-                <a:solidFill>
-                  <a:srgbClr val="000000"/>
-                </a:solidFill>
-                <a:latin typeface="Play"/>
-                <a:ea typeface="Play"/>
-                <a:cs typeface="Play"/>
-              </a:defRPr>
-            </a:pPr>
-          </a:p>
-        </c:txPr>
-        <c:crossAx val="-2113994440"/>
-        <c:crosses val="autoZero"/>
-        <c:auto val="1"/>
-        <c:lblAlgn val="ctr"/>
-        <c:lblOffset val="100"/>
-        <c:noMultiLvlLbl val="0"/>
-      </c:catAx>
-      <c:valAx>
-        <c:axId val="-2113994440"/>
-        <c:scaling/>
-        <c:delete val="0"/>
-        <c:axPos val="l"/>
-        <c:majorGridlines>
-          <c:spPr>
-            <a:ln w="9525">
-              <a:solidFill>
-                <a:srgbClr val="D1D1D1"/>
-              </a:solidFill>
-            </a:ln>
-          </c:spPr>
-        </c:majorGridlines>
-        <c:title>
-          <c:tx>
-            <c:rich>
-              <a:bodyPr/>
-              <a:lstStyle/>
-              <a:p>
-                <a:pPr>
-                  <a:defRPr sz="1100" b="0">
-                    <a:solidFill>
-                      <a:srgbClr val="000000"/>
-                    </a:solidFill>
-                    <a:latin typeface="Play"/>
-                    <a:ea typeface="Play"/>
-                    <a:cs typeface="Play"/>
-                  </a:defRPr>
-                </a:pPr>
-                <a:r>
-                  <a:t>дней</a:t>
                 </a:r>
               </a:p>
             </c:rich>
@@ -5956,7 +5769,7 @@
       </p:sp>
       <p:sp>
         <p:nvSpPr>
-          <p:cNvPr id="556" name="body_left"/>
+          <p:cNvPr id="556" name="body"/>
           <p:cNvSpPr txBox="1"/>
           <p:nvPr/>
         </p:nvSpPr>
@@ -5980,7 +5793,7 @@
               <a:spcAft>
                 <a:spcPts val="300"/>
               </a:spcAft>
-              <a:defRPr sz="1600">
+              <a:defRPr sz="1400">
                 <a:solidFill>
                   <a:srgbClr val="000000"/>
                 </a:solidFill>
@@ -5990,7 +5803,7 @@
               </a:defRPr>
             </a:pPr>
             <a:r>
-              <a:rPr sz="1600">
+              <a:rPr sz="1400">
                 <a:solidFill>
                   <a:srgbClr val="000000"/>
                 </a:solidFill>
@@ -5998,7 +5811,7 @@
                 <a:ea typeface="Play"/>
                 <a:cs typeface="Play"/>
               </a:rPr>
-              <a:t>• 42 колоды в первом квартале 2026 года</a:t>
+              <a:t>• 186 минут на сборку одной презентации</a:t>
             </a:r>
           </a:p>
           <a:p>
@@ -6006,7 +5819,7 @@
               <a:spcAft>
                 <a:spcPts val="300"/>
               </a:spcAft>
-              <a:defRPr sz="1600">
+              <a:defRPr sz="1400">
                 <a:solidFill>
                   <a:srgbClr val="000000"/>
                 </a:solidFill>
@@ -6016,7 +5829,7 @@
               </a:defRPr>
             </a:pPr>
             <a:r>
-              <a:rPr sz="1600">
+              <a:rPr sz="1400">
                 <a:solidFill>
                   <a:srgbClr val="000000"/>
                 </a:solidFill>
@@ -6024,7 +5837,7 @@
                 <a:ea typeface="Play"/>
                 <a:cs typeface="Play"/>
               </a:rPr>
-              <a:t>• Средняя сборка 12 слайдов занимает 186 минут</a:t>
+              <a:t>• 74 минуты на правки после ревью</a:t>
             </a:r>
           </a:p>
           <a:p>
@@ -6032,7 +5845,7 @@
               <a:spcAft>
                 <a:spcPts val="300"/>
               </a:spcAft>
-              <a:defRPr sz="1600">
+              <a:defRPr sz="1400">
                 <a:solidFill>
                   <a:srgbClr val="000000"/>
                 </a:solidFill>
@@ -6042,56 +5855,7 @@
               </a:defRPr>
             </a:pPr>
             <a:r>
-              <a:rPr sz="1600">
-                <a:solidFill>
-                  <a:srgbClr val="000000"/>
-                </a:solidFill>
-                <a:latin typeface="Play"/>
-                <a:ea typeface="Play"/>
-                <a:cs typeface="Play"/>
-              </a:rPr>
-              <a:t>• 74 минуты на правки после ревью дизайнера</a:t>
-            </a:r>
-          </a:p>
-        </p:txBody>
-      </p:sp>
-      <p:sp>
-        <p:nvSpPr>
-          <p:cNvPr id="557" name="body_right"/>
-          <p:cNvSpPr txBox="1"/>
-          <p:nvPr/>
-        </p:nvSpPr>
-        <p:spPr>
-          <a:xfrm>
-            <a:off x="4583887" y="1414513"/>
-            <a:ext cx="4035247" cy="2851865"/>
-          </a:xfrm>
-          <a:prstGeom prst="rect">
-            <a:avLst/>
-          </a:prstGeom>
-          <a:noFill/>
-        </p:spPr>
-        <p:txBody>
-          <a:bodyPr wrap="square" lIns="76200" rIns="76200" tIns="50800" bIns="50800">
-            <a:spAutoFit/>
-          </a:bodyPr>
-          <a:lstStyle/>
-          <a:p>
-            <a:pPr algn="l">
-              <a:spcAft>
-                <a:spcPts val="300"/>
-              </a:spcAft>
-              <a:defRPr sz="1600">
-                <a:solidFill>
-                  <a:srgbClr val="000000"/>
-                </a:solidFill>
-                <a:latin typeface="Play"/>
-                <a:ea typeface="Play"/>
-                <a:cs typeface="Play"/>
-              </a:defRPr>
-            </a:pPr>
-            <a:r>
-              <a:rPr sz="1600">
+              <a:rPr sz="1400">
                 <a:solidFill>
                   <a:srgbClr val="000000"/>
                 </a:solidFill>
@@ -6107,7 +5871,7 @@
               <a:spcAft>
                 <a:spcPts val="300"/>
               </a:spcAft>
-              <a:defRPr sz="1600">
+              <a:defRPr sz="1400">
                 <a:solidFill>
                   <a:srgbClr val="000000"/>
                 </a:solidFill>
@@ -6117,7 +5881,7 @@
               </a:defRPr>
             </a:pPr>
             <a:r>
-              <a:rPr sz="1600">
+              <a:rPr sz="1400">
                 <a:solidFill>
                   <a:srgbClr val="000000"/>
                 </a:solidFill>
@@ -6125,11 +5889,55 @@
                 <a:ea typeface="Play"/>
                 <a:cs typeface="Play"/>
               </a:rPr>
-              <a:t>• Дизайн‑отдел из 4 человек закрывает 11 запросов в неделю</a:t>
+              <a:t>• 4 дизайнера закрывают 11 запросов в неделю</a:t>
+            </a:r>
+          </a:p>
+          <a:p>
+            <a:pPr algn="l">
+              <a:spcAft>
+                <a:spcPts val="300"/>
+              </a:spcAft>
+              <a:defRPr sz="1400">
+                <a:solidFill>
+                  <a:srgbClr val="000000"/>
+                </a:solidFill>
+                <a:latin typeface="Play"/>
+                <a:ea typeface="Play"/>
+                <a:cs typeface="Play"/>
+              </a:defRPr>
+            </a:pPr>
+            <a:r>
+              <a:rPr sz="1400">
+                <a:solidFill>
+                  <a:srgbClr val="000000"/>
+                </a:solidFill>
+                <a:latin typeface="Play"/>
+                <a:ea typeface="Play"/>
+                <a:cs typeface="Play"/>
+              </a:rPr>
+              <a:t>• Средний срок ожидания 6 рабочих дней</a:t>
             </a:r>
           </a:p>
         </p:txBody>
       </p:sp>
+      <p:graphicFrame>
+        <p:nvGraphicFramePr>
+          <p:cNvPr id="557" name="Chart 556"/>
+          <p:cNvGraphicFramePr>
+            <a:graphicFrameLocks noGrp="1"/>
+          </p:cNvGraphicFramePr>
+          <p:nvPr/>
+        </p:nvGraphicFramePr>
+        <p:xfrm>
+          <a:off x="4583887" y="1414513"/>
+          <a:ext cx="4035247" cy="2851865"/>
+        </p:xfrm>
+        <a:graphic>
+          <a:graphicData uri="http://schemas.openxmlformats.org/drawingml/2006/chart">
+            <c:chart xmlns:c="http://schemas.openxmlformats.org/drawingml/2006/chart" r:id="rId2"/>
+          </a:graphicData>
+        </a:graphic>
+      </p:graphicFrame>
     </p:spTree>
   </p:cSld>
   <p:clrMapOvr>
@@ -6150,509 +5958,7 @@
       <p:grpSpPr/>
       <p:sp>
         <p:nvSpPr>
-          <p:cNvPr id="1027" name="Google Shape;1027;p65"/>
-          <p:cNvSpPr/>
-          <p:nvPr/>
-        </p:nvSpPr>
-        <p:spPr>
-          <a:xfrm>
-            <a:off x="6064222" y="1209852"/>
-            <a:ext cx="2793985" cy="3014270"/>
-          </a:xfrm>
-          <a:prstGeom prst="roundRect">
-            <a:avLst>
-              <a:gd fmla="val 3436" name="adj"/>
-            </a:avLst>
-          </a:prstGeom>
-          <a:solidFill>
-            <a:schemeClr val="lt2"/>
-          </a:solidFill>
-          <a:ln>
-            <a:noFill/>
-          </a:ln>
-        </p:spPr>
-        <p:txBody>
-          <a:bodyPr anchorCtr="0" anchor="ctr" bIns="91425" lIns="91425" spcFirstLastPara="1" rIns="91425" wrap="square" tIns="91425">
-            <a:noAutofit/>
-          </a:bodyPr>
-          <a:lstStyle/>
-          <a:p>
-            <a:pPr indent="0" lvl="0" marL="0" rtl="0" algn="l">
-              <a:spcBef>
-                <a:spcPts val="0"/>
-              </a:spcBef>
-              <a:spcAft>
-                <a:spcPts val="0"/>
-              </a:spcAft>
-              <a:buNone/>
-            </a:pPr>
-            <a:r>
-              <a:t/>
-            </a:r>
-            <a:endParaRPr/>
-          </a:p>
-        </p:txBody>
-      </p:sp>
-      <p:pic>
-        <p:nvPicPr>
-          <p:cNvPr descr=" " id="1028" name="Google Shape;1028;p65"/>
-          <p:cNvPicPr preferRelativeResize="0"/>
-          <p:nvPr/>
-        </p:nvPicPr>
-        <p:blipFill rotWithShape="1">
-          <a:blip r:embed="rId2">
-            <a:alphaModFix/>
-          </a:blip>
-          <a:srcRect b="0" l="0" r="0" t="0"/>
-          <a:stretch/>
-        </p:blipFill>
-        <p:spPr>
-          <a:xfrm>
-            <a:off x="8203313" y="3566983"/>
-            <a:ext cx="466723" cy="466664"/>
-          </a:xfrm>
-          <a:prstGeom prst="rect">
-            <a:avLst/>
-          </a:prstGeom>
-          <a:noFill/>
-          <a:ln>
-            <a:noFill/>
-          </a:ln>
-        </p:spPr>
-      </p:pic>
-      <p:sp>
-        <p:nvSpPr>
-          <p:cNvPr id="1029" name="Google Shape;1029;p65"/>
-          <p:cNvSpPr/>
-          <p:nvPr/>
-        </p:nvSpPr>
-        <p:spPr>
-          <a:xfrm>
-            <a:off x="3174981" y="1209852"/>
-            <a:ext cx="2793985" cy="3014270"/>
-          </a:xfrm>
-          <a:prstGeom prst="roundRect">
-            <a:avLst>
-              <a:gd fmla="val 3436" name="adj"/>
-            </a:avLst>
-          </a:prstGeom>
-          <a:solidFill>
-            <a:schemeClr val="lt2"/>
-          </a:solidFill>
-          <a:ln>
-            <a:noFill/>
-          </a:ln>
-        </p:spPr>
-        <p:txBody>
-          <a:bodyPr anchorCtr="0" anchor="ctr" bIns="91425" lIns="91425" spcFirstLastPara="1" rIns="91425" wrap="square" tIns="91425">
-            <a:noAutofit/>
-          </a:bodyPr>
-          <a:lstStyle/>
-          <a:p>
-            <a:pPr indent="0" lvl="0" marL="0" rtl="0" algn="l">
-              <a:spcBef>
-                <a:spcPts val="0"/>
-              </a:spcBef>
-              <a:spcAft>
-                <a:spcPts val="0"/>
-              </a:spcAft>
-              <a:buNone/>
-            </a:pPr>
-            <a:r>
-              <a:t/>
-            </a:r>
-            <a:endParaRPr/>
-          </a:p>
-        </p:txBody>
-      </p:sp>
-      <p:pic>
-        <p:nvPicPr>
-          <p:cNvPr descr=" " id="1030" name="Google Shape;1030;p65"/>
-          <p:cNvPicPr preferRelativeResize="0"/>
-          <p:nvPr/>
-        </p:nvPicPr>
-        <p:blipFill rotWithShape="1">
-          <a:blip r:embed="rId2">
-            <a:alphaModFix/>
-          </a:blip>
-          <a:srcRect b="0" l="0" r="0" t="0"/>
-          <a:stretch/>
-        </p:blipFill>
-        <p:spPr>
-          <a:xfrm>
-            <a:off x="5310249" y="3566983"/>
-            <a:ext cx="466723" cy="466664"/>
-          </a:xfrm>
-          <a:prstGeom prst="rect">
-            <a:avLst/>
-          </a:prstGeom>
-          <a:noFill/>
-          <a:ln>
-            <a:noFill/>
-          </a:ln>
-        </p:spPr>
-      </p:pic>
-      <p:sp>
-        <p:nvSpPr>
-          <p:cNvPr id="1031" name="Google Shape;1031;p65"/>
-          <p:cNvSpPr/>
-          <p:nvPr/>
-        </p:nvSpPr>
-        <p:spPr>
-          <a:xfrm>
-            <a:off x="285749" y="1209852"/>
-            <a:ext cx="2793985" cy="3014270"/>
-          </a:xfrm>
-          <a:prstGeom prst="roundRect">
-            <a:avLst>
-              <a:gd fmla="val 3436" name="adj"/>
-            </a:avLst>
-          </a:prstGeom>
-          <a:solidFill>
-            <a:schemeClr val="lt2"/>
-          </a:solidFill>
-          <a:ln>
-            <a:noFill/>
-          </a:ln>
-        </p:spPr>
-        <p:txBody>
-          <a:bodyPr anchorCtr="0" anchor="ctr" bIns="91425" lIns="91425" spcFirstLastPara="1" rIns="91425" wrap="square" tIns="91425">
-            <a:noAutofit/>
-          </a:bodyPr>
-          <a:lstStyle/>
-          <a:p>
-            <a:pPr indent="0" lvl="0" marL="0" rtl="0" algn="l">
-              <a:spcBef>
-                <a:spcPts val="0"/>
-              </a:spcBef>
-              <a:spcAft>
-                <a:spcPts val="0"/>
-              </a:spcAft>
-              <a:buNone/>
-            </a:pPr>
-            <a:r>
-              <a:t/>
-            </a:r>
-            <a:endParaRPr/>
-          </a:p>
-        </p:txBody>
-      </p:sp>
-      <p:sp>
-        <p:nvSpPr>
-          <p:cNvPr id="1032" name="Google Shape;1032;p65"/>
-          <p:cNvSpPr/>
-          <p:nvPr/>
-        </p:nvSpPr>
-        <p:spPr>
-          <a:xfrm>
-            <a:off x="285748" y="286047"/>
-            <a:ext cx="8572456" cy="3938075"/>
-          </a:xfrm>
-          <a:prstGeom prst="rect">
-            <a:avLst/>
-          </a:prstGeom>
-          <a:noFill/>
-          <a:ln>
-            <a:noFill/>
-          </a:ln>
-        </p:spPr>
-        <p:txBody>
-          <a:bodyPr anchorCtr="0" anchor="ctr" bIns="91425" lIns="91425" spcFirstLastPara="1" rIns="91425" wrap="square" tIns="91425">
-            <a:noAutofit/>
-          </a:bodyPr>
-          <a:lstStyle/>
-          <a:p>
-            <a:pPr indent="0" lvl="0" marL="0" rtl="0" algn="l">
-              <a:spcBef>
-                <a:spcPts val="0"/>
-              </a:spcBef>
-              <a:spcAft>
-                <a:spcPts val="0"/>
-              </a:spcAft>
-              <a:buNone/>
-            </a:pPr>
-            <a:r>
-              <a:t/>
-            </a:r>
-            <a:endParaRPr/>
-          </a:p>
-        </p:txBody>
-      </p:sp>
-      <p:sp>
-        <p:nvSpPr>
-          <p:cNvPr id="1033" name="Google Shape;1033;p65"/>
-          <p:cNvSpPr/>
-          <p:nvPr/>
-        </p:nvSpPr>
-        <p:spPr>
-          <a:xfrm>
-            <a:off x="285748" y="1209852"/>
-            <a:ext cx="8572456" cy="3014270"/>
-          </a:xfrm>
-          <a:prstGeom prst="rect">
-            <a:avLst/>
-          </a:prstGeom>
-          <a:noFill/>
-          <a:ln>
-            <a:noFill/>
-          </a:ln>
-        </p:spPr>
-        <p:txBody>
-          <a:bodyPr anchorCtr="0" anchor="ctr" bIns="91425" lIns="91425" spcFirstLastPara="1" rIns="91425" wrap="square" tIns="91425">
-            <a:noAutofit/>
-          </a:bodyPr>
-          <a:lstStyle/>
-          <a:p>
-            <a:pPr indent="0" lvl="0" marL="0" rtl="0" algn="l">
-              <a:spcBef>
-                <a:spcPts val="0"/>
-              </a:spcBef>
-              <a:spcAft>
-                <a:spcPts val="0"/>
-              </a:spcAft>
-              <a:buNone/>
-            </a:pPr>
-            <a:r>
-              <a:t/>
-            </a:r>
-            <a:endParaRPr/>
-          </a:p>
-        </p:txBody>
-      </p:sp>
-      <p:sp>
-        <p:nvSpPr>
-          <p:cNvPr id="1037" name="Google Shape;1037;p65"/>
-          <p:cNvSpPr/>
-          <p:nvPr/>
-        </p:nvSpPr>
-        <p:spPr>
-          <a:xfrm>
-            <a:off x="2422509" y="3566983"/>
-            <a:ext cx="466723" cy="466664"/>
-          </a:xfrm>
-          <a:prstGeom prst="rect">
-            <a:avLst/>
-          </a:prstGeom>
-          <a:noFill/>
-          <a:ln>
-            <a:noFill/>
-          </a:ln>
-        </p:spPr>
-        <p:txBody>
-          <a:bodyPr anchorCtr="0" anchor="ctr" bIns="91425" lIns="91425" spcFirstLastPara="1" rIns="91425" wrap="square" tIns="91425">
-            <a:noAutofit/>
-          </a:bodyPr>
-          <a:lstStyle/>
-          <a:p>
-            <a:pPr indent="0" lvl="0" marL="0" rtl="0" algn="l">
-              <a:spcBef>
-                <a:spcPts val="0"/>
-              </a:spcBef>
-              <a:spcAft>
-                <a:spcPts val="0"/>
-              </a:spcAft>
-              <a:buNone/>
-            </a:pPr>
-            <a:r>
-              <a:t/>
-            </a:r>
-            <a:endParaRPr/>
-          </a:p>
-        </p:txBody>
-      </p:sp>
-      <p:pic>
-        <p:nvPicPr>
-          <p:cNvPr descr=" " id="1038" name="Google Shape;1038;p65"/>
-          <p:cNvPicPr preferRelativeResize="0"/>
-          <p:nvPr/>
-        </p:nvPicPr>
-        <p:blipFill rotWithShape="1">
-          <a:blip r:embed="rId2">
-            <a:alphaModFix/>
-          </a:blip>
-          <a:srcRect b="0" l="0" r="0" t="0"/>
-          <a:stretch/>
-        </p:blipFill>
-        <p:spPr>
-          <a:xfrm>
-            <a:off x="2422506" y="3566983"/>
-            <a:ext cx="466723" cy="466664"/>
-          </a:xfrm>
-          <a:prstGeom prst="rect">
-            <a:avLst/>
-          </a:prstGeom>
-          <a:noFill/>
-          <a:ln>
-            <a:noFill/>
-          </a:ln>
-        </p:spPr>
-      </p:pic>
-      <p:pic>
-        <p:nvPicPr>
-          <p:cNvPr descr=" " id="1039" name="Google Shape;1039;p65"/>
-          <p:cNvPicPr preferRelativeResize="0"/>
-          <p:nvPr/>
-        </p:nvPicPr>
-        <p:blipFill rotWithShape="1">
-          <a:blip r:embed="rId3">
-            <a:alphaModFix/>
-          </a:blip>
-          <a:srcRect b="0" l="0" r="0" t="0"/>
-          <a:stretch/>
-        </p:blipFill>
-        <p:spPr>
-          <a:xfrm>
-            <a:off x="2555859" y="3700316"/>
-            <a:ext cx="200024" cy="199999"/>
-          </a:xfrm>
-          <a:prstGeom prst="rect">
-            <a:avLst/>
-          </a:prstGeom>
-          <a:noFill/>
-          <a:ln>
-            <a:noFill/>
-          </a:ln>
-        </p:spPr>
-      </p:pic>
-      <p:sp>
-        <p:nvSpPr>
-          <p:cNvPr id="1043" name="Google Shape;1043;p65"/>
-          <p:cNvSpPr/>
-          <p:nvPr/>
-        </p:nvSpPr>
-        <p:spPr>
-          <a:xfrm>
-            <a:off x="5311741" y="3566983"/>
-            <a:ext cx="466723" cy="466664"/>
-          </a:xfrm>
-          <a:prstGeom prst="rect">
-            <a:avLst/>
-          </a:prstGeom>
-          <a:noFill/>
-          <a:ln>
-            <a:noFill/>
-          </a:ln>
-        </p:spPr>
-        <p:txBody>
-          <a:bodyPr anchorCtr="0" anchor="ctr" bIns="91425" lIns="91425" spcFirstLastPara="1" rIns="91425" wrap="square" tIns="91425">
-            <a:noAutofit/>
-          </a:bodyPr>
-          <a:lstStyle/>
-          <a:p>
-            <a:pPr indent="0" lvl="0" marL="0" rtl="0" algn="l">
-              <a:spcBef>
-                <a:spcPts val="0"/>
-              </a:spcBef>
-              <a:spcAft>
-                <a:spcPts val="0"/>
-              </a:spcAft>
-              <a:buNone/>
-            </a:pPr>
-            <a:r>
-              <a:t/>
-            </a:r>
-            <a:endParaRPr/>
-          </a:p>
-        </p:txBody>
-      </p:sp>
-      <p:pic>
-        <p:nvPicPr>
-          <p:cNvPr descr=" " id="1044" name="Google Shape;1044;p65"/>
-          <p:cNvPicPr preferRelativeResize="0"/>
-          <p:nvPr/>
-        </p:nvPicPr>
-        <p:blipFill rotWithShape="1">
-          <a:blip r:embed="rId3">
-            <a:alphaModFix/>
-          </a:blip>
-          <a:srcRect b="0" l="0" r="0" t="0"/>
-          <a:stretch/>
-        </p:blipFill>
-        <p:spPr>
-          <a:xfrm>
-            <a:off x="5445091" y="3700316"/>
-            <a:ext cx="200024" cy="199999"/>
-          </a:xfrm>
-          <a:prstGeom prst="rect">
-            <a:avLst/>
-          </a:prstGeom>
-          <a:noFill/>
-          <a:ln>
-            <a:noFill/>
-          </a:ln>
-        </p:spPr>
-      </p:pic>
-      <p:sp>
-        <p:nvSpPr>
-          <p:cNvPr id="1048" name="Google Shape;1048;p65"/>
-          <p:cNvSpPr/>
-          <p:nvPr/>
-        </p:nvSpPr>
-        <p:spPr>
-          <a:xfrm>
-            <a:off x="8200982" y="3566983"/>
-            <a:ext cx="466723" cy="466664"/>
-          </a:xfrm>
-          <a:prstGeom prst="rect">
-            <a:avLst/>
-          </a:prstGeom>
-          <a:noFill/>
-          <a:ln>
-            <a:noFill/>
-          </a:ln>
-        </p:spPr>
-        <p:txBody>
-          <a:bodyPr anchorCtr="0" anchor="ctr" bIns="91425" lIns="91425" spcFirstLastPara="1" rIns="91425" wrap="square" tIns="91425">
-            <a:noAutofit/>
-          </a:bodyPr>
-          <a:lstStyle/>
-          <a:p>
-            <a:pPr indent="0" lvl="0" marL="0" rtl="0" algn="l">
-              <a:spcBef>
-                <a:spcPts val="0"/>
-              </a:spcBef>
-              <a:spcAft>
-                <a:spcPts val="0"/>
-              </a:spcAft>
-              <a:buNone/>
-            </a:pPr>
-            <a:r>
-              <a:t/>
-            </a:r>
-            <a:endParaRPr/>
-          </a:p>
-        </p:txBody>
-      </p:sp>
-      <p:pic>
-        <p:nvPicPr>
-          <p:cNvPr descr=" " id="1049" name="Google Shape;1049;p65"/>
-          <p:cNvPicPr preferRelativeResize="0"/>
-          <p:nvPr/>
-        </p:nvPicPr>
-        <p:blipFill rotWithShape="1">
-          <a:blip r:embed="rId3">
-            <a:alphaModFix/>
-          </a:blip>
-          <a:srcRect b="0" l="0" r="0" t="0"/>
-          <a:stretch/>
-        </p:blipFill>
-        <p:spPr>
-          <a:xfrm>
-            <a:off x="8334332" y="3700316"/>
-            <a:ext cx="200024" cy="199999"/>
-          </a:xfrm>
-          <a:prstGeom prst="rect">
-            <a:avLst/>
-          </a:prstGeom>
-          <a:noFill/>
-          <a:ln>
-            <a:noFill/>
-          </a:ln>
-        </p:spPr>
-      </p:pic>
-      <p:sp>
-        <p:nvSpPr>
-          <p:cNvPr id="1050" name="title"/>
+          <p:cNvPr id="2" name="title"/>
           <p:cNvSpPr txBox="1"/>
           <p:nvPr/>
         </p:nvSpPr>
@@ -6701,174 +6007,6 @@
       </p:sp>
       <p:sp>
         <p:nvSpPr>
-          <p:cNvPr id="1051" name="body"/>
-          <p:cNvSpPr txBox="1"/>
-          <p:nvPr/>
-        </p:nvSpPr>
-        <p:spPr>
-          <a:xfrm>
-            <a:off x="274320" y="1414513"/>
-            <a:ext cx="8344814" cy="1046136"/>
-          </a:xfrm>
-          <a:prstGeom prst="rect">
-            <a:avLst/>
-          </a:prstGeom>
-          <a:noFill/>
-        </p:spPr>
-        <p:txBody>
-          <a:bodyPr wrap="square" lIns="76200" rIns="76200" tIns="50800" bIns="50800">
-            <a:spAutoFit/>
-          </a:bodyPr>
-          <a:lstStyle/>
-          <a:p>
-            <a:pPr algn="l">
-              <a:spcAft>
-                <a:spcPts val="300"/>
-              </a:spcAft>
-              <a:defRPr sz="1406">
-                <a:solidFill>
-                  <a:srgbClr val="000000"/>
-                </a:solidFill>
-                <a:latin typeface="Play"/>
-                <a:ea typeface="Play"/>
-                <a:cs typeface="Play"/>
-              </a:defRPr>
-            </a:pPr>
-            <a:r>
-              <a:rPr sz="1406">
-                <a:solidFill>
-                  <a:srgbClr val="000000"/>
-                </a:solidFill>
-                <a:latin typeface="Play"/>
-                <a:ea typeface="Play"/>
-                <a:cs typeface="Play"/>
-              </a:rPr>
-              <a:t>• Сервис принимает шаблон pptx и материалы</a:t>
-            </a:r>
-          </a:p>
-          <a:p>
-            <a:pPr algn="l">
-              <a:spcAft>
-                <a:spcPts val="300"/>
-              </a:spcAft>
-              <a:defRPr sz="1406">
-                <a:solidFill>
-                  <a:srgbClr val="000000"/>
-                </a:solidFill>
-                <a:latin typeface="Play"/>
-                <a:ea typeface="Play"/>
-                <a:cs typeface="Play"/>
-              </a:defRPr>
-            </a:pPr>
-            <a:r>
-              <a:rPr sz="1406">
-                <a:solidFill>
-                  <a:srgbClr val="000000"/>
-                </a:solidFill>
-                <a:latin typeface="Play"/>
-                <a:ea typeface="Play"/>
-                <a:cs typeface="Play"/>
-              </a:rPr>
-              <a:t>• Автоматически формирует дизайн‑систему и план колоды</a:t>
-            </a:r>
-          </a:p>
-          <a:p>
-            <a:pPr algn="l">
-              <a:spcAft>
-                <a:spcPts val="300"/>
-              </a:spcAft>
-              <a:defRPr sz="1406">
-                <a:solidFill>
-                  <a:srgbClr val="000000"/>
-                </a:solidFill>
-                <a:latin typeface="Play"/>
-                <a:ea typeface="Play"/>
-                <a:cs typeface="Play"/>
-              </a:defRPr>
-            </a:pPr>
-            <a:r>
-              <a:rPr sz="1406">
-                <a:solidFill>
-                  <a:srgbClr val="000000"/>
-                </a:solidFill>
-                <a:latin typeface="Play"/>
-                <a:ea typeface="Play"/>
-                <a:cs typeface="Play"/>
-              </a:rPr>
-              <a:t>• Экспорт в pptx, pdf и html с редактируемыми слайдами</a:t>
-            </a:r>
-          </a:p>
-        </p:txBody>
-      </p:sp>
-    </p:spTree>
-  </p:cSld>
-  <p:clrMapOvr>
-    <a:masterClrMapping/>
-  </p:clrMapOvr>
-</p:sld>
-</file>
-
-<file path=ppt/slides/slide58.xml><?xml version="1.0" encoding="utf-8"?>
-<p:sld xmlns:a="http://schemas.openxmlformats.org/drawingml/2006/main" xmlns:p="http://schemas.openxmlformats.org/presentationml/2006/main" xmlns:r="http://schemas.openxmlformats.org/officeDocument/2006/relationships">
-  <p:cSld>
-    <p:spTree>
-      <p:nvGrpSpPr>
-        <p:cNvPr id="1" name=""/>
-        <p:cNvGrpSpPr/>
-        <p:nvPr/>
-      </p:nvGrpSpPr>
-      <p:grpSpPr/>
-      <p:sp>
-        <p:nvSpPr>
-          <p:cNvPr id="2" name="title"/>
-          <p:cNvSpPr txBox="1"/>
-          <p:nvPr/>
-        </p:nvSpPr>
-        <p:spPr>
-          <a:xfrm>
-            <a:off x="274320" y="282943"/>
-            <a:ext cx="6792986" cy="617220"/>
-          </a:xfrm>
-          <a:prstGeom prst="rect">
-            <a:avLst/>
-          </a:prstGeom>
-          <a:noFill/>
-        </p:spPr>
-        <p:txBody>
-          <a:bodyPr wrap="square" lIns="76200" rIns="76200" tIns="50800" bIns="50800">
-            <a:spAutoFit/>
-          </a:bodyPr>
-          <a:lstStyle/>
-          <a:p>
-            <a:pPr algn="l">
-              <a:spcAft>
-                <a:spcPts val="300"/>
-              </a:spcAft>
-              <a:defRPr sz="2400">
-                <a:solidFill>
-                  <a:srgbClr val="000000"/>
-                </a:solidFill>
-                <a:latin typeface="Play"/>
-                <a:ea typeface="Play"/>
-                <a:cs typeface="Play"/>
-              </a:defRPr>
-            </a:pPr>
-            <a:r>
-              <a:rPr sz="2400">
-                <a:solidFill>
-                  <a:srgbClr val="000000"/>
-                </a:solidFill>
-                <a:latin typeface="Play"/>
-                <a:ea typeface="Play"/>
-                <a:cs typeface="Play"/>
-              </a:rPr>
-              <a:t>Ожидаемый эффект</a:t>
-            </a:r>
-          </a:p>
-        </p:txBody>
-      </p:sp>
-      <p:sp>
-        <p:nvSpPr>
           <p:cNvPr id="3" name="body_left"/>
           <p:cNvSpPr txBox="1"/>
           <p:nvPr/>
@@ -6911,7 +6049,7 @@
                 <a:ea typeface="Play"/>
                 <a:cs typeface="Play"/>
               </a:rPr>
-              <a:t>• 68 презентаций собраны за 6 недель пилота</a:t>
+              <a:t>• Принимает шаблон pptx и материалы</a:t>
             </a:r>
           </a:p>
           <a:p>
@@ -6937,7 +6075,7 @@
                 <a:ea typeface="Play"/>
                 <a:cs typeface="Play"/>
               </a:rPr>
-              <a:t>• Средняя сборка 12 слайдов теперь 4 минуты</a:t>
+              <a:t>• Генерирует колоду по дизайн‑системе</a:t>
             </a:r>
           </a:p>
           <a:p>
@@ -6963,7 +6101,7 @@
                 <a:ea typeface="Play"/>
                 <a:cs typeface="Play"/>
               </a:rPr>
-              <a:t>• Время до первой версии сократилось с 6 дней до 1</a:t>
+              <a:t>• Аудит качества проверяет каждый элемент</a:t>
             </a:r>
           </a:p>
         </p:txBody>
@@ -7012,7 +6150,7 @@
                 <a:ea typeface="Play"/>
                 <a:cs typeface="Play"/>
               </a:rPr>
-              <a:t>• Нарушений фирменного стиля 2 из 68, исправлены автоматически</a:t>
+              <a:t>• Экспорт в pptx, pdf и html</a:t>
             </a:r>
           </a:p>
           <a:p>
@@ -7038,7 +6176,7 @@
                 <a:ea typeface="Play"/>
                 <a:cs typeface="Play"/>
               </a:rPr>
-              <a:t>• Дизайнеры закрыли 38 запросов вместо 11 в неделю</a:t>
+              <a:t>• Слайды остаются редактируемыми</a:t>
             </a:r>
           </a:p>
         </p:txBody>
@@ -7051,7 +6189,7 @@
 </p:sld>
 </file>
 
-<file path=ppt/slides/slide59.xml><?xml version="1.0" encoding="utf-8"?>
+<file path=ppt/slides/slide58.xml><?xml version="1.0" encoding="utf-8"?>
 <p:sld xmlns:a="http://schemas.openxmlformats.org/drawingml/2006/main" xmlns:p="http://schemas.openxmlformats.org/presentationml/2006/main" xmlns:r="http://schemas.openxmlformats.org/officeDocument/2006/relationships">
   <p:cSld>
     <p:spTree>
@@ -7131,49 +6269,6 @@
       </p:sp>
       <p:sp>
         <p:nvSpPr>
-          <p:cNvPr id="2387" name="Google Shape;2387;p88"/>
-          <p:cNvSpPr/>
-          <p:nvPr/>
-        </p:nvSpPr>
-        <p:spPr>
-          <a:xfrm>
-            <a:off x="319086" y="1933658"/>
-            <a:ext cx="138112" cy="138095"/>
-          </a:xfrm>
-          <a:prstGeom prst="ellipse">
-            <a:avLst/>
-          </a:prstGeom>
-          <a:solidFill>
-            <a:srgbClr val="0077FF"/>
-          </a:solidFill>
-          <a:ln>
-            <a:noFill/>
-          </a:ln>
-        </p:spPr>
-        <p:txBody>
-          <a:bodyPr anchorCtr="0" anchor="ctr" bIns="91425" lIns="91425" spcFirstLastPara="1" rIns="91425" wrap="square" tIns="91425">
-            <a:noAutofit/>
-          </a:bodyPr>
-          <a:lstStyle/>
-          <a:p>
-            <a:pPr indent="0" lvl="0" marL="0" rtl="0" algn="l">
-              <a:spcBef>
-                <a:spcPts val="0"/>
-              </a:spcBef>
-              <a:spcAft>
-                <a:spcPts val="0"/>
-              </a:spcAft>
-              <a:buNone/>
-            </a:pPr>
-            <a:r>
-              <a:t/>
-            </a:r>
-            <a:endParaRPr/>
-          </a:p>
-        </p:txBody>
-      </p:sp>
-      <p:sp>
-        <p:nvSpPr>
           <p:cNvPr id="2388" name="Google Shape;2388;p88"/>
           <p:cNvSpPr/>
           <p:nvPr/>
@@ -7215,49 +6310,6 @@
       </p:sp>
       <p:sp>
         <p:nvSpPr>
-          <p:cNvPr id="2389" name="Google Shape;2389;p88"/>
-          <p:cNvSpPr/>
-          <p:nvPr/>
-        </p:nvSpPr>
-        <p:spPr>
-          <a:xfrm>
-            <a:off x="2600312" y="1933658"/>
-            <a:ext cx="138112" cy="138095"/>
-          </a:xfrm>
-          <a:prstGeom prst="ellipse">
-            <a:avLst/>
-          </a:prstGeom>
-          <a:solidFill>
-            <a:srgbClr val="0077FF"/>
-          </a:solidFill>
-          <a:ln>
-            <a:noFill/>
-          </a:ln>
-        </p:spPr>
-        <p:txBody>
-          <a:bodyPr anchorCtr="0" anchor="ctr" bIns="91425" lIns="91425" spcFirstLastPara="1" rIns="91425" wrap="square" tIns="91425">
-            <a:noAutofit/>
-          </a:bodyPr>
-          <a:lstStyle/>
-          <a:p>
-            <a:pPr indent="0" lvl="0" marL="0" rtl="0" algn="l">
-              <a:spcBef>
-                <a:spcPts val="0"/>
-              </a:spcBef>
-              <a:spcAft>
-                <a:spcPts val="0"/>
-              </a:spcAft>
-              <a:buNone/>
-            </a:pPr>
-            <a:r>
-              <a:t/>
-            </a:r>
-            <a:endParaRPr/>
-          </a:p>
-        </p:txBody>
-      </p:sp>
-      <p:sp>
-        <p:nvSpPr>
           <p:cNvPr id="2390" name="Google Shape;2390;p88"/>
           <p:cNvSpPr/>
           <p:nvPr/>
@@ -7299,49 +6351,6 @@
       </p:sp>
       <p:sp>
         <p:nvSpPr>
-          <p:cNvPr id="2391" name="Google Shape;2391;p88"/>
-          <p:cNvSpPr/>
-          <p:nvPr/>
-        </p:nvSpPr>
-        <p:spPr>
-          <a:xfrm>
-            <a:off x="4881537" y="1933658"/>
-            <a:ext cx="138112" cy="138095"/>
-          </a:xfrm>
-          <a:prstGeom prst="ellipse">
-            <a:avLst/>
-          </a:prstGeom>
-          <a:solidFill>
-            <a:srgbClr val="0077FF"/>
-          </a:solidFill>
-          <a:ln>
-            <a:noFill/>
-          </a:ln>
-        </p:spPr>
-        <p:txBody>
-          <a:bodyPr anchorCtr="0" anchor="ctr" bIns="91425" lIns="91425" spcFirstLastPara="1" rIns="91425" wrap="square" tIns="91425">
-            <a:noAutofit/>
-          </a:bodyPr>
-          <a:lstStyle/>
-          <a:p>
-            <a:pPr indent="0" lvl="0" marL="0" rtl="0" algn="l">
-              <a:spcBef>
-                <a:spcPts val="0"/>
-              </a:spcBef>
-              <a:spcAft>
-                <a:spcPts val="0"/>
-              </a:spcAft>
-              <a:buNone/>
-            </a:pPr>
-            <a:r>
-              <a:t/>
-            </a:r>
-            <a:endParaRPr/>
-          </a:p>
-        </p:txBody>
-      </p:sp>
-      <p:sp>
-        <p:nvSpPr>
           <p:cNvPr id="2392" name="Google Shape;2392;p88"/>
           <p:cNvSpPr/>
           <p:nvPr/>
@@ -7355,49 +6364,6 @@
             <a:avLst/>
           </a:prstGeom>
           <a:noFill/>
-          <a:ln>
-            <a:noFill/>
-          </a:ln>
-        </p:spPr>
-        <p:txBody>
-          <a:bodyPr anchorCtr="0" anchor="ctr" bIns="91425" lIns="91425" spcFirstLastPara="1" rIns="91425" wrap="square" tIns="91425">
-            <a:noAutofit/>
-          </a:bodyPr>
-          <a:lstStyle/>
-          <a:p>
-            <a:pPr indent="0" lvl="0" marL="0" rtl="0" algn="l">
-              <a:spcBef>
-                <a:spcPts val="0"/>
-              </a:spcBef>
-              <a:spcAft>
-                <a:spcPts val="0"/>
-              </a:spcAft>
-              <a:buNone/>
-            </a:pPr>
-            <a:r>
-              <a:t/>
-            </a:r>
-            <a:endParaRPr/>
-          </a:p>
-        </p:txBody>
-      </p:sp>
-      <p:sp>
-        <p:nvSpPr>
-          <p:cNvPr id="2393" name="Google Shape;2393;p88"/>
-          <p:cNvSpPr/>
-          <p:nvPr/>
-        </p:nvSpPr>
-        <p:spPr>
-          <a:xfrm>
-            <a:off x="7162763" y="1933658"/>
-            <a:ext cx="138112" cy="138095"/>
-          </a:xfrm>
-          <a:prstGeom prst="ellipse">
-            <a:avLst/>
-          </a:prstGeom>
-          <a:solidFill>
-            <a:srgbClr val="0077FF"/>
-          </a:solidFill>
           <a:ln>
             <a:noFill/>
           </a:ln>
@@ -7494,49 +6460,6 @@
       </p:sp>
       <p:sp>
         <p:nvSpPr>
-          <p:cNvPr id="2396" name="Google Shape;2396;p88"/>
-          <p:cNvSpPr/>
-          <p:nvPr/>
-        </p:nvSpPr>
-        <p:spPr>
-          <a:xfrm>
-            <a:off x="319086" y="3647935"/>
-            <a:ext cx="138112" cy="138095"/>
-          </a:xfrm>
-          <a:prstGeom prst="ellipse">
-            <a:avLst/>
-          </a:prstGeom>
-          <a:solidFill>
-            <a:srgbClr val="0077FF"/>
-          </a:solidFill>
-          <a:ln>
-            <a:noFill/>
-          </a:ln>
-        </p:spPr>
-        <p:txBody>
-          <a:bodyPr anchorCtr="0" anchor="ctr" bIns="91425" lIns="91425" spcFirstLastPara="1" rIns="91425" wrap="square" tIns="91425">
-            <a:noAutofit/>
-          </a:bodyPr>
-          <a:lstStyle/>
-          <a:p>
-            <a:pPr indent="0" lvl="0" marL="0" rtl="0" algn="l">
-              <a:spcBef>
-                <a:spcPts val="0"/>
-              </a:spcBef>
-              <a:spcAft>
-                <a:spcPts val="0"/>
-              </a:spcAft>
-              <a:buNone/>
-            </a:pPr>
-            <a:r>
-              <a:t/>
-            </a:r>
-            <a:endParaRPr/>
-          </a:p>
-        </p:txBody>
-      </p:sp>
-      <p:sp>
-        <p:nvSpPr>
           <p:cNvPr id="2397" name="Google Shape;2397;p88"/>
           <p:cNvSpPr/>
           <p:nvPr/>
@@ -7578,93 +6501,7 @@
       </p:sp>
       <p:sp>
         <p:nvSpPr>
-          <p:cNvPr id="2398" name="Google Shape;2398;p88"/>
-          <p:cNvSpPr/>
-          <p:nvPr/>
-        </p:nvSpPr>
-        <p:spPr>
-          <a:xfrm>
-            <a:off x="2600312" y="3647935"/>
-            <a:ext cx="138112" cy="138095"/>
-          </a:xfrm>
-          <a:prstGeom prst="ellipse">
-            <a:avLst/>
-          </a:prstGeom>
-          <a:solidFill>
-            <a:srgbClr val="0077FF"/>
-          </a:solidFill>
-          <a:ln>
-            <a:noFill/>
-          </a:ln>
-        </p:spPr>
-        <p:txBody>
-          <a:bodyPr anchorCtr="0" anchor="ctr" bIns="91425" lIns="91425" spcFirstLastPara="1" rIns="91425" wrap="square" tIns="91425">
-            <a:noAutofit/>
-          </a:bodyPr>
-          <a:lstStyle/>
-          <a:p>
-            <a:pPr indent="0" lvl="0" marL="0" rtl="0" algn="l">
-              <a:spcBef>
-                <a:spcPts val="0"/>
-              </a:spcBef>
-              <a:spcAft>
-                <a:spcPts val="0"/>
-              </a:spcAft>
-              <a:buNone/>
-            </a:pPr>
-            <a:r>
-              <a:t/>
-            </a:r>
-            <a:endParaRPr/>
-          </a:p>
-        </p:txBody>
-      </p:sp>
-      <p:sp>
-        <p:nvSpPr>
-          <p:cNvPr id="2400" name="Google Shape;2400;p88"/>
-          <p:cNvSpPr/>
-          <p:nvPr/>
-        </p:nvSpPr>
-        <p:spPr>
-          <a:xfrm>
-            <a:off x="4881537" y="3647935"/>
-            <a:ext cx="138112" cy="138095"/>
-          </a:xfrm>
-          <a:prstGeom prst="ellipse">
-            <a:avLst/>
-          </a:prstGeom>
-          <a:solidFill>
-            <a:srgbClr val="0077FF"/>
-          </a:solidFill>
-          <a:ln>
-            <a:noFill/>
-          </a:ln>
-        </p:spPr>
-        <p:txBody>
-          <a:bodyPr anchorCtr="0" anchor="ctr" bIns="91425" lIns="91425" spcFirstLastPara="1" rIns="91425" wrap="square" tIns="91425">
-            <a:noAutofit/>
-          </a:bodyPr>
-          <a:lstStyle/>
-          <a:p>
-            <a:pPr indent="0" lvl="0" marL="0" rtl="0" algn="l">
-              <a:spcBef>
-                <a:spcPts val="0"/>
-              </a:spcBef>
-              <a:spcAft>
-                <a:spcPts val="0"/>
-              </a:spcAft>
-              <a:buNone/>
-            </a:pPr>
-            <a:r>
-              <a:t/>
-            </a:r>
-            <a:endParaRPr/>
-          </a:p>
-        </p:txBody>
-      </p:sp>
-      <p:sp>
-        <p:nvSpPr>
-          <p:cNvPr id="2401" name="title"/>
+          <p:cNvPr id="2398" name="title"/>
           <p:cNvSpPr txBox="1"/>
           <p:nvPr/>
         </p:nvSpPr>
@@ -7706,26 +6543,435 @@
                 <a:ea typeface="Play"/>
                 <a:cs typeface="Play"/>
               </a:rPr>
-              <a:t>Сравнение времени сборки</a:t>
+              <a:t>Ожидаемый эффект</a:t>
             </a:r>
           </a:p>
         </p:txBody>
       </p:sp>
       <p:graphicFrame>
         <p:nvGraphicFramePr>
-          <p:cNvPr id="2402" name="Chart 2401"/>
+          <p:cNvPr id="2399" name="Table 2398"/>
           <p:cNvGraphicFramePr>
             <a:graphicFrameLocks noGrp="1"/>
           </p:cNvGraphicFramePr>
           <p:nvPr/>
         </p:nvGraphicFramePr>
         <p:xfrm>
-          <a:off x="4583887" y="2071750"/>
-          <a:ext cx="4035247" cy="1576174"/>
+          <a:off x="4583887" y="2009822"/>
+          <a:ext cx="4035247" cy="1674466"/>
         </p:xfrm>
         <a:graphic>
-          <a:graphicData uri="http://schemas.openxmlformats.org/drawingml/2006/chart">
-            <c:chart xmlns:c="http://schemas.openxmlformats.org/drawingml/2006/chart" r:id="rId4"/>
+          <a:graphicData uri="http://schemas.openxmlformats.org/drawingml/2006/table">
+            <a:tbl>
+              <a:tblPr firstRow="1" bandRow="1">
+                <a:tableStyleId>{5C22544A-7EE6-4342-B048-85BDC9FD1C3A}</a:tableStyleId>
+              </a:tblPr>
+              <a:tblGrid>
+                <a:gridCol w="1345082"/>
+                <a:gridCol w="1345082"/>
+                <a:gridCol w="1345083"/>
+              </a:tblGrid>
+              <a:tr h="334893">
+                <a:tc>
+                  <a:txBody>
+                    <a:bodyPr/>
+                    <a:lstStyle/>
+                    <a:p>
+                      <a:pPr>
+                        <a:defRPr sz="1300" b="1">
+                          <a:solidFill>
+                            <a:srgbClr val="FFFFFF"/>
+                          </a:solidFill>
+                          <a:latin typeface="Play"/>
+                          <a:ea typeface="Play"/>
+                          <a:cs typeface="Play"/>
+                        </a:defRPr>
+                      </a:pPr>
+                      <a:r>
+                        <a:t>Метрика</a:t>
+                      </a:r>
+                    </a:p>
+                  </a:txBody>
+                  <a:tcPr>
+                    <a:solidFill>
+                      <a:srgbClr val="0077FF"/>
+                    </a:solidFill>
+                  </a:tcPr>
+                </a:tc>
+                <a:tc>
+                  <a:txBody>
+                    <a:bodyPr/>
+                    <a:lstStyle/>
+                    <a:p>
+                      <a:pPr>
+                        <a:defRPr sz="1300" b="1">
+                          <a:solidFill>
+                            <a:srgbClr val="FFFFFF"/>
+                          </a:solidFill>
+                          <a:latin typeface="Play"/>
+                          <a:ea typeface="Play"/>
+                          <a:cs typeface="Play"/>
+                        </a:defRPr>
+                      </a:pPr>
+                      <a:r>
+                        <a:t>Текущее</a:t>
+                      </a:r>
+                    </a:p>
+                  </a:txBody>
+                  <a:tcPr>
+                    <a:solidFill>
+                      <a:srgbClr val="0077FF"/>
+                    </a:solidFill>
+                  </a:tcPr>
+                </a:tc>
+                <a:tc>
+                  <a:txBody>
+                    <a:bodyPr/>
+                    <a:lstStyle/>
+                    <a:p>
+                      <a:pPr>
+                        <a:defRPr sz="1300" b="1">
+                          <a:solidFill>
+                            <a:srgbClr val="FFFFFF"/>
+                          </a:solidFill>
+                          <a:latin typeface="Play"/>
+                          <a:ea typeface="Play"/>
+                          <a:cs typeface="Play"/>
+                        </a:defRPr>
+                      </a:pPr>
+                      <a:r>
+                        <a:t>Пилот</a:t>
+                      </a:r>
+                    </a:p>
+                  </a:txBody>
+                  <a:tcPr>
+                    <a:solidFill>
+                      <a:srgbClr val="0077FF"/>
+                    </a:solidFill>
+                  </a:tcPr>
+                </a:tc>
+              </a:tr>
+              <a:tr h="334893">
+                <a:tc>
+                  <a:txBody>
+                    <a:bodyPr/>
+                    <a:lstStyle/>
+                    <a:p>
+                      <a:pPr>
+                        <a:defRPr sz="1300" b="0">
+                          <a:solidFill>
+                            <a:srgbClr val="000000"/>
+                          </a:solidFill>
+                          <a:latin typeface="Play"/>
+                          <a:ea typeface="Play"/>
+                          <a:cs typeface="Play"/>
+                        </a:defRPr>
+                      </a:pPr>
+                      <a:r>
+                        <a:t>Сборка (мин)</a:t>
+                      </a:r>
+                    </a:p>
+                  </a:txBody>
+                  <a:tcPr>
+                    <a:solidFill>
+                      <a:srgbClr val="FFFFFF"/>
+                    </a:solidFill>
+                  </a:tcPr>
+                </a:tc>
+                <a:tc>
+                  <a:txBody>
+                    <a:bodyPr/>
+                    <a:lstStyle/>
+                    <a:p>
+                      <a:pPr>
+                        <a:defRPr sz="1300" b="0">
+                          <a:solidFill>
+                            <a:srgbClr val="000000"/>
+                          </a:solidFill>
+                          <a:latin typeface="Play"/>
+                          <a:ea typeface="Play"/>
+                          <a:cs typeface="Play"/>
+                        </a:defRPr>
+                      </a:pPr>
+                      <a:r>
+                        <a:t>186</a:t>
+                      </a:r>
+                    </a:p>
+                  </a:txBody>
+                  <a:tcPr>
+                    <a:solidFill>
+                      <a:srgbClr val="FFFFFF"/>
+                    </a:solidFill>
+                  </a:tcPr>
+                </a:tc>
+                <a:tc>
+                  <a:txBody>
+                    <a:bodyPr/>
+                    <a:lstStyle/>
+                    <a:p>
+                      <a:pPr>
+                        <a:defRPr sz="1300" b="0">
+                          <a:solidFill>
+                            <a:srgbClr val="000000"/>
+                          </a:solidFill>
+                          <a:latin typeface="Play"/>
+                          <a:ea typeface="Play"/>
+                          <a:cs typeface="Play"/>
+                        </a:defRPr>
+                      </a:pPr>
+                      <a:r>
+                        <a:t>4</a:t>
+                      </a:r>
+                    </a:p>
+                  </a:txBody>
+                  <a:tcPr>
+                    <a:solidFill>
+                      <a:srgbClr val="FFFFFF"/>
+                    </a:solidFill>
+                  </a:tcPr>
+                </a:tc>
+              </a:tr>
+              <a:tr h="334893">
+                <a:tc>
+                  <a:txBody>
+                    <a:bodyPr/>
+                    <a:lstStyle/>
+                    <a:p>
+                      <a:pPr>
+                        <a:defRPr sz="1300" b="0">
+                          <a:solidFill>
+                            <a:srgbClr val="000000"/>
+                          </a:solidFill>
+                          <a:latin typeface="Play"/>
+                          <a:ea typeface="Play"/>
+                          <a:cs typeface="Play"/>
+                        </a:defRPr>
+                      </a:pPr>
+                      <a:r>
+                        <a:t>Время до первой версии (дней)</a:t>
+                      </a:r>
+                    </a:p>
+                  </a:txBody>
+                  <a:tcPr>
+                    <a:solidFill>
+                      <a:srgbClr val="FFFFFF"/>
+                    </a:solidFill>
+                  </a:tcPr>
+                </a:tc>
+                <a:tc>
+                  <a:txBody>
+                    <a:bodyPr/>
+                    <a:lstStyle/>
+                    <a:p>
+                      <a:pPr>
+                        <a:defRPr sz="1300" b="0">
+                          <a:solidFill>
+                            <a:srgbClr val="000000"/>
+                          </a:solidFill>
+                          <a:latin typeface="Play"/>
+                          <a:ea typeface="Play"/>
+                          <a:cs typeface="Play"/>
+                        </a:defRPr>
+                      </a:pPr>
+                      <a:r>
+                        <a:t>6</a:t>
+                      </a:r>
+                    </a:p>
+                  </a:txBody>
+                  <a:tcPr>
+                    <a:solidFill>
+                      <a:srgbClr val="FFFFFF"/>
+                    </a:solidFill>
+                  </a:tcPr>
+                </a:tc>
+                <a:tc>
+                  <a:txBody>
+                    <a:bodyPr/>
+                    <a:lstStyle/>
+                    <a:p>
+                      <a:pPr>
+                        <a:defRPr sz="1300" b="0">
+                          <a:solidFill>
+                            <a:srgbClr val="000000"/>
+                          </a:solidFill>
+                          <a:latin typeface="Play"/>
+                          <a:ea typeface="Play"/>
+                          <a:cs typeface="Play"/>
+                        </a:defRPr>
+                      </a:pPr>
+                      <a:r>
+                        <a:t>1</a:t>
+                      </a:r>
+                    </a:p>
+                  </a:txBody>
+                  <a:tcPr>
+                    <a:solidFill>
+                      <a:srgbClr val="FFFFFF"/>
+                    </a:solidFill>
+                  </a:tcPr>
+                </a:tc>
+              </a:tr>
+              <a:tr h="334893">
+                <a:tc>
+                  <a:txBody>
+                    <a:bodyPr/>
+                    <a:lstStyle/>
+                    <a:p>
+                      <a:pPr>
+                        <a:defRPr sz="1300" b="0">
+                          <a:solidFill>
+                            <a:srgbClr val="000000"/>
+                          </a:solidFill>
+                          <a:latin typeface="Play"/>
+                          <a:ea typeface="Play"/>
+                          <a:cs typeface="Play"/>
+                        </a:defRPr>
+                      </a:pPr>
+                      <a:r>
+                        <a:t>Нарушения (колод)</a:t>
+                      </a:r>
+                    </a:p>
+                  </a:txBody>
+                  <a:tcPr>
+                    <a:solidFill>
+                      <a:srgbClr val="FFFFFF"/>
+                    </a:solidFill>
+                  </a:tcPr>
+                </a:tc>
+                <a:tc>
+                  <a:txBody>
+                    <a:bodyPr/>
+                    <a:lstStyle/>
+                    <a:p>
+                      <a:pPr>
+                        <a:defRPr sz="1300" b="0">
+                          <a:solidFill>
+                            <a:srgbClr val="000000"/>
+                          </a:solidFill>
+                          <a:latin typeface="Play"/>
+                          <a:ea typeface="Play"/>
+                          <a:cs typeface="Play"/>
+                        </a:defRPr>
+                      </a:pPr>
+                      <a:r>
+                        <a:t>19</a:t>
+                      </a:r>
+                    </a:p>
+                  </a:txBody>
+                  <a:tcPr>
+                    <a:solidFill>
+                      <a:srgbClr val="FFFFFF"/>
+                    </a:solidFill>
+                  </a:tcPr>
+                </a:tc>
+                <a:tc>
+                  <a:txBody>
+                    <a:bodyPr/>
+                    <a:lstStyle/>
+                    <a:p>
+                      <a:pPr>
+                        <a:defRPr sz="1300" b="0">
+                          <a:solidFill>
+                            <a:srgbClr val="000000"/>
+                          </a:solidFill>
+                          <a:latin typeface="Play"/>
+                          <a:ea typeface="Play"/>
+                          <a:cs typeface="Play"/>
+                        </a:defRPr>
+                      </a:pPr>
+                      <a:r>
+                        <a:t>2</a:t>
+                      </a:r>
+                    </a:p>
+                  </a:txBody>
+                  <a:tcPr>
+                    <a:solidFill>
+                      <a:srgbClr val="FFFFFF"/>
+                    </a:solidFill>
+                  </a:tcPr>
+                </a:tc>
+              </a:tr>
+              <a:tr h="334894">
+                <a:tc>
+                  <a:txBody>
+                    <a:bodyPr/>
+                    <a:lstStyle/>
+                    <a:p>
+                      <a:pPr>
+                        <a:defRPr sz="1300" b="0">
+                          <a:solidFill>
+                            <a:srgbClr val="000000"/>
+                          </a:solidFill>
+                          <a:latin typeface="Play"/>
+                          <a:ea typeface="Play"/>
+                          <a:cs typeface="Play"/>
+                        </a:defRPr>
+                      </a:pPr>
+                      <a:r>
+                        <a:t>Запросы (запросов)</a:t>
+                      </a:r>
+                    </a:p>
+                  </a:txBody>
+                  <a:tcPr>
+                    <a:solidFill>
+                      <a:srgbClr val="FFFFFF"/>
+                    </a:solidFill>
+                  </a:tcPr>
+                </a:tc>
+                <a:tc>
+                  <a:txBody>
+                    <a:bodyPr/>
+                    <a:lstStyle/>
+                    <a:p>
+                      <a:pPr>
+                        <a:defRPr sz="1300" b="0">
+                          <a:solidFill>
+                            <a:srgbClr val="000000"/>
+                          </a:solidFill>
+                          <a:latin typeface="Play"/>
+                          <a:ea typeface="Play"/>
+                          <a:cs typeface="Play"/>
+                        </a:defRPr>
+                      </a:pPr>
+                      <a:r>
+                        <a:t>11</a:t>
+                      </a:r>
+                    </a:p>
+                  </a:txBody>
+                  <a:tcPr>
+                    <a:solidFill>
+                      <a:srgbClr val="FFFFFF"/>
+                    </a:solidFill>
+                  </a:tcPr>
+                </a:tc>
+                <a:tc>
+                  <a:txBody>
+                    <a:bodyPr/>
+                    <a:lstStyle/>
+                    <a:p>
+                      <a:pPr>
+                        <a:defRPr sz="1300" b="0">
+                          <a:solidFill>
+                            <a:srgbClr val="000000"/>
+                          </a:solidFill>
+                          <a:latin typeface="Play"/>
+                          <a:ea typeface="Play"/>
+                          <a:cs typeface="Play"/>
+                        </a:defRPr>
+                      </a:pPr>
+                      <a:r>
+                        <a:t>38</a:t>
+                      </a:r>
+                    </a:p>
+                  </a:txBody>
+                  <a:tcPr>
+                    <a:solidFill>
+                      <a:srgbClr val="FFFFFF"/>
+                    </a:solidFill>
+                  </a:tcPr>
+                </a:tc>
+              </a:tr>
+            </a:tbl>
           </a:graphicData>
         </a:graphic>
       </p:graphicFrame>
@@ -7737,7 +6983,7 @@
 </p:sld>
 </file>
 
-<file path=ppt/slides/slide60.xml><?xml version="1.0" encoding="utf-8"?>
+<file path=ppt/slides/slide59.xml><?xml version="1.0" encoding="utf-8"?>
 <p:sld xmlns:a="http://schemas.openxmlformats.org/drawingml/2006/main" xmlns:p="http://schemas.openxmlformats.org/presentationml/2006/main" xmlns:r="http://schemas.openxmlformats.org/officeDocument/2006/relationships">
   <p:cSld>
     <p:spTree>
@@ -7817,49 +7063,6 @@
       </p:sp>
       <p:sp>
         <p:nvSpPr>
-          <p:cNvPr id="2430" name="Google Shape;2430;p89"/>
-          <p:cNvSpPr/>
-          <p:nvPr/>
-        </p:nvSpPr>
-        <p:spPr>
-          <a:xfrm>
-            <a:off x="553415" y="2684063"/>
-            <a:ext cx="182375" cy="182352"/>
-          </a:xfrm>
-          <a:prstGeom prst="ellipse">
-            <a:avLst/>
-          </a:prstGeom>
-          <a:solidFill>
-            <a:srgbClr val="0077FF"/>
-          </a:solidFill>
-          <a:ln>
-            <a:noFill/>
-          </a:ln>
-        </p:spPr>
-        <p:txBody>
-          <a:bodyPr anchorCtr="0" anchor="ctr" bIns="91425" lIns="91425" spcFirstLastPara="1" rIns="91425" wrap="square" tIns="91425">
-            <a:noAutofit/>
-          </a:bodyPr>
-          <a:lstStyle/>
-          <a:p>
-            <a:pPr indent="0" lvl="0" marL="0" rtl="0" algn="l">
-              <a:spcBef>
-                <a:spcPts val="0"/>
-              </a:spcBef>
-              <a:spcAft>
-                <a:spcPts val="0"/>
-              </a:spcAft>
-              <a:buNone/>
-            </a:pPr>
-            <a:r>
-              <a:t/>
-            </a:r>
-            <a:endParaRPr/>
-          </a:p>
-        </p:txBody>
-      </p:sp>
-      <p:sp>
-        <p:nvSpPr>
           <p:cNvPr id="2431" name="Google Shape;2431;p89"/>
           <p:cNvSpPr/>
           <p:nvPr/>
@@ -7901,49 +7104,6 @@
       </p:sp>
       <p:sp>
         <p:nvSpPr>
-          <p:cNvPr id="2432" name="Google Shape;2432;p89"/>
-          <p:cNvSpPr/>
-          <p:nvPr/>
-        </p:nvSpPr>
-        <p:spPr>
-          <a:xfrm>
-            <a:off x="3565736" y="2684063"/>
-            <a:ext cx="182375" cy="182352"/>
-          </a:xfrm>
-          <a:prstGeom prst="ellipse">
-            <a:avLst/>
-          </a:prstGeom>
-          <a:solidFill>
-            <a:srgbClr val="0077FF"/>
-          </a:solidFill>
-          <a:ln>
-            <a:noFill/>
-          </a:ln>
-        </p:spPr>
-        <p:txBody>
-          <a:bodyPr anchorCtr="0" anchor="ctr" bIns="91425" lIns="91425" spcFirstLastPara="1" rIns="91425" wrap="square" tIns="91425">
-            <a:noAutofit/>
-          </a:bodyPr>
-          <a:lstStyle/>
-          <a:p>
-            <a:pPr indent="0" lvl="0" marL="0" rtl="0" algn="l">
-              <a:spcBef>
-                <a:spcPts val="0"/>
-              </a:spcBef>
-              <a:spcAft>
-                <a:spcPts val="0"/>
-              </a:spcAft>
-              <a:buNone/>
-            </a:pPr>
-            <a:r>
-              <a:t/>
-            </a:r>
-            <a:endParaRPr/>
-          </a:p>
-        </p:txBody>
-      </p:sp>
-      <p:sp>
-        <p:nvSpPr>
           <p:cNvPr id="2433" name="Google Shape;2433;p89"/>
           <p:cNvSpPr/>
           <p:nvPr/>
@@ -7985,50 +7145,7 @@
       </p:sp>
       <p:sp>
         <p:nvSpPr>
-          <p:cNvPr id="2434" name="Google Shape;2434;p89"/>
-          <p:cNvSpPr/>
-          <p:nvPr/>
-        </p:nvSpPr>
-        <p:spPr>
-          <a:xfrm>
-            <a:off x="6578067" y="2684063"/>
-            <a:ext cx="182375" cy="182352"/>
-          </a:xfrm>
-          <a:prstGeom prst="ellipse">
-            <a:avLst/>
-          </a:prstGeom>
-          <a:solidFill>
-            <a:srgbClr val="0077FF"/>
-          </a:solidFill>
-          <a:ln>
-            <a:noFill/>
-          </a:ln>
-        </p:spPr>
-        <p:txBody>
-          <a:bodyPr anchorCtr="0" anchor="ctr" bIns="91425" lIns="91425" spcFirstLastPara="1" rIns="91425" wrap="square" tIns="91425">
-            <a:noAutofit/>
-          </a:bodyPr>
-          <a:lstStyle/>
-          <a:p>
-            <a:pPr indent="0" lvl="0" marL="0" rtl="0" algn="l">
-              <a:spcBef>
-                <a:spcPts val="0"/>
-              </a:spcBef>
-              <a:spcAft>
-                <a:spcPts val="0"/>
-              </a:spcAft>
-              <a:buNone/>
-            </a:pPr>
-            <a:r>
-              <a:t/>
-            </a:r>
-            <a:endParaRPr/>
-          </a:p>
-        </p:txBody>
-      </p:sp>
-      <p:sp>
-        <p:nvSpPr>
-          <p:cNvPr id="2435" name="title"/>
+          <p:cNvPr id="2434" name="title"/>
           <p:cNvSpPr txBox="1"/>
           <p:nvPr/>
         </p:nvSpPr>
@@ -8070,704 +7187,21 @@
                 <a:ea typeface="Play"/>
                 <a:cs typeface="Play"/>
               </a:rPr>
-              <a:t>Сравнение времени до первой версии</a:t>
+              <a:t>Ресурсы и сроки</a:t>
             </a:r>
           </a:p>
         </p:txBody>
       </p:sp>
-      <p:graphicFrame>
-        <p:nvGraphicFramePr>
-          <p:cNvPr id="2436" name="Chart 2435"/>
-          <p:cNvGraphicFramePr>
-            <a:graphicFrameLocks noGrp="1"/>
-          </p:cNvGraphicFramePr>
-          <p:nvPr/>
-        </p:nvGraphicFramePr>
-        <p:xfrm>
-          <a:off x="4583887" y="1414513"/>
-          <a:ext cx="4035247" cy="1269570"/>
-        </p:xfrm>
-        <a:graphic>
-          <a:graphicData uri="http://schemas.openxmlformats.org/drawingml/2006/chart">
-            <c:chart xmlns:c="http://schemas.openxmlformats.org/drawingml/2006/chart" r:id="rId3"/>
-          </a:graphicData>
-        </a:graphic>
-      </p:graphicFrame>
-    </p:spTree>
-  </p:cSld>
-  <p:clrMapOvr>
-    <a:masterClrMapping/>
-  </p:clrMapOvr>
-</p:sld>
-</file>
-
-<file path=ppt/slides/slide61.xml><?xml version="1.0" encoding="utf-8"?>
-<p:sld xmlns:a="http://schemas.openxmlformats.org/drawingml/2006/main" xmlns:p="http://schemas.openxmlformats.org/presentationml/2006/main" xmlns:r="http://schemas.openxmlformats.org/officeDocument/2006/relationships">
-  <p:cSld>
-    <p:spTree>
-      <p:nvGrpSpPr>
-        <p:cNvPr id="1" name=""/>
-        <p:cNvGrpSpPr/>
-        <p:nvPr/>
-      </p:nvGrpSpPr>
-      <p:grpSpPr/>
-      <p:sp>
-        <p:nvSpPr>
-          <p:cNvPr id="662" name="Google Shape;662;p55"/>
-          <p:cNvSpPr/>
+      <p:sp>
+        <p:nvSpPr>
+          <p:cNvPr id="2435" name="body"/>
+          <p:cNvSpPr txBox="1"/>
           <p:nvPr/>
         </p:nvSpPr>
         <p:spPr>
           <a:xfrm>
-            <a:off x="8667705" y="4666977"/>
-            <a:ext cx="190499" cy="190475"/>
-          </a:xfrm>
-          <a:prstGeom prst="rect">
-            <a:avLst/>
-          </a:prstGeom>
-          <a:noFill/>
-          <a:ln>
-            <a:noFill/>
-          </a:ln>
-        </p:spPr>
-        <p:txBody>
-          <a:bodyPr anchorCtr="0" anchor="ctr" bIns="91425" lIns="91425" spcFirstLastPara="1" rIns="91425" wrap="square" tIns="91425">
-            <a:noAutofit/>
-          </a:bodyPr>
-          <a:lstStyle/>
-          <a:p>
-            <a:pPr indent="0" lvl="0" marL="0" rtl="0" algn="l">
-              <a:spcBef>
-                <a:spcPts val="0"/>
-              </a:spcBef>
-              <a:spcAft>
-                <a:spcPts val="0"/>
-              </a:spcAft>
-              <a:buNone/>
-            </a:pPr>
-            <a:r>
-              <a:t/>
-            </a:r>
-            <a:endParaRPr/>
-          </a:p>
-        </p:txBody>
-      </p:sp>
-      <p:sp>
-        <p:nvSpPr>
-          <p:cNvPr id="663" name="Google Shape;663;p55"/>
-          <p:cNvSpPr/>
-          <p:nvPr/>
-        </p:nvSpPr>
-        <p:spPr>
-          <a:xfrm>
-            <a:off x="285748" y="286047"/>
-            <a:ext cx="8572456" cy="3938075"/>
-          </a:xfrm>
-          <a:prstGeom prst="rect">
-            <a:avLst/>
-          </a:prstGeom>
-          <a:noFill/>
-          <a:ln>
-            <a:noFill/>
-          </a:ln>
-        </p:spPr>
-        <p:txBody>
-          <a:bodyPr anchorCtr="0" anchor="ctr" bIns="91425" lIns="91425" spcFirstLastPara="1" rIns="91425" wrap="square" tIns="91425">
-            <a:noAutofit/>
-          </a:bodyPr>
-          <a:lstStyle/>
-          <a:p>
-            <a:pPr indent="0" lvl="0" marL="0" rtl="0" algn="l">
-              <a:spcBef>
-                <a:spcPts val="0"/>
-              </a:spcBef>
-              <a:spcAft>
-                <a:spcPts val="0"/>
-              </a:spcAft>
-              <a:buNone/>
-            </a:pPr>
-            <a:r>
-              <a:t/>
-            </a:r>
-            <a:endParaRPr/>
-          </a:p>
-        </p:txBody>
-      </p:sp>
-      <p:sp>
-        <p:nvSpPr>
-          <p:cNvPr id="664" name="Google Shape;664;p55"/>
-          <p:cNvSpPr/>
-          <p:nvPr/>
-        </p:nvSpPr>
-        <p:spPr>
-          <a:xfrm>
-            <a:off x="285748" y="1209852"/>
-            <a:ext cx="8572456" cy="3014270"/>
-          </a:xfrm>
-          <a:prstGeom prst="rect">
-            <a:avLst/>
-          </a:prstGeom>
-          <a:noFill/>
-          <a:ln>
-            <a:noFill/>
-          </a:ln>
-        </p:spPr>
-        <p:txBody>
-          <a:bodyPr anchorCtr="0" anchor="ctr" bIns="91425" lIns="91425" spcFirstLastPara="1" rIns="91425" wrap="square" tIns="91425">
-            <a:noAutofit/>
-          </a:bodyPr>
-          <a:lstStyle/>
-          <a:p>
-            <a:pPr indent="0" lvl="0" marL="0" rtl="0" algn="l">
-              <a:spcBef>
-                <a:spcPts val="0"/>
-              </a:spcBef>
-              <a:spcAft>
-                <a:spcPts val="0"/>
-              </a:spcAft>
-              <a:buNone/>
-            </a:pPr>
-            <a:r>
-              <a:t/>
-            </a:r>
-            <a:endParaRPr/>
-          </a:p>
-        </p:txBody>
-      </p:sp>
-      <p:sp>
-        <p:nvSpPr>
-          <p:cNvPr id="665" name="Google Shape;665;p55"/>
-          <p:cNvSpPr/>
-          <p:nvPr/>
-        </p:nvSpPr>
-        <p:spPr>
-          <a:xfrm>
-            <a:off x="285749" y="1209852"/>
-            <a:ext cx="2071677" cy="3014270"/>
-          </a:xfrm>
-          <a:prstGeom prst="roundRect">
-            <a:avLst>
-              <a:gd fmla="val 4634" name="adj"/>
-            </a:avLst>
-          </a:prstGeom>
-          <a:solidFill>
-            <a:schemeClr val="lt2"/>
-          </a:solidFill>
-          <a:ln>
-            <a:noFill/>
-          </a:ln>
-        </p:spPr>
-        <p:txBody>
-          <a:bodyPr anchorCtr="0" anchor="ctr" bIns="91425" lIns="91425" spcFirstLastPara="1" rIns="91425" wrap="square" tIns="91425">
-            <a:noAutofit/>
-          </a:bodyPr>
-          <a:lstStyle/>
-          <a:p>
-            <a:pPr indent="0" lvl="0" marL="0" rtl="0" algn="l">
-              <a:spcBef>
-                <a:spcPts val="0"/>
-              </a:spcBef>
-              <a:spcAft>
-                <a:spcPts val="0"/>
-              </a:spcAft>
-              <a:buNone/>
-            </a:pPr>
-            <a:r>
-              <a:t/>
-            </a:r>
-            <a:endParaRPr/>
-          </a:p>
-        </p:txBody>
-      </p:sp>
-      <p:sp>
-        <p:nvSpPr>
-          <p:cNvPr id="666" name="Google Shape;666;p55"/>
-          <p:cNvSpPr/>
-          <p:nvPr/>
-        </p:nvSpPr>
-        <p:spPr>
-          <a:xfrm>
-            <a:off x="438148" y="1362233"/>
-            <a:ext cx="1766878" cy="342855"/>
-          </a:xfrm>
-          <a:prstGeom prst="rect">
-            <a:avLst/>
-          </a:prstGeom>
-          <a:noFill/>
-          <a:ln>
-            <a:noFill/>
-          </a:ln>
-        </p:spPr>
-        <p:txBody>
-          <a:bodyPr anchorCtr="0" anchor="ctr" bIns="91425" lIns="91425" spcFirstLastPara="1" rIns="91425" wrap="square" tIns="91425">
-            <a:noAutofit/>
-          </a:bodyPr>
-          <a:lstStyle/>
-          <a:p>
-            <a:pPr indent="0" lvl="0" marL="0" rtl="0" algn="l">
-              <a:spcBef>
-                <a:spcPts val="0"/>
-              </a:spcBef>
-              <a:spcAft>
-                <a:spcPts val="0"/>
-              </a:spcAft>
-              <a:buNone/>
-            </a:pPr>
-            <a:r>
-              <a:t/>
-            </a:r>
-            <a:endParaRPr/>
-          </a:p>
-        </p:txBody>
-      </p:sp>
-      <p:sp>
-        <p:nvSpPr>
-          <p:cNvPr id="667" name="Google Shape;667;p55"/>
-          <p:cNvSpPr/>
-          <p:nvPr/>
-        </p:nvSpPr>
-        <p:spPr>
-          <a:xfrm>
-            <a:off x="438148" y="1362233"/>
-            <a:ext cx="76199" cy="76190"/>
-          </a:xfrm>
-          <a:prstGeom prst="roundRect">
-            <a:avLst>
-              <a:gd fmla="val 31500" name="adj"/>
-            </a:avLst>
-          </a:prstGeom>
-          <a:solidFill>
-            <a:srgbClr val="0077FF"/>
-          </a:solidFill>
-          <a:ln>
-            <a:noFill/>
-          </a:ln>
-        </p:spPr>
-        <p:txBody>
-          <a:bodyPr anchorCtr="0" anchor="ctr" bIns="91425" lIns="91425" spcFirstLastPara="1" rIns="91425" wrap="square" tIns="91425">
-            <a:noAutofit/>
-          </a:bodyPr>
-          <a:lstStyle/>
-          <a:p>
-            <a:pPr indent="0" lvl="0" marL="0" rtl="0" algn="l">
-              <a:spcBef>
-                <a:spcPts val="0"/>
-              </a:spcBef>
-              <a:spcAft>
-                <a:spcPts val="0"/>
-              </a:spcAft>
-              <a:buNone/>
-            </a:pPr>
-            <a:r>
-              <a:t/>
-            </a:r>
-            <a:endParaRPr/>
-          </a:p>
-        </p:txBody>
-      </p:sp>
-      <p:sp>
-        <p:nvSpPr>
-          <p:cNvPr id="670" name="Google Shape;670;p55"/>
-          <p:cNvSpPr/>
-          <p:nvPr/>
-        </p:nvSpPr>
-        <p:spPr>
-          <a:xfrm>
-            <a:off x="2452675" y="1209852"/>
-            <a:ext cx="2071677" cy="3014270"/>
-          </a:xfrm>
-          <a:prstGeom prst="roundRect">
-            <a:avLst>
-              <a:gd fmla="val 4634" name="adj"/>
-            </a:avLst>
-          </a:prstGeom>
-          <a:solidFill>
-            <a:schemeClr val="lt2"/>
-          </a:solidFill>
-          <a:ln>
-            <a:noFill/>
-          </a:ln>
-        </p:spPr>
-        <p:txBody>
-          <a:bodyPr anchorCtr="0" anchor="ctr" bIns="91425" lIns="91425" spcFirstLastPara="1" rIns="91425" wrap="square" tIns="91425">
-            <a:noAutofit/>
-          </a:bodyPr>
-          <a:lstStyle/>
-          <a:p>
-            <a:pPr indent="0" lvl="0" marL="0" rtl="0" algn="l">
-              <a:spcBef>
-                <a:spcPts val="0"/>
-              </a:spcBef>
-              <a:spcAft>
-                <a:spcPts val="0"/>
-              </a:spcAft>
-              <a:buNone/>
-            </a:pPr>
-            <a:r>
-              <a:t/>
-            </a:r>
-            <a:endParaRPr/>
-          </a:p>
-        </p:txBody>
-      </p:sp>
-      <p:sp>
-        <p:nvSpPr>
-          <p:cNvPr id="671" name="Google Shape;671;p55"/>
-          <p:cNvSpPr/>
-          <p:nvPr/>
-        </p:nvSpPr>
-        <p:spPr>
-          <a:xfrm>
-            <a:off x="2605074" y="1362233"/>
-            <a:ext cx="1766878" cy="342855"/>
-          </a:xfrm>
-          <a:prstGeom prst="rect">
-            <a:avLst/>
-          </a:prstGeom>
-          <a:noFill/>
-          <a:ln>
-            <a:noFill/>
-          </a:ln>
-        </p:spPr>
-        <p:txBody>
-          <a:bodyPr anchorCtr="0" anchor="ctr" bIns="91425" lIns="91425" spcFirstLastPara="1" rIns="91425" wrap="square" tIns="91425">
-            <a:noAutofit/>
-          </a:bodyPr>
-          <a:lstStyle/>
-          <a:p>
-            <a:pPr indent="0" lvl="0" marL="0" rtl="0" algn="l">
-              <a:spcBef>
-                <a:spcPts val="0"/>
-              </a:spcBef>
-              <a:spcAft>
-                <a:spcPts val="0"/>
-              </a:spcAft>
-              <a:buNone/>
-            </a:pPr>
-            <a:r>
-              <a:t/>
-            </a:r>
-            <a:endParaRPr/>
-          </a:p>
-        </p:txBody>
-      </p:sp>
-      <p:sp>
-        <p:nvSpPr>
-          <p:cNvPr id="672" name="Google Shape;672;p55"/>
-          <p:cNvSpPr/>
-          <p:nvPr/>
-        </p:nvSpPr>
-        <p:spPr>
-          <a:xfrm>
-            <a:off x="2605074" y="1362233"/>
-            <a:ext cx="76199" cy="76190"/>
-          </a:xfrm>
-          <a:prstGeom prst="roundRect">
-            <a:avLst>
-              <a:gd fmla="val 31500" name="adj"/>
-            </a:avLst>
-          </a:prstGeom>
-          <a:solidFill>
-            <a:srgbClr val="0077FF"/>
-          </a:solidFill>
-          <a:ln>
-            <a:noFill/>
-          </a:ln>
-        </p:spPr>
-        <p:txBody>
-          <a:bodyPr anchorCtr="0" anchor="ctr" bIns="91425" lIns="91425" spcFirstLastPara="1" rIns="91425" wrap="square" tIns="91425">
-            <a:noAutofit/>
-          </a:bodyPr>
-          <a:lstStyle/>
-          <a:p>
-            <a:pPr indent="0" lvl="0" marL="0" rtl="0" algn="l">
-              <a:spcBef>
-                <a:spcPts val="0"/>
-              </a:spcBef>
-              <a:spcAft>
-                <a:spcPts val="0"/>
-              </a:spcAft>
-              <a:buNone/>
-            </a:pPr>
-            <a:r>
-              <a:t/>
-            </a:r>
-            <a:endParaRPr/>
-          </a:p>
-        </p:txBody>
-      </p:sp>
-      <p:sp>
-        <p:nvSpPr>
-          <p:cNvPr id="675" name="Google Shape;675;p55"/>
-          <p:cNvSpPr/>
-          <p:nvPr/>
-        </p:nvSpPr>
-        <p:spPr>
-          <a:xfrm>
-            <a:off x="4619601" y="1209852"/>
-            <a:ext cx="2071677" cy="3014270"/>
-          </a:xfrm>
-          <a:prstGeom prst="roundRect">
-            <a:avLst>
-              <a:gd fmla="val 4634" name="adj"/>
-            </a:avLst>
-          </a:prstGeom>
-          <a:solidFill>
-            <a:schemeClr val="lt2"/>
-          </a:solidFill>
-          <a:ln>
-            <a:noFill/>
-          </a:ln>
-        </p:spPr>
-        <p:txBody>
-          <a:bodyPr anchorCtr="0" anchor="ctr" bIns="91425" lIns="91425" spcFirstLastPara="1" rIns="91425" wrap="square" tIns="91425">
-            <a:noAutofit/>
-          </a:bodyPr>
-          <a:lstStyle/>
-          <a:p>
-            <a:pPr indent="0" lvl="0" marL="0" rtl="0" algn="l">
-              <a:spcBef>
-                <a:spcPts val="0"/>
-              </a:spcBef>
-              <a:spcAft>
-                <a:spcPts val="0"/>
-              </a:spcAft>
-              <a:buNone/>
-            </a:pPr>
-            <a:r>
-              <a:t/>
-            </a:r>
-            <a:endParaRPr/>
-          </a:p>
-        </p:txBody>
-      </p:sp>
-      <p:sp>
-        <p:nvSpPr>
-          <p:cNvPr id="676" name="Google Shape;676;p55"/>
-          <p:cNvSpPr/>
-          <p:nvPr/>
-        </p:nvSpPr>
-        <p:spPr>
-          <a:xfrm>
-            <a:off x="4772001" y="1362233"/>
-            <a:ext cx="1766878" cy="342855"/>
-          </a:xfrm>
-          <a:prstGeom prst="rect">
-            <a:avLst/>
-          </a:prstGeom>
-          <a:noFill/>
-          <a:ln>
-            <a:noFill/>
-          </a:ln>
-        </p:spPr>
-        <p:txBody>
-          <a:bodyPr anchorCtr="0" anchor="ctr" bIns="91425" lIns="91425" spcFirstLastPara="1" rIns="91425" wrap="square" tIns="91425">
-            <a:noAutofit/>
-          </a:bodyPr>
-          <a:lstStyle/>
-          <a:p>
-            <a:pPr indent="0" lvl="0" marL="0" rtl="0" algn="l">
-              <a:spcBef>
-                <a:spcPts val="0"/>
-              </a:spcBef>
-              <a:spcAft>
-                <a:spcPts val="0"/>
-              </a:spcAft>
-              <a:buNone/>
-            </a:pPr>
-            <a:r>
-              <a:t/>
-            </a:r>
-            <a:endParaRPr/>
-          </a:p>
-        </p:txBody>
-      </p:sp>
-      <p:sp>
-        <p:nvSpPr>
-          <p:cNvPr id="677" name="Google Shape;677;p55"/>
-          <p:cNvSpPr/>
-          <p:nvPr/>
-        </p:nvSpPr>
-        <p:spPr>
-          <a:xfrm>
-            <a:off x="4772001" y="1362233"/>
-            <a:ext cx="76199" cy="76190"/>
-          </a:xfrm>
-          <a:prstGeom prst="roundRect">
-            <a:avLst>
-              <a:gd fmla="val 31500" name="adj"/>
-            </a:avLst>
-          </a:prstGeom>
-          <a:solidFill>
-            <a:srgbClr val="0077FF"/>
-          </a:solidFill>
-          <a:ln>
-            <a:noFill/>
-          </a:ln>
-        </p:spPr>
-        <p:txBody>
-          <a:bodyPr anchorCtr="0" anchor="ctr" bIns="91425" lIns="91425" spcFirstLastPara="1" rIns="91425" wrap="square" tIns="91425">
-            <a:noAutofit/>
-          </a:bodyPr>
-          <a:lstStyle/>
-          <a:p>
-            <a:pPr indent="0" lvl="0" marL="0" rtl="0" algn="l">
-              <a:spcBef>
-                <a:spcPts val="0"/>
-              </a:spcBef>
-              <a:spcAft>
-                <a:spcPts val="0"/>
-              </a:spcAft>
-              <a:buNone/>
-            </a:pPr>
-            <a:r>
-              <a:t/>
-            </a:r>
-            <a:endParaRPr/>
-          </a:p>
-        </p:txBody>
-      </p:sp>
-      <p:sp>
-        <p:nvSpPr>
-          <p:cNvPr id="680" name="Google Shape;680;p55"/>
-          <p:cNvSpPr/>
-          <p:nvPr/>
-        </p:nvSpPr>
-        <p:spPr>
-          <a:xfrm>
-            <a:off x="6786527" y="1209852"/>
-            <a:ext cx="2071677" cy="3014270"/>
-          </a:xfrm>
-          <a:prstGeom prst="roundRect">
-            <a:avLst>
-              <a:gd fmla="val 4634" name="adj"/>
-            </a:avLst>
-          </a:prstGeom>
-          <a:solidFill>
-            <a:schemeClr val="lt2"/>
-          </a:solidFill>
-          <a:ln>
-            <a:noFill/>
-          </a:ln>
-        </p:spPr>
-        <p:txBody>
-          <a:bodyPr anchorCtr="0" anchor="ctr" bIns="91425" lIns="91425" spcFirstLastPara="1" rIns="91425" wrap="square" tIns="91425">
-            <a:noAutofit/>
-          </a:bodyPr>
-          <a:lstStyle/>
-          <a:p>
-            <a:pPr indent="0" lvl="0" marL="0" rtl="0" algn="l">
-              <a:spcBef>
-                <a:spcPts val="0"/>
-              </a:spcBef>
-              <a:spcAft>
-                <a:spcPts val="0"/>
-              </a:spcAft>
-              <a:buNone/>
-            </a:pPr>
-            <a:r>
-              <a:t/>
-            </a:r>
-            <a:endParaRPr/>
-          </a:p>
-        </p:txBody>
-      </p:sp>
-      <p:sp>
-        <p:nvSpPr>
-          <p:cNvPr id="681" name="Google Shape;681;p55"/>
-          <p:cNvSpPr/>
-          <p:nvPr/>
-        </p:nvSpPr>
-        <p:spPr>
-          <a:xfrm>
-            <a:off x="6938927" y="1362233"/>
-            <a:ext cx="1766878" cy="342855"/>
-          </a:xfrm>
-          <a:prstGeom prst="rect">
-            <a:avLst/>
-          </a:prstGeom>
-          <a:noFill/>
-          <a:ln>
-            <a:noFill/>
-          </a:ln>
-        </p:spPr>
-        <p:txBody>
-          <a:bodyPr anchorCtr="0" anchor="ctr" bIns="91425" lIns="91425" spcFirstLastPara="1" rIns="91425" wrap="square" tIns="91425">
-            <a:noAutofit/>
-          </a:bodyPr>
-          <a:lstStyle/>
-          <a:p>
-            <a:pPr indent="0" lvl="0" marL="0" rtl="0" algn="l">
-              <a:spcBef>
-                <a:spcPts val="0"/>
-              </a:spcBef>
-              <a:spcAft>
-                <a:spcPts val="0"/>
-              </a:spcAft>
-              <a:buNone/>
-            </a:pPr>
-            <a:r>
-              <a:t/>
-            </a:r>
-            <a:endParaRPr/>
-          </a:p>
-        </p:txBody>
-      </p:sp>
-      <p:sp>
-        <p:nvSpPr>
-          <p:cNvPr id="682" name="Google Shape;682;p55"/>
-          <p:cNvSpPr/>
-          <p:nvPr/>
-        </p:nvSpPr>
-        <p:spPr>
-          <a:xfrm>
-            <a:off x="6938927" y="1362233"/>
-            <a:ext cx="76199" cy="76190"/>
-          </a:xfrm>
-          <a:prstGeom prst="roundRect">
-            <a:avLst>
-              <a:gd fmla="val 31500" name="adj"/>
-            </a:avLst>
-          </a:prstGeom>
-          <a:solidFill>
-            <a:srgbClr val="0077FF"/>
-          </a:solidFill>
-          <a:ln>
-            <a:noFill/>
-          </a:ln>
-        </p:spPr>
-        <p:txBody>
-          <a:bodyPr anchorCtr="0" anchor="ctr" bIns="91425" lIns="91425" spcFirstLastPara="1" rIns="91425" wrap="square" tIns="91425">
-            <a:noAutofit/>
-          </a:bodyPr>
-          <a:lstStyle/>
-          <a:p>
-            <a:pPr indent="0" lvl="0" marL="0" rtl="0" algn="l">
-              <a:spcBef>
-                <a:spcPts val="0"/>
-              </a:spcBef>
-              <a:spcAft>
-                <a:spcPts val="0"/>
-              </a:spcAft>
-              <a:buNone/>
-            </a:pPr>
-            <a:r>
-              <a:t/>
-            </a:r>
-            <a:endParaRPr/>
-          </a:p>
-        </p:txBody>
-      </p:sp>
-      <p:sp>
-        <p:nvSpPr>
-          <p:cNvPr id="683" name="title"/>
-          <p:cNvSpPr txBox="1"/>
-          <p:nvPr/>
-        </p:nvSpPr>
-        <p:spPr>
-          <a:xfrm>
-            <a:off x="274320" y="282943"/>
-            <a:ext cx="6792986" cy="617220"/>
+            <a:off x="274320" y="1414513"/>
+            <a:ext cx="4035247" cy="1317558"/>
           </a:xfrm>
           <a:prstGeom prst="rect">
             <a:avLst/>
@@ -8784,7 +7218,7 @@
               <a:spcAft>
                 <a:spcPts val="300"/>
               </a:spcAft>
-              <a:defRPr sz="2400">
+              <a:defRPr sz="1225">
                 <a:solidFill>
                   <a:srgbClr val="000000"/>
                 </a:solidFill>
@@ -8794,7 +7228,7 @@
               </a:defRPr>
             </a:pPr>
             <a:r>
-              <a:rPr sz="2400">
+              <a:rPr sz="1225">
                 <a:solidFill>
                   <a:srgbClr val="000000"/>
                 </a:solidFill>
@@ -8802,38 +7236,15 @@
                 <a:ea typeface="Play"/>
                 <a:cs typeface="Play"/>
               </a:rPr>
-              <a:t>Ресурсы и затраты</a:t>
+              <a:t>• 2 vCPU / 2 GB RAM</a:t>
             </a:r>
           </a:p>
-        </p:txBody>
-      </p:sp>
-      <p:sp>
-        <p:nvSpPr>
-          <p:cNvPr id="684" name="body_left"/>
-          <p:cNvSpPr txBox="1"/>
-          <p:nvPr/>
-        </p:nvSpPr>
-        <p:spPr>
-          <a:xfrm>
-            <a:off x="274320" y="1969572"/>
-            <a:ext cx="4035247" cy="797991"/>
-          </a:xfrm>
-          <a:prstGeom prst="rect">
-            <a:avLst/>
-          </a:prstGeom>
-          <a:noFill/>
-        </p:spPr>
-        <p:txBody>
-          <a:bodyPr wrap="square" lIns="76200" rIns="76200" tIns="50800" bIns="50800">
-            <a:spAutoFit/>
-          </a:bodyPr>
-          <a:lstStyle/>
           <a:p>
             <a:pPr algn="l">
               <a:spcAft>
                 <a:spcPts val="300"/>
               </a:spcAft>
-              <a:defRPr sz="1406">
+              <a:defRPr sz="1225">
                 <a:solidFill>
                   <a:srgbClr val="000000"/>
                 </a:solidFill>
@@ -8843,7 +7254,7 @@
               </a:defRPr>
             </a:pPr>
             <a:r>
-              <a:rPr sz="1406">
+              <a:rPr sz="1225">
                 <a:solidFill>
                   <a:srgbClr val="000000"/>
                 </a:solidFill>
@@ -8851,7 +7262,7 @@
                 <a:ea typeface="Play"/>
                 <a:cs typeface="Play"/>
               </a:rPr>
-              <a:t>• Стоимость инференса за 6 недель 1 400 рублей</a:t>
+              <a:t>• 1 400 рублей за 6 недель</a:t>
             </a:r>
           </a:p>
           <a:p>
@@ -8859,7 +7270,7 @@
               <a:spcAft>
                 <a:spcPts val="300"/>
               </a:spcAft>
-              <a:defRPr sz="1406">
+              <a:defRPr sz="1225">
                 <a:solidFill>
                   <a:srgbClr val="000000"/>
                 </a:solidFill>
@@ -8869,7 +7280,7 @@
               </a:defRPr>
             </a:pPr>
             <a:r>
-              <a:rPr sz="1406">
+              <a:rPr sz="1225">
                 <a:solidFill>
                   <a:srgbClr val="000000"/>
                 </a:solidFill>
@@ -8877,38 +7288,15 @@
                 <a:ea typeface="Play"/>
                 <a:cs typeface="Play"/>
               </a:rPr>
-              <a:t>• Сервис работает на 2 vCPU / 2 ГБ RAM</a:t>
+              <a:t>• Модель gpt-oss-20b</a:t>
             </a:r>
           </a:p>
-        </p:txBody>
-      </p:sp>
-      <p:sp>
-        <p:nvSpPr>
-          <p:cNvPr id="685" name="body_right"/>
-          <p:cNvSpPr txBox="1"/>
-          <p:nvPr/>
-        </p:nvSpPr>
-        <p:spPr>
-          <a:xfrm>
-            <a:off x="4583887" y="1969572"/>
-            <a:ext cx="4035247" cy="1030122"/>
-          </a:xfrm>
-          <a:prstGeom prst="rect">
-            <a:avLst/>
-          </a:prstGeom>
-          <a:noFill/>
-        </p:spPr>
-        <p:txBody>
-          <a:bodyPr wrap="square" lIns="76200" rIns="76200" tIns="50800" bIns="50800">
-            <a:spAutoFit/>
-          </a:bodyPr>
-          <a:lstStyle/>
           <a:p>
             <a:pPr algn="l">
               <a:spcAft>
                 <a:spcPts val="300"/>
               </a:spcAft>
-              <a:defRPr sz="1406">
+              <a:defRPr sz="1225">
                 <a:solidFill>
                   <a:srgbClr val="000000"/>
                 </a:solidFill>
@@ -8918,7 +7306,7 @@
               </a:defRPr>
             </a:pPr>
             <a:r>
-              <a:rPr sz="1406">
+              <a:rPr sz="1225">
                 <a:solidFill>
                   <a:srgbClr val="000000"/>
                 </a:solidFill>
@@ -8926,7 +7314,7 @@
                 <a:ea typeface="Play"/>
                 <a:cs typeface="Play"/>
               </a:rPr>
-              <a:t>• Модель gpt‑oss‑20b подключается по OpenAI‑совместимому протоколу</a:t>
+              <a:t>• Подключение 4 команд, домен и HTTPS</a:t>
             </a:r>
           </a:p>
           <a:p>
@@ -8934,7 +7322,7 @@
               <a:spcAft>
                 <a:spcPts val="300"/>
               </a:spcAft>
-              <a:defRPr sz="1406">
+              <a:defRPr sz="1225">
                 <a:solidFill>
                   <a:srgbClr val="000000"/>
                 </a:solidFill>
@@ -8944,7 +7332,7 @@
               </a:defRPr>
             </a:pPr>
             <a:r>
-              <a:rPr sz="1406">
+              <a:rPr sz="1225">
                 <a:solidFill>
                   <a:srgbClr val="000000"/>
                 </a:solidFill>
@@ -8952,384 +7340,15 @@
                 <a:ea typeface="Play"/>
                 <a:cs typeface="Play"/>
               </a:rPr>
-              <a:t>• При нагрузке более 20 задач требуется внешняя очередь</a:t>
+              <a:t>• Доступ всей компании, интеграция</a:t>
             </a:r>
           </a:p>
-        </p:txBody>
-      </p:sp>
-    </p:spTree>
-  </p:cSld>
-  <p:clrMapOvr>
-    <a:masterClrMapping/>
-  </p:clrMapOvr>
-</p:sld>
-</file>
-
-<file path=ppt/slides/slide62.xml><?xml version="1.0" encoding="utf-8"?>
-<p:sld xmlns:a="http://schemas.openxmlformats.org/drawingml/2006/main" xmlns:p="http://schemas.openxmlformats.org/presentationml/2006/main" xmlns:r="http://schemas.openxmlformats.org/officeDocument/2006/relationships">
-  <p:cSld>
-    <p:spTree>
-      <p:nvGrpSpPr>
-        <p:cNvPr id="1" name=""/>
-        <p:cNvGrpSpPr/>
-        <p:nvPr/>
-      </p:nvGrpSpPr>
-      <p:grpSpPr/>
-      <p:sp>
-        <p:nvSpPr>
-          <p:cNvPr id="532" name="Google Shape;532;p53"/>
-          <p:cNvSpPr/>
-          <p:nvPr/>
-        </p:nvSpPr>
-        <p:spPr>
-          <a:xfrm>
-            <a:off x="303214" y="1022533"/>
-            <a:ext cx="8451939" cy="1433588"/>
-          </a:xfrm>
-          <a:prstGeom prst="rect">
-            <a:avLst/>
-          </a:prstGeom>
-          <a:noFill/>
-          <a:ln>
-            <a:noFill/>
-          </a:ln>
-        </p:spPr>
-        <p:txBody>
-          <a:bodyPr anchorCtr="0" anchor="ctr" bIns="91425" lIns="91425" spcFirstLastPara="1" rIns="91425" wrap="square" tIns="91425">
-            <a:noAutofit/>
-          </a:bodyPr>
-          <a:lstStyle/>
-          <a:p>
-            <a:pPr indent="0" lvl="0" marL="0" rtl="0" algn="l">
-              <a:spcBef>
-                <a:spcPts val="0"/>
-              </a:spcBef>
-              <a:spcAft>
-                <a:spcPts val="0"/>
-              </a:spcAft>
-              <a:buNone/>
-            </a:pPr>
-            <a:r>
-              <a:t/>
-            </a:r>
-            <a:endParaRPr/>
-          </a:p>
-        </p:txBody>
-      </p:sp>
-      <p:sp>
-        <p:nvSpPr>
-          <p:cNvPr id="533" name="Google Shape;533;p53"/>
-          <p:cNvSpPr/>
-          <p:nvPr/>
-        </p:nvSpPr>
-        <p:spPr>
-          <a:xfrm>
-            <a:off x="303214" y="1022533"/>
-            <a:ext cx="1395256" cy="1433588"/>
-          </a:xfrm>
-          <a:prstGeom prst="rect">
-            <a:avLst/>
-          </a:prstGeom>
-          <a:noFill/>
-          <a:ln>
-            <a:noFill/>
-          </a:ln>
-        </p:spPr>
-        <p:txBody>
-          <a:bodyPr anchorCtr="0" anchor="ctr" bIns="91425" lIns="91425" spcFirstLastPara="1" rIns="91425" wrap="square" tIns="91425">
-            <a:noAutofit/>
-          </a:bodyPr>
-          <a:lstStyle/>
-          <a:p>
-            <a:pPr indent="0" lvl="0" marL="0" rtl="0" algn="l">
-              <a:spcBef>
-                <a:spcPts val="0"/>
-              </a:spcBef>
-              <a:spcAft>
-                <a:spcPts val="0"/>
-              </a:spcAft>
-              <a:buNone/>
-            </a:pPr>
-            <a:r>
-              <a:t/>
-            </a:r>
-            <a:endParaRPr/>
-          </a:p>
-        </p:txBody>
-      </p:sp>
-      <p:sp>
-        <p:nvSpPr>
-          <p:cNvPr id="537" name="Google Shape;537;p53"/>
-          <p:cNvSpPr/>
-          <p:nvPr/>
-        </p:nvSpPr>
-        <p:spPr>
-          <a:xfrm>
-            <a:off x="2067385" y="1022533"/>
-            <a:ext cx="1395256" cy="1433588"/>
-          </a:xfrm>
-          <a:prstGeom prst="rect">
-            <a:avLst/>
-          </a:prstGeom>
-          <a:noFill/>
-          <a:ln>
-            <a:noFill/>
-          </a:ln>
-        </p:spPr>
-        <p:txBody>
-          <a:bodyPr anchorCtr="0" anchor="ctr" bIns="91425" lIns="91425" spcFirstLastPara="1" rIns="91425" wrap="square" tIns="91425">
-            <a:noAutofit/>
-          </a:bodyPr>
-          <a:lstStyle/>
-          <a:p>
-            <a:pPr indent="0" lvl="0" marL="0" rtl="0" algn="l">
-              <a:spcBef>
-                <a:spcPts val="0"/>
-              </a:spcBef>
-              <a:spcAft>
-                <a:spcPts val="0"/>
-              </a:spcAft>
-              <a:buNone/>
-            </a:pPr>
-            <a:r>
-              <a:t/>
-            </a:r>
-            <a:endParaRPr/>
-          </a:p>
-        </p:txBody>
-      </p:sp>
-      <p:sp>
-        <p:nvSpPr>
-          <p:cNvPr id="541" name="Google Shape;541;p53"/>
-          <p:cNvSpPr/>
-          <p:nvPr/>
-        </p:nvSpPr>
-        <p:spPr>
-          <a:xfrm>
-            <a:off x="3831556" y="1022533"/>
-            <a:ext cx="1395256" cy="1433588"/>
-          </a:xfrm>
-          <a:prstGeom prst="rect">
-            <a:avLst/>
-          </a:prstGeom>
-          <a:noFill/>
-          <a:ln>
-            <a:noFill/>
-          </a:ln>
-        </p:spPr>
-        <p:txBody>
-          <a:bodyPr anchorCtr="0" anchor="ctr" bIns="91425" lIns="91425" spcFirstLastPara="1" rIns="91425" wrap="square" tIns="91425">
-            <a:noAutofit/>
-          </a:bodyPr>
-          <a:lstStyle/>
-          <a:p>
-            <a:pPr indent="0" lvl="0" marL="0" rtl="0" algn="l">
-              <a:spcBef>
-                <a:spcPts val="0"/>
-              </a:spcBef>
-              <a:spcAft>
-                <a:spcPts val="0"/>
-              </a:spcAft>
-              <a:buNone/>
-            </a:pPr>
-            <a:r>
-              <a:t/>
-            </a:r>
-            <a:endParaRPr/>
-          </a:p>
-        </p:txBody>
-      </p:sp>
-      <p:sp>
-        <p:nvSpPr>
-          <p:cNvPr id="553" name="Google Shape;553;p53"/>
-          <p:cNvSpPr/>
-          <p:nvPr/>
-        </p:nvSpPr>
-        <p:spPr>
-          <a:xfrm>
-            <a:off x="276488" y="2955549"/>
-            <a:ext cx="8451939" cy="1433588"/>
-          </a:xfrm>
-          <a:prstGeom prst="rect">
-            <a:avLst/>
-          </a:prstGeom>
-          <a:noFill/>
-          <a:ln>
-            <a:noFill/>
-          </a:ln>
-        </p:spPr>
-        <p:txBody>
-          <a:bodyPr anchorCtr="0" anchor="ctr" bIns="91425" lIns="91425" spcFirstLastPara="1" rIns="91425" wrap="square" tIns="91425">
-            <a:noAutofit/>
-          </a:bodyPr>
-          <a:lstStyle/>
-          <a:p>
-            <a:pPr indent="0" lvl="0" marL="0" rtl="0" algn="l">
-              <a:spcBef>
-                <a:spcPts val="0"/>
-              </a:spcBef>
-              <a:spcAft>
-                <a:spcPts val="0"/>
-              </a:spcAft>
-              <a:buNone/>
-            </a:pPr>
-            <a:r>
-              <a:t/>
-            </a:r>
-            <a:endParaRPr/>
-          </a:p>
-        </p:txBody>
-      </p:sp>
-      <p:sp>
-        <p:nvSpPr>
-          <p:cNvPr id="554" name="Google Shape;554;p53"/>
-          <p:cNvSpPr/>
-          <p:nvPr/>
-        </p:nvSpPr>
-        <p:spPr>
-          <a:xfrm>
-            <a:off x="303214" y="2797849"/>
-            <a:ext cx="8451939" cy="1433588"/>
-          </a:xfrm>
-          <a:prstGeom prst="rect">
-            <a:avLst/>
-          </a:prstGeom>
-          <a:noFill/>
-          <a:ln>
-            <a:noFill/>
-          </a:ln>
-        </p:spPr>
-        <p:txBody>
-          <a:bodyPr anchorCtr="0" anchor="ctr" bIns="91425" lIns="91425" spcFirstLastPara="1" rIns="91425" wrap="square" tIns="91425">
-            <a:noAutofit/>
-          </a:bodyPr>
-          <a:lstStyle/>
-          <a:p>
-            <a:pPr indent="0" lvl="0" marL="0" rtl="0" algn="l">
-              <a:spcBef>
-                <a:spcPts val="0"/>
-              </a:spcBef>
-              <a:spcAft>
-                <a:spcPts val="0"/>
-              </a:spcAft>
-              <a:buNone/>
-            </a:pPr>
-            <a:r>
-              <a:t/>
-            </a:r>
-            <a:endParaRPr/>
-          </a:p>
-        </p:txBody>
-      </p:sp>
-      <p:sp>
-        <p:nvSpPr>
-          <p:cNvPr id="555" name="Google Shape;555;p53"/>
-          <p:cNvSpPr/>
-          <p:nvPr/>
-        </p:nvSpPr>
-        <p:spPr>
-          <a:xfrm>
-            <a:off x="303214" y="2797849"/>
-            <a:ext cx="1395256" cy="1433588"/>
-          </a:xfrm>
-          <a:prstGeom prst="rect">
-            <a:avLst/>
-          </a:prstGeom>
-          <a:noFill/>
-          <a:ln>
-            <a:noFill/>
-          </a:ln>
-        </p:spPr>
-        <p:txBody>
-          <a:bodyPr anchorCtr="0" anchor="ctr" bIns="91425" lIns="91425" spcFirstLastPara="1" rIns="91425" wrap="square" tIns="91425">
-            <a:noAutofit/>
-          </a:bodyPr>
-          <a:lstStyle/>
-          <a:p>
-            <a:pPr indent="0" lvl="0" marL="0" rtl="0" algn="l">
-              <a:spcBef>
-                <a:spcPts val="0"/>
-              </a:spcBef>
-              <a:spcAft>
-                <a:spcPts val="0"/>
-              </a:spcAft>
-              <a:buNone/>
-            </a:pPr>
-            <a:r>
-              <a:t/>
-            </a:r>
-            <a:endParaRPr/>
-          </a:p>
-        </p:txBody>
-      </p:sp>
-      <p:sp>
-        <p:nvSpPr>
-          <p:cNvPr id="559" name="Google Shape;559;p53"/>
-          <p:cNvSpPr/>
-          <p:nvPr/>
-        </p:nvSpPr>
-        <p:spPr>
-          <a:xfrm>
-            <a:off x="2067385" y="2797849"/>
-            <a:ext cx="1395256" cy="1433588"/>
-          </a:xfrm>
-          <a:prstGeom prst="rect">
-            <a:avLst/>
-          </a:prstGeom>
-          <a:noFill/>
-          <a:ln>
-            <a:noFill/>
-          </a:ln>
-        </p:spPr>
-        <p:txBody>
-          <a:bodyPr anchorCtr="0" anchor="ctr" bIns="91425" lIns="91425" spcFirstLastPara="1" rIns="91425" wrap="square" tIns="91425">
-            <a:noAutofit/>
-          </a:bodyPr>
-          <a:lstStyle/>
-          <a:p>
-            <a:pPr indent="0" lvl="0" marL="0" rtl="0" algn="l">
-              <a:spcBef>
-                <a:spcPts val="0"/>
-              </a:spcBef>
-              <a:spcAft>
-                <a:spcPts val="0"/>
-              </a:spcAft>
-              <a:buNone/>
-            </a:pPr>
-            <a:r>
-              <a:t/>
-            </a:r>
-            <a:endParaRPr/>
-          </a:p>
-        </p:txBody>
-      </p:sp>
-      <p:sp>
-        <p:nvSpPr>
-          <p:cNvPr id="560" name="title"/>
-          <p:cNvSpPr txBox="1"/>
-          <p:nvPr/>
-        </p:nvSpPr>
-        <p:spPr>
-          <a:xfrm>
-            <a:off x="274320" y="282943"/>
-            <a:ext cx="6792986" cy="617220"/>
-          </a:xfrm>
-          <a:prstGeom prst="rect">
-            <a:avLst/>
-          </a:prstGeom>
-          <a:noFill/>
-        </p:spPr>
-        <p:txBody>
-          <a:bodyPr wrap="square" lIns="76200" rIns="76200" tIns="50800" bIns="50800">
-            <a:spAutoFit/>
-          </a:bodyPr>
-          <a:lstStyle/>
           <a:p>
             <a:pPr algn="l">
               <a:spcAft>
                 <a:spcPts val="300"/>
               </a:spcAft>
-              <a:defRPr sz="2400">
+              <a:defRPr sz="1225">
                 <a:solidFill>
                   <a:srgbClr val="000000"/>
                 </a:solidFill>
@@ -9339,7 +7358,7 @@
               </a:defRPr>
             </a:pPr>
             <a:r>
-              <a:rPr sz="2400">
+              <a:rPr sz="1225">
                 <a:solidFill>
                   <a:srgbClr val="000000"/>
                 </a:solidFill>
@@ -9347,21 +7366,21 @@
                 <a:ea typeface="Play"/>
                 <a:cs typeface="Play"/>
               </a:rPr>
-              <a:t>График масштабирования</a:t>
+              <a:t>• Генерация иллюстраций в Q1 2027</a:t>
             </a:r>
           </a:p>
         </p:txBody>
       </p:sp>
       <p:sp>
         <p:nvSpPr>
-          <p:cNvPr id="561" name="Rectangle 560"/>
+          <p:cNvPr id="2436" name="Rectangle 2435"/>
           <p:cNvSpPr/>
           <p:nvPr/>
         </p:nvSpPr>
         <p:spPr>
           <a:xfrm>
-            <a:off x="4583887" y="2726370"/>
-            <a:ext cx="4035247" cy="85555"/>
+            <a:off x="4583887" y="2020589"/>
+            <a:ext cx="4035247" cy="39526"/>
           </a:xfrm>
           <a:prstGeom prst="rect">
             <a:avLst/>
@@ -9397,14 +7416,14 @@
       </p:sp>
       <p:sp>
         <p:nvSpPr>
-          <p:cNvPr id="562" name="Oval 561"/>
+          <p:cNvPr id="2437" name="Oval 2436"/>
           <p:cNvSpPr/>
           <p:nvPr/>
         </p:nvSpPr>
         <p:spPr>
           <a:xfrm>
-            <a:off x="5054665" y="2567386"/>
-            <a:ext cx="403524" cy="403524"/>
+            <a:off x="4943361" y="1895421"/>
+            <a:ext cx="289862" cy="289862"/>
           </a:xfrm>
           <a:prstGeom prst="ellipse">
             <a:avLst/>
@@ -9440,14 +7459,14 @@
       </p:sp>
       <p:sp>
         <p:nvSpPr>
-          <p:cNvPr id="563" name="TextBox 562"/>
+          <p:cNvPr id="2438" name="TextBox 2437"/>
           <p:cNvSpPr txBox="1"/>
           <p:nvPr/>
         </p:nvSpPr>
         <p:spPr>
           <a:xfrm>
             <a:off x="4583887" y="1414513"/>
-            <a:ext cx="1345082" cy="1083708"/>
+            <a:ext cx="1008811" cy="500672"/>
           </a:xfrm>
           <a:prstGeom prst="rect">
             <a:avLst/>
@@ -9479,21 +7498,21 @@
                 <a:ea typeface="Play"/>
                 <a:cs typeface="Play"/>
               </a:rPr>
-              <a:t>Q3 2026</a:t>
+              <a:t>Подключение 4 команд</a:t>
             </a:r>
           </a:p>
         </p:txBody>
       </p:sp>
       <p:sp>
         <p:nvSpPr>
-          <p:cNvPr id="564" name="Oval 563"/>
+          <p:cNvPr id="2439" name="Oval 2438"/>
           <p:cNvSpPr/>
           <p:nvPr/>
         </p:nvSpPr>
         <p:spPr>
           <a:xfrm>
-            <a:off x="6399748" y="2567386"/>
-            <a:ext cx="403524" cy="403524"/>
+            <a:off x="5952173" y="1895421"/>
+            <a:ext cx="289862" cy="289862"/>
           </a:xfrm>
           <a:prstGeom prst="ellipse">
             <a:avLst/>
@@ -9529,14 +7548,14 @@
       </p:sp>
       <p:sp>
         <p:nvSpPr>
-          <p:cNvPr id="565" name="TextBox 564"/>
+          <p:cNvPr id="2440" name="TextBox 2439"/>
           <p:cNvSpPr txBox="1"/>
           <p:nvPr/>
         </p:nvSpPr>
         <p:spPr>
           <a:xfrm>
-            <a:off x="5928969" y="3129895"/>
-            <a:ext cx="1345082" cy="1083708"/>
+            <a:off x="5592698" y="2310452"/>
+            <a:ext cx="1008811" cy="500672"/>
           </a:xfrm>
           <a:prstGeom prst="rect">
             <a:avLst/>
@@ -9568,21 +7587,21 @@
                 <a:ea typeface="Play"/>
                 <a:cs typeface="Play"/>
               </a:rPr>
-              <a:t>Q4 2026</a:t>
+              <a:t>Домен и HTTPS</a:t>
             </a:r>
           </a:p>
         </p:txBody>
       </p:sp>
       <p:sp>
         <p:nvSpPr>
-          <p:cNvPr id="566" name="Oval 565"/>
+          <p:cNvPr id="2441" name="Oval 2440"/>
           <p:cNvSpPr/>
           <p:nvPr/>
         </p:nvSpPr>
         <p:spPr>
           <a:xfrm>
-            <a:off x="7744830" y="2567386"/>
-            <a:ext cx="403524" cy="403524"/>
+            <a:off x="6960984" y="1895421"/>
+            <a:ext cx="289862" cy="289862"/>
           </a:xfrm>
           <a:prstGeom prst="ellipse">
             <a:avLst/>
@@ -9618,14 +7637,14 @@
       </p:sp>
       <p:sp>
         <p:nvSpPr>
-          <p:cNvPr id="567" name="TextBox 566"/>
+          <p:cNvPr id="2442" name="TextBox 2441"/>
           <p:cNvSpPr txBox="1"/>
           <p:nvPr/>
         </p:nvSpPr>
         <p:spPr>
           <a:xfrm>
-            <a:off x="7274051" y="1414513"/>
-            <a:ext cx="1345082" cy="1083708"/>
+            <a:off x="6601510" y="1414513"/>
+            <a:ext cx="1008811" cy="500672"/>
           </a:xfrm>
           <a:prstGeom prst="rect">
             <a:avLst/>
@@ -9657,7 +7676,1689 @@
                 <a:ea typeface="Play"/>
                 <a:cs typeface="Play"/>
               </a:rPr>
-              <a:t>Q1 2027</a:t>
+              <a:t>Доступ всей компании</a:t>
+            </a:r>
+          </a:p>
+        </p:txBody>
+      </p:sp>
+      <p:sp>
+        <p:nvSpPr>
+          <p:cNvPr id="2443" name="Oval 2442"/>
+          <p:cNvSpPr/>
+          <p:nvPr/>
+        </p:nvSpPr>
+        <p:spPr>
+          <a:xfrm>
+            <a:off x="7969796" y="1895421"/>
+            <a:ext cx="289862" cy="289862"/>
+          </a:xfrm>
+          <a:prstGeom prst="ellipse">
+            <a:avLst/>
+          </a:prstGeom>
+          <a:solidFill>
+            <a:srgbClr val="0077FF"/>
+          </a:solidFill>
+          <a:ln>
+            <a:noFill/>
+          </a:ln>
+        </p:spPr>
+        <p:style>
+          <a:lnRef idx="1">
+            <a:schemeClr val="accent1"/>
+          </a:lnRef>
+          <a:fillRef idx="3">
+            <a:schemeClr val="accent1"/>
+          </a:fillRef>
+          <a:effectRef idx="2">
+            <a:schemeClr val="accent1"/>
+          </a:effectRef>
+          <a:fontRef idx="minor">
+            <a:schemeClr val="lt1"/>
+          </a:fontRef>
+        </p:style>
+        <p:txBody>
+          <a:bodyPr rtlCol="0" anchor="ctr"/>
+          <a:lstStyle/>
+          <a:p>
+            <a:pPr algn="ctr"/>
+          </a:p>
+        </p:txBody>
+      </p:sp>
+      <p:sp>
+        <p:nvSpPr>
+          <p:cNvPr id="2444" name="TextBox 2443"/>
+          <p:cNvSpPr txBox="1"/>
+          <p:nvPr/>
+        </p:nvSpPr>
+        <p:spPr>
+          <a:xfrm>
+            <a:off x="7610322" y="2310452"/>
+            <a:ext cx="1008811" cy="500672"/>
+          </a:xfrm>
+          <a:prstGeom prst="rect">
+            <a:avLst/>
+          </a:prstGeom>
+          <a:noFill/>
+        </p:spPr>
+        <p:txBody>
+          <a:bodyPr wrap="square">
+            <a:spAutoFit/>
+          </a:bodyPr>
+          <a:lstStyle/>
+          <a:p>
+            <a:pPr algn="ctr">
+              <a:defRPr sz="1200" b="0">
+                <a:solidFill>
+                  <a:srgbClr val="000000"/>
+                </a:solidFill>
+                <a:latin typeface="Play"/>
+                <a:ea typeface="Play"/>
+                <a:cs typeface="Play"/>
+              </a:defRPr>
+            </a:pPr>
+            <a:r>
+              <a:rPr sz="1200" b="0">
+                <a:solidFill>
+                  <a:srgbClr val="000000"/>
+                </a:solidFill>
+                <a:latin typeface="Play"/>
+                <a:ea typeface="Play"/>
+                <a:cs typeface="Play"/>
+              </a:rPr>
+              <a:t>Генерация иллюстраций</a:t>
+            </a:r>
+          </a:p>
+        </p:txBody>
+      </p:sp>
+    </p:spTree>
+  </p:cSld>
+  <p:clrMapOvr>
+    <a:masterClrMapping/>
+  </p:clrMapOvr>
+</p:sld>
+</file>
+
+<file path=ppt/slides/slide60.xml><?xml version="1.0" encoding="utf-8"?>
+<p:sld xmlns:a="http://schemas.openxmlformats.org/drawingml/2006/main" xmlns:p="http://schemas.openxmlformats.org/presentationml/2006/main" xmlns:r="http://schemas.openxmlformats.org/officeDocument/2006/relationships">
+  <p:cSld>
+    <p:spTree>
+      <p:nvGrpSpPr>
+        <p:cNvPr id="1" name=""/>
+        <p:cNvGrpSpPr/>
+        <p:nvPr/>
+      </p:nvGrpSpPr>
+      <p:grpSpPr/>
+      <p:sp>
+        <p:nvSpPr>
+          <p:cNvPr id="532" name="Google Shape;532;p53"/>
+          <p:cNvSpPr/>
+          <p:nvPr/>
+        </p:nvSpPr>
+        <p:spPr>
+          <a:xfrm>
+            <a:off x="303214" y="1022533"/>
+            <a:ext cx="8451939" cy="1433588"/>
+          </a:xfrm>
+          <a:prstGeom prst="rect">
+            <a:avLst/>
+          </a:prstGeom>
+          <a:noFill/>
+          <a:ln>
+            <a:noFill/>
+          </a:ln>
+        </p:spPr>
+        <p:txBody>
+          <a:bodyPr anchorCtr="0" anchor="ctr" bIns="91425" lIns="91425" spcFirstLastPara="1" rIns="91425" wrap="square" tIns="91425">
+            <a:noAutofit/>
+          </a:bodyPr>
+          <a:lstStyle/>
+          <a:p>
+            <a:pPr indent="0" lvl="0" marL="0" rtl="0" algn="l">
+              <a:spcBef>
+                <a:spcPts val="0"/>
+              </a:spcBef>
+              <a:spcAft>
+                <a:spcPts val="0"/>
+              </a:spcAft>
+              <a:buNone/>
+            </a:pPr>
+            <a:r>
+              <a:t/>
+            </a:r>
+            <a:endParaRPr/>
+          </a:p>
+        </p:txBody>
+      </p:sp>
+      <p:sp>
+        <p:nvSpPr>
+          <p:cNvPr id="541" name="Google Shape;541;p53"/>
+          <p:cNvSpPr/>
+          <p:nvPr/>
+        </p:nvSpPr>
+        <p:spPr>
+          <a:xfrm>
+            <a:off x="3831556" y="1022533"/>
+            <a:ext cx="1395256" cy="1433588"/>
+          </a:xfrm>
+          <a:prstGeom prst="rect">
+            <a:avLst/>
+          </a:prstGeom>
+          <a:noFill/>
+          <a:ln>
+            <a:noFill/>
+          </a:ln>
+        </p:spPr>
+        <p:txBody>
+          <a:bodyPr anchorCtr="0" anchor="ctr" bIns="91425" lIns="91425" spcFirstLastPara="1" rIns="91425" wrap="square" tIns="91425">
+            <a:noAutofit/>
+          </a:bodyPr>
+          <a:lstStyle/>
+          <a:p>
+            <a:pPr indent="0" lvl="0" marL="0" rtl="0" algn="l">
+              <a:spcBef>
+                <a:spcPts val="0"/>
+              </a:spcBef>
+              <a:spcAft>
+                <a:spcPts val="0"/>
+              </a:spcAft>
+              <a:buNone/>
+            </a:pPr>
+            <a:r>
+              <a:t/>
+            </a:r>
+            <a:endParaRPr/>
+          </a:p>
+        </p:txBody>
+      </p:sp>
+      <p:sp>
+        <p:nvSpPr>
+          <p:cNvPr id="553" name="Google Shape;553;p53"/>
+          <p:cNvSpPr/>
+          <p:nvPr/>
+        </p:nvSpPr>
+        <p:spPr>
+          <a:xfrm>
+            <a:off x="276488" y="2955549"/>
+            <a:ext cx="8451939" cy="1433588"/>
+          </a:xfrm>
+          <a:prstGeom prst="rect">
+            <a:avLst/>
+          </a:prstGeom>
+          <a:noFill/>
+          <a:ln>
+            <a:noFill/>
+          </a:ln>
+        </p:spPr>
+        <p:txBody>
+          <a:bodyPr anchorCtr="0" anchor="ctr" bIns="91425" lIns="91425" spcFirstLastPara="1" rIns="91425" wrap="square" tIns="91425">
+            <a:noAutofit/>
+          </a:bodyPr>
+          <a:lstStyle/>
+          <a:p>
+            <a:pPr indent="0" lvl="0" marL="0" rtl="0" algn="l">
+              <a:spcBef>
+                <a:spcPts val="0"/>
+              </a:spcBef>
+              <a:spcAft>
+                <a:spcPts val="0"/>
+              </a:spcAft>
+              <a:buNone/>
+            </a:pPr>
+            <a:r>
+              <a:t/>
+            </a:r>
+            <a:endParaRPr/>
+          </a:p>
+        </p:txBody>
+      </p:sp>
+      <p:sp>
+        <p:nvSpPr>
+          <p:cNvPr id="554" name="Google Shape;554;p53"/>
+          <p:cNvSpPr/>
+          <p:nvPr/>
+        </p:nvSpPr>
+        <p:spPr>
+          <a:xfrm>
+            <a:off x="303214" y="2797849"/>
+            <a:ext cx="8451939" cy="1433588"/>
+          </a:xfrm>
+          <a:prstGeom prst="rect">
+            <a:avLst/>
+          </a:prstGeom>
+          <a:noFill/>
+          <a:ln>
+            <a:noFill/>
+          </a:ln>
+        </p:spPr>
+        <p:txBody>
+          <a:bodyPr anchorCtr="0" anchor="ctr" bIns="91425" lIns="91425" spcFirstLastPara="1" rIns="91425" wrap="square" tIns="91425">
+            <a:noAutofit/>
+          </a:bodyPr>
+          <a:lstStyle/>
+          <a:p>
+            <a:pPr indent="0" lvl="0" marL="0" rtl="0" algn="l">
+              <a:spcBef>
+                <a:spcPts val="0"/>
+              </a:spcBef>
+              <a:spcAft>
+                <a:spcPts val="0"/>
+              </a:spcAft>
+              <a:buNone/>
+            </a:pPr>
+            <a:r>
+              <a:t/>
+            </a:r>
+            <a:endParaRPr/>
+          </a:p>
+        </p:txBody>
+      </p:sp>
+      <p:sp>
+        <p:nvSpPr>
+          <p:cNvPr id="555" name="title"/>
+          <p:cNvSpPr txBox="1"/>
+          <p:nvPr/>
+        </p:nvSpPr>
+        <p:spPr>
+          <a:xfrm>
+            <a:off x="274320" y="282943"/>
+            <a:ext cx="6792986" cy="617220"/>
+          </a:xfrm>
+          <a:prstGeom prst="rect">
+            <a:avLst/>
+          </a:prstGeom>
+          <a:noFill/>
+        </p:spPr>
+        <p:txBody>
+          <a:bodyPr wrap="square" lIns="76200" rIns="76200" tIns="50800" bIns="50800">
+            <a:spAutoFit/>
+          </a:bodyPr>
+          <a:lstStyle/>
+          <a:p>
+            <a:pPr algn="l">
+              <a:spcAft>
+                <a:spcPts val="300"/>
+              </a:spcAft>
+              <a:defRPr sz="2400">
+                <a:solidFill>
+                  <a:srgbClr val="000000"/>
+                </a:solidFill>
+                <a:latin typeface="Play"/>
+                <a:ea typeface="Play"/>
+                <a:cs typeface="Play"/>
+              </a:defRPr>
+            </a:pPr>
+            <a:r>
+              <a:rPr sz="2400">
+                <a:solidFill>
+                  <a:srgbClr val="000000"/>
+                </a:solidFill>
+                <a:latin typeface="Play"/>
+                <a:ea typeface="Play"/>
+                <a:cs typeface="Play"/>
+              </a:rPr>
+              <a:t>План пилота</a:t>
+            </a:r>
+          </a:p>
+        </p:txBody>
+      </p:sp>
+      <p:sp>
+        <p:nvSpPr>
+          <p:cNvPr id="556" name="body_left"/>
+          <p:cNvSpPr txBox="1"/>
+          <p:nvPr/>
+        </p:nvSpPr>
+        <p:spPr>
+          <a:xfrm>
+            <a:off x="274320" y="1414513"/>
+            <a:ext cx="4035247" cy="2851865"/>
+          </a:xfrm>
+          <a:prstGeom prst="rect">
+            <a:avLst/>
+          </a:prstGeom>
+          <a:noFill/>
+        </p:spPr>
+        <p:txBody>
+          <a:bodyPr wrap="square" lIns="76200" rIns="76200" tIns="50800" bIns="50800">
+            <a:spAutoFit/>
+          </a:bodyPr>
+          <a:lstStyle/>
+          <a:p>
+            <a:pPr algn="l">
+              <a:spcAft>
+                <a:spcPts val="300"/>
+              </a:spcAft>
+              <a:defRPr sz="1800">
+                <a:solidFill>
+                  <a:srgbClr val="000000"/>
+                </a:solidFill>
+                <a:latin typeface="Play"/>
+                <a:ea typeface="Play"/>
+                <a:cs typeface="Play"/>
+              </a:defRPr>
+            </a:pPr>
+            <a:r>
+              <a:rPr sz="1800">
+                <a:solidFill>
+                  <a:srgbClr val="000000"/>
+                </a:solidFill>
+                <a:latin typeface="Play"/>
+                <a:ea typeface="Play"/>
+                <a:cs typeface="Play"/>
+              </a:rPr>
+              <a:t>• 6 недель</a:t>
+            </a:r>
+          </a:p>
+          <a:p>
+            <a:pPr algn="l">
+              <a:spcAft>
+                <a:spcPts val="300"/>
+              </a:spcAft>
+              <a:defRPr sz="1800">
+                <a:solidFill>
+                  <a:srgbClr val="000000"/>
+                </a:solidFill>
+                <a:latin typeface="Play"/>
+                <a:ea typeface="Play"/>
+                <a:cs typeface="Play"/>
+              </a:defRPr>
+            </a:pPr>
+            <a:r>
+              <a:rPr sz="1800">
+                <a:solidFill>
+                  <a:srgbClr val="000000"/>
+                </a:solidFill>
+                <a:latin typeface="Play"/>
+                <a:ea typeface="Play"/>
+                <a:cs typeface="Play"/>
+              </a:rPr>
+              <a:t>• 2 команды</a:t>
+            </a:r>
+          </a:p>
+          <a:p>
+            <a:pPr algn="l">
+              <a:spcAft>
+                <a:spcPts val="300"/>
+              </a:spcAft>
+              <a:defRPr sz="1800">
+                <a:solidFill>
+                  <a:srgbClr val="000000"/>
+                </a:solidFill>
+                <a:latin typeface="Play"/>
+                <a:ea typeface="Play"/>
+                <a:cs typeface="Play"/>
+              </a:defRPr>
+            </a:pPr>
+            <a:r>
+              <a:rPr sz="1800">
+                <a:solidFill>
+                  <a:srgbClr val="000000"/>
+                </a:solidFill>
+                <a:latin typeface="Play"/>
+                <a:ea typeface="Play"/>
+                <a:cs typeface="Play"/>
+              </a:rPr>
+              <a:t>• 68 презентаций</a:t>
+            </a:r>
+          </a:p>
+        </p:txBody>
+      </p:sp>
+      <p:sp>
+        <p:nvSpPr>
+          <p:cNvPr id="557" name="body_right"/>
+          <p:cNvSpPr txBox="1"/>
+          <p:nvPr/>
+        </p:nvSpPr>
+        <p:spPr>
+          <a:xfrm>
+            <a:off x="4583887" y="1414513"/>
+            <a:ext cx="4035247" cy="2851865"/>
+          </a:xfrm>
+          <a:prstGeom prst="rect">
+            <a:avLst/>
+          </a:prstGeom>
+          <a:noFill/>
+        </p:spPr>
+        <p:txBody>
+          <a:bodyPr wrap="square" lIns="76200" rIns="76200" tIns="50800" bIns="50800">
+            <a:spAutoFit/>
+          </a:bodyPr>
+          <a:lstStyle/>
+          <a:p>
+            <a:pPr algn="l">
+              <a:spcAft>
+                <a:spcPts val="300"/>
+              </a:spcAft>
+              <a:defRPr sz="1800">
+                <a:solidFill>
+                  <a:srgbClr val="000000"/>
+                </a:solidFill>
+                <a:latin typeface="Play"/>
+                <a:ea typeface="Play"/>
+                <a:cs typeface="Play"/>
+              </a:defRPr>
+            </a:pPr>
+            <a:r>
+              <a:rPr sz="1800">
+                <a:solidFill>
+                  <a:srgbClr val="000000"/>
+                </a:solidFill>
+                <a:latin typeface="Play"/>
+                <a:ea typeface="Play"/>
+                <a:cs typeface="Play"/>
+              </a:rPr>
+              <a:t>• Сборка 4 мин вместо 186</a:t>
+            </a:r>
+          </a:p>
+          <a:p>
+            <a:pPr algn="l">
+              <a:spcAft>
+                <a:spcPts val="300"/>
+              </a:spcAft>
+              <a:defRPr sz="1800">
+                <a:solidFill>
+                  <a:srgbClr val="000000"/>
+                </a:solidFill>
+                <a:latin typeface="Play"/>
+                <a:ea typeface="Play"/>
+                <a:cs typeface="Play"/>
+              </a:defRPr>
+            </a:pPr>
+            <a:r>
+              <a:rPr sz="1800">
+                <a:solidFill>
+                  <a:srgbClr val="000000"/>
+                </a:solidFill>
+                <a:latin typeface="Play"/>
+                <a:ea typeface="Play"/>
+                <a:cs typeface="Play"/>
+              </a:rPr>
+              <a:t>• Время до первой версии 1 день вместо 6</a:t>
+            </a:r>
+          </a:p>
+          <a:p>
+            <a:pPr algn="l">
+              <a:spcAft>
+                <a:spcPts val="300"/>
+              </a:spcAft>
+              <a:defRPr sz="1800">
+                <a:solidFill>
+                  <a:srgbClr val="000000"/>
+                </a:solidFill>
+                <a:latin typeface="Play"/>
+                <a:ea typeface="Play"/>
+                <a:cs typeface="Play"/>
+              </a:defRPr>
+            </a:pPr>
+            <a:r>
+              <a:rPr sz="1800">
+                <a:solidFill>
+                  <a:srgbClr val="000000"/>
+                </a:solidFill>
+                <a:latin typeface="Play"/>
+                <a:ea typeface="Play"/>
+                <a:cs typeface="Play"/>
+              </a:rPr>
+              <a:t>• Нарушения 2 из 68, запросы 38 вместо 11</a:t>
+            </a:r>
+          </a:p>
+        </p:txBody>
+      </p:sp>
+    </p:spTree>
+  </p:cSld>
+  <p:clrMapOvr>
+    <a:masterClrMapping/>
+  </p:clrMapOvr>
+</p:sld>
+</file>
+
+<file path=ppt/slides/slide61.xml><?xml version="1.0" encoding="utf-8"?>
+<p:sld xmlns:a="http://schemas.openxmlformats.org/drawingml/2006/main" xmlns:p="http://schemas.openxmlformats.org/presentationml/2006/main" xmlns:r="http://schemas.openxmlformats.org/officeDocument/2006/relationships">
+  <p:cSld>
+    <p:spTree>
+      <p:nvGrpSpPr>
+        <p:cNvPr id="1" name=""/>
+        <p:cNvGrpSpPr/>
+        <p:nvPr/>
+      </p:nvGrpSpPr>
+      <p:grpSpPr/>
+      <p:sp>
+        <p:nvSpPr>
+          <p:cNvPr id="1027" name="Google Shape;1027;p65"/>
+          <p:cNvSpPr/>
+          <p:nvPr/>
+        </p:nvSpPr>
+        <p:spPr>
+          <a:xfrm>
+            <a:off x="6064222" y="1209852"/>
+            <a:ext cx="2793985" cy="3014270"/>
+          </a:xfrm>
+          <a:prstGeom prst="roundRect">
+            <a:avLst>
+              <a:gd fmla="val 3436" name="adj"/>
+            </a:avLst>
+          </a:prstGeom>
+          <a:solidFill>
+            <a:schemeClr val="lt2"/>
+          </a:solidFill>
+          <a:ln>
+            <a:noFill/>
+          </a:ln>
+        </p:spPr>
+        <p:txBody>
+          <a:bodyPr anchorCtr="0" anchor="ctr" bIns="91425" lIns="91425" spcFirstLastPara="1" rIns="91425" wrap="square" tIns="91425">
+            <a:noAutofit/>
+          </a:bodyPr>
+          <a:lstStyle/>
+          <a:p>
+            <a:pPr indent="0" lvl="0" marL="0" rtl="0" algn="l">
+              <a:spcBef>
+                <a:spcPts val="0"/>
+              </a:spcBef>
+              <a:spcAft>
+                <a:spcPts val="0"/>
+              </a:spcAft>
+              <a:buNone/>
+            </a:pPr>
+            <a:r>
+              <a:t/>
+            </a:r>
+            <a:endParaRPr/>
+          </a:p>
+        </p:txBody>
+      </p:sp>
+      <p:sp>
+        <p:nvSpPr>
+          <p:cNvPr id="1029" name="Google Shape;1029;p65"/>
+          <p:cNvSpPr/>
+          <p:nvPr/>
+        </p:nvSpPr>
+        <p:spPr>
+          <a:xfrm>
+            <a:off x="3174981" y="1209852"/>
+            <a:ext cx="2793985" cy="3014270"/>
+          </a:xfrm>
+          <a:prstGeom prst="roundRect">
+            <a:avLst>
+              <a:gd fmla="val 3436" name="adj"/>
+            </a:avLst>
+          </a:prstGeom>
+          <a:solidFill>
+            <a:schemeClr val="lt2"/>
+          </a:solidFill>
+          <a:ln>
+            <a:noFill/>
+          </a:ln>
+        </p:spPr>
+        <p:txBody>
+          <a:bodyPr anchorCtr="0" anchor="ctr" bIns="91425" lIns="91425" spcFirstLastPara="1" rIns="91425" wrap="square" tIns="91425">
+            <a:noAutofit/>
+          </a:bodyPr>
+          <a:lstStyle/>
+          <a:p>
+            <a:pPr indent="0" lvl="0" marL="0" rtl="0" algn="l">
+              <a:spcBef>
+                <a:spcPts val="0"/>
+              </a:spcBef>
+              <a:spcAft>
+                <a:spcPts val="0"/>
+              </a:spcAft>
+              <a:buNone/>
+            </a:pPr>
+            <a:r>
+              <a:t/>
+            </a:r>
+            <a:endParaRPr/>
+          </a:p>
+        </p:txBody>
+      </p:sp>
+      <p:sp>
+        <p:nvSpPr>
+          <p:cNvPr id="1031" name="Google Shape;1031;p65"/>
+          <p:cNvSpPr/>
+          <p:nvPr/>
+        </p:nvSpPr>
+        <p:spPr>
+          <a:xfrm>
+            <a:off x="285749" y="1209852"/>
+            <a:ext cx="2793985" cy="3014270"/>
+          </a:xfrm>
+          <a:prstGeom prst="roundRect">
+            <a:avLst>
+              <a:gd fmla="val 3436" name="adj"/>
+            </a:avLst>
+          </a:prstGeom>
+          <a:solidFill>
+            <a:schemeClr val="lt2"/>
+          </a:solidFill>
+          <a:ln>
+            <a:noFill/>
+          </a:ln>
+        </p:spPr>
+        <p:txBody>
+          <a:bodyPr anchorCtr="0" anchor="ctr" bIns="91425" lIns="91425" spcFirstLastPara="1" rIns="91425" wrap="square" tIns="91425">
+            <a:noAutofit/>
+          </a:bodyPr>
+          <a:lstStyle/>
+          <a:p>
+            <a:pPr indent="0" lvl="0" marL="0" rtl="0" algn="l">
+              <a:spcBef>
+                <a:spcPts val="0"/>
+              </a:spcBef>
+              <a:spcAft>
+                <a:spcPts val="0"/>
+              </a:spcAft>
+              <a:buNone/>
+            </a:pPr>
+            <a:r>
+              <a:t/>
+            </a:r>
+            <a:endParaRPr/>
+          </a:p>
+        </p:txBody>
+      </p:sp>
+      <p:sp>
+        <p:nvSpPr>
+          <p:cNvPr id="1032" name="Google Shape;1032;p65"/>
+          <p:cNvSpPr/>
+          <p:nvPr/>
+        </p:nvSpPr>
+        <p:spPr>
+          <a:xfrm>
+            <a:off x="285748" y="286047"/>
+            <a:ext cx="8572456" cy="3938075"/>
+          </a:xfrm>
+          <a:prstGeom prst="rect">
+            <a:avLst/>
+          </a:prstGeom>
+          <a:noFill/>
+          <a:ln>
+            <a:noFill/>
+          </a:ln>
+        </p:spPr>
+        <p:txBody>
+          <a:bodyPr anchorCtr="0" anchor="ctr" bIns="91425" lIns="91425" spcFirstLastPara="1" rIns="91425" wrap="square" tIns="91425">
+            <a:noAutofit/>
+          </a:bodyPr>
+          <a:lstStyle/>
+          <a:p>
+            <a:pPr indent="0" lvl="0" marL="0" rtl="0" algn="l">
+              <a:spcBef>
+                <a:spcPts val="0"/>
+              </a:spcBef>
+              <a:spcAft>
+                <a:spcPts val="0"/>
+              </a:spcAft>
+              <a:buNone/>
+            </a:pPr>
+            <a:r>
+              <a:t/>
+            </a:r>
+            <a:endParaRPr/>
+          </a:p>
+        </p:txBody>
+      </p:sp>
+      <p:sp>
+        <p:nvSpPr>
+          <p:cNvPr id="1033" name="Google Shape;1033;p65"/>
+          <p:cNvSpPr/>
+          <p:nvPr/>
+        </p:nvSpPr>
+        <p:spPr>
+          <a:xfrm>
+            <a:off x="285748" y="1209852"/>
+            <a:ext cx="8572456" cy="3014270"/>
+          </a:xfrm>
+          <a:prstGeom prst="rect">
+            <a:avLst/>
+          </a:prstGeom>
+          <a:noFill/>
+          <a:ln>
+            <a:noFill/>
+          </a:ln>
+        </p:spPr>
+        <p:txBody>
+          <a:bodyPr anchorCtr="0" anchor="ctr" bIns="91425" lIns="91425" spcFirstLastPara="1" rIns="91425" wrap="square" tIns="91425">
+            <a:noAutofit/>
+          </a:bodyPr>
+          <a:lstStyle/>
+          <a:p>
+            <a:pPr indent="0" lvl="0" marL="0" rtl="0" algn="l">
+              <a:spcBef>
+                <a:spcPts val="0"/>
+              </a:spcBef>
+              <a:spcAft>
+                <a:spcPts val="0"/>
+              </a:spcAft>
+              <a:buNone/>
+            </a:pPr>
+            <a:r>
+              <a:t/>
+            </a:r>
+            <a:endParaRPr/>
+          </a:p>
+        </p:txBody>
+      </p:sp>
+      <p:sp>
+        <p:nvSpPr>
+          <p:cNvPr id="1034" name="Google Shape;1034;p65"/>
+          <p:cNvSpPr/>
+          <p:nvPr/>
+        </p:nvSpPr>
+        <p:spPr>
+          <a:xfrm>
+            <a:off x="476248" y="1400327"/>
+            <a:ext cx="2412987" cy="1009519"/>
+          </a:xfrm>
+          <a:prstGeom prst="rect">
+            <a:avLst/>
+          </a:prstGeom>
+          <a:noFill/>
+          <a:ln>
+            <a:noFill/>
+          </a:ln>
+        </p:spPr>
+        <p:txBody>
+          <a:bodyPr anchorCtr="0" anchor="ctr" bIns="91425" lIns="91425" spcFirstLastPara="1" rIns="91425" wrap="square" tIns="91425">
+            <a:noAutofit/>
+          </a:bodyPr>
+          <a:lstStyle/>
+          <a:p>
+            <a:pPr indent="0" lvl="0" marL="0" rtl="0" algn="l">
+              <a:spcBef>
+                <a:spcPts val="0"/>
+              </a:spcBef>
+              <a:spcAft>
+                <a:spcPts val="0"/>
+              </a:spcAft>
+              <a:buNone/>
+            </a:pPr>
+            <a:r>
+              <a:t/>
+            </a:r>
+            <a:endParaRPr/>
+          </a:p>
+        </p:txBody>
+      </p:sp>
+      <p:sp>
+        <p:nvSpPr>
+          <p:cNvPr id="1035" name="Google Shape;1035;p65"/>
+          <p:cNvSpPr/>
+          <p:nvPr/>
+        </p:nvSpPr>
+        <p:spPr>
+          <a:xfrm>
+            <a:off x="476248" y="1400328"/>
+            <a:ext cx="76199" cy="76190"/>
+          </a:xfrm>
+          <a:prstGeom prst="roundRect">
+            <a:avLst>
+              <a:gd fmla="val 31500" name="adj"/>
+            </a:avLst>
+          </a:prstGeom>
+          <a:solidFill>
+            <a:srgbClr val="0077FF"/>
+          </a:solidFill>
+          <a:ln>
+            <a:noFill/>
+          </a:ln>
+        </p:spPr>
+        <p:txBody>
+          <a:bodyPr anchorCtr="0" anchor="ctr" bIns="91425" lIns="91425" spcFirstLastPara="1" rIns="91425" wrap="square" tIns="91425">
+            <a:noAutofit/>
+          </a:bodyPr>
+          <a:lstStyle/>
+          <a:p>
+            <a:pPr indent="0" lvl="0" marL="0" rtl="0" algn="l">
+              <a:spcBef>
+                <a:spcPts val="0"/>
+              </a:spcBef>
+              <a:spcAft>
+                <a:spcPts val="0"/>
+              </a:spcAft>
+              <a:buNone/>
+            </a:pPr>
+            <a:r>
+              <a:t/>
+            </a:r>
+            <a:endParaRPr/>
+          </a:p>
+        </p:txBody>
+      </p:sp>
+      <p:sp>
+        <p:nvSpPr>
+          <p:cNvPr id="1040" name="Google Shape;1040;p65"/>
+          <p:cNvSpPr/>
+          <p:nvPr/>
+        </p:nvSpPr>
+        <p:spPr>
+          <a:xfrm>
+            <a:off x="3365480" y="1400327"/>
+            <a:ext cx="2412987" cy="1009519"/>
+          </a:xfrm>
+          <a:prstGeom prst="rect">
+            <a:avLst/>
+          </a:prstGeom>
+          <a:noFill/>
+          <a:ln>
+            <a:noFill/>
+          </a:ln>
+        </p:spPr>
+        <p:txBody>
+          <a:bodyPr anchorCtr="0" anchor="ctr" bIns="91425" lIns="91425" spcFirstLastPara="1" rIns="91425" wrap="square" tIns="91425">
+            <a:noAutofit/>
+          </a:bodyPr>
+          <a:lstStyle/>
+          <a:p>
+            <a:pPr indent="0" lvl="0" marL="0" rtl="0" algn="l">
+              <a:spcBef>
+                <a:spcPts val="0"/>
+              </a:spcBef>
+              <a:spcAft>
+                <a:spcPts val="0"/>
+              </a:spcAft>
+              <a:buNone/>
+            </a:pPr>
+            <a:r>
+              <a:t/>
+            </a:r>
+            <a:endParaRPr/>
+          </a:p>
+        </p:txBody>
+      </p:sp>
+      <p:sp>
+        <p:nvSpPr>
+          <p:cNvPr id="1041" name="Google Shape;1041;p65"/>
+          <p:cNvSpPr/>
+          <p:nvPr/>
+        </p:nvSpPr>
+        <p:spPr>
+          <a:xfrm>
+            <a:off x="3365480" y="1400328"/>
+            <a:ext cx="76199" cy="76190"/>
+          </a:xfrm>
+          <a:prstGeom prst="roundRect">
+            <a:avLst>
+              <a:gd fmla="val 31500" name="adj"/>
+            </a:avLst>
+          </a:prstGeom>
+          <a:solidFill>
+            <a:srgbClr val="0077FF"/>
+          </a:solidFill>
+          <a:ln>
+            <a:noFill/>
+          </a:ln>
+        </p:spPr>
+        <p:txBody>
+          <a:bodyPr anchorCtr="0" anchor="ctr" bIns="91425" lIns="91425" spcFirstLastPara="1" rIns="91425" wrap="square" tIns="91425">
+            <a:noAutofit/>
+          </a:bodyPr>
+          <a:lstStyle/>
+          <a:p>
+            <a:pPr indent="0" lvl="0" marL="0" rtl="0" algn="l">
+              <a:spcBef>
+                <a:spcPts val="0"/>
+              </a:spcBef>
+              <a:spcAft>
+                <a:spcPts val="0"/>
+              </a:spcAft>
+              <a:buNone/>
+            </a:pPr>
+            <a:r>
+              <a:t/>
+            </a:r>
+            <a:endParaRPr/>
+          </a:p>
+        </p:txBody>
+      </p:sp>
+      <p:sp>
+        <p:nvSpPr>
+          <p:cNvPr id="1045" name="Google Shape;1045;p65"/>
+          <p:cNvSpPr/>
+          <p:nvPr/>
+        </p:nvSpPr>
+        <p:spPr>
+          <a:xfrm>
+            <a:off x="6254721" y="1400327"/>
+            <a:ext cx="2412987" cy="1009519"/>
+          </a:xfrm>
+          <a:prstGeom prst="rect">
+            <a:avLst/>
+          </a:prstGeom>
+          <a:noFill/>
+          <a:ln>
+            <a:noFill/>
+          </a:ln>
+        </p:spPr>
+        <p:txBody>
+          <a:bodyPr anchorCtr="0" anchor="ctr" bIns="91425" lIns="91425" spcFirstLastPara="1" rIns="91425" wrap="square" tIns="91425">
+            <a:noAutofit/>
+          </a:bodyPr>
+          <a:lstStyle/>
+          <a:p>
+            <a:pPr indent="0" lvl="0" marL="0" rtl="0" algn="l">
+              <a:spcBef>
+                <a:spcPts val="0"/>
+              </a:spcBef>
+              <a:spcAft>
+                <a:spcPts val="0"/>
+              </a:spcAft>
+              <a:buNone/>
+            </a:pPr>
+            <a:r>
+              <a:t/>
+            </a:r>
+            <a:endParaRPr/>
+          </a:p>
+        </p:txBody>
+      </p:sp>
+      <p:sp>
+        <p:nvSpPr>
+          <p:cNvPr id="1046" name="Google Shape;1046;p65"/>
+          <p:cNvSpPr/>
+          <p:nvPr/>
+        </p:nvSpPr>
+        <p:spPr>
+          <a:xfrm>
+            <a:off x="6254721" y="1400328"/>
+            <a:ext cx="76199" cy="76190"/>
+          </a:xfrm>
+          <a:prstGeom prst="roundRect">
+            <a:avLst>
+              <a:gd fmla="val 31500" name="adj"/>
+            </a:avLst>
+          </a:prstGeom>
+          <a:solidFill>
+            <a:srgbClr val="0077FF"/>
+          </a:solidFill>
+          <a:ln>
+            <a:noFill/>
+          </a:ln>
+        </p:spPr>
+        <p:txBody>
+          <a:bodyPr anchorCtr="0" anchor="ctr" bIns="91425" lIns="91425" spcFirstLastPara="1" rIns="91425" wrap="square" tIns="91425">
+            <a:noAutofit/>
+          </a:bodyPr>
+          <a:lstStyle/>
+          <a:p>
+            <a:pPr indent="0" lvl="0" marL="0" rtl="0" algn="l">
+              <a:spcBef>
+                <a:spcPts val="0"/>
+              </a:spcBef>
+              <a:spcAft>
+                <a:spcPts val="0"/>
+              </a:spcAft>
+              <a:buNone/>
+            </a:pPr>
+            <a:r>
+              <a:t/>
+            </a:r>
+            <a:endParaRPr/>
+          </a:p>
+        </p:txBody>
+      </p:sp>
+      <p:sp>
+        <p:nvSpPr>
+          <p:cNvPr id="1047" name="title"/>
+          <p:cNvSpPr txBox="1"/>
+          <p:nvPr/>
+        </p:nvSpPr>
+        <p:spPr>
+          <a:xfrm>
+            <a:off x="274320" y="282943"/>
+            <a:ext cx="6792986" cy="617220"/>
+          </a:xfrm>
+          <a:prstGeom prst="rect">
+            <a:avLst/>
+          </a:prstGeom>
+          <a:noFill/>
+        </p:spPr>
+        <p:txBody>
+          <a:bodyPr wrap="square" lIns="76200" rIns="76200" tIns="50800" bIns="50800">
+            <a:spAutoFit/>
+          </a:bodyPr>
+          <a:lstStyle/>
+          <a:p>
+            <a:pPr algn="l">
+              <a:spcAft>
+                <a:spcPts val="300"/>
+              </a:spcAft>
+              <a:defRPr sz="2400">
+                <a:solidFill>
+                  <a:srgbClr val="000000"/>
+                </a:solidFill>
+                <a:latin typeface="Play"/>
+                <a:ea typeface="Play"/>
+                <a:cs typeface="Play"/>
+              </a:defRPr>
+            </a:pPr>
+            <a:r>
+              <a:rPr sz="2400">
+                <a:solidFill>
+                  <a:srgbClr val="000000"/>
+                </a:solidFill>
+                <a:latin typeface="Play"/>
+                <a:ea typeface="Play"/>
+                <a:cs typeface="Play"/>
+              </a:rPr>
+              <a:t>Риски</a:t>
+            </a:r>
+          </a:p>
+        </p:txBody>
+      </p:sp>
+      <p:sp>
+        <p:nvSpPr>
+          <p:cNvPr id="1048" name="Oval 1047"/>
+          <p:cNvSpPr/>
+          <p:nvPr/>
+        </p:nvSpPr>
+        <p:spPr>
+          <a:xfrm>
+            <a:off x="5021979" y="1530621"/>
+            <a:ext cx="433029" cy="433029"/>
+          </a:xfrm>
+          <a:prstGeom prst="ellipse">
+            <a:avLst/>
+          </a:prstGeom>
+          <a:solidFill>
+            <a:srgbClr val="0077FF"/>
+          </a:solidFill>
+          <a:ln>
+            <a:noFill/>
+          </a:ln>
+        </p:spPr>
+        <p:style>
+          <a:lnRef idx="1">
+            <a:schemeClr val="accent1"/>
+          </a:lnRef>
+          <a:fillRef idx="3">
+            <a:schemeClr val="accent1"/>
+          </a:fillRef>
+          <a:effectRef idx="2">
+            <a:schemeClr val="accent1"/>
+          </a:effectRef>
+          <a:fontRef idx="minor">
+            <a:schemeClr val="lt1"/>
+          </a:fontRef>
+        </p:style>
+        <p:txBody>
+          <a:bodyPr rtlCol="0" anchor="ctr"/>
+          <a:lstStyle/>
+          <a:p>
+            <a:pPr algn="ctr"/>
+          </a:p>
+        </p:txBody>
+      </p:sp>
+      <p:sp>
+        <p:nvSpPr>
+          <p:cNvPr id="1049" name="TextBox 1048"/>
+          <p:cNvSpPr txBox="1"/>
+          <p:nvPr/>
+        </p:nvSpPr>
+        <p:spPr>
+          <a:xfrm>
+            <a:off x="4583887" y="2076828"/>
+            <a:ext cx="1309213" cy="383821"/>
+          </a:xfrm>
+          <a:prstGeom prst="rect">
+            <a:avLst/>
+          </a:prstGeom>
+          <a:noFill/>
+        </p:spPr>
+        <p:txBody>
+          <a:bodyPr wrap="square">
+            <a:spAutoFit/>
+          </a:bodyPr>
+          <a:lstStyle/>
+          <a:p>
+            <a:pPr algn="ctr">
+              <a:defRPr sz="1200" b="0">
+                <a:solidFill>
+                  <a:srgbClr val="000000"/>
+                </a:solidFill>
+                <a:latin typeface="Play"/>
+                <a:ea typeface="Play"/>
+                <a:cs typeface="Play"/>
+              </a:defRPr>
+            </a:pPr>
+            <a:r>
+              <a:rPr sz="1200" b="0">
+                <a:solidFill>
+                  <a:srgbClr val="000000"/>
+                </a:solidFill>
+                <a:latin typeface="Play"/>
+                <a:ea typeface="Play"/>
+                <a:cs typeface="Play"/>
+              </a:rPr>
+              <a:t>Слабая модель может выдумать цифры</a:t>
+            </a:r>
+          </a:p>
+        </p:txBody>
+      </p:sp>
+      <p:sp>
+        <p:nvSpPr>
+          <p:cNvPr id="1050" name="Document 1049"/>
+          <p:cNvSpPr/>
+          <p:nvPr/>
+        </p:nvSpPr>
+        <p:spPr>
+          <a:xfrm>
+            <a:off x="6395821" y="1519795"/>
+            <a:ext cx="411377" cy="454680"/>
+          </a:xfrm>
+          <a:prstGeom prst="flowChartDocument">
+            <a:avLst/>
+          </a:prstGeom>
+          <a:solidFill>
+            <a:srgbClr val="0077FF"/>
+          </a:solidFill>
+          <a:ln>
+            <a:noFill/>
+          </a:ln>
+        </p:spPr>
+        <p:style>
+          <a:lnRef idx="1">
+            <a:schemeClr val="accent1"/>
+          </a:lnRef>
+          <a:fillRef idx="3">
+            <a:schemeClr val="accent1"/>
+          </a:fillRef>
+          <a:effectRef idx="2">
+            <a:schemeClr val="accent1"/>
+          </a:effectRef>
+          <a:fontRef idx="minor">
+            <a:schemeClr val="lt1"/>
+          </a:fontRef>
+        </p:style>
+        <p:txBody>
+          <a:bodyPr rtlCol="0" anchor="ctr"/>
+          <a:lstStyle/>
+          <a:p>
+            <a:pPr algn="ctr"/>
+          </a:p>
+        </p:txBody>
+      </p:sp>
+      <p:sp>
+        <p:nvSpPr>
+          <p:cNvPr id="1051" name="TextBox 1050"/>
+          <p:cNvSpPr txBox="1"/>
+          <p:nvPr/>
+        </p:nvSpPr>
+        <p:spPr>
+          <a:xfrm>
+            <a:off x="5946903" y="2076828"/>
+            <a:ext cx="1309213" cy="383821"/>
+          </a:xfrm>
+          <a:prstGeom prst="rect">
+            <a:avLst/>
+          </a:prstGeom>
+          <a:noFill/>
+        </p:spPr>
+        <p:txBody>
+          <a:bodyPr wrap="square">
+            <a:spAutoFit/>
+          </a:bodyPr>
+          <a:lstStyle/>
+          <a:p>
+            <a:pPr algn="ctr">
+              <a:defRPr sz="1200" b="0">
+                <a:solidFill>
+                  <a:srgbClr val="000000"/>
+                </a:solidFill>
+                <a:latin typeface="Play"/>
+                <a:ea typeface="Play"/>
+                <a:cs typeface="Play"/>
+              </a:defRPr>
+            </a:pPr>
+            <a:r>
+              <a:rPr sz="1200" b="0">
+                <a:solidFill>
+                  <a:srgbClr val="000000"/>
+                </a:solidFill>
+                <a:latin typeface="Play"/>
+                <a:ea typeface="Play"/>
+                <a:cs typeface="Play"/>
+              </a:rPr>
+              <a:t>Незнакомый шаблон может быть плохо сделан</a:t>
+            </a:r>
+          </a:p>
+        </p:txBody>
+      </p:sp>
+      <p:sp>
+        <p:nvSpPr>
+          <p:cNvPr id="1052" name="Oval 1051"/>
+          <p:cNvSpPr/>
+          <p:nvPr/>
+        </p:nvSpPr>
+        <p:spPr>
+          <a:xfrm>
+            <a:off x="7715535" y="1498144"/>
+            <a:ext cx="497983" cy="497983"/>
+          </a:xfrm>
+          <a:prstGeom prst="ellipse">
+            <a:avLst/>
+          </a:prstGeom>
+          <a:solidFill>
+            <a:srgbClr val="0077FF"/>
+          </a:solidFill>
+          <a:ln>
+            <a:noFill/>
+          </a:ln>
+        </p:spPr>
+        <p:style>
+          <a:lnRef idx="1">
+            <a:schemeClr val="accent1"/>
+          </a:lnRef>
+          <a:fillRef idx="3">
+            <a:schemeClr val="accent1"/>
+          </a:fillRef>
+          <a:effectRef idx="2">
+            <a:schemeClr val="accent1"/>
+          </a:effectRef>
+          <a:fontRef idx="minor">
+            <a:schemeClr val="lt1"/>
+          </a:fontRef>
+        </p:style>
+        <p:txBody>
+          <a:bodyPr rtlCol="0" anchor="ctr"/>
+          <a:lstStyle/>
+          <a:p>
+            <a:pPr algn="ctr"/>
+          </a:p>
+        </p:txBody>
+      </p:sp>
+      <p:sp>
+        <p:nvSpPr>
+          <p:cNvPr id="1053" name="Oval 1052"/>
+          <p:cNvSpPr/>
+          <p:nvPr/>
+        </p:nvSpPr>
+        <p:spPr>
+          <a:xfrm>
+            <a:off x="7802141" y="1584750"/>
+            <a:ext cx="324771" cy="324771"/>
+          </a:xfrm>
+          <a:prstGeom prst="ellipse">
+            <a:avLst/>
+          </a:prstGeom>
+          <a:solidFill>
+            <a:srgbClr val="FFFFFF"/>
+          </a:solidFill>
+          <a:ln>
+            <a:noFill/>
+          </a:ln>
+        </p:spPr>
+        <p:style>
+          <a:lnRef idx="1">
+            <a:schemeClr val="accent1"/>
+          </a:lnRef>
+          <a:fillRef idx="3">
+            <a:schemeClr val="accent1"/>
+          </a:fillRef>
+          <a:effectRef idx="2">
+            <a:schemeClr val="accent1"/>
+          </a:effectRef>
+          <a:fontRef idx="minor">
+            <a:schemeClr val="lt1"/>
+          </a:fontRef>
+        </p:style>
+        <p:txBody>
+          <a:bodyPr rtlCol="0" anchor="ctr"/>
+          <a:lstStyle/>
+          <a:p>
+            <a:pPr algn="ctr"/>
+          </a:p>
+        </p:txBody>
+      </p:sp>
+      <p:sp>
+        <p:nvSpPr>
+          <p:cNvPr id="1054" name="Oval 1053"/>
+          <p:cNvSpPr/>
+          <p:nvPr/>
+        </p:nvSpPr>
+        <p:spPr>
+          <a:xfrm>
+            <a:off x="7877921" y="1660530"/>
+            <a:ext cx="173211" cy="173211"/>
+          </a:xfrm>
+          <a:prstGeom prst="ellipse">
+            <a:avLst/>
+          </a:prstGeom>
+          <a:solidFill>
+            <a:srgbClr val="0077FF"/>
+          </a:solidFill>
+          <a:ln>
+            <a:noFill/>
+          </a:ln>
+        </p:spPr>
+        <p:style>
+          <a:lnRef idx="1">
+            <a:schemeClr val="accent1"/>
+          </a:lnRef>
+          <a:fillRef idx="3">
+            <a:schemeClr val="accent1"/>
+          </a:fillRef>
+          <a:effectRef idx="2">
+            <a:schemeClr val="accent1"/>
+          </a:effectRef>
+          <a:fontRef idx="minor">
+            <a:schemeClr val="lt1"/>
+          </a:fontRef>
+        </p:style>
+        <p:txBody>
+          <a:bodyPr rtlCol="0" anchor="ctr"/>
+          <a:lstStyle/>
+          <a:p>
+            <a:pPr algn="ctr"/>
+          </a:p>
+        </p:txBody>
+      </p:sp>
+      <p:sp>
+        <p:nvSpPr>
+          <p:cNvPr id="1055" name="Oval 1054"/>
+          <p:cNvSpPr/>
+          <p:nvPr/>
+        </p:nvSpPr>
+        <p:spPr>
+          <a:xfrm>
+            <a:off x="7932050" y="1714658"/>
+            <a:ext cx="64954" cy="64954"/>
+          </a:xfrm>
+          <a:prstGeom prst="ellipse">
+            <a:avLst/>
+          </a:prstGeom>
+          <a:solidFill>
+            <a:srgbClr val="FFFFFF"/>
+          </a:solidFill>
+          <a:ln>
+            <a:noFill/>
+          </a:ln>
+        </p:spPr>
+        <p:style>
+          <a:lnRef idx="1">
+            <a:schemeClr val="accent1"/>
+          </a:lnRef>
+          <a:fillRef idx="3">
+            <a:schemeClr val="accent1"/>
+          </a:fillRef>
+          <a:effectRef idx="2">
+            <a:schemeClr val="accent1"/>
+          </a:effectRef>
+          <a:fontRef idx="minor">
+            <a:schemeClr val="lt1"/>
+          </a:fontRef>
+        </p:style>
+        <p:txBody>
+          <a:bodyPr rtlCol="0" anchor="ctr"/>
+          <a:lstStyle/>
+          <a:p>
+            <a:pPr algn="ctr"/>
+          </a:p>
+        </p:txBody>
+      </p:sp>
+      <p:sp>
+        <p:nvSpPr>
+          <p:cNvPr id="1056" name="TextBox 1055"/>
+          <p:cNvSpPr txBox="1"/>
+          <p:nvPr/>
+        </p:nvSpPr>
+        <p:spPr>
+          <a:xfrm>
+            <a:off x="7309920" y="2076828"/>
+            <a:ext cx="1309213" cy="383821"/>
+          </a:xfrm>
+          <a:prstGeom prst="rect">
+            <a:avLst/>
+          </a:prstGeom>
+          <a:noFill/>
+        </p:spPr>
+        <p:txBody>
+          <a:bodyPr wrap="square">
+            <a:spAutoFit/>
+          </a:bodyPr>
+          <a:lstStyle/>
+          <a:p>
+            <a:pPr algn="ctr">
+              <a:defRPr sz="1200" b="0">
+                <a:solidFill>
+                  <a:srgbClr val="000000"/>
+                </a:solidFill>
+                <a:latin typeface="Play"/>
+                <a:ea typeface="Play"/>
+                <a:cs typeface="Play"/>
+              </a:defRPr>
+            </a:pPr>
+            <a:r>
+              <a:rPr sz="1200" b="0">
+                <a:solidFill>
+                  <a:srgbClr val="000000"/>
+                </a:solidFill>
+                <a:latin typeface="Play"/>
+                <a:ea typeface="Play"/>
+                <a:cs typeface="Play"/>
+              </a:rPr>
+              <a:t>Нагрузка более 20 задач требует внешней очереди</a:t>
+            </a:r>
+          </a:p>
+        </p:txBody>
+      </p:sp>
+    </p:spTree>
+  </p:cSld>
+  <p:clrMapOvr>
+    <a:masterClrMapping/>
+  </p:clrMapOvr>
+</p:sld>
+</file>
+
+<file path=ppt/slides/slide62.xml><?xml version="1.0" encoding="utf-8"?>
+<p:sld xmlns:a="http://schemas.openxmlformats.org/drawingml/2006/main" xmlns:p="http://schemas.openxmlformats.org/presentationml/2006/main" xmlns:r="http://schemas.openxmlformats.org/officeDocument/2006/relationships">
+  <p:cSld>
+    <p:spTree>
+      <p:nvGrpSpPr>
+        <p:cNvPr id="1" name=""/>
+        <p:cNvGrpSpPr/>
+        <p:nvPr/>
+      </p:nvGrpSpPr>
+      <p:grpSpPr/>
+      <p:pic>
+        <p:nvPicPr>
+          <p:cNvPr descr=" " id="2249" name="Google Shape;2249;p83"/>
+          <p:cNvPicPr preferRelativeResize="0"/>
+          <p:nvPr/>
+        </p:nvPicPr>
+        <p:blipFill rotWithShape="1">
+          <a:blip r:embed="rId2">
+            <a:alphaModFix/>
+          </a:blip>
+          <a:srcRect b="0" l="0" r="0" t="0"/>
+          <a:stretch/>
+        </p:blipFill>
+        <p:spPr>
+          <a:xfrm>
+            <a:off x="285748" y="3576507"/>
+            <a:ext cx="2381238" cy="28571"/>
+          </a:xfrm>
+          <a:prstGeom prst="rect">
+            <a:avLst/>
+          </a:prstGeom>
+          <a:noFill/>
+          <a:ln>
+            <a:noFill/>
+          </a:ln>
+        </p:spPr>
+      </p:pic>
+      <p:pic>
+        <p:nvPicPr>
+          <p:cNvPr descr=" " id="2250" name="Google Shape;2250;p83"/>
+          <p:cNvPicPr preferRelativeResize="0"/>
+          <p:nvPr/>
+        </p:nvPicPr>
+        <p:blipFill rotWithShape="1">
+          <a:blip r:embed="rId3">
+            <a:alphaModFix/>
+          </a:blip>
+          <a:srcRect b="0" l="0" r="0" t="0"/>
+          <a:stretch/>
+        </p:blipFill>
+        <p:spPr>
+          <a:xfrm>
+            <a:off x="3143234" y="3576507"/>
+            <a:ext cx="3762355" cy="28571"/>
+          </a:xfrm>
+          <a:prstGeom prst="rect">
+            <a:avLst/>
+          </a:prstGeom>
+          <a:noFill/>
+          <a:ln>
+            <a:noFill/>
+          </a:ln>
+        </p:spPr>
+      </p:pic>
+      <p:sp>
+        <p:nvSpPr>
+          <p:cNvPr id="2251" name="title"/>
+          <p:cNvSpPr txBox="1"/>
+          <p:nvPr/>
+        </p:nvSpPr>
+        <p:spPr>
+          <a:xfrm>
+            <a:off x="274320" y="282943"/>
+            <a:ext cx="6792986" cy="617220"/>
+          </a:xfrm>
+          <a:prstGeom prst="rect">
+            <a:avLst/>
+          </a:prstGeom>
+          <a:noFill/>
+        </p:spPr>
+        <p:txBody>
+          <a:bodyPr wrap="square" lIns="76200" rIns="76200" tIns="50800" bIns="50800">
+            <a:spAutoFit/>
+          </a:bodyPr>
+          <a:lstStyle/>
+          <a:p>
+            <a:pPr algn="l">
+              <a:spcAft>
+                <a:spcPts val="300"/>
+              </a:spcAft>
+              <a:defRPr sz="2400">
+                <a:solidFill>
+                  <a:srgbClr val="000000"/>
+                </a:solidFill>
+                <a:latin typeface="Play"/>
+                <a:ea typeface="Play"/>
+                <a:cs typeface="Play"/>
+              </a:defRPr>
+            </a:pPr>
+            <a:r>
+              <a:rPr sz="2400">
+                <a:solidFill>
+                  <a:srgbClr val="000000"/>
+                </a:solidFill>
+                <a:latin typeface="Play"/>
+                <a:ea typeface="Play"/>
+                <a:cs typeface="Play"/>
+              </a:rPr>
+              <a:t>Потенциальные выгоды</a:t>
+            </a:r>
+          </a:p>
+        </p:txBody>
+      </p:sp>
+      <p:sp>
+        <p:nvSpPr>
+          <p:cNvPr id="2252" name="body"/>
+          <p:cNvSpPr txBox="1"/>
+          <p:nvPr/>
+        </p:nvSpPr>
+        <p:spPr>
+          <a:xfrm>
+            <a:off x="274320" y="1950440"/>
+            <a:ext cx="7189469" cy="994625"/>
+          </a:xfrm>
+          <a:prstGeom prst="rect">
+            <a:avLst/>
+          </a:prstGeom>
+          <a:noFill/>
+        </p:spPr>
+        <p:txBody>
+          <a:bodyPr wrap="square" lIns="76200" rIns="76200" tIns="50800" bIns="50800">
+            <a:spAutoFit/>
+          </a:bodyPr>
+          <a:lstStyle/>
+          <a:p>
+            <a:pPr algn="l">
+              <a:spcAft>
+                <a:spcPts val="300"/>
+              </a:spcAft>
+              <a:defRPr sz="1803" b="1">
+                <a:solidFill>
+                  <a:srgbClr val="000000"/>
+                </a:solidFill>
+                <a:latin typeface="Play"/>
+                <a:ea typeface="Play"/>
+                <a:cs typeface="Play"/>
+              </a:defRPr>
+            </a:pPr>
+            <a:r>
+              <a:rPr sz="1803" b="1">
+                <a:solidFill>
+                  <a:srgbClr val="000000"/>
+                </a:solidFill>
+                <a:latin typeface="Play"/>
+                <a:ea typeface="Play"/>
+                <a:cs typeface="Play"/>
+              </a:rPr>
+              <a:t>• Сокращение времени на создание презентаций</a:t>
+            </a:r>
+          </a:p>
+          <a:p>
+            <a:pPr algn="l">
+              <a:spcAft>
+                <a:spcPts val="300"/>
+              </a:spcAft>
+              <a:defRPr sz="1803" b="1">
+                <a:solidFill>
+                  <a:srgbClr val="000000"/>
+                </a:solidFill>
+                <a:latin typeface="Play"/>
+                <a:ea typeface="Play"/>
+                <a:cs typeface="Play"/>
+              </a:defRPr>
+            </a:pPr>
+            <a:r>
+              <a:rPr sz="1803" b="1">
+                <a:solidFill>
+                  <a:srgbClr val="000000"/>
+                </a:solidFill>
+                <a:latin typeface="Play"/>
+                <a:ea typeface="Play"/>
+                <a:cs typeface="Play"/>
+              </a:rPr>
+              <a:t>• Уменьшение нарушений фирменного стиля</a:t>
+            </a:r>
+          </a:p>
+          <a:p>
+            <a:pPr algn="l">
+              <a:spcAft>
+                <a:spcPts val="300"/>
+              </a:spcAft>
+              <a:defRPr sz="1803" b="1">
+                <a:solidFill>
+                  <a:srgbClr val="000000"/>
+                </a:solidFill>
+                <a:latin typeface="Play"/>
+                <a:ea typeface="Play"/>
+                <a:cs typeface="Play"/>
+              </a:defRPr>
+            </a:pPr>
+            <a:r>
+              <a:rPr sz="1803" b="1">
+                <a:solidFill>
+                  <a:srgbClr val="000000"/>
+                </a:solidFill>
+                <a:latin typeface="Play"/>
+                <a:ea typeface="Play"/>
+                <a:cs typeface="Play"/>
+              </a:rPr>
+              <a:t>• Повышение продуктивности дизайнеров</a:t>
             </a:r>
           </a:p>
         </p:txBody>
@@ -9682,7 +9383,224 @@
       <p:grpSpPr/>
       <p:sp>
         <p:nvSpPr>
-          <p:cNvPr id="2" name="title"/>
+          <p:cNvPr id="1027" name="Google Shape;1027;p65"/>
+          <p:cNvSpPr/>
+          <p:nvPr/>
+        </p:nvSpPr>
+        <p:spPr>
+          <a:xfrm>
+            <a:off x="6064222" y="1209852"/>
+            <a:ext cx="2793985" cy="3014270"/>
+          </a:xfrm>
+          <a:prstGeom prst="roundRect">
+            <a:avLst>
+              <a:gd fmla="val 3436" name="adj"/>
+            </a:avLst>
+          </a:prstGeom>
+          <a:solidFill>
+            <a:schemeClr val="lt2"/>
+          </a:solidFill>
+          <a:ln>
+            <a:noFill/>
+          </a:ln>
+        </p:spPr>
+        <p:txBody>
+          <a:bodyPr anchorCtr="0" anchor="ctr" bIns="91425" lIns="91425" spcFirstLastPara="1" rIns="91425" wrap="square" tIns="91425">
+            <a:noAutofit/>
+          </a:bodyPr>
+          <a:lstStyle/>
+          <a:p>
+            <a:pPr indent="0" lvl="0" marL="0" rtl="0" algn="l">
+              <a:spcBef>
+                <a:spcPts val="0"/>
+              </a:spcBef>
+              <a:spcAft>
+                <a:spcPts val="0"/>
+              </a:spcAft>
+              <a:buNone/>
+            </a:pPr>
+            <a:r>
+              <a:t/>
+            </a:r>
+            <a:endParaRPr/>
+          </a:p>
+        </p:txBody>
+      </p:sp>
+      <p:sp>
+        <p:nvSpPr>
+          <p:cNvPr id="1029" name="Google Shape;1029;p65"/>
+          <p:cNvSpPr/>
+          <p:nvPr/>
+        </p:nvSpPr>
+        <p:spPr>
+          <a:xfrm>
+            <a:off x="3174981" y="1209852"/>
+            <a:ext cx="2793985" cy="3014270"/>
+          </a:xfrm>
+          <a:prstGeom prst="roundRect">
+            <a:avLst>
+              <a:gd fmla="val 3436" name="adj"/>
+            </a:avLst>
+          </a:prstGeom>
+          <a:solidFill>
+            <a:schemeClr val="lt2"/>
+          </a:solidFill>
+          <a:ln>
+            <a:noFill/>
+          </a:ln>
+        </p:spPr>
+        <p:txBody>
+          <a:bodyPr anchorCtr="0" anchor="ctr" bIns="91425" lIns="91425" spcFirstLastPara="1" rIns="91425" wrap="square" tIns="91425">
+            <a:noAutofit/>
+          </a:bodyPr>
+          <a:lstStyle/>
+          <a:p>
+            <a:pPr indent="0" lvl="0" marL="0" rtl="0" algn="l">
+              <a:spcBef>
+                <a:spcPts val="0"/>
+              </a:spcBef>
+              <a:spcAft>
+                <a:spcPts val="0"/>
+              </a:spcAft>
+              <a:buNone/>
+            </a:pPr>
+            <a:r>
+              <a:t/>
+            </a:r>
+            <a:endParaRPr/>
+          </a:p>
+        </p:txBody>
+      </p:sp>
+      <p:sp>
+        <p:nvSpPr>
+          <p:cNvPr id="1031" name="Google Shape;1031;p65"/>
+          <p:cNvSpPr/>
+          <p:nvPr/>
+        </p:nvSpPr>
+        <p:spPr>
+          <a:xfrm>
+            <a:off x="285749" y="1209852"/>
+            <a:ext cx="2793985" cy="3014270"/>
+          </a:xfrm>
+          <a:prstGeom prst="roundRect">
+            <a:avLst>
+              <a:gd fmla="val 3436" name="adj"/>
+            </a:avLst>
+          </a:prstGeom>
+          <a:solidFill>
+            <a:schemeClr val="lt2"/>
+          </a:solidFill>
+          <a:ln>
+            <a:noFill/>
+          </a:ln>
+        </p:spPr>
+        <p:txBody>
+          <a:bodyPr anchorCtr="0" anchor="ctr" bIns="91425" lIns="91425" spcFirstLastPara="1" rIns="91425" wrap="square" tIns="91425">
+            <a:noAutofit/>
+          </a:bodyPr>
+          <a:lstStyle/>
+          <a:p>
+            <a:pPr indent="0" lvl="0" marL="0" rtl="0" algn="l">
+              <a:spcBef>
+                <a:spcPts val="0"/>
+              </a:spcBef>
+              <a:spcAft>
+                <a:spcPts val="0"/>
+              </a:spcAft>
+              <a:buNone/>
+            </a:pPr>
+            <a:r>
+              <a:t/>
+            </a:r>
+            <a:endParaRPr/>
+          </a:p>
+        </p:txBody>
+      </p:sp>
+      <p:sp>
+        <p:nvSpPr>
+          <p:cNvPr id="1032" name="Google Shape;1032;p65"/>
+          <p:cNvSpPr/>
+          <p:nvPr/>
+        </p:nvSpPr>
+        <p:spPr>
+          <a:xfrm>
+            <a:off x="285748" y="286047"/>
+            <a:ext cx="8572456" cy="3938075"/>
+          </a:xfrm>
+          <a:prstGeom prst="rect">
+            <a:avLst/>
+          </a:prstGeom>
+          <a:noFill/>
+          <a:ln>
+            <a:noFill/>
+          </a:ln>
+        </p:spPr>
+        <p:txBody>
+          <a:bodyPr anchorCtr="0" anchor="ctr" bIns="91425" lIns="91425" spcFirstLastPara="1" rIns="91425" wrap="square" tIns="91425">
+            <a:noAutofit/>
+          </a:bodyPr>
+          <a:lstStyle/>
+          <a:p>
+            <a:pPr indent="0" lvl="0" marL="0" rtl="0" algn="l">
+              <a:spcBef>
+                <a:spcPts val="0"/>
+              </a:spcBef>
+              <a:spcAft>
+                <a:spcPts val="0"/>
+              </a:spcAft>
+              <a:buNone/>
+            </a:pPr>
+            <a:r>
+              <a:t/>
+            </a:r>
+            <a:endParaRPr/>
+          </a:p>
+        </p:txBody>
+      </p:sp>
+      <p:sp>
+        <p:nvSpPr>
+          <p:cNvPr id="1033" name="Google Shape;1033;p65"/>
+          <p:cNvSpPr/>
+          <p:nvPr/>
+        </p:nvSpPr>
+        <p:spPr>
+          <a:xfrm>
+            <a:off x="285748" y="1209852"/>
+            <a:ext cx="8572456" cy="3014270"/>
+          </a:xfrm>
+          <a:prstGeom prst="rect">
+            <a:avLst/>
+          </a:prstGeom>
+          <a:noFill/>
+          <a:ln>
+            <a:noFill/>
+          </a:ln>
+        </p:spPr>
+        <p:txBody>
+          <a:bodyPr anchorCtr="0" anchor="ctr" bIns="91425" lIns="91425" spcFirstLastPara="1" rIns="91425" wrap="square" tIns="91425">
+            <a:noAutofit/>
+          </a:bodyPr>
+          <a:lstStyle/>
+          <a:p>
+            <a:pPr indent="0" lvl="0" marL="0" rtl="0" algn="l">
+              <a:spcBef>
+                <a:spcPts val="0"/>
+              </a:spcBef>
+              <a:spcAft>
+                <a:spcPts val="0"/>
+              </a:spcAft>
+              <a:buNone/>
+            </a:pPr>
+            <a:r>
+              <a:t/>
+            </a:r>
+            <a:endParaRPr/>
+          </a:p>
+        </p:txBody>
+      </p:sp>
+      <p:sp>
+        <p:nvSpPr>
+          <p:cNvPr id="1034" name="title"/>
           <p:cNvSpPr txBox="1"/>
           <p:nvPr/>
         </p:nvSpPr>
@@ -9724,21 +9642,21 @@
                 <a:ea typeface="Play"/>
                 <a:cs typeface="Play"/>
               </a:rPr>
-              <a:t>План пилота</a:t>
+              <a:t>Что мы просим решить</a:t>
             </a:r>
           </a:p>
         </p:txBody>
       </p:sp>
       <p:sp>
         <p:nvSpPr>
-          <p:cNvPr id="3" name="body_left"/>
+          <p:cNvPr id="1035" name="body"/>
           <p:cNvSpPr txBox="1"/>
           <p:nvPr/>
         </p:nvSpPr>
         <p:spPr>
           <a:xfrm>
             <a:off x="274320" y="1414513"/>
-            <a:ext cx="3457574" cy="2602405"/>
+            <a:ext cx="8344814" cy="1046136"/>
           </a:xfrm>
           <a:prstGeom prst="rect">
             <a:avLst/>
@@ -9755,7 +9673,7 @@
               <a:spcAft>
                 <a:spcPts val="300"/>
               </a:spcAft>
-              <a:defRPr sz="1803" b="1">
+              <a:defRPr sz="1406">
                 <a:solidFill>
                   <a:srgbClr val="000000"/>
                 </a:solidFill>
@@ -9765,7 +9683,7 @@
               </a:defRPr>
             </a:pPr>
             <a:r>
-              <a:rPr sz="1803" b="1">
+              <a:rPr sz="1406">
                 <a:solidFill>
                   <a:srgbClr val="000000"/>
                 </a:solidFill>
@@ -9773,7 +9691,7 @@
                 <a:ea typeface="Play"/>
                 <a:cs typeface="Play"/>
               </a:rPr>
-              <a:t>• План пилота: 6 недель, 2 команды, 68 презентаций</a:t>
+              <a:t>• Одобрить запуск сервиса на всю компанию</a:t>
             </a:r>
           </a:p>
           <a:p>
@@ -9781,7 +9699,7 @@
               <a:spcAft>
                 <a:spcPts val="300"/>
               </a:spcAft>
-              <a:defRPr sz="1803" b="1">
+              <a:defRPr sz="1406">
                 <a:solidFill>
                   <a:srgbClr val="000000"/>
                 </a:solidFill>
@@ -9791,7 +9709,7 @@
               </a:defRPr>
             </a:pPr>
             <a:r>
-              <a:rPr sz="1803" b="1">
+              <a:rPr sz="1406">
                 <a:solidFill>
                   <a:srgbClr val="000000"/>
                 </a:solidFill>
@@ -9799,7 +9717,7 @@
                 <a:ea typeface="Play"/>
                 <a:cs typeface="Play"/>
               </a:rPr>
-              <a:t>• Цель – доказать экономию времени и соблюдение стиля</a:t>
+              <a:t>• Обеспечить инфраструктуру и интеграцию</a:t>
             </a:r>
           </a:p>
           <a:p>
@@ -9807,7 +9725,7 @@
               <a:spcAft>
                 <a:spcPts val="300"/>
               </a:spcAft>
-              <a:defRPr sz="1803" b="1">
+              <a:defRPr sz="1406">
                 <a:solidFill>
                   <a:srgbClr val="000000"/>
                 </a:solidFill>
@@ -9817,7 +9735,7 @@
               </a:defRPr>
             </a:pPr>
             <a:r>
-              <a:rPr sz="1803" b="1">
+              <a:rPr sz="1406">
                 <a:solidFill>
                   <a:srgbClr val="000000"/>
                 </a:solidFill>
@@ -9825,82 +9743,7 @@
                 <a:ea typeface="Play"/>
                 <a:cs typeface="Play"/>
               </a:rPr>
-              <a:t>• После пилота масштабируем на 4 команды в Q3 2026</a:t>
-            </a:r>
-          </a:p>
-        </p:txBody>
-      </p:sp>
-      <p:sp>
-        <p:nvSpPr>
-          <p:cNvPr id="4" name="body_right"/>
-          <p:cNvSpPr txBox="1"/>
-          <p:nvPr/>
-        </p:nvSpPr>
-        <p:spPr>
-          <a:xfrm>
-            <a:off x="4006215" y="1414513"/>
-            <a:ext cx="3457574" cy="2602405"/>
-          </a:xfrm>
-          <a:prstGeom prst="rect">
-            <a:avLst/>
-          </a:prstGeom>
-          <a:noFill/>
-        </p:spPr>
-        <p:txBody>
-          <a:bodyPr wrap="square" lIns="76200" rIns="76200" tIns="50800" bIns="50800">
-            <a:spAutoFit/>
-          </a:bodyPr>
-          <a:lstStyle/>
-          <a:p>
-            <a:pPr algn="l">
-              <a:spcAft>
-                <a:spcPts val="300"/>
-              </a:spcAft>
-              <a:defRPr sz="1803" b="1">
-                <a:solidFill>
-                  <a:srgbClr val="000000"/>
-                </a:solidFill>
-                <a:latin typeface="Play"/>
-                <a:ea typeface="Play"/>
-                <a:cs typeface="Play"/>
-              </a:defRPr>
-            </a:pPr>
-            <a:r>
-              <a:rPr sz="1803" b="1">
-                <a:solidFill>
-                  <a:srgbClr val="000000"/>
-                </a:solidFill>
-                <a:latin typeface="Play"/>
-                <a:ea typeface="Play"/>
-                <a:cs typeface="Play"/>
-              </a:rPr>
-              <a:t>• Далее – доступ для всей компании в Q4 2026</a:t>
-            </a:r>
-          </a:p>
-          <a:p>
-            <a:pPr algn="l">
-              <a:spcAft>
-                <a:spcPts val="300"/>
-              </a:spcAft>
-              <a:defRPr sz="1803" b="1">
-                <a:solidFill>
-                  <a:srgbClr val="000000"/>
-                </a:solidFill>
-                <a:latin typeface="Play"/>
-                <a:ea typeface="Play"/>
-                <a:cs typeface="Play"/>
-              </a:defRPr>
-            </a:pPr>
-            <a:r>
-              <a:rPr sz="1803" b="1">
-                <a:solidFill>
-                  <a:srgbClr val="000000"/>
-                </a:solidFill>
-                <a:latin typeface="Play"/>
-                <a:ea typeface="Play"/>
-                <a:cs typeface="Play"/>
-              </a:rPr>
-              <a:t>• И генерация иллюстраций в Q1 2027</a:t>
+              <a:t>• Поддерживать модель и обновления</a:t>
             </a:r>
           </a:p>
         </p:txBody>
@@ -9932,7 +9775,7 @@
         <p:spPr>
           <a:xfrm>
             <a:off x="445963" y="1555901"/>
-            <a:ext cx="8300171" cy="2834017"/>
+            <a:ext cx="8300171" cy="2189031"/>
           </a:xfrm>
           <a:prstGeom prst="roundRect">
             <a:avLst/>
@@ -9978,7 +9821,7 @@
         <p:spPr>
           <a:xfrm>
             <a:off x="572963" y="1682901"/>
-            <a:ext cx="4373118" cy="1183640"/>
+            <a:ext cx="4373118" cy="655320"/>
           </a:xfrm>
           <a:prstGeom prst="rect">
             <a:avLst/>
@@ -10013,21 +9856,21 @@
                 <a:ea typeface="Play"/>
                 <a:cs typeface="Play"/>
               </a:rPr>
-              <a:t>Что мы просим решить</a:t>
+              <a:t>Вывод</a:t>
             </a:r>
           </a:p>
         </p:txBody>
       </p:sp>
       <p:sp>
         <p:nvSpPr>
-          <p:cNvPr id="4" name="body_left"/>
+          <p:cNvPr id="4" name="body"/>
           <p:cNvSpPr txBox="1"/>
           <p:nvPr/>
         </p:nvSpPr>
         <p:spPr>
           <a:xfrm>
-            <a:off x="572963" y="3046564"/>
-            <a:ext cx="3885925" cy="1376845"/>
+            <a:off x="572963" y="2920982"/>
+            <a:ext cx="8046171" cy="696950"/>
           </a:xfrm>
           <a:prstGeom prst="rect">
             <a:avLst/>
@@ -10044,7 +9887,7 @@
               <a:spcAft>
                 <a:spcPts val="300"/>
               </a:spcAft>
-              <a:defRPr sz="1688">
+              <a:defRPr sz="1803">
                 <a:solidFill>
                   <a:srgbClr val="000000"/>
                 </a:solidFill>
@@ -10054,7 +9897,7 @@
               </a:defRPr>
             </a:pPr>
             <a:r>
-              <a:rPr sz="1688">
+              <a:rPr sz="1803">
                 <a:solidFill>
                   <a:srgbClr val="000000"/>
                 </a:solidFill>
@@ -10062,108 +9905,7 @@
                 <a:ea typeface="Play"/>
                 <a:cs typeface="Play"/>
               </a:rPr>
-              <a:t>• Запрос решения о запуске сервиса на всю компанию</a:t>
-            </a:r>
-          </a:p>
-          <a:p>
-            <a:pPr algn="l">
-              <a:spcAft>
-                <a:spcPts val="300"/>
-              </a:spcAft>
-              <a:defRPr sz="1688">
-                <a:solidFill>
-                  <a:srgbClr val="000000"/>
-                </a:solidFill>
-                <a:latin typeface="Play"/>
-                <a:ea typeface="Play"/>
-                <a:cs typeface="Play"/>
-              </a:defRPr>
-            </a:pPr>
-            <a:r>
-              <a:rPr sz="1688">
-                <a:solidFill>
-                  <a:srgbClr val="000000"/>
-                </a:solidFill>
-                <a:latin typeface="Play"/>
-                <a:ea typeface="Play"/>
-                <a:cs typeface="Play"/>
-              </a:rPr>
-              <a:t>• Ожидаем одобрение руководства к концу Q4 2026</a:t>
-            </a:r>
-          </a:p>
-        </p:txBody>
-      </p:sp>
-      <p:sp>
-        <p:nvSpPr>
-          <p:cNvPr id="5" name="body_right"/>
-          <p:cNvSpPr txBox="1"/>
-          <p:nvPr/>
-        </p:nvSpPr>
-        <p:spPr>
-          <a:xfrm>
-            <a:off x="4733208" y="3046564"/>
-            <a:ext cx="3885925" cy="1376845"/>
-          </a:xfrm>
-          <a:prstGeom prst="rect">
-            <a:avLst/>
-          </a:prstGeom>
-          <a:noFill/>
-        </p:spPr>
-        <p:txBody>
-          <a:bodyPr wrap="square" lIns="76200" rIns="76200" tIns="50800" bIns="50800">
-            <a:spAutoFit/>
-          </a:bodyPr>
-          <a:lstStyle/>
-          <a:p>
-            <a:pPr algn="l">
-              <a:spcAft>
-                <a:spcPts val="300"/>
-              </a:spcAft>
-              <a:defRPr sz="1688">
-                <a:solidFill>
-                  <a:srgbClr val="000000"/>
-                </a:solidFill>
-                <a:latin typeface="Play"/>
-                <a:ea typeface="Play"/>
-                <a:cs typeface="Play"/>
-              </a:defRPr>
-            </a:pPr>
-            <a:r>
-              <a:rPr sz="1688">
-                <a:solidFill>
-                  <a:srgbClr val="000000"/>
-                </a:solidFill>
-                <a:latin typeface="Play"/>
-                <a:ea typeface="Play"/>
-                <a:cs typeface="Play"/>
-              </a:rPr>
-              <a:t>• При поддержке выделить бюджет на инфраструктуру и обучение</a:t>
-            </a:r>
-          </a:p>
-          <a:p>
-            <a:pPr algn="l">
-              <a:spcAft>
-                <a:spcPts val="300"/>
-              </a:spcAft>
-              <a:defRPr sz="1688">
-                <a:solidFill>
-                  <a:srgbClr val="000000"/>
-                </a:solidFill>
-                <a:latin typeface="Play"/>
-                <a:ea typeface="Play"/>
-                <a:cs typeface="Play"/>
-              </a:defRPr>
-            </a:pPr>
-            <a:r>
-              <a:rPr sz="1688">
-                <a:solidFill>
-                  <a:srgbClr val="000000"/>
-                </a:solidFill>
-                <a:latin typeface="Play"/>
-                <a:ea typeface="Play"/>
-                <a:cs typeface="Play"/>
-              </a:rPr>
-              <a:t>• Готовы предоставить детальный план внедрения</a:t>
+              <a:t>Успешный запуск позволит ускорить создание презентаций и повысить качество</a:t>
             </a:r>
           </a:p>
         </p:txBody>

--- a/samples/VK_Tech_шаблон__split.pptx
+++ b/samples/VK_Tech_шаблон__split.pptx
@@ -261,193 +261,6 @@
 </p:presentation>
 </file>
 
-<file path=ppt/charts/chart1.xml><?xml version="1.0" encoding="utf-8"?>
-<c:chartSpace xmlns:c="http://schemas.openxmlformats.org/drawingml/2006/chart" xmlns:a="http://schemas.openxmlformats.org/drawingml/2006/main" xmlns:r="http://schemas.openxmlformats.org/officeDocument/2006/relationships">
-  <c:date1904 val="0"/>
-  <c:chart>
-    <c:autoTitleDeleted val="1"/>
-    <c:plotArea>
-      <c:barChart>
-        <c:barDir val="col"/>
-        <c:grouping val="clustered"/>
-        <c:ser>
-          <c:idx val="0"/>
-          <c:order val="0"/>
-          <c:tx>
-            <c:strRef>
-              <c:f>Sheet1!$B$1</c:f>
-              <c:strCache>
-                <c:ptCount val="1"/>
-                <c:pt idx="0">
-                  <c:v>Время</c:v>
-                </c:pt>
-              </c:strCache>
-            </c:strRef>
-          </c:tx>
-          <c:spPr>
-            <a:solidFill>
-              <a:srgbClr val="0077FF"/>
-            </a:solidFill>
-            <a:ln>
-              <a:solidFill>
-                <a:srgbClr val="0077FF"/>
-              </a:solidFill>
-            </a:ln>
-          </c:spPr>
-          <c:cat>
-            <c:strRef>
-              <c:f>Sheet1!$A$2:$A$3</c:f>
-              <c:strCache>
-                <c:ptCount val="2"/>
-                <c:pt idx="0">
-                  <c:v>Сборка</c:v>
-                </c:pt>
-                <c:pt idx="1">
-                  <c:v>Правки</c:v>
-                </c:pt>
-              </c:strCache>
-            </c:strRef>
-          </c:cat>
-          <c:val>
-            <c:numRef>
-              <c:f>Sheet1!$B$2:$B$3</c:f>
-              <c:numCache>
-                <c:formatCode>General</c:formatCode>
-                <c:ptCount val="2"/>
-                <c:pt idx="0">
-                  <c:v>186.0</c:v>
-                </c:pt>
-                <c:pt idx="1">
-                  <c:v>74.0</c:v>
-                </c:pt>
-              </c:numCache>
-            </c:numRef>
-          </c:val>
-        </c:ser>
-        <c:gapWidth val="60"/>
-        <c:axId val="-2068027336"/>
-        <c:axId val="-2113994440"/>
-      </c:barChart>
-      <c:catAx>
-        <c:axId val="-2068027336"/>
-        <c:scaling>
-          <c:orientation val="minMax"/>
-        </c:scaling>
-        <c:delete val="0"/>
-        <c:axPos val="b"/>
-        <c:majorTickMark val="out"/>
-        <c:minorTickMark val="none"/>
-        <c:tickLblPos val="nextTo"/>
-        <c:txPr>
-          <a:bodyPr/>
-          <a:lstStyle/>
-          <a:p>
-            <a:pPr>
-              <a:defRPr sz="1100" b="0">
-                <a:solidFill>
-                  <a:srgbClr val="000000"/>
-                </a:solidFill>
-                <a:latin typeface="Play"/>
-                <a:ea typeface="Play"/>
-                <a:cs typeface="Play"/>
-              </a:defRPr>
-            </a:pPr>
-          </a:p>
-        </c:txPr>
-        <c:crossAx val="-2113994440"/>
-        <c:crosses val="autoZero"/>
-        <c:auto val="1"/>
-        <c:lblAlgn val="ctr"/>
-        <c:lblOffset val="100"/>
-        <c:noMultiLvlLbl val="0"/>
-      </c:catAx>
-      <c:valAx>
-        <c:axId val="-2113994440"/>
-        <c:scaling/>
-        <c:delete val="0"/>
-        <c:axPos val="l"/>
-        <c:majorGridlines>
-          <c:spPr>
-            <a:ln w="9525">
-              <a:solidFill>
-                <a:srgbClr val="D1D1D1"/>
-              </a:solidFill>
-            </a:ln>
-          </c:spPr>
-        </c:majorGridlines>
-        <c:title>
-          <c:tx>
-            <c:rich>
-              <a:bodyPr/>
-              <a:lstStyle/>
-              <a:p>
-                <a:pPr>
-                  <a:defRPr sz="1100" b="0">
-                    <a:solidFill>
-                      <a:srgbClr val="000000"/>
-                    </a:solidFill>
-                    <a:latin typeface="Play"/>
-                    <a:ea typeface="Play"/>
-                    <a:cs typeface="Play"/>
-                  </a:defRPr>
-                </a:pPr>
-                <a:r>
-                  <a:t>мин</a:t>
-                </a:r>
-              </a:p>
-            </c:rich>
-          </c:tx>
-          <c:layout/>
-          <c:overlay val="0"/>
-        </c:title>
-        <c:majorTickMark val="out"/>
-        <c:minorTickMark val="none"/>
-        <c:tickLblPos val="nextTo"/>
-        <c:txPr>
-          <a:bodyPr/>
-          <a:lstStyle/>
-          <a:p>
-            <a:pPr>
-              <a:defRPr sz="1100" b="0">
-                <a:solidFill>
-                  <a:srgbClr val="000000"/>
-                </a:solidFill>
-                <a:latin typeface="Play"/>
-                <a:ea typeface="Play"/>
-                <a:cs typeface="Play"/>
-              </a:defRPr>
-            </a:pPr>
-          </a:p>
-        </c:txPr>
-        <c:crossAx val="-2068027336"/>
-        <c:crosses val="autoZero"/>
-      </c:valAx>
-    </c:plotArea>
-    <c:dispBlanksAs val="gap"/>
-  </c:chart>
-  <c:txPr>
-    <a:bodyPr/>
-    <a:lstStyle/>
-    <a:p>
-      <a:pPr>
-        <a:defRPr sz="1200" b="0">
-          <a:solidFill>
-            <a:srgbClr val="000000"/>
-          </a:solidFill>
-          <a:latin typeface="Play"/>
-          <a:ea typeface="Play"/>
-          <a:cs typeface="Play"/>
-        </a:defRPr>
-      </a:pPr>
-      <a:endParaRPr lang="en-US"/>
-    </a:p>
-  </c:txPr>
-  <c:externalData r:id="rId1">
-    <c:autoUpdate val="0"/>
-  </c:externalData>
-</c:chartSpace>
-</file>
-
 <file path=ppt/notesMasters/notesMaster1.xml><?xml version="1.0" encoding="utf-8"?>
 <p:notesMaster xmlns:a="http://schemas.openxmlformats.org/drawingml/2006/main" xmlns:r="http://schemas.openxmlformats.org/officeDocument/2006/relationships" xmlns:mc="http://schemas.openxmlformats.org/markup-compatibility/2006" xmlns:mv="urn:schemas-microsoft-com:mac:vml" xmlns:p="http://schemas.openxmlformats.org/presentationml/2006/main" xmlns:c="http://schemas.openxmlformats.org/drawingml/2006/chart" xmlns:dgm="http://schemas.openxmlformats.org/drawingml/2006/diagram" xmlns:o="urn:schemas-microsoft-com:office:office" xmlns:v="urn:schemas-microsoft-com:vml" xmlns:pvml="urn:schemas-microsoft-com:office:powerpoint" xmlns:com="http://schemas.openxmlformats.org/drawingml/2006/compatibility" xmlns:p14="http://schemas.microsoft.com/office/powerpoint/2010/main" xmlns:p15="http://schemas.microsoft.com/office/powerpoint/2012/main" xmlns:ahyp="http://schemas.microsoft.com/office/drawing/2018/hyperlinkcolor">
   <p:cSld>
@@ -5450,7 +5263,7 @@
         <p:spPr>
           <a:xfrm>
             <a:off x="2159000" y="1243485"/>
-            <a:ext cx="4542261" cy="1248791"/>
+            <a:ext cx="4542261" cy="949960"/>
           </a:xfrm>
           <a:prstGeom prst="roundRect">
             <a:avLst/>
@@ -5496,7 +5309,7 @@
         <p:spPr>
           <a:xfrm>
             <a:off x="2286000" y="1370485"/>
-            <a:ext cx="4288261" cy="1020191"/>
+            <a:ext cx="4288261" cy="721360"/>
           </a:xfrm>
           <a:prstGeom prst="rect">
             <a:avLst/>
@@ -5513,7 +5326,7 @@
               <a:spcAft>
                 <a:spcPts val="300"/>
               </a:spcAft>
-              <a:defRPr sz="2705">
+              <a:defRPr sz="1800">
                 <a:solidFill>
                   <a:srgbClr val="FFFFFF"/>
                 </a:solidFill>
@@ -5523,7 +5336,7 @@
               </a:defRPr>
             </a:pPr>
             <a:r>
-              <a:rPr sz="2705">
+              <a:rPr sz="1800">
                 <a:solidFill>
                   <a:srgbClr val="FFFFFF"/>
                 </a:solidFill>
@@ -5531,7 +5344,7 @@
                 <a:ea typeface="Play"/>
                 <a:cs typeface="Play"/>
               </a:rPr>
-              <a:t>Автоматическая вёрстка презентаций</a:t>
+              <a:t>Защита инициативы: сервис автоматической вёрстки презентаций</a:t>
             </a:r>
           </a:p>
         </p:txBody>
@@ -5556,14 +5369,14 @@
       <p:grpSpPr/>
       <p:sp>
         <p:nvSpPr>
-          <p:cNvPr id="532" name="Google Shape;532;p53"/>
+          <p:cNvPr id="662" name="Google Shape;662;p55"/>
           <p:cNvSpPr/>
           <p:nvPr/>
         </p:nvSpPr>
         <p:spPr>
           <a:xfrm>
-            <a:off x="303214" y="1022533"/>
-            <a:ext cx="8451939" cy="1433588"/>
+            <a:off x="8667705" y="4666977"/>
+            <a:ext cx="190499" cy="190475"/>
           </a:xfrm>
           <a:prstGeom prst="rect">
             <a:avLst/>
@@ -5597,14 +5410,14 @@
       </p:sp>
       <p:sp>
         <p:nvSpPr>
-          <p:cNvPr id="541" name="Google Shape;541;p53"/>
+          <p:cNvPr id="663" name="Google Shape;663;p55"/>
           <p:cNvSpPr/>
           <p:nvPr/>
         </p:nvSpPr>
         <p:spPr>
           <a:xfrm>
-            <a:off x="3831556" y="1022533"/>
-            <a:ext cx="1395256" cy="1433588"/>
+            <a:off x="285748" y="286047"/>
+            <a:ext cx="8572456" cy="3938075"/>
           </a:xfrm>
           <a:prstGeom prst="rect">
             <a:avLst/>
@@ -5638,14 +5451,14 @@
       </p:sp>
       <p:sp>
         <p:nvSpPr>
-          <p:cNvPr id="553" name="Google Shape;553;p53"/>
+          <p:cNvPr id="664" name="Google Shape;664;p55"/>
           <p:cNvSpPr/>
           <p:nvPr/>
         </p:nvSpPr>
         <p:spPr>
           <a:xfrm>
-            <a:off x="276488" y="2955549"/>
-            <a:ext cx="8451939" cy="1433588"/>
+            <a:off x="285748" y="1209852"/>
+            <a:ext cx="8572456" cy="3014270"/>
           </a:xfrm>
           <a:prstGeom prst="rect">
             <a:avLst/>
@@ -5679,19 +5492,23 @@
       </p:sp>
       <p:sp>
         <p:nvSpPr>
-          <p:cNvPr id="554" name="Google Shape;554;p53"/>
+          <p:cNvPr id="665" name="Google Shape;665;p55"/>
           <p:cNvSpPr/>
           <p:nvPr/>
         </p:nvSpPr>
         <p:spPr>
           <a:xfrm>
-            <a:off x="303214" y="2797849"/>
-            <a:ext cx="8451939" cy="1433588"/>
-          </a:xfrm>
-          <a:prstGeom prst="rect">
-            <a:avLst/>
+            <a:off x="285749" y="1209852"/>
+            <a:ext cx="2071677" cy="3014270"/>
+          </a:xfrm>
+          <a:prstGeom prst="roundRect">
+            <a:avLst>
+              <a:gd fmla="val 4634" name="adj"/>
+            </a:avLst>
           </a:prstGeom>
-          <a:noFill/>
+          <a:solidFill>
+            <a:schemeClr val="lt2"/>
+          </a:solidFill>
           <a:ln>
             <a:noFill/>
           </a:ln>
@@ -5720,7 +5537,322 @@
       </p:sp>
       <p:sp>
         <p:nvSpPr>
-          <p:cNvPr id="555" name="title"/>
+          <p:cNvPr id="667" name="Google Shape;667;p55"/>
+          <p:cNvSpPr/>
+          <p:nvPr/>
+        </p:nvSpPr>
+        <p:spPr>
+          <a:xfrm>
+            <a:off x="438148" y="1362233"/>
+            <a:ext cx="76199" cy="76190"/>
+          </a:xfrm>
+          <a:prstGeom prst="roundRect">
+            <a:avLst>
+              <a:gd fmla="val 31500" name="adj"/>
+            </a:avLst>
+          </a:prstGeom>
+          <a:solidFill>
+            <a:srgbClr val="0077FF"/>
+          </a:solidFill>
+          <a:ln>
+            <a:noFill/>
+          </a:ln>
+        </p:spPr>
+        <p:txBody>
+          <a:bodyPr anchorCtr="0" anchor="ctr" bIns="91425" lIns="91425" spcFirstLastPara="1" rIns="91425" wrap="square" tIns="91425">
+            <a:noAutofit/>
+          </a:bodyPr>
+          <a:lstStyle/>
+          <a:p>
+            <a:pPr indent="0" lvl="0" marL="0" rtl="0" algn="l">
+              <a:spcBef>
+                <a:spcPts val="0"/>
+              </a:spcBef>
+              <a:spcAft>
+                <a:spcPts val="0"/>
+              </a:spcAft>
+              <a:buNone/>
+            </a:pPr>
+            <a:r>
+              <a:t/>
+            </a:r>
+            <a:endParaRPr/>
+          </a:p>
+        </p:txBody>
+      </p:sp>
+      <p:sp>
+        <p:nvSpPr>
+          <p:cNvPr id="670" name="Google Shape;670;p55"/>
+          <p:cNvSpPr/>
+          <p:nvPr/>
+        </p:nvSpPr>
+        <p:spPr>
+          <a:xfrm>
+            <a:off x="2452675" y="1209852"/>
+            <a:ext cx="2071677" cy="3014270"/>
+          </a:xfrm>
+          <a:prstGeom prst="roundRect">
+            <a:avLst>
+              <a:gd fmla="val 4634" name="adj"/>
+            </a:avLst>
+          </a:prstGeom>
+          <a:solidFill>
+            <a:schemeClr val="lt2"/>
+          </a:solidFill>
+          <a:ln>
+            <a:noFill/>
+          </a:ln>
+        </p:spPr>
+        <p:txBody>
+          <a:bodyPr anchorCtr="0" anchor="ctr" bIns="91425" lIns="91425" spcFirstLastPara="1" rIns="91425" wrap="square" tIns="91425">
+            <a:noAutofit/>
+          </a:bodyPr>
+          <a:lstStyle/>
+          <a:p>
+            <a:pPr indent="0" lvl="0" marL="0" rtl="0" algn="l">
+              <a:spcBef>
+                <a:spcPts val="0"/>
+              </a:spcBef>
+              <a:spcAft>
+                <a:spcPts val="0"/>
+              </a:spcAft>
+              <a:buNone/>
+            </a:pPr>
+            <a:r>
+              <a:t/>
+            </a:r>
+            <a:endParaRPr/>
+          </a:p>
+        </p:txBody>
+      </p:sp>
+      <p:sp>
+        <p:nvSpPr>
+          <p:cNvPr id="672" name="Google Shape;672;p55"/>
+          <p:cNvSpPr/>
+          <p:nvPr/>
+        </p:nvSpPr>
+        <p:spPr>
+          <a:xfrm>
+            <a:off x="2605074" y="1362233"/>
+            <a:ext cx="76199" cy="76190"/>
+          </a:xfrm>
+          <a:prstGeom prst="roundRect">
+            <a:avLst>
+              <a:gd fmla="val 31500" name="adj"/>
+            </a:avLst>
+          </a:prstGeom>
+          <a:solidFill>
+            <a:srgbClr val="0077FF"/>
+          </a:solidFill>
+          <a:ln>
+            <a:noFill/>
+          </a:ln>
+        </p:spPr>
+        <p:txBody>
+          <a:bodyPr anchorCtr="0" anchor="ctr" bIns="91425" lIns="91425" spcFirstLastPara="1" rIns="91425" wrap="square" tIns="91425">
+            <a:noAutofit/>
+          </a:bodyPr>
+          <a:lstStyle/>
+          <a:p>
+            <a:pPr indent="0" lvl="0" marL="0" rtl="0" algn="l">
+              <a:spcBef>
+                <a:spcPts val="0"/>
+              </a:spcBef>
+              <a:spcAft>
+                <a:spcPts val="0"/>
+              </a:spcAft>
+              <a:buNone/>
+            </a:pPr>
+            <a:r>
+              <a:t/>
+            </a:r>
+            <a:endParaRPr/>
+          </a:p>
+        </p:txBody>
+      </p:sp>
+      <p:sp>
+        <p:nvSpPr>
+          <p:cNvPr id="675" name="Google Shape;675;p55"/>
+          <p:cNvSpPr/>
+          <p:nvPr/>
+        </p:nvSpPr>
+        <p:spPr>
+          <a:xfrm>
+            <a:off x="4619601" y="1209852"/>
+            <a:ext cx="2071677" cy="3014270"/>
+          </a:xfrm>
+          <a:prstGeom prst="roundRect">
+            <a:avLst>
+              <a:gd fmla="val 4634" name="adj"/>
+            </a:avLst>
+          </a:prstGeom>
+          <a:solidFill>
+            <a:schemeClr val="lt2"/>
+          </a:solidFill>
+          <a:ln>
+            <a:noFill/>
+          </a:ln>
+        </p:spPr>
+        <p:txBody>
+          <a:bodyPr anchorCtr="0" anchor="ctr" bIns="91425" lIns="91425" spcFirstLastPara="1" rIns="91425" wrap="square" tIns="91425">
+            <a:noAutofit/>
+          </a:bodyPr>
+          <a:lstStyle/>
+          <a:p>
+            <a:pPr indent="0" lvl="0" marL="0" rtl="0" algn="l">
+              <a:spcBef>
+                <a:spcPts val="0"/>
+              </a:spcBef>
+              <a:spcAft>
+                <a:spcPts val="0"/>
+              </a:spcAft>
+              <a:buNone/>
+            </a:pPr>
+            <a:r>
+              <a:t/>
+            </a:r>
+            <a:endParaRPr/>
+          </a:p>
+        </p:txBody>
+      </p:sp>
+      <p:sp>
+        <p:nvSpPr>
+          <p:cNvPr id="677" name="Google Shape;677;p55"/>
+          <p:cNvSpPr/>
+          <p:nvPr/>
+        </p:nvSpPr>
+        <p:spPr>
+          <a:xfrm>
+            <a:off x="4772001" y="1362233"/>
+            <a:ext cx="76199" cy="76190"/>
+          </a:xfrm>
+          <a:prstGeom prst="roundRect">
+            <a:avLst>
+              <a:gd fmla="val 31500" name="adj"/>
+            </a:avLst>
+          </a:prstGeom>
+          <a:solidFill>
+            <a:srgbClr val="0077FF"/>
+          </a:solidFill>
+          <a:ln>
+            <a:noFill/>
+          </a:ln>
+        </p:spPr>
+        <p:txBody>
+          <a:bodyPr anchorCtr="0" anchor="ctr" bIns="91425" lIns="91425" spcFirstLastPara="1" rIns="91425" wrap="square" tIns="91425">
+            <a:noAutofit/>
+          </a:bodyPr>
+          <a:lstStyle/>
+          <a:p>
+            <a:pPr indent="0" lvl="0" marL="0" rtl="0" algn="l">
+              <a:spcBef>
+                <a:spcPts val="0"/>
+              </a:spcBef>
+              <a:spcAft>
+                <a:spcPts val="0"/>
+              </a:spcAft>
+              <a:buNone/>
+            </a:pPr>
+            <a:r>
+              <a:t/>
+            </a:r>
+            <a:endParaRPr/>
+          </a:p>
+        </p:txBody>
+      </p:sp>
+      <p:sp>
+        <p:nvSpPr>
+          <p:cNvPr id="680" name="Google Shape;680;p55"/>
+          <p:cNvSpPr/>
+          <p:nvPr/>
+        </p:nvSpPr>
+        <p:spPr>
+          <a:xfrm>
+            <a:off x="6786527" y="1209852"/>
+            <a:ext cx="2071677" cy="3014270"/>
+          </a:xfrm>
+          <a:prstGeom prst="roundRect">
+            <a:avLst>
+              <a:gd fmla="val 4634" name="adj"/>
+            </a:avLst>
+          </a:prstGeom>
+          <a:solidFill>
+            <a:schemeClr val="lt2"/>
+          </a:solidFill>
+          <a:ln>
+            <a:noFill/>
+          </a:ln>
+        </p:spPr>
+        <p:txBody>
+          <a:bodyPr anchorCtr="0" anchor="ctr" bIns="91425" lIns="91425" spcFirstLastPara="1" rIns="91425" wrap="square" tIns="91425">
+            <a:noAutofit/>
+          </a:bodyPr>
+          <a:lstStyle/>
+          <a:p>
+            <a:pPr indent="0" lvl="0" marL="0" rtl="0" algn="l">
+              <a:spcBef>
+                <a:spcPts val="0"/>
+              </a:spcBef>
+              <a:spcAft>
+                <a:spcPts val="0"/>
+              </a:spcAft>
+              <a:buNone/>
+            </a:pPr>
+            <a:r>
+              <a:t/>
+            </a:r>
+            <a:endParaRPr/>
+          </a:p>
+        </p:txBody>
+      </p:sp>
+      <p:sp>
+        <p:nvSpPr>
+          <p:cNvPr id="682" name="Google Shape;682;p55"/>
+          <p:cNvSpPr/>
+          <p:nvPr/>
+        </p:nvSpPr>
+        <p:spPr>
+          <a:xfrm>
+            <a:off x="6938927" y="1362233"/>
+            <a:ext cx="76199" cy="76190"/>
+          </a:xfrm>
+          <a:prstGeom prst="roundRect">
+            <a:avLst>
+              <a:gd fmla="val 31500" name="adj"/>
+            </a:avLst>
+          </a:prstGeom>
+          <a:solidFill>
+            <a:srgbClr val="0077FF"/>
+          </a:solidFill>
+          <a:ln>
+            <a:noFill/>
+          </a:ln>
+        </p:spPr>
+        <p:txBody>
+          <a:bodyPr anchorCtr="0" anchor="ctr" bIns="91425" lIns="91425" spcFirstLastPara="1" rIns="91425" wrap="square" tIns="91425">
+            <a:noAutofit/>
+          </a:bodyPr>
+          <a:lstStyle/>
+          <a:p>
+            <a:pPr indent="0" lvl="0" marL="0" rtl="0" algn="l">
+              <a:spcBef>
+                <a:spcPts val="0"/>
+              </a:spcBef>
+              <a:spcAft>
+                <a:spcPts val="0"/>
+              </a:spcAft>
+              <a:buNone/>
+            </a:pPr>
+            <a:r>
+              <a:t/>
+            </a:r>
+            <a:endParaRPr/>
+          </a:p>
+        </p:txBody>
+      </p:sp>
+      <p:sp>
+        <p:nvSpPr>
+          <p:cNvPr id="683" name="title"/>
           <p:cNvSpPr txBox="1"/>
           <p:nvPr/>
         </p:nvSpPr>
@@ -5744,7 +5876,7 @@
               <a:spcAft>
                 <a:spcPts val="300"/>
               </a:spcAft>
-              <a:defRPr sz="2400">
+              <a:defRPr sz="2438">
                 <a:solidFill>
                   <a:srgbClr val="000000"/>
                 </a:solidFill>
@@ -5754,7 +5886,7 @@
               </a:defRPr>
             </a:pPr>
             <a:r>
-              <a:rPr sz="2400">
+              <a:rPr sz="2438">
                 <a:solidFill>
                   <a:srgbClr val="000000"/>
                 </a:solidFill>
@@ -5769,14 +5901,14 @@
       </p:sp>
       <p:sp>
         <p:nvSpPr>
-          <p:cNvPr id="556" name="body"/>
+          <p:cNvPr id="684" name="body_left"/>
           <p:cNvSpPr txBox="1"/>
           <p:nvPr/>
         </p:nvSpPr>
         <p:spPr>
           <a:xfrm>
             <a:off x="274320" y="1414513"/>
-            <a:ext cx="4035247" cy="2851865"/>
+            <a:ext cx="4035247" cy="2695296"/>
           </a:xfrm>
           <a:prstGeom prst="rect">
             <a:avLst/>
@@ -5793,7 +5925,7 @@
               <a:spcAft>
                 <a:spcPts val="300"/>
               </a:spcAft>
-              <a:defRPr sz="1400">
+              <a:defRPr sz="1800">
                 <a:solidFill>
                   <a:srgbClr val="000000"/>
                 </a:solidFill>
@@ -5803,7 +5935,7 @@
               </a:defRPr>
             </a:pPr>
             <a:r>
-              <a:rPr sz="1400">
+              <a:rPr sz="1800">
                 <a:solidFill>
                   <a:srgbClr val="000000"/>
                 </a:solidFill>
@@ -5811,7 +5943,7 @@
                 <a:ea typeface="Play"/>
                 <a:cs typeface="Play"/>
               </a:rPr>
-              <a:t>• 186 минут на сборку одной презентации</a:t>
+              <a:t>• Сборка одной презентации 12 слайдов занимает 186 минут</a:t>
             </a:r>
           </a:p>
           <a:p>
@@ -5819,7 +5951,7 @@
               <a:spcAft>
                 <a:spcPts val="300"/>
               </a:spcAft>
-              <a:defRPr sz="1400">
+              <a:defRPr sz="1800">
                 <a:solidFill>
                   <a:srgbClr val="000000"/>
                 </a:solidFill>
@@ -5829,7 +5961,7 @@
               </a:defRPr>
             </a:pPr>
             <a:r>
-              <a:rPr sz="1400">
+              <a:rPr sz="1800">
                 <a:solidFill>
                   <a:srgbClr val="000000"/>
                 </a:solidFill>
@@ -5837,15 +5969,38 @@
                 <a:ea typeface="Play"/>
                 <a:cs typeface="Play"/>
               </a:rPr>
-              <a:t>• 74 минуты на правки после ревью</a:t>
+              <a:t>• Дополнительно 74 минуты на правки после ревью дизайнера</a:t>
             </a:r>
           </a:p>
+        </p:txBody>
+      </p:sp>
+      <p:sp>
+        <p:nvSpPr>
+          <p:cNvPr id="685" name="body_right"/>
+          <p:cNvSpPr txBox="1"/>
+          <p:nvPr/>
+        </p:nvSpPr>
+        <p:spPr>
+          <a:xfrm>
+            <a:off x="4583887" y="1414513"/>
+            <a:ext cx="4035247" cy="2695296"/>
+          </a:xfrm>
+          <a:prstGeom prst="rect">
+            <a:avLst/>
+          </a:prstGeom>
+          <a:noFill/>
+        </p:spPr>
+        <p:txBody>
+          <a:bodyPr wrap="square" lIns="76200" rIns="76200" tIns="50800" bIns="50800">
+            <a:spAutoFit/>
+          </a:bodyPr>
+          <a:lstStyle/>
           <a:p>
             <a:pPr algn="l">
               <a:spcAft>
                 <a:spcPts val="300"/>
               </a:spcAft>
-              <a:defRPr sz="1400">
+              <a:defRPr sz="1800">
                 <a:solidFill>
                   <a:srgbClr val="000000"/>
                 </a:solidFill>
@@ -5855,7 +6010,7 @@
               </a:defRPr>
             </a:pPr>
             <a:r>
-              <a:rPr sz="1400">
+              <a:rPr sz="1800">
                 <a:solidFill>
                   <a:srgbClr val="000000"/>
                 </a:solidFill>
@@ -5863,7 +6018,7 @@
                 <a:ea typeface="Play"/>
                 <a:cs typeface="Play"/>
               </a:rPr>
-              <a:t>• 19 из 42 колод нарушили фирменный стиль</a:t>
+              <a:t>• 19 из 42 колод нарушают фирменный стиль</a:t>
             </a:r>
           </a:p>
           <a:p>
@@ -5871,7 +6026,7 @@
               <a:spcAft>
                 <a:spcPts val="300"/>
               </a:spcAft>
-              <a:defRPr sz="1400">
+              <a:defRPr sz="1800">
                 <a:solidFill>
                   <a:srgbClr val="000000"/>
                 </a:solidFill>
@@ -5881,7 +6036,7 @@
               </a:defRPr>
             </a:pPr>
             <a:r>
-              <a:rPr sz="1400">
+              <a:rPr sz="1800">
                 <a:solidFill>
                   <a:srgbClr val="000000"/>
                 </a:solidFill>
@@ -5889,55 +6044,11 @@
                 <a:ea typeface="Play"/>
                 <a:cs typeface="Play"/>
               </a:rPr>
-              <a:t>• 4 дизайнера закрывают 11 запросов в неделю</a:t>
+              <a:t>• Дизайн‑отдел из 4 человек закрывает 11 запросов, ожидание 6 дней</a:t>
             </a:r>
           </a:p>
-          <a:p>
-            <a:pPr algn="l">
-              <a:spcAft>
-                <a:spcPts val="300"/>
-              </a:spcAft>
-              <a:defRPr sz="1400">
-                <a:solidFill>
-                  <a:srgbClr val="000000"/>
-                </a:solidFill>
-                <a:latin typeface="Play"/>
-                <a:ea typeface="Play"/>
-                <a:cs typeface="Play"/>
-              </a:defRPr>
-            </a:pPr>
-            <a:r>
-              <a:rPr sz="1400">
-                <a:solidFill>
-                  <a:srgbClr val="000000"/>
-                </a:solidFill>
-                <a:latin typeface="Play"/>
-                <a:ea typeface="Play"/>
-                <a:cs typeface="Play"/>
-              </a:rPr>
-              <a:t>• Средний срок ожидания 6 рабочих дней</a:t>
-            </a:r>
-          </a:p>
-        </p:txBody>
-      </p:sp>
-      <p:graphicFrame>
-        <p:nvGraphicFramePr>
-          <p:cNvPr id="557" name="Chart 556"/>
-          <p:cNvGraphicFramePr>
-            <a:graphicFrameLocks noGrp="1"/>
-          </p:cNvGraphicFramePr>
-          <p:nvPr/>
-        </p:nvGraphicFramePr>
-        <p:xfrm>
-          <a:off x="4583887" y="1414513"/>
-          <a:ext cx="4035247" cy="2851865"/>
-        </p:xfrm>
-        <a:graphic>
-          <a:graphicData uri="http://schemas.openxmlformats.org/drawingml/2006/chart">
-            <c:chart xmlns:c="http://schemas.openxmlformats.org/drawingml/2006/chart" r:id="rId2"/>
-          </a:graphicData>
-        </a:graphic>
-      </p:graphicFrame>
+        </p:txBody>
+      </p:sp>
     </p:spTree>
   </p:cSld>
   <p:clrMapOvr>
@@ -5958,7 +6069,171 @@
       <p:grpSpPr/>
       <p:sp>
         <p:nvSpPr>
-          <p:cNvPr id="2" name="title"/>
+          <p:cNvPr id="532" name="Google Shape;532;p53"/>
+          <p:cNvSpPr/>
+          <p:nvPr/>
+        </p:nvSpPr>
+        <p:spPr>
+          <a:xfrm>
+            <a:off x="303214" y="1022533"/>
+            <a:ext cx="8451939" cy="1433588"/>
+          </a:xfrm>
+          <a:prstGeom prst="rect">
+            <a:avLst/>
+          </a:prstGeom>
+          <a:noFill/>
+          <a:ln>
+            <a:noFill/>
+          </a:ln>
+        </p:spPr>
+        <p:txBody>
+          <a:bodyPr anchorCtr="0" anchor="ctr" bIns="91425" lIns="91425" spcFirstLastPara="1" rIns="91425" wrap="square" tIns="91425">
+            <a:noAutofit/>
+          </a:bodyPr>
+          <a:lstStyle/>
+          <a:p>
+            <a:pPr indent="0" lvl="0" marL="0" rtl="0" algn="l">
+              <a:spcBef>
+                <a:spcPts val="0"/>
+              </a:spcBef>
+              <a:spcAft>
+                <a:spcPts val="0"/>
+              </a:spcAft>
+              <a:buNone/>
+            </a:pPr>
+            <a:r>
+              <a:t/>
+            </a:r>
+            <a:endParaRPr/>
+          </a:p>
+        </p:txBody>
+      </p:sp>
+      <p:sp>
+        <p:nvSpPr>
+          <p:cNvPr id="541" name="Google Shape;541;p53"/>
+          <p:cNvSpPr/>
+          <p:nvPr/>
+        </p:nvSpPr>
+        <p:spPr>
+          <a:xfrm>
+            <a:off x="3831556" y="1022533"/>
+            <a:ext cx="1395256" cy="1433588"/>
+          </a:xfrm>
+          <a:prstGeom prst="rect">
+            <a:avLst/>
+          </a:prstGeom>
+          <a:noFill/>
+          <a:ln>
+            <a:noFill/>
+          </a:ln>
+        </p:spPr>
+        <p:txBody>
+          <a:bodyPr anchorCtr="0" anchor="ctr" bIns="91425" lIns="91425" spcFirstLastPara="1" rIns="91425" wrap="square" tIns="91425">
+            <a:noAutofit/>
+          </a:bodyPr>
+          <a:lstStyle/>
+          <a:p>
+            <a:pPr indent="0" lvl="0" marL="0" rtl="0" algn="l">
+              <a:spcBef>
+                <a:spcPts val="0"/>
+              </a:spcBef>
+              <a:spcAft>
+                <a:spcPts val="0"/>
+              </a:spcAft>
+              <a:buNone/>
+            </a:pPr>
+            <a:r>
+              <a:t/>
+            </a:r>
+            <a:endParaRPr/>
+          </a:p>
+        </p:txBody>
+      </p:sp>
+      <p:sp>
+        <p:nvSpPr>
+          <p:cNvPr id="553" name="Google Shape;553;p53"/>
+          <p:cNvSpPr/>
+          <p:nvPr/>
+        </p:nvSpPr>
+        <p:spPr>
+          <a:xfrm>
+            <a:off x="276488" y="2955549"/>
+            <a:ext cx="8451939" cy="1433588"/>
+          </a:xfrm>
+          <a:prstGeom prst="rect">
+            <a:avLst/>
+          </a:prstGeom>
+          <a:noFill/>
+          <a:ln>
+            <a:noFill/>
+          </a:ln>
+        </p:spPr>
+        <p:txBody>
+          <a:bodyPr anchorCtr="0" anchor="ctr" bIns="91425" lIns="91425" spcFirstLastPara="1" rIns="91425" wrap="square" tIns="91425">
+            <a:noAutofit/>
+          </a:bodyPr>
+          <a:lstStyle/>
+          <a:p>
+            <a:pPr indent="0" lvl="0" marL="0" rtl="0" algn="l">
+              <a:spcBef>
+                <a:spcPts val="0"/>
+              </a:spcBef>
+              <a:spcAft>
+                <a:spcPts val="0"/>
+              </a:spcAft>
+              <a:buNone/>
+            </a:pPr>
+            <a:r>
+              <a:t/>
+            </a:r>
+            <a:endParaRPr/>
+          </a:p>
+        </p:txBody>
+      </p:sp>
+      <p:sp>
+        <p:nvSpPr>
+          <p:cNvPr id="554" name="Google Shape;554;p53"/>
+          <p:cNvSpPr/>
+          <p:nvPr/>
+        </p:nvSpPr>
+        <p:spPr>
+          <a:xfrm>
+            <a:off x="303214" y="2797849"/>
+            <a:ext cx="8451939" cy="1433588"/>
+          </a:xfrm>
+          <a:prstGeom prst="rect">
+            <a:avLst/>
+          </a:prstGeom>
+          <a:noFill/>
+          <a:ln>
+            <a:noFill/>
+          </a:ln>
+        </p:spPr>
+        <p:txBody>
+          <a:bodyPr anchorCtr="0" anchor="ctr" bIns="91425" lIns="91425" spcFirstLastPara="1" rIns="91425" wrap="square" tIns="91425">
+            <a:noAutofit/>
+          </a:bodyPr>
+          <a:lstStyle/>
+          <a:p>
+            <a:pPr indent="0" lvl="0" marL="0" rtl="0" algn="l">
+              <a:spcBef>
+                <a:spcPts val="0"/>
+              </a:spcBef>
+              <a:spcAft>
+                <a:spcPts val="0"/>
+              </a:spcAft>
+              <a:buNone/>
+            </a:pPr>
+            <a:r>
+              <a:t/>
+            </a:r>
+            <a:endParaRPr/>
+          </a:p>
+        </p:txBody>
+      </p:sp>
+      <p:sp>
+        <p:nvSpPr>
+          <p:cNvPr id="555" name="title"/>
           <p:cNvSpPr txBox="1"/>
           <p:nvPr/>
         </p:nvSpPr>
@@ -5982,7 +6257,7 @@
               <a:spcAft>
                 <a:spcPts val="300"/>
               </a:spcAft>
-              <a:defRPr sz="2400">
+              <a:defRPr sz="2438">
                 <a:solidFill>
                   <a:srgbClr val="000000"/>
                 </a:solidFill>
@@ -5992,7 +6267,7 @@
               </a:defRPr>
             </a:pPr>
             <a:r>
-              <a:rPr sz="2400">
+              <a:rPr sz="2438">
                 <a:solidFill>
                   <a:srgbClr val="000000"/>
                 </a:solidFill>
@@ -6007,14 +6282,14 @@
       </p:sp>
       <p:sp>
         <p:nvSpPr>
-          <p:cNvPr id="3" name="body_left"/>
+          <p:cNvPr id="556" name="body_left"/>
           <p:cNvSpPr txBox="1"/>
           <p:nvPr/>
         </p:nvSpPr>
         <p:spPr>
           <a:xfrm>
             <a:off x="274320" y="1414513"/>
-            <a:ext cx="3457574" cy="2602405"/>
+            <a:ext cx="4035247" cy="2851865"/>
           </a:xfrm>
           <a:prstGeom prst="rect">
             <a:avLst/>
@@ -6031,7 +6306,7 @@
               <a:spcAft>
                 <a:spcPts val="300"/>
               </a:spcAft>
-              <a:defRPr sz="1803" b="1">
+              <a:defRPr sz="1800">
                 <a:solidFill>
                   <a:srgbClr val="000000"/>
                 </a:solidFill>
@@ -6041,7 +6316,7 @@
               </a:defRPr>
             </a:pPr>
             <a:r>
-              <a:rPr sz="1803" b="1">
+              <a:rPr sz="1800">
                 <a:solidFill>
                   <a:srgbClr val="000000"/>
                 </a:solidFill>
@@ -6049,7 +6324,7 @@
                 <a:ea typeface="Play"/>
                 <a:cs typeface="Play"/>
               </a:rPr>
-              <a:t>• Принимает шаблон pptx и материалы</a:t>
+              <a:t>• Сервис принимает шаблон pptx и материалы, генерирует колоду по дизайн‑системе</a:t>
             </a:r>
           </a:p>
           <a:p>
@@ -6057,7 +6332,7 @@
               <a:spcAft>
                 <a:spcPts val="300"/>
               </a:spcAft>
-              <a:defRPr sz="1803" b="1">
+              <a:defRPr sz="1800">
                 <a:solidFill>
                   <a:srgbClr val="000000"/>
                 </a:solidFill>
@@ -6067,7 +6342,7 @@
               </a:defRPr>
             </a:pPr>
             <a:r>
-              <a:rPr sz="1803" b="1">
+              <a:rPr sz="1800">
                 <a:solidFill>
                   <a:srgbClr val="000000"/>
                 </a:solidFill>
@@ -6075,15 +6350,38 @@
                 <a:ea typeface="Play"/>
                 <a:cs typeface="Play"/>
               </a:rPr>
-              <a:t>• Генерирует колоду по дизайн‑системе</a:t>
+              <a:t>• Экспорт в pptx, pdf, html с редактируемыми слайдами</a:t>
             </a:r>
           </a:p>
+        </p:txBody>
+      </p:sp>
+      <p:sp>
+        <p:nvSpPr>
+          <p:cNvPr id="557" name="body_right"/>
+          <p:cNvSpPr txBox="1"/>
+          <p:nvPr/>
+        </p:nvSpPr>
+        <p:spPr>
+          <a:xfrm>
+            <a:off x="4583887" y="1414513"/>
+            <a:ext cx="4035247" cy="2851865"/>
+          </a:xfrm>
+          <a:prstGeom prst="rect">
+            <a:avLst/>
+          </a:prstGeom>
+          <a:noFill/>
+        </p:spPr>
+        <p:txBody>
+          <a:bodyPr wrap="square" lIns="76200" rIns="76200" tIns="50800" bIns="50800">
+            <a:spAutoFit/>
+          </a:bodyPr>
+          <a:lstStyle/>
           <a:p>
             <a:pPr algn="l">
               <a:spcAft>
                 <a:spcPts val="300"/>
               </a:spcAft>
-              <a:defRPr sz="1803" b="1">
+              <a:defRPr sz="1800">
                 <a:solidFill>
                   <a:srgbClr val="000000"/>
                 </a:solidFill>
@@ -6093,7 +6391,7 @@
               </a:defRPr>
             </a:pPr>
             <a:r>
-              <a:rPr sz="1803" b="1">
+              <a:rPr sz="1800">
                 <a:solidFill>
                   <a:srgbClr val="000000"/>
                 </a:solidFill>
@@ -6101,38 +6399,15 @@
                 <a:ea typeface="Play"/>
                 <a:cs typeface="Play"/>
               </a:rPr>
-              <a:t>• Аудит качества проверяет каждый элемент</a:t>
+              <a:t>• Аудит качества проверяет стиль и корректирует автоматически</a:t>
             </a:r>
           </a:p>
-        </p:txBody>
-      </p:sp>
-      <p:sp>
-        <p:nvSpPr>
-          <p:cNvPr id="4" name="body_right"/>
-          <p:cNvSpPr txBox="1"/>
-          <p:nvPr/>
-        </p:nvSpPr>
-        <p:spPr>
-          <a:xfrm>
-            <a:off x="4006215" y="1414513"/>
-            <a:ext cx="3457574" cy="2602405"/>
-          </a:xfrm>
-          <a:prstGeom prst="rect">
-            <a:avLst/>
-          </a:prstGeom>
-          <a:noFill/>
-        </p:spPr>
-        <p:txBody>
-          <a:bodyPr wrap="square" lIns="76200" rIns="76200" tIns="50800" bIns="50800">
-            <a:spAutoFit/>
-          </a:bodyPr>
-          <a:lstStyle/>
           <a:p>
             <a:pPr algn="l">
               <a:spcAft>
                 <a:spcPts val="300"/>
               </a:spcAft>
-              <a:defRPr sz="1803" b="1">
+              <a:defRPr sz="1800">
                 <a:solidFill>
                   <a:srgbClr val="000000"/>
                 </a:solidFill>
@@ -6142,7 +6417,7 @@
               </a:defRPr>
             </a:pPr>
             <a:r>
-              <a:rPr sz="1803" b="1">
+              <a:rPr sz="1800">
                 <a:solidFill>
                   <a:srgbClr val="000000"/>
                 </a:solidFill>
@@ -6150,33 +6425,7 @@
                 <a:ea typeface="Play"/>
                 <a:cs typeface="Play"/>
               </a:rPr>
-              <a:t>• Экспорт в pptx, pdf и html</a:t>
-            </a:r>
-          </a:p>
-          <a:p>
-            <a:pPr algn="l">
-              <a:spcAft>
-                <a:spcPts val="300"/>
-              </a:spcAft>
-              <a:defRPr sz="1803" b="1">
-                <a:solidFill>
-                  <a:srgbClr val="000000"/>
-                </a:solidFill>
-                <a:latin typeface="Play"/>
-                <a:ea typeface="Play"/>
-                <a:cs typeface="Play"/>
-              </a:defRPr>
-            </a:pPr>
-            <a:r>
-              <a:rPr sz="1803" b="1">
-                <a:solidFill>
-                  <a:srgbClr val="000000"/>
-                </a:solidFill>
-                <a:latin typeface="Play"/>
-                <a:ea typeface="Play"/>
-                <a:cs typeface="Play"/>
-              </a:rPr>
-              <a:t>• Слайды остаются редактируемыми</a:t>
+              <a:t>• Слайды остаются редактируемыми, без картинок</a:t>
             </a:r>
           </a:p>
         </p:txBody>
@@ -6190,6 +6439,923 @@
 </file>
 
 <file path=ppt/slides/slide58.xml><?xml version="1.0" encoding="utf-8"?>
+<p:sld xmlns:a="http://schemas.openxmlformats.org/drawingml/2006/main" xmlns:p="http://schemas.openxmlformats.org/presentationml/2006/main" xmlns:r="http://schemas.openxmlformats.org/officeDocument/2006/relationships">
+  <p:cSld>
+    <p:spTree>
+      <p:nvGrpSpPr>
+        <p:cNvPr id="1" name=""/>
+        <p:cNvGrpSpPr/>
+        <p:nvPr/>
+      </p:nvGrpSpPr>
+      <p:grpSpPr/>
+      <p:sp>
+        <p:nvSpPr>
+          <p:cNvPr id="662" name="Google Shape;662;p55"/>
+          <p:cNvSpPr/>
+          <p:nvPr/>
+        </p:nvSpPr>
+        <p:spPr>
+          <a:xfrm>
+            <a:off x="8667705" y="4666977"/>
+            <a:ext cx="190499" cy="190475"/>
+          </a:xfrm>
+          <a:prstGeom prst="rect">
+            <a:avLst/>
+          </a:prstGeom>
+          <a:noFill/>
+          <a:ln>
+            <a:noFill/>
+          </a:ln>
+        </p:spPr>
+        <p:txBody>
+          <a:bodyPr anchorCtr="0" anchor="ctr" bIns="91425" lIns="91425" spcFirstLastPara="1" rIns="91425" wrap="square" tIns="91425">
+            <a:noAutofit/>
+          </a:bodyPr>
+          <a:lstStyle/>
+          <a:p>
+            <a:pPr indent="0" lvl="0" marL="0" rtl="0" algn="l">
+              <a:spcBef>
+                <a:spcPts val="0"/>
+              </a:spcBef>
+              <a:spcAft>
+                <a:spcPts val="0"/>
+              </a:spcAft>
+              <a:buNone/>
+            </a:pPr>
+            <a:r>
+              <a:t/>
+            </a:r>
+            <a:endParaRPr/>
+          </a:p>
+        </p:txBody>
+      </p:sp>
+      <p:sp>
+        <p:nvSpPr>
+          <p:cNvPr id="663" name="Google Shape;663;p55"/>
+          <p:cNvSpPr/>
+          <p:nvPr/>
+        </p:nvSpPr>
+        <p:spPr>
+          <a:xfrm>
+            <a:off x="285748" y="286047"/>
+            <a:ext cx="8572456" cy="3938075"/>
+          </a:xfrm>
+          <a:prstGeom prst="rect">
+            <a:avLst/>
+          </a:prstGeom>
+          <a:noFill/>
+          <a:ln>
+            <a:noFill/>
+          </a:ln>
+        </p:spPr>
+        <p:txBody>
+          <a:bodyPr anchorCtr="0" anchor="ctr" bIns="91425" lIns="91425" spcFirstLastPara="1" rIns="91425" wrap="square" tIns="91425">
+            <a:noAutofit/>
+          </a:bodyPr>
+          <a:lstStyle/>
+          <a:p>
+            <a:pPr indent="0" lvl="0" marL="0" rtl="0" algn="l">
+              <a:spcBef>
+                <a:spcPts val="0"/>
+              </a:spcBef>
+              <a:spcAft>
+                <a:spcPts val="0"/>
+              </a:spcAft>
+              <a:buNone/>
+            </a:pPr>
+            <a:r>
+              <a:t/>
+            </a:r>
+            <a:endParaRPr/>
+          </a:p>
+        </p:txBody>
+      </p:sp>
+      <p:sp>
+        <p:nvSpPr>
+          <p:cNvPr id="664" name="Google Shape;664;p55"/>
+          <p:cNvSpPr/>
+          <p:nvPr/>
+        </p:nvSpPr>
+        <p:spPr>
+          <a:xfrm>
+            <a:off x="285748" y="1209852"/>
+            <a:ext cx="8572456" cy="3014270"/>
+          </a:xfrm>
+          <a:prstGeom prst="rect">
+            <a:avLst/>
+          </a:prstGeom>
+          <a:noFill/>
+          <a:ln>
+            <a:noFill/>
+          </a:ln>
+        </p:spPr>
+        <p:txBody>
+          <a:bodyPr anchorCtr="0" anchor="ctr" bIns="91425" lIns="91425" spcFirstLastPara="1" rIns="91425" wrap="square" tIns="91425">
+            <a:noAutofit/>
+          </a:bodyPr>
+          <a:lstStyle/>
+          <a:p>
+            <a:pPr indent="0" lvl="0" marL="0" rtl="0" algn="l">
+              <a:spcBef>
+                <a:spcPts val="0"/>
+              </a:spcBef>
+              <a:spcAft>
+                <a:spcPts val="0"/>
+              </a:spcAft>
+              <a:buNone/>
+            </a:pPr>
+            <a:r>
+              <a:t/>
+            </a:r>
+            <a:endParaRPr/>
+          </a:p>
+        </p:txBody>
+      </p:sp>
+      <p:sp>
+        <p:nvSpPr>
+          <p:cNvPr id="665" name="Google Shape;665;p55"/>
+          <p:cNvSpPr/>
+          <p:nvPr/>
+        </p:nvSpPr>
+        <p:spPr>
+          <a:xfrm>
+            <a:off x="285749" y="1209852"/>
+            <a:ext cx="2071677" cy="3014270"/>
+          </a:xfrm>
+          <a:prstGeom prst="roundRect">
+            <a:avLst>
+              <a:gd fmla="val 4634" name="adj"/>
+            </a:avLst>
+          </a:prstGeom>
+          <a:solidFill>
+            <a:schemeClr val="lt2"/>
+          </a:solidFill>
+          <a:ln>
+            <a:noFill/>
+          </a:ln>
+        </p:spPr>
+        <p:txBody>
+          <a:bodyPr anchorCtr="0" anchor="ctr" bIns="91425" lIns="91425" spcFirstLastPara="1" rIns="91425" wrap="square" tIns="91425">
+            <a:noAutofit/>
+          </a:bodyPr>
+          <a:lstStyle/>
+          <a:p>
+            <a:pPr indent="0" lvl="0" marL="0" rtl="0" algn="l">
+              <a:spcBef>
+                <a:spcPts val="0"/>
+              </a:spcBef>
+              <a:spcAft>
+                <a:spcPts val="0"/>
+              </a:spcAft>
+              <a:buNone/>
+            </a:pPr>
+            <a:r>
+              <a:t/>
+            </a:r>
+            <a:endParaRPr/>
+          </a:p>
+        </p:txBody>
+      </p:sp>
+      <p:sp>
+        <p:nvSpPr>
+          <p:cNvPr id="667" name="Google Shape;667;p55"/>
+          <p:cNvSpPr/>
+          <p:nvPr/>
+        </p:nvSpPr>
+        <p:spPr>
+          <a:xfrm>
+            <a:off x="438148" y="1362233"/>
+            <a:ext cx="76199" cy="76190"/>
+          </a:xfrm>
+          <a:prstGeom prst="roundRect">
+            <a:avLst>
+              <a:gd fmla="val 31500" name="adj"/>
+            </a:avLst>
+          </a:prstGeom>
+          <a:solidFill>
+            <a:srgbClr val="0077FF"/>
+          </a:solidFill>
+          <a:ln>
+            <a:noFill/>
+          </a:ln>
+        </p:spPr>
+        <p:txBody>
+          <a:bodyPr anchorCtr="0" anchor="ctr" bIns="91425" lIns="91425" spcFirstLastPara="1" rIns="91425" wrap="square" tIns="91425">
+            <a:noAutofit/>
+          </a:bodyPr>
+          <a:lstStyle/>
+          <a:p>
+            <a:pPr indent="0" lvl="0" marL="0" rtl="0" algn="l">
+              <a:spcBef>
+                <a:spcPts val="0"/>
+              </a:spcBef>
+              <a:spcAft>
+                <a:spcPts val="0"/>
+              </a:spcAft>
+              <a:buNone/>
+            </a:pPr>
+            <a:r>
+              <a:t/>
+            </a:r>
+            <a:endParaRPr/>
+          </a:p>
+        </p:txBody>
+      </p:sp>
+      <p:sp>
+        <p:nvSpPr>
+          <p:cNvPr id="670" name="Google Shape;670;p55"/>
+          <p:cNvSpPr/>
+          <p:nvPr/>
+        </p:nvSpPr>
+        <p:spPr>
+          <a:xfrm>
+            <a:off x="2452675" y="1209852"/>
+            <a:ext cx="2071677" cy="3014270"/>
+          </a:xfrm>
+          <a:prstGeom prst="roundRect">
+            <a:avLst>
+              <a:gd fmla="val 4634" name="adj"/>
+            </a:avLst>
+          </a:prstGeom>
+          <a:solidFill>
+            <a:schemeClr val="lt2"/>
+          </a:solidFill>
+          <a:ln>
+            <a:noFill/>
+          </a:ln>
+        </p:spPr>
+        <p:txBody>
+          <a:bodyPr anchorCtr="0" anchor="ctr" bIns="91425" lIns="91425" spcFirstLastPara="1" rIns="91425" wrap="square" tIns="91425">
+            <a:noAutofit/>
+          </a:bodyPr>
+          <a:lstStyle/>
+          <a:p>
+            <a:pPr indent="0" lvl="0" marL="0" rtl="0" algn="l">
+              <a:spcBef>
+                <a:spcPts val="0"/>
+              </a:spcBef>
+              <a:spcAft>
+                <a:spcPts val="0"/>
+              </a:spcAft>
+              <a:buNone/>
+            </a:pPr>
+            <a:r>
+              <a:t/>
+            </a:r>
+            <a:endParaRPr/>
+          </a:p>
+        </p:txBody>
+      </p:sp>
+      <p:sp>
+        <p:nvSpPr>
+          <p:cNvPr id="672" name="Google Shape;672;p55"/>
+          <p:cNvSpPr/>
+          <p:nvPr/>
+        </p:nvSpPr>
+        <p:spPr>
+          <a:xfrm>
+            <a:off x="2605074" y="1362233"/>
+            <a:ext cx="76199" cy="76190"/>
+          </a:xfrm>
+          <a:prstGeom prst="roundRect">
+            <a:avLst>
+              <a:gd fmla="val 31500" name="adj"/>
+            </a:avLst>
+          </a:prstGeom>
+          <a:solidFill>
+            <a:srgbClr val="0077FF"/>
+          </a:solidFill>
+          <a:ln>
+            <a:noFill/>
+          </a:ln>
+        </p:spPr>
+        <p:txBody>
+          <a:bodyPr anchorCtr="0" anchor="ctr" bIns="91425" lIns="91425" spcFirstLastPara="1" rIns="91425" wrap="square" tIns="91425">
+            <a:noAutofit/>
+          </a:bodyPr>
+          <a:lstStyle/>
+          <a:p>
+            <a:pPr indent="0" lvl="0" marL="0" rtl="0" algn="l">
+              <a:spcBef>
+                <a:spcPts val="0"/>
+              </a:spcBef>
+              <a:spcAft>
+                <a:spcPts val="0"/>
+              </a:spcAft>
+              <a:buNone/>
+            </a:pPr>
+            <a:r>
+              <a:t/>
+            </a:r>
+            <a:endParaRPr/>
+          </a:p>
+        </p:txBody>
+      </p:sp>
+      <p:sp>
+        <p:nvSpPr>
+          <p:cNvPr id="675" name="Google Shape;675;p55"/>
+          <p:cNvSpPr/>
+          <p:nvPr/>
+        </p:nvSpPr>
+        <p:spPr>
+          <a:xfrm>
+            <a:off x="4619601" y="1209852"/>
+            <a:ext cx="2071677" cy="3014270"/>
+          </a:xfrm>
+          <a:prstGeom prst="roundRect">
+            <a:avLst>
+              <a:gd fmla="val 4634" name="adj"/>
+            </a:avLst>
+          </a:prstGeom>
+          <a:solidFill>
+            <a:schemeClr val="lt2"/>
+          </a:solidFill>
+          <a:ln>
+            <a:noFill/>
+          </a:ln>
+        </p:spPr>
+        <p:txBody>
+          <a:bodyPr anchorCtr="0" anchor="ctr" bIns="91425" lIns="91425" spcFirstLastPara="1" rIns="91425" wrap="square" tIns="91425">
+            <a:noAutofit/>
+          </a:bodyPr>
+          <a:lstStyle/>
+          <a:p>
+            <a:pPr indent="0" lvl="0" marL="0" rtl="0" algn="l">
+              <a:spcBef>
+                <a:spcPts val="0"/>
+              </a:spcBef>
+              <a:spcAft>
+                <a:spcPts val="0"/>
+              </a:spcAft>
+              <a:buNone/>
+            </a:pPr>
+            <a:r>
+              <a:t/>
+            </a:r>
+            <a:endParaRPr/>
+          </a:p>
+        </p:txBody>
+      </p:sp>
+      <p:sp>
+        <p:nvSpPr>
+          <p:cNvPr id="677" name="Google Shape;677;p55"/>
+          <p:cNvSpPr/>
+          <p:nvPr/>
+        </p:nvSpPr>
+        <p:spPr>
+          <a:xfrm>
+            <a:off x="4772001" y="1362233"/>
+            <a:ext cx="76199" cy="76190"/>
+          </a:xfrm>
+          <a:prstGeom prst="roundRect">
+            <a:avLst>
+              <a:gd fmla="val 31500" name="adj"/>
+            </a:avLst>
+          </a:prstGeom>
+          <a:solidFill>
+            <a:srgbClr val="0077FF"/>
+          </a:solidFill>
+          <a:ln>
+            <a:noFill/>
+          </a:ln>
+        </p:spPr>
+        <p:txBody>
+          <a:bodyPr anchorCtr="0" anchor="ctr" bIns="91425" lIns="91425" spcFirstLastPara="1" rIns="91425" wrap="square" tIns="91425">
+            <a:noAutofit/>
+          </a:bodyPr>
+          <a:lstStyle/>
+          <a:p>
+            <a:pPr indent="0" lvl="0" marL="0" rtl="0" algn="l">
+              <a:spcBef>
+                <a:spcPts val="0"/>
+              </a:spcBef>
+              <a:spcAft>
+                <a:spcPts val="0"/>
+              </a:spcAft>
+              <a:buNone/>
+            </a:pPr>
+            <a:r>
+              <a:t/>
+            </a:r>
+            <a:endParaRPr/>
+          </a:p>
+        </p:txBody>
+      </p:sp>
+      <p:sp>
+        <p:nvSpPr>
+          <p:cNvPr id="680" name="Google Shape;680;p55"/>
+          <p:cNvSpPr/>
+          <p:nvPr/>
+        </p:nvSpPr>
+        <p:spPr>
+          <a:xfrm>
+            <a:off x="6786527" y="1209852"/>
+            <a:ext cx="2071677" cy="3014270"/>
+          </a:xfrm>
+          <a:prstGeom prst="roundRect">
+            <a:avLst>
+              <a:gd fmla="val 4634" name="adj"/>
+            </a:avLst>
+          </a:prstGeom>
+          <a:solidFill>
+            <a:schemeClr val="lt2"/>
+          </a:solidFill>
+          <a:ln>
+            <a:noFill/>
+          </a:ln>
+        </p:spPr>
+        <p:txBody>
+          <a:bodyPr anchorCtr="0" anchor="ctr" bIns="91425" lIns="91425" spcFirstLastPara="1" rIns="91425" wrap="square" tIns="91425">
+            <a:noAutofit/>
+          </a:bodyPr>
+          <a:lstStyle/>
+          <a:p>
+            <a:pPr indent="0" lvl="0" marL="0" rtl="0" algn="l">
+              <a:spcBef>
+                <a:spcPts val="0"/>
+              </a:spcBef>
+              <a:spcAft>
+                <a:spcPts val="0"/>
+              </a:spcAft>
+              <a:buNone/>
+            </a:pPr>
+            <a:r>
+              <a:t/>
+            </a:r>
+            <a:endParaRPr/>
+          </a:p>
+        </p:txBody>
+      </p:sp>
+      <p:sp>
+        <p:nvSpPr>
+          <p:cNvPr id="682" name="Google Shape;682;p55"/>
+          <p:cNvSpPr/>
+          <p:nvPr/>
+        </p:nvSpPr>
+        <p:spPr>
+          <a:xfrm>
+            <a:off x="6938927" y="1362233"/>
+            <a:ext cx="76199" cy="76190"/>
+          </a:xfrm>
+          <a:prstGeom prst="roundRect">
+            <a:avLst>
+              <a:gd fmla="val 31500" name="adj"/>
+            </a:avLst>
+          </a:prstGeom>
+          <a:solidFill>
+            <a:srgbClr val="0077FF"/>
+          </a:solidFill>
+          <a:ln>
+            <a:noFill/>
+          </a:ln>
+        </p:spPr>
+        <p:txBody>
+          <a:bodyPr anchorCtr="0" anchor="ctr" bIns="91425" lIns="91425" spcFirstLastPara="1" rIns="91425" wrap="square" tIns="91425">
+            <a:noAutofit/>
+          </a:bodyPr>
+          <a:lstStyle/>
+          <a:p>
+            <a:pPr indent="0" lvl="0" marL="0" rtl="0" algn="l">
+              <a:spcBef>
+                <a:spcPts val="0"/>
+              </a:spcBef>
+              <a:spcAft>
+                <a:spcPts val="0"/>
+              </a:spcAft>
+              <a:buNone/>
+            </a:pPr>
+            <a:r>
+              <a:t/>
+            </a:r>
+            <a:endParaRPr/>
+          </a:p>
+        </p:txBody>
+      </p:sp>
+      <p:sp>
+        <p:nvSpPr>
+          <p:cNvPr id="683" name="title"/>
+          <p:cNvSpPr txBox="1"/>
+          <p:nvPr/>
+        </p:nvSpPr>
+        <p:spPr>
+          <a:xfrm>
+            <a:off x="274320" y="282943"/>
+            <a:ext cx="6792986" cy="617220"/>
+          </a:xfrm>
+          <a:prstGeom prst="rect">
+            <a:avLst/>
+          </a:prstGeom>
+          <a:noFill/>
+        </p:spPr>
+        <p:txBody>
+          <a:bodyPr wrap="square" lIns="76200" rIns="76200" tIns="50800" bIns="50800">
+            <a:spAutoFit/>
+          </a:bodyPr>
+          <a:lstStyle/>
+          <a:p>
+            <a:pPr algn="l">
+              <a:spcAft>
+                <a:spcPts val="300"/>
+              </a:spcAft>
+              <a:defRPr sz="2438">
+                <a:solidFill>
+                  <a:srgbClr val="000000"/>
+                </a:solidFill>
+                <a:latin typeface="Play"/>
+                <a:ea typeface="Play"/>
+                <a:cs typeface="Play"/>
+              </a:defRPr>
+            </a:pPr>
+            <a:r>
+              <a:rPr sz="2438">
+                <a:solidFill>
+                  <a:srgbClr val="000000"/>
+                </a:solidFill>
+                <a:latin typeface="Play"/>
+                <a:ea typeface="Play"/>
+                <a:cs typeface="Play"/>
+              </a:rPr>
+              <a:t>Ожидаемый эффект</a:t>
+            </a:r>
+          </a:p>
+        </p:txBody>
+      </p:sp>
+      <p:sp>
+        <p:nvSpPr>
+          <p:cNvPr id="684" name="body_left"/>
+          <p:cNvSpPr txBox="1"/>
+          <p:nvPr/>
+        </p:nvSpPr>
+        <p:spPr>
+          <a:xfrm>
+            <a:off x="274320" y="1414513"/>
+            <a:ext cx="4035247" cy="2695296"/>
+          </a:xfrm>
+          <a:prstGeom prst="rect">
+            <a:avLst/>
+          </a:prstGeom>
+          <a:noFill/>
+        </p:spPr>
+        <p:txBody>
+          <a:bodyPr wrap="square" lIns="76200" rIns="76200" tIns="50800" bIns="50800">
+            <a:spAutoFit/>
+          </a:bodyPr>
+          <a:lstStyle/>
+          <a:p>
+            <a:pPr algn="l">
+              <a:spcAft>
+                <a:spcPts val="300"/>
+              </a:spcAft>
+              <a:defRPr sz="1800">
+                <a:solidFill>
+                  <a:srgbClr val="000000"/>
+                </a:solidFill>
+                <a:latin typeface="Play"/>
+                <a:ea typeface="Play"/>
+                <a:cs typeface="Play"/>
+              </a:defRPr>
+            </a:pPr>
+            <a:r>
+              <a:rPr sz="1800">
+                <a:solidFill>
+                  <a:srgbClr val="000000"/>
+                </a:solidFill>
+                <a:latin typeface="Play"/>
+                <a:ea typeface="Play"/>
+                <a:cs typeface="Play"/>
+              </a:rPr>
+              <a:t>• Средняя сборка колоды 12 слайдов сократилась до 4 минут</a:t>
+            </a:r>
+          </a:p>
+          <a:p>
+            <a:pPr algn="l">
+              <a:spcAft>
+                <a:spcPts val="300"/>
+              </a:spcAft>
+              <a:defRPr sz="1800">
+                <a:solidFill>
+                  <a:srgbClr val="000000"/>
+                </a:solidFill>
+                <a:latin typeface="Play"/>
+                <a:ea typeface="Play"/>
+                <a:cs typeface="Play"/>
+              </a:defRPr>
+            </a:pPr>
+            <a:r>
+              <a:rPr sz="1800">
+                <a:solidFill>
+                  <a:srgbClr val="000000"/>
+                </a:solidFill>
+                <a:latin typeface="Play"/>
+                <a:ea typeface="Play"/>
+                <a:cs typeface="Play"/>
+              </a:rPr>
+              <a:t>• Время до первой версии уменьшилось с 6 дней до 1 дня</a:t>
+            </a:r>
+          </a:p>
+        </p:txBody>
+      </p:sp>
+      <p:sp>
+        <p:nvSpPr>
+          <p:cNvPr id="685" name="body_right"/>
+          <p:cNvSpPr txBox="1"/>
+          <p:nvPr/>
+        </p:nvSpPr>
+        <p:spPr>
+          <a:xfrm>
+            <a:off x="4583887" y="1414513"/>
+            <a:ext cx="4035247" cy="2695296"/>
+          </a:xfrm>
+          <a:prstGeom prst="rect">
+            <a:avLst/>
+          </a:prstGeom>
+          <a:noFill/>
+        </p:spPr>
+        <p:txBody>
+          <a:bodyPr wrap="square" lIns="76200" rIns="76200" tIns="50800" bIns="50800">
+            <a:spAutoFit/>
+          </a:bodyPr>
+          <a:lstStyle/>
+          <a:p>
+            <a:pPr algn="l">
+              <a:spcAft>
+                <a:spcPts val="300"/>
+              </a:spcAft>
+              <a:defRPr sz="1800">
+                <a:solidFill>
+                  <a:srgbClr val="000000"/>
+                </a:solidFill>
+                <a:latin typeface="Play"/>
+                <a:ea typeface="Play"/>
+                <a:cs typeface="Play"/>
+              </a:defRPr>
+            </a:pPr>
+            <a:r>
+              <a:rPr sz="1800">
+                <a:solidFill>
+                  <a:srgbClr val="000000"/>
+                </a:solidFill>
+                <a:latin typeface="Play"/>
+                <a:ea typeface="Play"/>
+                <a:cs typeface="Play"/>
+              </a:rPr>
+              <a:t>• Нарушения фирменного стиля в пилоте 2 из 68, исправлены автоматически</a:t>
+            </a:r>
+          </a:p>
+          <a:p>
+            <a:pPr algn="l">
+              <a:spcAft>
+                <a:spcPts val="300"/>
+              </a:spcAft>
+              <a:defRPr sz="1800">
+                <a:solidFill>
+                  <a:srgbClr val="000000"/>
+                </a:solidFill>
+                <a:latin typeface="Play"/>
+                <a:ea typeface="Play"/>
+                <a:cs typeface="Play"/>
+              </a:defRPr>
+            </a:pPr>
+            <a:r>
+              <a:rPr sz="1800">
+                <a:solidFill>
+                  <a:srgbClr val="000000"/>
+                </a:solidFill>
+                <a:latin typeface="Play"/>
+                <a:ea typeface="Play"/>
+                <a:cs typeface="Play"/>
+              </a:rPr>
+              <a:t>• Дизайнеры закрыли 38 запросов за 6 недель вместо 11 в неделю</a:t>
+            </a:r>
+          </a:p>
+        </p:txBody>
+      </p:sp>
+    </p:spTree>
+  </p:cSld>
+  <p:clrMapOvr>
+    <a:masterClrMapping/>
+  </p:clrMapOvr>
+</p:sld>
+</file>
+
+<file path=ppt/slides/slide59.xml><?xml version="1.0" encoding="utf-8"?>
+<p:sld xmlns:a="http://schemas.openxmlformats.org/drawingml/2006/main" xmlns:p="http://schemas.openxmlformats.org/presentationml/2006/main" xmlns:r="http://schemas.openxmlformats.org/officeDocument/2006/relationships">
+  <p:cSld>
+    <p:spTree>
+      <p:nvGrpSpPr>
+        <p:cNvPr id="1" name=""/>
+        <p:cNvGrpSpPr/>
+        <p:nvPr/>
+      </p:nvGrpSpPr>
+      <p:grpSpPr/>
+      <p:sp>
+        <p:nvSpPr>
+          <p:cNvPr id="2" name="title"/>
+          <p:cNvSpPr txBox="1"/>
+          <p:nvPr/>
+        </p:nvSpPr>
+        <p:spPr>
+          <a:xfrm>
+            <a:off x="274320" y="282943"/>
+            <a:ext cx="6792986" cy="617220"/>
+          </a:xfrm>
+          <a:prstGeom prst="rect">
+            <a:avLst/>
+          </a:prstGeom>
+          <a:noFill/>
+        </p:spPr>
+        <p:txBody>
+          <a:bodyPr wrap="square" lIns="76200" rIns="76200" tIns="50800" bIns="50800">
+            <a:spAutoFit/>
+          </a:bodyPr>
+          <a:lstStyle/>
+          <a:p>
+            <a:pPr algn="l">
+              <a:spcAft>
+                <a:spcPts val="300"/>
+              </a:spcAft>
+              <a:defRPr sz="2438">
+                <a:solidFill>
+                  <a:srgbClr val="000000"/>
+                </a:solidFill>
+                <a:latin typeface="Play"/>
+                <a:ea typeface="Play"/>
+                <a:cs typeface="Play"/>
+              </a:defRPr>
+            </a:pPr>
+            <a:r>
+              <a:rPr sz="2438">
+                <a:solidFill>
+                  <a:srgbClr val="000000"/>
+                </a:solidFill>
+                <a:latin typeface="Play"/>
+                <a:ea typeface="Play"/>
+                <a:cs typeface="Play"/>
+              </a:rPr>
+              <a:t>Что потребуется: ресурсы и сроки</a:t>
+            </a:r>
+          </a:p>
+        </p:txBody>
+      </p:sp>
+      <p:sp>
+        <p:nvSpPr>
+          <p:cNvPr id="3" name="body_left"/>
+          <p:cNvSpPr txBox="1"/>
+          <p:nvPr/>
+        </p:nvSpPr>
+        <p:spPr>
+          <a:xfrm>
+            <a:off x="274320" y="1414513"/>
+            <a:ext cx="3457574" cy="2602405"/>
+          </a:xfrm>
+          <a:prstGeom prst="rect">
+            <a:avLst/>
+          </a:prstGeom>
+          <a:noFill/>
+        </p:spPr>
+        <p:txBody>
+          <a:bodyPr wrap="square" lIns="76200" rIns="76200" tIns="50800" bIns="50800">
+            <a:spAutoFit/>
+          </a:bodyPr>
+          <a:lstStyle/>
+          <a:p>
+            <a:pPr algn="l">
+              <a:spcAft>
+                <a:spcPts val="300"/>
+              </a:spcAft>
+              <a:defRPr sz="1800" b="1">
+                <a:solidFill>
+                  <a:srgbClr val="000000"/>
+                </a:solidFill>
+                <a:latin typeface="Play"/>
+                <a:ea typeface="Play"/>
+                <a:cs typeface="Play"/>
+              </a:defRPr>
+            </a:pPr>
+            <a:r>
+              <a:rPr sz="1800" b="1">
+                <a:solidFill>
+                  <a:srgbClr val="000000"/>
+                </a:solidFill>
+                <a:latin typeface="Play"/>
+                <a:ea typeface="Play"/>
+                <a:cs typeface="Play"/>
+              </a:rPr>
+              <a:t>• Сервис работает на машине 2 vCPU / 2 ГБ RAM</a:t>
+            </a:r>
+          </a:p>
+          <a:p>
+            <a:pPr algn="l">
+              <a:spcAft>
+                <a:spcPts val="300"/>
+              </a:spcAft>
+              <a:defRPr sz="1800" b="1">
+                <a:solidFill>
+                  <a:srgbClr val="000000"/>
+                </a:solidFill>
+                <a:latin typeface="Play"/>
+                <a:ea typeface="Play"/>
+                <a:cs typeface="Play"/>
+              </a:defRPr>
+            </a:pPr>
+            <a:r>
+              <a:rPr sz="1800" b="1">
+                <a:solidFill>
+                  <a:srgbClr val="000000"/>
+                </a:solidFill>
+                <a:latin typeface="Play"/>
+                <a:ea typeface="Play"/>
+                <a:cs typeface="Play"/>
+              </a:rPr>
+              <a:t>• Модель gpt-oss-20b, инференс за 6 недель 1 400 руб</a:t>
+            </a:r>
+          </a:p>
+        </p:txBody>
+      </p:sp>
+      <p:sp>
+        <p:nvSpPr>
+          <p:cNvPr id="4" name="body_right"/>
+          <p:cNvSpPr txBox="1"/>
+          <p:nvPr/>
+        </p:nvSpPr>
+        <p:spPr>
+          <a:xfrm>
+            <a:off x="4006215" y="1414513"/>
+            <a:ext cx="3457574" cy="2602405"/>
+          </a:xfrm>
+          <a:prstGeom prst="rect">
+            <a:avLst/>
+          </a:prstGeom>
+          <a:noFill/>
+        </p:spPr>
+        <p:txBody>
+          <a:bodyPr wrap="square" lIns="76200" rIns="76200" tIns="50800" bIns="50800">
+            <a:spAutoFit/>
+          </a:bodyPr>
+          <a:lstStyle/>
+          <a:p>
+            <a:pPr algn="l">
+              <a:spcAft>
+                <a:spcPts val="300"/>
+              </a:spcAft>
+              <a:defRPr sz="1800" b="1">
+                <a:solidFill>
+                  <a:srgbClr val="000000"/>
+                </a:solidFill>
+                <a:latin typeface="Play"/>
+                <a:ea typeface="Play"/>
+                <a:cs typeface="Play"/>
+              </a:defRPr>
+            </a:pPr>
+            <a:r>
+              <a:rPr sz="1800" b="1">
+                <a:solidFill>
+                  <a:srgbClr val="000000"/>
+                </a:solidFill>
+                <a:latin typeface="Play"/>
+                <a:ea typeface="Play"/>
+                <a:cs typeface="Play"/>
+              </a:rPr>
+              <a:t>• Третий квартал 2026: подключение 4 команд, домен и HTTPS</a:t>
+            </a:r>
+          </a:p>
+          <a:p>
+            <a:pPr algn="l">
+              <a:spcAft>
+                <a:spcPts val="300"/>
+              </a:spcAft>
+              <a:defRPr sz="1800" b="1">
+                <a:solidFill>
+                  <a:srgbClr val="000000"/>
+                </a:solidFill>
+                <a:latin typeface="Play"/>
+                <a:ea typeface="Play"/>
+                <a:cs typeface="Play"/>
+              </a:defRPr>
+            </a:pPr>
+            <a:r>
+              <a:rPr sz="1800" b="1">
+                <a:solidFill>
+                  <a:srgbClr val="000000"/>
+                </a:solidFill>
+                <a:latin typeface="Play"/>
+                <a:ea typeface="Play"/>
+                <a:cs typeface="Play"/>
+              </a:rPr>
+              <a:t>• Четвёртый квартал 2026: доступ для всей компании, интеграция с хранилищем</a:t>
+            </a:r>
+          </a:p>
+        </p:txBody>
+      </p:sp>
+    </p:spTree>
+  </p:cSld>
+  <p:clrMapOvr>
+    <a:masterClrMapping/>
+  </p:clrMapOvr>
+</p:sld>
+</file>
+
+<file path=ppt/slides/slide60.xml><?xml version="1.0" encoding="utf-8"?>
 <p:sld xmlns:a="http://schemas.openxmlformats.org/drawingml/2006/main" xmlns:p="http://schemas.openxmlformats.org/presentationml/2006/main" xmlns:r="http://schemas.openxmlformats.org/officeDocument/2006/relationships">
   <p:cSld>
     <p:spTree>
@@ -6419,89 +7585,7 @@
       </p:pic>
       <p:sp>
         <p:nvSpPr>
-          <p:cNvPr id="2395" name="Google Shape;2395;p88"/>
-          <p:cNvSpPr/>
-          <p:nvPr/>
-        </p:nvSpPr>
-        <p:spPr>
-          <a:xfrm>
-            <a:off x="319086" y="3000319"/>
-            <a:ext cx="1690679" cy="1128566"/>
-          </a:xfrm>
-          <a:prstGeom prst="rect">
-            <a:avLst/>
-          </a:prstGeom>
-          <a:noFill/>
-          <a:ln>
-            <a:noFill/>
-          </a:ln>
-        </p:spPr>
-        <p:txBody>
-          <a:bodyPr anchorCtr="0" anchor="ctr" bIns="91425" lIns="91425" spcFirstLastPara="1" rIns="91425" wrap="square" tIns="91425">
-            <a:noAutofit/>
-          </a:bodyPr>
-          <a:lstStyle/>
-          <a:p>
-            <a:pPr indent="0" lvl="0" marL="0" rtl="0" algn="l">
-              <a:spcBef>
-                <a:spcPts val="0"/>
-              </a:spcBef>
-              <a:spcAft>
-                <a:spcPts val="0"/>
-              </a:spcAft>
-              <a:buNone/>
-            </a:pPr>
-            <a:r>
-              <a:t/>
-            </a:r>
-            <a:endParaRPr/>
-          </a:p>
-        </p:txBody>
-      </p:sp>
-      <p:sp>
-        <p:nvSpPr>
-          <p:cNvPr id="2397" name="Google Shape;2397;p88"/>
-          <p:cNvSpPr/>
-          <p:nvPr/>
-        </p:nvSpPr>
-        <p:spPr>
-          <a:xfrm>
-            <a:off x="2600312" y="3000319"/>
-            <a:ext cx="1690679" cy="1128566"/>
-          </a:xfrm>
-          <a:prstGeom prst="rect">
-            <a:avLst/>
-          </a:prstGeom>
-          <a:noFill/>
-          <a:ln>
-            <a:noFill/>
-          </a:ln>
-        </p:spPr>
-        <p:txBody>
-          <a:bodyPr anchorCtr="0" anchor="ctr" bIns="91425" lIns="91425" spcFirstLastPara="1" rIns="91425" wrap="square" tIns="91425">
-            <a:noAutofit/>
-          </a:bodyPr>
-          <a:lstStyle/>
-          <a:p>
-            <a:pPr indent="0" lvl="0" marL="0" rtl="0" algn="l">
-              <a:spcBef>
-                <a:spcPts val="0"/>
-              </a:spcBef>
-              <a:spcAft>
-                <a:spcPts val="0"/>
-              </a:spcAft>
-              <a:buNone/>
-            </a:pPr>
-            <a:r>
-              <a:t/>
-            </a:r>
-            <a:endParaRPr/>
-          </a:p>
-        </p:txBody>
-      </p:sp>
-      <p:sp>
-        <p:nvSpPr>
-          <p:cNvPr id="2398" name="title"/>
+          <p:cNvPr id="2395" name="title"/>
           <p:cNvSpPr txBox="1"/>
           <p:nvPr/>
         </p:nvSpPr>
@@ -6525,7 +7609,7 @@
               <a:spcAft>
                 <a:spcPts val="300"/>
               </a:spcAft>
-              <a:defRPr sz="2400">
+              <a:defRPr sz="2438">
                 <a:solidFill>
                   <a:srgbClr val="000000"/>
                 </a:solidFill>
@@ -6535,7 +7619,7 @@
               </a:defRPr>
             </a:pPr>
             <a:r>
-              <a:rPr sz="2400">
+              <a:rPr sz="2438">
                 <a:solidFill>
                   <a:srgbClr val="000000"/>
                 </a:solidFill>
@@ -6543,616 +7627,21 @@
                 <a:ea typeface="Play"/>
                 <a:cs typeface="Play"/>
               </a:rPr>
-              <a:t>Ожидаемый эффект</a:t>
+              <a:t>План пилота</a:t>
             </a:r>
           </a:p>
         </p:txBody>
       </p:sp>
-      <p:graphicFrame>
-        <p:nvGraphicFramePr>
-          <p:cNvPr id="2399" name="Table 2398"/>
-          <p:cNvGraphicFramePr>
-            <a:graphicFrameLocks noGrp="1"/>
-          </p:cNvGraphicFramePr>
-          <p:nvPr/>
-        </p:nvGraphicFramePr>
-        <p:xfrm>
-          <a:off x="4583887" y="2009822"/>
-          <a:ext cx="4035247" cy="1674466"/>
-        </p:xfrm>
-        <a:graphic>
-          <a:graphicData uri="http://schemas.openxmlformats.org/drawingml/2006/table">
-            <a:tbl>
-              <a:tblPr firstRow="1" bandRow="1">
-                <a:tableStyleId>{5C22544A-7EE6-4342-B048-85BDC9FD1C3A}</a:tableStyleId>
-              </a:tblPr>
-              <a:tblGrid>
-                <a:gridCol w="1345082"/>
-                <a:gridCol w="1345082"/>
-                <a:gridCol w="1345083"/>
-              </a:tblGrid>
-              <a:tr h="334893">
-                <a:tc>
-                  <a:txBody>
-                    <a:bodyPr/>
-                    <a:lstStyle/>
-                    <a:p>
-                      <a:pPr>
-                        <a:defRPr sz="1300" b="1">
-                          <a:solidFill>
-                            <a:srgbClr val="FFFFFF"/>
-                          </a:solidFill>
-                          <a:latin typeface="Play"/>
-                          <a:ea typeface="Play"/>
-                          <a:cs typeface="Play"/>
-                        </a:defRPr>
-                      </a:pPr>
-                      <a:r>
-                        <a:t>Метрика</a:t>
-                      </a:r>
-                    </a:p>
-                  </a:txBody>
-                  <a:tcPr>
-                    <a:solidFill>
-                      <a:srgbClr val="0077FF"/>
-                    </a:solidFill>
-                  </a:tcPr>
-                </a:tc>
-                <a:tc>
-                  <a:txBody>
-                    <a:bodyPr/>
-                    <a:lstStyle/>
-                    <a:p>
-                      <a:pPr>
-                        <a:defRPr sz="1300" b="1">
-                          <a:solidFill>
-                            <a:srgbClr val="FFFFFF"/>
-                          </a:solidFill>
-                          <a:latin typeface="Play"/>
-                          <a:ea typeface="Play"/>
-                          <a:cs typeface="Play"/>
-                        </a:defRPr>
-                      </a:pPr>
-                      <a:r>
-                        <a:t>Текущее</a:t>
-                      </a:r>
-                    </a:p>
-                  </a:txBody>
-                  <a:tcPr>
-                    <a:solidFill>
-                      <a:srgbClr val="0077FF"/>
-                    </a:solidFill>
-                  </a:tcPr>
-                </a:tc>
-                <a:tc>
-                  <a:txBody>
-                    <a:bodyPr/>
-                    <a:lstStyle/>
-                    <a:p>
-                      <a:pPr>
-                        <a:defRPr sz="1300" b="1">
-                          <a:solidFill>
-                            <a:srgbClr val="FFFFFF"/>
-                          </a:solidFill>
-                          <a:latin typeface="Play"/>
-                          <a:ea typeface="Play"/>
-                          <a:cs typeface="Play"/>
-                        </a:defRPr>
-                      </a:pPr>
-                      <a:r>
-                        <a:t>Пилот</a:t>
-                      </a:r>
-                    </a:p>
-                  </a:txBody>
-                  <a:tcPr>
-                    <a:solidFill>
-                      <a:srgbClr val="0077FF"/>
-                    </a:solidFill>
-                  </a:tcPr>
-                </a:tc>
-              </a:tr>
-              <a:tr h="334893">
-                <a:tc>
-                  <a:txBody>
-                    <a:bodyPr/>
-                    <a:lstStyle/>
-                    <a:p>
-                      <a:pPr>
-                        <a:defRPr sz="1300" b="0">
-                          <a:solidFill>
-                            <a:srgbClr val="000000"/>
-                          </a:solidFill>
-                          <a:latin typeface="Play"/>
-                          <a:ea typeface="Play"/>
-                          <a:cs typeface="Play"/>
-                        </a:defRPr>
-                      </a:pPr>
-                      <a:r>
-                        <a:t>Сборка (мин)</a:t>
-                      </a:r>
-                    </a:p>
-                  </a:txBody>
-                  <a:tcPr>
-                    <a:solidFill>
-                      <a:srgbClr val="FFFFFF"/>
-                    </a:solidFill>
-                  </a:tcPr>
-                </a:tc>
-                <a:tc>
-                  <a:txBody>
-                    <a:bodyPr/>
-                    <a:lstStyle/>
-                    <a:p>
-                      <a:pPr>
-                        <a:defRPr sz="1300" b="0">
-                          <a:solidFill>
-                            <a:srgbClr val="000000"/>
-                          </a:solidFill>
-                          <a:latin typeface="Play"/>
-                          <a:ea typeface="Play"/>
-                          <a:cs typeface="Play"/>
-                        </a:defRPr>
-                      </a:pPr>
-                      <a:r>
-                        <a:t>186</a:t>
-                      </a:r>
-                    </a:p>
-                  </a:txBody>
-                  <a:tcPr>
-                    <a:solidFill>
-                      <a:srgbClr val="FFFFFF"/>
-                    </a:solidFill>
-                  </a:tcPr>
-                </a:tc>
-                <a:tc>
-                  <a:txBody>
-                    <a:bodyPr/>
-                    <a:lstStyle/>
-                    <a:p>
-                      <a:pPr>
-                        <a:defRPr sz="1300" b="0">
-                          <a:solidFill>
-                            <a:srgbClr val="000000"/>
-                          </a:solidFill>
-                          <a:latin typeface="Play"/>
-                          <a:ea typeface="Play"/>
-                          <a:cs typeface="Play"/>
-                        </a:defRPr>
-                      </a:pPr>
-                      <a:r>
-                        <a:t>4</a:t>
-                      </a:r>
-                    </a:p>
-                  </a:txBody>
-                  <a:tcPr>
-                    <a:solidFill>
-                      <a:srgbClr val="FFFFFF"/>
-                    </a:solidFill>
-                  </a:tcPr>
-                </a:tc>
-              </a:tr>
-              <a:tr h="334893">
-                <a:tc>
-                  <a:txBody>
-                    <a:bodyPr/>
-                    <a:lstStyle/>
-                    <a:p>
-                      <a:pPr>
-                        <a:defRPr sz="1300" b="0">
-                          <a:solidFill>
-                            <a:srgbClr val="000000"/>
-                          </a:solidFill>
-                          <a:latin typeface="Play"/>
-                          <a:ea typeface="Play"/>
-                          <a:cs typeface="Play"/>
-                        </a:defRPr>
-                      </a:pPr>
-                      <a:r>
-                        <a:t>Время до первой версии (дней)</a:t>
-                      </a:r>
-                    </a:p>
-                  </a:txBody>
-                  <a:tcPr>
-                    <a:solidFill>
-                      <a:srgbClr val="FFFFFF"/>
-                    </a:solidFill>
-                  </a:tcPr>
-                </a:tc>
-                <a:tc>
-                  <a:txBody>
-                    <a:bodyPr/>
-                    <a:lstStyle/>
-                    <a:p>
-                      <a:pPr>
-                        <a:defRPr sz="1300" b="0">
-                          <a:solidFill>
-                            <a:srgbClr val="000000"/>
-                          </a:solidFill>
-                          <a:latin typeface="Play"/>
-                          <a:ea typeface="Play"/>
-                          <a:cs typeface="Play"/>
-                        </a:defRPr>
-                      </a:pPr>
-                      <a:r>
-                        <a:t>6</a:t>
-                      </a:r>
-                    </a:p>
-                  </a:txBody>
-                  <a:tcPr>
-                    <a:solidFill>
-                      <a:srgbClr val="FFFFFF"/>
-                    </a:solidFill>
-                  </a:tcPr>
-                </a:tc>
-                <a:tc>
-                  <a:txBody>
-                    <a:bodyPr/>
-                    <a:lstStyle/>
-                    <a:p>
-                      <a:pPr>
-                        <a:defRPr sz="1300" b="0">
-                          <a:solidFill>
-                            <a:srgbClr val="000000"/>
-                          </a:solidFill>
-                          <a:latin typeface="Play"/>
-                          <a:ea typeface="Play"/>
-                          <a:cs typeface="Play"/>
-                        </a:defRPr>
-                      </a:pPr>
-                      <a:r>
-                        <a:t>1</a:t>
-                      </a:r>
-                    </a:p>
-                  </a:txBody>
-                  <a:tcPr>
-                    <a:solidFill>
-                      <a:srgbClr val="FFFFFF"/>
-                    </a:solidFill>
-                  </a:tcPr>
-                </a:tc>
-              </a:tr>
-              <a:tr h="334893">
-                <a:tc>
-                  <a:txBody>
-                    <a:bodyPr/>
-                    <a:lstStyle/>
-                    <a:p>
-                      <a:pPr>
-                        <a:defRPr sz="1300" b="0">
-                          <a:solidFill>
-                            <a:srgbClr val="000000"/>
-                          </a:solidFill>
-                          <a:latin typeface="Play"/>
-                          <a:ea typeface="Play"/>
-                          <a:cs typeface="Play"/>
-                        </a:defRPr>
-                      </a:pPr>
-                      <a:r>
-                        <a:t>Нарушения (колод)</a:t>
-                      </a:r>
-                    </a:p>
-                  </a:txBody>
-                  <a:tcPr>
-                    <a:solidFill>
-                      <a:srgbClr val="FFFFFF"/>
-                    </a:solidFill>
-                  </a:tcPr>
-                </a:tc>
-                <a:tc>
-                  <a:txBody>
-                    <a:bodyPr/>
-                    <a:lstStyle/>
-                    <a:p>
-                      <a:pPr>
-                        <a:defRPr sz="1300" b="0">
-                          <a:solidFill>
-                            <a:srgbClr val="000000"/>
-                          </a:solidFill>
-                          <a:latin typeface="Play"/>
-                          <a:ea typeface="Play"/>
-                          <a:cs typeface="Play"/>
-                        </a:defRPr>
-                      </a:pPr>
-                      <a:r>
-                        <a:t>19</a:t>
-                      </a:r>
-                    </a:p>
-                  </a:txBody>
-                  <a:tcPr>
-                    <a:solidFill>
-                      <a:srgbClr val="FFFFFF"/>
-                    </a:solidFill>
-                  </a:tcPr>
-                </a:tc>
-                <a:tc>
-                  <a:txBody>
-                    <a:bodyPr/>
-                    <a:lstStyle/>
-                    <a:p>
-                      <a:pPr>
-                        <a:defRPr sz="1300" b="0">
-                          <a:solidFill>
-                            <a:srgbClr val="000000"/>
-                          </a:solidFill>
-                          <a:latin typeface="Play"/>
-                          <a:ea typeface="Play"/>
-                          <a:cs typeface="Play"/>
-                        </a:defRPr>
-                      </a:pPr>
-                      <a:r>
-                        <a:t>2</a:t>
-                      </a:r>
-                    </a:p>
-                  </a:txBody>
-                  <a:tcPr>
-                    <a:solidFill>
-                      <a:srgbClr val="FFFFFF"/>
-                    </a:solidFill>
-                  </a:tcPr>
-                </a:tc>
-              </a:tr>
-              <a:tr h="334894">
-                <a:tc>
-                  <a:txBody>
-                    <a:bodyPr/>
-                    <a:lstStyle/>
-                    <a:p>
-                      <a:pPr>
-                        <a:defRPr sz="1300" b="0">
-                          <a:solidFill>
-                            <a:srgbClr val="000000"/>
-                          </a:solidFill>
-                          <a:latin typeface="Play"/>
-                          <a:ea typeface="Play"/>
-                          <a:cs typeface="Play"/>
-                        </a:defRPr>
-                      </a:pPr>
-                      <a:r>
-                        <a:t>Запросы (запросов)</a:t>
-                      </a:r>
-                    </a:p>
-                  </a:txBody>
-                  <a:tcPr>
-                    <a:solidFill>
-                      <a:srgbClr val="FFFFFF"/>
-                    </a:solidFill>
-                  </a:tcPr>
-                </a:tc>
-                <a:tc>
-                  <a:txBody>
-                    <a:bodyPr/>
-                    <a:lstStyle/>
-                    <a:p>
-                      <a:pPr>
-                        <a:defRPr sz="1300" b="0">
-                          <a:solidFill>
-                            <a:srgbClr val="000000"/>
-                          </a:solidFill>
-                          <a:latin typeface="Play"/>
-                          <a:ea typeface="Play"/>
-                          <a:cs typeface="Play"/>
-                        </a:defRPr>
-                      </a:pPr>
-                      <a:r>
-                        <a:t>11</a:t>
-                      </a:r>
-                    </a:p>
-                  </a:txBody>
-                  <a:tcPr>
-                    <a:solidFill>
-                      <a:srgbClr val="FFFFFF"/>
-                    </a:solidFill>
-                  </a:tcPr>
-                </a:tc>
-                <a:tc>
-                  <a:txBody>
-                    <a:bodyPr/>
-                    <a:lstStyle/>
-                    <a:p>
-                      <a:pPr>
-                        <a:defRPr sz="1300" b="0">
-                          <a:solidFill>
-                            <a:srgbClr val="000000"/>
-                          </a:solidFill>
-                          <a:latin typeface="Play"/>
-                          <a:ea typeface="Play"/>
-                          <a:cs typeface="Play"/>
-                        </a:defRPr>
-                      </a:pPr>
-                      <a:r>
-                        <a:t>38</a:t>
-                      </a:r>
-                    </a:p>
-                  </a:txBody>
-                  <a:tcPr>
-                    <a:solidFill>
-                      <a:srgbClr val="FFFFFF"/>
-                    </a:solidFill>
-                  </a:tcPr>
-                </a:tc>
-              </a:tr>
-            </a:tbl>
-          </a:graphicData>
-        </a:graphic>
-      </p:graphicFrame>
-    </p:spTree>
-  </p:cSld>
-  <p:clrMapOvr>
-    <a:masterClrMapping/>
-  </p:clrMapOvr>
-</p:sld>
-</file>
-
-<file path=ppt/slides/slide59.xml><?xml version="1.0" encoding="utf-8"?>
-<p:sld xmlns:a="http://schemas.openxmlformats.org/drawingml/2006/main" xmlns:p="http://schemas.openxmlformats.org/presentationml/2006/main" xmlns:r="http://schemas.openxmlformats.org/officeDocument/2006/relationships">
-  <p:cSld>
-    <p:spTree>
-      <p:nvGrpSpPr>
-        <p:cNvPr id="1" name=""/>
-        <p:cNvGrpSpPr/>
-        <p:nvPr/>
-      </p:nvGrpSpPr>
-      <p:grpSpPr/>
-      <p:pic>
-        <p:nvPicPr>
-          <p:cNvPr descr=" " id="2428" name="Google Shape;2428;p89"/>
-          <p:cNvPicPr preferRelativeResize="0"/>
-          <p:nvPr/>
-        </p:nvPicPr>
-        <p:blipFill rotWithShape="1">
-          <a:blip r:embed="rId2">
-            <a:alphaModFix/>
-          </a:blip>
-          <a:srcRect b="0" l="0" r="0" t="0"/>
-          <a:stretch/>
-        </p:blipFill>
-        <p:spPr>
-          <a:xfrm>
-            <a:off x="0" y="2732082"/>
-            <a:ext cx="8515008" cy="92615"/>
-          </a:xfrm>
-          <a:prstGeom prst="rect">
-            <a:avLst/>
-          </a:prstGeom>
-          <a:noFill/>
-          <a:ln>
-            <a:noFill/>
-          </a:ln>
-        </p:spPr>
-      </p:pic>
-      <p:sp>
-        <p:nvSpPr>
-          <p:cNvPr id="2429" name="Google Shape;2429;p89"/>
-          <p:cNvSpPr/>
-          <p:nvPr/>
-        </p:nvSpPr>
-        <p:spPr>
-          <a:xfrm>
-            <a:off x="553415" y="1828897"/>
-            <a:ext cx="2232516" cy="1490254"/>
-          </a:xfrm>
-          <a:prstGeom prst="rect">
-            <a:avLst/>
-          </a:prstGeom>
-          <a:noFill/>
-          <a:ln>
-            <a:noFill/>
-          </a:ln>
-        </p:spPr>
-        <p:txBody>
-          <a:bodyPr anchorCtr="0" anchor="ctr" bIns="91425" lIns="91425" spcFirstLastPara="1" rIns="91425" wrap="square" tIns="91425">
-            <a:noAutofit/>
-          </a:bodyPr>
-          <a:lstStyle/>
-          <a:p>
-            <a:pPr indent="0" lvl="0" marL="0" rtl="0" algn="l">
-              <a:spcBef>
-                <a:spcPts val="0"/>
-              </a:spcBef>
-              <a:spcAft>
-                <a:spcPts val="0"/>
-              </a:spcAft>
-              <a:buNone/>
-            </a:pPr>
-            <a:r>
-              <a:t/>
-            </a:r>
-            <a:endParaRPr/>
-          </a:p>
-        </p:txBody>
-      </p:sp>
-      <p:sp>
-        <p:nvSpPr>
-          <p:cNvPr id="2431" name="Google Shape;2431;p89"/>
-          <p:cNvSpPr/>
-          <p:nvPr/>
-        </p:nvSpPr>
-        <p:spPr>
-          <a:xfrm>
-            <a:off x="3565736" y="1828897"/>
-            <a:ext cx="2232516" cy="1490254"/>
-          </a:xfrm>
-          <a:prstGeom prst="rect">
-            <a:avLst/>
-          </a:prstGeom>
-          <a:noFill/>
-          <a:ln>
-            <a:noFill/>
-          </a:ln>
-        </p:spPr>
-        <p:txBody>
-          <a:bodyPr anchorCtr="0" anchor="ctr" bIns="91425" lIns="91425" spcFirstLastPara="1" rIns="91425" wrap="square" tIns="91425">
-            <a:noAutofit/>
-          </a:bodyPr>
-          <a:lstStyle/>
-          <a:p>
-            <a:pPr indent="0" lvl="0" marL="0" rtl="0" algn="l">
-              <a:spcBef>
-                <a:spcPts val="0"/>
-              </a:spcBef>
-              <a:spcAft>
-                <a:spcPts val="0"/>
-              </a:spcAft>
-              <a:buNone/>
-            </a:pPr>
-            <a:r>
-              <a:t/>
-            </a:r>
-            <a:endParaRPr/>
-          </a:p>
-        </p:txBody>
-      </p:sp>
-      <p:sp>
-        <p:nvSpPr>
-          <p:cNvPr id="2433" name="Google Shape;2433;p89"/>
-          <p:cNvSpPr/>
-          <p:nvPr/>
-        </p:nvSpPr>
-        <p:spPr>
-          <a:xfrm>
-            <a:off x="6578067" y="1828897"/>
-            <a:ext cx="2232516" cy="1490254"/>
-          </a:xfrm>
-          <a:prstGeom prst="rect">
-            <a:avLst/>
-          </a:prstGeom>
-          <a:noFill/>
-          <a:ln>
-            <a:noFill/>
-          </a:ln>
-        </p:spPr>
-        <p:txBody>
-          <a:bodyPr anchorCtr="0" anchor="ctr" bIns="91425" lIns="91425" spcFirstLastPara="1" rIns="91425" wrap="square" tIns="91425">
-            <a:noAutofit/>
-          </a:bodyPr>
-          <a:lstStyle/>
-          <a:p>
-            <a:pPr indent="0" lvl="0" marL="0" rtl="0" algn="l">
-              <a:spcBef>
-                <a:spcPts val="0"/>
-              </a:spcBef>
-              <a:spcAft>
-                <a:spcPts val="0"/>
-              </a:spcAft>
-              <a:buNone/>
-            </a:pPr>
-            <a:r>
-              <a:t/>
-            </a:r>
-            <a:endParaRPr/>
-          </a:p>
-        </p:txBody>
-      </p:sp>
-      <p:sp>
-        <p:nvSpPr>
-          <p:cNvPr id="2434" name="title"/>
+      <p:sp>
+        <p:nvSpPr>
+          <p:cNvPr id="2396" name="body"/>
           <p:cNvSpPr txBox="1"/>
           <p:nvPr/>
         </p:nvSpPr>
         <p:spPr>
           <a:xfrm>
-            <a:off x="274320" y="282943"/>
-            <a:ext cx="6792986" cy="617220"/>
+            <a:off x="274320" y="2009822"/>
+            <a:ext cx="4035247" cy="1674466"/>
           </a:xfrm>
           <a:prstGeom prst="rect">
             <a:avLst/>
@@ -7169,7 +7658,7 @@
               <a:spcAft>
                 <a:spcPts val="300"/>
               </a:spcAft>
-              <a:defRPr sz="2400">
+              <a:defRPr sz="1400">
                 <a:solidFill>
                   <a:srgbClr val="000000"/>
                 </a:solidFill>
@@ -7179,7 +7668,7 @@
               </a:defRPr>
             </a:pPr>
             <a:r>
-              <a:rPr sz="2400">
+              <a:rPr sz="1400">
                 <a:solidFill>
                   <a:srgbClr val="000000"/>
                 </a:solidFill>
@@ -7187,38 +7676,15 @@
                 <a:ea typeface="Play"/>
                 <a:cs typeface="Play"/>
               </a:rPr>
-              <a:t>Ресурсы и сроки</a:t>
+              <a:t>• Пилот 6 недель на двух командах</a:t>
             </a:r>
           </a:p>
-        </p:txBody>
-      </p:sp>
-      <p:sp>
-        <p:nvSpPr>
-          <p:cNvPr id="2435" name="body"/>
-          <p:cNvSpPr txBox="1"/>
-          <p:nvPr/>
-        </p:nvSpPr>
-        <p:spPr>
-          <a:xfrm>
-            <a:off x="274320" y="1414513"/>
-            <a:ext cx="4035247" cy="1317558"/>
-          </a:xfrm>
-          <a:prstGeom prst="rect">
-            <a:avLst/>
-          </a:prstGeom>
-          <a:noFill/>
-        </p:spPr>
-        <p:txBody>
-          <a:bodyPr wrap="square" lIns="76200" rIns="76200" tIns="50800" bIns="50800">
-            <a:spAutoFit/>
-          </a:bodyPr>
-          <a:lstStyle/>
           <a:p>
             <a:pPr algn="l">
               <a:spcAft>
                 <a:spcPts val="300"/>
               </a:spcAft>
-              <a:defRPr sz="1225">
+              <a:defRPr sz="1400">
                 <a:solidFill>
                   <a:srgbClr val="000000"/>
                 </a:solidFill>
@@ -7228,7 +7694,7 @@
               </a:defRPr>
             </a:pPr>
             <a:r>
-              <a:rPr sz="1225">
+              <a:rPr sz="1400">
                 <a:solidFill>
                   <a:srgbClr val="000000"/>
                 </a:solidFill>
@@ -7236,7 +7702,7 @@
                 <a:ea typeface="Play"/>
                 <a:cs typeface="Play"/>
               </a:rPr>
-              <a:t>• 2 vCPU / 2 GB RAM</a:t>
+              <a:t>• Собрано 68 презентаций</a:t>
             </a:r>
           </a:p>
           <a:p>
@@ -7244,7 +7710,7 @@
               <a:spcAft>
                 <a:spcPts val="300"/>
               </a:spcAft>
-              <a:defRPr sz="1225">
+              <a:defRPr sz="1400">
                 <a:solidFill>
                   <a:srgbClr val="000000"/>
                 </a:solidFill>
@@ -7254,7 +7720,7 @@
               </a:defRPr>
             </a:pPr>
             <a:r>
-              <a:rPr sz="1225">
+              <a:rPr sz="1400">
                 <a:solidFill>
                   <a:srgbClr val="000000"/>
                 </a:solidFill>
@@ -7262,7 +7728,7 @@
                 <a:ea typeface="Play"/>
                 <a:cs typeface="Play"/>
               </a:rPr>
-              <a:t>• 1 400 рублей за 6 недель</a:t>
+              <a:t>• Время сборки 4 мин, ожидание 1 день</a:t>
             </a:r>
           </a:p>
           <a:p>
@@ -7270,7 +7736,7 @@
               <a:spcAft>
                 <a:spcPts val="300"/>
               </a:spcAft>
-              <a:defRPr sz="1225">
+              <a:defRPr sz="1400">
                 <a:solidFill>
                   <a:srgbClr val="000000"/>
                 </a:solidFill>
@@ -7280,7 +7746,7 @@
               </a:defRPr>
             </a:pPr>
             <a:r>
-              <a:rPr sz="1225">
+              <a:rPr sz="1400">
                 <a:solidFill>
                   <a:srgbClr val="000000"/>
                 </a:solidFill>
@@ -7288,99 +7754,21 @@
                 <a:ea typeface="Play"/>
                 <a:cs typeface="Play"/>
               </a:rPr>
-              <a:t>• Модель gpt-oss-20b</a:t>
+              <a:t>• Нарушения стиля 2 из 68, исправлены автоматически</a:t>
             </a:r>
           </a:p>
-          <a:p>
-            <a:pPr algn="l">
-              <a:spcAft>
-                <a:spcPts val="300"/>
-              </a:spcAft>
-              <a:defRPr sz="1225">
-                <a:solidFill>
-                  <a:srgbClr val="000000"/>
-                </a:solidFill>
-                <a:latin typeface="Play"/>
-                <a:ea typeface="Play"/>
-                <a:cs typeface="Play"/>
-              </a:defRPr>
-            </a:pPr>
-            <a:r>
-              <a:rPr sz="1225">
-                <a:solidFill>
-                  <a:srgbClr val="000000"/>
-                </a:solidFill>
-                <a:latin typeface="Play"/>
-                <a:ea typeface="Play"/>
-                <a:cs typeface="Play"/>
-              </a:rPr>
-              <a:t>• Подключение 4 команд, домен и HTTPS</a:t>
-            </a:r>
-          </a:p>
-          <a:p>
-            <a:pPr algn="l">
-              <a:spcAft>
-                <a:spcPts val="300"/>
-              </a:spcAft>
-              <a:defRPr sz="1225">
-                <a:solidFill>
-                  <a:srgbClr val="000000"/>
-                </a:solidFill>
-                <a:latin typeface="Play"/>
-                <a:ea typeface="Play"/>
-                <a:cs typeface="Play"/>
-              </a:defRPr>
-            </a:pPr>
-            <a:r>
-              <a:rPr sz="1225">
-                <a:solidFill>
-                  <a:srgbClr val="000000"/>
-                </a:solidFill>
-                <a:latin typeface="Play"/>
-                <a:ea typeface="Play"/>
-                <a:cs typeface="Play"/>
-              </a:rPr>
-              <a:t>• Доступ всей компании, интеграция</a:t>
-            </a:r>
-          </a:p>
-          <a:p>
-            <a:pPr algn="l">
-              <a:spcAft>
-                <a:spcPts val="300"/>
-              </a:spcAft>
-              <a:defRPr sz="1225">
-                <a:solidFill>
-                  <a:srgbClr val="000000"/>
-                </a:solidFill>
-                <a:latin typeface="Play"/>
-                <a:ea typeface="Play"/>
-                <a:cs typeface="Play"/>
-              </a:defRPr>
-            </a:pPr>
-            <a:r>
-              <a:rPr sz="1225">
-                <a:solidFill>
-                  <a:srgbClr val="000000"/>
-                </a:solidFill>
-                <a:latin typeface="Play"/>
-                <a:ea typeface="Play"/>
-                <a:cs typeface="Play"/>
-              </a:rPr>
-              <a:t>• Генерация иллюстраций в Q1 2027</a:t>
-            </a:r>
-          </a:p>
-        </p:txBody>
-      </p:sp>
-      <p:sp>
-        <p:nvSpPr>
-          <p:cNvPr id="2436" name="Rectangle 2435"/>
+        </p:txBody>
+      </p:sp>
+      <p:sp>
+        <p:nvSpPr>
+          <p:cNvPr id="2397" name="Rectangle 2396"/>
           <p:cNvSpPr/>
           <p:nvPr/>
         </p:nvSpPr>
         <p:spPr>
           <a:xfrm>
-            <a:off x="4583887" y="2020589"/>
-            <a:ext cx="4035247" cy="39526"/>
+            <a:off x="4583887" y="2780076"/>
+            <a:ext cx="4035247" cy="50233"/>
           </a:xfrm>
           <a:prstGeom prst="rect">
             <a:avLst/>
@@ -7416,14 +7804,14 @@
       </p:sp>
       <p:sp>
         <p:nvSpPr>
-          <p:cNvPr id="2437" name="Oval 2436"/>
+          <p:cNvPr id="2398" name="Oval 2397"/>
           <p:cNvSpPr/>
           <p:nvPr/>
         </p:nvSpPr>
         <p:spPr>
           <a:xfrm>
-            <a:off x="4943361" y="1895421"/>
-            <a:ext cx="289862" cy="289862"/>
+            <a:off x="5072236" y="2621002"/>
+            <a:ext cx="368382" cy="368382"/>
           </a:xfrm>
           <a:prstGeom prst="ellipse">
             <a:avLst/>
@@ -7459,14 +7847,14 @@
       </p:sp>
       <p:sp>
         <p:nvSpPr>
-          <p:cNvPr id="2438" name="TextBox 2437"/>
+          <p:cNvPr id="2399" name="TextBox 2398"/>
           <p:cNvSpPr txBox="1"/>
           <p:nvPr/>
         </p:nvSpPr>
         <p:spPr>
           <a:xfrm>
-            <a:off x="4583887" y="1414513"/>
-            <a:ext cx="1008811" cy="500672"/>
+            <a:off x="4583887" y="2009822"/>
+            <a:ext cx="2017623" cy="636297"/>
           </a:xfrm>
           <a:prstGeom prst="rect">
             <a:avLst/>
@@ -7474,13 +7862,13 @@
           <a:noFill/>
         </p:spPr>
         <p:txBody>
-          <a:bodyPr wrap="square">
+          <a:bodyPr wrap="square" lIns="12700" rIns="12700" tIns="12700" bIns="12700">
             <a:spAutoFit/>
           </a:bodyPr>
           <a:lstStyle/>
           <a:p>
             <a:pPr algn="ctr">
-              <a:defRPr sz="1200" b="0">
+              <a:defRPr sz="1400" b="0">
                 <a:solidFill>
                   <a:srgbClr val="000000"/>
                 </a:solidFill>
@@ -7490,7 +7878,7 @@
               </a:defRPr>
             </a:pPr>
             <a:r>
-              <a:rPr sz="1200" b="0">
+              <a:rPr sz="1400" b="0">
                 <a:solidFill>
                   <a:srgbClr val="000000"/>
                 </a:solidFill>
@@ -7498,21 +7886,21 @@
                 <a:ea typeface="Play"/>
                 <a:cs typeface="Play"/>
               </a:rPr>
-              <a:t>Подключение 4 команд</a:t>
+              <a:t>Подготовка</a:t>
             </a:r>
           </a:p>
         </p:txBody>
       </p:sp>
       <p:sp>
         <p:nvSpPr>
-          <p:cNvPr id="2439" name="Oval 2438"/>
+          <p:cNvPr id="2400" name="Oval 2399"/>
           <p:cNvSpPr/>
           <p:nvPr/>
         </p:nvSpPr>
         <p:spPr>
           <a:xfrm>
-            <a:off x="5952173" y="1895421"/>
-            <a:ext cx="289862" cy="289862"/>
+            <a:off x="6417319" y="2621002"/>
+            <a:ext cx="368382" cy="368382"/>
           </a:xfrm>
           <a:prstGeom prst="ellipse">
             <a:avLst/>
@@ -7548,14 +7936,14 @@
       </p:sp>
       <p:sp>
         <p:nvSpPr>
-          <p:cNvPr id="2440" name="TextBox 2439"/>
+          <p:cNvPr id="2401" name="TextBox 2400"/>
           <p:cNvSpPr txBox="1"/>
           <p:nvPr/>
         </p:nvSpPr>
         <p:spPr>
           <a:xfrm>
-            <a:off x="5592698" y="2310452"/>
-            <a:ext cx="1008811" cy="500672"/>
+            <a:off x="5592698" y="3148458"/>
+            <a:ext cx="2017623" cy="636297"/>
           </a:xfrm>
           <a:prstGeom prst="rect">
             <a:avLst/>
@@ -7563,13 +7951,13 @@
           <a:noFill/>
         </p:spPr>
         <p:txBody>
-          <a:bodyPr wrap="square">
+          <a:bodyPr wrap="square" lIns="12700" rIns="12700" tIns="12700" bIns="12700">
             <a:spAutoFit/>
           </a:bodyPr>
           <a:lstStyle/>
           <a:p>
             <a:pPr algn="ctr">
-              <a:defRPr sz="1200" b="0">
+              <a:defRPr sz="1400" b="0">
                 <a:solidFill>
                   <a:srgbClr val="000000"/>
                 </a:solidFill>
@@ -7579,7 +7967,7 @@
               </a:defRPr>
             </a:pPr>
             <a:r>
-              <a:rPr sz="1200" b="0">
+              <a:rPr sz="1400" b="0">
                 <a:solidFill>
                   <a:srgbClr val="000000"/>
                 </a:solidFill>
@@ -7587,21 +7975,21 @@
                 <a:ea typeface="Play"/>
                 <a:cs typeface="Play"/>
               </a:rPr>
-              <a:t>Домен и HTTPS</a:t>
+              <a:t>Запуск</a:t>
             </a:r>
           </a:p>
         </p:txBody>
       </p:sp>
       <p:sp>
         <p:nvSpPr>
-          <p:cNvPr id="2441" name="Oval 2440"/>
+          <p:cNvPr id="2402" name="Oval 2401"/>
           <p:cNvSpPr/>
           <p:nvPr/>
         </p:nvSpPr>
         <p:spPr>
           <a:xfrm>
-            <a:off x="6960984" y="1895421"/>
-            <a:ext cx="289862" cy="289862"/>
+            <a:off x="7762401" y="2621002"/>
+            <a:ext cx="368382" cy="368382"/>
           </a:xfrm>
           <a:prstGeom prst="ellipse">
             <a:avLst/>
@@ -7637,14 +8025,14 @@
       </p:sp>
       <p:sp>
         <p:nvSpPr>
-          <p:cNvPr id="2442" name="TextBox 2441"/>
+          <p:cNvPr id="2403" name="TextBox 2402"/>
           <p:cNvSpPr txBox="1"/>
           <p:nvPr/>
         </p:nvSpPr>
         <p:spPr>
           <a:xfrm>
-            <a:off x="6601510" y="1414513"/>
-            <a:ext cx="1008811" cy="500672"/>
+            <a:off x="6601510" y="2009822"/>
+            <a:ext cx="2017623" cy="636297"/>
           </a:xfrm>
           <a:prstGeom prst="rect">
             <a:avLst/>
@@ -7652,13 +8040,13 @@
           <a:noFill/>
         </p:spPr>
         <p:txBody>
-          <a:bodyPr wrap="square">
+          <a:bodyPr wrap="square" lIns="12700" rIns="12700" tIns="12700" bIns="12700">
             <a:spAutoFit/>
           </a:bodyPr>
           <a:lstStyle/>
           <a:p>
             <a:pPr algn="ctr">
-              <a:defRPr sz="1200" b="0">
+              <a:defRPr sz="1400" b="0">
                 <a:solidFill>
                   <a:srgbClr val="000000"/>
                 </a:solidFill>
@@ -7668,7 +8056,7 @@
               </a:defRPr>
             </a:pPr>
             <a:r>
-              <a:rPr sz="1200" b="0">
+              <a:rPr sz="1400" b="0">
                 <a:solidFill>
                   <a:srgbClr val="000000"/>
                 </a:solidFill>
@@ -7676,529 +8064,7 @@
                 <a:ea typeface="Play"/>
                 <a:cs typeface="Play"/>
               </a:rPr>
-              <a:t>Доступ всей компании</a:t>
-            </a:r>
-          </a:p>
-        </p:txBody>
-      </p:sp>
-      <p:sp>
-        <p:nvSpPr>
-          <p:cNvPr id="2443" name="Oval 2442"/>
-          <p:cNvSpPr/>
-          <p:nvPr/>
-        </p:nvSpPr>
-        <p:spPr>
-          <a:xfrm>
-            <a:off x="7969796" y="1895421"/>
-            <a:ext cx="289862" cy="289862"/>
-          </a:xfrm>
-          <a:prstGeom prst="ellipse">
-            <a:avLst/>
-          </a:prstGeom>
-          <a:solidFill>
-            <a:srgbClr val="0077FF"/>
-          </a:solidFill>
-          <a:ln>
-            <a:noFill/>
-          </a:ln>
-        </p:spPr>
-        <p:style>
-          <a:lnRef idx="1">
-            <a:schemeClr val="accent1"/>
-          </a:lnRef>
-          <a:fillRef idx="3">
-            <a:schemeClr val="accent1"/>
-          </a:fillRef>
-          <a:effectRef idx="2">
-            <a:schemeClr val="accent1"/>
-          </a:effectRef>
-          <a:fontRef idx="minor">
-            <a:schemeClr val="lt1"/>
-          </a:fontRef>
-        </p:style>
-        <p:txBody>
-          <a:bodyPr rtlCol="0" anchor="ctr"/>
-          <a:lstStyle/>
-          <a:p>
-            <a:pPr algn="ctr"/>
-          </a:p>
-        </p:txBody>
-      </p:sp>
-      <p:sp>
-        <p:nvSpPr>
-          <p:cNvPr id="2444" name="TextBox 2443"/>
-          <p:cNvSpPr txBox="1"/>
-          <p:nvPr/>
-        </p:nvSpPr>
-        <p:spPr>
-          <a:xfrm>
-            <a:off x="7610322" y="2310452"/>
-            <a:ext cx="1008811" cy="500672"/>
-          </a:xfrm>
-          <a:prstGeom prst="rect">
-            <a:avLst/>
-          </a:prstGeom>
-          <a:noFill/>
-        </p:spPr>
-        <p:txBody>
-          <a:bodyPr wrap="square">
-            <a:spAutoFit/>
-          </a:bodyPr>
-          <a:lstStyle/>
-          <a:p>
-            <a:pPr algn="ctr">
-              <a:defRPr sz="1200" b="0">
-                <a:solidFill>
-                  <a:srgbClr val="000000"/>
-                </a:solidFill>
-                <a:latin typeface="Play"/>
-                <a:ea typeface="Play"/>
-                <a:cs typeface="Play"/>
-              </a:defRPr>
-            </a:pPr>
-            <a:r>
-              <a:rPr sz="1200" b="0">
-                <a:solidFill>
-                  <a:srgbClr val="000000"/>
-                </a:solidFill>
-                <a:latin typeface="Play"/>
-                <a:ea typeface="Play"/>
-                <a:cs typeface="Play"/>
-              </a:rPr>
-              <a:t>Генерация иллюстраций</a:t>
-            </a:r>
-          </a:p>
-        </p:txBody>
-      </p:sp>
-    </p:spTree>
-  </p:cSld>
-  <p:clrMapOvr>
-    <a:masterClrMapping/>
-  </p:clrMapOvr>
-</p:sld>
-</file>
-
-<file path=ppt/slides/slide60.xml><?xml version="1.0" encoding="utf-8"?>
-<p:sld xmlns:a="http://schemas.openxmlformats.org/drawingml/2006/main" xmlns:p="http://schemas.openxmlformats.org/presentationml/2006/main" xmlns:r="http://schemas.openxmlformats.org/officeDocument/2006/relationships">
-  <p:cSld>
-    <p:spTree>
-      <p:nvGrpSpPr>
-        <p:cNvPr id="1" name=""/>
-        <p:cNvGrpSpPr/>
-        <p:nvPr/>
-      </p:nvGrpSpPr>
-      <p:grpSpPr/>
-      <p:sp>
-        <p:nvSpPr>
-          <p:cNvPr id="532" name="Google Shape;532;p53"/>
-          <p:cNvSpPr/>
-          <p:nvPr/>
-        </p:nvSpPr>
-        <p:spPr>
-          <a:xfrm>
-            <a:off x="303214" y="1022533"/>
-            <a:ext cx="8451939" cy="1433588"/>
-          </a:xfrm>
-          <a:prstGeom prst="rect">
-            <a:avLst/>
-          </a:prstGeom>
-          <a:noFill/>
-          <a:ln>
-            <a:noFill/>
-          </a:ln>
-        </p:spPr>
-        <p:txBody>
-          <a:bodyPr anchorCtr="0" anchor="ctr" bIns="91425" lIns="91425" spcFirstLastPara="1" rIns="91425" wrap="square" tIns="91425">
-            <a:noAutofit/>
-          </a:bodyPr>
-          <a:lstStyle/>
-          <a:p>
-            <a:pPr indent="0" lvl="0" marL="0" rtl="0" algn="l">
-              <a:spcBef>
-                <a:spcPts val="0"/>
-              </a:spcBef>
-              <a:spcAft>
-                <a:spcPts val="0"/>
-              </a:spcAft>
-              <a:buNone/>
-            </a:pPr>
-            <a:r>
-              <a:t/>
-            </a:r>
-            <a:endParaRPr/>
-          </a:p>
-        </p:txBody>
-      </p:sp>
-      <p:sp>
-        <p:nvSpPr>
-          <p:cNvPr id="541" name="Google Shape;541;p53"/>
-          <p:cNvSpPr/>
-          <p:nvPr/>
-        </p:nvSpPr>
-        <p:spPr>
-          <a:xfrm>
-            <a:off x="3831556" y="1022533"/>
-            <a:ext cx="1395256" cy="1433588"/>
-          </a:xfrm>
-          <a:prstGeom prst="rect">
-            <a:avLst/>
-          </a:prstGeom>
-          <a:noFill/>
-          <a:ln>
-            <a:noFill/>
-          </a:ln>
-        </p:spPr>
-        <p:txBody>
-          <a:bodyPr anchorCtr="0" anchor="ctr" bIns="91425" lIns="91425" spcFirstLastPara="1" rIns="91425" wrap="square" tIns="91425">
-            <a:noAutofit/>
-          </a:bodyPr>
-          <a:lstStyle/>
-          <a:p>
-            <a:pPr indent="0" lvl="0" marL="0" rtl="0" algn="l">
-              <a:spcBef>
-                <a:spcPts val="0"/>
-              </a:spcBef>
-              <a:spcAft>
-                <a:spcPts val="0"/>
-              </a:spcAft>
-              <a:buNone/>
-            </a:pPr>
-            <a:r>
-              <a:t/>
-            </a:r>
-            <a:endParaRPr/>
-          </a:p>
-        </p:txBody>
-      </p:sp>
-      <p:sp>
-        <p:nvSpPr>
-          <p:cNvPr id="553" name="Google Shape;553;p53"/>
-          <p:cNvSpPr/>
-          <p:nvPr/>
-        </p:nvSpPr>
-        <p:spPr>
-          <a:xfrm>
-            <a:off x="276488" y="2955549"/>
-            <a:ext cx="8451939" cy="1433588"/>
-          </a:xfrm>
-          <a:prstGeom prst="rect">
-            <a:avLst/>
-          </a:prstGeom>
-          <a:noFill/>
-          <a:ln>
-            <a:noFill/>
-          </a:ln>
-        </p:spPr>
-        <p:txBody>
-          <a:bodyPr anchorCtr="0" anchor="ctr" bIns="91425" lIns="91425" spcFirstLastPara="1" rIns="91425" wrap="square" tIns="91425">
-            <a:noAutofit/>
-          </a:bodyPr>
-          <a:lstStyle/>
-          <a:p>
-            <a:pPr indent="0" lvl="0" marL="0" rtl="0" algn="l">
-              <a:spcBef>
-                <a:spcPts val="0"/>
-              </a:spcBef>
-              <a:spcAft>
-                <a:spcPts val="0"/>
-              </a:spcAft>
-              <a:buNone/>
-            </a:pPr>
-            <a:r>
-              <a:t/>
-            </a:r>
-            <a:endParaRPr/>
-          </a:p>
-        </p:txBody>
-      </p:sp>
-      <p:sp>
-        <p:nvSpPr>
-          <p:cNvPr id="554" name="Google Shape;554;p53"/>
-          <p:cNvSpPr/>
-          <p:nvPr/>
-        </p:nvSpPr>
-        <p:spPr>
-          <a:xfrm>
-            <a:off x="303214" y="2797849"/>
-            <a:ext cx="8451939" cy="1433588"/>
-          </a:xfrm>
-          <a:prstGeom prst="rect">
-            <a:avLst/>
-          </a:prstGeom>
-          <a:noFill/>
-          <a:ln>
-            <a:noFill/>
-          </a:ln>
-        </p:spPr>
-        <p:txBody>
-          <a:bodyPr anchorCtr="0" anchor="ctr" bIns="91425" lIns="91425" spcFirstLastPara="1" rIns="91425" wrap="square" tIns="91425">
-            <a:noAutofit/>
-          </a:bodyPr>
-          <a:lstStyle/>
-          <a:p>
-            <a:pPr indent="0" lvl="0" marL="0" rtl="0" algn="l">
-              <a:spcBef>
-                <a:spcPts val="0"/>
-              </a:spcBef>
-              <a:spcAft>
-                <a:spcPts val="0"/>
-              </a:spcAft>
-              <a:buNone/>
-            </a:pPr>
-            <a:r>
-              <a:t/>
-            </a:r>
-            <a:endParaRPr/>
-          </a:p>
-        </p:txBody>
-      </p:sp>
-      <p:sp>
-        <p:nvSpPr>
-          <p:cNvPr id="555" name="title"/>
-          <p:cNvSpPr txBox="1"/>
-          <p:nvPr/>
-        </p:nvSpPr>
-        <p:spPr>
-          <a:xfrm>
-            <a:off x="274320" y="282943"/>
-            <a:ext cx="6792986" cy="617220"/>
-          </a:xfrm>
-          <a:prstGeom prst="rect">
-            <a:avLst/>
-          </a:prstGeom>
-          <a:noFill/>
-        </p:spPr>
-        <p:txBody>
-          <a:bodyPr wrap="square" lIns="76200" rIns="76200" tIns="50800" bIns="50800">
-            <a:spAutoFit/>
-          </a:bodyPr>
-          <a:lstStyle/>
-          <a:p>
-            <a:pPr algn="l">
-              <a:spcAft>
-                <a:spcPts val="300"/>
-              </a:spcAft>
-              <a:defRPr sz="2400">
-                <a:solidFill>
-                  <a:srgbClr val="000000"/>
-                </a:solidFill>
-                <a:latin typeface="Play"/>
-                <a:ea typeface="Play"/>
-                <a:cs typeface="Play"/>
-              </a:defRPr>
-            </a:pPr>
-            <a:r>
-              <a:rPr sz="2400">
-                <a:solidFill>
-                  <a:srgbClr val="000000"/>
-                </a:solidFill>
-                <a:latin typeface="Play"/>
-                <a:ea typeface="Play"/>
-                <a:cs typeface="Play"/>
-              </a:rPr>
-              <a:t>План пилота</a:t>
-            </a:r>
-          </a:p>
-        </p:txBody>
-      </p:sp>
-      <p:sp>
-        <p:nvSpPr>
-          <p:cNvPr id="556" name="body_left"/>
-          <p:cNvSpPr txBox="1"/>
-          <p:nvPr/>
-        </p:nvSpPr>
-        <p:spPr>
-          <a:xfrm>
-            <a:off x="274320" y="1414513"/>
-            <a:ext cx="4035247" cy="2851865"/>
-          </a:xfrm>
-          <a:prstGeom prst="rect">
-            <a:avLst/>
-          </a:prstGeom>
-          <a:noFill/>
-        </p:spPr>
-        <p:txBody>
-          <a:bodyPr wrap="square" lIns="76200" rIns="76200" tIns="50800" bIns="50800">
-            <a:spAutoFit/>
-          </a:bodyPr>
-          <a:lstStyle/>
-          <a:p>
-            <a:pPr algn="l">
-              <a:spcAft>
-                <a:spcPts val="300"/>
-              </a:spcAft>
-              <a:defRPr sz="1800">
-                <a:solidFill>
-                  <a:srgbClr val="000000"/>
-                </a:solidFill>
-                <a:latin typeface="Play"/>
-                <a:ea typeface="Play"/>
-                <a:cs typeface="Play"/>
-              </a:defRPr>
-            </a:pPr>
-            <a:r>
-              <a:rPr sz="1800">
-                <a:solidFill>
-                  <a:srgbClr val="000000"/>
-                </a:solidFill>
-                <a:latin typeface="Play"/>
-                <a:ea typeface="Play"/>
-                <a:cs typeface="Play"/>
-              </a:rPr>
-              <a:t>• 6 недель</a:t>
-            </a:r>
-          </a:p>
-          <a:p>
-            <a:pPr algn="l">
-              <a:spcAft>
-                <a:spcPts val="300"/>
-              </a:spcAft>
-              <a:defRPr sz="1800">
-                <a:solidFill>
-                  <a:srgbClr val="000000"/>
-                </a:solidFill>
-                <a:latin typeface="Play"/>
-                <a:ea typeface="Play"/>
-                <a:cs typeface="Play"/>
-              </a:defRPr>
-            </a:pPr>
-            <a:r>
-              <a:rPr sz="1800">
-                <a:solidFill>
-                  <a:srgbClr val="000000"/>
-                </a:solidFill>
-                <a:latin typeface="Play"/>
-                <a:ea typeface="Play"/>
-                <a:cs typeface="Play"/>
-              </a:rPr>
-              <a:t>• 2 команды</a:t>
-            </a:r>
-          </a:p>
-          <a:p>
-            <a:pPr algn="l">
-              <a:spcAft>
-                <a:spcPts val="300"/>
-              </a:spcAft>
-              <a:defRPr sz="1800">
-                <a:solidFill>
-                  <a:srgbClr val="000000"/>
-                </a:solidFill>
-                <a:latin typeface="Play"/>
-                <a:ea typeface="Play"/>
-                <a:cs typeface="Play"/>
-              </a:defRPr>
-            </a:pPr>
-            <a:r>
-              <a:rPr sz="1800">
-                <a:solidFill>
-                  <a:srgbClr val="000000"/>
-                </a:solidFill>
-                <a:latin typeface="Play"/>
-                <a:ea typeface="Play"/>
-                <a:cs typeface="Play"/>
-              </a:rPr>
-              <a:t>• 68 презентаций</a:t>
-            </a:r>
-          </a:p>
-        </p:txBody>
-      </p:sp>
-      <p:sp>
-        <p:nvSpPr>
-          <p:cNvPr id="557" name="body_right"/>
-          <p:cNvSpPr txBox="1"/>
-          <p:nvPr/>
-        </p:nvSpPr>
-        <p:spPr>
-          <a:xfrm>
-            <a:off x="4583887" y="1414513"/>
-            <a:ext cx="4035247" cy="2851865"/>
-          </a:xfrm>
-          <a:prstGeom prst="rect">
-            <a:avLst/>
-          </a:prstGeom>
-          <a:noFill/>
-        </p:spPr>
-        <p:txBody>
-          <a:bodyPr wrap="square" lIns="76200" rIns="76200" tIns="50800" bIns="50800">
-            <a:spAutoFit/>
-          </a:bodyPr>
-          <a:lstStyle/>
-          <a:p>
-            <a:pPr algn="l">
-              <a:spcAft>
-                <a:spcPts val="300"/>
-              </a:spcAft>
-              <a:defRPr sz="1800">
-                <a:solidFill>
-                  <a:srgbClr val="000000"/>
-                </a:solidFill>
-                <a:latin typeface="Play"/>
-                <a:ea typeface="Play"/>
-                <a:cs typeface="Play"/>
-              </a:defRPr>
-            </a:pPr>
-            <a:r>
-              <a:rPr sz="1800">
-                <a:solidFill>
-                  <a:srgbClr val="000000"/>
-                </a:solidFill>
-                <a:latin typeface="Play"/>
-                <a:ea typeface="Play"/>
-                <a:cs typeface="Play"/>
-              </a:rPr>
-              <a:t>• Сборка 4 мин вместо 186</a:t>
-            </a:r>
-          </a:p>
-          <a:p>
-            <a:pPr algn="l">
-              <a:spcAft>
-                <a:spcPts val="300"/>
-              </a:spcAft>
-              <a:defRPr sz="1800">
-                <a:solidFill>
-                  <a:srgbClr val="000000"/>
-                </a:solidFill>
-                <a:latin typeface="Play"/>
-                <a:ea typeface="Play"/>
-                <a:cs typeface="Play"/>
-              </a:defRPr>
-            </a:pPr>
-            <a:r>
-              <a:rPr sz="1800">
-                <a:solidFill>
-                  <a:srgbClr val="000000"/>
-                </a:solidFill>
-                <a:latin typeface="Play"/>
-                <a:ea typeface="Play"/>
-                <a:cs typeface="Play"/>
-              </a:rPr>
-              <a:t>• Время до первой версии 1 день вместо 6</a:t>
-            </a:r>
-          </a:p>
-          <a:p>
-            <a:pPr algn="l">
-              <a:spcAft>
-                <a:spcPts val="300"/>
-              </a:spcAft>
-              <a:defRPr sz="1800">
-                <a:solidFill>
-                  <a:srgbClr val="000000"/>
-                </a:solidFill>
-                <a:latin typeface="Play"/>
-                <a:ea typeface="Play"/>
-                <a:cs typeface="Play"/>
-              </a:defRPr>
-            </a:pPr>
-            <a:r>
-              <a:rPr sz="1800">
-                <a:solidFill>
-                  <a:srgbClr val="000000"/>
-                </a:solidFill>
-                <a:latin typeface="Play"/>
-                <a:ea typeface="Play"/>
-                <a:cs typeface="Play"/>
-              </a:rPr>
-              <a:t>• Нарушения 2 из 68, запросы 38 вместо 11</a:t>
+              <a:t>Оценка</a:t>
             </a:r>
           </a:p>
         </p:txBody>
@@ -8223,482 +8089,7 @@
       <p:grpSpPr/>
       <p:sp>
         <p:nvSpPr>
-          <p:cNvPr id="1027" name="Google Shape;1027;p65"/>
-          <p:cNvSpPr/>
-          <p:nvPr/>
-        </p:nvSpPr>
-        <p:spPr>
-          <a:xfrm>
-            <a:off x="6064222" y="1209852"/>
-            <a:ext cx="2793985" cy="3014270"/>
-          </a:xfrm>
-          <a:prstGeom prst="roundRect">
-            <a:avLst>
-              <a:gd fmla="val 3436" name="adj"/>
-            </a:avLst>
-          </a:prstGeom>
-          <a:solidFill>
-            <a:schemeClr val="lt2"/>
-          </a:solidFill>
-          <a:ln>
-            <a:noFill/>
-          </a:ln>
-        </p:spPr>
-        <p:txBody>
-          <a:bodyPr anchorCtr="0" anchor="ctr" bIns="91425" lIns="91425" spcFirstLastPara="1" rIns="91425" wrap="square" tIns="91425">
-            <a:noAutofit/>
-          </a:bodyPr>
-          <a:lstStyle/>
-          <a:p>
-            <a:pPr indent="0" lvl="0" marL="0" rtl="0" algn="l">
-              <a:spcBef>
-                <a:spcPts val="0"/>
-              </a:spcBef>
-              <a:spcAft>
-                <a:spcPts val="0"/>
-              </a:spcAft>
-              <a:buNone/>
-            </a:pPr>
-            <a:r>
-              <a:t/>
-            </a:r>
-            <a:endParaRPr/>
-          </a:p>
-        </p:txBody>
-      </p:sp>
-      <p:sp>
-        <p:nvSpPr>
-          <p:cNvPr id="1029" name="Google Shape;1029;p65"/>
-          <p:cNvSpPr/>
-          <p:nvPr/>
-        </p:nvSpPr>
-        <p:spPr>
-          <a:xfrm>
-            <a:off x="3174981" y="1209852"/>
-            <a:ext cx="2793985" cy="3014270"/>
-          </a:xfrm>
-          <a:prstGeom prst="roundRect">
-            <a:avLst>
-              <a:gd fmla="val 3436" name="adj"/>
-            </a:avLst>
-          </a:prstGeom>
-          <a:solidFill>
-            <a:schemeClr val="lt2"/>
-          </a:solidFill>
-          <a:ln>
-            <a:noFill/>
-          </a:ln>
-        </p:spPr>
-        <p:txBody>
-          <a:bodyPr anchorCtr="0" anchor="ctr" bIns="91425" lIns="91425" spcFirstLastPara="1" rIns="91425" wrap="square" tIns="91425">
-            <a:noAutofit/>
-          </a:bodyPr>
-          <a:lstStyle/>
-          <a:p>
-            <a:pPr indent="0" lvl="0" marL="0" rtl="0" algn="l">
-              <a:spcBef>
-                <a:spcPts val="0"/>
-              </a:spcBef>
-              <a:spcAft>
-                <a:spcPts val="0"/>
-              </a:spcAft>
-              <a:buNone/>
-            </a:pPr>
-            <a:r>
-              <a:t/>
-            </a:r>
-            <a:endParaRPr/>
-          </a:p>
-        </p:txBody>
-      </p:sp>
-      <p:sp>
-        <p:nvSpPr>
-          <p:cNvPr id="1031" name="Google Shape;1031;p65"/>
-          <p:cNvSpPr/>
-          <p:nvPr/>
-        </p:nvSpPr>
-        <p:spPr>
-          <a:xfrm>
-            <a:off x="285749" y="1209852"/>
-            <a:ext cx="2793985" cy="3014270"/>
-          </a:xfrm>
-          <a:prstGeom prst="roundRect">
-            <a:avLst>
-              <a:gd fmla="val 3436" name="adj"/>
-            </a:avLst>
-          </a:prstGeom>
-          <a:solidFill>
-            <a:schemeClr val="lt2"/>
-          </a:solidFill>
-          <a:ln>
-            <a:noFill/>
-          </a:ln>
-        </p:spPr>
-        <p:txBody>
-          <a:bodyPr anchorCtr="0" anchor="ctr" bIns="91425" lIns="91425" spcFirstLastPara="1" rIns="91425" wrap="square" tIns="91425">
-            <a:noAutofit/>
-          </a:bodyPr>
-          <a:lstStyle/>
-          <a:p>
-            <a:pPr indent="0" lvl="0" marL="0" rtl="0" algn="l">
-              <a:spcBef>
-                <a:spcPts val="0"/>
-              </a:spcBef>
-              <a:spcAft>
-                <a:spcPts val="0"/>
-              </a:spcAft>
-              <a:buNone/>
-            </a:pPr>
-            <a:r>
-              <a:t/>
-            </a:r>
-            <a:endParaRPr/>
-          </a:p>
-        </p:txBody>
-      </p:sp>
-      <p:sp>
-        <p:nvSpPr>
-          <p:cNvPr id="1032" name="Google Shape;1032;p65"/>
-          <p:cNvSpPr/>
-          <p:nvPr/>
-        </p:nvSpPr>
-        <p:spPr>
-          <a:xfrm>
-            <a:off x="285748" y="286047"/>
-            <a:ext cx="8572456" cy="3938075"/>
-          </a:xfrm>
-          <a:prstGeom prst="rect">
-            <a:avLst/>
-          </a:prstGeom>
-          <a:noFill/>
-          <a:ln>
-            <a:noFill/>
-          </a:ln>
-        </p:spPr>
-        <p:txBody>
-          <a:bodyPr anchorCtr="0" anchor="ctr" bIns="91425" lIns="91425" spcFirstLastPara="1" rIns="91425" wrap="square" tIns="91425">
-            <a:noAutofit/>
-          </a:bodyPr>
-          <a:lstStyle/>
-          <a:p>
-            <a:pPr indent="0" lvl="0" marL="0" rtl="0" algn="l">
-              <a:spcBef>
-                <a:spcPts val="0"/>
-              </a:spcBef>
-              <a:spcAft>
-                <a:spcPts val="0"/>
-              </a:spcAft>
-              <a:buNone/>
-            </a:pPr>
-            <a:r>
-              <a:t/>
-            </a:r>
-            <a:endParaRPr/>
-          </a:p>
-        </p:txBody>
-      </p:sp>
-      <p:sp>
-        <p:nvSpPr>
-          <p:cNvPr id="1033" name="Google Shape;1033;p65"/>
-          <p:cNvSpPr/>
-          <p:nvPr/>
-        </p:nvSpPr>
-        <p:spPr>
-          <a:xfrm>
-            <a:off x="285748" y="1209852"/>
-            <a:ext cx="8572456" cy="3014270"/>
-          </a:xfrm>
-          <a:prstGeom prst="rect">
-            <a:avLst/>
-          </a:prstGeom>
-          <a:noFill/>
-          <a:ln>
-            <a:noFill/>
-          </a:ln>
-        </p:spPr>
-        <p:txBody>
-          <a:bodyPr anchorCtr="0" anchor="ctr" bIns="91425" lIns="91425" spcFirstLastPara="1" rIns="91425" wrap="square" tIns="91425">
-            <a:noAutofit/>
-          </a:bodyPr>
-          <a:lstStyle/>
-          <a:p>
-            <a:pPr indent="0" lvl="0" marL="0" rtl="0" algn="l">
-              <a:spcBef>
-                <a:spcPts val="0"/>
-              </a:spcBef>
-              <a:spcAft>
-                <a:spcPts val="0"/>
-              </a:spcAft>
-              <a:buNone/>
-            </a:pPr>
-            <a:r>
-              <a:t/>
-            </a:r>
-            <a:endParaRPr/>
-          </a:p>
-        </p:txBody>
-      </p:sp>
-      <p:sp>
-        <p:nvSpPr>
-          <p:cNvPr id="1034" name="Google Shape;1034;p65"/>
-          <p:cNvSpPr/>
-          <p:nvPr/>
-        </p:nvSpPr>
-        <p:spPr>
-          <a:xfrm>
-            <a:off x="476248" y="1400327"/>
-            <a:ext cx="2412987" cy="1009519"/>
-          </a:xfrm>
-          <a:prstGeom prst="rect">
-            <a:avLst/>
-          </a:prstGeom>
-          <a:noFill/>
-          <a:ln>
-            <a:noFill/>
-          </a:ln>
-        </p:spPr>
-        <p:txBody>
-          <a:bodyPr anchorCtr="0" anchor="ctr" bIns="91425" lIns="91425" spcFirstLastPara="1" rIns="91425" wrap="square" tIns="91425">
-            <a:noAutofit/>
-          </a:bodyPr>
-          <a:lstStyle/>
-          <a:p>
-            <a:pPr indent="0" lvl="0" marL="0" rtl="0" algn="l">
-              <a:spcBef>
-                <a:spcPts val="0"/>
-              </a:spcBef>
-              <a:spcAft>
-                <a:spcPts val="0"/>
-              </a:spcAft>
-              <a:buNone/>
-            </a:pPr>
-            <a:r>
-              <a:t/>
-            </a:r>
-            <a:endParaRPr/>
-          </a:p>
-        </p:txBody>
-      </p:sp>
-      <p:sp>
-        <p:nvSpPr>
-          <p:cNvPr id="1035" name="Google Shape;1035;p65"/>
-          <p:cNvSpPr/>
-          <p:nvPr/>
-        </p:nvSpPr>
-        <p:spPr>
-          <a:xfrm>
-            <a:off x="476248" y="1400328"/>
-            <a:ext cx="76199" cy="76190"/>
-          </a:xfrm>
-          <a:prstGeom prst="roundRect">
-            <a:avLst>
-              <a:gd fmla="val 31500" name="adj"/>
-            </a:avLst>
-          </a:prstGeom>
-          <a:solidFill>
-            <a:srgbClr val="0077FF"/>
-          </a:solidFill>
-          <a:ln>
-            <a:noFill/>
-          </a:ln>
-        </p:spPr>
-        <p:txBody>
-          <a:bodyPr anchorCtr="0" anchor="ctr" bIns="91425" lIns="91425" spcFirstLastPara="1" rIns="91425" wrap="square" tIns="91425">
-            <a:noAutofit/>
-          </a:bodyPr>
-          <a:lstStyle/>
-          <a:p>
-            <a:pPr indent="0" lvl="0" marL="0" rtl="0" algn="l">
-              <a:spcBef>
-                <a:spcPts val="0"/>
-              </a:spcBef>
-              <a:spcAft>
-                <a:spcPts val="0"/>
-              </a:spcAft>
-              <a:buNone/>
-            </a:pPr>
-            <a:r>
-              <a:t/>
-            </a:r>
-            <a:endParaRPr/>
-          </a:p>
-        </p:txBody>
-      </p:sp>
-      <p:sp>
-        <p:nvSpPr>
-          <p:cNvPr id="1040" name="Google Shape;1040;p65"/>
-          <p:cNvSpPr/>
-          <p:nvPr/>
-        </p:nvSpPr>
-        <p:spPr>
-          <a:xfrm>
-            <a:off x="3365480" y="1400327"/>
-            <a:ext cx="2412987" cy="1009519"/>
-          </a:xfrm>
-          <a:prstGeom prst="rect">
-            <a:avLst/>
-          </a:prstGeom>
-          <a:noFill/>
-          <a:ln>
-            <a:noFill/>
-          </a:ln>
-        </p:spPr>
-        <p:txBody>
-          <a:bodyPr anchorCtr="0" anchor="ctr" bIns="91425" lIns="91425" spcFirstLastPara="1" rIns="91425" wrap="square" tIns="91425">
-            <a:noAutofit/>
-          </a:bodyPr>
-          <a:lstStyle/>
-          <a:p>
-            <a:pPr indent="0" lvl="0" marL="0" rtl="0" algn="l">
-              <a:spcBef>
-                <a:spcPts val="0"/>
-              </a:spcBef>
-              <a:spcAft>
-                <a:spcPts val="0"/>
-              </a:spcAft>
-              <a:buNone/>
-            </a:pPr>
-            <a:r>
-              <a:t/>
-            </a:r>
-            <a:endParaRPr/>
-          </a:p>
-        </p:txBody>
-      </p:sp>
-      <p:sp>
-        <p:nvSpPr>
-          <p:cNvPr id="1041" name="Google Shape;1041;p65"/>
-          <p:cNvSpPr/>
-          <p:nvPr/>
-        </p:nvSpPr>
-        <p:spPr>
-          <a:xfrm>
-            <a:off x="3365480" y="1400328"/>
-            <a:ext cx="76199" cy="76190"/>
-          </a:xfrm>
-          <a:prstGeom prst="roundRect">
-            <a:avLst>
-              <a:gd fmla="val 31500" name="adj"/>
-            </a:avLst>
-          </a:prstGeom>
-          <a:solidFill>
-            <a:srgbClr val="0077FF"/>
-          </a:solidFill>
-          <a:ln>
-            <a:noFill/>
-          </a:ln>
-        </p:spPr>
-        <p:txBody>
-          <a:bodyPr anchorCtr="0" anchor="ctr" bIns="91425" lIns="91425" spcFirstLastPara="1" rIns="91425" wrap="square" tIns="91425">
-            <a:noAutofit/>
-          </a:bodyPr>
-          <a:lstStyle/>
-          <a:p>
-            <a:pPr indent="0" lvl="0" marL="0" rtl="0" algn="l">
-              <a:spcBef>
-                <a:spcPts val="0"/>
-              </a:spcBef>
-              <a:spcAft>
-                <a:spcPts val="0"/>
-              </a:spcAft>
-              <a:buNone/>
-            </a:pPr>
-            <a:r>
-              <a:t/>
-            </a:r>
-            <a:endParaRPr/>
-          </a:p>
-        </p:txBody>
-      </p:sp>
-      <p:sp>
-        <p:nvSpPr>
-          <p:cNvPr id="1045" name="Google Shape;1045;p65"/>
-          <p:cNvSpPr/>
-          <p:nvPr/>
-        </p:nvSpPr>
-        <p:spPr>
-          <a:xfrm>
-            <a:off x="6254721" y="1400327"/>
-            <a:ext cx="2412987" cy="1009519"/>
-          </a:xfrm>
-          <a:prstGeom prst="rect">
-            <a:avLst/>
-          </a:prstGeom>
-          <a:noFill/>
-          <a:ln>
-            <a:noFill/>
-          </a:ln>
-        </p:spPr>
-        <p:txBody>
-          <a:bodyPr anchorCtr="0" anchor="ctr" bIns="91425" lIns="91425" spcFirstLastPara="1" rIns="91425" wrap="square" tIns="91425">
-            <a:noAutofit/>
-          </a:bodyPr>
-          <a:lstStyle/>
-          <a:p>
-            <a:pPr indent="0" lvl="0" marL="0" rtl="0" algn="l">
-              <a:spcBef>
-                <a:spcPts val="0"/>
-              </a:spcBef>
-              <a:spcAft>
-                <a:spcPts val="0"/>
-              </a:spcAft>
-              <a:buNone/>
-            </a:pPr>
-            <a:r>
-              <a:t/>
-            </a:r>
-            <a:endParaRPr/>
-          </a:p>
-        </p:txBody>
-      </p:sp>
-      <p:sp>
-        <p:nvSpPr>
-          <p:cNvPr id="1046" name="Google Shape;1046;p65"/>
-          <p:cNvSpPr/>
-          <p:nvPr/>
-        </p:nvSpPr>
-        <p:spPr>
-          <a:xfrm>
-            <a:off x="6254721" y="1400328"/>
-            <a:ext cx="76199" cy="76190"/>
-          </a:xfrm>
-          <a:prstGeom prst="roundRect">
-            <a:avLst>
-              <a:gd fmla="val 31500" name="adj"/>
-            </a:avLst>
-          </a:prstGeom>
-          <a:solidFill>
-            <a:srgbClr val="0077FF"/>
-          </a:solidFill>
-          <a:ln>
-            <a:noFill/>
-          </a:ln>
-        </p:spPr>
-        <p:txBody>
-          <a:bodyPr anchorCtr="0" anchor="ctr" bIns="91425" lIns="91425" spcFirstLastPara="1" rIns="91425" wrap="square" tIns="91425">
-            <a:noAutofit/>
-          </a:bodyPr>
-          <a:lstStyle/>
-          <a:p>
-            <a:pPr indent="0" lvl="0" marL="0" rtl="0" algn="l">
-              <a:spcBef>
-                <a:spcPts val="0"/>
-              </a:spcBef>
-              <a:spcAft>
-                <a:spcPts val="0"/>
-              </a:spcAft>
-              <a:buNone/>
-            </a:pPr>
-            <a:r>
-              <a:t/>
-            </a:r>
-            <a:endParaRPr/>
-          </a:p>
-        </p:txBody>
-      </p:sp>
-      <p:sp>
-        <p:nvSpPr>
-          <p:cNvPr id="1047" name="title"/>
+          <p:cNvPr id="2" name="title"/>
           <p:cNvSpPr txBox="1"/>
           <p:nvPr/>
         </p:nvSpPr>
@@ -8722,7 +8113,7 @@
               <a:spcAft>
                 <a:spcPts val="300"/>
               </a:spcAft>
-              <a:defRPr sz="2400">
+              <a:defRPr sz="2438">
                 <a:solidFill>
                   <a:srgbClr val="000000"/>
                 </a:solidFill>
@@ -8732,7 +8123,7 @@
               </a:defRPr>
             </a:pPr>
             <a:r>
-              <a:rPr sz="2400">
+              <a:rPr sz="2438">
                 <a:solidFill>
                   <a:srgbClr val="000000"/>
                 </a:solidFill>
@@ -8740,64 +8131,21 @@
                 <a:ea typeface="Play"/>
                 <a:cs typeface="Play"/>
               </a:rPr>
-              <a:t>Риски</a:t>
+              <a:t>Что мы просим решить</a:t>
             </a:r>
           </a:p>
         </p:txBody>
       </p:sp>
       <p:sp>
         <p:nvSpPr>
-          <p:cNvPr id="1048" name="Oval 1047"/>
-          <p:cNvSpPr/>
-          <p:nvPr/>
-        </p:nvSpPr>
-        <p:spPr>
-          <a:xfrm>
-            <a:off x="5021979" y="1530621"/>
-            <a:ext cx="433029" cy="433029"/>
-          </a:xfrm>
-          <a:prstGeom prst="ellipse">
-            <a:avLst/>
-          </a:prstGeom>
-          <a:solidFill>
-            <a:srgbClr val="0077FF"/>
-          </a:solidFill>
-          <a:ln>
-            <a:noFill/>
-          </a:ln>
-        </p:spPr>
-        <p:style>
-          <a:lnRef idx="1">
-            <a:schemeClr val="accent1"/>
-          </a:lnRef>
-          <a:fillRef idx="3">
-            <a:schemeClr val="accent1"/>
-          </a:fillRef>
-          <a:effectRef idx="2">
-            <a:schemeClr val="accent1"/>
-          </a:effectRef>
-          <a:fontRef idx="minor">
-            <a:schemeClr val="lt1"/>
-          </a:fontRef>
-        </p:style>
-        <p:txBody>
-          <a:bodyPr rtlCol="0" anchor="ctr"/>
-          <a:lstStyle/>
-          <a:p>
-            <a:pPr algn="ctr"/>
-          </a:p>
-        </p:txBody>
-      </p:sp>
-      <p:sp>
-        <p:nvSpPr>
-          <p:cNvPr id="1049" name="TextBox 1048"/>
+          <p:cNvPr id="3" name="body_left"/>
           <p:cNvSpPr txBox="1"/>
           <p:nvPr/>
         </p:nvSpPr>
         <p:spPr>
           <a:xfrm>
-            <a:off x="4583887" y="2076828"/>
-            <a:ext cx="1309213" cy="383821"/>
+            <a:off x="274320" y="1414513"/>
+            <a:ext cx="4035247" cy="1790812"/>
           </a:xfrm>
           <a:prstGeom prst="rect">
             <a:avLst/>
@@ -8805,13 +8153,16 @@
           <a:noFill/>
         </p:spPr>
         <p:txBody>
-          <a:bodyPr wrap="square">
+          <a:bodyPr wrap="square" lIns="76200" rIns="76200" tIns="50800" bIns="50800">
             <a:spAutoFit/>
           </a:bodyPr>
           <a:lstStyle/>
           <a:p>
-            <a:pPr algn="ctr">
-              <a:defRPr sz="1200" b="0">
+            <a:pPr algn="l">
+              <a:spcAft>
+                <a:spcPts val="300"/>
+              </a:spcAft>
+              <a:defRPr sz="1800">
                 <a:solidFill>
                   <a:srgbClr val="000000"/>
                 </a:solidFill>
@@ -8821,7 +8172,7 @@
               </a:defRPr>
             </a:pPr>
             <a:r>
-              <a:rPr sz="1200" b="0">
+              <a:rPr sz="1800">
                 <a:solidFill>
                   <a:srgbClr val="000000"/>
                 </a:solidFill>
@@ -8829,78 +8180,15 @@
                 <a:ea typeface="Play"/>
                 <a:cs typeface="Play"/>
               </a:rPr>
-              <a:t>Слабая модель может выдумать цифры</a:t>
+              <a:t>• Решить о запуске сервиса на всю компанию</a:t>
             </a:r>
           </a:p>
-        </p:txBody>
-      </p:sp>
-      <p:sp>
-        <p:nvSpPr>
-          <p:cNvPr id="1050" name="Document 1049"/>
-          <p:cNvSpPr/>
-          <p:nvPr/>
-        </p:nvSpPr>
-        <p:spPr>
-          <a:xfrm>
-            <a:off x="6395821" y="1519795"/>
-            <a:ext cx="411377" cy="454680"/>
-          </a:xfrm>
-          <a:prstGeom prst="flowChartDocument">
-            <a:avLst/>
-          </a:prstGeom>
-          <a:solidFill>
-            <a:srgbClr val="0077FF"/>
-          </a:solidFill>
-          <a:ln>
-            <a:noFill/>
-          </a:ln>
-        </p:spPr>
-        <p:style>
-          <a:lnRef idx="1">
-            <a:schemeClr val="accent1"/>
-          </a:lnRef>
-          <a:fillRef idx="3">
-            <a:schemeClr val="accent1"/>
-          </a:fillRef>
-          <a:effectRef idx="2">
-            <a:schemeClr val="accent1"/>
-          </a:effectRef>
-          <a:fontRef idx="minor">
-            <a:schemeClr val="lt1"/>
-          </a:fontRef>
-        </p:style>
-        <p:txBody>
-          <a:bodyPr rtlCol="0" anchor="ctr"/>
-          <a:lstStyle/>
-          <a:p>
-            <a:pPr algn="ctr"/>
-          </a:p>
-        </p:txBody>
-      </p:sp>
-      <p:sp>
-        <p:nvSpPr>
-          <p:cNvPr id="1051" name="TextBox 1050"/>
-          <p:cNvSpPr txBox="1"/>
-          <p:nvPr/>
-        </p:nvSpPr>
-        <p:spPr>
-          <a:xfrm>
-            <a:off x="5946903" y="2076828"/>
-            <a:ext cx="1309213" cy="383821"/>
-          </a:xfrm>
-          <a:prstGeom prst="rect">
-            <a:avLst/>
-          </a:prstGeom>
-          <a:noFill/>
-        </p:spPr>
-        <p:txBody>
-          <a:bodyPr wrap="square">
-            <a:spAutoFit/>
-          </a:bodyPr>
-          <a:lstStyle/>
-          <a:p>
-            <a:pPr algn="ctr">
-              <a:defRPr sz="1200" b="0">
+          <a:p>
+            <a:pPr algn="l">
+              <a:spcAft>
+                <a:spcPts val="300"/>
+              </a:spcAft>
+              <a:defRPr sz="1800">
                 <a:solidFill>
                   <a:srgbClr val="000000"/>
                 </a:solidFill>
@@ -8910,7 +8198,7 @@
               </a:defRPr>
             </a:pPr>
             <a:r>
-              <a:rPr sz="1200" b="0">
+              <a:rPr sz="1800">
                 <a:solidFill>
                   <a:srgbClr val="000000"/>
                 </a:solidFill>
@@ -8918,193 +8206,21 @@
                 <a:ea typeface="Play"/>
                 <a:cs typeface="Play"/>
               </a:rPr>
-              <a:t>Незнакомый шаблон может быть плохо сделан</a:t>
+              <a:t>• Подтвердить бюджет и ресурсы для масштабирования</a:t>
             </a:r>
           </a:p>
         </p:txBody>
       </p:sp>
       <p:sp>
         <p:nvSpPr>
-          <p:cNvPr id="1052" name="Oval 1051"/>
-          <p:cNvSpPr/>
-          <p:nvPr/>
-        </p:nvSpPr>
-        <p:spPr>
-          <a:xfrm>
-            <a:off x="7715535" y="1498144"/>
-            <a:ext cx="497983" cy="497983"/>
-          </a:xfrm>
-          <a:prstGeom prst="ellipse">
-            <a:avLst/>
-          </a:prstGeom>
-          <a:solidFill>
-            <a:srgbClr val="0077FF"/>
-          </a:solidFill>
-          <a:ln>
-            <a:noFill/>
-          </a:ln>
-        </p:spPr>
-        <p:style>
-          <a:lnRef idx="1">
-            <a:schemeClr val="accent1"/>
-          </a:lnRef>
-          <a:fillRef idx="3">
-            <a:schemeClr val="accent1"/>
-          </a:fillRef>
-          <a:effectRef idx="2">
-            <a:schemeClr val="accent1"/>
-          </a:effectRef>
-          <a:fontRef idx="minor">
-            <a:schemeClr val="lt1"/>
-          </a:fontRef>
-        </p:style>
-        <p:txBody>
-          <a:bodyPr rtlCol="0" anchor="ctr"/>
-          <a:lstStyle/>
-          <a:p>
-            <a:pPr algn="ctr"/>
-          </a:p>
-        </p:txBody>
-      </p:sp>
-      <p:sp>
-        <p:nvSpPr>
-          <p:cNvPr id="1053" name="Oval 1052"/>
-          <p:cNvSpPr/>
-          <p:nvPr/>
-        </p:nvSpPr>
-        <p:spPr>
-          <a:xfrm>
-            <a:off x="7802141" y="1584750"/>
-            <a:ext cx="324771" cy="324771"/>
-          </a:xfrm>
-          <a:prstGeom prst="ellipse">
-            <a:avLst/>
-          </a:prstGeom>
-          <a:solidFill>
-            <a:srgbClr val="FFFFFF"/>
-          </a:solidFill>
-          <a:ln>
-            <a:noFill/>
-          </a:ln>
-        </p:spPr>
-        <p:style>
-          <a:lnRef idx="1">
-            <a:schemeClr val="accent1"/>
-          </a:lnRef>
-          <a:fillRef idx="3">
-            <a:schemeClr val="accent1"/>
-          </a:fillRef>
-          <a:effectRef idx="2">
-            <a:schemeClr val="accent1"/>
-          </a:effectRef>
-          <a:fontRef idx="minor">
-            <a:schemeClr val="lt1"/>
-          </a:fontRef>
-        </p:style>
-        <p:txBody>
-          <a:bodyPr rtlCol="0" anchor="ctr"/>
-          <a:lstStyle/>
-          <a:p>
-            <a:pPr algn="ctr"/>
-          </a:p>
-        </p:txBody>
-      </p:sp>
-      <p:sp>
-        <p:nvSpPr>
-          <p:cNvPr id="1054" name="Oval 1053"/>
-          <p:cNvSpPr/>
-          <p:nvPr/>
-        </p:nvSpPr>
-        <p:spPr>
-          <a:xfrm>
-            <a:off x="7877921" y="1660530"/>
-            <a:ext cx="173211" cy="173211"/>
-          </a:xfrm>
-          <a:prstGeom prst="ellipse">
-            <a:avLst/>
-          </a:prstGeom>
-          <a:solidFill>
-            <a:srgbClr val="0077FF"/>
-          </a:solidFill>
-          <a:ln>
-            <a:noFill/>
-          </a:ln>
-        </p:spPr>
-        <p:style>
-          <a:lnRef idx="1">
-            <a:schemeClr val="accent1"/>
-          </a:lnRef>
-          <a:fillRef idx="3">
-            <a:schemeClr val="accent1"/>
-          </a:fillRef>
-          <a:effectRef idx="2">
-            <a:schemeClr val="accent1"/>
-          </a:effectRef>
-          <a:fontRef idx="minor">
-            <a:schemeClr val="lt1"/>
-          </a:fontRef>
-        </p:style>
-        <p:txBody>
-          <a:bodyPr rtlCol="0" anchor="ctr"/>
-          <a:lstStyle/>
-          <a:p>
-            <a:pPr algn="ctr"/>
-          </a:p>
-        </p:txBody>
-      </p:sp>
-      <p:sp>
-        <p:nvSpPr>
-          <p:cNvPr id="1055" name="Oval 1054"/>
-          <p:cNvSpPr/>
-          <p:nvPr/>
-        </p:nvSpPr>
-        <p:spPr>
-          <a:xfrm>
-            <a:off x="7932050" y="1714658"/>
-            <a:ext cx="64954" cy="64954"/>
-          </a:xfrm>
-          <a:prstGeom prst="ellipse">
-            <a:avLst/>
-          </a:prstGeom>
-          <a:solidFill>
-            <a:srgbClr val="FFFFFF"/>
-          </a:solidFill>
-          <a:ln>
-            <a:noFill/>
-          </a:ln>
-        </p:spPr>
-        <p:style>
-          <a:lnRef idx="1">
-            <a:schemeClr val="accent1"/>
-          </a:lnRef>
-          <a:fillRef idx="3">
-            <a:schemeClr val="accent1"/>
-          </a:fillRef>
-          <a:effectRef idx="2">
-            <a:schemeClr val="accent1"/>
-          </a:effectRef>
-          <a:fontRef idx="minor">
-            <a:schemeClr val="lt1"/>
-          </a:fontRef>
-        </p:style>
-        <p:txBody>
-          <a:bodyPr rtlCol="0" anchor="ctr"/>
-          <a:lstStyle/>
-          <a:p>
-            <a:pPr algn="ctr"/>
-          </a:p>
-        </p:txBody>
-      </p:sp>
-      <p:sp>
-        <p:nvSpPr>
-          <p:cNvPr id="1056" name="TextBox 1055"/>
+          <p:cNvPr id="4" name="body_right"/>
           <p:cNvSpPr txBox="1"/>
           <p:nvPr/>
         </p:nvSpPr>
         <p:spPr>
           <a:xfrm>
-            <a:off x="7309920" y="2076828"/>
-            <a:ext cx="1309213" cy="383821"/>
+            <a:off x="4583887" y="1414513"/>
+            <a:ext cx="4035247" cy="1790812"/>
           </a:xfrm>
           <a:prstGeom prst="rect">
             <a:avLst/>
@@ -9112,13 +8228,16 @@
           <a:noFill/>
         </p:spPr>
         <p:txBody>
-          <a:bodyPr wrap="square">
+          <a:bodyPr wrap="square" lIns="76200" rIns="76200" tIns="50800" bIns="50800">
             <a:spAutoFit/>
           </a:bodyPr>
           <a:lstStyle/>
           <a:p>
-            <a:pPr algn="ctr">
-              <a:defRPr sz="1200" b="0">
+            <a:pPr algn="l">
+              <a:spcAft>
+                <a:spcPts val="300"/>
+              </a:spcAft>
+              <a:defRPr sz="1800">
                 <a:solidFill>
                   <a:srgbClr val="000000"/>
                 </a:solidFill>
@@ -9128,7 +8247,7 @@
               </a:defRPr>
             </a:pPr>
             <a:r>
-              <a:rPr sz="1200" b="0">
+              <a:rPr sz="1800">
                 <a:solidFill>
                   <a:srgbClr val="000000"/>
                 </a:solidFill>
@@ -9136,7 +8255,33 @@
                 <a:ea typeface="Play"/>
                 <a:cs typeface="Play"/>
               </a:rPr>
-              <a:t>Нагрузка более 20 задач требует внешней очереди</a:t>
+              <a:t>• Определить ответственных за интеграцию с корпоративными системами</a:t>
+            </a:r>
+          </a:p>
+          <a:p>
+            <a:pPr algn="l">
+              <a:spcAft>
+                <a:spcPts val="300"/>
+              </a:spcAft>
+              <a:defRPr sz="1800">
+                <a:solidFill>
+                  <a:srgbClr val="000000"/>
+                </a:solidFill>
+                <a:latin typeface="Play"/>
+                <a:ea typeface="Play"/>
+                <a:cs typeface="Play"/>
+              </a:defRPr>
+            </a:pPr>
+            <a:r>
+              <a:rPr sz="1800">
+                <a:solidFill>
+                  <a:srgbClr val="000000"/>
+                </a:solidFill>
+                <a:latin typeface="Play"/>
+                <a:ea typeface="Play"/>
+                <a:cs typeface="Play"/>
+              </a:rPr>
+              <a:t>• Утвердить сроки внедрения в Q4 2026</a:t>
             </a:r>
           </a:p>
         </p:txBody>
@@ -9159,23 +8304,16 @@
         <p:nvPr/>
       </p:nvGrpSpPr>
       <p:grpSpPr/>
-      <p:pic>
-        <p:nvPicPr>
-          <p:cNvPr descr=" " id="2249" name="Google Shape;2249;p83"/>
-          <p:cNvPicPr preferRelativeResize="0"/>
+      <p:sp>
+        <p:nvSpPr>
+          <p:cNvPr id="532" name="Google Shape;532;p53"/>
+          <p:cNvSpPr/>
           <p:nvPr/>
-        </p:nvPicPr>
-        <p:blipFill rotWithShape="1">
-          <a:blip r:embed="rId2">
-            <a:alphaModFix/>
-          </a:blip>
-          <a:srcRect b="0" l="0" r="0" t="0"/>
-          <a:stretch/>
-        </p:blipFill>
+        </p:nvSpPr>
         <p:spPr>
           <a:xfrm>
-            <a:off x="285748" y="3576507"/>
-            <a:ext cx="2381238" cy="28571"/>
+            <a:off x="303214" y="1022533"/>
+            <a:ext cx="8451939" cy="1433588"/>
           </a:xfrm>
           <a:prstGeom prst="rect">
             <a:avLst/>
@@ -9185,24 +8323,38 @@
             <a:noFill/>
           </a:ln>
         </p:spPr>
-      </p:pic>
-      <p:pic>
-        <p:nvPicPr>
-          <p:cNvPr descr=" " id="2250" name="Google Shape;2250;p83"/>
-          <p:cNvPicPr preferRelativeResize="0"/>
+        <p:txBody>
+          <a:bodyPr anchorCtr="0" anchor="ctr" bIns="91425" lIns="91425" spcFirstLastPara="1" rIns="91425" wrap="square" tIns="91425">
+            <a:noAutofit/>
+          </a:bodyPr>
+          <a:lstStyle/>
+          <a:p>
+            <a:pPr indent="0" lvl="0" marL="0" rtl="0" algn="l">
+              <a:spcBef>
+                <a:spcPts val="0"/>
+              </a:spcBef>
+              <a:spcAft>
+                <a:spcPts val="0"/>
+              </a:spcAft>
+              <a:buNone/>
+            </a:pPr>
+            <a:r>
+              <a:t/>
+            </a:r>
+            <a:endParaRPr/>
+          </a:p>
+        </p:txBody>
+      </p:sp>
+      <p:sp>
+        <p:nvSpPr>
+          <p:cNvPr id="533" name="Google Shape;533;p53"/>
+          <p:cNvSpPr/>
           <p:nvPr/>
-        </p:nvPicPr>
-        <p:blipFill rotWithShape="1">
-          <a:blip r:embed="rId3">
-            <a:alphaModFix/>
-          </a:blip>
-          <a:srcRect b="0" l="0" r="0" t="0"/>
-          <a:stretch/>
-        </p:blipFill>
+        </p:nvSpPr>
         <p:spPr>
           <a:xfrm>
-            <a:off x="3143234" y="3576507"/>
-            <a:ext cx="3762355" cy="28571"/>
+            <a:off x="303214" y="1022533"/>
+            <a:ext cx="1395256" cy="1433588"/>
           </a:xfrm>
           <a:prstGeom prst="rect">
             <a:avLst/>
@@ -9212,10 +8364,482 @@
             <a:noFill/>
           </a:ln>
         </p:spPr>
-      </p:pic>
-      <p:sp>
-        <p:nvSpPr>
-          <p:cNvPr id="2251" name="title"/>
+        <p:txBody>
+          <a:bodyPr anchorCtr="0" anchor="ctr" bIns="91425" lIns="91425" spcFirstLastPara="1" rIns="91425" wrap="square" tIns="91425">
+            <a:noAutofit/>
+          </a:bodyPr>
+          <a:lstStyle/>
+          <a:p>
+            <a:pPr indent="0" lvl="0" marL="0" rtl="0" algn="l">
+              <a:spcBef>
+                <a:spcPts val="0"/>
+              </a:spcBef>
+              <a:spcAft>
+                <a:spcPts val="0"/>
+              </a:spcAft>
+              <a:buNone/>
+            </a:pPr>
+            <a:r>
+              <a:t/>
+            </a:r>
+            <a:endParaRPr/>
+          </a:p>
+        </p:txBody>
+      </p:sp>
+      <p:sp>
+        <p:nvSpPr>
+          <p:cNvPr id="537" name="Google Shape;537;p53"/>
+          <p:cNvSpPr/>
+          <p:nvPr/>
+        </p:nvSpPr>
+        <p:spPr>
+          <a:xfrm>
+            <a:off x="2067385" y="1022533"/>
+            <a:ext cx="1395256" cy="1433588"/>
+          </a:xfrm>
+          <a:prstGeom prst="rect">
+            <a:avLst/>
+          </a:prstGeom>
+          <a:noFill/>
+          <a:ln>
+            <a:noFill/>
+          </a:ln>
+        </p:spPr>
+        <p:txBody>
+          <a:bodyPr anchorCtr="0" anchor="ctr" bIns="91425" lIns="91425" spcFirstLastPara="1" rIns="91425" wrap="square" tIns="91425">
+            <a:noAutofit/>
+          </a:bodyPr>
+          <a:lstStyle/>
+          <a:p>
+            <a:pPr indent="0" lvl="0" marL="0" rtl="0" algn="l">
+              <a:spcBef>
+                <a:spcPts val="0"/>
+              </a:spcBef>
+              <a:spcAft>
+                <a:spcPts val="0"/>
+              </a:spcAft>
+              <a:buNone/>
+            </a:pPr>
+            <a:r>
+              <a:t/>
+            </a:r>
+            <a:endParaRPr/>
+          </a:p>
+        </p:txBody>
+      </p:sp>
+      <p:sp>
+        <p:nvSpPr>
+          <p:cNvPr id="541" name="Google Shape;541;p53"/>
+          <p:cNvSpPr/>
+          <p:nvPr/>
+        </p:nvSpPr>
+        <p:spPr>
+          <a:xfrm>
+            <a:off x="3831556" y="1022533"/>
+            <a:ext cx="1395256" cy="1433588"/>
+          </a:xfrm>
+          <a:prstGeom prst="rect">
+            <a:avLst/>
+          </a:prstGeom>
+          <a:noFill/>
+          <a:ln>
+            <a:noFill/>
+          </a:ln>
+        </p:spPr>
+        <p:txBody>
+          <a:bodyPr anchorCtr="0" anchor="ctr" bIns="91425" lIns="91425" spcFirstLastPara="1" rIns="91425" wrap="square" tIns="91425">
+            <a:noAutofit/>
+          </a:bodyPr>
+          <a:lstStyle/>
+          <a:p>
+            <a:pPr indent="0" lvl="0" marL="0" rtl="0" algn="l">
+              <a:spcBef>
+                <a:spcPts val="0"/>
+              </a:spcBef>
+              <a:spcAft>
+                <a:spcPts val="0"/>
+              </a:spcAft>
+              <a:buNone/>
+            </a:pPr>
+            <a:r>
+              <a:t/>
+            </a:r>
+            <a:endParaRPr/>
+          </a:p>
+        </p:txBody>
+      </p:sp>
+      <p:sp>
+        <p:nvSpPr>
+          <p:cNvPr id="545" name="Google Shape;545;p53"/>
+          <p:cNvSpPr/>
+          <p:nvPr/>
+        </p:nvSpPr>
+        <p:spPr>
+          <a:xfrm>
+            <a:off x="5595727" y="1022533"/>
+            <a:ext cx="1395256" cy="1433588"/>
+          </a:xfrm>
+          <a:prstGeom prst="rect">
+            <a:avLst/>
+          </a:prstGeom>
+          <a:noFill/>
+          <a:ln>
+            <a:noFill/>
+          </a:ln>
+        </p:spPr>
+        <p:txBody>
+          <a:bodyPr anchorCtr="0" anchor="ctr" bIns="91425" lIns="91425" spcFirstLastPara="1" rIns="91425" wrap="square" tIns="91425">
+            <a:noAutofit/>
+          </a:bodyPr>
+          <a:lstStyle/>
+          <a:p>
+            <a:pPr indent="0" lvl="0" marL="0" rtl="0" algn="l">
+              <a:spcBef>
+                <a:spcPts val="0"/>
+              </a:spcBef>
+              <a:spcAft>
+                <a:spcPts val="0"/>
+              </a:spcAft>
+              <a:buNone/>
+            </a:pPr>
+            <a:r>
+              <a:t/>
+            </a:r>
+            <a:endParaRPr/>
+          </a:p>
+        </p:txBody>
+      </p:sp>
+      <p:sp>
+        <p:nvSpPr>
+          <p:cNvPr id="549" name="Google Shape;549;p53"/>
+          <p:cNvSpPr/>
+          <p:nvPr/>
+        </p:nvSpPr>
+        <p:spPr>
+          <a:xfrm>
+            <a:off x="7359897" y="1022533"/>
+            <a:ext cx="1395256" cy="1433588"/>
+          </a:xfrm>
+          <a:prstGeom prst="rect">
+            <a:avLst/>
+          </a:prstGeom>
+          <a:noFill/>
+          <a:ln>
+            <a:noFill/>
+          </a:ln>
+        </p:spPr>
+        <p:txBody>
+          <a:bodyPr anchorCtr="0" anchor="ctr" bIns="91425" lIns="91425" spcFirstLastPara="1" rIns="91425" wrap="square" tIns="91425">
+            <a:noAutofit/>
+          </a:bodyPr>
+          <a:lstStyle/>
+          <a:p>
+            <a:pPr indent="0" lvl="0" marL="0" rtl="0" algn="l">
+              <a:spcBef>
+                <a:spcPts val="0"/>
+              </a:spcBef>
+              <a:spcAft>
+                <a:spcPts val="0"/>
+              </a:spcAft>
+              <a:buNone/>
+            </a:pPr>
+            <a:r>
+              <a:t/>
+            </a:r>
+            <a:endParaRPr/>
+          </a:p>
+        </p:txBody>
+      </p:sp>
+      <p:sp>
+        <p:nvSpPr>
+          <p:cNvPr id="553" name="Google Shape;553;p53"/>
+          <p:cNvSpPr/>
+          <p:nvPr/>
+        </p:nvSpPr>
+        <p:spPr>
+          <a:xfrm>
+            <a:off x="276488" y="2955549"/>
+            <a:ext cx="8451939" cy="1433588"/>
+          </a:xfrm>
+          <a:prstGeom prst="rect">
+            <a:avLst/>
+          </a:prstGeom>
+          <a:noFill/>
+          <a:ln>
+            <a:noFill/>
+          </a:ln>
+        </p:spPr>
+        <p:txBody>
+          <a:bodyPr anchorCtr="0" anchor="ctr" bIns="91425" lIns="91425" spcFirstLastPara="1" rIns="91425" wrap="square" tIns="91425">
+            <a:noAutofit/>
+          </a:bodyPr>
+          <a:lstStyle/>
+          <a:p>
+            <a:pPr indent="0" lvl="0" marL="0" rtl="0" algn="l">
+              <a:spcBef>
+                <a:spcPts val="0"/>
+              </a:spcBef>
+              <a:spcAft>
+                <a:spcPts val="0"/>
+              </a:spcAft>
+              <a:buNone/>
+            </a:pPr>
+            <a:r>
+              <a:t/>
+            </a:r>
+            <a:endParaRPr/>
+          </a:p>
+        </p:txBody>
+      </p:sp>
+      <p:sp>
+        <p:nvSpPr>
+          <p:cNvPr id="554" name="Google Shape;554;p53"/>
+          <p:cNvSpPr/>
+          <p:nvPr/>
+        </p:nvSpPr>
+        <p:spPr>
+          <a:xfrm>
+            <a:off x="303214" y="2797849"/>
+            <a:ext cx="8451939" cy="1433588"/>
+          </a:xfrm>
+          <a:prstGeom prst="rect">
+            <a:avLst/>
+          </a:prstGeom>
+          <a:noFill/>
+          <a:ln>
+            <a:noFill/>
+          </a:ln>
+        </p:spPr>
+        <p:txBody>
+          <a:bodyPr anchorCtr="0" anchor="ctr" bIns="91425" lIns="91425" spcFirstLastPara="1" rIns="91425" wrap="square" tIns="91425">
+            <a:noAutofit/>
+          </a:bodyPr>
+          <a:lstStyle/>
+          <a:p>
+            <a:pPr indent="0" lvl="0" marL="0" rtl="0" algn="l">
+              <a:spcBef>
+                <a:spcPts val="0"/>
+              </a:spcBef>
+              <a:spcAft>
+                <a:spcPts val="0"/>
+              </a:spcAft>
+              <a:buNone/>
+            </a:pPr>
+            <a:r>
+              <a:t/>
+            </a:r>
+            <a:endParaRPr/>
+          </a:p>
+        </p:txBody>
+      </p:sp>
+      <p:sp>
+        <p:nvSpPr>
+          <p:cNvPr id="555" name="Google Shape;555;p53"/>
+          <p:cNvSpPr/>
+          <p:nvPr/>
+        </p:nvSpPr>
+        <p:spPr>
+          <a:xfrm>
+            <a:off x="303214" y="2797849"/>
+            <a:ext cx="1395256" cy="1433588"/>
+          </a:xfrm>
+          <a:prstGeom prst="rect">
+            <a:avLst/>
+          </a:prstGeom>
+          <a:noFill/>
+          <a:ln>
+            <a:noFill/>
+          </a:ln>
+        </p:spPr>
+        <p:txBody>
+          <a:bodyPr anchorCtr="0" anchor="ctr" bIns="91425" lIns="91425" spcFirstLastPara="1" rIns="91425" wrap="square" tIns="91425">
+            <a:noAutofit/>
+          </a:bodyPr>
+          <a:lstStyle/>
+          <a:p>
+            <a:pPr indent="0" lvl="0" marL="0" rtl="0" algn="l">
+              <a:spcBef>
+                <a:spcPts val="0"/>
+              </a:spcBef>
+              <a:spcAft>
+                <a:spcPts val="0"/>
+              </a:spcAft>
+              <a:buNone/>
+            </a:pPr>
+            <a:r>
+              <a:t/>
+            </a:r>
+            <a:endParaRPr/>
+          </a:p>
+        </p:txBody>
+      </p:sp>
+      <p:sp>
+        <p:nvSpPr>
+          <p:cNvPr id="559" name="Google Shape;559;p53"/>
+          <p:cNvSpPr/>
+          <p:nvPr/>
+        </p:nvSpPr>
+        <p:spPr>
+          <a:xfrm>
+            <a:off x="2067385" y="2797849"/>
+            <a:ext cx="1395256" cy="1433588"/>
+          </a:xfrm>
+          <a:prstGeom prst="rect">
+            <a:avLst/>
+          </a:prstGeom>
+          <a:noFill/>
+          <a:ln>
+            <a:noFill/>
+          </a:ln>
+        </p:spPr>
+        <p:txBody>
+          <a:bodyPr anchorCtr="0" anchor="ctr" bIns="91425" lIns="91425" spcFirstLastPara="1" rIns="91425" wrap="square" tIns="91425">
+            <a:noAutofit/>
+          </a:bodyPr>
+          <a:lstStyle/>
+          <a:p>
+            <a:pPr indent="0" lvl="0" marL="0" rtl="0" algn="l">
+              <a:spcBef>
+                <a:spcPts val="0"/>
+              </a:spcBef>
+              <a:spcAft>
+                <a:spcPts val="0"/>
+              </a:spcAft>
+              <a:buNone/>
+            </a:pPr>
+            <a:r>
+              <a:t/>
+            </a:r>
+            <a:endParaRPr/>
+          </a:p>
+        </p:txBody>
+      </p:sp>
+      <p:sp>
+        <p:nvSpPr>
+          <p:cNvPr id="563" name="Google Shape;563;p53"/>
+          <p:cNvSpPr/>
+          <p:nvPr/>
+        </p:nvSpPr>
+        <p:spPr>
+          <a:xfrm>
+            <a:off x="3831556" y="2797849"/>
+            <a:ext cx="1395256" cy="1433588"/>
+          </a:xfrm>
+          <a:prstGeom prst="rect">
+            <a:avLst/>
+          </a:prstGeom>
+          <a:noFill/>
+          <a:ln>
+            <a:noFill/>
+          </a:ln>
+        </p:spPr>
+        <p:txBody>
+          <a:bodyPr anchorCtr="0" anchor="ctr" bIns="91425" lIns="91425" spcFirstLastPara="1" rIns="91425" wrap="square" tIns="91425">
+            <a:noAutofit/>
+          </a:bodyPr>
+          <a:lstStyle/>
+          <a:p>
+            <a:pPr indent="0" lvl="0" marL="0" rtl="0" algn="l">
+              <a:spcBef>
+                <a:spcPts val="0"/>
+              </a:spcBef>
+              <a:spcAft>
+                <a:spcPts val="0"/>
+              </a:spcAft>
+              <a:buNone/>
+            </a:pPr>
+            <a:r>
+              <a:t/>
+            </a:r>
+            <a:endParaRPr/>
+          </a:p>
+        </p:txBody>
+      </p:sp>
+      <p:sp>
+        <p:nvSpPr>
+          <p:cNvPr id="567" name="Google Shape;567;p53"/>
+          <p:cNvSpPr/>
+          <p:nvPr/>
+        </p:nvSpPr>
+        <p:spPr>
+          <a:xfrm>
+            <a:off x="5595727" y="2797849"/>
+            <a:ext cx="1395256" cy="1433588"/>
+          </a:xfrm>
+          <a:prstGeom prst="rect">
+            <a:avLst/>
+          </a:prstGeom>
+          <a:noFill/>
+          <a:ln>
+            <a:noFill/>
+          </a:ln>
+        </p:spPr>
+        <p:txBody>
+          <a:bodyPr anchorCtr="0" anchor="ctr" bIns="91425" lIns="91425" spcFirstLastPara="1" rIns="91425" wrap="square" tIns="91425">
+            <a:noAutofit/>
+          </a:bodyPr>
+          <a:lstStyle/>
+          <a:p>
+            <a:pPr indent="0" lvl="0" marL="0" rtl="0" algn="l">
+              <a:spcBef>
+                <a:spcPts val="0"/>
+              </a:spcBef>
+              <a:spcAft>
+                <a:spcPts val="0"/>
+              </a:spcAft>
+              <a:buNone/>
+            </a:pPr>
+            <a:r>
+              <a:t/>
+            </a:r>
+            <a:endParaRPr/>
+          </a:p>
+        </p:txBody>
+      </p:sp>
+      <p:sp>
+        <p:nvSpPr>
+          <p:cNvPr id="571" name="Google Shape;571;p53"/>
+          <p:cNvSpPr/>
+          <p:nvPr/>
+        </p:nvSpPr>
+        <p:spPr>
+          <a:xfrm>
+            <a:off x="7359897" y="2797849"/>
+            <a:ext cx="1395256" cy="1433588"/>
+          </a:xfrm>
+          <a:prstGeom prst="rect">
+            <a:avLst/>
+          </a:prstGeom>
+          <a:noFill/>
+          <a:ln>
+            <a:noFill/>
+          </a:ln>
+        </p:spPr>
+        <p:txBody>
+          <a:bodyPr anchorCtr="0" anchor="ctr" bIns="91425" lIns="91425" spcFirstLastPara="1" rIns="91425" wrap="square" tIns="91425">
+            <a:noAutofit/>
+          </a:bodyPr>
+          <a:lstStyle/>
+          <a:p>
+            <a:pPr indent="0" lvl="0" marL="0" rtl="0" algn="l">
+              <a:spcBef>
+                <a:spcPts val="0"/>
+              </a:spcBef>
+              <a:spcAft>
+                <a:spcPts val="0"/>
+              </a:spcAft>
+              <a:buNone/>
+            </a:pPr>
+            <a:r>
+              <a:t/>
+            </a:r>
+            <a:endParaRPr/>
+          </a:p>
+        </p:txBody>
+      </p:sp>
+      <p:sp>
+        <p:nvSpPr>
+          <p:cNvPr id="572" name="title"/>
           <p:cNvSpPr txBox="1"/>
           <p:nvPr/>
         </p:nvSpPr>
@@ -9239,7 +8863,7 @@
               <a:spcAft>
                 <a:spcPts val="300"/>
               </a:spcAft>
-              <a:defRPr sz="2400">
+              <a:defRPr sz="2438">
                 <a:solidFill>
                   <a:srgbClr val="000000"/>
                 </a:solidFill>
@@ -9249,7 +8873,7 @@
               </a:defRPr>
             </a:pPr>
             <a:r>
-              <a:rPr sz="2400">
+              <a:rPr sz="2438">
                 <a:solidFill>
                   <a:srgbClr val="000000"/>
                 </a:solidFill>
@@ -9257,21 +8881,21 @@
                 <a:ea typeface="Play"/>
                 <a:cs typeface="Play"/>
               </a:rPr>
-              <a:t>Потенциальные выгоды</a:t>
+              <a:t>Риски</a:t>
             </a:r>
           </a:p>
         </p:txBody>
       </p:sp>
       <p:sp>
         <p:nvSpPr>
-          <p:cNvPr id="2252" name="body"/>
+          <p:cNvPr id="573" name="body_left"/>
           <p:cNvSpPr txBox="1"/>
           <p:nvPr/>
         </p:nvSpPr>
         <p:spPr>
           <a:xfrm>
-            <a:off x="274320" y="1950440"/>
-            <a:ext cx="7189469" cy="994625"/>
+            <a:off x="274320" y="1891002"/>
+            <a:ext cx="4035247" cy="1422400"/>
           </a:xfrm>
           <a:prstGeom prst="rect">
             <a:avLst/>
@@ -9288,7 +8912,7 @@
               <a:spcAft>
                 <a:spcPts val="300"/>
               </a:spcAft>
-              <a:defRPr sz="1803" b="1">
+              <a:defRPr sz="1600">
                 <a:solidFill>
                   <a:srgbClr val="000000"/>
                 </a:solidFill>
@@ -9298,7 +8922,7 @@
               </a:defRPr>
             </a:pPr>
             <a:r>
-              <a:rPr sz="1803" b="1">
+              <a:rPr sz="1600">
                 <a:solidFill>
                   <a:srgbClr val="000000"/>
                 </a:solidFill>
@@ -9306,7 +8930,7 @@
                 <a:ea typeface="Play"/>
                 <a:cs typeface="Play"/>
               </a:rPr>
-              <a:t>• Сокращение времени на создание презентаций</a:t>
+              <a:t>• Слабая модель может выдумать цифры, аудит проверяет каждое число</a:t>
             </a:r>
           </a:p>
           <a:p>
@@ -9314,7 +8938,7 @@
               <a:spcAft>
                 <a:spcPts val="300"/>
               </a:spcAft>
-              <a:defRPr sz="1803" b="1">
+              <a:defRPr sz="1600">
                 <a:solidFill>
                   <a:srgbClr val="000000"/>
                 </a:solidFill>
@@ -9324,7 +8948,7 @@
               </a:defRPr>
             </a:pPr>
             <a:r>
-              <a:rPr sz="1803" b="1">
+              <a:rPr sz="1600">
                 <a:solidFill>
                   <a:srgbClr val="000000"/>
                 </a:solidFill>
@@ -9332,15 +8956,38 @@
                 <a:ea typeface="Play"/>
                 <a:cs typeface="Play"/>
               </a:rPr>
-              <a:t>• Уменьшение нарушений фирменного стиля</a:t>
+              <a:t>• Неправильный шаблон может привести к плохому дизайну, сервис использует рабочую область</a:t>
             </a:r>
           </a:p>
+        </p:txBody>
+      </p:sp>
+      <p:sp>
+        <p:nvSpPr>
+          <p:cNvPr id="574" name="body_right"/>
+          <p:cNvSpPr txBox="1"/>
+          <p:nvPr/>
+        </p:nvSpPr>
+        <p:spPr>
+          <a:xfrm>
+            <a:off x="4583887" y="1891002"/>
+            <a:ext cx="4035247" cy="1422400"/>
+          </a:xfrm>
+          <a:prstGeom prst="rect">
+            <a:avLst/>
+          </a:prstGeom>
+          <a:noFill/>
+        </p:spPr>
+        <p:txBody>
+          <a:bodyPr wrap="square" lIns="76200" rIns="76200" tIns="50800" bIns="50800">
+            <a:spAutoFit/>
+          </a:bodyPr>
+          <a:lstStyle/>
           <a:p>
             <a:pPr algn="l">
               <a:spcAft>
                 <a:spcPts val="300"/>
               </a:spcAft>
-              <a:defRPr sz="1803" b="1">
+              <a:defRPr sz="1600">
                 <a:solidFill>
                   <a:srgbClr val="000000"/>
                 </a:solidFill>
@@ -9350,7 +8997,7 @@
               </a:defRPr>
             </a:pPr>
             <a:r>
-              <a:rPr sz="1803" b="1">
+              <a:rPr sz="1600">
                 <a:solidFill>
                   <a:srgbClr val="000000"/>
                 </a:solidFill>
@@ -9358,7 +9005,33 @@
                 <a:ea typeface="Play"/>
                 <a:cs typeface="Play"/>
               </a:rPr>
-              <a:t>• Повышение продуктивности дизайнеров</a:t>
+              <a:t>• Нагрузка выше 20 задач требует внешней очереди</a:t>
+            </a:r>
+          </a:p>
+          <a:p>
+            <a:pPr algn="l">
+              <a:spcAft>
+                <a:spcPts val="300"/>
+              </a:spcAft>
+              <a:defRPr sz="1600">
+                <a:solidFill>
+                  <a:srgbClr val="000000"/>
+                </a:solidFill>
+                <a:latin typeface="Play"/>
+                <a:ea typeface="Play"/>
+                <a:cs typeface="Play"/>
+              </a:defRPr>
+            </a:pPr>
+            <a:r>
+              <a:rPr sz="1600">
+                <a:solidFill>
+                  <a:srgbClr val="000000"/>
+                </a:solidFill>
+                <a:latin typeface="Play"/>
+                <a:ea typeface="Play"/>
+                <a:cs typeface="Play"/>
+              </a:rPr>
+              <a:t>• Зависимость от OpenAI‑совместимого протокола может ограничить масштаб</a:t>
             </a:r>
           </a:p>
         </p:txBody>
@@ -9383,18 +9056,141 @@
       <p:grpSpPr/>
       <p:sp>
         <p:nvSpPr>
-          <p:cNvPr id="1027" name="Google Shape;1027;p65"/>
+          <p:cNvPr id="662" name="Google Shape;662;p55"/>
           <p:cNvSpPr/>
           <p:nvPr/>
         </p:nvSpPr>
         <p:spPr>
           <a:xfrm>
-            <a:off x="6064222" y="1209852"/>
-            <a:ext cx="2793985" cy="3014270"/>
+            <a:off x="8667705" y="4666977"/>
+            <a:ext cx="190499" cy="190475"/>
+          </a:xfrm>
+          <a:prstGeom prst="rect">
+            <a:avLst/>
+          </a:prstGeom>
+          <a:noFill/>
+          <a:ln>
+            <a:noFill/>
+          </a:ln>
+        </p:spPr>
+        <p:txBody>
+          <a:bodyPr anchorCtr="0" anchor="ctr" bIns="91425" lIns="91425" spcFirstLastPara="1" rIns="91425" wrap="square" tIns="91425">
+            <a:noAutofit/>
+          </a:bodyPr>
+          <a:lstStyle/>
+          <a:p>
+            <a:pPr indent="0" lvl="0" marL="0" rtl="0" algn="l">
+              <a:spcBef>
+                <a:spcPts val="0"/>
+              </a:spcBef>
+              <a:spcAft>
+                <a:spcPts val="0"/>
+              </a:spcAft>
+              <a:buNone/>
+            </a:pPr>
+            <a:r>
+              <a:t/>
+            </a:r>
+            <a:endParaRPr/>
+          </a:p>
+        </p:txBody>
+      </p:sp>
+      <p:sp>
+        <p:nvSpPr>
+          <p:cNvPr id="663" name="Google Shape;663;p55"/>
+          <p:cNvSpPr/>
+          <p:nvPr/>
+        </p:nvSpPr>
+        <p:spPr>
+          <a:xfrm>
+            <a:off x="285748" y="286047"/>
+            <a:ext cx="8572456" cy="3938075"/>
+          </a:xfrm>
+          <a:prstGeom prst="rect">
+            <a:avLst/>
+          </a:prstGeom>
+          <a:noFill/>
+          <a:ln>
+            <a:noFill/>
+          </a:ln>
+        </p:spPr>
+        <p:txBody>
+          <a:bodyPr anchorCtr="0" anchor="ctr" bIns="91425" lIns="91425" spcFirstLastPara="1" rIns="91425" wrap="square" tIns="91425">
+            <a:noAutofit/>
+          </a:bodyPr>
+          <a:lstStyle/>
+          <a:p>
+            <a:pPr indent="0" lvl="0" marL="0" rtl="0" algn="l">
+              <a:spcBef>
+                <a:spcPts val="0"/>
+              </a:spcBef>
+              <a:spcAft>
+                <a:spcPts val="0"/>
+              </a:spcAft>
+              <a:buNone/>
+            </a:pPr>
+            <a:r>
+              <a:t/>
+            </a:r>
+            <a:endParaRPr/>
+          </a:p>
+        </p:txBody>
+      </p:sp>
+      <p:sp>
+        <p:nvSpPr>
+          <p:cNvPr id="664" name="Google Shape;664;p55"/>
+          <p:cNvSpPr/>
+          <p:nvPr/>
+        </p:nvSpPr>
+        <p:spPr>
+          <a:xfrm>
+            <a:off x="285748" y="1209852"/>
+            <a:ext cx="8572456" cy="3014270"/>
+          </a:xfrm>
+          <a:prstGeom prst="rect">
+            <a:avLst/>
+          </a:prstGeom>
+          <a:noFill/>
+          <a:ln>
+            <a:noFill/>
+          </a:ln>
+        </p:spPr>
+        <p:txBody>
+          <a:bodyPr anchorCtr="0" anchor="ctr" bIns="91425" lIns="91425" spcFirstLastPara="1" rIns="91425" wrap="square" tIns="91425">
+            <a:noAutofit/>
+          </a:bodyPr>
+          <a:lstStyle/>
+          <a:p>
+            <a:pPr indent="0" lvl="0" marL="0" rtl="0" algn="l">
+              <a:spcBef>
+                <a:spcPts val="0"/>
+              </a:spcBef>
+              <a:spcAft>
+                <a:spcPts val="0"/>
+              </a:spcAft>
+              <a:buNone/>
+            </a:pPr>
+            <a:r>
+              <a:t/>
+            </a:r>
+            <a:endParaRPr/>
+          </a:p>
+        </p:txBody>
+      </p:sp>
+      <p:sp>
+        <p:nvSpPr>
+          <p:cNvPr id="665" name="Google Shape;665;p55"/>
+          <p:cNvSpPr/>
+          <p:nvPr/>
+        </p:nvSpPr>
+        <p:spPr>
+          <a:xfrm>
+            <a:off x="285749" y="1209852"/>
+            <a:ext cx="2071677" cy="3014270"/>
           </a:xfrm>
           <a:prstGeom prst="roundRect">
             <a:avLst>
-              <a:gd fmla="val 3436" name="adj"/>
+              <a:gd fmla="val 4634" name="adj"/>
             </a:avLst>
           </a:prstGeom>
           <a:solidFill>
@@ -9428,18 +9224,63 @@
       </p:sp>
       <p:sp>
         <p:nvSpPr>
-          <p:cNvPr id="1029" name="Google Shape;1029;p65"/>
+          <p:cNvPr id="667" name="Google Shape;667;p55"/>
           <p:cNvSpPr/>
           <p:nvPr/>
         </p:nvSpPr>
         <p:spPr>
           <a:xfrm>
-            <a:off x="3174981" y="1209852"/>
-            <a:ext cx="2793985" cy="3014270"/>
+            <a:off x="438148" y="1362233"/>
+            <a:ext cx="76199" cy="76190"/>
           </a:xfrm>
           <a:prstGeom prst="roundRect">
             <a:avLst>
-              <a:gd fmla="val 3436" name="adj"/>
+              <a:gd fmla="val 31500" name="adj"/>
+            </a:avLst>
+          </a:prstGeom>
+          <a:solidFill>
+            <a:srgbClr val="0077FF"/>
+          </a:solidFill>
+          <a:ln>
+            <a:noFill/>
+          </a:ln>
+        </p:spPr>
+        <p:txBody>
+          <a:bodyPr anchorCtr="0" anchor="ctr" bIns="91425" lIns="91425" spcFirstLastPara="1" rIns="91425" wrap="square" tIns="91425">
+            <a:noAutofit/>
+          </a:bodyPr>
+          <a:lstStyle/>
+          <a:p>
+            <a:pPr indent="0" lvl="0" marL="0" rtl="0" algn="l">
+              <a:spcBef>
+                <a:spcPts val="0"/>
+              </a:spcBef>
+              <a:spcAft>
+                <a:spcPts val="0"/>
+              </a:spcAft>
+              <a:buNone/>
+            </a:pPr>
+            <a:r>
+              <a:t/>
+            </a:r>
+            <a:endParaRPr/>
+          </a:p>
+        </p:txBody>
+      </p:sp>
+      <p:sp>
+        <p:nvSpPr>
+          <p:cNvPr id="670" name="Google Shape;670;p55"/>
+          <p:cNvSpPr/>
+          <p:nvPr/>
+        </p:nvSpPr>
+        <p:spPr>
+          <a:xfrm>
+            <a:off x="2452675" y="1209852"/>
+            <a:ext cx="2071677" cy="3014270"/>
+          </a:xfrm>
+          <a:prstGeom prst="roundRect">
+            <a:avLst>
+              <a:gd fmla="val 4634" name="adj"/>
             </a:avLst>
           </a:prstGeom>
           <a:solidFill>
@@ -9473,18 +9314,63 @@
       </p:sp>
       <p:sp>
         <p:nvSpPr>
-          <p:cNvPr id="1031" name="Google Shape;1031;p65"/>
+          <p:cNvPr id="672" name="Google Shape;672;p55"/>
           <p:cNvSpPr/>
           <p:nvPr/>
         </p:nvSpPr>
         <p:spPr>
           <a:xfrm>
-            <a:off x="285749" y="1209852"/>
-            <a:ext cx="2793985" cy="3014270"/>
+            <a:off x="2605074" y="1362233"/>
+            <a:ext cx="76199" cy="76190"/>
           </a:xfrm>
           <a:prstGeom prst="roundRect">
             <a:avLst>
-              <a:gd fmla="val 3436" name="adj"/>
+              <a:gd fmla="val 31500" name="adj"/>
+            </a:avLst>
+          </a:prstGeom>
+          <a:solidFill>
+            <a:srgbClr val="0077FF"/>
+          </a:solidFill>
+          <a:ln>
+            <a:noFill/>
+          </a:ln>
+        </p:spPr>
+        <p:txBody>
+          <a:bodyPr anchorCtr="0" anchor="ctr" bIns="91425" lIns="91425" spcFirstLastPara="1" rIns="91425" wrap="square" tIns="91425">
+            <a:noAutofit/>
+          </a:bodyPr>
+          <a:lstStyle/>
+          <a:p>
+            <a:pPr indent="0" lvl="0" marL="0" rtl="0" algn="l">
+              <a:spcBef>
+                <a:spcPts val="0"/>
+              </a:spcBef>
+              <a:spcAft>
+                <a:spcPts val="0"/>
+              </a:spcAft>
+              <a:buNone/>
+            </a:pPr>
+            <a:r>
+              <a:t/>
+            </a:r>
+            <a:endParaRPr/>
+          </a:p>
+        </p:txBody>
+      </p:sp>
+      <p:sp>
+        <p:nvSpPr>
+          <p:cNvPr id="675" name="Google Shape;675;p55"/>
+          <p:cNvSpPr/>
+          <p:nvPr/>
+        </p:nvSpPr>
+        <p:spPr>
+          <a:xfrm>
+            <a:off x="4619601" y="1209852"/>
+            <a:ext cx="2071677" cy="3014270"/>
+          </a:xfrm>
+          <a:prstGeom prst="roundRect">
+            <a:avLst>
+              <a:gd fmla="val 4634" name="adj"/>
             </a:avLst>
           </a:prstGeom>
           <a:solidFill>
@@ -9518,19 +9404,23 @@
       </p:sp>
       <p:sp>
         <p:nvSpPr>
-          <p:cNvPr id="1032" name="Google Shape;1032;p65"/>
+          <p:cNvPr id="677" name="Google Shape;677;p55"/>
           <p:cNvSpPr/>
           <p:nvPr/>
         </p:nvSpPr>
         <p:spPr>
           <a:xfrm>
-            <a:off x="285748" y="286047"/>
-            <a:ext cx="8572456" cy="3938075"/>
-          </a:xfrm>
-          <a:prstGeom prst="rect">
-            <a:avLst/>
+            <a:off x="4772001" y="1362233"/>
+            <a:ext cx="76199" cy="76190"/>
+          </a:xfrm>
+          <a:prstGeom prst="roundRect">
+            <a:avLst>
+              <a:gd fmla="val 31500" name="adj"/>
+            </a:avLst>
           </a:prstGeom>
-          <a:noFill/>
+          <a:solidFill>
+            <a:srgbClr val="0077FF"/>
+          </a:solidFill>
           <a:ln>
             <a:noFill/>
           </a:ln>
@@ -9559,19 +9449,23 @@
       </p:sp>
       <p:sp>
         <p:nvSpPr>
-          <p:cNvPr id="1033" name="Google Shape;1033;p65"/>
+          <p:cNvPr id="680" name="Google Shape;680;p55"/>
           <p:cNvSpPr/>
           <p:nvPr/>
         </p:nvSpPr>
         <p:spPr>
           <a:xfrm>
-            <a:off x="285748" y="1209852"/>
-            <a:ext cx="8572456" cy="3014270"/>
-          </a:xfrm>
-          <a:prstGeom prst="rect">
-            <a:avLst/>
+            <a:off x="6786527" y="1209852"/>
+            <a:ext cx="2071677" cy="3014270"/>
+          </a:xfrm>
+          <a:prstGeom prst="roundRect">
+            <a:avLst>
+              <a:gd fmla="val 4634" name="adj"/>
+            </a:avLst>
           </a:prstGeom>
-          <a:noFill/>
+          <a:solidFill>
+            <a:schemeClr val="lt2"/>
+          </a:solidFill>
           <a:ln>
             <a:noFill/>
           </a:ln>
@@ -9600,7 +9494,52 @@
       </p:sp>
       <p:sp>
         <p:nvSpPr>
-          <p:cNvPr id="1034" name="title"/>
+          <p:cNvPr id="682" name="Google Shape;682;p55"/>
+          <p:cNvSpPr/>
+          <p:nvPr/>
+        </p:nvSpPr>
+        <p:spPr>
+          <a:xfrm>
+            <a:off x="6938927" y="1362233"/>
+            <a:ext cx="76199" cy="76190"/>
+          </a:xfrm>
+          <a:prstGeom prst="roundRect">
+            <a:avLst>
+              <a:gd fmla="val 31500" name="adj"/>
+            </a:avLst>
+          </a:prstGeom>
+          <a:solidFill>
+            <a:srgbClr val="0077FF"/>
+          </a:solidFill>
+          <a:ln>
+            <a:noFill/>
+          </a:ln>
+        </p:spPr>
+        <p:txBody>
+          <a:bodyPr anchorCtr="0" anchor="ctr" bIns="91425" lIns="91425" spcFirstLastPara="1" rIns="91425" wrap="square" tIns="91425">
+            <a:noAutofit/>
+          </a:bodyPr>
+          <a:lstStyle/>
+          <a:p>
+            <a:pPr indent="0" lvl="0" marL="0" rtl="0" algn="l">
+              <a:spcBef>
+                <a:spcPts val="0"/>
+              </a:spcBef>
+              <a:spcAft>
+                <a:spcPts val="0"/>
+              </a:spcAft>
+              <a:buNone/>
+            </a:pPr>
+            <a:r>
+              <a:t/>
+            </a:r>
+            <a:endParaRPr/>
+          </a:p>
+        </p:txBody>
+      </p:sp>
+      <p:sp>
+        <p:nvSpPr>
+          <p:cNvPr id="683" name="title"/>
           <p:cNvSpPr txBox="1"/>
           <p:nvPr/>
         </p:nvSpPr>
@@ -9624,7 +9563,7 @@
               <a:spcAft>
                 <a:spcPts val="300"/>
               </a:spcAft>
-              <a:defRPr sz="2400">
+              <a:defRPr sz="2438">
                 <a:solidFill>
                   <a:srgbClr val="000000"/>
                 </a:solidFill>
@@ -9634,7 +9573,7 @@
               </a:defRPr>
             </a:pPr>
             <a:r>
-              <a:rPr sz="2400">
+              <a:rPr sz="2438">
                 <a:solidFill>
                   <a:srgbClr val="000000"/>
                 </a:solidFill>
@@ -9642,21 +9581,21 @@
                 <a:ea typeface="Play"/>
                 <a:cs typeface="Play"/>
               </a:rPr>
-              <a:t>Что мы просим решить</a:t>
+              <a:t>Преимущества для компании</a:t>
             </a:r>
           </a:p>
         </p:txBody>
       </p:sp>
       <p:sp>
         <p:nvSpPr>
-          <p:cNvPr id="1035" name="body"/>
+          <p:cNvPr id="684" name="body_left"/>
           <p:cNvSpPr txBox="1"/>
           <p:nvPr/>
         </p:nvSpPr>
         <p:spPr>
           <a:xfrm>
             <a:off x="274320" y="1414513"/>
-            <a:ext cx="8344814" cy="1046136"/>
+            <a:ext cx="4035247" cy="2695296"/>
           </a:xfrm>
           <a:prstGeom prst="rect">
             <a:avLst/>
@@ -9673,7 +9612,7 @@
               <a:spcAft>
                 <a:spcPts val="300"/>
               </a:spcAft>
-              <a:defRPr sz="1406">
+              <a:defRPr sz="1800">
                 <a:solidFill>
                   <a:srgbClr val="000000"/>
                 </a:solidFill>
@@ -9683,7 +9622,7 @@
               </a:defRPr>
             </a:pPr>
             <a:r>
-              <a:rPr sz="1406">
+              <a:rPr sz="1800">
                 <a:solidFill>
                   <a:srgbClr val="000000"/>
                 </a:solidFill>
@@ -9691,7 +9630,7 @@
                 <a:ea typeface="Play"/>
                 <a:cs typeface="Play"/>
               </a:rPr>
-              <a:t>• Одобрить запуск сервиса на всю компанию</a:t>
+              <a:t>• Сокращение времени создания презентаций до 4 мин</a:t>
             </a:r>
           </a:p>
           <a:p>
@@ -9699,7 +9638,7 @@
               <a:spcAft>
                 <a:spcPts val="300"/>
               </a:spcAft>
-              <a:defRPr sz="1406">
+              <a:defRPr sz="1800">
                 <a:solidFill>
                   <a:srgbClr val="000000"/>
                 </a:solidFill>
@@ -9709,7 +9648,7 @@
               </a:defRPr>
             </a:pPr>
             <a:r>
-              <a:rPr sz="1406">
+              <a:rPr sz="1800">
                 <a:solidFill>
                   <a:srgbClr val="000000"/>
                 </a:solidFill>
@@ -9717,15 +9656,38 @@
                 <a:ea typeface="Play"/>
                 <a:cs typeface="Play"/>
               </a:rPr>
-              <a:t>• Обеспечить инфраструктуру и интеграцию</a:t>
+              <a:t>• Увеличение количества готовых колод за тот же период</a:t>
             </a:r>
           </a:p>
+        </p:txBody>
+      </p:sp>
+      <p:sp>
+        <p:nvSpPr>
+          <p:cNvPr id="685" name="body_right"/>
+          <p:cNvSpPr txBox="1"/>
+          <p:nvPr/>
+        </p:nvSpPr>
+        <p:spPr>
+          <a:xfrm>
+            <a:off x="4583887" y="1414513"/>
+            <a:ext cx="4035247" cy="2695296"/>
+          </a:xfrm>
+          <a:prstGeom prst="rect">
+            <a:avLst/>
+          </a:prstGeom>
+          <a:noFill/>
+        </p:spPr>
+        <p:txBody>
+          <a:bodyPr wrap="square" lIns="76200" rIns="76200" tIns="50800" bIns="50800">
+            <a:spAutoFit/>
+          </a:bodyPr>
+          <a:lstStyle/>
           <a:p>
             <a:pPr algn="l">
               <a:spcAft>
                 <a:spcPts val="300"/>
               </a:spcAft>
-              <a:defRPr sz="1406">
+              <a:defRPr sz="1800">
                 <a:solidFill>
                   <a:srgbClr val="000000"/>
                 </a:solidFill>
@@ -9735,7 +9697,7 @@
               </a:defRPr>
             </a:pPr>
             <a:r>
-              <a:rPr sz="1406">
+              <a:rPr sz="1800">
                 <a:solidFill>
                   <a:srgbClr val="000000"/>
                 </a:solidFill>
@@ -9743,7 +9705,33 @@
                 <a:ea typeface="Play"/>
                 <a:cs typeface="Play"/>
               </a:rPr>
-              <a:t>• Поддерживать модель и обновления</a:t>
+              <a:t>• Снижение ошибок фирменного стиля до 3%</a:t>
+            </a:r>
+          </a:p>
+          <a:p>
+            <a:pPr algn="l">
+              <a:spcAft>
+                <a:spcPts val="300"/>
+              </a:spcAft>
+              <a:defRPr sz="1800">
+                <a:solidFill>
+                  <a:srgbClr val="000000"/>
+                </a:solidFill>
+                <a:latin typeface="Play"/>
+                <a:ea typeface="Play"/>
+                <a:cs typeface="Play"/>
+              </a:defRPr>
+            </a:pPr>
+            <a:r>
+              <a:rPr sz="1800">
+                <a:solidFill>
+                  <a:srgbClr val="000000"/>
+                </a:solidFill>
+                <a:latin typeface="Play"/>
+                <a:ea typeface="Play"/>
+                <a:cs typeface="Play"/>
+              </a:rPr>
+              <a:t>• Повышение эффективности дизайнеров, освобождение от рутинных задач</a:t>
             </a:r>
           </a:p>
         </p:txBody>
@@ -9775,7 +9763,7 @@
         <p:spPr>
           <a:xfrm>
             <a:off x="445963" y="1555901"/>
-            <a:ext cx="8300171" cy="2189031"/>
+            <a:ext cx="8300171" cy="2974022"/>
           </a:xfrm>
           <a:prstGeom prst="roundRect">
             <a:avLst/>
@@ -9856,21 +9844,21 @@
                 <a:ea typeface="Play"/>
                 <a:cs typeface="Play"/>
               </a:rPr>
-              <a:t>Вывод</a:t>
+              <a:t>Итоги</a:t>
             </a:r>
           </a:p>
         </p:txBody>
       </p:sp>
       <p:sp>
         <p:nvSpPr>
-          <p:cNvPr id="4" name="body"/>
+          <p:cNvPr id="4" name="body_left"/>
           <p:cNvSpPr txBox="1"/>
           <p:nvPr/>
         </p:nvSpPr>
         <p:spPr>
           <a:xfrm>
-            <a:off x="572963" y="2920982"/>
-            <a:ext cx="8046171" cy="696950"/>
+            <a:off x="572963" y="2518244"/>
+            <a:ext cx="3885925" cy="1905165"/>
           </a:xfrm>
           <a:prstGeom prst="rect">
             <a:avLst/>
@@ -9887,7 +9875,7 @@
               <a:spcAft>
                 <a:spcPts val="300"/>
               </a:spcAft>
-              <a:defRPr sz="1803">
+              <a:defRPr sz="1800">
                 <a:solidFill>
                   <a:srgbClr val="000000"/>
                 </a:solidFill>
@@ -9897,7 +9885,7 @@
               </a:defRPr>
             </a:pPr>
             <a:r>
-              <a:rPr sz="1803">
+              <a:rPr sz="1800">
                 <a:solidFill>
                   <a:srgbClr val="000000"/>
                 </a:solidFill>
@@ -9905,7 +9893,108 @@
                 <a:ea typeface="Play"/>
                 <a:cs typeface="Play"/>
               </a:rPr>
-              <a:t>Успешный запуск позволит ускорить создание презентаций и повысить качество</a:t>
+              <a:t>• Сервис готов к масштабированию, требуется одобрение руководства</a:t>
+            </a:r>
+          </a:p>
+          <a:p>
+            <a:pPr algn="l">
+              <a:spcAft>
+                <a:spcPts val="300"/>
+              </a:spcAft>
+              <a:defRPr sz="1800">
+                <a:solidFill>
+                  <a:srgbClr val="000000"/>
+                </a:solidFill>
+                <a:latin typeface="Play"/>
+                <a:ea typeface="Play"/>
+                <a:cs typeface="Play"/>
+              </a:defRPr>
+            </a:pPr>
+            <a:r>
+              <a:rPr sz="1800">
+                <a:solidFill>
+                  <a:srgbClr val="000000"/>
+                </a:solidFill>
+                <a:latin typeface="Play"/>
+                <a:ea typeface="Play"/>
+                <a:cs typeface="Play"/>
+              </a:rPr>
+              <a:t>• Ожидается экономия времени и повышение качества презентаций</a:t>
+            </a:r>
+          </a:p>
+        </p:txBody>
+      </p:sp>
+      <p:sp>
+        <p:nvSpPr>
+          <p:cNvPr id="5" name="body_right"/>
+          <p:cNvSpPr txBox="1"/>
+          <p:nvPr/>
+        </p:nvSpPr>
+        <p:spPr>
+          <a:xfrm>
+            <a:off x="4733208" y="2518244"/>
+            <a:ext cx="3885925" cy="1905165"/>
+          </a:xfrm>
+          <a:prstGeom prst="rect">
+            <a:avLst/>
+          </a:prstGeom>
+          <a:noFill/>
+        </p:spPr>
+        <p:txBody>
+          <a:bodyPr wrap="square" lIns="76200" rIns="76200" tIns="50800" bIns="50800">
+            <a:spAutoFit/>
+          </a:bodyPr>
+          <a:lstStyle/>
+          <a:p>
+            <a:pPr algn="l">
+              <a:spcAft>
+                <a:spcPts val="300"/>
+              </a:spcAft>
+              <a:defRPr sz="1800">
+                <a:solidFill>
+                  <a:srgbClr val="000000"/>
+                </a:solidFill>
+                <a:latin typeface="Play"/>
+                <a:ea typeface="Play"/>
+                <a:cs typeface="Play"/>
+              </a:defRPr>
+            </a:pPr>
+            <a:r>
+              <a:rPr sz="1800">
+                <a:solidFill>
+                  <a:srgbClr val="000000"/>
+                </a:solidFill>
+                <a:latin typeface="Play"/>
+                <a:ea typeface="Play"/>
+                <a:cs typeface="Play"/>
+              </a:rPr>
+              <a:t>• Пилот подтвердил работоспособность и низкие затраты</a:t>
+            </a:r>
+          </a:p>
+          <a:p>
+            <a:pPr algn="l">
+              <a:spcAft>
+                <a:spcPts val="300"/>
+              </a:spcAft>
+              <a:defRPr sz="1800">
+                <a:solidFill>
+                  <a:srgbClr val="000000"/>
+                </a:solidFill>
+                <a:latin typeface="Play"/>
+                <a:ea typeface="Play"/>
+                <a:cs typeface="Play"/>
+              </a:defRPr>
+            </a:pPr>
+            <a:r>
+              <a:rPr sz="1800">
+                <a:solidFill>
+                  <a:srgbClr val="000000"/>
+                </a:solidFill>
+                <a:latin typeface="Play"/>
+                <a:ea typeface="Play"/>
+                <a:cs typeface="Play"/>
+              </a:rPr>
+              <a:t>• Риски минимизированы благодаря аудитам и резерву</a:t>
             </a:r>
           </a:p>
         </p:txBody>

--- a/samples/VK_Tech_шаблон__split.pptx
+++ b/samples/VK_Tech_шаблон__split.pptx
@@ -261,6 +261,434 @@
 </p:presentation>
 </file>
 
+<file path=ppt/charts/chart1.xml><?xml version="1.0" encoding="utf-8"?>
+<c:chartSpace xmlns:c="http://schemas.openxmlformats.org/drawingml/2006/chart" xmlns:a="http://schemas.openxmlformats.org/drawingml/2006/main" xmlns:r="http://schemas.openxmlformats.org/officeDocument/2006/relationships">
+  <c:date1904 val="0"/>
+  <c:chart>
+    <c:autoTitleDeleted val="1"/>
+    <c:plotArea>
+      <c:barChart>
+        <c:barDir val="col"/>
+        <c:grouping val="clustered"/>
+        <c:ser>
+          <c:idx val="0"/>
+          <c:order val="0"/>
+          <c:tx>
+            <c:strRef>
+              <c:f>Sheet1!$B$1</c:f>
+              <c:strCache>
+                <c:ptCount val="1"/>
+                <c:pt idx="0">
+                  <c:v>Время, мин</c:v>
+                </c:pt>
+              </c:strCache>
+            </c:strRef>
+          </c:tx>
+          <c:spPr>
+            <a:solidFill>
+              <a:srgbClr val="0077FF"/>
+            </a:solidFill>
+            <a:ln>
+              <a:solidFill>
+                <a:srgbClr val="0077FF"/>
+              </a:solidFill>
+            </a:ln>
+          </c:spPr>
+          <c:cat>
+            <c:strRef>
+              <c:f>Sheet1!$A$2:$A$3</c:f>
+              <c:strCache>
+                <c:ptCount val="2"/>
+                <c:pt idx="0">
+                  <c:v>До</c:v>
+                </c:pt>
+                <c:pt idx="1">
+                  <c:v>После</c:v>
+                </c:pt>
+              </c:strCache>
+            </c:strRef>
+          </c:cat>
+          <c:val>
+            <c:numRef>
+              <c:f>Sheet1!$B$2:$B$3</c:f>
+              <c:numCache>
+                <c:formatCode>General</c:formatCode>
+                <c:ptCount val="2"/>
+                <c:pt idx="0">
+                  <c:v>186.0</c:v>
+                </c:pt>
+                <c:pt idx="1">
+                  <c:v>4.0</c:v>
+                </c:pt>
+              </c:numCache>
+            </c:numRef>
+          </c:val>
+        </c:ser>
+        <c:dLbls>
+          <c:numFmt formatCode="0&quot; мин&quot;" sourceLinked="0"/>
+          <c:txPr>
+            <a:bodyPr wrap="none"/>
+            <a:lstStyle/>
+            <a:p>
+              <a:pPr>
+                <a:defRPr sz="1100" b="0">
+                  <a:solidFill>
+                    <a:srgbClr val="000000"/>
+                  </a:solidFill>
+                  <a:latin typeface="Play"/>
+                  <a:ea typeface="Play"/>
+                  <a:cs typeface="Play"/>
+                </a:defRPr>
+              </a:pPr>
+            </a:p>
+          </c:txPr>
+          <c:dLblPos val="outEnd"/>
+          <c:showLegendKey val="0"/>
+          <c:showVal val="1"/>
+          <c:showCatName val="0"/>
+          <c:showSerName val="0"/>
+          <c:showPercent val="0"/>
+          <c:showBubbleSize val="0"/>
+          <c:showLeaderLines val="1"/>
+        </c:dLbls>
+        <c:gapWidth val="60"/>
+        <c:axId val="-2068027336"/>
+        <c:axId val="-2113994440"/>
+      </c:barChart>
+      <c:catAx>
+        <c:axId val="-2068027336"/>
+        <c:scaling>
+          <c:orientation val="minMax"/>
+        </c:scaling>
+        <c:delete val="0"/>
+        <c:axPos val="b"/>
+        <c:majorTickMark val="out"/>
+        <c:minorTickMark val="none"/>
+        <c:tickLblPos val="nextTo"/>
+        <c:txPr>
+          <a:bodyPr/>
+          <a:lstStyle/>
+          <a:p>
+            <a:pPr>
+              <a:defRPr sz="1100" b="0">
+                <a:solidFill>
+                  <a:srgbClr val="000000"/>
+                </a:solidFill>
+                <a:latin typeface="Play"/>
+                <a:ea typeface="Play"/>
+                <a:cs typeface="Play"/>
+              </a:defRPr>
+            </a:pPr>
+          </a:p>
+        </c:txPr>
+        <c:crossAx val="-2113994440"/>
+        <c:crosses val="autoZero"/>
+        <c:auto val="1"/>
+        <c:lblAlgn val="ctr"/>
+        <c:lblOffset val="100"/>
+        <c:noMultiLvlLbl val="0"/>
+      </c:catAx>
+      <c:valAx>
+        <c:axId val="-2113994440"/>
+        <c:scaling/>
+        <c:delete val="0"/>
+        <c:axPos val="l"/>
+        <c:majorGridlines>
+          <c:spPr>
+            <a:ln w="9525">
+              <a:solidFill>
+                <a:srgbClr val="D1D1D1"/>
+              </a:solidFill>
+            </a:ln>
+          </c:spPr>
+        </c:majorGridlines>
+        <c:title>
+          <c:tx>
+            <c:rich>
+              <a:bodyPr rot="0" vert="horz"/>
+              <a:lstStyle/>
+              <a:p>
+                <a:pPr>
+                  <a:defRPr sz="1100" b="0">
+                    <a:solidFill>
+                      <a:srgbClr val="000000"/>
+                    </a:solidFill>
+                    <a:latin typeface="Play"/>
+                    <a:ea typeface="Play"/>
+                    <a:cs typeface="Play"/>
+                  </a:defRPr>
+                </a:pPr>
+                <a:r>
+                  <a:t>Время, мин, мин</a:t>
+                </a:r>
+              </a:p>
+            </c:rich>
+          </c:tx>
+          <c:layout/>
+          <c:overlay val="0"/>
+        </c:title>
+        <c:majorTickMark val="out"/>
+        <c:minorTickMark val="none"/>
+        <c:tickLblPos val="nextTo"/>
+        <c:txPr>
+          <a:bodyPr/>
+          <a:lstStyle/>
+          <a:p>
+            <a:pPr>
+              <a:defRPr sz="1100" b="0">
+                <a:solidFill>
+                  <a:srgbClr val="000000"/>
+                </a:solidFill>
+                <a:latin typeface="Play"/>
+                <a:ea typeface="Play"/>
+                <a:cs typeface="Play"/>
+              </a:defRPr>
+            </a:pPr>
+          </a:p>
+        </c:txPr>
+        <c:crossAx val="-2068027336"/>
+        <c:crosses val="autoZero"/>
+      </c:valAx>
+    </c:plotArea>
+    <c:dispBlanksAs val="gap"/>
+  </c:chart>
+  <c:txPr>
+    <a:bodyPr/>
+    <a:lstStyle/>
+    <a:p>
+      <a:pPr>
+        <a:defRPr sz="1200" b="0">
+          <a:solidFill>
+            <a:srgbClr val="000000"/>
+          </a:solidFill>
+          <a:latin typeface="Play"/>
+          <a:ea typeface="Play"/>
+          <a:cs typeface="Play"/>
+        </a:defRPr>
+      </a:pPr>
+      <a:endParaRPr lang="en-US"/>
+    </a:p>
+  </c:txPr>
+  <c:externalData r:id="rId1">
+    <c:autoUpdate val="0"/>
+  </c:externalData>
+</c:chartSpace>
+</file>
+
+<file path=ppt/charts/chart2.xml><?xml version="1.0" encoding="utf-8"?>
+<c:chartSpace xmlns:c="http://schemas.openxmlformats.org/drawingml/2006/chart" xmlns:a="http://schemas.openxmlformats.org/drawingml/2006/main" xmlns:r="http://schemas.openxmlformats.org/officeDocument/2006/relationships">
+  <c:date1904 val="0"/>
+  <c:chart>
+    <c:autoTitleDeleted val="1"/>
+    <c:plotArea>
+      <c:barChart>
+        <c:barDir val="col"/>
+        <c:grouping val="clustered"/>
+        <c:ser>
+          <c:idx val="0"/>
+          <c:order val="0"/>
+          <c:tx>
+            <c:strRef>
+              <c:f>Sheet1!$B$1</c:f>
+              <c:strCache>
+                <c:ptCount val="1"/>
+                <c:pt idx="0">
+                  <c:v>Нарушения</c:v>
+                </c:pt>
+              </c:strCache>
+            </c:strRef>
+          </c:tx>
+          <c:spPr>
+            <a:solidFill>
+              <a:srgbClr val="0077FF"/>
+            </a:solidFill>
+            <a:ln>
+              <a:solidFill>
+                <a:srgbClr val="0077FF"/>
+              </a:solidFill>
+            </a:ln>
+          </c:spPr>
+          <c:cat>
+            <c:strRef>
+              <c:f>Sheet1!$A$2:$A$3</c:f>
+              <c:strCache>
+                <c:ptCount val="2"/>
+                <c:pt idx="0">
+                  <c:v>До</c:v>
+                </c:pt>
+                <c:pt idx="1">
+                  <c:v>После</c:v>
+                </c:pt>
+              </c:strCache>
+            </c:strRef>
+          </c:cat>
+          <c:val>
+            <c:numRef>
+              <c:f>Sheet1!$B$2:$B$3</c:f>
+              <c:numCache>
+                <c:formatCode>General</c:formatCode>
+                <c:ptCount val="2"/>
+                <c:pt idx="0">
+                  <c:v>19.0</c:v>
+                </c:pt>
+                <c:pt idx="1">
+                  <c:v>2.0</c:v>
+                </c:pt>
+              </c:numCache>
+            </c:numRef>
+          </c:val>
+        </c:ser>
+        <c:dLbls>
+          <c:numFmt formatCode="0&quot; кол-во&quot;" sourceLinked="0"/>
+          <c:txPr>
+            <a:bodyPr wrap="none"/>
+            <a:lstStyle/>
+            <a:p>
+              <a:pPr>
+                <a:defRPr sz="1100" b="0">
+                  <a:solidFill>
+                    <a:srgbClr val="000000"/>
+                  </a:solidFill>
+                  <a:latin typeface="Play"/>
+                  <a:ea typeface="Play"/>
+                  <a:cs typeface="Play"/>
+                </a:defRPr>
+              </a:pPr>
+            </a:p>
+          </c:txPr>
+          <c:dLblPos val="outEnd"/>
+          <c:showLegendKey val="0"/>
+          <c:showVal val="1"/>
+          <c:showCatName val="0"/>
+          <c:showSerName val="0"/>
+          <c:showPercent val="0"/>
+          <c:showBubbleSize val="0"/>
+          <c:showLeaderLines val="1"/>
+        </c:dLbls>
+        <c:gapWidth val="60"/>
+        <c:axId val="-2068027336"/>
+        <c:axId val="-2113994440"/>
+      </c:barChart>
+      <c:catAx>
+        <c:axId val="-2068027336"/>
+        <c:scaling>
+          <c:orientation val="minMax"/>
+        </c:scaling>
+        <c:delete val="0"/>
+        <c:axPos val="b"/>
+        <c:majorTickMark val="out"/>
+        <c:minorTickMark val="none"/>
+        <c:tickLblPos val="nextTo"/>
+        <c:txPr>
+          <a:bodyPr/>
+          <a:lstStyle/>
+          <a:p>
+            <a:pPr>
+              <a:defRPr sz="1100" b="0">
+                <a:solidFill>
+                  <a:srgbClr val="000000"/>
+                </a:solidFill>
+                <a:latin typeface="Play"/>
+                <a:ea typeface="Play"/>
+                <a:cs typeface="Play"/>
+              </a:defRPr>
+            </a:pPr>
+          </a:p>
+        </c:txPr>
+        <c:crossAx val="-2113994440"/>
+        <c:crosses val="autoZero"/>
+        <c:auto val="1"/>
+        <c:lblAlgn val="ctr"/>
+        <c:lblOffset val="100"/>
+        <c:noMultiLvlLbl val="0"/>
+      </c:catAx>
+      <c:valAx>
+        <c:axId val="-2113994440"/>
+        <c:scaling/>
+        <c:delete val="0"/>
+        <c:axPos val="l"/>
+        <c:majorGridlines>
+          <c:spPr>
+            <a:ln w="9525">
+              <a:solidFill>
+                <a:srgbClr val="D1D1D1"/>
+              </a:solidFill>
+            </a:ln>
+          </c:spPr>
+        </c:majorGridlines>
+        <c:title>
+          <c:tx>
+            <c:rich>
+              <a:bodyPr rot="0" vert="horz"/>
+              <a:lstStyle/>
+              <a:p>
+                <a:pPr>
+                  <a:defRPr sz="1100" b="0">
+                    <a:solidFill>
+                      <a:srgbClr val="000000"/>
+                    </a:solidFill>
+                    <a:latin typeface="Play"/>
+                    <a:ea typeface="Play"/>
+                    <a:cs typeface="Play"/>
+                  </a:defRPr>
+                </a:pPr>
+                <a:r>
+                  <a:t>Нарушения, кол-во</a:t>
+                </a:r>
+              </a:p>
+            </c:rich>
+          </c:tx>
+          <c:layout/>
+          <c:overlay val="0"/>
+        </c:title>
+        <c:majorTickMark val="out"/>
+        <c:minorTickMark val="none"/>
+        <c:tickLblPos val="nextTo"/>
+        <c:txPr>
+          <a:bodyPr/>
+          <a:lstStyle/>
+          <a:p>
+            <a:pPr>
+              <a:defRPr sz="1100" b="0">
+                <a:solidFill>
+                  <a:srgbClr val="000000"/>
+                </a:solidFill>
+                <a:latin typeface="Play"/>
+                <a:ea typeface="Play"/>
+                <a:cs typeface="Play"/>
+              </a:defRPr>
+            </a:pPr>
+          </a:p>
+        </c:txPr>
+        <c:crossAx val="-2068027336"/>
+        <c:crosses val="autoZero"/>
+      </c:valAx>
+    </c:plotArea>
+    <c:dispBlanksAs val="gap"/>
+  </c:chart>
+  <c:txPr>
+    <a:bodyPr/>
+    <a:lstStyle/>
+    <a:p>
+      <a:pPr>
+        <a:defRPr sz="1200" b="0">
+          <a:solidFill>
+            <a:srgbClr val="000000"/>
+          </a:solidFill>
+          <a:latin typeface="Play"/>
+          <a:ea typeface="Play"/>
+          <a:cs typeface="Play"/>
+        </a:defRPr>
+      </a:pPr>
+      <a:endParaRPr lang="en-US"/>
+    </a:p>
+  </c:txPr>
+  <c:externalData r:id="rId1">
+    <c:autoUpdate val="0"/>
+  </c:externalData>
+</c:chartSpace>
+</file>
+
 <file path=ppt/notesMasters/notesMaster1.xml><?xml version="1.0" encoding="utf-8"?>
 <p:notesMaster xmlns:a="http://schemas.openxmlformats.org/drawingml/2006/main" xmlns:r="http://schemas.openxmlformats.org/officeDocument/2006/relationships" xmlns:mc="http://schemas.openxmlformats.org/markup-compatibility/2006" xmlns:mv="urn:schemas-microsoft-com:mac:vml" xmlns:p="http://schemas.openxmlformats.org/presentationml/2006/main" xmlns:c="http://schemas.openxmlformats.org/drawingml/2006/chart" xmlns:dgm="http://schemas.openxmlformats.org/drawingml/2006/diagram" xmlns:o="urn:schemas-microsoft-com:office:office" xmlns:v="urn:schemas-microsoft-com:vml" xmlns:pvml="urn:schemas-microsoft-com:office:powerpoint" xmlns:com="http://schemas.openxmlformats.org/drawingml/2006/compatibility" xmlns:p14="http://schemas.microsoft.com/office/powerpoint/2010/main" xmlns:p15="http://schemas.microsoft.com/office/powerpoint/2012/main" xmlns:ahyp="http://schemas.microsoft.com/office/drawing/2018/hyperlinkcolor">
   <p:cSld>
@@ -5369,19 +5797,23 @@
       <p:grpSpPr/>
       <p:sp>
         <p:nvSpPr>
-          <p:cNvPr id="662" name="Google Shape;662;p55"/>
+          <p:cNvPr id="1027" name="Google Shape;1027;p65"/>
           <p:cNvSpPr/>
           <p:nvPr/>
         </p:nvSpPr>
         <p:spPr>
           <a:xfrm>
-            <a:off x="8667705" y="4666977"/>
-            <a:ext cx="190499" cy="190475"/>
+            <a:off x="6064222" y="1209852"/>
+            <a:ext cx="2793985" cy="3014270"/>
           </a:xfrm>
-          <a:prstGeom prst="rect">
-            <a:avLst/>
+          <a:prstGeom prst="roundRect">
+            <a:avLst>
+              <a:gd fmla="val 3436" name="adj"/>
+            </a:avLst>
           </a:prstGeom>
-          <a:noFill/>
+          <a:solidFill>
+            <a:schemeClr val="lt2"/>
+          </a:solidFill>
           <a:ln>
             <a:noFill/>
           </a:ln>
@@ -5410,7 +5842,97 @@
       </p:sp>
       <p:sp>
         <p:nvSpPr>
-          <p:cNvPr id="663" name="Google Shape;663;p55"/>
+          <p:cNvPr id="1029" name="Google Shape;1029;p65"/>
+          <p:cNvSpPr/>
+          <p:nvPr/>
+        </p:nvSpPr>
+        <p:spPr>
+          <a:xfrm>
+            <a:off x="3174981" y="1209852"/>
+            <a:ext cx="2793985" cy="3014270"/>
+          </a:xfrm>
+          <a:prstGeom prst="roundRect">
+            <a:avLst>
+              <a:gd fmla="val 3436" name="adj"/>
+            </a:avLst>
+          </a:prstGeom>
+          <a:solidFill>
+            <a:schemeClr val="lt2"/>
+          </a:solidFill>
+          <a:ln>
+            <a:noFill/>
+          </a:ln>
+        </p:spPr>
+        <p:txBody>
+          <a:bodyPr anchorCtr="0" anchor="ctr" bIns="91425" lIns="91425" spcFirstLastPara="1" rIns="91425" wrap="square" tIns="91425">
+            <a:noAutofit/>
+          </a:bodyPr>
+          <a:lstStyle/>
+          <a:p>
+            <a:pPr indent="0" lvl="0" marL="0" rtl="0" algn="l">
+              <a:spcBef>
+                <a:spcPts val="0"/>
+              </a:spcBef>
+              <a:spcAft>
+                <a:spcPts val="0"/>
+              </a:spcAft>
+              <a:buNone/>
+            </a:pPr>
+            <a:r>
+              <a:t/>
+            </a:r>
+            <a:endParaRPr/>
+          </a:p>
+        </p:txBody>
+      </p:sp>
+      <p:sp>
+        <p:nvSpPr>
+          <p:cNvPr id="1031" name="Google Shape;1031;p65"/>
+          <p:cNvSpPr/>
+          <p:nvPr/>
+        </p:nvSpPr>
+        <p:spPr>
+          <a:xfrm>
+            <a:off x="285749" y="1209852"/>
+            <a:ext cx="2793985" cy="3014270"/>
+          </a:xfrm>
+          <a:prstGeom prst="roundRect">
+            <a:avLst>
+              <a:gd fmla="val 3436" name="adj"/>
+            </a:avLst>
+          </a:prstGeom>
+          <a:solidFill>
+            <a:schemeClr val="lt2"/>
+          </a:solidFill>
+          <a:ln>
+            <a:noFill/>
+          </a:ln>
+        </p:spPr>
+        <p:txBody>
+          <a:bodyPr anchorCtr="0" anchor="ctr" bIns="91425" lIns="91425" spcFirstLastPara="1" rIns="91425" wrap="square" tIns="91425">
+            <a:noAutofit/>
+          </a:bodyPr>
+          <a:lstStyle/>
+          <a:p>
+            <a:pPr indent="0" lvl="0" marL="0" rtl="0" algn="l">
+              <a:spcBef>
+                <a:spcPts val="0"/>
+              </a:spcBef>
+              <a:spcAft>
+                <a:spcPts val="0"/>
+              </a:spcAft>
+              <a:buNone/>
+            </a:pPr>
+            <a:r>
+              <a:t/>
+            </a:r>
+            <a:endParaRPr/>
+          </a:p>
+        </p:txBody>
+      </p:sp>
+      <p:sp>
+        <p:nvSpPr>
+          <p:cNvPr id="1032" name="Google Shape;1032;p65"/>
           <p:cNvSpPr/>
           <p:nvPr/>
         </p:nvSpPr>
@@ -5451,7 +5973,7 @@
       </p:sp>
       <p:sp>
         <p:nvSpPr>
-          <p:cNvPr id="664" name="Google Shape;664;p55"/>
+          <p:cNvPr id="1033" name="Google Shape;1033;p65"/>
           <p:cNvSpPr/>
           <p:nvPr/>
         </p:nvSpPr>
@@ -5492,367 +6014,7 @@
       </p:sp>
       <p:sp>
         <p:nvSpPr>
-          <p:cNvPr id="665" name="Google Shape;665;p55"/>
-          <p:cNvSpPr/>
-          <p:nvPr/>
-        </p:nvSpPr>
-        <p:spPr>
-          <a:xfrm>
-            <a:off x="285749" y="1209852"/>
-            <a:ext cx="2071677" cy="3014270"/>
-          </a:xfrm>
-          <a:prstGeom prst="roundRect">
-            <a:avLst>
-              <a:gd fmla="val 4634" name="adj"/>
-            </a:avLst>
-          </a:prstGeom>
-          <a:solidFill>
-            <a:schemeClr val="lt2"/>
-          </a:solidFill>
-          <a:ln>
-            <a:noFill/>
-          </a:ln>
-        </p:spPr>
-        <p:txBody>
-          <a:bodyPr anchorCtr="0" anchor="ctr" bIns="91425" lIns="91425" spcFirstLastPara="1" rIns="91425" wrap="square" tIns="91425">
-            <a:noAutofit/>
-          </a:bodyPr>
-          <a:lstStyle/>
-          <a:p>
-            <a:pPr indent="0" lvl="0" marL="0" rtl="0" algn="l">
-              <a:spcBef>
-                <a:spcPts val="0"/>
-              </a:spcBef>
-              <a:spcAft>
-                <a:spcPts val="0"/>
-              </a:spcAft>
-              <a:buNone/>
-            </a:pPr>
-            <a:r>
-              <a:t/>
-            </a:r>
-            <a:endParaRPr/>
-          </a:p>
-        </p:txBody>
-      </p:sp>
-      <p:sp>
-        <p:nvSpPr>
-          <p:cNvPr id="667" name="Google Shape;667;p55"/>
-          <p:cNvSpPr/>
-          <p:nvPr/>
-        </p:nvSpPr>
-        <p:spPr>
-          <a:xfrm>
-            <a:off x="438148" y="1362233"/>
-            <a:ext cx="76199" cy="76190"/>
-          </a:xfrm>
-          <a:prstGeom prst="roundRect">
-            <a:avLst>
-              <a:gd fmla="val 31500" name="adj"/>
-            </a:avLst>
-          </a:prstGeom>
-          <a:solidFill>
-            <a:srgbClr val="0077FF"/>
-          </a:solidFill>
-          <a:ln>
-            <a:noFill/>
-          </a:ln>
-        </p:spPr>
-        <p:txBody>
-          <a:bodyPr anchorCtr="0" anchor="ctr" bIns="91425" lIns="91425" spcFirstLastPara="1" rIns="91425" wrap="square" tIns="91425">
-            <a:noAutofit/>
-          </a:bodyPr>
-          <a:lstStyle/>
-          <a:p>
-            <a:pPr indent="0" lvl="0" marL="0" rtl="0" algn="l">
-              <a:spcBef>
-                <a:spcPts val="0"/>
-              </a:spcBef>
-              <a:spcAft>
-                <a:spcPts val="0"/>
-              </a:spcAft>
-              <a:buNone/>
-            </a:pPr>
-            <a:r>
-              <a:t/>
-            </a:r>
-            <a:endParaRPr/>
-          </a:p>
-        </p:txBody>
-      </p:sp>
-      <p:sp>
-        <p:nvSpPr>
-          <p:cNvPr id="670" name="Google Shape;670;p55"/>
-          <p:cNvSpPr/>
-          <p:nvPr/>
-        </p:nvSpPr>
-        <p:spPr>
-          <a:xfrm>
-            <a:off x="2452675" y="1209852"/>
-            <a:ext cx="2071677" cy="3014270"/>
-          </a:xfrm>
-          <a:prstGeom prst="roundRect">
-            <a:avLst>
-              <a:gd fmla="val 4634" name="adj"/>
-            </a:avLst>
-          </a:prstGeom>
-          <a:solidFill>
-            <a:schemeClr val="lt2"/>
-          </a:solidFill>
-          <a:ln>
-            <a:noFill/>
-          </a:ln>
-        </p:spPr>
-        <p:txBody>
-          <a:bodyPr anchorCtr="0" anchor="ctr" bIns="91425" lIns="91425" spcFirstLastPara="1" rIns="91425" wrap="square" tIns="91425">
-            <a:noAutofit/>
-          </a:bodyPr>
-          <a:lstStyle/>
-          <a:p>
-            <a:pPr indent="0" lvl="0" marL="0" rtl="0" algn="l">
-              <a:spcBef>
-                <a:spcPts val="0"/>
-              </a:spcBef>
-              <a:spcAft>
-                <a:spcPts val="0"/>
-              </a:spcAft>
-              <a:buNone/>
-            </a:pPr>
-            <a:r>
-              <a:t/>
-            </a:r>
-            <a:endParaRPr/>
-          </a:p>
-        </p:txBody>
-      </p:sp>
-      <p:sp>
-        <p:nvSpPr>
-          <p:cNvPr id="672" name="Google Shape;672;p55"/>
-          <p:cNvSpPr/>
-          <p:nvPr/>
-        </p:nvSpPr>
-        <p:spPr>
-          <a:xfrm>
-            <a:off x="2605074" y="1362233"/>
-            <a:ext cx="76199" cy="76190"/>
-          </a:xfrm>
-          <a:prstGeom prst="roundRect">
-            <a:avLst>
-              <a:gd fmla="val 31500" name="adj"/>
-            </a:avLst>
-          </a:prstGeom>
-          <a:solidFill>
-            <a:srgbClr val="0077FF"/>
-          </a:solidFill>
-          <a:ln>
-            <a:noFill/>
-          </a:ln>
-        </p:spPr>
-        <p:txBody>
-          <a:bodyPr anchorCtr="0" anchor="ctr" bIns="91425" lIns="91425" spcFirstLastPara="1" rIns="91425" wrap="square" tIns="91425">
-            <a:noAutofit/>
-          </a:bodyPr>
-          <a:lstStyle/>
-          <a:p>
-            <a:pPr indent="0" lvl="0" marL="0" rtl="0" algn="l">
-              <a:spcBef>
-                <a:spcPts val="0"/>
-              </a:spcBef>
-              <a:spcAft>
-                <a:spcPts val="0"/>
-              </a:spcAft>
-              <a:buNone/>
-            </a:pPr>
-            <a:r>
-              <a:t/>
-            </a:r>
-            <a:endParaRPr/>
-          </a:p>
-        </p:txBody>
-      </p:sp>
-      <p:sp>
-        <p:nvSpPr>
-          <p:cNvPr id="675" name="Google Shape;675;p55"/>
-          <p:cNvSpPr/>
-          <p:nvPr/>
-        </p:nvSpPr>
-        <p:spPr>
-          <a:xfrm>
-            <a:off x="4619601" y="1209852"/>
-            <a:ext cx="2071677" cy="3014270"/>
-          </a:xfrm>
-          <a:prstGeom prst="roundRect">
-            <a:avLst>
-              <a:gd fmla="val 4634" name="adj"/>
-            </a:avLst>
-          </a:prstGeom>
-          <a:solidFill>
-            <a:schemeClr val="lt2"/>
-          </a:solidFill>
-          <a:ln>
-            <a:noFill/>
-          </a:ln>
-        </p:spPr>
-        <p:txBody>
-          <a:bodyPr anchorCtr="0" anchor="ctr" bIns="91425" lIns="91425" spcFirstLastPara="1" rIns="91425" wrap="square" tIns="91425">
-            <a:noAutofit/>
-          </a:bodyPr>
-          <a:lstStyle/>
-          <a:p>
-            <a:pPr indent="0" lvl="0" marL="0" rtl="0" algn="l">
-              <a:spcBef>
-                <a:spcPts val="0"/>
-              </a:spcBef>
-              <a:spcAft>
-                <a:spcPts val="0"/>
-              </a:spcAft>
-              <a:buNone/>
-            </a:pPr>
-            <a:r>
-              <a:t/>
-            </a:r>
-            <a:endParaRPr/>
-          </a:p>
-        </p:txBody>
-      </p:sp>
-      <p:sp>
-        <p:nvSpPr>
-          <p:cNvPr id="677" name="Google Shape;677;p55"/>
-          <p:cNvSpPr/>
-          <p:nvPr/>
-        </p:nvSpPr>
-        <p:spPr>
-          <a:xfrm>
-            <a:off x="4772001" y="1362233"/>
-            <a:ext cx="76199" cy="76190"/>
-          </a:xfrm>
-          <a:prstGeom prst="roundRect">
-            <a:avLst>
-              <a:gd fmla="val 31500" name="adj"/>
-            </a:avLst>
-          </a:prstGeom>
-          <a:solidFill>
-            <a:srgbClr val="0077FF"/>
-          </a:solidFill>
-          <a:ln>
-            <a:noFill/>
-          </a:ln>
-        </p:spPr>
-        <p:txBody>
-          <a:bodyPr anchorCtr="0" anchor="ctr" bIns="91425" lIns="91425" spcFirstLastPara="1" rIns="91425" wrap="square" tIns="91425">
-            <a:noAutofit/>
-          </a:bodyPr>
-          <a:lstStyle/>
-          <a:p>
-            <a:pPr indent="0" lvl="0" marL="0" rtl="0" algn="l">
-              <a:spcBef>
-                <a:spcPts val="0"/>
-              </a:spcBef>
-              <a:spcAft>
-                <a:spcPts val="0"/>
-              </a:spcAft>
-              <a:buNone/>
-            </a:pPr>
-            <a:r>
-              <a:t/>
-            </a:r>
-            <a:endParaRPr/>
-          </a:p>
-        </p:txBody>
-      </p:sp>
-      <p:sp>
-        <p:nvSpPr>
-          <p:cNvPr id="680" name="Google Shape;680;p55"/>
-          <p:cNvSpPr/>
-          <p:nvPr/>
-        </p:nvSpPr>
-        <p:spPr>
-          <a:xfrm>
-            <a:off x="6786527" y="1209852"/>
-            <a:ext cx="2071677" cy="3014270"/>
-          </a:xfrm>
-          <a:prstGeom prst="roundRect">
-            <a:avLst>
-              <a:gd fmla="val 4634" name="adj"/>
-            </a:avLst>
-          </a:prstGeom>
-          <a:solidFill>
-            <a:schemeClr val="lt2"/>
-          </a:solidFill>
-          <a:ln>
-            <a:noFill/>
-          </a:ln>
-        </p:spPr>
-        <p:txBody>
-          <a:bodyPr anchorCtr="0" anchor="ctr" bIns="91425" lIns="91425" spcFirstLastPara="1" rIns="91425" wrap="square" tIns="91425">
-            <a:noAutofit/>
-          </a:bodyPr>
-          <a:lstStyle/>
-          <a:p>
-            <a:pPr indent="0" lvl="0" marL="0" rtl="0" algn="l">
-              <a:spcBef>
-                <a:spcPts val="0"/>
-              </a:spcBef>
-              <a:spcAft>
-                <a:spcPts val="0"/>
-              </a:spcAft>
-              <a:buNone/>
-            </a:pPr>
-            <a:r>
-              <a:t/>
-            </a:r>
-            <a:endParaRPr/>
-          </a:p>
-        </p:txBody>
-      </p:sp>
-      <p:sp>
-        <p:nvSpPr>
-          <p:cNvPr id="682" name="Google Shape;682;p55"/>
-          <p:cNvSpPr/>
-          <p:nvPr/>
-        </p:nvSpPr>
-        <p:spPr>
-          <a:xfrm>
-            <a:off x="6938927" y="1362233"/>
-            <a:ext cx="76199" cy="76190"/>
-          </a:xfrm>
-          <a:prstGeom prst="roundRect">
-            <a:avLst>
-              <a:gd fmla="val 31500" name="adj"/>
-            </a:avLst>
-          </a:prstGeom>
-          <a:solidFill>
-            <a:srgbClr val="0077FF"/>
-          </a:solidFill>
-          <a:ln>
-            <a:noFill/>
-          </a:ln>
-        </p:spPr>
-        <p:txBody>
-          <a:bodyPr anchorCtr="0" anchor="ctr" bIns="91425" lIns="91425" spcFirstLastPara="1" rIns="91425" wrap="square" tIns="91425">
-            <a:noAutofit/>
-          </a:bodyPr>
-          <a:lstStyle/>
-          <a:p>
-            <a:pPr indent="0" lvl="0" marL="0" rtl="0" algn="l">
-              <a:spcBef>
-                <a:spcPts val="0"/>
-              </a:spcBef>
-              <a:spcAft>
-                <a:spcPts val="0"/>
-              </a:spcAft>
-              <a:buNone/>
-            </a:pPr>
-            <a:r>
-              <a:t/>
-            </a:r>
-            <a:endParaRPr/>
-          </a:p>
-        </p:txBody>
-      </p:sp>
-      <p:sp>
-        <p:nvSpPr>
-          <p:cNvPr id="683" name="title"/>
+          <p:cNvPr id="1034" name="title"/>
           <p:cNvSpPr txBox="1"/>
           <p:nvPr/>
         </p:nvSpPr>
@@ -5894,21 +6056,21 @@
                 <a:ea typeface="Play"/>
                 <a:cs typeface="Play"/>
               </a:rPr>
-              <a:t>Контекст и возможность</a:t>
+              <a:t>Сейчас: 42 колоды, 186 мин сборки</a:t>
             </a:r>
           </a:p>
         </p:txBody>
       </p:sp>
       <p:sp>
         <p:nvSpPr>
-          <p:cNvPr id="684" name="body_left"/>
+          <p:cNvPr id="1035" name="body"/>
           <p:cNvSpPr txBox="1"/>
           <p:nvPr/>
         </p:nvSpPr>
         <p:spPr>
           <a:xfrm>
             <a:off x="274320" y="1414513"/>
-            <a:ext cx="4035247" cy="2695296"/>
+            <a:ext cx="8344814" cy="1046136"/>
           </a:xfrm>
           <a:prstGeom prst="rect">
             <a:avLst/>
@@ -5943,7 +6105,7 @@
                 <a:ea typeface="Play"/>
                 <a:cs typeface="Play"/>
               </a:rPr>
-              <a:t>• Сборка одной презентации 12 слайдов занимает 186 минут</a:t>
+              <a:t>• 42 колоды, 186 мин сборки одной презентации</a:t>
             </a:r>
           </a:p>
           <a:p>
@@ -5969,32 +6131,9 @@
                 <a:ea typeface="Play"/>
                 <a:cs typeface="Play"/>
               </a:rPr>
-              <a:t>• Дополнительно 74 минуты на правки после ревью дизайнера</a:t>
+              <a:t>• 74 мин правок после ревью дизайнера</a:t>
             </a:r>
           </a:p>
-        </p:txBody>
-      </p:sp>
-      <p:sp>
-        <p:nvSpPr>
-          <p:cNvPr id="685" name="body_right"/>
-          <p:cNvSpPr txBox="1"/>
-          <p:nvPr/>
-        </p:nvSpPr>
-        <p:spPr>
-          <a:xfrm>
-            <a:off x="4583887" y="1414513"/>
-            <a:ext cx="4035247" cy="2695296"/>
-          </a:xfrm>
-          <a:prstGeom prst="rect">
-            <a:avLst/>
-          </a:prstGeom>
-          <a:noFill/>
-        </p:spPr>
-        <p:txBody>
-          <a:bodyPr wrap="square" lIns="76200" rIns="76200" tIns="50800" bIns="50800">
-            <a:spAutoFit/>
-          </a:bodyPr>
-          <a:lstStyle/>
           <a:p>
             <a:pPr algn="l">
               <a:spcAft>
@@ -6018,33 +6157,7 @@
                 <a:ea typeface="Play"/>
                 <a:cs typeface="Play"/>
               </a:rPr>
-              <a:t>• 19 из 42 колод нарушают фирменный стиль</a:t>
-            </a:r>
-          </a:p>
-          <a:p>
-            <a:pPr algn="l">
-              <a:spcAft>
-                <a:spcPts val="300"/>
-              </a:spcAft>
-              <a:defRPr sz="1800">
-                <a:solidFill>
-                  <a:srgbClr val="000000"/>
-                </a:solidFill>
-                <a:latin typeface="Play"/>
-                <a:ea typeface="Play"/>
-                <a:cs typeface="Play"/>
-              </a:defRPr>
-            </a:pPr>
-            <a:r>
-              <a:rPr sz="1800">
-                <a:solidFill>
-                  <a:srgbClr val="000000"/>
-                </a:solidFill>
-                <a:latin typeface="Play"/>
-                <a:ea typeface="Play"/>
-                <a:cs typeface="Play"/>
-              </a:rPr>
-              <a:t>• Дизайн‑отдел из 4 человек закрывает 11 запросов, ожидание 6 дней</a:t>
+              <a:t>• 19 из 42 колод нарушили фирменный стиль</a:t>
             </a:r>
           </a:p>
         </p:txBody>
@@ -6110,6 +6223,88 @@
       </p:sp>
       <p:sp>
         <p:nvSpPr>
+          <p:cNvPr id="533" name="Google Shape;533;p53"/>
+          <p:cNvSpPr/>
+          <p:nvPr/>
+        </p:nvSpPr>
+        <p:spPr>
+          <a:xfrm>
+            <a:off x="303214" y="1022533"/>
+            <a:ext cx="1395256" cy="1433588"/>
+          </a:xfrm>
+          <a:prstGeom prst="rect">
+            <a:avLst/>
+          </a:prstGeom>
+          <a:noFill/>
+          <a:ln>
+            <a:noFill/>
+          </a:ln>
+        </p:spPr>
+        <p:txBody>
+          <a:bodyPr anchorCtr="0" anchor="ctr" bIns="91425" lIns="91425" spcFirstLastPara="1" rIns="91425" wrap="square" tIns="91425">
+            <a:noAutofit/>
+          </a:bodyPr>
+          <a:lstStyle/>
+          <a:p>
+            <a:pPr indent="0" lvl="0" marL="0" rtl="0" algn="l">
+              <a:spcBef>
+                <a:spcPts val="0"/>
+              </a:spcBef>
+              <a:spcAft>
+                <a:spcPts val="0"/>
+              </a:spcAft>
+              <a:buNone/>
+            </a:pPr>
+            <a:r>
+              <a:t/>
+            </a:r>
+            <a:endParaRPr/>
+          </a:p>
+        </p:txBody>
+      </p:sp>
+      <p:sp>
+        <p:nvSpPr>
+          <p:cNvPr id="537" name="Google Shape;537;p53"/>
+          <p:cNvSpPr/>
+          <p:nvPr/>
+        </p:nvSpPr>
+        <p:spPr>
+          <a:xfrm>
+            <a:off x="2067385" y="1022533"/>
+            <a:ext cx="1395256" cy="1433588"/>
+          </a:xfrm>
+          <a:prstGeom prst="rect">
+            <a:avLst/>
+          </a:prstGeom>
+          <a:noFill/>
+          <a:ln>
+            <a:noFill/>
+          </a:ln>
+        </p:spPr>
+        <p:txBody>
+          <a:bodyPr anchorCtr="0" anchor="ctr" bIns="91425" lIns="91425" spcFirstLastPara="1" rIns="91425" wrap="square" tIns="91425">
+            <a:noAutofit/>
+          </a:bodyPr>
+          <a:lstStyle/>
+          <a:p>
+            <a:pPr indent="0" lvl="0" marL="0" rtl="0" algn="l">
+              <a:spcBef>
+                <a:spcPts val="0"/>
+              </a:spcBef>
+              <a:spcAft>
+                <a:spcPts val="0"/>
+              </a:spcAft>
+              <a:buNone/>
+            </a:pPr>
+            <a:r>
+              <a:t/>
+            </a:r>
+            <a:endParaRPr/>
+          </a:p>
+        </p:txBody>
+      </p:sp>
+      <p:sp>
+        <p:nvSpPr>
           <p:cNvPr id="541" name="Google Shape;541;p53"/>
           <p:cNvSpPr/>
           <p:nvPr/>
@@ -6151,6 +6346,88 @@
       </p:sp>
       <p:sp>
         <p:nvSpPr>
+          <p:cNvPr id="545" name="Google Shape;545;p53"/>
+          <p:cNvSpPr/>
+          <p:nvPr/>
+        </p:nvSpPr>
+        <p:spPr>
+          <a:xfrm>
+            <a:off x="5595727" y="1022533"/>
+            <a:ext cx="1395256" cy="1433588"/>
+          </a:xfrm>
+          <a:prstGeom prst="rect">
+            <a:avLst/>
+          </a:prstGeom>
+          <a:noFill/>
+          <a:ln>
+            <a:noFill/>
+          </a:ln>
+        </p:spPr>
+        <p:txBody>
+          <a:bodyPr anchorCtr="0" anchor="ctr" bIns="91425" lIns="91425" spcFirstLastPara="1" rIns="91425" wrap="square" tIns="91425">
+            <a:noAutofit/>
+          </a:bodyPr>
+          <a:lstStyle/>
+          <a:p>
+            <a:pPr indent="0" lvl="0" marL="0" rtl="0" algn="l">
+              <a:spcBef>
+                <a:spcPts val="0"/>
+              </a:spcBef>
+              <a:spcAft>
+                <a:spcPts val="0"/>
+              </a:spcAft>
+              <a:buNone/>
+            </a:pPr>
+            <a:r>
+              <a:t/>
+            </a:r>
+            <a:endParaRPr/>
+          </a:p>
+        </p:txBody>
+      </p:sp>
+      <p:sp>
+        <p:nvSpPr>
+          <p:cNvPr id="549" name="Google Shape;549;p53"/>
+          <p:cNvSpPr/>
+          <p:nvPr/>
+        </p:nvSpPr>
+        <p:spPr>
+          <a:xfrm>
+            <a:off x="7359897" y="1022533"/>
+            <a:ext cx="1395256" cy="1433588"/>
+          </a:xfrm>
+          <a:prstGeom prst="rect">
+            <a:avLst/>
+          </a:prstGeom>
+          <a:noFill/>
+          <a:ln>
+            <a:noFill/>
+          </a:ln>
+        </p:spPr>
+        <p:txBody>
+          <a:bodyPr anchorCtr="0" anchor="ctr" bIns="91425" lIns="91425" spcFirstLastPara="1" rIns="91425" wrap="square" tIns="91425">
+            <a:noAutofit/>
+          </a:bodyPr>
+          <a:lstStyle/>
+          <a:p>
+            <a:pPr indent="0" lvl="0" marL="0" rtl="0" algn="l">
+              <a:spcBef>
+                <a:spcPts val="0"/>
+              </a:spcBef>
+              <a:spcAft>
+                <a:spcPts val="0"/>
+              </a:spcAft>
+              <a:buNone/>
+            </a:pPr>
+            <a:r>
+              <a:t/>
+            </a:r>
+            <a:endParaRPr/>
+          </a:p>
+        </p:txBody>
+      </p:sp>
+      <p:sp>
+        <p:nvSpPr>
           <p:cNvPr id="553" name="Google Shape;553;p53"/>
           <p:cNvSpPr/>
           <p:nvPr/>
@@ -6233,7 +6510,212 @@
       </p:sp>
       <p:sp>
         <p:nvSpPr>
-          <p:cNvPr id="555" name="title"/>
+          <p:cNvPr id="555" name="Google Shape;555;p53"/>
+          <p:cNvSpPr/>
+          <p:nvPr/>
+        </p:nvSpPr>
+        <p:spPr>
+          <a:xfrm>
+            <a:off x="303214" y="2797849"/>
+            <a:ext cx="1395256" cy="1433588"/>
+          </a:xfrm>
+          <a:prstGeom prst="rect">
+            <a:avLst/>
+          </a:prstGeom>
+          <a:noFill/>
+          <a:ln>
+            <a:noFill/>
+          </a:ln>
+        </p:spPr>
+        <p:txBody>
+          <a:bodyPr anchorCtr="0" anchor="ctr" bIns="91425" lIns="91425" spcFirstLastPara="1" rIns="91425" wrap="square" tIns="91425">
+            <a:noAutofit/>
+          </a:bodyPr>
+          <a:lstStyle/>
+          <a:p>
+            <a:pPr indent="0" lvl="0" marL="0" rtl="0" algn="l">
+              <a:spcBef>
+                <a:spcPts val="0"/>
+              </a:spcBef>
+              <a:spcAft>
+                <a:spcPts val="0"/>
+              </a:spcAft>
+              <a:buNone/>
+            </a:pPr>
+            <a:r>
+              <a:t/>
+            </a:r>
+            <a:endParaRPr/>
+          </a:p>
+        </p:txBody>
+      </p:sp>
+      <p:sp>
+        <p:nvSpPr>
+          <p:cNvPr id="559" name="Google Shape;559;p53"/>
+          <p:cNvSpPr/>
+          <p:nvPr/>
+        </p:nvSpPr>
+        <p:spPr>
+          <a:xfrm>
+            <a:off x="2067385" y="2797849"/>
+            <a:ext cx="1395256" cy="1433588"/>
+          </a:xfrm>
+          <a:prstGeom prst="rect">
+            <a:avLst/>
+          </a:prstGeom>
+          <a:noFill/>
+          <a:ln>
+            <a:noFill/>
+          </a:ln>
+        </p:spPr>
+        <p:txBody>
+          <a:bodyPr anchorCtr="0" anchor="ctr" bIns="91425" lIns="91425" spcFirstLastPara="1" rIns="91425" wrap="square" tIns="91425">
+            <a:noAutofit/>
+          </a:bodyPr>
+          <a:lstStyle/>
+          <a:p>
+            <a:pPr indent="0" lvl="0" marL="0" rtl="0" algn="l">
+              <a:spcBef>
+                <a:spcPts val="0"/>
+              </a:spcBef>
+              <a:spcAft>
+                <a:spcPts val="0"/>
+              </a:spcAft>
+              <a:buNone/>
+            </a:pPr>
+            <a:r>
+              <a:t/>
+            </a:r>
+            <a:endParaRPr/>
+          </a:p>
+        </p:txBody>
+      </p:sp>
+      <p:sp>
+        <p:nvSpPr>
+          <p:cNvPr id="563" name="Google Shape;563;p53"/>
+          <p:cNvSpPr/>
+          <p:nvPr/>
+        </p:nvSpPr>
+        <p:spPr>
+          <a:xfrm>
+            <a:off x="3831556" y="2797849"/>
+            <a:ext cx="1395256" cy="1433588"/>
+          </a:xfrm>
+          <a:prstGeom prst="rect">
+            <a:avLst/>
+          </a:prstGeom>
+          <a:noFill/>
+          <a:ln>
+            <a:noFill/>
+          </a:ln>
+        </p:spPr>
+        <p:txBody>
+          <a:bodyPr anchorCtr="0" anchor="ctr" bIns="91425" lIns="91425" spcFirstLastPara="1" rIns="91425" wrap="square" tIns="91425">
+            <a:noAutofit/>
+          </a:bodyPr>
+          <a:lstStyle/>
+          <a:p>
+            <a:pPr indent="0" lvl="0" marL="0" rtl="0" algn="l">
+              <a:spcBef>
+                <a:spcPts val="0"/>
+              </a:spcBef>
+              <a:spcAft>
+                <a:spcPts val="0"/>
+              </a:spcAft>
+              <a:buNone/>
+            </a:pPr>
+            <a:r>
+              <a:t/>
+            </a:r>
+            <a:endParaRPr/>
+          </a:p>
+        </p:txBody>
+      </p:sp>
+      <p:sp>
+        <p:nvSpPr>
+          <p:cNvPr id="567" name="Google Shape;567;p53"/>
+          <p:cNvSpPr/>
+          <p:nvPr/>
+        </p:nvSpPr>
+        <p:spPr>
+          <a:xfrm>
+            <a:off x="5595727" y="2797849"/>
+            <a:ext cx="1395256" cy="1433588"/>
+          </a:xfrm>
+          <a:prstGeom prst="rect">
+            <a:avLst/>
+          </a:prstGeom>
+          <a:noFill/>
+          <a:ln>
+            <a:noFill/>
+          </a:ln>
+        </p:spPr>
+        <p:txBody>
+          <a:bodyPr anchorCtr="0" anchor="ctr" bIns="91425" lIns="91425" spcFirstLastPara="1" rIns="91425" wrap="square" tIns="91425">
+            <a:noAutofit/>
+          </a:bodyPr>
+          <a:lstStyle/>
+          <a:p>
+            <a:pPr indent="0" lvl="0" marL="0" rtl="0" algn="l">
+              <a:spcBef>
+                <a:spcPts val="0"/>
+              </a:spcBef>
+              <a:spcAft>
+                <a:spcPts val="0"/>
+              </a:spcAft>
+              <a:buNone/>
+            </a:pPr>
+            <a:r>
+              <a:t/>
+            </a:r>
+            <a:endParaRPr/>
+          </a:p>
+        </p:txBody>
+      </p:sp>
+      <p:sp>
+        <p:nvSpPr>
+          <p:cNvPr id="571" name="Google Shape;571;p53"/>
+          <p:cNvSpPr/>
+          <p:nvPr/>
+        </p:nvSpPr>
+        <p:spPr>
+          <a:xfrm>
+            <a:off x="7359897" y="2797849"/>
+            <a:ext cx="1395256" cy="1433588"/>
+          </a:xfrm>
+          <a:prstGeom prst="rect">
+            <a:avLst/>
+          </a:prstGeom>
+          <a:noFill/>
+          <a:ln>
+            <a:noFill/>
+          </a:ln>
+        </p:spPr>
+        <p:txBody>
+          <a:bodyPr anchorCtr="0" anchor="ctr" bIns="91425" lIns="91425" spcFirstLastPara="1" rIns="91425" wrap="square" tIns="91425">
+            <a:noAutofit/>
+          </a:bodyPr>
+          <a:lstStyle/>
+          <a:p>
+            <a:pPr indent="0" lvl="0" marL="0" rtl="0" algn="l">
+              <a:spcBef>
+                <a:spcPts val="0"/>
+              </a:spcBef>
+              <a:spcAft>
+                <a:spcPts val="0"/>
+              </a:spcAft>
+              <a:buNone/>
+            </a:pPr>
+            <a:r>
+              <a:t/>
+            </a:r>
+            <a:endParaRPr/>
+          </a:p>
+        </p:txBody>
+      </p:sp>
+      <p:sp>
+        <p:nvSpPr>
+          <p:cNvPr id="572" name="title"/>
           <p:cNvSpPr txBox="1"/>
           <p:nvPr/>
         </p:nvSpPr>
@@ -6275,21 +6757,21 @@
                 <a:ea typeface="Play"/>
                 <a:cs typeface="Play"/>
               </a:rPr>
-              <a:t>Предложение</a:t>
+              <a:t>Сервис: автоматическая вёрстка</a:t>
             </a:r>
           </a:p>
         </p:txBody>
       </p:sp>
       <p:sp>
         <p:nvSpPr>
-          <p:cNvPr id="556" name="body_left"/>
+          <p:cNvPr id="573" name="body"/>
           <p:cNvSpPr txBox="1"/>
           <p:nvPr/>
         </p:nvSpPr>
         <p:spPr>
           <a:xfrm>
-            <a:off x="274320" y="1414513"/>
-            <a:ext cx="4035247" cy="2851865"/>
+            <a:off x="274320" y="2034088"/>
+            <a:ext cx="8344814" cy="993140"/>
           </a:xfrm>
           <a:prstGeom prst="rect">
             <a:avLst/>
@@ -6324,7 +6806,7 @@
                 <a:ea typeface="Play"/>
                 <a:cs typeface="Play"/>
               </a:rPr>
-              <a:t>• Сервис принимает шаблон pptx и материалы, генерирует колоду по дизайн‑системе</a:t>
+              <a:t>• Принимает шаблон pptx и материалы</a:t>
             </a:r>
           </a:p>
           <a:p>
@@ -6350,32 +6832,9 @@
                 <a:ea typeface="Play"/>
                 <a:cs typeface="Play"/>
               </a:rPr>
-              <a:t>• Экспорт в pptx, pdf, html с редактируемыми слайдами</a:t>
+              <a:t>• Автоматически формирует дизайн-систему и план колоды</a:t>
             </a:r>
           </a:p>
-        </p:txBody>
-      </p:sp>
-      <p:sp>
-        <p:nvSpPr>
-          <p:cNvPr id="557" name="body_right"/>
-          <p:cNvSpPr txBox="1"/>
-          <p:nvPr/>
-        </p:nvSpPr>
-        <p:spPr>
-          <a:xfrm>
-            <a:off x="4583887" y="1414513"/>
-            <a:ext cx="4035247" cy="2851865"/>
-          </a:xfrm>
-          <a:prstGeom prst="rect">
-            <a:avLst/>
-          </a:prstGeom>
-          <a:noFill/>
-        </p:spPr>
-        <p:txBody>
-          <a:bodyPr wrap="square" lIns="76200" rIns="76200" tIns="50800" bIns="50800">
-            <a:spAutoFit/>
-          </a:bodyPr>
-          <a:lstStyle/>
           <a:p>
             <a:pPr algn="l">
               <a:spcAft>
@@ -6399,33 +6858,7 @@
                 <a:ea typeface="Play"/>
                 <a:cs typeface="Play"/>
               </a:rPr>
-              <a:t>• Аудит качества проверяет стиль и корректирует автоматически</a:t>
-            </a:r>
-          </a:p>
-          <a:p>
-            <a:pPr algn="l">
-              <a:spcAft>
-                <a:spcPts val="300"/>
-              </a:spcAft>
-              <a:defRPr sz="1800">
-                <a:solidFill>
-                  <a:srgbClr val="000000"/>
-                </a:solidFill>
-                <a:latin typeface="Play"/>
-                <a:ea typeface="Play"/>
-                <a:cs typeface="Play"/>
-              </a:defRPr>
-            </a:pPr>
-            <a:r>
-              <a:rPr sz="1800">
-                <a:solidFill>
-                  <a:srgbClr val="000000"/>
-                </a:solidFill>
-                <a:latin typeface="Play"/>
-                <a:ea typeface="Play"/>
-                <a:cs typeface="Play"/>
-              </a:rPr>
-              <a:t>• Слайды остаются редактируемыми, без картинок</a:t>
+              <a:t>• Экспортирует pptx, pdf, html, слайды остаются редактируемыми</a:t>
             </a:r>
           </a:p>
         </p:txBody>
@@ -6450,19 +6883,23 @@
       <p:grpSpPr/>
       <p:sp>
         <p:nvSpPr>
-          <p:cNvPr id="662" name="Google Shape;662;p55"/>
+          <p:cNvPr id="1027" name="Google Shape;1027;p65"/>
           <p:cNvSpPr/>
           <p:nvPr/>
         </p:nvSpPr>
         <p:spPr>
           <a:xfrm>
-            <a:off x="8667705" y="4666977"/>
-            <a:ext cx="190499" cy="190475"/>
+            <a:off x="6064222" y="1209852"/>
+            <a:ext cx="2793985" cy="3014270"/>
           </a:xfrm>
-          <a:prstGeom prst="rect">
-            <a:avLst/>
+          <a:prstGeom prst="roundRect">
+            <a:avLst>
+              <a:gd fmla="val 3436" name="adj"/>
+            </a:avLst>
           </a:prstGeom>
-          <a:noFill/>
+          <a:solidFill>
+            <a:schemeClr val="lt2"/>
+          </a:solidFill>
           <a:ln>
             <a:noFill/>
           </a:ln>
@@ -6491,7 +6928,97 @@
       </p:sp>
       <p:sp>
         <p:nvSpPr>
-          <p:cNvPr id="663" name="Google Shape;663;p55"/>
+          <p:cNvPr id="1029" name="Google Shape;1029;p65"/>
+          <p:cNvSpPr/>
+          <p:nvPr/>
+        </p:nvSpPr>
+        <p:spPr>
+          <a:xfrm>
+            <a:off x="3174981" y="1209852"/>
+            <a:ext cx="2793985" cy="3014270"/>
+          </a:xfrm>
+          <a:prstGeom prst="roundRect">
+            <a:avLst>
+              <a:gd fmla="val 3436" name="adj"/>
+            </a:avLst>
+          </a:prstGeom>
+          <a:solidFill>
+            <a:schemeClr val="lt2"/>
+          </a:solidFill>
+          <a:ln>
+            <a:noFill/>
+          </a:ln>
+        </p:spPr>
+        <p:txBody>
+          <a:bodyPr anchorCtr="0" anchor="ctr" bIns="91425" lIns="91425" spcFirstLastPara="1" rIns="91425" wrap="square" tIns="91425">
+            <a:noAutofit/>
+          </a:bodyPr>
+          <a:lstStyle/>
+          <a:p>
+            <a:pPr indent="0" lvl="0" marL="0" rtl="0" algn="l">
+              <a:spcBef>
+                <a:spcPts val="0"/>
+              </a:spcBef>
+              <a:spcAft>
+                <a:spcPts val="0"/>
+              </a:spcAft>
+              <a:buNone/>
+            </a:pPr>
+            <a:r>
+              <a:t/>
+            </a:r>
+            <a:endParaRPr/>
+          </a:p>
+        </p:txBody>
+      </p:sp>
+      <p:sp>
+        <p:nvSpPr>
+          <p:cNvPr id="1031" name="Google Shape;1031;p65"/>
+          <p:cNvSpPr/>
+          <p:nvPr/>
+        </p:nvSpPr>
+        <p:spPr>
+          <a:xfrm>
+            <a:off x="285749" y="1209852"/>
+            <a:ext cx="2793985" cy="3014270"/>
+          </a:xfrm>
+          <a:prstGeom prst="roundRect">
+            <a:avLst>
+              <a:gd fmla="val 3436" name="adj"/>
+            </a:avLst>
+          </a:prstGeom>
+          <a:solidFill>
+            <a:schemeClr val="lt2"/>
+          </a:solidFill>
+          <a:ln>
+            <a:noFill/>
+          </a:ln>
+        </p:spPr>
+        <p:txBody>
+          <a:bodyPr anchorCtr="0" anchor="ctr" bIns="91425" lIns="91425" spcFirstLastPara="1" rIns="91425" wrap="square" tIns="91425">
+            <a:noAutofit/>
+          </a:bodyPr>
+          <a:lstStyle/>
+          <a:p>
+            <a:pPr indent="0" lvl="0" marL="0" rtl="0" algn="l">
+              <a:spcBef>
+                <a:spcPts val="0"/>
+              </a:spcBef>
+              <a:spcAft>
+                <a:spcPts val="0"/>
+              </a:spcAft>
+              <a:buNone/>
+            </a:pPr>
+            <a:r>
+              <a:t/>
+            </a:r>
+            <a:endParaRPr/>
+          </a:p>
+        </p:txBody>
+      </p:sp>
+      <p:sp>
+        <p:nvSpPr>
+          <p:cNvPr id="1032" name="Google Shape;1032;p65"/>
           <p:cNvSpPr/>
           <p:nvPr/>
         </p:nvSpPr>
@@ -6532,7 +7059,7 @@
       </p:sp>
       <p:sp>
         <p:nvSpPr>
-          <p:cNvPr id="664" name="Google Shape;664;p55"/>
+          <p:cNvPr id="1033" name="Google Shape;1033;p65"/>
           <p:cNvSpPr/>
           <p:nvPr/>
         </p:nvSpPr>
@@ -6573,367 +7100,7 @@
       </p:sp>
       <p:sp>
         <p:nvSpPr>
-          <p:cNvPr id="665" name="Google Shape;665;p55"/>
-          <p:cNvSpPr/>
-          <p:nvPr/>
-        </p:nvSpPr>
-        <p:spPr>
-          <a:xfrm>
-            <a:off x="285749" y="1209852"/>
-            <a:ext cx="2071677" cy="3014270"/>
-          </a:xfrm>
-          <a:prstGeom prst="roundRect">
-            <a:avLst>
-              <a:gd fmla="val 4634" name="adj"/>
-            </a:avLst>
-          </a:prstGeom>
-          <a:solidFill>
-            <a:schemeClr val="lt2"/>
-          </a:solidFill>
-          <a:ln>
-            <a:noFill/>
-          </a:ln>
-        </p:spPr>
-        <p:txBody>
-          <a:bodyPr anchorCtr="0" anchor="ctr" bIns="91425" lIns="91425" spcFirstLastPara="1" rIns="91425" wrap="square" tIns="91425">
-            <a:noAutofit/>
-          </a:bodyPr>
-          <a:lstStyle/>
-          <a:p>
-            <a:pPr indent="0" lvl="0" marL="0" rtl="0" algn="l">
-              <a:spcBef>
-                <a:spcPts val="0"/>
-              </a:spcBef>
-              <a:spcAft>
-                <a:spcPts val="0"/>
-              </a:spcAft>
-              <a:buNone/>
-            </a:pPr>
-            <a:r>
-              <a:t/>
-            </a:r>
-            <a:endParaRPr/>
-          </a:p>
-        </p:txBody>
-      </p:sp>
-      <p:sp>
-        <p:nvSpPr>
-          <p:cNvPr id="667" name="Google Shape;667;p55"/>
-          <p:cNvSpPr/>
-          <p:nvPr/>
-        </p:nvSpPr>
-        <p:spPr>
-          <a:xfrm>
-            <a:off x="438148" y="1362233"/>
-            <a:ext cx="76199" cy="76190"/>
-          </a:xfrm>
-          <a:prstGeom prst="roundRect">
-            <a:avLst>
-              <a:gd fmla="val 31500" name="adj"/>
-            </a:avLst>
-          </a:prstGeom>
-          <a:solidFill>
-            <a:srgbClr val="0077FF"/>
-          </a:solidFill>
-          <a:ln>
-            <a:noFill/>
-          </a:ln>
-        </p:spPr>
-        <p:txBody>
-          <a:bodyPr anchorCtr="0" anchor="ctr" bIns="91425" lIns="91425" spcFirstLastPara="1" rIns="91425" wrap="square" tIns="91425">
-            <a:noAutofit/>
-          </a:bodyPr>
-          <a:lstStyle/>
-          <a:p>
-            <a:pPr indent="0" lvl="0" marL="0" rtl="0" algn="l">
-              <a:spcBef>
-                <a:spcPts val="0"/>
-              </a:spcBef>
-              <a:spcAft>
-                <a:spcPts val="0"/>
-              </a:spcAft>
-              <a:buNone/>
-            </a:pPr>
-            <a:r>
-              <a:t/>
-            </a:r>
-            <a:endParaRPr/>
-          </a:p>
-        </p:txBody>
-      </p:sp>
-      <p:sp>
-        <p:nvSpPr>
-          <p:cNvPr id="670" name="Google Shape;670;p55"/>
-          <p:cNvSpPr/>
-          <p:nvPr/>
-        </p:nvSpPr>
-        <p:spPr>
-          <a:xfrm>
-            <a:off x="2452675" y="1209852"/>
-            <a:ext cx="2071677" cy="3014270"/>
-          </a:xfrm>
-          <a:prstGeom prst="roundRect">
-            <a:avLst>
-              <a:gd fmla="val 4634" name="adj"/>
-            </a:avLst>
-          </a:prstGeom>
-          <a:solidFill>
-            <a:schemeClr val="lt2"/>
-          </a:solidFill>
-          <a:ln>
-            <a:noFill/>
-          </a:ln>
-        </p:spPr>
-        <p:txBody>
-          <a:bodyPr anchorCtr="0" anchor="ctr" bIns="91425" lIns="91425" spcFirstLastPara="1" rIns="91425" wrap="square" tIns="91425">
-            <a:noAutofit/>
-          </a:bodyPr>
-          <a:lstStyle/>
-          <a:p>
-            <a:pPr indent="0" lvl="0" marL="0" rtl="0" algn="l">
-              <a:spcBef>
-                <a:spcPts val="0"/>
-              </a:spcBef>
-              <a:spcAft>
-                <a:spcPts val="0"/>
-              </a:spcAft>
-              <a:buNone/>
-            </a:pPr>
-            <a:r>
-              <a:t/>
-            </a:r>
-            <a:endParaRPr/>
-          </a:p>
-        </p:txBody>
-      </p:sp>
-      <p:sp>
-        <p:nvSpPr>
-          <p:cNvPr id="672" name="Google Shape;672;p55"/>
-          <p:cNvSpPr/>
-          <p:nvPr/>
-        </p:nvSpPr>
-        <p:spPr>
-          <a:xfrm>
-            <a:off x="2605074" y="1362233"/>
-            <a:ext cx="76199" cy="76190"/>
-          </a:xfrm>
-          <a:prstGeom prst="roundRect">
-            <a:avLst>
-              <a:gd fmla="val 31500" name="adj"/>
-            </a:avLst>
-          </a:prstGeom>
-          <a:solidFill>
-            <a:srgbClr val="0077FF"/>
-          </a:solidFill>
-          <a:ln>
-            <a:noFill/>
-          </a:ln>
-        </p:spPr>
-        <p:txBody>
-          <a:bodyPr anchorCtr="0" anchor="ctr" bIns="91425" lIns="91425" spcFirstLastPara="1" rIns="91425" wrap="square" tIns="91425">
-            <a:noAutofit/>
-          </a:bodyPr>
-          <a:lstStyle/>
-          <a:p>
-            <a:pPr indent="0" lvl="0" marL="0" rtl="0" algn="l">
-              <a:spcBef>
-                <a:spcPts val="0"/>
-              </a:spcBef>
-              <a:spcAft>
-                <a:spcPts val="0"/>
-              </a:spcAft>
-              <a:buNone/>
-            </a:pPr>
-            <a:r>
-              <a:t/>
-            </a:r>
-            <a:endParaRPr/>
-          </a:p>
-        </p:txBody>
-      </p:sp>
-      <p:sp>
-        <p:nvSpPr>
-          <p:cNvPr id="675" name="Google Shape;675;p55"/>
-          <p:cNvSpPr/>
-          <p:nvPr/>
-        </p:nvSpPr>
-        <p:spPr>
-          <a:xfrm>
-            <a:off x="4619601" y="1209852"/>
-            <a:ext cx="2071677" cy="3014270"/>
-          </a:xfrm>
-          <a:prstGeom prst="roundRect">
-            <a:avLst>
-              <a:gd fmla="val 4634" name="adj"/>
-            </a:avLst>
-          </a:prstGeom>
-          <a:solidFill>
-            <a:schemeClr val="lt2"/>
-          </a:solidFill>
-          <a:ln>
-            <a:noFill/>
-          </a:ln>
-        </p:spPr>
-        <p:txBody>
-          <a:bodyPr anchorCtr="0" anchor="ctr" bIns="91425" lIns="91425" spcFirstLastPara="1" rIns="91425" wrap="square" tIns="91425">
-            <a:noAutofit/>
-          </a:bodyPr>
-          <a:lstStyle/>
-          <a:p>
-            <a:pPr indent="0" lvl="0" marL="0" rtl="0" algn="l">
-              <a:spcBef>
-                <a:spcPts val="0"/>
-              </a:spcBef>
-              <a:spcAft>
-                <a:spcPts val="0"/>
-              </a:spcAft>
-              <a:buNone/>
-            </a:pPr>
-            <a:r>
-              <a:t/>
-            </a:r>
-            <a:endParaRPr/>
-          </a:p>
-        </p:txBody>
-      </p:sp>
-      <p:sp>
-        <p:nvSpPr>
-          <p:cNvPr id="677" name="Google Shape;677;p55"/>
-          <p:cNvSpPr/>
-          <p:nvPr/>
-        </p:nvSpPr>
-        <p:spPr>
-          <a:xfrm>
-            <a:off x="4772001" y="1362233"/>
-            <a:ext cx="76199" cy="76190"/>
-          </a:xfrm>
-          <a:prstGeom prst="roundRect">
-            <a:avLst>
-              <a:gd fmla="val 31500" name="adj"/>
-            </a:avLst>
-          </a:prstGeom>
-          <a:solidFill>
-            <a:srgbClr val="0077FF"/>
-          </a:solidFill>
-          <a:ln>
-            <a:noFill/>
-          </a:ln>
-        </p:spPr>
-        <p:txBody>
-          <a:bodyPr anchorCtr="0" anchor="ctr" bIns="91425" lIns="91425" spcFirstLastPara="1" rIns="91425" wrap="square" tIns="91425">
-            <a:noAutofit/>
-          </a:bodyPr>
-          <a:lstStyle/>
-          <a:p>
-            <a:pPr indent="0" lvl="0" marL="0" rtl="0" algn="l">
-              <a:spcBef>
-                <a:spcPts val="0"/>
-              </a:spcBef>
-              <a:spcAft>
-                <a:spcPts val="0"/>
-              </a:spcAft>
-              <a:buNone/>
-            </a:pPr>
-            <a:r>
-              <a:t/>
-            </a:r>
-            <a:endParaRPr/>
-          </a:p>
-        </p:txBody>
-      </p:sp>
-      <p:sp>
-        <p:nvSpPr>
-          <p:cNvPr id="680" name="Google Shape;680;p55"/>
-          <p:cNvSpPr/>
-          <p:nvPr/>
-        </p:nvSpPr>
-        <p:spPr>
-          <a:xfrm>
-            <a:off x="6786527" y="1209852"/>
-            <a:ext cx="2071677" cy="3014270"/>
-          </a:xfrm>
-          <a:prstGeom prst="roundRect">
-            <a:avLst>
-              <a:gd fmla="val 4634" name="adj"/>
-            </a:avLst>
-          </a:prstGeom>
-          <a:solidFill>
-            <a:schemeClr val="lt2"/>
-          </a:solidFill>
-          <a:ln>
-            <a:noFill/>
-          </a:ln>
-        </p:spPr>
-        <p:txBody>
-          <a:bodyPr anchorCtr="0" anchor="ctr" bIns="91425" lIns="91425" spcFirstLastPara="1" rIns="91425" wrap="square" tIns="91425">
-            <a:noAutofit/>
-          </a:bodyPr>
-          <a:lstStyle/>
-          <a:p>
-            <a:pPr indent="0" lvl="0" marL="0" rtl="0" algn="l">
-              <a:spcBef>
-                <a:spcPts val="0"/>
-              </a:spcBef>
-              <a:spcAft>
-                <a:spcPts val="0"/>
-              </a:spcAft>
-              <a:buNone/>
-            </a:pPr>
-            <a:r>
-              <a:t/>
-            </a:r>
-            <a:endParaRPr/>
-          </a:p>
-        </p:txBody>
-      </p:sp>
-      <p:sp>
-        <p:nvSpPr>
-          <p:cNvPr id="682" name="Google Shape;682;p55"/>
-          <p:cNvSpPr/>
-          <p:nvPr/>
-        </p:nvSpPr>
-        <p:spPr>
-          <a:xfrm>
-            <a:off x="6938927" y="1362233"/>
-            <a:ext cx="76199" cy="76190"/>
-          </a:xfrm>
-          <a:prstGeom prst="roundRect">
-            <a:avLst>
-              <a:gd fmla="val 31500" name="adj"/>
-            </a:avLst>
-          </a:prstGeom>
-          <a:solidFill>
-            <a:srgbClr val="0077FF"/>
-          </a:solidFill>
-          <a:ln>
-            <a:noFill/>
-          </a:ln>
-        </p:spPr>
-        <p:txBody>
-          <a:bodyPr anchorCtr="0" anchor="ctr" bIns="91425" lIns="91425" spcFirstLastPara="1" rIns="91425" wrap="square" tIns="91425">
-            <a:noAutofit/>
-          </a:bodyPr>
-          <a:lstStyle/>
-          <a:p>
-            <a:pPr indent="0" lvl="0" marL="0" rtl="0" algn="l">
-              <a:spcBef>
-                <a:spcPts val="0"/>
-              </a:spcBef>
-              <a:spcAft>
-                <a:spcPts val="0"/>
-              </a:spcAft>
-              <a:buNone/>
-            </a:pPr>
-            <a:r>
-              <a:t/>
-            </a:r>
-            <a:endParaRPr/>
-          </a:p>
-        </p:txBody>
-      </p:sp>
-      <p:sp>
-        <p:nvSpPr>
-          <p:cNvPr id="683" name="title"/>
+          <p:cNvPr id="1034" name="title"/>
           <p:cNvSpPr txBox="1"/>
           <p:nvPr/>
         </p:nvSpPr>
@@ -6975,21 +7142,21 @@
                 <a:ea typeface="Play"/>
                 <a:cs typeface="Play"/>
               </a:rPr>
-              <a:t>Ожидаемый эффект</a:t>
+              <a:t>Пилот: 68 колод, 4 мин сборки</a:t>
             </a:r>
           </a:p>
         </p:txBody>
       </p:sp>
       <p:sp>
         <p:nvSpPr>
-          <p:cNvPr id="684" name="body_left"/>
+          <p:cNvPr id="1035" name="body"/>
           <p:cNvSpPr txBox="1"/>
           <p:nvPr/>
         </p:nvSpPr>
         <p:spPr>
           <a:xfrm>
             <a:off x="274320" y="1414513"/>
-            <a:ext cx="4035247" cy="2695296"/>
+            <a:ext cx="8344814" cy="1046136"/>
           </a:xfrm>
           <a:prstGeom prst="rect">
             <a:avLst/>
@@ -7024,7 +7191,7 @@
                 <a:ea typeface="Play"/>
                 <a:cs typeface="Play"/>
               </a:rPr>
-              <a:t>• Средняя сборка колоды 12 слайдов сократилась до 4 минут</a:t>
+              <a:t>• 68 колод собраны за 6 недель</a:t>
             </a:r>
           </a:p>
           <a:p>
@@ -7050,32 +7217,9 @@
                 <a:ea typeface="Play"/>
                 <a:cs typeface="Play"/>
               </a:rPr>
-              <a:t>• Время до первой версии уменьшилось с 6 дней до 1 дня</a:t>
+              <a:t>• Среднее время сборки 4 мин вместо 186</a:t>
             </a:r>
           </a:p>
-        </p:txBody>
-      </p:sp>
-      <p:sp>
-        <p:nvSpPr>
-          <p:cNvPr id="685" name="body_right"/>
-          <p:cNvSpPr txBox="1"/>
-          <p:nvPr/>
-        </p:nvSpPr>
-        <p:spPr>
-          <a:xfrm>
-            <a:off x="4583887" y="1414513"/>
-            <a:ext cx="4035247" cy="2695296"/>
-          </a:xfrm>
-          <a:prstGeom prst="rect">
-            <a:avLst/>
-          </a:prstGeom>
-          <a:noFill/>
-        </p:spPr>
-        <p:txBody>
-          <a:bodyPr wrap="square" lIns="76200" rIns="76200" tIns="50800" bIns="50800">
-            <a:spAutoFit/>
-          </a:bodyPr>
-          <a:lstStyle/>
           <a:p>
             <a:pPr algn="l">
               <a:spcAft>
@@ -7099,33 +7243,7 @@
                 <a:ea typeface="Play"/>
                 <a:cs typeface="Play"/>
               </a:rPr>
-              <a:t>• Нарушения фирменного стиля в пилоте 2 из 68, исправлены автоматически</a:t>
-            </a:r>
-          </a:p>
-          <a:p>
-            <a:pPr algn="l">
-              <a:spcAft>
-                <a:spcPts val="300"/>
-              </a:spcAft>
-              <a:defRPr sz="1800">
-                <a:solidFill>
-                  <a:srgbClr val="000000"/>
-                </a:solidFill>
-                <a:latin typeface="Play"/>
-                <a:ea typeface="Play"/>
-                <a:cs typeface="Play"/>
-              </a:defRPr>
-            </a:pPr>
-            <a:r>
-              <a:rPr sz="1800">
-                <a:solidFill>
-                  <a:srgbClr val="000000"/>
-                </a:solidFill>
-                <a:latin typeface="Play"/>
-                <a:ea typeface="Play"/>
-                <a:cs typeface="Play"/>
-              </a:rPr>
-              <a:t>• Дизайнеры закрыли 38 запросов за 6 недель вместо 11 в неделю</a:t>
+              <a:t>• Время до первой версии сократилось с 6 дней до 1</a:t>
             </a:r>
           </a:p>
         </p:txBody>
@@ -7148,9 +7266,63 @@
         <p:nvPr/>
       </p:nvGrpSpPr>
       <p:grpSpPr/>
-      <p:sp>
-        <p:nvSpPr>
-          <p:cNvPr id="2" name="title"/>
+      <p:pic>
+        <p:nvPicPr>
+          <p:cNvPr descr=" " id="2249" name="Google Shape;2249;p83"/>
+          <p:cNvPicPr preferRelativeResize="0"/>
+          <p:nvPr/>
+        </p:nvPicPr>
+        <p:blipFill rotWithShape="1">
+          <a:blip r:embed="rId2">
+            <a:alphaModFix/>
+          </a:blip>
+          <a:srcRect b="0" l="0" r="0" t="0"/>
+          <a:stretch/>
+        </p:blipFill>
+        <p:spPr>
+          <a:xfrm>
+            <a:off x="285748" y="3576507"/>
+            <a:ext cx="2381238" cy="28571"/>
+          </a:xfrm>
+          <a:prstGeom prst="rect">
+            <a:avLst/>
+          </a:prstGeom>
+          <a:noFill/>
+          <a:ln>
+            <a:noFill/>
+          </a:ln>
+        </p:spPr>
+      </p:pic>
+      <p:pic>
+        <p:nvPicPr>
+          <p:cNvPr descr=" " id="2250" name="Google Shape;2250;p83"/>
+          <p:cNvPicPr preferRelativeResize="0"/>
+          <p:nvPr/>
+        </p:nvPicPr>
+        <p:blipFill rotWithShape="1">
+          <a:blip r:embed="rId3">
+            <a:alphaModFix/>
+          </a:blip>
+          <a:srcRect b="0" l="0" r="0" t="0"/>
+          <a:stretch/>
+        </p:blipFill>
+        <p:spPr>
+          <a:xfrm>
+            <a:off x="3143234" y="3576507"/>
+            <a:ext cx="3762355" cy="28571"/>
+          </a:xfrm>
+          <a:prstGeom prst="rect">
+            <a:avLst/>
+          </a:prstGeom>
+          <a:noFill/>
+          <a:ln>
+            <a:noFill/>
+          </a:ln>
+        </p:spPr>
+      </p:pic>
+      <p:sp>
+        <p:nvSpPr>
+          <p:cNvPr id="2251" name="title"/>
           <p:cNvSpPr txBox="1"/>
           <p:nvPr/>
         </p:nvSpPr>
@@ -7192,161 +7364,29 @@
                 <a:ea typeface="Play"/>
                 <a:cs typeface="Play"/>
               </a:rPr>
-              <a:t>Что потребуется: ресурсы и сроки</a:t>
+              <a:t>Время сборки</a:t>
             </a:r>
           </a:p>
         </p:txBody>
       </p:sp>
-      <p:sp>
-        <p:nvSpPr>
-          <p:cNvPr id="3" name="body_left"/>
-          <p:cNvSpPr txBox="1"/>
+      <p:graphicFrame>
+        <p:nvGraphicFramePr>
+          <p:cNvPr id="2252" name="Chart 2251"/>
+          <p:cNvGraphicFramePr>
+            <a:graphicFrameLocks noGrp="1"/>
+          </p:cNvGraphicFramePr>
           <p:nvPr/>
-        </p:nvSpPr>
-        <p:spPr>
-          <a:xfrm>
-            <a:off x="274320" y="1414513"/>
-            <a:ext cx="3457574" cy="2602405"/>
-          </a:xfrm>
-          <a:prstGeom prst="rect">
-            <a:avLst/>
-          </a:prstGeom>
-          <a:noFill/>
-        </p:spPr>
-        <p:txBody>
-          <a:bodyPr wrap="square" lIns="76200" rIns="76200" tIns="50800" bIns="50800">
-            <a:spAutoFit/>
-          </a:bodyPr>
-          <a:lstStyle/>
-          <a:p>
-            <a:pPr algn="l">
-              <a:spcAft>
-                <a:spcPts val="300"/>
-              </a:spcAft>
-              <a:defRPr sz="1800" b="1">
-                <a:solidFill>
-                  <a:srgbClr val="000000"/>
-                </a:solidFill>
-                <a:latin typeface="Play"/>
-                <a:ea typeface="Play"/>
-                <a:cs typeface="Play"/>
-              </a:defRPr>
-            </a:pPr>
-            <a:r>
-              <a:rPr sz="1800" b="1">
-                <a:solidFill>
-                  <a:srgbClr val="000000"/>
-                </a:solidFill>
-                <a:latin typeface="Play"/>
-                <a:ea typeface="Play"/>
-                <a:cs typeface="Play"/>
-              </a:rPr>
-              <a:t>• Сервис работает на машине 2 vCPU / 2 ГБ RAM</a:t>
-            </a:r>
-          </a:p>
-          <a:p>
-            <a:pPr algn="l">
-              <a:spcAft>
-                <a:spcPts val="300"/>
-              </a:spcAft>
-              <a:defRPr sz="1800" b="1">
-                <a:solidFill>
-                  <a:srgbClr val="000000"/>
-                </a:solidFill>
-                <a:latin typeface="Play"/>
-                <a:ea typeface="Play"/>
-                <a:cs typeface="Play"/>
-              </a:defRPr>
-            </a:pPr>
-            <a:r>
-              <a:rPr sz="1800" b="1">
-                <a:solidFill>
-                  <a:srgbClr val="000000"/>
-                </a:solidFill>
-                <a:latin typeface="Play"/>
-                <a:ea typeface="Play"/>
-                <a:cs typeface="Play"/>
-              </a:rPr>
-              <a:t>• Модель gpt-oss-20b, инференс за 6 недель 1 400 руб</a:t>
-            </a:r>
-          </a:p>
-        </p:txBody>
-      </p:sp>
-      <p:sp>
-        <p:nvSpPr>
-          <p:cNvPr id="4" name="body_right"/>
-          <p:cNvSpPr txBox="1"/>
-          <p:nvPr/>
-        </p:nvSpPr>
-        <p:spPr>
-          <a:xfrm>
-            <a:off x="4006215" y="1414513"/>
-            <a:ext cx="3457574" cy="2602405"/>
-          </a:xfrm>
-          <a:prstGeom prst="rect">
-            <a:avLst/>
-          </a:prstGeom>
-          <a:noFill/>
-        </p:spPr>
-        <p:txBody>
-          <a:bodyPr wrap="square" lIns="76200" rIns="76200" tIns="50800" bIns="50800">
-            <a:spAutoFit/>
-          </a:bodyPr>
-          <a:lstStyle/>
-          <a:p>
-            <a:pPr algn="l">
-              <a:spcAft>
-                <a:spcPts val="300"/>
-              </a:spcAft>
-              <a:defRPr sz="1800" b="1">
-                <a:solidFill>
-                  <a:srgbClr val="000000"/>
-                </a:solidFill>
-                <a:latin typeface="Play"/>
-                <a:ea typeface="Play"/>
-                <a:cs typeface="Play"/>
-              </a:defRPr>
-            </a:pPr>
-            <a:r>
-              <a:rPr sz="1800" b="1">
-                <a:solidFill>
-                  <a:srgbClr val="000000"/>
-                </a:solidFill>
-                <a:latin typeface="Play"/>
-                <a:ea typeface="Play"/>
-                <a:cs typeface="Play"/>
-              </a:rPr>
-              <a:t>• Третий квартал 2026: подключение 4 команд, домен и HTTPS</a:t>
-            </a:r>
-          </a:p>
-          <a:p>
-            <a:pPr algn="l">
-              <a:spcAft>
-                <a:spcPts val="300"/>
-              </a:spcAft>
-              <a:defRPr sz="1800" b="1">
-                <a:solidFill>
-                  <a:srgbClr val="000000"/>
-                </a:solidFill>
-                <a:latin typeface="Play"/>
-                <a:ea typeface="Play"/>
-                <a:cs typeface="Play"/>
-              </a:defRPr>
-            </a:pPr>
-            <a:r>
-              <a:rPr sz="1800" b="1">
-                <a:solidFill>
-                  <a:srgbClr val="000000"/>
-                </a:solidFill>
-                <a:latin typeface="Play"/>
-                <a:ea typeface="Play"/>
-                <a:cs typeface="Play"/>
-              </a:rPr>
-              <a:t>• Четвёртый квартал 2026: доступ для всей компании, интеграция с хранилищем</a:t>
-            </a:r>
-          </a:p>
-        </p:txBody>
-      </p:sp>
+        </p:nvGraphicFramePr>
+        <p:xfrm>
+          <a:off x="4006215" y="1414513"/>
+          <a:ext cx="3457574" cy="2161967"/>
+        </p:xfrm>
+        <a:graphic>
+          <a:graphicData uri="http://schemas.openxmlformats.org/drawingml/2006/chart">
+            <c:chart xmlns:c="http://schemas.openxmlformats.org/drawingml/2006/chart" r:id="rId4"/>
+          </a:graphicData>
+        </a:graphic>
+      </p:graphicFrame>
     </p:spTree>
   </p:cSld>
   <p:clrMapOvr>
@@ -7585,7 +7625,89 @@
       </p:pic>
       <p:sp>
         <p:nvSpPr>
-          <p:cNvPr id="2395" name="title"/>
+          <p:cNvPr id="2395" name="Google Shape;2395;p88"/>
+          <p:cNvSpPr/>
+          <p:nvPr/>
+        </p:nvSpPr>
+        <p:spPr>
+          <a:xfrm>
+            <a:off x="319086" y="3000319"/>
+            <a:ext cx="1690679" cy="1128566"/>
+          </a:xfrm>
+          <a:prstGeom prst="rect">
+            <a:avLst/>
+          </a:prstGeom>
+          <a:noFill/>
+          <a:ln>
+            <a:noFill/>
+          </a:ln>
+        </p:spPr>
+        <p:txBody>
+          <a:bodyPr anchorCtr="0" anchor="ctr" bIns="91425" lIns="91425" spcFirstLastPara="1" rIns="91425" wrap="square" tIns="91425">
+            <a:noAutofit/>
+          </a:bodyPr>
+          <a:lstStyle/>
+          <a:p>
+            <a:pPr indent="0" lvl="0" marL="0" rtl="0" algn="l">
+              <a:spcBef>
+                <a:spcPts val="0"/>
+              </a:spcBef>
+              <a:spcAft>
+                <a:spcPts val="0"/>
+              </a:spcAft>
+              <a:buNone/>
+            </a:pPr>
+            <a:r>
+              <a:t/>
+            </a:r>
+            <a:endParaRPr/>
+          </a:p>
+        </p:txBody>
+      </p:sp>
+      <p:sp>
+        <p:nvSpPr>
+          <p:cNvPr id="2397" name="Google Shape;2397;p88"/>
+          <p:cNvSpPr/>
+          <p:nvPr/>
+        </p:nvSpPr>
+        <p:spPr>
+          <a:xfrm>
+            <a:off x="2600312" y="3000319"/>
+            <a:ext cx="1690679" cy="1128566"/>
+          </a:xfrm>
+          <a:prstGeom prst="rect">
+            <a:avLst/>
+          </a:prstGeom>
+          <a:noFill/>
+          <a:ln>
+            <a:noFill/>
+          </a:ln>
+        </p:spPr>
+        <p:txBody>
+          <a:bodyPr anchorCtr="0" anchor="ctr" bIns="91425" lIns="91425" spcFirstLastPara="1" rIns="91425" wrap="square" tIns="91425">
+            <a:noAutofit/>
+          </a:bodyPr>
+          <a:lstStyle/>
+          <a:p>
+            <a:pPr indent="0" lvl="0" marL="0" rtl="0" algn="l">
+              <a:spcBef>
+                <a:spcPts val="0"/>
+              </a:spcBef>
+              <a:spcAft>
+                <a:spcPts val="0"/>
+              </a:spcAft>
+              <a:buNone/>
+            </a:pPr>
+            <a:r>
+              <a:t/>
+            </a:r>
+            <a:endParaRPr/>
+          </a:p>
+        </p:txBody>
+      </p:sp>
+      <p:sp>
+        <p:nvSpPr>
+          <p:cNvPr id="2398" name="title"/>
           <p:cNvSpPr txBox="1"/>
           <p:nvPr/>
         </p:nvSpPr>
@@ -7627,21 +7749,207 @@
                 <a:ea typeface="Play"/>
                 <a:cs typeface="Play"/>
               </a:rPr>
-              <a:t>План пилота</a:t>
+              <a:t>Нарушения фирменного стиля</a:t>
             </a:r>
           </a:p>
         </p:txBody>
       </p:sp>
-      <p:sp>
-        <p:nvSpPr>
-          <p:cNvPr id="2396" name="body"/>
+      <p:graphicFrame>
+        <p:nvGraphicFramePr>
+          <p:cNvPr id="2399" name="Chart 2398"/>
+          <p:cNvGraphicFramePr>
+            <a:graphicFrameLocks noGrp="1"/>
+          </p:cNvGraphicFramePr>
+          <p:nvPr/>
+        </p:nvGraphicFramePr>
+        <p:xfrm>
+          <a:off x="4583887" y="2009822"/>
+          <a:ext cx="4035247" cy="2160270"/>
+        </p:xfrm>
+        <a:graphic>
+          <a:graphicData uri="http://schemas.openxmlformats.org/drawingml/2006/chart">
+            <c:chart xmlns:c="http://schemas.openxmlformats.org/drawingml/2006/chart" r:id="rId4"/>
+          </a:graphicData>
+        </a:graphic>
+      </p:graphicFrame>
+    </p:spTree>
+  </p:cSld>
+  <p:clrMapOvr>
+    <a:masterClrMapping/>
+  </p:clrMapOvr>
+</p:sld>
+</file>
+
+<file path=ppt/slides/slide61.xml><?xml version="1.0" encoding="utf-8"?>
+<p:sld xmlns:a="http://schemas.openxmlformats.org/drawingml/2006/main" xmlns:p="http://schemas.openxmlformats.org/presentationml/2006/main" xmlns:r="http://schemas.openxmlformats.org/officeDocument/2006/relationships">
+  <p:cSld>
+    <p:spTree>
+      <p:nvGrpSpPr>
+        <p:cNvPr id="1" name=""/>
+        <p:cNvGrpSpPr/>
+        <p:nvPr/>
+      </p:nvGrpSpPr>
+      <p:grpSpPr/>
+      <p:pic>
+        <p:nvPicPr>
+          <p:cNvPr descr=" " id="2428" name="Google Shape;2428;p89"/>
+          <p:cNvPicPr preferRelativeResize="0"/>
+          <p:nvPr/>
+        </p:nvPicPr>
+        <p:blipFill rotWithShape="1">
+          <a:blip r:embed="rId2">
+            <a:alphaModFix/>
+          </a:blip>
+          <a:srcRect b="0" l="0" r="0" t="0"/>
+          <a:stretch/>
+        </p:blipFill>
+        <p:spPr>
+          <a:xfrm>
+            <a:off x="0" y="2732082"/>
+            <a:ext cx="8515008" cy="92615"/>
+          </a:xfrm>
+          <a:prstGeom prst="rect">
+            <a:avLst/>
+          </a:prstGeom>
+          <a:noFill/>
+          <a:ln>
+            <a:noFill/>
+          </a:ln>
+        </p:spPr>
+      </p:pic>
+      <p:sp>
+        <p:nvSpPr>
+          <p:cNvPr id="2429" name="Google Shape;2429;p89"/>
+          <p:cNvSpPr/>
+          <p:nvPr/>
+        </p:nvSpPr>
+        <p:spPr>
+          <a:xfrm>
+            <a:off x="553415" y="1828897"/>
+            <a:ext cx="2232516" cy="1490254"/>
+          </a:xfrm>
+          <a:prstGeom prst="rect">
+            <a:avLst/>
+          </a:prstGeom>
+          <a:noFill/>
+          <a:ln>
+            <a:noFill/>
+          </a:ln>
+        </p:spPr>
+        <p:txBody>
+          <a:bodyPr anchorCtr="0" anchor="ctr" bIns="91425" lIns="91425" spcFirstLastPara="1" rIns="91425" wrap="square" tIns="91425">
+            <a:noAutofit/>
+          </a:bodyPr>
+          <a:lstStyle/>
+          <a:p>
+            <a:pPr indent="0" lvl="0" marL="0" rtl="0" algn="l">
+              <a:spcBef>
+                <a:spcPts val="0"/>
+              </a:spcBef>
+              <a:spcAft>
+                <a:spcPts val="0"/>
+              </a:spcAft>
+              <a:buNone/>
+            </a:pPr>
+            <a:r>
+              <a:t/>
+            </a:r>
+            <a:endParaRPr/>
+          </a:p>
+        </p:txBody>
+      </p:sp>
+      <p:sp>
+        <p:nvSpPr>
+          <p:cNvPr id="2431" name="Google Shape;2431;p89"/>
+          <p:cNvSpPr/>
+          <p:nvPr/>
+        </p:nvSpPr>
+        <p:spPr>
+          <a:xfrm>
+            <a:off x="3565736" y="1828897"/>
+            <a:ext cx="2232516" cy="1490254"/>
+          </a:xfrm>
+          <a:prstGeom prst="rect">
+            <a:avLst/>
+          </a:prstGeom>
+          <a:noFill/>
+          <a:ln>
+            <a:noFill/>
+          </a:ln>
+        </p:spPr>
+        <p:txBody>
+          <a:bodyPr anchorCtr="0" anchor="ctr" bIns="91425" lIns="91425" spcFirstLastPara="1" rIns="91425" wrap="square" tIns="91425">
+            <a:noAutofit/>
+          </a:bodyPr>
+          <a:lstStyle/>
+          <a:p>
+            <a:pPr indent="0" lvl="0" marL="0" rtl="0" algn="l">
+              <a:spcBef>
+                <a:spcPts val="0"/>
+              </a:spcBef>
+              <a:spcAft>
+                <a:spcPts val="0"/>
+              </a:spcAft>
+              <a:buNone/>
+            </a:pPr>
+            <a:r>
+              <a:t/>
+            </a:r>
+            <a:endParaRPr/>
+          </a:p>
+        </p:txBody>
+      </p:sp>
+      <p:sp>
+        <p:nvSpPr>
+          <p:cNvPr id="2433" name="Google Shape;2433;p89"/>
+          <p:cNvSpPr/>
+          <p:nvPr/>
+        </p:nvSpPr>
+        <p:spPr>
+          <a:xfrm>
+            <a:off x="6578067" y="1828897"/>
+            <a:ext cx="2232516" cy="1490254"/>
+          </a:xfrm>
+          <a:prstGeom prst="rect">
+            <a:avLst/>
+          </a:prstGeom>
+          <a:noFill/>
+          <a:ln>
+            <a:noFill/>
+          </a:ln>
+        </p:spPr>
+        <p:txBody>
+          <a:bodyPr anchorCtr="0" anchor="ctr" bIns="91425" lIns="91425" spcFirstLastPara="1" rIns="91425" wrap="square" tIns="91425">
+            <a:noAutofit/>
+          </a:bodyPr>
+          <a:lstStyle/>
+          <a:p>
+            <a:pPr indent="0" lvl="0" marL="0" rtl="0" algn="l">
+              <a:spcBef>
+                <a:spcPts val="0"/>
+              </a:spcBef>
+              <a:spcAft>
+                <a:spcPts val="0"/>
+              </a:spcAft>
+              <a:buNone/>
+            </a:pPr>
+            <a:r>
+              <a:t/>
+            </a:r>
+            <a:endParaRPr/>
+          </a:p>
+        </p:txBody>
+      </p:sp>
+      <p:sp>
+        <p:nvSpPr>
+          <p:cNvPr id="2434" name="title"/>
           <p:cNvSpPr txBox="1"/>
           <p:nvPr/>
         </p:nvSpPr>
         <p:spPr>
           <a:xfrm>
-            <a:off x="274320" y="2009822"/>
-            <a:ext cx="4035247" cy="1674466"/>
+            <a:off x="274320" y="282943"/>
+            <a:ext cx="6792986" cy="617220"/>
           </a:xfrm>
           <a:prstGeom prst="rect">
             <a:avLst/>
@@ -7658,6 +7966,55 @@
               <a:spcAft>
                 <a:spcPts val="300"/>
               </a:spcAft>
+              <a:defRPr sz="2438">
+                <a:solidFill>
+                  <a:srgbClr val="000000"/>
+                </a:solidFill>
+                <a:latin typeface="Play"/>
+                <a:ea typeface="Play"/>
+                <a:cs typeface="Play"/>
+              </a:defRPr>
+            </a:pPr>
+            <a:r>
+              <a:rPr sz="2438">
+                <a:solidFill>
+                  <a:srgbClr val="000000"/>
+                </a:solidFill>
+                <a:latin typeface="Play"/>
+                <a:ea typeface="Play"/>
+                <a:cs typeface="Play"/>
+              </a:rPr>
+              <a:t>Пилот: 6 недель, 2 команды</a:t>
+            </a:r>
+          </a:p>
+        </p:txBody>
+      </p:sp>
+      <p:sp>
+        <p:nvSpPr>
+          <p:cNvPr id="2435" name="body"/>
+          <p:cNvSpPr txBox="1"/>
+          <p:nvPr/>
+        </p:nvSpPr>
+        <p:spPr>
+          <a:xfrm>
+            <a:off x="274320" y="1414513"/>
+            <a:ext cx="4035247" cy="1317558"/>
+          </a:xfrm>
+          <a:prstGeom prst="rect">
+            <a:avLst/>
+          </a:prstGeom>
+          <a:noFill/>
+        </p:spPr>
+        <p:txBody>
+          <a:bodyPr wrap="square" lIns="76200" rIns="76200" tIns="50800" bIns="50800">
+            <a:spAutoFit/>
+          </a:bodyPr>
+          <a:lstStyle/>
+          <a:p>
+            <a:pPr algn="l">
+              <a:spcAft>
+                <a:spcPts val="300"/>
+              </a:spcAft>
               <a:defRPr sz="1400">
                 <a:solidFill>
                   <a:srgbClr val="000000"/>
@@ -7676,7 +8033,7 @@
                 <a:ea typeface="Play"/>
                 <a:cs typeface="Play"/>
               </a:rPr>
-              <a:t>• Пилот 6 недель на двух командах</a:t>
+              <a:t>• 2 недели подготовки и обучения команд</a:t>
             </a:r>
           </a:p>
           <a:p>
@@ -7702,7 +8059,7 @@
                 <a:ea typeface="Play"/>
                 <a:cs typeface="Play"/>
               </a:rPr>
-              <a:t>• Собрано 68 презентаций</a:t>
+              <a:t>• Запуск пилота на 2 командах</a:t>
             </a:r>
           </a:p>
           <a:p>
@@ -7728,7 +8085,7 @@
                 <a:ea typeface="Play"/>
                 <a:cs typeface="Play"/>
               </a:rPr>
-              <a:t>• Время сборки 4 мин, ожидание 1 день</a:t>
+              <a:t>• Аудит качества проверяет все числа</a:t>
             </a:r>
           </a:p>
           <a:p>
@@ -7754,23 +8111,23 @@
                 <a:ea typeface="Play"/>
                 <a:cs typeface="Play"/>
               </a:rPr>
-              <a:t>• Нарушения стиля 2 из 68, исправлены автоматически</a:t>
+              <a:t>• Экспорт готовых колод в pptx, pdf, html</a:t>
             </a:r>
           </a:p>
         </p:txBody>
       </p:sp>
       <p:sp>
         <p:nvSpPr>
-          <p:cNvPr id="2397" name="Rectangle 2396"/>
+          <p:cNvPr id="2436" name="Pentagon 2435"/>
           <p:cNvSpPr/>
           <p:nvPr/>
         </p:nvSpPr>
         <p:spPr>
           <a:xfrm>
-            <a:off x="4583887" y="2780076"/>
-            <a:ext cx="4035247" cy="50233"/>
+            <a:off x="4583887" y="1437570"/>
+            <a:ext cx="4035247" cy="283274"/>
           </a:xfrm>
-          <a:prstGeom prst="rect">
+          <a:prstGeom prst="homePlate">
             <a:avLst/>
           </a:prstGeom>
           <a:solidFill>
@@ -7795,25 +8152,45 @@
           </a:fontRef>
         </p:style>
         <p:txBody>
-          <a:bodyPr rtlCol="0" anchor="ctr"/>
+          <a:bodyPr rtlCol="0" anchor="ctr" wrap="square" lIns="12700" rIns="12700" tIns="12700" bIns="12700"/>
           <a:lstStyle/>
           <a:p>
-            <a:pPr algn="ctr"/>
+            <a:pPr algn="ctr">
+              <a:defRPr sz="1400" b="0">
+                <a:solidFill>
+                  <a:srgbClr val="FFFFFF"/>
+                </a:solidFill>
+                <a:latin typeface="Play"/>
+                <a:ea typeface="Play"/>
+                <a:cs typeface="Play"/>
+              </a:defRPr>
+            </a:pPr>
+            <a:r>
+              <a:rPr sz="1400" b="0">
+                <a:solidFill>
+                  <a:srgbClr val="FFFFFF"/>
+                </a:solidFill>
+                <a:latin typeface="Play"/>
+                <a:ea typeface="Play"/>
+                <a:cs typeface="Play"/>
+              </a:rPr>
+              <a:t>Подготовка</a:t>
+            </a:r>
           </a:p>
         </p:txBody>
       </p:sp>
       <p:sp>
         <p:nvSpPr>
-          <p:cNvPr id="2398" name="Oval 2397"/>
+          <p:cNvPr id="2437" name="Chevron 2436"/>
           <p:cNvSpPr/>
           <p:nvPr/>
         </p:nvSpPr>
         <p:spPr>
           <a:xfrm>
-            <a:off x="5072236" y="2621002"/>
-            <a:ext cx="368382" cy="368382"/>
+            <a:off x="4583887" y="1766959"/>
+            <a:ext cx="4035247" cy="283274"/>
           </a:xfrm>
-          <a:prstGeom prst="ellipse">
+          <a:prstGeom prst="chevron">
             <a:avLst/>
           </a:prstGeom>
           <a:solidFill>
@@ -7838,39 +8215,13 @@
           </a:fontRef>
         </p:style>
         <p:txBody>
-          <a:bodyPr rtlCol="0" anchor="ctr"/>
-          <a:lstStyle/>
-          <a:p>
-            <a:pPr algn="ctr"/>
-          </a:p>
-        </p:txBody>
-      </p:sp>
-      <p:sp>
-        <p:nvSpPr>
-          <p:cNvPr id="2399" name="TextBox 2398"/>
-          <p:cNvSpPr txBox="1"/>
-          <p:nvPr/>
-        </p:nvSpPr>
-        <p:spPr>
-          <a:xfrm>
-            <a:off x="4583887" y="2009822"/>
-            <a:ext cx="2017623" cy="636297"/>
-          </a:xfrm>
-          <a:prstGeom prst="rect">
-            <a:avLst/>
-          </a:prstGeom>
-          <a:noFill/>
-        </p:spPr>
-        <p:txBody>
-          <a:bodyPr wrap="square" lIns="12700" rIns="12700" tIns="12700" bIns="12700">
-            <a:spAutoFit/>
-          </a:bodyPr>
+          <a:bodyPr rtlCol="0" anchor="ctr" wrap="square" lIns="12700" rIns="12700" tIns="12700" bIns="12700"/>
           <a:lstStyle/>
           <a:p>
             <a:pPr algn="ctr">
               <a:defRPr sz="1400" b="0">
                 <a:solidFill>
-                  <a:srgbClr val="000000"/>
+                  <a:srgbClr val="FFFFFF"/>
                 </a:solidFill>
                 <a:latin typeface="Play"/>
                 <a:ea typeface="Play"/>
@@ -7880,29 +8231,29 @@
             <a:r>
               <a:rPr sz="1400" b="0">
                 <a:solidFill>
-                  <a:srgbClr val="000000"/>
+                  <a:srgbClr val="FFFFFF"/>
                 </a:solidFill>
                 <a:latin typeface="Play"/>
                 <a:ea typeface="Play"/>
                 <a:cs typeface="Play"/>
               </a:rPr>
-              <a:t>Подготовка</a:t>
+              <a:t>Запуск</a:t>
             </a:r>
           </a:p>
         </p:txBody>
       </p:sp>
       <p:sp>
         <p:nvSpPr>
-          <p:cNvPr id="2400" name="Oval 2399"/>
+          <p:cNvPr id="2438" name="Chevron 2437"/>
           <p:cNvSpPr/>
           <p:nvPr/>
         </p:nvSpPr>
         <p:spPr>
           <a:xfrm>
-            <a:off x="6417319" y="2621002"/>
-            <a:ext cx="368382" cy="368382"/>
+            <a:off x="4583887" y="2096349"/>
+            <a:ext cx="4035247" cy="283274"/>
           </a:xfrm>
-          <a:prstGeom prst="ellipse">
+          <a:prstGeom prst="chevron">
             <a:avLst/>
           </a:prstGeom>
           <a:solidFill>
@@ -7927,39 +8278,13 @@
           </a:fontRef>
         </p:style>
         <p:txBody>
-          <a:bodyPr rtlCol="0" anchor="ctr"/>
-          <a:lstStyle/>
-          <a:p>
-            <a:pPr algn="ctr"/>
-          </a:p>
-        </p:txBody>
-      </p:sp>
-      <p:sp>
-        <p:nvSpPr>
-          <p:cNvPr id="2401" name="TextBox 2400"/>
-          <p:cNvSpPr txBox="1"/>
-          <p:nvPr/>
-        </p:nvSpPr>
-        <p:spPr>
-          <a:xfrm>
-            <a:off x="5592698" y="3148458"/>
-            <a:ext cx="2017623" cy="636297"/>
-          </a:xfrm>
-          <a:prstGeom prst="rect">
-            <a:avLst/>
-          </a:prstGeom>
-          <a:noFill/>
-        </p:spPr>
-        <p:txBody>
-          <a:bodyPr wrap="square" lIns="12700" rIns="12700" tIns="12700" bIns="12700">
-            <a:spAutoFit/>
-          </a:bodyPr>
+          <a:bodyPr rtlCol="0" anchor="ctr" wrap="square" lIns="12700" rIns="12700" tIns="12700" bIns="12700"/>
           <a:lstStyle/>
           <a:p>
             <a:pPr algn="ctr">
               <a:defRPr sz="1400" b="0">
                 <a:solidFill>
-                  <a:srgbClr val="000000"/>
+                  <a:srgbClr val="FFFFFF"/>
                 </a:solidFill>
                 <a:latin typeface="Play"/>
                 <a:ea typeface="Play"/>
@@ -7969,29 +8294,29 @@
             <a:r>
               <a:rPr sz="1400" b="0">
                 <a:solidFill>
-                  <a:srgbClr val="000000"/>
+                  <a:srgbClr val="FFFFFF"/>
                 </a:solidFill>
                 <a:latin typeface="Play"/>
                 <a:ea typeface="Play"/>
                 <a:cs typeface="Play"/>
               </a:rPr>
-              <a:t>Запуск</a:t>
+              <a:t>Аудит</a:t>
             </a:r>
           </a:p>
         </p:txBody>
       </p:sp>
       <p:sp>
         <p:nvSpPr>
-          <p:cNvPr id="2402" name="Oval 2401"/>
+          <p:cNvPr id="2439" name="Chevron 2438"/>
           <p:cNvSpPr/>
           <p:nvPr/>
         </p:nvSpPr>
         <p:spPr>
           <a:xfrm>
-            <a:off x="7762401" y="2621002"/>
-            <a:ext cx="368382" cy="368382"/>
+            <a:off x="4583887" y="2425738"/>
+            <a:ext cx="4035247" cy="283274"/>
           </a:xfrm>
-          <a:prstGeom prst="ellipse">
+          <a:prstGeom prst="chevron">
             <a:avLst/>
           </a:prstGeom>
           <a:solidFill>
@@ -8016,39 +8341,13 @@
           </a:fontRef>
         </p:style>
         <p:txBody>
-          <a:bodyPr rtlCol="0" anchor="ctr"/>
-          <a:lstStyle/>
-          <a:p>
-            <a:pPr algn="ctr"/>
-          </a:p>
-        </p:txBody>
-      </p:sp>
-      <p:sp>
-        <p:nvSpPr>
-          <p:cNvPr id="2403" name="TextBox 2402"/>
-          <p:cNvSpPr txBox="1"/>
-          <p:nvPr/>
-        </p:nvSpPr>
-        <p:spPr>
-          <a:xfrm>
-            <a:off x="6601510" y="2009822"/>
-            <a:ext cx="2017623" cy="636297"/>
-          </a:xfrm>
-          <a:prstGeom prst="rect">
-            <a:avLst/>
-          </a:prstGeom>
-          <a:noFill/>
-        </p:spPr>
-        <p:txBody>
-          <a:bodyPr wrap="square" lIns="12700" rIns="12700" tIns="12700" bIns="12700">
-            <a:spAutoFit/>
-          </a:bodyPr>
+          <a:bodyPr rtlCol="0" anchor="ctr" wrap="square" lIns="12700" rIns="12700" tIns="12700" bIns="12700"/>
           <a:lstStyle/>
           <a:p>
             <a:pPr algn="ctr">
               <a:defRPr sz="1400" b="0">
                 <a:solidFill>
-                  <a:srgbClr val="000000"/>
+                  <a:srgbClr val="FFFFFF"/>
                 </a:solidFill>
                 <a:latin typeface="Play"/>
                 <a:ea typeface="Play"/>
@@ -8058,230 +8357,13 @@
             <a:r>
               <a:rPr sz="1400" b="0">
                 <a:solidFill>
-                  <a:srgbClr val="000000"/>
+                  <a:srgbClr val="FFFFFF"/>
                 </a:solidFill>
                 <a:latin typeface="Play"/>
                 <a:ea typeface="Play"/>
                 <a:cs typeface="Play"/>
               </a:rPr>
-              <a:t>Оценка</a:t>
-            </a:r>
-          </a:p>
-        </p:txBody>
-      </p:sp>
-    </p:spTree>
-  </p:cSld>
-  <p:clrMapOvr>
-    <a:masterClrMapping/>
-  </p:clrMapOvr>
-</p:sld>
-</file>
-
-<file path=ppt/slides/slide61.xml><?xml version="1.0" encoding="utf-8"?>
-<p:sld xmlns:a="http://schemas.openxmlformats.org/drawingml/2006/main" xmlns:p="http://schemas.openxmlformats.org/presentationml/2006/main" xmlns:r="http://schemas.openxmlformats.org/officeDocument/2006/relationships">
-  <p:cSld>
-    <p:spTree>
-      <p:nvGrpSpPr>
-        <p:cNvPr id="1" name=""/>
-        <p:cNvGrpSpPr/>
-        <p:nvPr/>
-      </p:nvGrpSpPr>
-      <p:grpSpPr/>
-      <p:sp>
-        <p:nvSpPr>
-          <p:cNvPr id="2" name="title"/>
-          <p:cNvSpPr txBox="1"/>
-          <p:nvPr/>
-        </p:nvSpPr>
-        <p:spPr>
-          <a:xfrm>
-            <a:off x="274320" y="282943"/>
-            <a:ext cx="6792986" cy="617220"/>
-          </a:xfrm>
-          <a:prstGeom prst="rect">
-            <a:avLst/>
-          </a:prstGeom>
-          <a:noFill/>
-        </p:spPr>
-        <p:txBody>
-          <a:bodyPr wrap="square" lIns="76200" rIns="76200" tIns="50800" bIns="50800">
-            <a:spAutoFit/>
-          </a:bodyPr>
-          <a:lstStyle/>
-          <a:p>
-            <a:pPr algn="l">
-              <a:spcAft>
-                <a:spcPts val="300"/>
-              </a:spcAft>
-              <a:defRPr sz="2438">
-                <a:solidFill>
-                  <a:srgbClr val="000000"/>
-                </a:solidFill>
-                <a:latin typeface="Play"/>
-                <a:ea typeface="Play"/>
-                <a:cs typeface="Play"/>
-              </a:defRPr>
-            </a:pPr>
-            <a:r>
-              <a:rPr sz="2438">
-                <a:solidFill>
-                  <a:srgbClr val="000000"/>
-                </a:solidFill>
-                <a:latin typeface="Play"/>
-                <a:ea typeface="Play"/>
-                <a:cs typeface="Play"/>
-              </a:rPr>
-              <a:t>Что мы просим решить</a:t>
-            </a:r>
-          </a:p>
-        </p:txBody>
-      </p:sp>
-      <p:sp>
-        <p:nvSpPr>
-          <p:cNvPr id="3" name="body_left"/>
-          <p:cNvSpPr txBox="1"/>
-          <p:nvPr/>
-        </p:nvSpPr>
-        <p:spPr>
-          <a:xfrm>
-            <a:off x="274320" y="1414513"/>
-            <a:ext cx="4035247" cy="1790812"/>
-          </a:xfrm>
-          <a:prstGeom prst="rect">
-            <a:avLst/>
-          </a:prstGeom>
-          <a:noFill/>
-        </p:spPr>
-        <p:txBody>
-          <a:bodyPr wrap="square" lIns="76200" rIns="76200" tIns="50800" bIns="50800">
-            <a:spAutoFit/>
-          </a:bodyPr>
-          <a:lstStyle/>
-          <a:p>
-            <a:pPr algn="l">
-              <a:spcAft>
-                <a:spcPts val="300"/>
-              </a:spcAft>
-              <a:defRPr sz="1800">
-                <a:solidFill>
-                  <a:srgbClr val="000000"/>
-                </a:solidFill>
-                <a:latin typeface="Play"/>
-                <a:ea typeface="Play"/>
-                <a:cs typeface="Play"/>
-              </a:defRPr>
-            </a:pPr>
-            <a:r>
-              <a:rPr sz="1800">
-                <a:solidFill>
-                  <a:srgbClr val="000000"/>
-                </a:solidFill>
-                <a:latin typeface="Play"/>
-                <a:ea typeface="Play"/>
-                <a:cs typeface="Play"/>
-              </a:rPr>
-              <a:t>• Решить о запуске сервиса на всю компанию</a:t>
-            </a:r>
-          </a:p>
-          <a:p>
-            <a:pPr algn="l">
-              <a:spcAft>
-                <a:spcPts val="300"/>
-              </a:spcAft>
-              <a:defRPr sz="1800">
-                <a:solidFill>
-                  <a:srgbClr val="000000"/>
-                </a:solidFill>
-                <a:latin typeface="Play"/>
-                <a:ea typeface="Play"/>
-                <a:cs typeface="Play"/>
-              </a:defRPr>
-            </a:pPr>
-            <a:r>
-              <a:rPr sz="1800">
-                <a:solidFill>
-                  <a:srgbClr val="000000"/>
-                </a:solidFill>
-                <a:latin typeface="Play"/>
-                <a:ea typeface="Play"/>
-                <a:cs typeface="Play"/>
-              </a:rPr>
-              <a:t>• Подтвердить бюджет и ресурсы для масштабирования</a:t>
-            </a:r>
-          </a:p>
-        </p:txBody>
-      </p:sp>
-      <p:sp>
-        <p:nvSpPr>
-          <p:cNvPr id="4" name="body_right"/>
-          <p:cNvSpPr txBox="1"/>
-          <p:nvPr/>
-        </p:nvSpPr>
-        <p:spPr>
-          <a:xfrm>
-            <a:off x="4583887" y="1414513"/>
-            <a:ext cx="4035247" cy="1790812"/>
-          </a:xfrm>
-          <a:prstGeom prst="rect">
-            <a:avLst/>
-          </a:prstGeom>
-          <a:noFill/>
-        </p:spPr>
-        <p:txBody>
-          <a:bodyPr wrap="square" lIns="76200" rIns="76200" tIns="50800" bIns="50800">
-            <a:spAutoFit/>
-          </a:bodyPr>
-          <a:lstStyle/>
-          <a:p>
-            <a:pPr algn="l">
-              <a:spcAft>
-                <a:spcPts val="300"/>
-              </a:spcAft>
-              <a:defRPr sz="1800">
-                <a:solidFill>
-                  <a:srgbClr val="000000"/>
-                </a:solidFill>
-                <a:latin typeface="Play"/>
-                <a:ea typeface="Play"/>
-                <a:cs typeface="Play"/>
-              </a:defRPr>
-            </a:pPr>
-            <a:r>
-              <a:rPr sz="1800">
-                <a:solidFill>
-                  <a:srgbClr val="000000"/>
-                </a:solidFill>
-                <a:latin typeface="Play"/>
-                <a:ea typeface="Play"/>
-                <a:cs typeface="Play"/>
-              </a:rPr>
-              <a:t>• Определить ответственных за интеграцию с корпоративными системами</a:t>
-            </a:r>
-          </a:p>
-          <a:p>
-            <a:pPr algn="l">
-              <a:spcAft>
-                <a:spcPts val="300"/>
-              </a:spcAft>
-              <a:defRPr sz="1800">
-                <a:solidFill>
-                  <a:srgbClr val="000000"/>
-                </a:solidFill>
-                <a:latin typeface="Play"/>
-                <a:ea typeface="Play"/>
-                <a:cs typeface="Play"/>
-              </a:defRPr>
-            </a:pPr>
-            <a:r>
-              <a:rPr sz="1800">
-                <a:solidFill>
-                  <a:srgbClr val="000000"/>
-                </a:solidFill>
-                <a:latin typeface="Play"/>
-                <a:ea typeface="Play"/>
-                <a:cs typeface="Play"/>
-              </a:rPr>
-              <a:t>• Утвердить сроки внедрения в Q4 2026</a:t>
+              <a:t>Экспорт</a:t>
             </a:r>
           </a:p>
         </p:txBody>
@@ -8347,88 +8429,6 @@
       </p:sp>
       <p:sp>
         <p:nvSpPr>
-          <p:cNvPr id="533" name="Google Shape;533;p53"/>
-          <p:cNvSpPr/>
-          <p:nvPr/>
-        </p:nvSpPr>
-        <p:spPr>
-          <a:xfrm>
-            <a:off x="303214" y="1022533"/>
-            <a:ext cx="1395256" cy="1433588"/>
-          </a:xfrm>
-          <a:prstGeom prst="rect">
-            <a:avLst/>
-          </a:prstGeom>
-          <a:noFill/>
-          <a:ln>
-            <a:noFill/>
-          </a:ln>
-        </p:spPr>
-        <p:txBody>
-          <a:bodyPr anchorCtr="0" anchor="ctr" bIns="91425" lIns="91425" spcFirstLastPara="1" rIns="91425" wrap="square" tIns="91425">
-            <a:noAutofit/>
-          </a:bodyPr>
-          <a:lstStyle/>
-          <a:p>
-            <a:pPr indent="0" lvl="0" marL="0" rtl="0" algn="l">
-              <a:spcBef>
-                <a:spcPts val="0"/>
-              </a:spcBef>
-              <a:spcAft>
-                <a:spcPts val="0"/>
-              </a:spcAft>
-              <a:buNone/>
-            </a:pPr>
-            <a:r>
-              <a:t/>
-            </a:r>
-            <a:endParaRPr/>
-          </a:p>
-        </p:txBody>
-      </p:sp>
-      <p:sp>
-        <p:nvSpPr>
-          <p:cNvPr id="537" name="Google Shape;537;p53"/>
-          <p:cNvSpPr/>
-          <p:nvPr/>
-        </p:nvSpPr>
-        <p:spPr>
-          <a:xfrm>
-            <a:off x="2067385" y="1022533"/>
-            <a:ext cx="1395256" cy="1433588"/>
-          </a:xfrm>
-          <a:prstGeom prst="rect">
-            <a:avLst/>
-          </a:prstGeom>
-          <a:noFill/>
-          <a:ln>
-            <a:noFill/>
-          </a:ln>
-        </p:spPr>
-        <p:txBody>
-          <a:bodyPr anchorCtr="0" anchor="ctr" bIns="91425" lIns="91425" spcFirstLastPara="1" rIns="91425" wrap="square" tIns="91425">
-            <a:noAutofit/>
-          </a:bodyPr>
-          <a:lstStyle/>
-          <a:p>
-            <a:pPr indent="0" lvl="0" marL="0" rtl="0" algn="l">
-              <a:spcBef>
-                <a:spcPts val="0"/>
-              </a:spcBef>
-              <a:spcAft>
-                <a:spcPts val="0"/>
-              </a:spcAft>
-              <a:buNone/>
-            </a:pPr>
-            <a:r>
-              <a:t/>
-            </a:r>
-            <a:endParaRPr/>
-          </a:p>
-        </p:txBody>
-      </p:sp>
-      <p:sp>
-        <p:nvSpPr>
           <p:cNvPr id="541" name="Google Shape;541;p53"/>
           <p:cNvSpPr/>
           <p:nvPr/>
@@ -8470,88 +8470,6 @@
       </p:sp>
       <p:sp>
         <p:nvSpPr>
-          <p:cNvPr id="545" name="Google Shape;545;p53"/>
-          <p:cNvSpPr/>
-          <p:nvPr/>
-        </p:nvSpPr>
-        <p:spPr>
-          <a:xfrm>
-            <a:off x="5595727" y="1022533"/>
-            <a:ext cx="1395256" cy="1433588"/>
-          </a:xfrm>
-          <a:prstGeom prst="rect">
-            <a:avLst/>
-          </a:prstGeom>
-          <a:noFill/>
-          <a:ln>
-            <a:noFill/>
-          </a:ln>
-        </p:spPr>
-        <p:txBody>
-          <a:bodyPr anchorCtr="0" anchor="ctr" bIns="91425" lIns="91425" spcFirstLastPara="1" rIns="91425" wrap="square" tIns="91425">
-            <a:noAutofit/>
-          </a:bodyPr>
-          <a:lstStyle/>
-          <a:p>
-            <a:pPr indent="0" lvl="0" marL="0" rtl="0" algn="l">
-              <a:spcBef>
-                <a:spcPts val="0"/>
-              </a:spcBef>
-              <a:spcAft>
-                <a:spcPts val="0"/>
-              </a:spcAft>
-              <a:buNone/>
-            </a:pPr>
-            <a:r>
-              <a:t/>
-            </a:r>
-            <a:endParaRPr/>
-          </a:p>
-        </p:txBody>
-      </p:sp>
-      <p:sp>
-        <p:nvSpPr>
-          <p:cNvPr id="549" name="Google Shape;549;p53"/>
-          <p:cNvSpPr/>
-          <p:nvPr/>
-        </p:nvSpPr>
-        <p:spPr>
-          <a:xfrm>
-            <a:off x="7359897" y="1022533"/>
-            <a:ext cx="1395256" cy="1433588"/>
-          </a:xfrm>
-          <a:prstGeom prst="rect">
-            <a:avLst/>
-          </a:prstGeom>
-          <a:noFill/>
-          <a:ln>
-            <a:noFill/>
-          </a:ln>
-        </p:spPr>
-        <p:txBody>
-          <a:bodyPr anchorCtr="0" anchor="ctr" bIns="91425" lIns="91425" spcFirstLastPara="1" rIns="91425" wrap="square" tIns="91425">
-            <a:noAutofit/>
-          </a:bodyPr>
-          <a:lstStyle/>
-          <a:p>
-            <a:pPr indent="0" lvl="0" marL="0" rtl="0" algn="l">
-              <a:spcBef>
-                <a:spcPts val="0"/>
-              </a:spcBef>
-              <a:spcAft>
-                <a:spcPts val="0"/>
-              </a:spcAft>
-              <a:buNone/>
-            </a:pPr>
-            <a:r>
-              <a:t/>
-            </a:r>
-            <a:endParaRPr/>
-          </a:p>
-        </p:txBody>
-      </p:sp>
-      <p:sp>
-        <p:nvSpPr>
           <p:cNvPr id="553" name="Google Shape;553;p53"/>
           <p:cNvSpPr/>
           <p:nvPr/>
@@ -8634,212 +8552,7 @@
       </p:sp>
       <p:sp>
         <p:nvSpPr>
-          <p:cNvPr id="555" name="Google Shape;555;p53"/>
-          <p:cNvSpPr/>
-          <p:nvPr/>
-        </p:nvSpPr>
-        <p:spPr>
-          <a:xfrm>
-            <a:off x="303214" y="2797849"/>
-            <a:ext cx="1395256" cy="1433588"/>
-          </a:xfrm>
-          <a:prstGeom prst="rect">
-            <a:avLst/>
-          </a:prstGeom>
-          <a:noFill/>
-          <a:ln>
-            <a:noFill/>
-          </a:ln>
-        </p:spPr>
-        <p:txBody>
-          <a:bodyPr anchorCtr="0" anchor="ctr" bIns="91425" lIns="91425" spcFirstLastPara="1" rIns="91425" wrap="square" tIns="91425">
-            <a:noAutofit/>
-          </a:bodyPr>
-          <a:lstStyle/>
-          <a:p>
-            <a:pPr indent="0" lvl="0" marL="0" rtl="0" algn="l">
-              <a:spcBef>
-                <a:spcPts val="0"/>
-              </a:spcBef>
-              <a:spcAft>
-                <a:spcPts val="0"/>
-              </a:spcAft>
-              <a:buNone/>
-            </a:pPr>
-            <a:r>
-              <a:t/>
-            </a:r>
-            <a:endParaRPr/>
-          </a:p>
-        </p:txBody>
-      </p:sp>
-      <p:sp>
-        <p:nvSpPr>
-          <p:cNvPr id="559" name="Google Shape;559;p53"/>
-          <p:cNvSpPr/>
-          <p:nvPr/>
-        </p:nvSpPr>
-        <p:spPr>
-          <a:xfrm>
-            <a:off x="2067385" y="2797849"/>
-            <a:ext cx="1395256" cy="1433588"/>
-          </a:xfrm>
-          <a:prstGeom prst="rect">
-            <a:avLst/>
-          </a:prstGeom>
-          <a:noFill/>
-          <a:ln>
-            <a:noFill/>
-          </a:ln>
-        </p:spPr>
-        <p:txBody>
-          <a:bodyPr anchorCtr="0" anchor="ctr" bIns="91425" lIns="91425" spcFirstLastPara="1" rIns="91425" wrap="square" tIns="91425">
-            <a:noAutofit/>
-          </a:bodyPr>
-          <a:lstStyle/>
-          <a:p>
-            <a:pPr indent="0" lvl="0" marL="0" rtl="0" algn="l">
-              <a:spcBef>
-                <a:spcPts val="0"/>
-              </a:spcBef>
-              <a:spcAft>
-                <a:spcPts val="0"/>
-              </a:spcAft>
-              <a:buNone/>
-            </a:pPr>
-            <a:r>
-              <a:t/>
-            </a:r>
-            <a:endParaRPr/>
-          </a:p>
-        </p:txBody>
-      </p:sp>
-      <p:sp>
-        <p:nvSpPr>
-          <p:cNvPr id="563" name="Google Shape;563;p53"/>
-          <p:cNvSpPr/>
-          <p:nvPr/>
-        </p:nvSpPr>
-        <p:spPr>
-          <a:xfrm>
-            <a:off x="3831556" y="2797849"/>
-            <a:ext cx="1395256" cy="1433588"/>
-          </a:xfrm>
-          <a:prstGeom prst="rect">
-            <a:avLst/>
-          </a:prstGeom>
-          <a:noFill/>
-          <a:ln>
-            <a:noFill/>
-          </a:ln>
-        </p:spPr>
-        <p:txBody>
-          <a:bodyPr anchorCtr="0" anchor="ctr" bIns="91425" lIns="91425" spcFirstLastPara="1" rIns="91425" wrap="square" tIns="91425">
-            <a:noAutofit/>
-          </a:bodyPr>
-          <a:lstStyle/>
-          <a:p>
-            <a:pPr indent="0" lvl="0" marL="0" rtl="0" algn="l">
-              <a:spcBef>
-                <a:spcPts val="0"/>
-              </a:spcBef>
-              <a:spcAft>
-                <a:spcPts val="0"/>
-              </a:spcAft>
-              <a:buNone/>
-            </a:pPr>
-            <a:r>
-              <a:t/>
-            </a:r>
-            <a:endParaRPr/>
-          </a:p>
-        </p:txBody>
-      </p:sp>
-      <p:sp>
-        <p:nvSpPr>
-          <p:cNvPr id="567" name="Google Shape;567;p53"/>
-          <p:cNvSpPr/>
-          <p:nvPr/>
-        </p:nvSpPr>
-        <p:spPr>
-          <a:xfrm>
-            <a:off x="5595727" y="2797849"/>
-            <a:ext cx="1395256" cy="1433588"/>
-          </a:xfrm>
-          <a:prstGeom prst="rect">
-            <a:avLst/>
-          </a:prstGeom>
-          <a:noFill/>
-          <a:ln>
-            <a:noFill/>
-          </a:ln>
-        </p:spPr>
-        <p:txBody>
-          <a:bodyPr anchorCtr="0" anchor="ctr" bIns="91425" lIns="91425" spcFirstLastPara="1" rIns="91425" wrap="square" tIns="91425">
-            <a:noAutofit/>
-          </a:bodyPr>
-          <a:lstStyle/>
-          <a:p>
-            <a:pPr indent="0" lvl="0" marL="0" rtl="0" algn="l">
-              <a:spcBef>
-                <a:spcPts val="0"/>
-              </a:spcBef>
-              <a:spcAft>
-                <a:spcPts val="0"/>
-              </a:spcAft>
-              <a:buNone/>
-            </a:pPr>
-            <a:r>
-              <a:t/>
-            </a:r>
-            <a:endParaRPr/>
-          </a:p>
-        </p:txBody>
-      </p:sp>
-      <p:sp>
-        <p:nvSpPr>
-          <p:cNvPr id="571" name="Google Shape;571;p53"/>
-          <p:cNvSpPr/>
-          <p:nvPr/>
-        </p:nvSpPr>
-        <p:spPr>
-          <a:xfrm>
-            <a:off x="7359897" y="2797849"/>
-            <a:ext cx="1395256" cy="1433588"/>
-          </a:xfrm>
-          <a:prstGeom prst="rect">
-            <a:avLst/>
-          </a:prstGeom>
-          <a:noFill/>
-          <a:ln>
-            <a:noFill/>
-          </a:ln>
-        </p:spPr>
-        <p:txBody>
-          <a:bodyPr anchorCtr="0" anchor="ctr" bIns="91425" lIns="91425" spcFirstLastPara="1" rIns="91425" wrap="square" tIns="91425">
-            <a:noAutofit/>
-          </a:bodyPr>
-          <a:lstStyle/>
-          <a:p>
-            <a:pPr indent="0" lvl="0" marL="0" rtl="0" algn="l">
-              <a:spcBef>
-                <a:spcPts val="0"/>
-              </a:spcBef>
-              <a:spcAft>
-                <a:spcPts val="0"/>
-              </a:spcAft>
-              <a:buNone/>
-            </a:pPr>
-            <a:r>
-              <a:t/>
-            </a:r>
-            <a:endParaRPr/>
-          </a:p>
-        </p:txBody>
-      </p:sp>
-      <p:sp>
-        <p:nvSpPr>
-          <p:cNvPr id="572" name="title"/>
+          <p:cNvPr id="555" name="title"/>
           <p:cNvSpPr txBox="1"/>
           <p:nvPr/>
         </p:nvSpPr>
@@ -8881,21 +8594,21 @@
                 <a:ea typeface="Play"/>
                 <a:cs typeface="Play"/>
               </a:rPr>
-              <a:t>Риски</a:t>
+              <a:t>Ресурсы и сроки</a:t>
             </a:r>
           </a:p>
         </p:txBody>
       </p:sp>
       <p:sp>
         <p:nvSpPr>
-          <p:cNvPr id="573" name="body_left"/>
+          <p:cNvPr id="556" name="body_left"/>
           <p:cNvSpPr txBox="1"/>
           <p:nvPr/>
         </p:nvSpPr>
         <p:spPr>
           <a:xfrm>
-            <a:off x="274320" y="1891002"/>
-            <a:ext cx="4035247" cy="1422400"/>
+            <a:off x="274320" y="1414513"/>
+            <a:ext cx="4035247" cy="2851865"/>
           </a:xfrm>
           <a:prstGeom prst="rect">
             <a:avLst/>
@@ -8930,7 +8643,7 @@
                 <a:ea typeface="Play"/>
                 <a:cs typeface="Play"/>
               </a:rPr>
-              <a:t>• Слабая модель может выдумать цифры, аудит проверяет каждое число</a:t>
+              <a:t>• Сервис работает на 2 vCPU / 2 ГБ RAM</a:t>
             </a:r>
           </a:p>
           <a:p>
@@ -8956,21 +8669,47 @@
                 <a:ea typeface="Play"/>
                 <a:cs typeface="Play"/>
               </a:rPr>
-              <a:t>• Неправильный шаблон может привести к плохому дизайну, сервис использует рабочую область</a:t>
+              <a:t>• Инференс за 6 недель стоит 1 400 руб</a:t>
+            </a:r>
+          </a:p>
+          <a:p>
+            <a:pPr algn="l">
+              <a:spcAft>
+                <a:spcPts val="300"/>
+              </a:spcAft>
+              <a:defRPr sz="1600">
+                <a:solidFill>
+                  <a:srgbClr val="000000"/>
+                </a:solidFill>
+                <a:latin typeface="Play"/>
+                <a:ea typeface="Play"/>
+                <a:cs typeface="Play"/>
+              </a:defRPr>
+            </a:pPr>
+            <a:r>
+              <a:rPr sz="1600">
+                <a:solidFill>
+                  <a:srgbClr val="000000"/>
+                </a:solidFill>
+                <a:latin typeface="Play"/>
+                <a:ea typeface="Play"/>
+                <a:cs typeface="Play"/>
+              </a:rPr>
+              <a:t>• План: Q3 2026 подключить 4 команды, домен и HTTPS</a:t>
             </a:r>
           </a:p>
         </p:txBody>
       </p:sp>
       <p:sp>
         <p:nvSpPr>
-          <p:cNvPr id="574" name="body_right"/>
+          <p:cNvPr id="557" name="body_right"/>
           <p:cNvSpPr txBox="1"/>
           <p:nvPr/>
         </p:nvSpPr>
         <p:spPr>
           <a:xfrm>
-            <a:off x="4583887" y="1891002"/>
-            <a:ext cx="4035247" cy="1422400"/>
+            <a:off x="4583887" y="1414513"/>
+            <a:ext cx="4035247" cy="2851865"/>
           </a:xfrm>
           <a:prstGeom prst="rect">
             <a:avLst/>
@@ -9005,7 +8744,7 @@
                 <a:ea typeface="Play"/>
                 <a:cs typeface="Play"/>
               </a:rPr>
-              <a:t>• Нагрузка выше 20 задач требует внешней очереди</a:t>
+              <a:t>• Q4 2026 доступ для всей компании, интеграция с хранилищем</a:t>
             </a:r>
           </a:p>
           <a:p>
@@ -9031,7 +8770,7 @@
                 <a:ea typeface="Play"/>
                 <a:cs typeface="Play"/>
               </a:rPr>
-              <a:t>• Зависимость от OpenAI‑совместимого протокола может ограничить масштаб</a:t>
+              <a:t>• Q1 2027 генерация иллюстраций под стиль шаблона</a:t>
             </a:r>
           </a:p>
         </p:txBody>
@@ -9056,19 +8795,23 @@
       <p:grpSpPr/>
       <p:sp>
         <p:nvSpPr>
-          <p:cNvPr id="662" name="Google Shape;662;p55"/>
+          <p:cNvPr id="1027" name="Google Shape;1027;p65"/>
           <p:cNvSpPr/>
           <p:nvPr/>
         </p:nvSpPr>
         <p:spPr>
           <a:xfrm>
-            <a:off x="8667705" y="4666977"/>
-            <a:ext cx="190499" cy="190475"/>
+            <a:off x="6064222" y="1209852"/>
+            <a:ext cx="2793985" cy="3014270"/>
           </a:xfrm>
-          <a:prstGeom prst="rect">
-            <a:avLst/>
+          <a:prstGeom prst="roundRect">
+            <a:avLst>
+              <a:gd fmla="val 3436" name="adj"/>
+            </a:avLst>
           </a:prstGeom>
-          <a:noFill/>
+          <a:solidFill>
+            <a:schemeClr val="lt2"/>
+          </a:solidFill>
           <a:ln>
             <a:noFill/>
           </a:ln>
@@ -9097,7 +8840,97 @@
       </p:sp>
       <p:sp>
         <p:nvSpPr>
-          <p:cNvPr id="663" name="Google Shape;663;p55"/>
+          <p:cNvPr id="1029" name="Google Shape;1029;p65"/>
+          <p:cNvSpPr/>
+          <p:nvPr/>
+        </p:nvSpPr>
+        <p:spPr>
+          <a:xfrm>
+            <a:off x="3174981" y="1209852"/>
+            <a:ext cx="2793985" cy="3014270"/>
+          </a:xfrm>
+          <a:prstGeom prst="roundRect">
+            <a:avLst>
+              <a:gd fmla="val 3436" name="adj"/>
+            </a:avLst>
+          </a:prstGeom>
+          <a:solidFill>
+            <a:schemeClr val="lt2"/>
+          </a:solidFill>
+          <a:ln>
+            <a:noFill/>
+          </a:ln>
+        </p:spPr>
+        <p:txBody>
+          <a:bodyPr anchorCtr="0" anchor="ctr" bIns="91425" lIns="91425" spcFirstLastPara="1" rIns="91425" wrap="square" tIns="91425">
+            <a:noAutofit/>
+          </a:bodyPr>
+          <a:lstStyle/>
+          <a:p>
+            <a:pPr indent="0" lvl="0" marL="0" rtl="0" algn="l">
+              <a:spcBef>
+                <a:spcPts val="0"/>
+              </a:spcBef>
+              <a:spcAft>
+                <a:spcPts val="0"/>
+              </a:spcAft>
+              <a:buNone/>
+            </a:pPr>
+            <a:r>
+              <a:t/>
+            </a:r>
+            <a:endParaRPr/>
+          </a:p>
+        </p:txBody>
+      </p:sp>
+      <p:sp>
+        <p:nvSpPr>
+          <p:cNvPr id="1031" name="Google Shape;1031;p65"/>
+          <p:cNvSpPr/>
+          <p:nvPr/>
+        </p:nvSpPr>
+        <p:spPr>
+          <a:xfrm>
+            <a:off x="285749" y="1209852"/>
+            <a:ext cx="2793985" cy="3014270"/>
+          </a:xfrm>
+          <a:prstGeom prst="roundRect">
+            <a:avLst>
+              <a:gd fmla="val 3436" name="adj"/>
+            </a:avLst>
+          </a:prstGeom>
+          <a:solidFill>
+            <a:schemeClr val="lt2"/>
+          </a:solidFill>
+          <a:ln>
+            <a:noFill/>
+          </a:ln>
+        </p:spPr>
+        <p:txBody>
+          <a:bodyPr anchorCtr="0" anchor="ctr" bIns="91425" lIns="91425" spcFirstLastPara="1" rIns="91425" wrap="square" tIns="91425">
+            <a:noAutofit/>
+          </a:bodyPr>
+          <a:lstStyle/>
+          <a:p>
+            <a:pPr indent="0" lvl="0" marL="0" rtl="0" algn="l">
+              <a:spcBef>
+                <a:spcPts val="0"/>
+              </a:spcBef>
+              <a:spcAft>
+                <a:spcPts val="0"/>
+              </a:spcAft>
+              <a:buNone/>
+            </a:pPr>
+            <a:r>
+              <a:t/>
+            </a:r>
+            <a:endParaRPr/>
+          </a:p>
+        </p:txBody>
+      </p:sp>
+      <p:sp>
+        <p:nvSpPr>
+          <p:cNvPr id="1032" name="Google Shape;1032;p65"/>
           <p:cNvSpPr/>
           <p:nvPr/>
         </p:nvSpPr>
@@ -9138,7 +8971,7 @@
       </p:sp>
       <p:sp>
         <p:nvSpPr>
-          <p:cNvPr id="664" name="Google Shape;664;p55"/>
+          <p:cNvPr id="1033" name="Google Shape;1033;p65"/>
           <p:cNvSpPr/>
           <p:nvPr/>
         </p:nvSpPr>
@@ -9179,367 +9012,7 @@
       </p:sp>
       <p:sp>
         <p:nvSpPr>
-          <p:cNvPr id="665" name="Google Shape;665;p55"/>
-          <p:cNvSpPr/>
-          <p:nvPr/>
-        </p:nvSpPr>
-        <p:spPr>
-          <a:xfrm>
-            <a:off x="285749" y="1209852"/>
-            <a:ext cx="2071677" cy="3014270"/>
-          </a:xfrm>
-          <a:prstGeom prst="roundRect">
-            <a:avLst>
-              <a:gd fmla="val 4634" name="adj"/>
-            </a:avLst>
-          </a:prstGeom>
-          <a:solidFill>
-            <a:schemeClr val="lt2"/>
-          </a:solidFill>
-          <a:ln>
-            <a:noFill/>
-          </a:ln>
-        </p:spPr>
-        <p:txBody>
-          <a:bodyPr anchorCtr="0" anchor="ctr" bIns="91425" lIns="91425" spcFirstLastPara="1" rIns="91425" wrap="square" tIns="91425">
-            <a:noAutofit/>
-          </a:bodyPr>
-          <a:lstStyle/>
-          <a:p>
-            <a:pPr indent="0" lvl="0" marL="0" rtl="0" algn="l">
-              <a:spcBef>
-                <a:spcPts val="0"/>
-              </a:spcBef>
-              <a:spcAft>
-                <a:spcPts val="0"/>
-              </a:spcAft>
-              <a:buNone/>
-            </a:pPr>
-            <a:r>
-              <a:t/>
-            </a:r>
-            <a:endParaRPr/>
-          </a:p>
-        </p:txBody>
-      </p:sp>
-      <p:sp>
-        <p:nvSpPr>
-          <p:cNvPr id="667" name="Google Shape;667;p55"/>
-          <p:cNvSpPr/>
-          <p:nvPr/>
-        </p:nvSpPr>
-        <p:spPr>
-          <a:xfrm>
-            <a:off x="438148" y="1362233"/>
-            <a:ext cx="76199" cy="76190"/>
-          </a:xfrm>
-          <a:prstGeom prst="roundRect">
-            <a:avLst>
-              <a:gd fmla="val 31500" name="adj"/>
-            </a:avLst>
-          </a:prstGeom>
-          <a:solidFill>
-            <a:srgbClr val="0077FF"/>
-          </a:solidFill>
-          <a:ln>
-            <a:noFill/>
-          </a:ln>
-        </p:spPr>
-        <p:txBody>
-          <a:bodyPr anchorCtr="0" anchor="ctr" bIns="91425" lIns="91425" spcFirstLastPara="1" rIns="91425" wrap="square" tIns="91425">
-            <a:noAutofit/>
-          </a:bodyPr>
-          <a:lstStyle/>
-          <a:p>
-            <a:pPr indent="0" lvl="0" marL="0" rtl="0" algn="l">
-              <a:spcBef>
-                <a:spcPts val="0"/>
-              </a:spcBef>
-              <a:spcAft>
-                <a:spcPts val="0"/>
-              </a:spcAft>
-              <a:buNone/>
-            </a:pPr>
-            <a:r>
-              <a:t/>
-            </a:r>
-            <a:endParaRPr/>
-          </a:p>
-        </p:txBody>
-      </p:sp>
-      <p:sp>
-        <p:nvSpPr>
-          <p:cNvPr id="670" name="Google Shape;670;p55"/>
-          <p:cNvSpPr/>
-          <p:nvPr/>
-        </p:nvSpPr>
-        <p:spPr>
-          <a:xfrm>
-            <a:off x="2452675" y="1209852"/>
-            <a:ext cx="2071677" cy="3014270"/>
-          </a:xfrm>
-          <a:prstGeom prst="roundRect">
-            <a:avLst>
-              <a:gd fmla="val 4634" name="adj"/>
-            </a:avLst>
-          </a:prstGeom>
-          <a:solidFill>
-            <a:schemeClr val="lt2"/>
-          </a:solidFill>
-          <a:ln>
-            <a:noFill/>
-          </a:ln>
-        </p:spPr>
-        <p:txBody>
-          <a:bodyPr anchorCtr="0" anchor="ctr" bIns="91425" lIns="91425" spcFirstLastPara="1" rIns="91425" wrap="square" tIns="91425">
-            <a:noAutofit/>
-          </a:bodyPr>
-          <a:lstStyle/>
-          <a:p>
-            <a:pPr indent="0" lvl="0" marL="0" rtl="0" algn="l">
-              <a:spcBef>
-                <a:spcPts val="0"/>
-              </a:spcBef>
-              <a:spcAft>
-                <a:spcPts val="0"/>
-              </a:spcAft>
-              <a:buNone/>
-            </a:pPr>
-            <a:r>
-              <a:t/>
-            </a:r>
-            <a:endParaRPr/>
-          </a:p>
-        </p:txBody>
-      </p:sp>
-      <p:sp>
-        <p:nvSpPr>
-          <p:cNvPr id="672" name="Google Shape;672;p55"/>
-          <p:cNvSpPr/>
-          <p:nvPr/>
-        </p:nvSpPr>
-        <p:spPr>
-          <a:xfrm>
-            <a:off x="2605074" y="1362233"/>
-            <a:ext cx="76199" cy="76190"/>
-          </a:xfrm>
-          <a:prstGeom prst="roundRect">
-            <a:avLst>
-              <a:gd fmla="val 31500" name="adj"/>
-            </a:avLst>
-          </a:prstGeom>
-          <a:solidFill>
-            <a:srgbClr val="0077FF"/>
-          </a:solidFill>
-          <a:ln>
-            <a:noFill/>
-          </a:ln>
-        </p:spPr>
-        <p:txBody>
-          <a:bodyPr anchorCtr="0" anchor="ctr" bIns="91425" lIns="91425" spcFirstLastPara="1" rIns="91425" wrap="square" tIns="91425">
-            <a:noAutofit/>
-          </a:bodyPr>
-          <a:lstStyle/>
-          <a:p>
-            <a:pPr indent="0" lvl="0" marL="0" rtl="0" algn="l">
-              <a:spcBef>
-                <a:spcPts val="0"/>
-              </a:spcBef>
-              <a:spcAft>
-                <a:spcPts val="0"/>
-              </a:spcAft>
-              <a:buNone/>
-            </a:pPr>
-            <a:r>
-              <a:t/>
-            </a:r>
-            <a:endParaRPr/>
-          </a:p>
-        </p:txBody>
-      </p:sp>
-      <p:sp>
-        <p:nvSpPr>
-          <p:cNvPr id="675" name="Google Shape;675;p55"/>
-          <p:cNvSpPr/>
-          <p:nvPr/>
-        </p:nvSpPr>
-        <p:spPr>
-          <a:xfrm>
-            <a:off x="4619601" y="1209852"/>
-            <a:ext cx="2071677" cy="3014270"/>
-          </a:xfrm>
-          <a:prstGeom prst="roundRect">
-            <a:avLst>
-              <a:gd fmla="val 4634" name="adj"/>
-            </a:avLst>
-          </a:prstGeom>
-          <a:solidFill>
-            <a:schemeClr val="lt2"/>
-          </a:solidFill>
-          <a:ln>
-            <a:noFill/>
-          </a:ln>
-        </p:spPr>
-        <p:txBody>
-          <a:bodyPr anchorCtr="0" anchor="ctr" bIns="91425" lIns="91425" spcFirstLastPara="1" rIns="91425" wrap="square" tIns="91425">
-            <a:noAutofit/>
-          </a:bodyPr>
-          <a:lstStyle/>
-          <a:p>
-            <a:pPr indent="0" lvl="0" marL="0" rtl="0" algn="l">
-              <a:spcBef>
-                <a:spcPts val="0"/>
-              </a:spcBef>
-              <a:spcAft>
-                <a:spcPts val="0"/>
-              </a:spcAft>
-              <a:buNone/>
-            </a:pPr>
-            <a:r>
-              <a:t/>
-            </a:r>
-            <a:endParaRPr/>
-          </a:p>
-        </p:txBody>
-      </p:sp>
-      <p:sp>
-        <p:nvSpPr>
-          <p:cNvPr id="677" name="Google Shape;677;p55"/>
-          <p:cNvSpPr/>
-          <p:nvPr/>
-        </p:nvSpPr>
-        <p:spPr>
-          <a:xfrm>
-            <a:off x="4772001" y="1362233"/>
-            <a:ext cx="76199" cy="76190"/>
-          </a:xfrm>
-          <a:prstGeom prst="roundRect">
-            <a:avLst>
-              <a:gd fmla="val 31500" name="adj"/>
-            </a:avLst>
-          </a:prstGeom>
-          <a:solidFill>
-            <a:srgbClr val="0077FF"/>
-          </a:solidFill>
-          <a:ln>
-            <a:noFill/>
-          </a:ln>
-        </p:spPr>
-        <p:txBody>
-          <a:bodyPr anchorCtr="0" anchor="ctr" bIns="91425" lIns="91425" spcFirstLastPara="1" rIns="91425" wrap="square" tIns="91425">
-            <a:noAutofit/>
-          </a:bodyPr>
-          <a:lstStyle/>
-          <a:p>
-            <a:pPr indent="0" lvl="0" marL="0" rtl="0" algn="l">
-              <a:spcBef>
-                <a:spcPts val="0"/>
-              </a:spcBef>
-              <a:spcAft>
-                <a:spcPts val="0"/>
-              </a:spcAft>
-              <a:buNone/>
-            </a:pPr>
-            <a:r>
-              <a:t/>
-            </a:r>
-            <a:endParaRPr/>
-          </a:p>
-        </p:txBody>
-      </p:sp>
-      <p:sp>
-        <p:nvSpPr>
-          <p:cNvPr id="680" name="Google Shape;680;p55"/>
-          <p:cNvSpPr/>
-          <p:nvPr/>
-        </p:nvSpPr>
-        <p:spPr>
-          <a:xfrm>
-            <a:off x="6786527" y="1209852"/>
-            <a:ext cx="2071677" cy="3014270"/>
-          </a:xfrm>
-          <a:prstGeom prst="roundRect">
-            <a:avLst>
-              <a:gd fmla="val 4634" name="adj"/>
-            </a:avLst>
-          </a:prstGeom>
-          <a:solidFill>
-            <a:schemeClr val="lt2"/>
-          </a:solidFill>
-          <a:ln>
-            <a:noFill/>
-          </a:ln>
-        </p:spPr>
-        <p:txBody>
-          <a:bodyPr anchorCtr="0" anchor="ctr" bIns="91425" lIns="91425" spcFirstLastPara="1" rIns="91425" wrap="square" tIns="91425">
-            <a:noAutofit/>
-          </a:bodyPr>
-          <a:lstStyle/>
-          <a:p>
-            <a:pPr indent="0" lvl="0" marL="0" rtl="0" algn="l">
-              <a:spcBef>
-                <a:spcPts val="0"/>
-              </a:spcBef>
-              <a:spcAft>
-                <a:spcPts val="0"/>
-              </a:spcAft>
-              <a:buNone/>
-            </a:pPr>
-            <a:r>
-              <a:t/>
-            </a:r>
-            <a:endParaRPr/>
-          </a:p>
-        </p:txBody>
-      </p:sp>
-      <p:sp>
-        <p:nvSpPr>
-          <p:cNvPr id="682" name="Google Shape;682;p55"/>
-          <p:cNvSpPr/>
-          <p:nvPr/>
-        </p:nvSpPr>
-        <p:spPr>
-          <a:xfrm>
-            <a:off x="6938927" y="1362233"/>
-            <a:ext cx="76199" cy="76190"/>
-          </a:xfrm>
-          <a:prstGeom prst="roundRect">
-            <a:avLst>
-              <a:gd fmla="val 31500" name="adj"/>
-            </a:avLst>
-          </a:prstGeom>
-          <a:solidFill>
-            <a:srgbClr val="0077FF"/>
-          </a:solidFill>
-          <a:ln>
-            <a:noFill/>
-          </a:ln>
-        </p:spPr>
-        <p:txBody>
-          <a:bodyPr anchorCtr="0" anchor="ctr" bIns="91425" lIns="91425" spcFirstLastPara="1" rIns="91425" wrap="square" tIns="91425">
-            <a:noAutofit/>
-          </a:bodyPr>
-          <a:lstStyle/>
-          <a:p>
-            <a:pPr indent="0" lvl="0" marL="0" rtl="0" algn="l">
-              <a:spcBef>
-                <a:spcPts val="0"/>
-              </a:spcBef>
-              <a:spcAft>
-                <a:spcPts val="0"/>
-              </a:spcAft>
-              <a:buNone/>
-            </a:pPr>
-            <a:r>
-              <a:t/>
-            </a:r>
-            <a:endParaRPr/>
-          </a:p>
-        </p:txBody>
-      </p:sp>
-      <p:sp>
-        <p:nvSpPr>
-          <p:cNvPr id="683" name="title"/>
+          <p:cNvPr id="1034" name="title"/>
           <p:cNvSpPr txBox="1"/>
           <p:nvPr/>
         </p:nvSpPr>
@@ -9581,21 +9054,21 @@
                 <a:ea typeface="Play"/>
                 <a:cs typeface="Play"/>
               </a:rPr>
-              <a:t>Преимущества для компании</a:t>
+              <a:t>Риски</a:t>
             </a:r>
           </a:p>
         </p:txBody>
       </p:sp>
       <p:sp>
         <p:nvSpPr>
-          <p:cNvPr id="684" name="body_left"/>
+          <p:cNvPr id="1035" name="body"/>
           <p:cNvSpPr txBox="1"/>
           <p:nvPr/>
         </p:nvSpPr>
         <p:spPr>
           <a:xfrm>
             <a:off x="274320" y="1414513"/>
-            <a:ext cx="4035247" cy="2695296"/>
+            <a:ext cx="8344814" cy="1046136"/>
           </a:xfrm>
           <a:prstGeom prst="rect">
             <a:avLst/>
@@ -9630,7 +9103,7 @@
                 <a:ea typeface="Play"/>
                 <a:cs typeface="Play"/>
               </a:rPr>
-              <a:t>• Сокращение времени создания презентаций до 4 мин</a:t>
+              <a:t>• Модель может выдумать цифры, аудит проверяет источники</a:t>
             </a:r>
           </a:p>
           <a:p>
@@ -9656,32 +9129,9 @@
                 <a:ea typeface="Play"/>
                 <a:cs typeface="Play"/>
               </a:rPr>
-              <a:t>• Увеличение количества готовых колод за тот же период</a:t>
+              <a:t>• Плохой шаблон приводит к использованию рабочей области</a:t>
             </a:r>
           </a:p>
-        </p:txBody>
-      </p:sp>
-      <p:sp>
-        <p:nvSpPr>
-          <p:cNvPr id="685" name="body_right"/>
-          <p:cNvSpPr txBox="1"/>
-          <p:nvPr/>
-        </p:nvSpPr>
-        <p:spPr>
-          <a:xfrm>
-            <a:off x="4583887" y="1414513"/>
-            <a:ext cx="4035247" cy="2695296"/>
-          </a:xfrm>
-          <a:prstGeom prst="rect">
-            <a:avLst/>
-          </a:prstGeom>
-          <a:noFill/>
-        </p:spPr>
-        <p:txBody>
-          <a:bodyPr wrap="square" lIns="76200" rIns="76200" tIns="50800" bIns="50800">
-            <a:spAutoFit/>
-          </a:bodyPr>
-          <a:lstStyle/>
           <a:p>
             <a:pPr algn="l">
               <a:spcAft>
@@ -9705,33 +9155,7 @@
                 <a:ea typeface="Play"/>
                 <a:cs typeface="Play"/>
               </a:rPr>
-              <a:t>• Снижение ошибок фирменного стиля до 3%</a:t>
-            </a:r>
-          </a:p>
-          <a:p>
-            <a:pPr algn="l">
-              <a:spcAft>
-                <a:spcPts val="300"/>
-              </a:spcAft>
-              <a:defRPr sz="1800">
-                <a:solidFill>
-                  <a:srgbClr val="000000"/>
-                </a:solidFill>
-                <a:latin typeface="Play"/>
-                <a:ea typeface="Play"/>
-                <a:cs typeface="Play"/>
-              </a:defRPr>
-            </a:pPr>
-            <a:r>
-              <a:rPr sz="1800">
-                <a:solidFill>
-                  <a:srgbClr val="000000"/>
-                </a:solidFill>
-                <a:latin typeface="Play"/>
-                <a:ea typeface="Play"/>
-                <a:cs typeface="Play"/>
-              </a:rPr>
-              <a:t>• Повышение эффективности дизайнеров, освобождение от рутинных задач</a:t>
+              <a:t>• Нагрузка выше 20 задач требует внешней очереди</a:t>
             </a:r>
           </a:p>
         </p:txBody>
@@ -9763,7 +9187,7 @@
         <p:spPr>
           <a:xfrm>
             <a:off x="445963" y="1555901"/>
-            <a:ext cx="8300171" cy="2974022"/>
+            <a:ext cx="8300171" cy="2610802"/>
           </a:xfrm>
           <a:prstGeom prst="roundRect">
             <a:avLst/>
@@ -9809,7 +9233,7 @@
         <p:spPr>
           <a:xfrm>
             <a:off x="572963" y="1682901"/>
-            <a:ext cx="4373118" cy="655320"/>
+            <a:ext cx="4373118" cy="1183640"/>
           </a:xfrm>
           <a:prstGeom prst="rect">
             <a:avLst/>
@@ -9844,21 +9268,21 @@
                 <a:ea typeface="Play"/>
                 <a:cs typeface="Play"/>
               </a:rPr>
-              <a:t>Итоги</a:t>
+              <a:t>Решение: запуск на всю компанию</a:t>
             </a:r>
           </a:p>
         </p:txBody>
       </p:sp>
       <p:sp>
         <p:nvSpPr>
-          <p:cNvPr id="4" name="body_left"/>
+          <p:cNvPr id="4" name="body"/>
           <p:cNvSpPr txBox="1"/>
           <p:nvPr/>
         </p:nvSpPr>
         <p:spPr>
           <a:xfrm>
-            <a:off x="572963" y="2518244"/>
-            <a:ext cx="3885925" cy="1905165"/>
+            <a:off x="572963" y="3046564"/>
+            <a:ext cx="8046171" cy="1376845"/>
           </a:xfrm>
           <a:prstGeom prst="rect">
             <a:avLst/>
@@ -9893,7 +9317,7 @@
                 <a:ea typeface="Play"/>
                 <a:cs typeface="Play"/>
               </a:rPr>
-              <a:t>• Сервис готов к масштабированию, требуется одобрение руководства</a:t>
+              <a:t>• Попросить решение о запуске на всю компанию</a:t>
             </a:r>
           </a:p>
           <a:p>
@@ -9919,32 +9343,9 @@
                 <a:ea typeface="Play"/>
                 <a:cs typeface="Play"/>
               </a:rPr>
-              <a:t>• Ожидается экономия времени и повышение качества презентаций</a:t>
+              <a:t>• Ожидаем сокращения времени сборки до 4 мин</a:t>
             </a:r>
           </a:p>
-        </p:txBody>
-      </p:sp>
-      <p:sp>
-        <p:nvSpPr>
-          <p:cNvPr id="5" name="body_right"/>
-          <p:cNvSpPr txBox="1"/>
-          <p:nvPr/>
-        </p:nvSpPr>
-        <p:spPr>
-          <a:xfrm>
-            <a:off x="4733208" y="2518244"/>
-            <a:ext cx="3885925" cy="1905165"/>
-          </a:xfrm>
-          <a:prstGeom prst="rect">
-            <a:avLst/>
-          </a:prstGeom>
-          <a:noFill/>
-        </p:spPr>
-        <p:txBody>
-          <a:bodyPr wrap="square" lIns="76200" rIns="76200" tIns="50800" bIns="50800">
-            <a:spAutoFit/>
-          </a:bodyPr>
-          <a:lstStyle/>
           <a:p>
             <a:pPr algn="l">
               <a:spcAft>
@@ -9968,33 +9369,7 @@
                 <a:ea typeface="Play"/>
                 <a:cs typeface="Play"/>
               </a:rPr>
-              <a:t>• Пилот подтвердил работоспособность и низкие затраты</a:t>
-            </a:r>
-          </a:p>
-          <a:p>
-            <a:pPr algn="l">
-              <a:spcAft>
-                <a:spcPts val="300"/>
-              </a:spcAft>
-              <a:defRPr sz="1800">
-                <a:solidFill>
-                  <a:srgbClr val="000000"/>
-                </a:solidFill>
-                <a:latin typeface="Play"/>
-                <a:ea typeface="Play"/>
-                <a:cs typeface="Play"/>
-              </a:defRPr>
-            </a:pPr>
-            <a:r>
-              <a:rPr sz="1800">
-                <a:solidFill>
-                  <a:srgbClr val="000000"/>
-                </a:solidFill>
-                <a:latin typeface="Play"/>
-                <a:ea typeface="Play"/>
-                <a:cs typeface="Play"/>
-              </a:rPr>
-              <a:t>• Риски минимизированы благодаря аудитам и резерву</a:t>
+              <a:t>• Планируем интеграцию с корпоративными системами</a:t>
             </a:r>
           </a:p>
         </p:txBody>

--- a/samples/VK_Tech_шаблон__split.pptx
+++ b/samples/VK_Tech_шаблон__split.pptx
@@ -279,7 +279,7 @@
               <c:strCache>
                 <c:ptCount val="1"/>
                 <c:pt idx="0">
-                  <c:v>Время, мин</c:v>
+                  <c:v>Время (мин)</c:v>
                 </c:pt>
               </c:strCache>
             </c:strRef>
@@ -300,10 +300,10 @@
               <c:strCache>
                 <c:ptCount val="2"/>
                 <c:pt idx="0">
-                  <c:v>До</c:v>
+                  <c:v>Текущее</c:v>
                 </c:pt>
                 <c:pt idx="1">
-                  <c:v>После</c:v>
+                  <c:v>Пилот</c:v>
                 </c:pt>
               </c:strCache>
             </c:strRef>
@@ -419,7 +419,7 @@
                   </a:defRPr>
                 </a:pPr>
                 <a:r>
-                  <a:t>Время, мин, мин</a:t>
+                  <a:t>Время (мин), мин</a:t>
                 </a:r>
               </a:p>
             </c:rich>
@@ -514,10 +514,10 @@
               <c:strCache>
                 <c:ptCount val="2"/>
                 <c:pt idx="0">
-                  <c:v>До</c:v>
+                  <c:v>Текущее</c:v>
                 </c:pt>
                 <c:pt idx="1">
-                  <c:v>После</c:v>
+                  <c:v>Пилот</c:v>
                 </c:pt>
               </c:strCache>
             </c:strRef>
@@ -539,7 +539,7 @@
           </c:val>
         </c:ser>
         <c:dLbls>
-          <c:numFmt formatCode="0&quot; кол-во&quot;" sourceLinked="0"/>
+          <c:numFmt formatCode="0&quot; колоды&quot;" sourceLinked="0"/>
           <c:txPr>
             <a:bodyPr wrap="none"/>
             <a:lstStyle/>
@@ -633,7 +633,429 @@
                   </a:defRPr>
                 </a:pPr>
                 <a:r>
-                  <a:t>Нарушения, кол-во</a:t>
+                  <a:t>Нарушения, колоды</a:t>
+                </a:r>
+              </a:p>
+            </c:rich>
+          </c:tx>
+          <c:layout/>
+          <c:overlay val="0"/>
+        </c:title>
+        <c:majorTickMark val="out"/>
+        <c:minorTickMark val="none"/>
+        <c:tickLblPos val="nextTo"/>
+        <c:txPr>
+          <a:bodyPr/>
+          <a:lstStyle/>
+          <a:p>
+            <a:pPr>
+              <a:defRPr sz="1100" b="0">
+                <a:solidFill>
+                  <a:srgbClr val="000000"/>
+                </a:solidFill>
+                <a:latin typeface="Play"/>
+                <a:ea typeface="Play"/>
+                <a:cs typeface="Play"/>
+              </a:defRPr>
+            </a:pPr>
+          </a:p>
+        </c:txPr>
+        <c:crossAx val="-2068027336"/>
+        <c:crosses val="autoZero"/>
+      </c:valAx>
+    </c:plotArea>
+    <c:dispBlanksAs val="gap"/>
+  </c:chart>
+  <c:txPr>
+    <a:bodyPr/>
+    <a:lstStyle/>
+    <a:p>
+      <a:pPr>
+        <a:defRPr sz="1200" b="0">
+          <a:solidFill>
+            <a:srgbClr val="000000"/>
+          </a:solidFill>
+          <a:latin typeface="Play"/>
+          <a:ea typeface="Play"/>
+          <a:cs typeface="Play"/>
+        </a:defRPr>
+      </a:pPr>
+      <a:endParaRPr lang="en-US"/>
+    </a:p>
+  </c:txPr>
+  <c:externalData r:id="rId1">
+    <c:autoUpdate val="0"/>
+  </c:externalData>
+</c:chartSpace>
+</file>
+
+<file path=ppt/charts/chart3.xml><?xml version="1.0" encoding="utf-8"?>
+<c:chartSpace xmlns:c="http://schemas.openxmlformats.org/drawingml/2006/chart" xmlns:a="http://schemas.openxmlformats.org/drawingml/2006/main" xmlns:r="http://schemas.openxmlformats.org/officeDocument/2006/relationships">
+  <c:date1904 val="0"/>
+  <c:chart>
+    <c:autoTitleDeleted val="1"/>
+    <c:plotArea>
+      <c:barChart>
+        <c:barDir val="col"/>
+        <c:grouping val="clustered"/>
+        <c:ser>
+          <c:idx val="0"/>
+          <c:order val="0"/>
+          <c:tx>
+            <c:strRef>
+              <c:f>Sheet1!$B$1</c:f>
+              <c:strCache>
+                <c:ptCount val="1"/>
+                <c:pt idx="0">
+                  <c:v>Запросы</c:v>
+                </c:pt>
+              </c:strCache>
+            </c:strRef>
+          </c:tx>
+          <c:spPr>
+            <a:solidFill>
+              <a:srgbClr val="0077FF"/>
+            </a:solidFill>
+            <a:ln>
+              <a:solidFill>
+                <a:srgbClr val="0077FF"/>
+              </a:solidFill>
+            </a:ln>
+          </c:spPr>
+          <c:cat>
+            <c:strRef>
+              <c:f>Sheet1!$A$2:$A$3</c:f>
+              <c:strCache>
+                <c:ptCount val="2"/>
+                <c:pt idx="0">
+                  <c:v>Текущее</c:v>
+                </c:pt>
+                <c:pt idx="1">
+                  <c:v>Пилот</c:v>
+                </c:pt>
+              </c:strCache>
+            </c:strRef>
+          </c:cat>
+          <c:val>
+            <c:numRef>
+              <c:f>Sheet1!$B$2:$B$3</c:f>
+              <c:numCache>
+                <c:formatCode>General</c:formatCode>
+                <c:ptCount val="2"/>
+                <c:pt idx="0">
+                  <c:v>11.0</c:v>
+                </c:pt>
+                <c:pt idx="1">
+                  <c:v>38.0</c:v>
+                </c:pt>
+              </c:numCache>
+            </c:numRef>
+          </c:val>
+        </c:ser>
+        <c:dLbls>
+          <c:numFmt formatCode="0&quot; запросов&quot;" sourceLinked="0"/>
+          <c:txPr>
+            <a:bodyPr wrap="none"/>
+            <a:lstStyle/>
+            <a:p>
+              <a:pPr>
+                <a:defRPr sz="1100" b="0">
+                  <a:solidFill>
+                    <a:srgbClr val="000000"/>
+                  </a:solidFill>
+                  <a:latin typeface="Play"/>
+                  <a:ea typeface="Play"/>
+                  <a:cs typeface="Play"/>
+                </a:defRPr>
+              </a:pPr>
+            </a:p>
+          </c:txPr>
+          <c:dLblPos val="outEnd"/>
+          <c:showLegendKey val="0"/>
+          <c:showVal val="1"/>
+          <c:showCatName val="0"/>
+          <c:showSerName val="0"/>
+          <c:showPercent val="0"/>
+          <c:showBubbleSize val="0"/>
+          <c:showLeaderLines val="1"/>
+        </c:dLbls>
+        <c:gapWidth val="60"/>
+        <c:axId val="-2068027336"/>
+        <c:axId val="-2113994440"/>
+      </c:barChart>
+      <c:catAx>
+        <c:axId val="-2068027336"/>
+        <c:scaling>
+          <c:orientation val="minMax"/>
+        </c:scaling>
+        <c:delete val="0"/>
+        <c:axPos val="b"/>
+        <c:majorTickMark val="out"/>
+        <c:minorTickMark val="none"/>
+        <c:tickLblPos val="nextTo"/>
+        <c:txPr>
+          <a:bodyPr/>
+          <a:lstStyle/>
+          <a:p>
+            <a:pPr>
+              <a:defRPr sz="1100" b="0">
+                <a:solidFill>
+                  <a:srgbClr val="000000"/>
+                </a:solidFill>
+                <a:latin typeface="Play"/>
+                <a:ea typeface="Play"/>
+                <a:cs typeface="Play"/>
+              </a:defRPr>
+            </a:pPr>
+          </a:p>
+        </c:txPr>
+        <c:crossAx val="-2113994440"/>
+        <c:crosses val="autoZero"/>
+        <c:auto val="1"/>
+        <c:lblAlgn val="ctr"/>
+        <c:lblOffset val="100"/>
+        <c:noMultiLvlLbl val="0"/>
+      </c:catAx>
+      <c:valAx>
+        <c:axId val="-2113994440"/>
+        <c:scaling/>
+        <c:delete val="0"/>
+        <c:axPos val="l"/>
+        <c:majorGridlines>
+          <c:spPr>
+            <a:ln w="9525">
+              <a:solidFill>
+                <a:srgbClr val="D1D1D1"/>
+              </a:solidFill>
+            </a:ln>
+          </c:spPr>
+        </c:majorGridlines>
+        <c:title>
+          <c:tx>
+            <c:rich>
+              <a:bodyPr rot="0" vert="horz"/>
+              <a:lstStyle/>
+              <a:p>
+                <a:pPr>
+                  <a:defRPr sz="1100" b="0">
+                    <a:solidFill>
+                      <a:srgbClr val="000000"/>
+                    </a:solidFill>
+                    <a:latin typeface="Play"/>
+                    <a:ea typeface="Play"/>
+                    <a:cs typeface="Play"/>
+                  </a:defRPr>
+                </a:pPr>
+                <a:r>
+                  <a:t>Запросы, запросов</a:t>
+                </a:r>
+              </a:p>
+            </c:rich>
+          </c:tx>
+          <c:layout/>
+          <c:overlay val="0"/>
+        </c:title>
+        <c:majorTickMark val="out"/>
+        <c:minorTickMark val="none"/>
+        <c:tickLblPos val="nextTo"/>
+        <c:txPr>
+          <a:bodyPr/>
+          <a:lstStyle/>
+          <a:p>
+            <a:pPr>
+              <a:defRPr sz="1100" b="0">
+                <a:solidFill>
+                  <a:srgbClr val="000000"/>
+                </a:solidFill>
+                <a:latin typeface="Play"/>
+                <a:ea typeface="Play"/>
+                <a:cs typeface="Play"/>
+              </a:defRPr>
+            </a:pPr>
+          </a:p>
+        </c:txPr>
+        <c:crossAx val="-2068027336"/>
+        <c:crosses val="autoZero"/>
+      </c:valAx>
+    </c:plotArea>
+    <c:dispBlanksAs val="gap"/>
+  </c:chart>
+  <c:txPr>
+    <a:bodyPr/>
+    <a:lstStyle/>
+    <a:p>
+      <a:pPr>
+        <a:defRPr sz="1200" b="0">
+          <a:solidFill>
+            <a:srgbClr val="000000"/>
+          </a:solidFill>
+          <a:latin typeface="Play"/>
+          <a:ea typeface="Play"/>
+          <a:cs typeface="Play"/>
+        </a:defRPr>
+      </a:pPr>
+      <a:endParaRPr lang="en-US"/>
+    </a:p>
+  </c:txPr>
+  <c:externalData r:id="rId1">
+    <c:autoUpdate val="0"/>
+  </c:externalData>
+</c:chartSpace>
+</file>
+
+<file path=ppt/charts/chart4.xml><?xml version="1.0" encoding="utf-8"?>
+<c:chartSpace xmlns:c="http://schemas.openxmlformats.org/drawingml/2006/chart" xmlns:a="http://schemas.openxmlformats.org/drawingml/2006/main" xmlns:r="http://schemas.openxmlformats.org/officeDocument/2006/relationships">
+  <c:date1904 val="0"/>
+  <c:chart>
+    <c:autoTitleDeleted val="1"/>
+    <c:plotArea>
+      <c:barChart>
+        <c:barDir val="col"/>
+        <c:grouping val="clustered"/>
+        <c:ser>
+          <c:idx val="0"/>
+          <c:order val="0"/>
+          <c:tx>
+            <c:strRef>
+              <c:f>Sheet1!$B$1</c:f>
+              <c:strCache>
+                <c:ptCount val="1"/>
+                <c:pt idx="0">
+                  <c:v>Стоимость (руб)</c:v>
+                </c:pt>
+              </c:strCache>
+            </c:strRef>
+          </c:tx>
+          <c:spPr>
+            <a:solidFill>
+              <a:srgbClr val="0077FF"/>
+            </a:solidFill>
+            <a:ln>
+              <a:solidFill>
+                <a:srgbClr val="0077FF"/>
+              </a:solidFill>
+            </a:ln>
+          </c:spPr>
+          <c:cat>
+            <c:strRef>
+              <c:f>Sheet1!$A$2:$A$2</c:f>
+              <c:strCache>
+                <c:ptCount val="1"/>
+                <c:pt idx="0">
+                  <c:v>Пилот</c:v>
+                </c:pt>
+              </c:strCache>
+            </c:strRef>
+          </c:cat>
+          <c:val>
+            <c:numRef>
+              <c:f>Sheet1!$B$2:$B$2</c:f>
+              <c:numCache>
+                <c:formatCode>General</c:formatCode>
+                <c:ptCount val="1"/>
+                <c:pt idx="0">
+                  <c:v>1400.0</c:v>
+                </c:pt>
+              </c:numCache>
+            </c:numRef>
+          </c:val>
+        </c:ser>
+        <c:dLbls>
+          <c:numFmt formatCode="0&quot; руб&quot;" sourceLinked="0"/>
+          <c:txPr>
+            <a:bodyPr wrap="none"/>
+            <a:lstStyle/>
+            <a:p>
+              <a:pPr>
+                <a:defRPr sz="1100" b="0">
+                  <a:solidFill>
+                    <a:srgbClr val="000000"/>
+                  </a:solidFill>
+                  <a:latin typeface="Play"/>
+                  <a:ea typeface="Play"/>
+                  <a:cs typeface="Play"/>
+                </a:defRPr>
+              </a:pPr>
+            </a:p>
+          </c:txPr>
+          <c:dLblPos val="outEnd"/>
+          <c:showLegendKey val="0"/>
+          <c:showVal val="1"/>
+          <c:showCatName val="0"/>
+          <c:showSerName val="0"/>
+          <c:showPercent val="0"/>
+          <c:showBubbleSize val="0"/>
+          <c:showLeaderLines val="1"/>
+        </c:dLbls>
+        <c:gapWidth val="60"/>
+        <c:axId val="-2068027336"/>
+        <c:axId val="-2113994440"/>
+      </c:barChart>
+      <c:catAx>
+        <c:axId val="-2068027336"/>
+        <c:scaling>
+          <c:orientation val="minMax"/>
+        </c:scaling>
+        <c:delete val="0"/>
+        <c:axPos val="b"/>
+        <c:majorTickMark val="out"/>
+        <c:minorTickMark val="none"/>
+        <c:tickLblPos val="nextTo"/>
+        <c:txPr>
+          <a:bodyPr/>
+          <a:lstStyle/>
+          <a:p>
+            <a:pPr>
+              <a:defRPr sz="1100" b="0">
+                <a:solidFill>
+                  <a:srgbClr val="000000"/>
+                </a:solidFill>
+                <a:latin typeface="Play"/>
+                <a:ea typeface="Play"/>
+                <a:cs typeface="Play"/>
+              </a:defRPr>
+            </a:pPr>
+          </a:p>
+        </c:txPr>
+        <c:crossAx val="-2113994440"/>
+        <c:crosses val="autoZero"/>
+        <c:auto val="1"/>
+        <c:lblAlgn val="ctr"/>
+        <c:lblOffset val="100"/>
+        <c:noMultiLvlLbl val="0"/>
+      </c:catAx>
+      <c:valAx>
+        <c:axId val="-2113994440"/>
+        <c:scaling/>
+        <c:delete val="0"/>
+        <c:axPos val="l"/>
+        <c:majorGridlines>
+          <c:spPr>
+            <a:ln w="9525">
+              <a:solidFill>
+                <a:srgbClr val="D1D1D1"/>
+              </a:solidFill>
+            </a:ln>
+          </c:spPr>
+        </c:majorGridlines>
+        <c:title>
+          <c:tx>
+            <c:rich>
+              <a:bodyPr rot="0" vert="horz"/>
+              <a:lstStyle/>
+              <a:p>
+                <a:pPr>
+                  <a:defRPr sz="1100" b="0">
+                    <a:solidFill>
+                      <a:srgbClr val="000000"/>
+                    </a:solidFill>
+                    <a:latin typeface="Play"/>
+                    <a:ea typeface="Play"/>
+                    <a:cs typeface="Play"/>
+                  </a:defRPr>
+                </a:pPr>
+                <a:r>
+                  <a:t>Стоимость (руб), руб</a:t>
                 </a:r>
               </a:p>
             </c:rich>
@@ -5684,60 +6106,14 @@
       <p:grpSpPr/>
       <p:sp>
         <p:nvSpPr>
-          <p:cNvPr id="2" name="Rounded Rectangle 1"/>
-          <p:cNvSpPr/>
+          <p:cNvPr id="2" name="title"/>
+          <p:cNvSpPr txBox="1"/>
           <p:nvPr/>
         </p:nvSpPr>
         <p:spPr>
           <a:xfrm>
-            <a:off x="2159000" y="1243485"/>
-            <a:ext cx="4542261" cy="949960"/>
-          </a:xfrm>
-          <a:prstGeom prst="roundRect">
-            <a:avLst/>
-          </a:prstGeom>
-          <a:solidFill>
-            <a:srgbClr val="111111">
-              <a:alpha val="85000"/>
-            </a:srgbClr>
-          </a:solidFill>
-          <a:ln>
-            <a:noFill/>
-          </a:ln>
-          <a:effectLst/>
-        </p:spPr>
-        <p:style>
-          <a:lnRef idx="1">
-            <a:schemeClr val="accent1"/>
-          </a:lnRef>
-          <a:fillRef idx="3">
-            <a:schemeClr val="accent1"/>
-          </a:fillRef>
-          <a:effectRef idx="2">
-            <a:schemeClr val="accent1"/>
-          </a:effectRef>
-          <a:fontRef idx="minor">
-            <a:schemeClr val="lt1"/>
-          </a:fontRef>
-        </p:style>
-        <p:txBody>
-          <a:bodyPr rtlCol="0" anchor="ctr"/>
-          <a:lstStyle/>
-          <a:p>
-            <a:pPr algn="ctr"/>
-          </a:p>
-        </p:txBody>
-      </p:sp>
-      <p:sp>
-        <p:nvSpPr>
-          <p:cNvPr id="3" name="title"/>
-          <p:cNvSpPr txBox="1"/>
-          <p:nvPr/>
-        </p:nvSpPr>
-        <p:spPr>
-          <a:xfrm>
-            <a:off x="2286000" y="1370485"/>
-            <a:ext cx="4288261" cy="721360"/>
+            <a:off x="2473726" y="1370485"/>
+            <a:ext cx="4288261" cy="800071"/>
           </a:xfrm>
           <a:prstGeom prst="rect">
             <a:avLst/>
@@ -5754,7 +6130,7 @@
               <a:spcAft>
                 <a:spcPts val="300"/>
               </a:spcAft>
-              <a:defRPr sz="1800">
+              <a:defRPr sz="1800" b="0">
                 <a:solidFill>
                   <a:srgbClr val="FFFFFF"/>
                 </a:solidFill>
@@ -5764,7 +6140,7 @@
               </a:defRPr>
             </a:pPr>
             <a:r>
-              <a:rPr sz="1800">
+              <a:rPr sz="1800" b="0">
                 <a:solidFill>
                   <a:srgbClr val="FFFFFF"/>
                 </a:solidFill>
@@ -5795,25 +6171,48 @@
         <p:nvPr/>
       </p:nvGrpSpPr>
       <p:grpSpPr/>
-      <p:sp>
-        <p:nvSpPr>
-          <p:cNvPr id="1027" name="Google Shape;1027;p65"/>
+      <p:pic>
+        <p:nvPicPr>
+          <p:cNvPr descr=" " id="2385" name="Google Shape;2385;p88"/>
+          <p:cNvPicPr preferRelativeResize="0"/>
+          <p:nvPr/>
+        </p:nvPicPr>
+        <p:blipFill rotWithShape="1">
+          <a:blip r:embed="rId2">
+            <a:alphaModFix/>
+          </a:blip>
+          <a:srcRect b="0" l="0" r="0" t="0"/>
+          <a:stretch/>
+        </p:blipFill>
+        <p:spPr>
+          <a:xfrm>
+            <a:off x="388142" y="2000324"/>
+            <a:ext cx="8755811" cy="9524"/>
+          </a:xfrm>
+          <a:prstGeom prst="rect">
+            <a:avLst/>
+          </a:prstGeom>
+          <a:noFill/>
+          <a:ln>
+            <a:noFill/>
+          </a:ln>
+        </p:spPr>
+      </p:pic>
+      <p:sp>
+        <p:nvSpPr>
+          <p:cNvPr id="2386" name="Google Shape;2386;p88"/>
           <p:cNvSpPr/>
           <p:nvPr/>
         </p:nvSpPr>
         <p:spPr>
           <a:xfrm>
-            <a:off x="6064222" y="1209852"/>
-            <a:ext cx="2793985" cy="3014270"/>
+            <a:off x="319086" y="1286042"/>
+            <a:ext cx="1690679" cy="1128566"/>
           </a:xfrm>
-          <a:prstGeom prst="roundRect">
-            <a:avLst>
-              <a:gd fmla="val 3436" name="adj"/>
-            </a:avLst>
+          <a:prstGeom prst="rect">
+            <a:avLst/>
           </a:prstGeom>
-          <a:solidFill>
-            <a:schemeClr val="lt2"/>
-          </a:solidFill>
+          <a:noFill/>
           <a:ln>
             <a:noFill/>
           </a:ln>
@@ -5842,23 +6241,19 @@
       </p:sp>
       <p:sp>
         <p:nvSpPr>
-          <p:cNvPr id="1029" name="Google Shape;1029;p65"/>
+          <p:cNvPr id="2388" name="Google Shape;2388;p88"/>
           <p:cNvSpPr/>
           <p:nvPr/>
         </p:nvSpPr>
         <p:spPr>
           <a:xfrm>
-            <a:off x="3174981" y="1209852"/>
-            <a:ext cx="2793985" cy="3014270"/>
+            <a:off x="2600312" y="1286042"/>
+            <a:ext cx="1690679" cy="1128566"/>
           </a:xfrm>
-          <a:prstGeom prst="roundRect">
-            <a:avLst>
-              <a:gd fmla="val 3436" name="adj"/>
-            </a:avLst>
+          <a:prstGeom prst="rect">
+            <a:avLst/>
           </a:prstGeom>
-          <a:solidFill>
-            <a:schemeClr val="lt2"/>
-          </a:solidFill>
+          <a:noFill/>
           <a:ln>
             <a:noFill/>
           </a:ln>
@@ -5887,23 +6282,19 @@
       </p:sp>
       <p:sp>
         <p:nvSpPr>
-          <p:cNvPr id="1031" name="Google Shape;1031;p65"/>
+          <p:cNvPr id="2390" name="Google Shape;2390;p88"/>
           <p:cNvSpPr/>
           <p:nvPr/>
         </p:nvSpPr>
         <p:spPr>
           <a:xfrm>
-            <a:off x="285749" y="1209852"/>
-            <a:ext cx="2793985" cy="3014270"/>
+            <a:off x="4881537" y="1286042"/>
+            <a:ext cx="1690679" cy="1128566"/>
           </a:xfrm>
-          <a:prstGeom prst="roundRect">
-            <a:avLst>
-              <a:gd fmla="val 3436" name="adj"/>
-            </a:avLst>
+          <a:prstGeom prst="rect">
+            <a:avLst/>
           </a:prstGeom>
-          <a:solidFill>
-            <a:schemeClr val="lt2"/>
-          </a:solidFill>
+          <a:noFill/>
           <a:ln>
             <a:noFill/>
           </a:ln>
@@ -5932,7 +6323,400 @@
       </p:sp>
       <p:sp>
         <p:nvSpPr>
-          <p:cNvPr id="1032" name="Google Shape;1032;p65"/>
+          <p:cNvPr id="2392" name="Google Shape;2392;p88"/>
+          <p:cNvSpPr/>
+          <p:nvPr/>
+        </p:nvSpPr>
+        <p:spPr>
+          <a:xfrm>
+            <a:off x="7162763" y="1286042"/>
+            <a:ext cx="1690679" cy="1128566"/>
+          </a:xfrm>
+          <a:prstGeom prst="rect">
+            <a:avLst/>
+          </a:prstGeom>
+          <a:noFill/>
+          <a:ln>
+            <a:noFill/>
+          </a:ln>
+        </p:spPr>
+        <p:txBody>
+          <a:bodyPr anchorCtr="0" anchor="ctr" bIns="91425" lIns="91425" spcFirstLastPara="1" rIns="91425" wrap="square" tIns="91425">
+            <a:noAutofit/>
+          </a:bodyPr>
+          <a:lstStyle/>
+          <a:p>
+            <a:pPr indent="0" lvl="0" marL="0" rtl="0" algn="l">
+              <a:spcBef>
+                <a:spcPts val="0"/>
+              </a:spcBef>
+              <a:spcAft>
+                <a:spcPts val="0"/>
+              </a:spcAft>
+              <a:buNone/>
+            </a:pPr>
+            <a:r>
+              <a:t/>
+            </a:r>
+            <a:endParaRPr/>
+          </a:p>
+        </p:txBody>
+      </p:sp>
+      <p:pic>
+        <p:nvPicPr>
+          <p:cNvPr descr=" " id="2394" name="Google Shape;2394;p88"/>
+          <p:cNvPicPr preferRelativeResize="0"/>
+          <p:nvPr/>
+        </p:nvPicPr>
+        <p:blipFill rotWithShape="1">
+          <a:blip r:embed="rId3">
+            <a:alphaModFix/>
+          </a:blip>
+          <a:srcRect b="0" l="0" r="0" t="0"/>
+          <a:stretch/>
+        </p:blipFill>
+        <p:spPr>
+          <a:xfrm>
+            <a:off x="1" y="3684300"/>
+            <a:ext cx="7238962" cy="70126"/>
+          </a:xfrm>
+          <a:prstGeom prst="rect">
+            <a:avLst/>
+          </a:prstGeom>
+          <a:noFill/>
+          <a:ln>
+            <a:noFill/>
+          </a:ln>
+        </p:spPr>
+      </p:pic>
+      <p:sp>
+        <p:nvSpPr>
+          <p:cNvPr id="2399" name="Google Shape;2399;p88"/>
+          <p:cNvSpPr/>
+          <p:nvPr/>
+        </p:nvSpPr>
+        <p:spPr>
+          <a:xfrm>
+            <a:off x="4881537" y="3000319"/>
+            <a:ext cx="1690679" cy="1128566"/>
+          </a:xfrm>
+          <a:prstGeom prst="rect">
+            <a:avLst/>
+          </a:prstGeom>
+          <a:noFill/>
+          <a:ln>
+            <a:noFill/>
+          </a:ln>
+        </p:spPr>
+        <p:txBody>
+          <a:bodyPr anchorCtr="0" anchor="ctr" bIns="91425" lIns="91425" spcFirstLastPara="1" rIns="91425" wrap="square" tIns="91425">
+            <a:noAutofit/>
+          </a:bodyPr>
+          <a:lstStyle/>
+          <a:p>
+            <a:pPr indent="0" lvl="0" marL="0" rtl="0" algn="l">
+              <a:spcBef>
+                <a:spcPts val="0"/>
+              </a:spcBef>
+              <a:spcAft>
+                <a:spcPts val="0"/>
+              </a:spcAft>
+              <a:buNone/>
+            </a:pPr>
+            <a:r>
+              <a:t/>
+            </a:r>
+            <a:endParaRPr/>
+          </a:p>
+        </p:txBody>
+      </p:sp>
+      <p:sp>
+        <p:nvSpPr>
+          <p:cNvPr id="2400" name="title"/>
+          <p:cNvSpPr txBox="1"/>
+          <p:nvPr/>
+        </p:nvSpPr>
+        <p:spPr>
+          <a:xfrm>
+            <a:off x="274320" y="282943"/>
+            <a:ext cx="6792986" cy="932027"/>
+          </a:xfrm>
+          <a:prstGeom prst="rect">
+            <a:avLst/>
+          </a:prstGeom>
+          <a:noFill/>
+        </p:spPr>
+        <p:txBody>
+          <a:bodyPr wrap="square" lIns="76200" rIns="76200" tIns="50800" bIns="50800">
+            <a:spAutoFit/>
+          </a:bodyPr>
+          <a:lstStyle/>
+          <a:p>
+            <a:pPr algn="l">
+              <a:spcAft>
+                <a:spcPts val="300"/>
+              </a:spcAft>
+              <a:defRPr sz="2438">
+                <a:solidFill>
+                  <a:srgbClr val="000000"/>
+                </a:solidFill>
+                <a:latin typeface="Play"/>
+                <a:ea typeface="Play"/>
+                <a:cs typeface="Play"/>
+              </a:defRPr>
+            </a:pPr>
+            <a:r>
+              <a:rPr sz="2438">
+                <a:solidFill>
+                  <a:srgbClr val="000000"/>
+                </a:solidFill>
+                <a:latin typeface="Play"/>
+                <a:ea typeface="Play"/>
+                <a:cs typeface="Play"/>
+              </a:rPr>
+              <a:t>Текущие трудности в создании презентаций</a:t>
+            </a:r>
+          </a:p>
+        </p:txBody>
+      </p:sp>
+      <p:sp>
+        <p:nvSpPr>
+          <p:cNvPr id="2401" name="body_left"/>
+          <p:cNvSpPr txBox="1"/>
+          <p:nvPr/>
+        </p:nvSpPr>
+        <p:spPr>
+          <a:xfrm>
+            <a:off x="274320" y="2086975"/>
+            <a:ext cx="4035247" cy="1488440"/>
+          </a:xfrm>
+          <a:prstGeom prst="rect">
+            <a:avLst/>
+          </a:prstGeom>
+          <a:noFill/>
+        </p:spPr>
+        <p:txBody>
+          <a:bodyPr wrap="square" lIns="76200" rIns="76200" tIns="50800" bIns="50800">
+            <a:spAutoFit/>
+          </a:bodyPr>
+          <a:lstStyle/>
+          <a:p>
+            <a:pPr algn="l">
+              <a:spcAft>
+                <a:spcPts val="300"/>
+              </a:spcAft>
+              <a:defRPr sz="1400">
+                <a:solidFill>
+                  <a:srgbClr val="000000"/>
+                </a:solidFill>
+                <a:latin typeface="Play"/>
+                <a:ea typeface="Play"/>
+                <a:cs typeface="Play"/>
+              </a:defRPr>
+            </a:pPr>
+            <a:r>
+              <a:rPr sz="1400">
+                <a:solidFill>
+                  <a:srgbClr val="000000"/>
+                </a:solidFill>
+                <a:latin typeface="Play"/>
+                <a:ea typeface="Play"/>
+                <a:cs typeface="Play"/>
+              </a:rPr>
+              <a:t>• 42 колоды за квартал, 12 слайдов каждая, 186 минут сборки</a:t>
+            </a:r>
+          </a:p>
+          <a:p>
+            <a:pPr algn="l">
+              <a:spcAft>
+                <a:spcPts val="300"/>
+              </a:spcAft>
+              <a:defRPr sz="1400">
+                <a:solidFill>
+                  <a:srgbClr val="000000"/>
+                </a:solidFill>
+                <a:latin typeface="Play"/>
+                <a:ea typeface="Play"/>
+                <a:cs typeface="Play"/>
+              </a:defRPr>
+            </a:pPr>
+            <a:r>
+              <a:rPr sz="1400">
+                <a:solidFill>
+                  <a:srgbClr val="000000"/>
+                </a:solidFill>
+                <a:latin typeface="Play"/>
+                <a:ea typeface="Play"/>
+                <a:cs typeface="Play"/>
+              </a:rPr>
+              <a:t>• 74 минуты на правки после ревью дизайнера</a:t>
+            </a:r>
+          </a:p>
+          <a:p>
+            <a:pPr algn="l">
+              <a:spcAft>
+                <a:spcPts val="300"/>
+              </a:spcAft>
+              <a:defRPr sz="1400">
+                <a:solidFill>
+                  <a:srgbClr val="000000"/>
+                </a:solidFill>
+                <a:latin typeface="Play"/>
+                <a:ea typeface="Play"/>
+                <a:cs typeface="Play"/>
+              </a:defRPr>
+            </a:pPr>
+            <a:r>
+              <a:rPr sz="1400">
+                <a:solidFill>
+                  <a:srgbClr val="000000"/>
+                </a:solidFill>
+                <a:latin typeface="Play"/>
+                <a:ea typeface="Play"/>
+                <a:cs typeface="Play"/>
+              </a:rPr>
+              <a:t>• 19 из 42 колод нарушили фирменный стиль</a:t>
+            </a:r>
+          </a:p>
+        </p:txBody>
+      </p:sp>
+      <p:sp>
+        <p:nvSpPr>
+          <p:cNvPr id="2402" name="body_right"/>
+          <p:cNvSpPr txBox="1"/>
+          <p:nvPr/>
+        </p:nvSpPr>
+        <p:spPr>
+          <a:xfrm>
+            <a:off x="4583887" y="2086975"/>
+            <a:ext cx="4035247" cy="795020"/>
+          </a:xfrm>
+          <a:prstGeom prst="rect">
+            <a:avLst/>
+          </a:prstGeom>
+          <a:noFill/>
+        </p:spPr>
+        <p:txBody>
+          <a:bodyPr wrap="square" lIns="76200" rIns="76200" tIns="50800" bIns="50800">
+            <a:spAutoFit/>
+          </a:bodyPr>
+          <a:lstStyle/>
+          <a:p>
+            <a:pPr algn="l">
+              <a:spcAft>
+                <a:spcPts val="300"/>
+              </a:spcAft>
+              <a:defRPr sz="1400">
+                <a:solidFill>
+                  <a:srgbClr val="000000"/>
+                </a:solidFill>
+                <a:latin typeface="Play"/>
+                <a:ea typeface="Play"/>
+                <a:cs typeface="Play"/>
+              </a:defRPr>
+            </a:pPr>
+            <a:r>
+              <a:rPr sz="1400">
+                <a:solidFill>
+                  <a:srgbClr val="000000"/>
+                </a:solidFill>
+                <a:latin typeface="Play"/>
+                <a:ea typeface="Play"/>
+                <a:cs typeface="Play"/>
+              </a:rPr>
+              <a:t>• Дизайнеры 4 человека закрывают 11 запросов/неделю из 27</a:t>
+            </a:r>
+          </a:p>
+          <a:p>
+            <a:pPr algn="l">
+              <a:spcAft>
+                <a:spcPts val="300"/>
+              </a:spcAft>
+              <a:defRPr sz="1400">
+                <a:solidFill>
+                  <a:srgbClr val="000000"/>
+                </a:solidFill>
+                <a:latin typeface="Play"/>
+                <a:ea typeface="Play"/>
+                <a:cs typeface="Play"/>
+              </a:defRPr>
+            </a:pPr>
+            <a:r>
+              <a:rPr sz="1400">
+                <a:solidFill>
+                  <a:srgbClr val="000000"/>
+                </a:solidFill>
+                <a:latin typeface="Play"/>
+                <a:ea typeface="Play"/>
+                <a:cs typeface="Play"/>
+              </a:rPr>
+              <a:t>• Средний срок ожидания 6 рабочих дней</a:t>
+            </a:r>
+          </a:p>
+        </p:txBody>
+      </p:sp>
+    </p:spTree>
+  </p:cSld>
+  <p:clrMapOvr>
+    <a:masterClrMapping/>
+  </p:clrMapOvr>
+</p:sld>
+</file>
+
+<file path=ppt/slides/slide57.xml><?xml version="1.0" encoding="utf-8"?>
+<p:sld xmlns:a="http://schemas.openxmlformats.org/drawingml/2006/main" xmlns:p="http://schemas.openxmlformats.org/presentationml/2006/main" xmlns:r="http://schemas.openxmlformats.org/officeDocument/2006/relationships">
+  <p:cSld>
+    <p:spTree>
+      <p:nvGrpSpPr>
+        <p:cNvPr id="1" name=""/>
+        <p:cNvGrpSpPr/>
+        <p:nvPr/>
+      </p:nvGrpSpPr>
+      <p:grpSpPr/>
+      <p:sp>
+        <p:nvSpPr>
+          <p:cNvPr id="662" name="Google Shape;662;p55"/>
+          <p:cNvSpPr/>
+          <p:nvPr/>
+        </p:nvSpPr>
+        <p:spPr>
+          <a:xfrm>
+            <a:off x="8667705" y="4666977"/>
+            <a:ext cx="190499" cy="190475"/>
+          </a:xfrm>
+          <a:prstGeom prst="rect">
+            <a:avLst/>
+          </a:prstGeom>
+          <a:noFill/>
+          <a:ln>
+            <a:noFill/>
+          </a:ln>
+        </p:spPr>
+        <p:txBody>
+          <a:bodyPr anchorCtr="0" anchor="ctr" bIns="91425" lIns="91425" spcFirstLastPara="1" rIns="91425" wrap="square" tIns="91425">
+            <a:noAutofit/>
+          </a:bodyPr>
+          <a:lstStyle/>
+          <a:p>
+            <a:pPr indent="0" lvl="0" marL="0" rtl="0" algn="l">
+              <a:spcBef>
+                <a:spcPts val="0"/>
+              </a:spcBef>
+              <a:spcAft>
+                <a:spcPts val="0"/>
+              </a:spcAft>
+              <a:buNone/>
+            </a:pPr>
+            <a:r>
+              <a:t/>
+            </a:r>
+            <a:endParaRPr/>
+          </a:p>
+        </p:txBody>
+      </p:sp>
+      <p:sp>
+        <p:nvSpPr>
+          <p:cNvPr id="663" name="Google Shape;663;p55"/>
           <p:cNvSpPr/>
           <p:nvPr/>
         </p:nvSpPr>
@@ -5973,7 +6757,7 @@
       </p:sp>
       <p:sp>
         <p:nvSpPr>
-          <p:cNvPr id="1033" name="Google Shape;1033;p65"/>
+          <p:cNvPr id="664" name="Google Shape;664;p55"/>
           <p:cNvSpPr/>
           <p:nvPr/>
         </p:nvSpPr>
@@ -6014,14 +6798,374 @@
       </p:sp>
       <p:sp>
         <p:nvSpPr>
-          <p:cNvPr id="1034" name="title"/>
+          <p:cNvPr id="665" name="Google Shape;665;p55"/>
+          <p:cNvSpPr/>
+          <p:nvPr/>
+        </p:nvSpPr>
+        <p:spPr>
+          <a:xfrm>
+            <a:off x="285749" y="1209852"/>
+            <a:ext cx="2071677" cy="3014270"/>
+          </a:xfrm>
+          <a:prstGeom prst="roundRect">
+            <a:avLst>
+              <a:gd fmla="val 4634" name="adj"/>
+            </a:avLst>
+          </a:prstGeom>
+          <a:solidFill>
+            <a:schemeClr val="lt2"/>
+          </a:solidFill>
+          <a:ln>
+            <a:noFill/>
+          </a:ln>
+        </p:spPr>
+        <p:txBody>
+          <a:bodyPr anchorCtr="0" anchor="ctr" bIns="91425" lIns="91425" spcFirstLastPara="1" rIns="91425" wrap="square" tIns="91425">
+            <a:noAutofit/>
+          </a:bodyPr>
+          <a:lstStyle/>
+          <a:p>
+            <a:pPr indent="0" lvl="0" marL="0" rtl="0" algn="l">
+              <a:spcBef>
+                <a:spcPts val="0"/>
+              </a:spcBef>
+              <a:spcAft>
+                <a:spcPts val="0"/>
+              </a:spcAft>
+              <a:buNone/>
+            </a:pPr>
+            <a:r>
+              <a:t/>
+            </a:r>
+            <a:endParaRPr/>
+          </a:p>
+        </p:txBody>
+      </p:sp>
+      <p:sp>
+        <p:nvSpPr>
+          <p:cNvPr id="667" name="Google Shape;667;p55"/>
+          <p:cNvSpPr/>
+          <p:nvPr/>
+        </p:nvSpPr>
+        <p:spPr>
+          <a:xfrm>
+            <a:off x="438148" y="1362233"/>
+            <a:ext cx="76199" cy="76190"/>
+          </a:xfrm>
+          <a:prstGeom prst="roundRect">
+            <a:avLst>
+              <a:gd fmla="val 31500" name="adj"/>
+            </a:avLst>
+          </a:prstGeom>
+          <a:solidFill>
+            <a:srgbClr val="0077FF"/>
+          </a:solidFill>
+          <a:ln>
+            <a:noFill/>
+          </a:ln>
+        </p:spPr>
+        <p:txBody>
+          <a:bodyPr anchorCtr="0" anchor="ctr" bIns="91425" lIns="91425" spcFirstLastPara="1" rIns="91425" wrap="square" tIns="91425">
+            <a:noAutofit/>
+          </a:bodyPr>
+          <a:lstStyle/>
+          <a:p>
+            <a:pPr indent="0" lvl="0" marL="0" rtl="0" algn="l">
+              <a:spcBef>
+                <a:spcPts val="0"/>
+              </a:spcBef>
+              <a:spcAft>
+                <a:spcPts val="0"/>
+              </a:spcAft>
+              <a:buNone/>
+            </a:pPr>
+            <a:r>
+              <a:t/>
+            </a:r>
+            <a:endParaRPr/>
+          </a:p>
+        </p:txBody>
+      </p:sp>
+      <p:sp>
+        <p:nvSpPr>
+          <p:cNvPr id="670" name="Google Shape;670;p55"/>
+          <p:cNvSpPr/>
+          <p:nvPr/>
+        </p:nvSpPr>
+        <p:spPr>
+          <a:xfrm>
+            <a:off x="2452675" y="1209852"/>
+            <a:ext cx="2071677" cy="3014270"/>
+          </a:xfrm>
+          <a:prstGeom prst="roundRect">
+            <a:avLst>
+              <a:gd fmla="val 4634" name="adj"/>
+            </a:avLst>
+          </a:prstGeom>
+          <a:solidFill>
+            <a:schemeClr val="lt2"/>
+          </a:solidFill>
+          <a:ln>
+            <a:noFill/>
+          </a:ln>
+        </p:spPr>
+        <p:txBody>
+          <a:bodyPr anchorCtr="0" anchor="ctr" bIns="91425" lIns="91425" spcFirstLastPara="1" rIns="91425" wrap="square" tIns="91425">
+            <a:noAutofit/>
+          </a:bodyPr>
+          <a:lstStyle/>
+          <a:p>
+            <a:pPr indent="0" lvl="0" marL="0" rtl="0" algn="l">
+              <a:spcBef>
+                <a:spcPts val="0"/>
+              </a:spcBef>
+              <a:spcAft>
+                <a:spcPts val="0"/>
+              </a:spcAft>
+              <a:buNone/>
+            </a:pPr>
+            <a:r>
+              <a:t/>
+            </a:r>
+            <a:endParaRPr/>
+          </a:p>
+        </p:txBody>
+      </p:sp>
+      <p:sp>
+        <p:nvSpPr>
+          <p:cNvPr id="672" name="Google Shape;672;p55"/>
+          <p:cNvSpPr/>
+          <p:nvPr/>
+        </p:nvSpPr>
+        <p:spPr>
+          <a:xfrm>
+            <a:off x="2605074" y="1362233"/>
+            <a:ext cx="76199" cy="76190"/>
+          </a:xfrm>
+          <a:prstGeom prst="roundRect">
+            <a:avLst>
+              <a:gd fmla="val 31500" name="adj"/>
+            </a:avLst>
+          </a:prstGeom>
+          <a:solidFill>
+            <a:srgbClr val="0077FF"/>
+          </a:solidFill>
+          <a:ln>
+            <a:noFill/>
+          </a:ln>
+        </p:spPr>
+        <p:txBody>
+          <a:bodyPr anchorCtr="0" anchor="ctr" bIns="91425" lIns="91425" spcFirstLastPara="1" rIns="91425" wrap="square" tIns="91425">
+            <a:noAutofit/>
+          </a:bodyPr>
+          <a:lstStyle/>
+          <a:p>
+            <a:pPr indent="0" lvl="0" marL="0" rtl="0" algn="l">
+              <a:spcBef>
+                <a:spcPts val="0"/>
+              </a:spcBef>
+              <a:spcAft>
+                <a:spcPts val="0"/>
+              </a:spcAft>
+              <a:buNone/>
+            </a:pPr>
+            <a:r>
+              <a:t/>
+            </a:r>
+            <a:endParaRPr/>
+          </a:p>
+        </p:txBody>
+      </p:sp>
+      <p:sp>
+        <p:nvSpPr>
+          <p:cNvPr id="675" name="Google Shape;675;p55"/>
+          <p:cNvSpPr/>
+          <p:nvPr/>
+        </p:nvSpPr>
+        <p:spPr>
+          <a:xfrm>
+            <a:off x="4619601" y="1209852"/>
+            <a:ext cx="2071677" cy="3014270"/>
+          </a:xfrm>
+          <a:prstGeom prst="roundRect">
+            <a:avLst>
+              <a:gd fmla="val 4634" name="adj"/>
+            </a:avLst>
+          </a:prstGeom>
+          <a:solidFill>
+            <a:schemeClr val="lt2"/>
+          </a:solidFill>
+          <a:ln>
+            <a:noFill/>
+          </a:ln>
+        </p:spPr>
+        <p:txBody>
+          <a:bodyPr anchorCtr="0" anchor="ctr" bIns="91425" lIns="91425" spcFirstLastPara="1" rIns="91425" wrap="square" tIns="91425">
+            <a:noAutofit/>
+          </a:bodyPr>
+          <a:lstStyle/>
+          <a:p>
+            <a:pPr indent="0" lvl="0" marL="0" rtl="0" algn="l">
+              <a:spcBef>
+                <a:spcPts val="0"/>
+              </a:spcBef>
+              <a:spcAft>
+                <a:spcPts val="0"/>
+              </a:spcAft>
+              <a:buNone/>
+            </a:pPr>
+            <a:r>
+              <a:t/>
+            </a:r>
+            <a:endParaRPr/>
+          </a:p>
+        </p:txBody>
+      </p:sp>
+      <p:sp>
+        <p:nvSpPr>
+          <p:cNvPr id="677" name="Google Shape;677;p55"/>
+          <p:cNvSpPr/>
+          <p:nvPr/>
+        </p:nvSpPr>
+        <p:spPr>
+          <a:xfrm>
+            <a:off x="4772001" y="1362233"/>
+            <a:ext cx="76199" cy="76190"/>
+          </a:xfrm>
+          <a:prstGeom prst="roundRect">
+            <a:avLst>
+              <a:gd fmla="val 31500" name="adj"/>
+            </a:avLst>
+          </a:prstGeom>
+          <a:solidFill>
+            <a:srgbClr val="0077FF"/>
+          </a:solidFill>
+          <a:ln>
+            <a:noFill/>
+          </a:ln>
+        </p:spPr>
+        <p:txBody>
+          <a:bodyPr anchorCtr="0" anchor="ctr" bIns="91425" lIns="91425" spcFirstLastPara="1" rIns="91425" wrap="square" tIns="91425">
+            <a:noAutofit/>
+          </a:bodyPr>
+          <a:lstStyle/>
+          <a:p>
+            <a:pPr indent="0" lvl="0" marL="0" rtl="0" algn="l">
+              <a:spcBef>
+                <a:spcPts val="0"/>
+              </a:spcBef>
+              <a:spcAft>
+                <a:spcPts val="0"/>
+              </a:spcAft>
+              <a:buNone/>
+            </a:pPr>
+            <a:r>
+              <a:t/>
+            </a:r>
+            <a:endParaRPr/>
+          </a:p>
+        </p:txBody>
+      </p:sp>
+      <p:sp>
+        <p:nvSpPr>
+          <p:cNvPr id="680" name="Google Shape;680;p55"/>
+          <p:cNvSpPr/>
+          <p:nvPr/>
+        </p:nvSpPr>
+        <p:spPr>
+          <a:xfrm>
+            <a:off x="6786527" y="1209852"/>
+            <a:ext cx="2071677" cy="3014270"/>
+          </a:xfrm>
+          <a:prstGeom prst="roundRect">
+            <a:avLst>
+              <a:gd fmla="val 4634" name="adj"/>
+            </a:avLst>
+          </a:prstGeom>
+          <a:solidFill>
+            <a:schemeClr val="lt2"/>
+          </a:solidFill>
+          <a:ln>
+            <a:noFill/>
+          </a:ln>
+        </p:spPr>
+        <p:txBody>
+          <a:bodyPr anchorCtr="0" anchor="ctr" bIns="91425" lIns="91425" spcFirstLastPara="1" rIns="91425" wrap="square" tIns="91425">
+            <a:noAutofit/>
+          </a:bodyPr>
+          <a:lstStyle/>
+          <a:p>
+            <a:pPr indent="0" lvl="0" marL="0" rtl="0" algn="l">
+              <a:spcBef>
+                <a:spcPts val="0"/>
+              </a:spcBef>
+              <a:spcAft>
+                <a:spcPts val="0"/>
+              </a:spcAft>
+              <a:buNone/>
+            </a:pPr>
+            <a:r>
+              <a:t/>
+            </a:r>
+            <a:endParaRPr/>
+          </a:p>
+        </p:txBody>
+      </p:sp>
+      <p:sp>
+        <p:nvSpPr>
+          <p:cNvPr id="682" name="Google Shape;682;p55"/>
+          <p:cNvSpPr/>
+          <p:nvPr/>
+        </p:nvSpPr>
+        <p:spPr>
+          <a:xfrm>
+            <a:off x="6938927" y="1362233"/>
+            <a:ext cx="76199" cy="76190"/>
+          </a:xfrm>
+          <a:prstGeom prst="roundRect">
+            <a:avLst>
+              <a:gd fmla="val 31500" name="adj"/>
+            </a:avLst>
+          </a:prstGeom>
+          <a:solidFill>
+            <a:srgbClr val="0077FF"/>
+          </a:solidFill>
+          <a:ln>
+            <a:noFill/>
+          </a:ln>
+        </p:spPr>
+        <p:txBody>
+          <a:bodyPr anchorCtr="0" anchor="ctr" bIns="91425" lIns="91425" spcFirstLastPara="1" rIns="91425" wrap="square" tIns="91425">
+            <a:noAutofit/>
+          </a:bodyPr>
+          <a:lstStyle/>
+          <a:p>
+            <a:pPr indent="0" lvl="0" marL="0" rtl="0" algn="l">
+              <a:spcBef>
+                <a:spcPts val="0"/>
+              </a:spcBef>
+              <a:spcAft>
+                <a:spcPts val="0"/>
+              </a:spcAft>
+              <a:buNone/>
+            </a:pPr>
+            <a:r>
+              <a:t/>
+            </a:r>
+            <a:endParaRPr/>
+          </a:p>
+        </p:txBody>
+      </p:sp>
+      <p:sp>
+        <p:nvSpPr>
+          <p:cNvPr id="683" name="title"/>
           <p:cNvSpPr txBox="1"/>
           <p:nvPr/>
         </p:nvSpPr>
         <p:spPr>
           <a:xfrm>
             <a:off x="274320" y="282943"/>
-            <a:ext cx="6792986" cy="617220"/>
+            <a:ext cx="6792986" cy="932027"/>
           </a:xfrm>
           <a:prstGeom prst="rect">
             <a:avLst/>
@@ -6056,21 +7200,21 @@
                 <a:ea typeface="Play"/>
                 <a:cs typeface="Play"/>
               </a:rPr>
-              <a:t>Сейчас: 42 колоды, 186 мин сборки</a:t>
+              <a:t>Возможность ускорить и стандартизировать процесс</a:t>
             </a:r>
           </a:p>
         </p:txBody>
       </p:sp>
       <p:sp>
         <p:nvSpPr>
-          <p:cNvPr id="1035" name="body"/>
+          <p:cNvPr id="684" name="body_left"/>
           <p:cNvSpPr txBox="1"/>
           <p:nvPr/>
         </p:nvSpPr>
         <p:spPr>
           <a:xfrm>
-            <a:off x="274320" y="1414513"/>
-            <a:ext cx="8344814" cy="1046136"/>
+            <a:off x="274320" y="2044378"/>
+            <a:ext cx="4035247" cy="1158240"/>
           </a:xfrm>
           <a:prstGeom prst="rect">
             <a:avLst/>
@@ -6087,7 +7231,7 @@
               <a:spcAft>
                 <a:spcPts val="300"/>
               </a:spcAft>
-              <a:defRPr sz="1800">
+              <a:defRPr sz="1600">
                 <a:solidFill>
                   <a:srgbClr val="000000"/>
                 </a:solidFill>
@@ -6097,7 +7241,7 @@
               </a:defRPr>
             </a:pPr>
             <a:r>
-              <a:rPr sz="1800">
+              <a:rPr sz="1600">
                 <a:solidFill>
                   <a:srgbClr val="000000"/>
                 </a:solidFill>
@@ -6105,7 +7249,7 @@
                 <a:ea typeface="Play"/>
                 <a:cs typeface="Play"/>
               </a:rPr>
-              <a:t>• 42 колоды, 186 мин сборки одной презентации</a:t>
+              <a:t>• Сократить время сборки до 4 минут</a:t>
             </a:r>
           </a:p>
           <a:p>
@@ -6113,7 +7257,7 @@
               <a:spcAft>
                 <a:spcPts val="300"/>
               </a:spcAft>
-              <a:defRPr sz="1800">
+              <a:defRPr sz="1600">
                 <a:solidFill>
                   <a:srgbClr val="000000"/>
                 </a:solidFill>
@@ -6123,7 +7267,7 @@
               </a:defRPr>
             </a:pPr>
             <a:r>
-              <a:rPr sz="1800">
+              <a:rPr sz="1600">
                 <a:solidFill>
                   <a:srgbClr val="000000"/>
                 </a:solidFill>
@@ -6131,15 +7275,38 @@
                 <a:ea typeface="Play"/>
                 <a:cs typeface="Play"/>
               </a:rPr>
-              <a:t>• 74 мин правок после ревью дизайнера</a:t>
+              <a:t>• Снизить время до первой версии с 6 дней до 1 дня</a:t>
             </a:r>
           </a:p>
+        </p:txBody>
+      </p:sp>
+      <p:sp>
+        <p:nvSpPr>
+          <p:cNvPr id="685" name="body_right"/>
+          <p:cNvSpPr txBox="1"/>
+          <p:nvPr/>
+        </p:nvSpPr>
+        <p:spPr>
+          <a:xfrm>
+            <a:off x="4583887" y="2044378"/>
+            <a:ext cx="4035247" cy="1158240"/>
+          </a:xfrm>
+          <a:prstGeom prst="rect">
+            <a:avLst/>
+          </a:prstGeom>
+          <a:noFill/>
+        </p:spPr>
+        <p:txBody>
+          <a:bodyPr wrap="square" lIns="76200" rIns="76200" tIns="50800" bIns="50800">
+            <a:spAutoFit/>
+          </a:bodyPr>
+          <a:lstStyle/>
           <a:p>
             <a:pPr algn="l">
               <a:spcAft>
                 <a:spcPts val="300"/>
               </a:spcAft>
-              <a:defRPr sz="1800">
+              <a:defRPr sz="1600">
                 <a:solidFill>
                   <a:srgbClr val="000000"/>
                 </a:solidFill>
@@ -6149,7 +7316,7 @@
               </a:defRPr>
             </a:pPr>
             <a:r>
-              <a:rPr sz="1800">
+              <a:rPr sz="1600">
                 <a:solidFill>
                   <a:srgbClr val="000000"/>
                 </a:solidFill>
@@ -6157,7 +7324,33 @@
                 <a:ea typeface="Play"/>
                 <a:cs typeface="Play"/>
               </a:rPr>
-              <a:t>• 19 из 42 колод нарушили фирменный стиль</a:t>
+              <a:t>• Снизить нарушения фирменного стиля до 3 %</a:t>
+            </a:r>
+          </a:p>
+          <a:p>
+            <a:pPr algn="l">
+              <a:spcAft>
+                <a:spcPts val="300"/>
+              </a:spcAft>
+              <a:defRPr sz="1600">
+                <a:solidFill>
+                  <a:srgbClr val="000000"/>
+                </a:solidFill>
+                <a:latin typeface="Play"/>
+                <a:ea typeface="Play"/>
+                <a:cs typeface="Play"/>
+              </a:defRPr>
+            </a:pPr>
+            <a:r>
+              <a:rPr sz="1600">
+                <a:solidFill>
+                  <a:srgbClr val="000000"/>
+                </a:solidFill>
+                <a:latin typeface="Play"/>
+                <a:ea typeface="Play"/>
+                <a:cs typeface="Play"/>
+              </a:rPr>
+              <a:t>• Освободить дизайнеров от рутинных задач</a:t>
             </a:r>
           </a:p>
         </p:txBody>
@@ -6170,7 +7363,7 @@
 </p:sld>
 </file>
 
-<file path=ppt/slides/slide57.xml><?xml version="1.0" encoding="utf-8"?>
+<file path=ppt/slides/slide58.xml><?xml version="1.0" encoding="utf-8"?>
 <p:sld xmlns:a="http://schemas.openxmlformats.org/drawingml/2006/main" xmlns:p="http://schemas.openxmlformats.org/presentationml/2006/main" xmlns:r="http://schemas.openxmlformats.org/officeDocument/2006/relationships">
   <p:cSld>
     <p:spTree>
@@ -6757,21 +7950,21 @@
                 <a:ea typeface="Play"/>
                 <a:cs typeface="Play"/>
               </a:rPr>
-              <a:t>Сервис: автоматическая вёрстка</a:t>
+              <a:t>Как работает сервис</a:t>
             </a:r>
           </a:p>
         </p:txBody>
       </p:sp>
       <p:sp>
         <p:nvSpPr>
-          <p:cNvPr id="573" name="body"/>
+          <p:cNvPr id="573" name="body_left"/>
           <p:cNvSpPr txBox="1"/>
           <p:nvPr/>
         </p:nvSpPr>
         <p:spPr>
           <a:xfrm>
-            <a:off x="274320" y="2034088"/>
-            <a:ext cx="8344814" cy="993140"/>
+            <a:off x="274320" y="1935028"/>
+            <a:ext cx="4035247" cy="1290320"/>
           </a:xfrm>
           <a:prstGeom prst="rect">
             <a:avLst/>
@@ -6832,282 +8025,21 @@
                 <a:ea typeface="Play"/>
                 <a:cs typeface="Play"/>
               </a:rPr>
-              <a:t>• Автоматически формирует дизайн-систему и план колоды</a:t>
-            </a:r>
-          </a:p>
-          <a:p>
-            <a:pPr algn="l">
-              <a:spcAft>
-                <a:spcPts val="300"/>
-              </a:spcAft>
-              <a:defRPr sz="1800">
-                <a:solidFill>
-                  <a:srgbClr val="000000"/>
-                </a:solidFill>
-                <a:latin typeface="Play"/>
-                <a:ea typeface="Play"/>
-                <a:cs typeface="Play"/>
-              </a:defRPr>
-            </a:pPr>
-            <a:r>
-              <a:rPr sz="1800">
-                <a:solidFill>
-                  <a:srgbClr val="000000"/>
-                </a:solidFill>
-                <a:latin typeface="Play"/>
-                <a:ea typeface="Play"/>
-                <a:cs typeface="Play"/>
-              </a:rPr>
-              <a:t>• Экспортирует pptx, pdf, html, слайды остаются редактируемыми</a:t>
+              <a:t>• Автоматически формирует план колоды по дизайн-системе</a:t>
             </a:r>
           </a:p>
         </p:txBody>
       </p:sp>
-    </p:spTree>
-  </p:cSld>
-  <p:clrMapOvr>
-    <a:masterClrMapping/>
-  </p:clrMapOvr>
-</p:sld>
-</file>
-
-<file path=ppt/slides/slide58.xml><?xml version="1.0" encoding="utf-8"?>
-<p:sld xmlns:a="http://schemas.openxmlformats.org/drawingml/2006/main" xmlns:p="http://schemas.openxmlformats.org/presentationml/2006/main" xmlns:r="http://schemas.openxmlformats.org/officeDocument/2006/relationships">
-  <p:cSld>
-    <p:spTree>
-      <p:nvGrpSpPr>
-        <p:cNvPr id="1" name=""/>
-        <p:cNvGrpSpPr/>
-        <p:nvPr/>
-      </p:nvGrpSpPr>
-      <p:grpSpPr/>
-      <p:sp>
-        <p:nvSpPr>
-          <p:cNvPr id="1027" name="Google Shape;1027;p65"/>
-          <p:cNvSpPr/>
+      <p:sp>
+        <p:nvSpPr>
+          <p:cNvPr id="574" name="body_right"/>
+          <p:cNvSpPr txBox="1"/>
           <p:nvPr/>
         </p:nvSpPr>
         <p:spPr>
           <a:xfrm>
-            <a:off x="6064222" y="1209852"/>
-            <a:ext cx="2793985" cy="3014270"/>
-          </a:xfrm>
-          <a:prstGeom prst="roundRect">
-            <a:avLst>
-              <a:gd fmla="val 3436" name="adj"/>
-            </a:avLst>
-          </a:prstGeom>
-          <a:solidFill>
-            <a:schemeClr val="lt2"/>
-          </a:solidFill>
-          <a:ln>
-            <a:noFill/>
-          </a:ln>
-        </p:spPr>
-        <p:txBody>
-          <a:bodyPr anchorCtr="0" anchor="ctr" bIns="91425" lIns="91425" spcFirstLastPara="1" rIns="91425" wrap="square" tIns="91425">
-            <a:noAutofit/>
-          </a:bodyPr>
-          <a:lstStyle/>
-          <a:p>
-            <a:pPr indent="0" lvl="0" marL="0" rtl="0" algn="l">
-              <a:spcBef>
-                <a:spcPts val="0"/>
-              </a:spcBef>
-              <a:spcAft>
-                <a:spcPts val="0"/>
-              </a:spcAft>
-              <a:buNone/>
-            </a:pPr>
-            <a:r>
-              <a:t/>
-            </a:r>
-            <a:endParaRPr/>
-          </a:p>
-        </p:txBody>
-      </p:sp>
-      <p:sp>
-        <p:nvSpPr>
-          <p:cNvPr id="1029" name="Google Shape;1029;p65"/>
-          <p:cNvSpPr/>
-          <p:nvPr/>
-        </p:nvSpPr>
-        <p:spPr>
-          <a:xfrm>
-            <a:off x="3174981" y="1209852"/>
-            <a:ext cx="2793985" cy="3014270"/>
-          </a:xfrm>
-          <a:prstGeom prst="roundRect">
-            <a:avLst>
-              <a:gd fmla="val 3436" name="adj"/>
-            </a:avLst>
-          </a:prstGeom>
-          <a:solidFill>
-            <a:schemeClr val="lt2"/>
-          </a:solidFill>
-          <a:ln>
-            <a:noFill/>
-          </a:ln>
-        </p:spPr>
-        <p:txBody>
-          <a:bodyPr anchorCtr="0" anchor="ctr" bIns="91425" lIns="91425" spcFirstLastPara="1" rIns="91425" wrap="square" tIns="91425">
-            <a:noAutofit/>
-          </a:bodyPr>
-          <a:lstStyle/>
-          <a:p>
-            <a:pPr indent="0" lvl="0" marL="0" rtl="0" algn="l">
-              <a:spcBef>
-                <a:spcPts val="0"/>
-              </a:spcBef>
-              <a:spcAft>
-                <a:spcPts val="0"/>
-              </a:spcAft>
-              <a:buNone/>
-            </a:pPr>
-            <a:r>
-              <a:t/>
-            </a:r>
-            <a:endParaRPr/>
-          </a:p>
-        </p:txBody>
-      </p:sp>
-      <p:sp>
-        <p:nvSpPr>
-          <p:cNvPr id="1031" name="Google Shape;1031;p65"/>
-          <p:cNvSpPr/>
-          <p:nvPr/>
-        </p:nvSpPr>
-        <p:spPr>
-          <a:xfrm>
-            <a:off x="285749" y="1209852"/>
-            <a:ext cx="2793985" cy="3014270"/>
-          </a:xfrm>
-          <a:prstGeom prst="roundRect">
-            <a:avLst>
-              <a:gd fmla="val 3436" name="adj"/>
-            </a:avLst>
-          </a:prstGeom>
-          <a:solidFill>
-            <a:schemeClr val="lt2"/>
-          </a:solidFill>
-          <a:ln>
-            <a:noFill/>
-          </a:ln>
-        </p:spPr>
-        <p:txBody>
-          <a:bodyPr anchorCtr="0" anchor="ctr" bIns="91425" lIns="91425" spcFirstLastPara="1" rIns="91425" wrap="square" tIns="91425">
-            <a:noAutofit/>
-          </a:bodyPr>
-          <a:lstStyle/>
-          <a:p>
-            <a:pPr indent="0" lvl="0" marL="0" rtl="0" algn="l">
-              <a:spcBef>
-                <a:spcPts val="0"/>
-              </a:spcBef>
-              <a:spcAft>
-                <a:spcPts val="0"/>
-              </a:spcAft>
-              <a:buNone/>
-            </a:pPr>
-            <a:r>
-              <a:t/>
-            </a:r>
-            <a:endParaRPr/>
-          </a:p>
-        </p:txBody>
-      </p:sp>
-      <p:sp>
-        <p:nvSpPr>
-          <p:cNvPr id="1032" name="Google Shape;1032;p65"/>
-          <p:cNvSpPr/>
-          <p:nvPr/>
-        </p:nvSpPr>
-        <p:spPr>
-          <a:xfrm>
-            <a:off x="285748" y="286047"/>
-            <a:ext cx="8572456" cy="3938075"/>
-          </a:xfrm>
-          <a:prstGeom prst="rect">
-            <a:avLst/>
-          </a:prstGeom>
-          <a:noFill/>
-          <a:ln>
-            <a:noFill/>
-          </a:ln>
-        </p:spPr>
-        <p:txBody>
-          <a:bodyPr anchorCtr="0" anchor="ctr" bIns="91425" lIns="91425" spcFirstLastPara="1" rIns="91425" wrap="square" tIns="91425">
-            <a:noAutofit/>
-          </a:bodyPr>
-          <a:lstStyle/>
-          <a:p>
-            <a:pPr indent="0" lvl="0" marL="0" rtl="0" algn="l">
-              <a:spcBef>
-                <a:spcPts val="0"/>
-              </a:spcBef>
-              <a:spcAft>
-                <a:spcPts val="0"/>
-              </a:spcAft>
-              <a:buNone/>
-            </a:pPr>
-            <a:r>
-              <a:t/>
-            </a:r>
-            <a:endParaRPr/>
-          </a:p>
-        </p:txBody>
-      </p:sp>
-      <p:sp>
-        <p:nvSpPr>
-          <p:cNvPr id="1033" name="Google Shape;1033;p65"/>
-          <p:cNvSpPr/>
-          <p:nvPr/>
-        </p:nvSpPr>
-        <p:spPr>
-          <a:xfrm>
-            <a:off x="285748" y="1209852"/>
-            <a:ext cx="8572456" cy="3014270"/>
-          </a:xfrm>
-          <a:prstGeom prst="rect">
-            <a:avLst/>
-          </a:prstGeom>
-          <a:noFill/>
-          <a:ln>
-            <a:noFill/>
-          </a:ln>
-        </p:spPr>
-        <p:txBody>
-          <a:bodyPr anchorCtr="0" anchor="ctr" bIns="91425" lIns="91425" spcFirstLastPara="1" rIns="91425" wrap="square" tIns="91425">
-            <a:noAutofit/>
-          </a:bodyPr>
-          <a:lstStyle/>
-          <a:p>
-            <a:pPr indent="0" lvl="0" marL="0" rtl="0" algn="l">
-              <a:spcBef>
-                <a:spcPts val="0"/>
-              </a:spcBef>
-              <a:spcAft>
-                <a:spcPts val="0"/>
-              </a:spcAft>
-              <a:buNone/>
-            </a:pPr>
-            <a:r>
-              <a:t/>
-            </a:r>
-            <a:endParaRPr/>
-          </a:p>
-        </p:txBody>
-      </p:sp>
-      <p:sp>
-        <p:nvSpPr>
-          <p:cNvPr id="1034" name="title"/>
-          <p:cNvSpPr txBox="1"/>
-          <p:nvPr/>
-        </p:nvSpPr>
-        <p:spPr>
-          <a:xfrm>
-            <a:off x="274320" y="282943"/>
-            <a:ext cx="6792986" cy="617220"/>
+            <a:off x="4583887" y="1935028"/>
+            <a:ext cx="4035247" cy="1290320"/>
           </a:xfrm>
           <a:prstGeom prst="rect">
             <a:avLst/>
@@ -7124,55 +8056,6 @@
               <a:spcAft>
                 <a:spcPts val="300"/>
               </a:spcAft>
-              <a:defRPr sz="2438">
-                <a:solidFill>
-                  <a:srgbClr val="000000"/>
-                </a:solidFill>
-                <a:latin typeface="Play"/>
-                <a:ea typeface="Play"/>
-                <a:cs typeface="Play"/>
-              </a:defRPr>
-            </a:pPr>
-            <a:r>
-              <a:rPr sz="2438">
-                <a:solidFill>
-                  <a:srgbClr val="000000"/>
-                </a:solidFill>
-                <a:latin typeface="Play"/>
-                <a:ea typeface="Play"/>
-                <a:cs typeface="Play"/>
-              </a:rPr>
-              <a:t>Пилот: 68 колод, 4 мин сборки</a:t>
-            </a:r>
-          </a:p>
-        </p:txBody>
-      </p:sp>
-      <p:sp>
-        <p:nvSpPr>
-          <p:cNvPr id="1035" name="body"/>
-          <p:cNvSpPr txBox="1"/>
-          <p:nvPr/>
-        </p:nvSpPr>
-        <p:spPr>
-          <a:xfrm>
-            <a:off x="274320" y="1414513"/>
-            <a:ext cx="8344814" cy="1046136"/>
-          </a:xfrm>
-          <a:prstGeom prst="rect">
-            <a:avLst/>
-          </a:prstGeom>
-          <a:noFill/>
-        </p:spPr>
-        <p:txBody>
-          <a:bodyPr wrap="square" lIns="76200" rIns="76200" tIns="50800" bIns="50800">
-            <a:spAutoFit/>
-          </a:bodyPr>
-          <a:lstStyle/>
-          <a:p>
-            <a:pPr algn="l">
-              <a:spcAft>
-                <a:spcPts val="300"/>
-              </a:spcAft>
               <a:defRPr sz="1800">
                 <a:solidFill>
                   <a:srgbClr val="000000"/>
@@ -7191,7 +8074,7 @@
                 <a:ea typeface="Play"/>
                 <a:cs typeface="Play"/>
               </a:rPr>
-              <a:t>• 68 колод собраны за 6 недель</a:t>
+              <a:t>• Вёрстка и аудит качества до выдачи</a:t>
             </a:r>
           </a:p>
           <a:p>
@@ -7217,33 +8100,7 @@
                 <a:ea typeface="Play"/>
                 <a:cs typeface="Play"/>
               </a:rPr>
-              <a:t>• Среднее время сборки 4 мин вместо 186</a:t>
-            </a:r>
-          </a:p>
-          <a:p>
-            <a:pPr algn="l">
-              <a:spcAft>
-                <a:spcPts val="300"/>
-              </a:spcAft>
-              <a:defRPr sz="1800">
-                <a:solidFill>
-                  <a:srgbClr val="000000"/>
-                </a:solidFill>
-                <a:latin typeface="Play"/>
-                <a:ea typeface="Play"/>
-                <a:cs typeface="Play"/>
-              </a:defRPr>
-            </a:pPr>
-            <a:r>
-              <a:rPr sz="1800">
-                <a:solidFill>
-                  <a:srgbClr val="000000"/>
-                </a:solidFill>
-                <a:latin typeface="Play"/>
-                <a:ea typeface="Play"/>
-                <a:cs typeface="Play"/>
-              </a:rPr>
-              <a:t>• Время до первой версии сократилось с 6 дней до 1</a:t>
+              <a:t>• Экспорт в pptx, pdf, html, слайды редактируемы</a:t>
             </a:r>
           </a:p>
         </p:txBody>
@@ -7293,43 +8150,16 @@
           </a:ln>
         </p:spPr>
       </p:pic>
-      <p:pic>
-        <p:nvPicPr>
-          <p:cNvPr descr=" " id="2250" name="Google Shape;2250;p83"/>
-          <p:cNvPicPr preferRelativeResize="0"/>
-          <p:nvPr/>
-        </p:nvPicPr>
-        <p:blipFill rotWithShape="1">
-          <a:blip r:embed="rId3">
-            <a:alphaModFix/>
-          </a:blip>
-          <a:srcRect b="0" l="0" r="0" t="0"/>
-          <a:stretch/>
-        </p:blipFill>
-        <p:spPr>
-          <a:xfrm>
-            <a:off x="3143234" y="3576507"/>
-            <a:ext cx="3762355" cy="28571"/>
-          </a:xfrm>
-          <a:prstGeom prst="rect">
-            <a:avLst/>
-          </a:prstGeom>
-          <a:noFill/>
-          <a:ln>
-            <a:noFill/>
-          </a:ln>
-        </p:spPr>
-      </p:pic>
-      <p:sp>
-        <p:nvSpPr>
-          <p:cNvPr id="2251" name="title"/>
+      <p:sp>
+        <p:nvSpPr>
+          <p:cNvPr id="2250" name="title"/>
           <p:cNvSpPr txBox="1"/>
           <p:nvPr/>
         </p:nvSpPr>
         <p:spPr>
           <a:xfrm>
             <a:off x="274320" y="282943"/>
-            <a:ext cx="6792986" cy="617220"/>
+            <a:ext cx="6792986" cy="932027"/>
           </a:xfrm>
           <a:prstGeom prst="rect">
             <a:avLst/>
@@ -7364,22 +8194,22 @@
                 <a:ea typeface="Play"/>
                 <a:cs typeface="Play"/>
               </a:rPr>
-              <a:t>Время сборки</a:t>
+              <a:t>Сокращение времени сборки: 186 → 4 минуты</a:t>
             </a:r>
           </a:p>
         </p:txBody>
       </p:sp>
       <p:graphicFrame>
         <p:nvGraphicFramePr>
-          <p:cNvPr id="2252" name="Chart 2251"/>
+          <p:cNvPr id="2251" name="Chart 2250"/>
           <p:cNvGraphicFramePr>
             <a:graphicFrameLocks noGrp="1"/>
           </p:cNvGraphicFramePr>
           <p:nvPr/>
         </p:nvGraphicFramePr>
         <p:xfrm>
-          <a:off x="4006215" y="1414513"/>
-          <a:ext cx="3457574" cy="2161967"/>
+          <a:off x="4006215" y="1664127"/>
+          <a:ext cx="3457574" cy="2160270"/>
         </p:xfrm>
         <a:graphic>
           <a:graphicData uri="http://schemas.openxmlformats.org/drawingml/2006/chart">
@@ -7396,6 +8226,651 @@
 </file>
 
 <file path=ppt/slides/slide60.xml><?xml version="1.0" encoding="utf-8"?>
+<p:sld xmlns:a="http://schemas.openxmlformats.org/drawingml/2006/main" xmlns:p="http://schemas.openxmlformats.org/presentationml/2006/main" xmlns:r="http://schemas.openxmlformats.org/officeDocument/2006/relationships">
+  <p:cSld>
+    <p:spTree>
+      <p:nvGrpSpPr>
+        <p:cNvPr id="1" name=""/>
+        <p:cNvGrpSpPr/>
+        <p:nvPr/>
+      </p:nvGrpSpPr>
+      <p:grpSpPr/>
+      <p:sp>
+        <p:nvSpPr>
+          <p:cNvPr id="2429" name="Google Shape;2429;p89"/>
+          <p:cNvSpPr/>
+          <p:nvPr/>
+        </p:nvSpPr>
+        <p:spPr>
+          <a:xfrm>
+            <a:off x="553415" y="1828897"/>
+            <a:ext cx="2232516" cy="1490254"/>
+          </a:xfrm>
+          <a:prstGeom prst="rect">
+            <a:avLst/>
+          </a:prstGeom>
+          <a:noFill/>
+          <a:ln>
+            <a:noFill/>
+          </a:ln>
+        </p:spPr>
+        <p:txBody>
+          <a:bodyPr anchorCtr="0" anchor="ctr" bIns="91425" lIns="91425" spcFirstLastPara="1" rIns="91425" wrap="square" tIns="91425">
+            <a:noAutofit/>
+          </a:bodyPr>
+          <a:lstStyle/>
+          <a:p>
+            <a:pPr indent="0" lvl="0" marL="0" rtl="0" algn="l">
+              <a:spcBef>
+                <a:spcPts val="0"/>
+              </a:spcBef>
+              <a:spcAft>
+                <a:spcPts val="0"/>
+              </a:spcAft>
+              <a:buNone/>
+            </a:pPr>
+            <a:r>
+              <a:t/>
+            </a:r>
+            <a:endParaRPr/>
+          </a:p>
+        </p:txBody>
+      </p:sp>
+      <p:sp>
+        <p:nvSpPr>
+          <p:cNvPr id="2430" name="title"/>
+          <p:cNvSpPr txBox="1"/>
+          <p:nvPr/>
+        </p:nvSpPr>
+        <p:spPr>
+          <a:xfrm>
+            <a:off x="274320" y="282943"/>
+            <a:ext cx="6792986" cy="932027"/>
+          </a:xfrm>
+          <a:prstGeom prst="rect">
+            <a:avLst/>
+          </a:prstGeom>
+          <a:noFill/>
+        </p:spPr>
+        <p:txBody>
+          <a:bodyPr wrap="square" lIns="76200" rIns="76200" tIns="50800" bIns="50800">
+            <a:spAutoFit/>
+          </a:bodyPr>
+          <a:lstStyle/>
+          <a:p>
+            <a:pPr algn="l">
+              <a:spcAft>
+                <a:spcPts val="300"/>
+              </a:spcAft>
+              <a:defRPr sz="2438">
+                <a:solidFill>
+                  <a:srgbClr val="000000"/>
+                </a:solidFill>
+                <a:latin typeface="Play"/>
+                <a:ea typeface="Play"/>
+                <a:cs typeface="Play"/>
+              </a:defRPr>
+            </a:pPr>
+            <a:r>
+              <a:rPr sz="2438">
+                <a:solidFill>
+                  <a:srgbClr val="000000"/>
+                </a:solidFill>
+                <a:latin typeface="Play"/>
+                <a:ea typeface="Play"/>
+                <a:cs typeface="Play"/>
+              </a:rPr>
+              <a:t>Снижение нарушений фирменного стиля: 19/42 → 2/68</a:t>
+            </a:r>
+          </a:p>
+        </p:txBody>
+      </p:sp>
+      <p:graphicFrame>
+        <p:nvGraphicFramePr>
+          <p:cNvPr id="2431" name="Chart 2430"/>
+          <p:cNvGraphicFramePr>
+            <a:graphicFrameLocks noGrp="1"/>
+          </p:cNvGraphicFramePr>
+          <p:nvPr/>
+        </p:nvGraphicFramePr>
+        <p:xfrm>
+          <a:off x="4583887" y="1729321"/>
+          <a:ext cx="4035247" cy="2160270"/>
+        </p:xfrm>
+        <a:graphic>
+          <a:graphicData uri="http://schemas.openxmlformats.org/drawingml/2006/chart">
+            <c:chart xmlns:c="http://schemas.openxmlformats.org/drawingml/2006/chart" r:id="rId3"/>
+          </a:graphicData>
+        </a:graphic>
+      </p:graphicFrame>
+    </p:spTree>
+  </p:cSld>
+  <p:clrMapOvr>
+    <a:masterClrMapping/>
+  </p:clrMapOvr>
+</p:sld>
+</file>
+
+<file path=ppt/slides/slide61.xml><?xml version="1.0" encoding="utf-8"?>
+<p:sld xmlns:a="http://schemas.openxmlformats.org/drawingml/2006/main" xmlns:p="http://schemas.openxmlformats.org/presentationml/2006/main" xmlns:r="http://schemas.openxmlformats.org/officeDocument/2006/relationships">
+  <p:cSld>
+    <p:spTree>
+      <p:nvGrpSpPr>
+        <p:cNvPr id="1" name=""/>
+        <p:cNvGrpSpPr/>
+        <p:nvPr/>
+      </p:nvGrpSpPr>
+      <p:grpSpPr/>
+      <p:sp>
+        <p:nvSpPr>
+          <p:cNvPr id="1027" name="Google Shape;1027;p65"/>
+          <p:cNvSpPr/>
+          <p:nvPr/>
+        </p:nvSpPr>
+        <p:spPr>
+          <a:xfrm>
+            <a:off x="6064222" y="1209852"/>
+            <a:ext cx="2793985" cy="3014270"/>
+          </a:xfrm>
+          <a:prstGeom prst="roundRect">
+            <a:avLst>
+              <a:gd fmla="val 3436" name="adj"/>
+            </a:avLst>
+          </a:prstGeom>
+          <a:solidFill>
+            <a:schemeClr val="lt2"/>
+          </a:solidFill>
+          <a:ln>
+            <a:noFill/>
+          </a:ln>
+        </p:spPr>
+        <p:txBody>
+          <a:bodyPr anchorCtr="0" anchor="ctr" bIns="91425" lIns="91425" spcFirstLastPara="1" rIns="91425" wrap="square" tIns="91425">
+            <a:noAutofit/>
+          </a:bodyPr>
+          <a:lstStyle/>
+          <a:p>
+            <a:pPr indent="0" lvl="0" marL="0" rtl="0" algn="l">
+              <a:spcBef>
+                <a:spcPts val="0"/>
+              </a:spcBef>
+              <a:spcAft>
+                <a:spcPts val="0"/>
+              </a:spcAft>
+              <a:buNone/>
+            </a:pPr>
+            <a:r>
+              <a:t/>
+            </a:r>
+            <a:endParaRPr/>
+          </a:p>
+        </p:txBody>
+      </p:sp>
+      <p:sp>
+        <p:nvSpPr>
+          <p:cNvPr id="1029" name="Google Shape;1029;p65"/>
+          <p:cNvSpPr/>
+          <p:nvPr/>
+        </p:nvSpPr>
+        <p:spPr>
+          <a:xfrm>
+            <a:off x="3174981" y="1209852"/>
+            <a:ext cx="2793985" cy="3014270"/>
+          </a:xfrm>
+          <a:prstGeom prst="roundRect">
+            <a:avLst>
+              <a:gd fmla="val 3436" name="adj"/>
+            </a:avLst>
+          </a:prstGeom>
+          <a:solidFill>
+            <a:schemeClr val="lt2"/>
+          </a:solidFill>
+          <a:ln>
+            <a:noFill/>
+          </a:ln>
+        </p:spPr>
+        <p:txBody>
+          <a:bodyPr anchorCtr="0" anchor="ctr" bIns="91425" lIns="91425" spcFirstLastPara="1" rIns="91425" wrap="square" tIns="91425">
+            <a:noAutofit/>
+          </a:bodyPr>
+          <a:lstStyle/>
+          <a:p>
+            <a:pPr indent="0" lvl="0" marL="0" rtl="0" algn="l">
+              <a:spcBef>
+                <a:spcPts val="0"/>
+              </a:spcBef>
+              <a:spcAft>
+                <a:spcPts val="0"/>
+              </a:spcAft>
+              <a:buNone/>
+            </a:pPr>
+            <a:r>
+              <a:t/>
+            </a:r>
+            <a:endParaRPr/>
+          </a:p>
+        </p:txBody>
+      </p:sp>
+      <p:sp>
+        <p:nvSpPr>
+          <p:cNvPr id="1031" name="Google Shape;1031;p65"/>
+          <p:cNvSpPr/>
+          <p:nvPr/>
+        </p:nvSpPr>
+        <p:spPr>
+          <a:xfrm>
+            <a:off x="285749" y="1209852"/>
+            <a:ext cx="2793985" cy="3014270"/>
+          </a:xfrm>
+          <a:prstGeom prst="roundRect">
+            <a:avLst>
+              <a:gd fmla="val 3436" name="adj"/>
+            </a:avLst>
+          </a:prstGeom>
+          <a:solidFill>
+            <a:schemeClr val="lt2"/>
+          </a:solidFill>
+          <a:ln>
+            <a:noFill/>
+          </a:ln>
+        </p:spPr>
+        <p:txBody>
+          <a:bodyPr anchorCtr="0" anchor="ctr" bIns="91425" lIns="91425" spcFirstLastPara="1" rIns="91425" wrap="square" tIns="91425">
+            <a:noAutofit/>
+          </a:bodyPr>
+          <a:lstStyle/>
+          <a:p>
+            <a:pPr indent="0" lvl="0" marL="0" rtl="0" algn="l">
+              <a:spcBef>
+                <a:spcPts val="0"/>
+              </a:spcBef>
+              <a:spcAft>
+                <a:spcPts val="0"/>
+              </a:spcAft>
+              <a:buNone/>
+            </a:pPr>
+            <a:r>
+              <a:t/>
+            </a:r>
+            <a:endParaRPr/>
+          </a:p>
+        </p:txBody>
+      </p:sp>
+      <p:sp>
+        <p:nvSpPr>
+          <p:cNvPr id="1032" name="Google Shape;1032;p65"/>
+          <p:cNvSpPr/>
+          <p:nvPr/>
+        </p:nvSpPr>
+        <p:spPr>
+          <a:xfrm>
+            <a:off x="285748" y="286047"/>
+            <a:ext cx="8572456" cy="3938075"/>
+          </a:xfrm>
+          <a:prstGeom prst="rect">
+            <a:avLst/>
+          </a:prstGeom>
+          <a:noFill/>
+          <a:ln>
+            <a:noFill/>
+          </a:ln>
+        </p:spPr>
+        <p:txBody>
+          <a:bodyPr anchorCtr="0" anchor="ctr" bIns="91425" lIns="91425" spcFirstLastPara="1" rIns="91425" wrap="square" tIns="91425">
+            <a:noAutofit/>
+          </a:bodyPr>
+          <a:lstStyle/>
+          <a:p>
+            <a:pPr indent="0" lvl="0" marL="0" rtl="0" algn="l">
+              <a:spcBef>
+                <a:spcPts val="0"/>
+              </a:spcBef>
+              <a:spcAft>
+                <a:spcPts val="0"/>
+              </a:spcAft>
+              <a:buNone/>
+            </a:pPr>
+            <a:r>
+              <a:t/>
+            </a:r>
+            <a:endParaRPr/>
+          </a:p>
+        </p:txBody>
+      </p:sp>
+      <p:sp>
+        <p:nvSpPr>
+          <p:cNvPr id="1033" name="Google Shape;1033;p65"/>
+          <p:cNvSpPr/>
+          <p:nvPr/>
+        </p:nvSpPr>
+        <p:spPr>
+          <a:xfrm>
+            <a:off x="285748" y="1209852"/>
+            <a:ext cx="8572456" cy="3014270"/>
+          </a:xfrm>
+          <a:prstGeom prst="rect">
+            <a:avLst/>
+          </a:prstGeom>
+          <a:noFill/>
+          <a:ln>
+            <a:noFill/>
+          </a:ln>
+        </p:spPr>
+        <p:txBody>
+          <a:bodyPr anchorCtr="0" anchor="ctr" bIns="91425" lIns="91425" spcFirstLastPara="1" rIns="91425" wrap="square" tIns="91425">
+            <a:noAutofit/>
+          </a:bodyPr>
+          <a:lstStyle/>
+          <a:p>
+            <a:pPr indent="0" lvl="0" marL="0" rtl="0" algn="l">
+              <a:spcBef>
+                <a:spcPts val="0"/>
+              </a:spcBef>
+              <a:spcAft>
+                <a:spcPts val="0"/>
+              </a:spcAft>
+              <a:buNone/>
+            </a:pPr>
+            <a:r>
+              <a:t/>
+            </a:r>
+            <a:endParaRPr/>
+          </a:p>
+        </p:txBody>
+      </p:sp>
+      <p:sp>
+        <p:nvSpPr>
+          <p:cNvPr id="1034" name="Google Shape;1034;p65"/>
+          <p:cNvSpPr/>
+          <p:nvPr/>
+        </p:nvSpPr>
+        <p:spPr>
+          <a:xfrm>
+            <a:off x="476248" y="1400327"/>
+            <a:ext cx="2412987" cy="1009519"/>
+          </a:xfrm>
+          <a:prstGeom prst="rect">
+            <a:avLst/>
+          </a:prstGeom>
+          <a:noFill/>
+          <a:ln>
+            <a:noFill/>
+          </a:ln>
+        </p:spPr>
+        <p:txBody>
+          <a:bodyPr anchorCtr="0" anchor="ctr" bIns="91425" lIns="91425" spcFirstLastPara="1" rIns="91425" wrap="square" tIns="91425">
+            <a:noAutofit/>
+          </a:bodyPr>
+          <a:lstStyle/>
+          <a:p>
+            <a:pPr indent="0" lvl="0" marL="0" rtl="0" algn="l">
+              <a:spcBef>
+                <a:spcPts val="0"/>
+              </a:spcBef>
+              <a:spcAft>
+                <a:spcPts val="0"/>
+              </a:spcAft>
+              <a:buNone/>
+            </a:pPr>
+            <a:r>
+              <a:t/>
+            </a:r>
+            <a:endParaRPr/>
+          </a:p>
+        </p:txBody>
+      </p:sp>
+      <p:sp>
+        <p:nvSpPr>
+          <p:cNvPr id="1035" name="Google Shape;1035;p65"/>
+          <p:cNvSpPr/>
+          <p:nvPr/>
+        </p:nvSpPr>
+        <p:spPr>
+          <a:xfrm>
+            <a:off x="476248" y="1400328"/>
+            <a:ext cx="76199" cy="76190"/>
+          </a:xfrm>
+          <a:prstGeom prst="roundRect">
+            <a:avLst>
+              <a:gd fmla="val 31500" name="adj"/>
+            </a:avLst>
+          </a:prstGeom>
+          <a:solidFill>
+            <a:srgbClr val="0077FF"/>
+          </a:solidFill>
+          <a:ln>
+            <a:noFill/>
+          </a:ln>
+        </p:spPr>
+        <p:txBody>
+          <a:bodyPr anchorCtr="0" anchor="ctr" bIns="91425" lIns="91425" spcFirstLastPara="1" rIns="91425" wrap="square" tIns="91425">
+            <a:noAutofit/>
+          </a:bodyPr>
+          <a:lstStyle/>
+          <a:p>
+            <a:pPr indent="0" lvl="0" marL="0" rtl="0" algn="l">
+              <a:spcBef>
+                <a:spcPts val="0"/>
+              </a:spcBef>
+              <a:spcAft>
+                <a:spcPts val="0"/>
+              </a:spcAft>
+              <a:buNone/>
+            </a:pPr>
+            <a:r>
+              <a:t/>
+            </a:r>
+            <a:endParaRPr/>
+          </a:p>
+        </p:txBody>
+      </p:sp>
+      <p:sp>
+        <p:nvSpPr>
+          <p:cNvPr id="1040" name="Google Shape;1040;p65"/>
+          <p:cNvSpPr/>
+          <p:nvPr/>
+        </p:nvSpPr>
+        <p:spPr>
+          <a:xfrm>
+            <a:off x="3365480" y="1400327"/>
+            <a:ext cx="2412987" cy="1009519"/>
+          </a:xfrm>
+          <a:prstGeom prst="rect">
+            <a:avLst/>
+          </a:prstGeom>
+          <a:noFill/>
+          <a:ln>
+            <a:noFill/>
+          </a:ln>
+        </p:spPr>
+        <p:txBody>
+          <a:bodyPr anchorCtr="0" anchor="ctr" bIns="91425" lIns="91425" spcFirstLastPara="1" rIns="91425" wrap="square" tIns="91425">
+            <a:noAutofit/>
+          </a:bodyPr>
+          <a:lstStyle/>
+          <a:p>
+            <a:pPr indent="0" lvl="0" marL="0" rtl="0" algn="l">
+              <a:spcBef>
+                <a:spcPts val="0"/>
+              </a:spcBef>
+              <a:spcAft>
+                <a:spcPts val="0"/>
+              </a:spcAft>
+              <a:buNone/>
+            </a:pPr>
+            <a:r>
+              <a:t/>
+            </a:r>
+            <a:endParaRPr/>
+          </a:p>
+        </p:txBody>
+      </p:sp>
+      <p:sp>
+        <p:nvSpPr>
+          <p:cNvPr id="1041" name="Google Shape;1041;p65"/>
+          <p:cNvSpPr/>
+          <p:nvPr/>
+        </p:nvSpPr>
+        <p:spPr>
+          <a:xfrm>
+            <a:off x="3365480" y="1400328"/>
+            <a:ext cx="76199" cy="76190"/>
+          </a:xfrm>
+          <a:prstGeom prst="roundRect">
+            <a:avLst>
+              <a:gd fmla="val 31500" name="adj"/>
+            </a:avLst>
+          </a:prstGeom>
+          <a:solidFill>
+            <a:srgbClr val="0077FF"/>
+          </a:solidFill>
+          <a:ln>
+            <a:noFill/>
+          </a:ln>
+        </p:spPr>
+        <p:txBody>
+          <a:bodyPr anchorCtr="0" anchor="ctr" bIns="91425" lIns="91425" spcFirstLastPara="1" rIns="91425" wrap="square" tIns="91425">
+            <a:noAutofit/>
+          </a:bodyPr>
+          <a:lstStyle/>
+          <a:p>
+            <a:pPr indent="0" lvl="0" marL="0" rtl="0" algn="l">
+              <a:spcBef>
+                <a:spcPts val="0"/>
+              </a:spcBef>
+              <a:spcAft>
+                <a:spcPts val="0"/>
+              </a:spcAft>
+              <a:buNone/>
+            </a:pPr>
+            <a:r>
+              <a:t/>
+            </a:r>
+            <a:endParaRPr/>
+          </a:p>
+        </p:txBody>
+      </p:sp>
+      <p:sp>
+        <p:nvSpPr>
+          <p:cNvPr id="1046" name="Google Shape;1046;p65"/>
+          <p:cNvSpPr/>
+          <p:nvPr/>
+        </p:nvSpPr>
+        <p:spPr>
+          <a:xfrm>
+            <a:off x="6254721" y="1400328"/>
+            <a:ext cx="76199" cy="76190"/>
+          </a:xfrm>
+          <a:prstGeom prst="roundRect">
+            <a:avLst>
+              <a:gd fmla="val 31500" name="adj"/>
+            </a:avLst>
+          </a:prstGeom>
+          <a:solidFill>
+            <a:srgbClr val="0077FF"/>
+          </a:solidFill>
+          <a:ln>
+            <a:noFill/>
+          </a:ln>
+        </p:spPr>
+        <p:txBody>
+          <a:bodyPr anchorCtr="0" anchor="ctr" bIns="91425" lIns="91425" spcFirstLastPara="1" rIns="91425" wrap="square" tIns="91425">
+            <a:noAutofit/>
+          </a:bodyPr>
+          <a:lstStyle/>
+          <a:p>
+            <a:pPr indent="0" lvl="0" marL="0" rtl="0" algn="l">
+              <a:spcBef>
+                <a:spcPts val="0"/>
+              </a:spcBef>
+              <a:spcAft>
+                <a:spcPts val="0"/>
+              </a:spcAft>
+              <a:buNone/>
+            </a:pPr>
+            <a:r>
+              <a:t/>
+            </a:r>
+            <a:endParaRPr/>
+          </a:p>
+        </p:txBody>
+      </p:sp>
+      <p:sp>
+        <p:nvSpPr>
+          <p:cNvPr id="1047" name="title"/>
+          <p:cNvSpPr txBox="1"/>
+          <p:nvPr/>
+        </p:nvSpPr>
+        <p:spPr>
+          <a:xfrm>
+            <a:off x="274320" y="282943"/>
+            <a:ext cx="6792986" cy="932027"/>
+          </a:xfrm>
+          <a:prstGeom prst="rect">
+            <a:avLst/>
+          </a:prstGeom>
+          <a:noFill/>
+        </p:spPr>
+        <p:txBody>
+          <a:bodyPr wrap="square" lIns="76200" rIns="76200" tIns="50800" bIns="50800">
+            <a:spAutoFit/>
+          </a:bodyPr>
+          <a:lstStyle/>
+          <a:p>
+            <a:pPr algn="l">
+              <a:spcAft>
+                <a:spcPts val="300"/>
+              </a:spcAft>
+              <a:defRPr sz="2438">
+                <a:solidFill>
+                  <a:srgbClr val="000000"/>
+                </a:solidFill>
+                <a:latin typeface="Play"/>
+                <a:ea typeface="Play"/>
+                <a:cs typeface="Play"/>
+              </a:defRPr>
+            </a:pPr>
+            <a:r>
+              <a:rPr sz="2438">
+                <a:solidFill>
+                  <a:srgbClr val="000000"/>
+                </a:solidFill>
+                <a:latin typeface="Play"/>
+                <a:ea typeface="Play"/>
+                <a:cs typeface="Play"/>
+              </a:rPr>
+              <a:t>Увеличение объёма работы дизайнеров: 11/нед → 38/6н</a:t>
+            </a:r>
+          </a:p>
+        </p:txBody>
+      </p:sp>
+      <p:graphicFrame>
+        <p:nvGraphicFramePr>
+          <p:cNvPr id="1048" name="Chart 1047"/>
+          <p:cNvGraphicFramePr>
+            <a:graphicFrameLocks noGrp="1"/>
+          </p:cNvGraphicFramePr>
+          <p:nvPr/>
+        </p:nvGraphicFramePr>
+        <p:xfrm>
+          <a:off x="4583887" y="1628895"/>
+          <a:ext cx="4035247" cy="2160270"/>
+        </p:xfrm>
+        <a:graphic>
+          <a:graphicData uri="http://schemas.openxmlformats.org/drawingml/2006/chart">
+            <c:chart xmlns:c="http://schemas.openxmlformats.org/drawingml/2006/chart" r:id="rId4"/>
+          </a:graphicData>
+        </a:graphic>
+      </p:graphicFrame>
+    </p:spTree>
+  </p:cSld>
+  <p:clrMapOvr>
+    <a:masterClrMapping/>
+  </p:clrMapOvr>
+</p:sld>
+</file>
+
+<file path=ppt/slides/slide62.xml><?xml version="1.0" encoding="utf-8"?>
 <p:sld xmlns:a="http://schemas.openxmlformats.org/drawingml/2006/main" xmlns:p="http://schemas.openxmlformats.org/presentationml/2006/main" xmlns:r="http://schemas.openxmlformats.org/officeDocument/2006/relationships">
   <p:cSld>
     <p:spTree>
@@ -7714,7 +9189,7 @@
         <p:spPr>
           <a:xfrm>
             <a:off x="274320" y="282943"/>
-            <a:ext cx="6792986" cy="617220"/>
+            <a:ext cx="6792986" cy="932027"/>
           </a:xfrm>
           <a:prstGeom prst="rect">
             <a:avLst/>
@@ -7749,7 +9224,7 @@
                 <a:ea typeface="Play"/>
                 <a:cs typeface="Play"/>
               </a:rPr>
-              <a:t>Нарушения фирменного стиля</a:t>
+              <a:t>Стоимость пилота: 1 400 руб за 6 недель</a:t>
             </a:r>
           </a:p>
         </p:txBody>
@@ -7780,1009 +9255,6 @@
 </p:sld>
 </file>
 
-<file path=ppt/slides/slide61.xml><?xml version="1.0" encoding="utf-8"?>
-<p:sld xmlns:a="http://schemas.openxmlformats.org/drawingml/2006/main" xmlns:p="http://schemas.openxmlformats.org/presentationml/2006/main" xmlns:r="http://schemas.openxmlformats.org/officeDocument/2006/relationships">
-  <p:cSld>
-    <p:spTree>
-      <p:nvGrpSpPr>
-        <p:cNvPr id="1" name=""/>
-        <p:cNvGrpSpPr/>
-        <p:nvPr/>
-      </p:nvGrpSpPr>
-      <p:grpSpPr/>
-      <p:pic>
-        <p:nvPicPr>
-          <p:cNvPr descr=" " id="2428" name="Google Shape;2428;p89"/>
-          <p:cNvPicPr preferRelativeResize="0"/>
-          <p:nvPr/>
-        </p:nvPicPr>
-        <p:blipFill rotWithShape="1">
-          <a:blip r:embed="rId2">
-            <a:alphaModFix/>
-          </a:blip>
-          <a:srcRect b="0" l="0" r="0" t="0"/>
-          <a:stretch/>
-        </p:blipFill>
-        <p:spPr>
-          <a:xfrm>
-            <a:off x="0" y="2732082"/>
-            <a:ext cx="8515008" cy="92615"/>
-          </a:xfrm>
-          <a:prstGeom prst="rect">
-            <a:avLst/>
-          </a:prstGeom>
-          <a:noFill/>
-          <a:ln>
-            <a:noFill/>
-          </a:ln>
-        </p:spPr>
-      </p:pic>
-      <p:sp>
-        <p:nvSpPr>
-          <p:cNvPr id="2429" name="Google Shape;2429;p89"/>
-          <p:cNvSpPr/>
-          <p:nvPr/>
-        </p:nvSpPr>
-        <p:spPr>
-          <a:xfrm>
-            <a:off x="553415" y="1828897"/>
-            <a:ext cx="2232516" cy="1490254"/>
-          </a:xfrm>
-          <a:prstGeom prst="rect">
-            <a:avLst/>
-          </a:prstGeom>
-          <a:noFill/>
-          <a:ln>
-            <a:noFill/>
-          </a:ln>
-        </p:spPr>
-        <p:txBody>
-          <a:bodyPr anchorCtr="0" anchor="ctr" bIns="91425" lIns="91425" spcFirstLastPara="1" rIns="91425" wrap="square" tIns="91425">
-            <a:noAutofit/>
-          </a:bodyPr>
-          <a:lstStyle/>
-          <a:p>
-            <a:pPr indent="0" lvl="0" marL="0" rtl="0" algn="l">
-              <a:spcBef>
-                <a:spcPts val="0"/>
-              </a:spcBef>
-              <a:spcAft>
-                <a:spcPts val="0"/>
-              </a:spcAft>
-              <a:buNone/>
-            </a:pPr>
-            <a:r>
-              <a:t/>
-            </a:r>
-            <a:endParaRPr/>
-          </a:p>
-        </p:txBody>
-      </p:sp>
-      <p:sp>
-        <p:nvSpPr>
-          <p:cNvPr id="2431" name="Google Shape;2431;p89"/>
-          <p:cNvSpPr/>
-          <p:nvPr/>
-        </p:nvSpPr>
-        <p:spPr>
-          <a:xfrm>
-            <a:off x="3565736" y="1828897"/>
-            <a:ext cx="2232516" cy="1490254"/>
-          </a:xfrm>
-          <a:prstGeom prst="rect">
-            <a:avLst/>
-          </a:prstGeom>
-          <a:noFill/>
-          <a:ln>
-            <a:noFill/>
-          </a:ln>
-        </p:spPr>
-        <p:txBody>
-          <a:bodyPr anchorCtr="0" anchor="ctr" bIns="91425" lIns="91425" spcFirstLastPara="1" rIns="91425" wrap="square" tIns="91425">
-            <a:noAutofit/>
-          </a:bodyPr>
-          <a:lstStyle/>
-          <a:p>
-            <a:pPr indent="0" lvl="0" marL="0" rtl="0" algn="l">
-              <a:spcBef>
-                <a:spcPts val="0"/>
-              </a:spcBef>
-              <a:spcAft>
-                <a:spcPts val="0"/>
-              </a:spcAft>
-              <a:buNone/>
-            </a:pPr>
-            <a:r>
-              <a:t/>
-            </a:r>
-            <a:endParaRPr/>
-          </a:p>
-        </p:txBody>
-      </p:sp>
-      <p:sp>
-        <p:nvSpPr>
-          <p:cNvPr id="2433" name="Google Shape;2433;p89"/>
-          <p:cNvSpPr/>
-          <p:nvPr/>
-        </p:nvSpPr>
-        <p:spPr>
-          <a:xfrm>
-            <a:off x="6578067" y="1828897"/>
-            <a:ext cx="2232516" cy="1490254"/>
-          </a:xfrm>
-          <a:prstGeom prst="rect">
-            <a:avLst/>
-          </a:prstGeom>
-          <a:noFill/>
-          <a:ln>
-            <a:noFill/>
-          </a:ln>
-        </p:spPr>
-        <p:txBody>
-          <a:bodyPr anchorCtr="0" anchor="ctr" bIns="91425" lIns="91425" spcFirstLastPara="1" rIns="91425" wrap="square" tIns="91425">
-            <a:noAutofit/>
-          </a:bodyPr>
-          <a:lstStyle/>
-          <a:p>
-            <a:pPr indent="0" lvl="0" marL="0" rtl="0" algn="l">
-              <a:spcBef>
-                <a:spcPts val="0"/>
-              </a:spcBef>
-              <a:spcAft>
-                <a:spcPts val="0"/>
-              </a:spcAft>
-              <a:buNone/>
-            </a:pPr>
-            <a:r>
-              <a:t/>
-            </a:r>
-            <a:endParaRPr/>
-          </a:p>
-        </p:txBody>
-      </p:sp>
-      <p:sp>
-        <p:nvSpPr>
-          <p:cNvPr id="2434" name="title"/>
-          <p:cNvSpPr txBox="1"/>
-          <p:nvPr/>
-        </p:nvSpPr>
-        <p:spPr>
-          <a:xfrm>
-            <a:off x="274320" y="282943"/>
-            <a:ext cx="6792986" cy="617220"/>
-          </a:xfrm>
-          <a:prstGeom prst="rect">
-            <a:avLst/>
-          </a:prstGeom>
-          <a:noFill/>
-        </p:spPr>
-        <p:txBody>
-          <a:bodyPr wrap="square" lIns="76200" rIns="76200" tIns="50800" bIns="50800">
-            <a:spAutoFit/>
-          </a:bodyPr>
-          <a:lstStyle/>
-          <a:p>
-            <a:pPr algn="l">
-              <a:spcAft>
-                <a:spcPts val="300"/>
-              </a:spcAft>
-              <a:defRPr sz="2438">
-                <a:solidFill>
-                  <a:srgbClr val="000000"/>
-                </a:solidFill>
-                <a:latin typeface="Play"/>
-                <a:ea typeface="Play"/>
-                <a:cs typeface="Play"/>
-              </a:defRPr>
-            </a:pPr>
-            <a:r>
-              <a:rPr sz="2438">
-                <a:solidFill>
-                  <a:srgbClr val="000000"/>
-                </a:solidFill>
-                <a:latin typeface="Play"/>
-                <a:ea typeface="Play"/>
-                <a:cs typeface="Play"/>
-              </a:rPr>
-              <a:t>Пилот: 6 недель, 2 команды</a:t>
-            </a:r>
-          </a:p>
-        </p:txBody>
-      </p:sp>
-      <p:sp>
-        <p:nvSpPr>
-          <p:cNvPr id="2435" name="body"/>
-          <p:cNvSpPr txBox="1"/>
-          <p:nvPr/>
-        </p:nvSpPr>
-        <p:spPr>
-          <a:xfrm>
-            <a:off x="274320" y="1414513"/>
-            <a:ext cx="4035247" cy="1317558"/>
-          </a:xfrm>
-          <a:prstGeom prst="rect">
-            <a:avLst/>
-          </a:prstGeom>
-          <a:noFill/>
-        </p:spPr>
-        <p:txBody>
-          <a:bodyPr wrap="square" lIns="76200" rIns="76200" tIns="50800" bIns="50800">
-            <a:spAutoFit/>
-          </a:bodyPr>
-          <a:lstStyle/>
-          <a:p>
-            <a:pPr algn="l">
-              <a:spcAft>
-                <a:spcPts val="300"/>
-              </a:spcAft>
-              <a:defRPr sz="1400">
-                <a:solidFill>
-                  <a:srgbClr val="000000"/>
-                </a:solidFill>
-                <a:latin typeface="Play"/>
-                <a:ea typeface="Play"/>
-                <a:cs typeface="Play"/>
-              </a:defRPr>
-            </a:pPr>
-            <a:r>
-              <a:rPr sz="1400">
-                <a:solidFill>
-                  <a:srgbClr val="000000"/>
-                </a:solidFill>
-                <a:latin typeface="Play"/>
-                <a:ea typeface="Play"/>
-                <a:cs typeface="Play"/>
-              </a:rPr>
-              <a:t>• 2 недели подготовки и обучения команд</a:t>
-            </a:r>
-          </a:p>
-          <a:p>
-            <a:pPr algn="l">
-              <a:spcAft>
-                <a:spcPts val="300"/>
-              </a:spcAft>
-              <a:defRPr sz="1400">
-                <a:solidFill>
-                  <a:srgbClr val="000000"/>
-                </a:solidFill>
-                <a:latin typeface="Play"/>
-                <a:ea typeface="Play"/>
-                <a:cs typeface="Play"/>
-              </a:defRPr>
-            </a:pPr>
-            <a:r>
-              <a:rPr sz="1400">
-                <a:solidFill>
-                  <a:srgbClr val="000000"/>
-                </a:solidFill>
-                <a:latin typeface="Play"/>
-                <a:ea typeface="Play"/>
-                <a:cs typeface="Play"/>
-              </a:rPr>
-              <a:t>• Запуск пилота на 2 командах</a:t>
-            </a:r>
-          </a:p>
-          <a:p>
-            <a:pPr algn="l">
-              <a:spcAft>
-                <a:spcPts val="300"/>
-              </a:spcAft>
-              <a:defRPr sz="1400">
-                <a:solidFill>
-                  <a:srgbClr val="000000"/>
-                </a:solidFill>
-                <a:latin typeface="Play"/>
-                <a:ea typeface="Play"/>
-                <a:cs typeface="Play"/>
-              </a:defRPr>
-            </a:pPr>
-            <a:r>
-              <a:rPr sz="1400">
-                <a:solidFill>
-                  <a:srgbClr val="000000"/>
-                </a:solidFill>
-                <a:latin typeface="Play"/>
-                <a:ea typeface="Play"/>
-                <a:cs typeface="Play"/>
-              </a:rPr>
-              <a:t>• Аудит качества проверяет все числа</a:t>
-            </a:r>
-          </a:p>
-          <a:p>
-            <a:pPr algn="l">
-              <a:spcAft>
-                <a:spcPts val="300"/>
-              </a:spcAft>
-              <a:defRPr sz="1400">
-                <a:solidFill>
-                  <a:srgbClr val="000000"/>
-                </a:solidFill>
-                <a:latin typeface="Play"/>
-                <a:ea typeface="Play"/>
-                <a:cs typeface="Play"/>
-              </a:defRPr>
-            </a:pPr>
-            <a:r>
-              <a:rPr sz="1400">
-                <a:solidFill>
-                  <a:srgbClr val="000000"/>
-                </a:solidFill>
-                <a:latin typeface="Play"/>
-                <a:ea typeface="Play"/>
-                <a:cs typeface="Play"/>
-              </a:rPr>
-              <a:t>• Экспорт готовых колод в pptx, pdf, html</a:t>
-            </a:r>
-          </a:p>
-        </p:txBody>
-      </p:sp>
-      <p:sp>
-        <p:nvSpPr>
-          <p:cNvPr id="2436" name="Pentagon 2435"/>
-          <p:cNvSpPr/>
-          <p:nvPr/>
-        </p:nvSpPr>
-        <p:spPr>
-          <a:xfrm>
-            <a:off x="4583887" y="1437570"/>
-            <a:ext cx="4035247" cy="283274"/>
-          </a:xfrm>
-          <a:prstGeom prst="homePlate">
-            <a:avLst/>
-          </a:prstGeom>
-          <a:solidFill>
-            <a:srgbClr val="0077FF"/>
-          </a:solidFill>
-          <a:ln>
-            <a:noFill/>
-          </a:ln>
-        </p:spPr>
-        <p:style>
-          <a:lnRef idx="1">
-            <a:schemeClr val="accent1"/>
-          </a:lnRef>
-          <a:fillRef idx="3">
-            <a:schemeClr val="accent1"/>
-          </a:fillRef>
-          <a:effectRef idx="2">
-            <a:schemeClr val="accent1"/>
-          </a:effectRef>
-          <a:fontRef idx="minor">
-            <a:schemeClr val="lt1"/>
-          </a:fontRef>
-        </p:style>
-        <p:txBody>
-          <a:bodyPr rtlCol="0" anchor="ctr" wrap="square" lIns="12700" rIns="12700" tIns="12700" bIns="12700"/>
-          <a:lstStyle/>
-          <a:p>
-            <a:pPr algn="ctr">
-              <a:defRPr sz="1400" b="0">
-                <a:solidFill>
-                  <a:srgbClr val="FFFFFF"/>
-                </a:solidFill>
-                <a:latin typeface="Play"/>
-                <a:ea typeface="Play"/>
-                <a:cs typeface="Play"/>
-              </a:defRPr>
-            </a:pPr>
-            <a:r>
-              <a:rPr sz="1400" b="0">
-                <a:solidFill>
-                  <a:srgbClr val="FFFFFF"/>
-                </a:solidFill>
-                <a:latin typeface="Play"/>
-                <a:ea typeface="Play"/>
-                <a:cs typeface="Play"/>
-              </a:rPr>
-              <a:t>Подготовка</a:t>
-            </a:r>
-          </a:p>
-        </p:txBody>
-      </p:sp>
-      <p:sp>
-        <p:nvSpPr>
-          <p:cNvPr id="2437" name="Chevron 2436"/>
-          <p:cNvSpPr/>
-          <p:nvPr/>
-        </p:nvSpPr>
-        <p:spPr>
-          <a:xfrm>
-            <a:off x="4583887" y="1766959"/>
-            <a:ext cx="4035247" cy="283274"/>
-          </a:xfrm>
-          <a:prstGeom prst="chevron">
-            <a:avLst/>
-          </a:prstGeom>
-          <a:solidFill>
-            <a:srgbClr val="0077FF"/>
-          </a:solidFill>
-          <a:ln>
-            <a:noFill/>
-          </a:ln>
-        </p:spPr>
-        <p:style>
-          <a:lnRef idx="1">
-            <a:schemeClr val="accent1"/>
-          </a:lnRef>
-          <a:fillRef idx="3">
-            <a:schemeClr val="accent1"/>
-          </a:fillRef>
-          <a:effectRef idx="2">
-            <a:schemeClr val="accent1"/>
-          </a:effectRef>
-          <a:fontRef idx="minor">
-            <a:schemeClr val="lt1"/>
-          </a:fontRef>
-        </p:style>
-        <p:txBody>
-          <a:bodyPr rtlCol="0" anchor="ctr" wrap="square" lIns="12700" rIns="12700" tIns="12700" bIns="12700"/>
-          <a:lstStyle/>
-          <a:p>
-            <a:pPr algn="ctr">
-              <a:defRPr sz="1400" b="0">
-                <a:solidFill>
-                  <a:srgbClr val="FFFFFF"/>
-                </a:solidFill>
-                <a:latin typeface="Play"/>
-                <a:ea typeface="Play"/>
-                <a:cs typeface="Play"/>
-              </a:defRPr>
-            </a:pPr>
-            <a:r>
-              <a:rPr sz="1400" b="0">
-                <a:solidFill>
-                  <a:srgbClr val="FFFFFF"/>
-                </a:solidFill>
-                <a:latin typeface="Play"/>
-                <a:ea typeface="Play"/>
-                <a:cs typeface="Play"/>
-              </a:rPr>
-              <a:t>Запуск</a:t>
-            </a:r>
-          </a:p>
-        </p:txBody>
-      </p:sp>
-      <p:sp>
-        <p:nvSpPr>
-          <p:cNvPr id="2438" name="Chevron 2437"/>
-          <p:cNvSpPr/>
-          <p:nvPr/>
-        </p:nvSpPr>
-        <p:spPr>
-          <a:xfrm>
-            <a:off x="4583887" y="2096349"/>
-            <a:ext cx="4035247" cy="283274"/>
-          </a:xfrm>
-          <a:prstGeom prst="chevron">
-            <a:avLst/>
-          </a:prstGeom>
-          <a:solidFill>
-            <a:srgbClr val="0077FF"/>
-          </a:solidFill>
-          <a:ln>
-            <a:noFill/>
-          </a:ln>
-        </p:spPr>
-        <p:style>
-          <a:lnRef idx="1">
-            <a:schemeClr val="accent1"/>
-          </a:lnRef>
-          <a:fillRef idx="3">
-            <a:schemeClr val="accent1"/>
-          </a:fillRef>
-          <a:effectRef idx="2">
-            <a:schemeClr val="accent1"/>
-          </a:effectRef>
-          <a:fontRef idx="minor">
-            <a:schemeClr val="lt1"/>
-          </a:fontRef>
-        </p:style>
-        <p:txBody>
-          <a:bodyPr rtlCol="0" anchor="ctr" wrap="square" lIns="12700" rIns="12700" tIns="12700" bIns="12700"/>
-          <a:lstStyle/>
-          <a:p>
-            <a:pPr algn="ctr">
-              <a:defRPr sz="1400" b="0">
-                <a:solidFill>
-                  <a:srgbClr val="FFFFFF"/>
-                </a:solidFill>
-                <a:latin typeface="Play"/>
-                <a:ea typeface="Play"/>
-                <a:cs typeface="Play"/>
-              </a:defRPr>
-            </a:pPr>
-            <a:r>
-              <a:rPr sz="1400" b="0">
-                <a:solidFill>
-                  <a:srgbClr val="FFFFFF"/>
-                </a:solidFill>
-                <a:latin typeface="Play"/>
-                <a:ea typeface="Play"/>
-                <a:cs typeface="Play"/>
-              </a:rPr>
-              <a:t>Аудит</a:t>
-            </a:r>
-          </a:p>
-        </p:txBody>
-      </p:sp>
-      <p:sp>
-        <p:nvSpPr>
-          <p:cNvPr id="2439" name="Chevron 2438"/>
-          <p:cNvSpPr/>
-          <p:nvPr/>
-        </p:nvSpPr>
-        <p:spPr>
-          <a:xfrm>
-            <a:off x="4583887" y="2425738"/>
-            <a:ext cx="4035247" cy="283274"/>
-          </a:xfrm>
-          <a:prstGeom prst="chevron">
-            <a:avLst/>
-          </a:prstGeom>
-          <a:solidFill>
-            <a:srgbClr val="0077FF"/>
-          </a:solidFill>
-          <a:ln>
-            <a:noFill/>
-          </a:ln>
-        </p:spPr>
-        <p:style>
-          <a:lnRef idx="1">
-            <a:schemeClr val="accent1"/>
-          </a:lnRef>
-          <a:fillRef idx="3">
-            <a:schemeClr val="accent1"/>
-          </a:fillRef>
-          <a:effectRef idx="2">
-            <a:schemeClr val="accent1"/>
-          </a:effectRef>
-          <a:fontRef idx="minor">
-            <a:schemeClr val="lt1"/>
-          </a:fontRef>
-        </p:style>
-        <p:txBody>
-          <a:bodyPr rtlCol="0" anchor="ctr" wrap="square" lIns="12700" rIns="12700" tIns="12700" bIns="12700"/>
-          <a:lstStyle/>
-          <a:p>
-            <a:pPr algn="ctr">
-              <a:defRPr sz="1400" b="0">
-                <a:solidFill>
-                  <a:srgbClr val="FFFFFF"/>
-                </a:solidFill>
-                <a:latin typeface="Play"/>
-                <a:ea typeface="Play"/>
-                <a:cs typeface="Play"/>
-              </a:defRPr>
-            </a:pPr>
-            <a:r>
-              <a:rPr sz="1400" b="0">
-                <a:solidFill>
-                  <a:srgbClr val="FFFFFF"/>
-                </a:solidFill>
-                <a:latin typeface="Play"/>
-                <a:ea typeface="Play"/>
-                <a:cs typeface="Play"/>
-              </a:rPr>
-              <a:t>Экспорт</a:t>
-            </a:r>
-          </a:p>
-        </p:txBody>
-      </p:sp>
-    </p:spTree>
-  </p:cSld>
-  <p:clrMapOvr>
-    <a:masterClrMapping/>
-  </p:clrMapOvr>
-</p:sld>
-</file>
-
-<file path=ppt/slides/slide62.xml><?xml version="1.0" encoding="utf-8"?>
-<p:sld xmlns:a="http://schemas.openxmlformats.org/drawingml/2006/main" xmlns:p="http://schemas.openxmlformats.org/presentationml/2006/main" xmlns:r="http://schemas.openxmlformats.org/officeDocument/2006/relationships">
-  <p:cSld>
-    <p:spTree>
-      <p:nvGrpSpPr>
-        <p:cNvPr id="1" name=""/>
-        <p:cNvGrpSpPr/>
-        <p:nvPr/>
-      </p:nvGrpSpPr>
-      <p:grpSpPr/>
-      <p:sp>
-        <p:nvSpPr>
-          <p:cNvPr id="532" name="Google Shape;532;p53"/>
-          <p:cNvSpPr/>
-          <p:nvPr/>
-        </p:nvSpPr>
-        <p:spPr>
-          <a:xfrm>
-            <a:off x="303214" y="1022533"/>
-            <a:ext cx="8451939" cy="1433588"/>
-          </a:xfrm>
-          <a:prstGeom prst="rect">
-            <a:avLst/>
-          </a:prstGeom>
-          <a:noFill/>
-          <a:ln>
-            <a:noFill/>
-          </a:ln>
-        </p:spPr>
-        <p:txBody>
-          <a:bodyPr anchorCtr="0" anchor="ctr" bIns="91425" lIns="91425" spcFirstLastPara="1" rIns="91425" wrap="square" tIns="91425">
-            <a:noAutofit/>
-          </a:bodyPr>
-          <a:lstStyle/>
-          <a:p>
-            <a:pPr indent="0" lvl="0" marL="0" rtl="0" algn="l">
-              <a:spcBef>
-                <a:spcPts val="0"/>
-              </a:spcBef>
-              <a:spcAft>
-                <a:spcPts val="0"/>
-              </a:spcAft>
-              <a:buNone/>
-            </a:pPr>
-            <a:r>
-              <a:t/>
-            </a:r>
-            <a:endParaRPr/>
-          </a:p>
-        </p:txBody>
-      </p:sp>
-      <p:sp>
-        <p:nvSpPr>
-          <p:cNvPr id="541" name="Google Shape;541;p53"/>
-          <p:cNvSpPr/>
-          <p:nvPr/>
-        </p:nvSpPr>
-        <p:spPr>
-          <a:xfrm>
-            <a:off x="3831556" y="1022533"/>
-            <a:ext cx="1395256" cy="1433588"/>
-          </a:xfrm>
-          <a:prstGeom prst="rect">
-            <a:avLst/>
-          </a:prstGeom>
-          <a:noFill/>
-          <a:ln>
-            <a:noFill/>
-          </a:ln>
-        </p:spPr>
-        <p:txBody>
-          <a:bodyPr anchorCtr="0" anchor="ctr" bIns="91425" lIns="91425" spcFirstLastPara="1" rIns="91425" wrap="square" tIns="91425">
-            <a:noAutofit/>
-          </a:bodyPr>
-          <a:lstStyle/>
-          <a:p>
-            <a:pPr indent="0" lvl="0" marL="0" rtl="0" algn="l">
-              <a:spcBef>
-                <a:spcPts val="0"/>
-              </a:spcBef>
-              <a:spcAft>
-                <a:spcPts val="0"/>
-              </a:spcAft>
-              <a:buNone/>
-            </a:pPr>
-            <a:r>
-              <a:t/>
-            </a:r>
-            <a:endParaRPr/>
-          </a:p>
-        </p:txBody>
-      </p:sp>
-      <p:sp>
-        <p:nvSpPr>
-          <p:cNvPr id="553" name="Google Shape;553;p53"/>
-          <p:cNvSpPr/>
-          <p:nvPr/>
-        </p:nvSpPr>
-        <p:spPr>
-          <a:xfrm>
-            <a:off x="276488" y="2955549"/>
-            <a:ext cx="8451939" cy="1433588"/>
-          </a:xfrm>
-          <a:prstGeom prst="rect">
-            <a:avLst/>
-          </a:prstGeom>
-          <a:noFill/>
-          <a:ln>
-            <a:noFill/>
-          </a:ln>
-        </p:spPr>
-        <p:txBody>
-          <a:bodyPr anchorCtr="0" anchor="ctr" bIns="91425" lIns="91425" spcFirstLastPara="1" rIns="91425" wrap="square" tIns="91425">
-            <a:noAutofit/>
-          </a:bodyPr>
-          <a:lstStyle/>
-          <a:p>
-            <a:pPr indent="0" lvl="0" marL="0" rtl="0" algn="l">
-              <a:spcBef>
-                <a:spcPts val="0"/>
-              </a:spcBef>
-              <a:spcAft>
-                <a:spcPts val="0"/>
-              </a:spcAft>
-              <a:buNone/>
-            </a:pPr>
-            <a:r>
-              <a:t/>
-            </a:r>
-            <a:endParaRPr/>
-          </a:p>
-        </p:txBody>
-      </p:sp>
-      <p:sp>
-        <p:nvSpPr>
-          <p:cNvPr id="554" name="Google Shape;554;p53"/>
-          <p:cNvSpPr/>
-          <p:nvPr/>
-        </p:nvSpPr>
-        <p:spPr>
-          <a:xfrm>
-            <a:off x="303214" y="2797849"/>
-            <a:ext cx="8451939" cy="1433588"/>
-          </a:xfrm>
-          <a:prstGeom prst="rect">
-            <a:avLst/>
-          </a:prstGeom>
-          <a:noFill/>
-          <a:ln>
-            <a:noFill/>
-          </a:ln>
-        </p:spPr>
-        <p:txBody>
-          <a:bodyPr anchorCtr="0" anchor="ctr" bIns="91425" lIns="91425" spcFirstLastPara="1" rIns="91425" wrap="square" tIns="91425">
-            <a:noAutofit/>
-          </a:bodyPr>
-          <a:lstStyle/>
-          <a:p>
-            <a:pPr indent="0" lvl="0" marL="0" rtl="0" algn="l">
-              <a:spcBef>
-                <a:spcPts val="0"/>
-              </a:spcBef>
-              <a:spcAft>
-                <a:spcPts val="0"/>
-              </a:spcAft>
-              <a:buNone/>
-            </a:pPr>
-            <a:r>
-              <a:t/>
-            </a:r>
-            <a:endParaRPr/>
-          </a:p>
-        </p:txBody>
-      </p:sp>
-      <p:sp>
-        <p:nvSpPr>
-          <p:cNvPr id="555" name="title"/>
-          <p:cNvSpPr txBox="1"/>
-          <p:nvPr/>
-        </p:nvSpPr>
-        <p:spPr>
-          <a:xfrm>
-            <a:off x="274320" y="282943"/>
-            <a:ext cx="6792986" cy="617220"/>
-          </a:xfrm>
-          <a:prstGeom prst="rect">
-            <a:avLst/>
-          </a:prstGeom>
-          <a:noFill/>
-        </p:spPr>
-        <p:txBody>
-          <a:bodyPr wrap="square" lIns="76200" rIns="76200" tIns="50800" bIns="50800">
-            <a:spAutoFit/>
-          </a:bodyPr>
-          <a:lstStyle/>
-          <a:p>
-            <a:pPr algn="l">
-              <a:spcAft>
-                <a:spcPts val="300"/>
-              </a:spcAft>
-              <a:defRPr sz="2438">
-                <a:solidFill>
-                  <a:srgbClr val="000000"/>
-                </a:solidFill>
-                <a:latin typeface="Play"/>
-                <a:ea typeface="Play"/>
-                <a:cs typeface="Play"/>
-              </a:defRPr>
-            </a:pPr>
-            <a:r>
-              <a:rPr sz="2438">
-                <a:solidFill>
-                  <a:srgbClr val="000000"/>
-                </a:solidFill>
-                <a:latin typeface="Play"/>
-                <a:ea typeface="Play"/>
-                <a:cs typeface="Play"/>
-              </a:rPr>
-              <a:t>Ресурсы и сроки</a:t>
-            </a:r>
-          </a:p>
-        </p:txBody>
-      </p:sp>
-      <p:sp>
-        <p:nvSpPr>
-          <p:cNvPr id="556" name="body_left"/>
-          <p:cNvSpPr txBox="1"/>
-          <p:nvPr/>
-        </p:nvSpPr>
-        <p:spPr>
-          <a:xfrm>
-            <a:off x="274320" y="1414513"/>
-            <a:ext cx="4035247" cy="2851865"/>
-          </a:xfrm>
-          <a:prstGeom prst="rect">
-            <a:avLst/>
-          </a:prstGeom>
-          <a:noFill/>
-        </p:spPr>
-        <p:txBody>
-          <a:bodyPr wrap="square" lIns="76200" rIns="76200" tIns="50800" bIns="50800">
-            <a:spAutoFit/>
-          </a:bodyPr>
-          <a:lstStyle/>
-          <a:p>
-            <a:pPr algn="l">
-              <a:spcAft>
-                <a:spcPts val="300"/>
-              </a:spcAft>
-              <a:defRPr sz="1600">
-                <a:solidFill>
-                  <a:srgbClr val="000000"/>
-                </a:solidFill>
-                <a:latin typeface="Play"/>
-                <a:ea typeface="Play"/>
-                <a:cs typeface="Play"/>
-              </a:defRPr>
-            </a:pPr>
-            <a:r>
-              <a:rPr sz="1600">
-                <a:solidFill>
-                  <a:srgbClr val="000000"/>
-                </a:solidFill>
-                <a:latin typeface="Play"/>
-                <a:ea typeface="Play"/>
-                <a:cs typeface="Play"/>
-              </a:rPr>
-              <a:t>• Сервис работает на 2 vCPU / 2 ГБ RAM</a:t>
-            </a:r>
-          </a:p>
-          <a:p>
-            <a:pPr algn="l">
-              <a:spcAft>
-                <a:spcPts val="300"/>
-              </a:spcAft>
-              <a:defRPr sz="1600">
-                <a:solidFill>
-                  <a:srgbClr val="000000"/>
-                </a:solidFill>
-                <a:latin typeface="Play"/>
-                <a:ea typeface="Play"/>
-                <a:cs typeface="Play"/>
-              </a:defRPr>
-            </a:pPr>
-            <a:r>
-              <a:rPr sz="1600">
-                <a:solidFill>
-                  <a:srgbClr val="000000"/>
-                </a:solidFill>
-                <a:latin typeface="Play"/>
-                <a:ea typeface="Play"/>
-                <a:cs typeface="Play"/>
-              </a:rPr>
-              <a:t>• Инференс за 6 недель стоит 1 400 руб</a:t>
-            </a:r>
-          </a:p>
-          <a:p>
-            <a:pPr algn="l">
-              <a:spcAft>
-                <a:spcPts val="300"/>
-              </a:spcAft>
-              <a:defRPr sz="1600">
-                <a:solidFill>
-                  <a:srgbClr val="000000"/>
-                </a:solidFill>
-                <a:latin typeface="Play"/>
-                <a:ea typeface="Play"/>
-                <a:cs typeface="Play"/>
-              </a:defRPr>
-            </a:pPr>
-            <a:r>
-              <a:rPr sz="1600">
-                <a:solidFill>
-                  <a:srgbClr val="000000"/>
-                </a:solidFill>
-                <a:latin typeface="Play"/>
-                <a:ea typeface="Play"/>
-                <a:cs typeface="Play"/>
-              </a:rPr>
-              <a:t>• План: Q3 2026 подключить 4 команды, домен и HTTPS</a:t>
-            </a:r>
-          </a:p>
-        </p:txBody>
-      </p:sp>
-      <p:sp>
-        <p:nvSpPr>
-          <p:cNvPr id="557" name="body_right"/>
-          <p:cNvSpPr txBox="1"/>
-          <p:nvPr/>
-        </p:nvSpPr>
-        <p:spPr>
-          <a:xfrm>
-            <a:off x="4583887" y="1414513"/>
-            <a:ext cx="4035247" cy="2851865"/>
-          </a:xfrm>
-          <a:prstGeom prst="rect">
-            <a:avLst/>
-          </a:prstGeom>
-          <a:noFill/>
-        </p:spPr>
-        <p:txBody>
-          <a:bodyPr wrap="square" lIns="76200" rIns="76200" tIns="50800" bIns="50800">
-            <a:spAutoFit/>
-          </a:bodyPr>
-          <a:lstStyle/>
-          <a:p>
-            <a:pPr algn="l">
-              <a:spcAft>
-                <a:spcPts val="300"/>
-              </a:spcAft>
-              <a:defRPr sz="1600">
-                <a:solidFill>
-                  <a:srgbClr val="000000"/>
-                </a:solidFill>
-                <a:latin typeface="Play"/>
-                <a:ea typeface="Play"/>
-                <a:cs typeface="Play"/>
-              </a:defRPr>
-            </a:pPr>
-            <a:r>
-              <a:rPr sz="1600">
-                <a:solidFill>
-                  <a:srgbClr val="000000"/>
-                </a:solidFill>
-                <a:latin typeface="Play"/>
-                <a:ea typeface="Play"/>
-                <a:cs typeface="Play"/>
-              </a:rPr>
-              <a:t>• Q4 2026 доступ для всей компании, интеграция с хранилищем</a:t>
-            </a:r>
-          </a:p>
-          <a:p>
-            <a:pPr algn="l">
-              <a:spcAft>
-                <a:spcPts val="300"/>
-              </a:spcAft>
-              <a:defRPr sz="1600">
-                <a:solidFill>
-                  <a:srgbClr val="000000"/>
-                </a:solidFill>
-                <a:latin typeface="Play"/>
-                <a:ea typeface="Play"/>
-                <a:cs typeface="Play"/>
-              </a:defRPr>
-            </a:pPr>
-            <a:r>
-              <a:rPr sz="1600">
-                <a:solidFill>
-                  <a:srgbClr val="000000"/>
-                </a:solidFill>
-                <a:latin typeface="Play"/>
-                <a:ea typeface="Play"/>
-                <a:cs typeface="Play"/>
-              </a:rPr>
-              <a:t>• Q1 2027 генерация иллюстраций под стиль шаблона</a:t>
-            </a:r>
-          </a:p>
-        </p:txBody>
-      </p:sp>
-    </p:spTree>
-  </p:cSld>
-  <p:clrMapOvr>
-    <a:masterClrMapping/>
-  </p:clrMapOvr>
-</p:sld>
-</file>
-
 <file path=ppt/slides/slide63.xml><?xml version="1.0" encoding="utf-8"?>
 <p:sld xmlns:a="http://schemas.openxmlformats.org/drawingml/2006/main" xmlns:p="http://schemas.openxmlformats.org/presentationml/2006/main" xmlns:r="http://schemas.openxmlformats.org/officeDocument/2006/relationships">
   <p:cSld>
@@ -9054,7 +9526,7 @@
                 <a:ea typeface="Play"/>
                 <a:cs typeface="Play"/>
               </a:rPr>
-              <a:t>Риски</a:t>
+              <a:t>Ключевые риски и меры</a:t>
             </a:r>
           </a:p>
         </p:txBody>
@@ -9103,7 +9575,7 @@
                 <a:ea typeface="Play"/>
                 <a:cs typeface="Play"/>
               </a:rPr>
-              <a:t>• Модель может выдумать цифры, аудит проверяет источники</a:t>
+              <a:t>• Модель может выдумать цифры – аудит проверяет</a:t>
             </a:r>
           </a:p>
           <a:p>
@@ -9129,7 +9601,7 @@
                 <a:ea typeface="Play"/>
                 <a:cs typeface="Play"/>
               </a:rPr>
-              <a:t>• Плохой шаблон приводит к использованию рабочей области</a:t>
+              <a:t>• Плохой шаблон – сервис использует рабочую область</a:t>
             </a:r>
           </a:p>
           <a:p>
@@ -9155,7 +9627,7 @@
                 <a:ea typeface="Play"/>
                 <a:cs typeface="Play"/>
               </a:rPr>
-              <a:t>• Нагрузка выше 20 задач требует внешней очереди</a:t>
+              <a:t>• Нагрузка &gt;20 задач – нужна внешняя очередь</a:t>
             </a:r>
           </a:p>
         </p:txBody>
@@ -9186,8 +9658,8 @@
         </p:nvSpPr>
         <p:spPr>
           <a:xfrm>
-            <a:off x="445963" y="1555901"/>
-            <a:ext cx="8300171" cy="2610802"/>
+            <a:off x="1543608" y="159030"/>
+            <a:ext cx="7202525" cy="3314394"/>
           </a:xfrm>
           <a:prstGeom prst="roundRect">
             <a:avLst/>
@@ -9232,8 +9704,8 @@
         </p:nvSpPr>
         <p:spPr>
           <a:xfrm>
-            <a:off x="572963" y="1682901"/>
-            <a:ext cx="4373118" cy="1183640"/>
+            <a:off x="1670608" y="286030"/>
+            <a:ext cx="6948525" cy="1183640"/>
           </a:xfrm>
           <a:prstGeom prst="rect">
             <a:avLst/>
@@ -9268,7 +9740,7 @@
                 <a:ea typeface="Play"/>
                 <a:cs typeface="Play"/>
               </a:rPr>
-              <a:t>Решение: запуск на всю компанию</a:t>
+              <a:t>Решение: запуск сервиса на всю компанию</a:t>
             </a:r>
           </a:p>
         </p:txBody>
@@ -9281,8 +9753,8 @@
         </p:nvSpPr>
         <p:spPr>
           <a:xfrm>
-            <a:off x="572963" y="3046564"/>
-            <a:ext cx="8046171" cy="1376845"/>
+            <a:off x="1670608" y="2188185"/>
+            <a:ext cx="6948525" cy="1158240"/>
           </a:xfrm>
           <a:prstGeom prst="rect">
             <a:avLst/>
@@ -9299,7 +9771,7 @@
               <a:spcAft>
                 <a:spcPts val="300"/>
               </a:spcAft>
-              <a:defRPr sz="1800">
+              <a:defRPr sz="1600">
                 <a:solidFill>
                   <a:srgbClr val="000000"/>
                 </a:solidFill>
@@ -9309,7 +9781,7 @@
               </a:defRPr>
             </a:pPr>
             <a:r>
-              <a:rPr sz="1800">
+              <a:rPr sz="1600">
                 <a:solidFill>
                   <a:srgbClr val="000000"/>
                 </a:solidFill>
@@ -9317,7 +9789,7 @@
                 <a:ea typeface="Play"/>
                 <a:cs typeface="Play"/>
               </a:rPr>
-              <a:t>• Попросить решение о запуске на всю компанию</a:t>
+              <a:t>• Q3 2026 подключить 4 команды, Q4 2026 доступ для всей компании, Q1 2027 генерация иллюстраций</a:t>
             </a:r>
           </a:p>
           <a:p>
@@ -9325,7 +9797,7 @@
               <a:spcAft>
                 <a:spcPts val="300"/>
               </a:spcAft>
-              <a:defRPr sz="1800">
+              <a:defRPr sz="1600">
                 <a:solidFill>
                   <a:srgbClr val="000000"/>
                 </a:solidFill>
@@ -9335,7 +9807,7 @@
               </a:defRPr>
             </a:pPr>
             <a:r>
-              <a:rPr sz="1800">
+              <a:rPr sz="1600">
                 <a:solidFill>
                   <a:srgbClr val="000000"/>
                 </a:solidFill>
@@ -9343,7 +9815,7 @@
                 <a:ea typeface="Play"/>
                 <a:cs typeface="Play"/>
               </a:rPr>
-              <a:t>• Ожидаем сокращения времени сборки до 4 мин</a:t>
+              <a:t>• Требуем одобрение запуска и ресурсы</a:t>
             </a:r>
           </a:p>
           <a:p>
@@ -9351,7 +9823,7 @@
               <a:spcAft>
                 <a:spcPts val="300"/>
               </a:spcAft>
-              <a:defRPr sz="1800">
+              <a:defRPr sz="1600">
                 <a:solidFill>
                   <a:srgbClr val="000000"/>
                 </a:solidFill>
@@ -9361,7 +9833,7 @@
               </a:defRPr>
             </a:pPr>
             <a:r>
-              <a:rPr sz="1800">
+              <a:rPr sz="1600">
                 <a:solidFill>
                   <a:srgbClr val="000000"/>
                 </a:solidFill>
@@ -9369,7 +9841,7 @@
                 <a:ea typeface="Play"/>
                 <a:cs typeface="Play"/>
               </a:rPr>
-              <a:t>• Планируем интеграцию с корпоративными системами</a:t>
+              <a:t>• Ожидаем ускорение и стандартизацию</a:t>
             </a:r>
           </a:p>
         </p:txBody>

--- a/samples/VK_Tech_шаблон__split.pptx
+++ b/samples/VK_Tech_шаблон__split.pptx
@@ -279,7 +279,7 @@
               <c:strCache>
                 <c:ptCount val="1"/>
                 <c:pt idx="0">
-                  <c:v>Время (мин)</c:v>
+                  <c:v>До</c:v>
                 </c:pt>
               </c:strCache>
             </c:strRef>
@@ -296,36 +296,114 @@
           </c:spPr>
           <c:cat>
             <c:strRef>
-              <c:f>Sheet1!$A$2:$A$3</c:f>
+              <c:f>Sheet1!$A$2:$A$5</c:f>
               <c:strCache>
-                <c:ptCount val="2"/>
+                <c:ptCount val="4"/>
                 <c:pt idx="0">
-                  <c:v>Текущее</c:v>
+                  <c:v>Время на колоду (мин)</c:v>
                 </c:pt>
                 <c:pt idx="1">
-                  <c:v>Пилот</c:v>
+                  <c:v>Время до первой версии (дн)</c:v>
+                </c:pt>
+                <c:pt idx="2">
+                  <c:v>Нарушения стиля</c:v>
+                </c:pt>
+                <c:pt idx="3">
+                  <c:v>Запросы закрыты/нед</c:v>
                 </c:pt>
               </c:strCache>
             </c:strRef>
           </c:cat>
           <c:val>
             <c:numRef>
-              <c:f>Sheet1!$B$2:$B$3</c:f>
+              <c:f>Sheet1!$B$2:$B$5</c:f>
               <c:numCache>
                 <c:formatCode>General</c:formatCode>
-                <c:ptCount val="2"/>
+                <c:ptCount val="4"/>
                 <c:pt idx="0">
                   <c:v>186.0</c:v>
                 </c:pt>
                 <c:pt idx="1">
+                  <c:v>6.0</c:v>
+                </c:pt>
+                <c:pt idx="2">
+                  <c:v>19.0</c:v>
+                </c:pt>
+                <c:pt idx="3">
+                  <c:v>11.0</c:v>
+                </c:pt>
+              </c:numCache>
+            </c:numRef>
+          </c:val>
+        </c:ser>
+        <c:ser>
+          <c:idx val="1"/>
+          <c:order val="1"/>
+          <c:tx>
+            <c:strRef>
+              <c:f>Sheet1!$C$1</c:f>
+              <c:strCache>
+                <c:ptCount val="1"/>
+                <c:pt idx="0">
+                  <c:v>После</c:v>
+                </c:pt>
+              </c:strCache>
+            </c:strRef>
+          </c:tx>
+          <c:spPr>
+            <a:solidFill>
+              <a:srgbClr val="FFD91D"/>
+            </a:solidFill>
+            <a:ln>
+              <a:solidFill>
+                <a:srgbClr val="FFD91D"/>
+              </a:solidFill>
+            </a:ln>
+          </c:spPr>
+          <c:cat>
+            <c:strRef>
+              <c:f>Sheet1!$A$2:$A$5</c:f>
+              <c:strCache>
+                <c:ptCount val="4"/>
+                <c:pt idx="0">
+                  <c:v>Время на колоду (мин)</c:v>
+                </c:pt>
+                <c:pt idx="1">
+                  <c:v>Время до первой версии (дн)</c:v>
+                </c:pt>
+                <c:pt idx="2">
+                  <c:v>Нарушения стиля</c:v>
+                </c:pt>
+                <c:pt idx="3">
+                  <c:v>Запросы закрыты/нед</c:v>
+                </c:pt>
+              </c:strCache>
+            </c:strRef>
+          </c:cat>
+          <c:val>
+            <c:numRef>
+              <c:f>Sheet1!$C$2:$C$5</c:f>
+              <c:numCache>
+                <c:formatCode>General</c:formatCode>
+                <c:ptCount val="4"/>
+                <c:pt idx="0">
                   <c:v>4.0</c:v>
+                </c:pt>
+                <c:pt idx="1">
+                  <c:v>1.0</c:v>
+                </c:pt>
+                <c:pt idx="2">
+                  <c:v>2.0</c:v>
+                </c:pt>
+                <c:pt idx="3">
+                  <c:v>38.0</c:v>
                 </c:pt>
               </c:numCache>
             </c:numRef>
           </c:val>
         </c:ser>
         <c:dLbls>
-          <c:numFmt formatCode="0&quot; мин&quot;" sourceLinked="0"/>
+          <c:numFmt formatCode="0" sourceLinked="0"/>
           <c:txPr>
             <a:bodyPr wrap="none"/>
             <a:lstStyle/>
@@ -402,31 +480,6 @@
             </a:ln>
           </c:spPr>
         </c:majorGridlines>
-        <c:title>
-          <c:tx>
-            <c:rich>
-              <a:bodyPr rot="0" vert="horz"/>
-              <a:lstStyle/>
-              <a:p>
-                <a:pPr>
-                  <a:defRPr sz="1100" b="0">
-                    <a:solidFill>
-                      <a:srgbClr val="000000"/>
-                    </a:solidFill>
-                    <a:latin typeface="Play"/>
-                    <a:ea typeface="Play"/>
-                    <a:cs typeface="Play"/>
-                  </a:defRPr>
-                </a:pPr>
-                <a:r>
-                  <a:t>Время (мин), мин</a:t>
-                </a:r>
-              </a:p>
-            </c:rich>
-          </c:tx>
-          <c:layout/>
-          <c:overlay val="0"/>
-        </c:title>
         <c:majorTickMark val="out"/>
         <c:minorTickMark val="none"/>
         <c:tickLblPos val="nextTo"/>
@@ -450,642 +503,10 @@
         <c:crosses val="autoZero"/>
       </c:valAx>
     </c:plotArea>
-    <c:dispBlanksAs val="gap"/>
-  </c:chart>
-  <c:txPr>
-    <a:bodyPr/>
-    <a:lstStyle/>
-    <a:p>
-      <a:pPr>
-        <a:defRPr sz="1200" b="0">
-          <a:solidFill>
-            <a:srgbClr val="000000"/>
-          </a:solidFill>
-          <a:latin typeface="Play"/>
-          <a:ea typeface="Play"/>
-          <a:cs typeface="Play"/>
-        </a:defRPr>
-      </a:pPr>
-      <a:endParaRPr lang="en-US"/>
-    </a:p>
-  </c:txPr>
-  <c:externalData r:id="rId1">
-    <c:autoUpdate val="0"/>
-  </c:externalData>
-</c:chartSpace>
-</file>
-
-<file path=ppt/charts/chart2.xml><?xml version="1.0" encoding="utf-8"?>
-<c:chartSpace xmlns:c="http://schemas.openxmlformats.org/drawingml/2006/chart" xmlns:a="http://schemas.openxmlformats.org/drawingml/2006/main" xmlns:r="http://schemas.openxmlformats.org/officeDocument/2006/relationships">
-  <c:date1904 val="0"/>
-  <c:chart>
-    <c:autoTitleDeleted val="1"/>
-    <c:plotArea>
-      <c:barChart>
-        <c:barDir val="col"/>
-        <c:grouping val="clustered"/>
-        <c:ser>
-          <c:idx val="0"/>
-          <c:order val="0"/>
-          <c:tx>
-            <c:strRef>
-              <c:f>Sheet1!$B$1</c:f>
-              <c:strCache>
-                <c:ptCount val="1"/>
-                <c:pt idx="0">
-                  <c:v>Нарушения</c:v>
-                </c:pt>
-              </c:strCache>
-            </c:strRef>
-          </c:tx>
-          <c:spPr>
-            <a:solidFill>
-              <a:srgbClr val="0077FF"/>
-            </a:solidFill>
-            <a:ln>
-              <a:solidFill>
-                <a:srgbClr val="0077FF"/>
-              </a:solidFill>
-            </a:ln>
-          </c:spPr>
-          <c:cat>
-            <c:strRef>
-              <c:f>Sheet1!$A$2:$A$3</c:f>
-              <c:strCache>
-                <c:ptCount val="2"/>
-                <c:pt idx="0">
-                  <c:v>Текущее</c:v>
-                </c:pt>
-                <c:pt idx="1">
-                  <c:v>Пилот</c:v>
-                </c:pt>
-              </c:strCache>
-            </c:strRef>
-          </c:cat>
-          <c:val>
-            <c:numRef>
-              <c:f>Sheet1!$B$2:$B$3</c:f>
-              <c:numCache>
-                <c:formatCode>General</c:formatCode>
-                <c:ptCount val="2"/>
-                <c:pt idx="0">
-                  <c:v>19.0</c:v>
-                </c:pt>
-                <c:pt idx="1">
-                  <c:v>2.0</c:v>
-                </c:pt>
-              </c:numCache>
-            </c:numRef>
-          </c:val>
-        </c:ser>
-        <c:dLbls>
-          <c:numFmt formatCode="0&quot; колоды&quot;" sourceLinked="0"/>
-          <c:txPr>
-            <a:bodyPr wrap="none"/>
-            <a:lstStyle/>
-            <a:p>
-              <a:pPr>
-                <a:defRPr sz="1100" b="0">
-                  <a:solidFill>
-                    <a:srgbClr val="000000"/>
-                  </a:solidFill>
-                  <a:latin typeface="Play"/>
-                  <a:ea typeface="Play"/>
-                  <a:cs typeface="Play"/>
-                </a:defRPr>
-              </a:pPr>
-            </a:p>
-          </c:txPr>
-          <c:dLblPos val="outEnd"/>
-          <c:showLegendKey val="0"/>
-          <c:showVal val="1"/>
-          <c:showCatName val="0"/>
-          <c:showSerName val="0"/>
-          <c:showPercent val="0"/>
-          <c:showBubbleSize val="0"/>
-          <c:showLeaderLines val="1"/>
-        </c:dLbls>
-        <c:gapWidth val="60"/>
-        <c:axId val="-2068027336"/>
-        <c:axId val="-2113994440"/>
-      </c:barChart>
-      <c:catAx>
-        <c:axId val="-2068027336"/>
-        <c:scaling>
-          <c:orientation val="minMax"/>
-        </c:scaling>
-        <c:delete val="0"/>
-        <c:axPos val="b"/>
-        <c:majorTickMark val="out"/>
-        <c:minorTickMark val="none"/>
-        <c:tickLblPos val="nextTo"/>
-        <c:txPr>
-          <a:bodyPr/>
-          <a:lstStyle/>
-          <a:p>
-            <a:pPr>
-              <a:defRPr sz="1100" b="0">
-                <a:solidFill>
-                  <a:srgbClr val="000000"/>
-                </a:solidFill>
-                <a:latin typeface="Play"/>
-                <a:ea typeface="Play"/>
-                <a:cs typeface="Play"/>
-              </a:defRPr>
-            </a:pPr>
-          </a:p>
-        </c:txPr>
-        <c:crossAx val="-2113994440"/>
-        <c:crosses val="autoZero"/>
-        <c:auto val="1"/>
-        <c:lblAlgn val="ctr"/>
-        <c:lblOffset val="100"/>
-        <c:noMultiLvlLbl val="0"/>
-      </c:catAx>
-      <c:valAx>
-        <c:axId val="-2113994440"/>
-        <c:scaling/>
-        <c:delete val="0"/>
-        <c:axPos val="l"/>
-        <c:majorGridlines>
-          <c:spPr>
-            <a:ln w="9525">
-              <a:solidFill>
-                <a:srgbClr val="D1D1D1"/>
-              </a:solidFill>
-            </a:ln>
-          </c:spPr>
-        </c:majorGridlines>
-        <c:title>
-          <c:tx>
-            <c:rich>
-              <a:bodyPr rot="0" vert="horz"/>
-              <a:lstStyle/>
-              <a:p>
-                <a:pPr>
-                  <a:defRPr sz="1100" b="0">
-                    <a:solidFill>
-                      <a:srgbClr val="000000"/>
-                    </a:solidFill>
-                    <a:latin typeface="Play"/>
-                    <a:ea typeface="Play"/>
-                    <a:cs typeface="Play"/>
-                  </a:defRPr>
-                </a:pPr>
-                <a:r>
-                  <a:t>Нарушения, колоды</a:t>
-                </a:r>
-              </a:p>
-            </c:rich>
-          </c:tx>
-          <c:layout/>
-          <c:overlay val="0"/>
-        </c:title>
-        <c:majorTickMark val="out"/>
-        <c:minorTickMark val="none"/>
-        <c:tickLblPos val="nextTo"/>
-        <c:txPr>
-          <a:bodyPr/>
-          <a:lstStyle/>
-          <a:p>
-            <a:pPr>
-              <a:defRPr sz="1100" b="0">
-                <a:solidFill>
-                  <a:srgbClr val="000000"/>
-                </a:solidFill>
-                <a:latin typeface="Play"/>
-                <a:ea typeface="Play"/>
-                <a:cs typeface="Play"/>
-              </a:defRPr>
-            </a:pPr>
-          </a:p>
-        </c:txPr>
-        <c:crossAx val="-2068027336"/>
-        <c:crosses val="autoZero"/>
-      </c:valAx>
-    </c:plotArea>
-    <c:dispBlanksAs val="gap"/>
-  </c:chart>
-  <c:txPr>
-    <a:bodyPr/>
-    <a:lstStyle/>
-    <a:p>
-      <a:pPr>
-        <a:defRPr sz="1200" b="0">
-          <a:solidFill>
-            <a:srgbClr val="000000"/>
-          </a:solidFill>
-          <a:latin typeface="Play"/>
-          <a:ea typeface="Play"/>
-          <a:cs typeface="Play"/>
-        </a:defRPr>
-      </a:pPr>
-      <a:endParaRPr lang="en-US"/>
-    </a:p>
-  </c:txPr>
-  <c:externalData r:id="rId1">
-    <c:autoUpdate val="0"/>
-  </c:externalData>
-</c:chartSpace>
-</file>
-
-<file path=ppt/charts/chart3.xml><?xml version="1.0" encoding="utf-8"?>
-<c:chartSpace xmlns:c="http://schemas.openxmlformats.org/drawingml/2006/chart" xmlns:a="http://schemas.openxmlformats.org/drawingml/2006/main" xmlns:r="http://schemas.openxmlformats.org/officeDocument/2006/relationships">
-  <c:date1904 val="0"/>
-  <c:chart>
-    <c:autoTitleDeleted val="1"/>
-    <c:plotArea>
-      <c:barChart>
-        <c:barDir val="col"/>
-        <c:grouping val="clustered"/>
-        <c:ser>
-          <c:idx val="0"/>
-          <c:order val="0"/>
-          <c:tx>
-            <c:strRef>
-              <c:f>Sheet1!$B$1</c:f>
-              <c:strCache>
-                <c:ptCount val="1"/>
-                <c:pt idx="0">
-                  <c:v>Запросы</c:v>
-                </c:pt>
-              </c:strCache>
-            </c:strRef>
-          </c:tx>
-          <c:spPr>
-            <a:solidFill>
-              <a:srgbClr val="0077FF"/>
-            </a:solidFill>
-            <a:ln>
-              <a:solidFill>
-                <a:srgbClr val="0077FF"/>
-              </a:solidFill>
-            </a:ln>
-          </c:spPr>
-          <c:cat>
-            <c:strRef>
-              <c:f>Sheet1!$A$2:$A$3</c:f>
-              <c:strCache>
-                <c:ptCount val="2"/>
-                <c:pt idx="0">
-                  <c:v>Текущее</c:v>
-                </c:pt>
-                <c:pt idx="1">
-                  <c:v>Пилот</c:v>
-                </c:pt>
-              </c:strCache>
-            </c:strRef>
-          </c:cat>
-          <c:val>
-            <c:numRef>
-              <c:f>Sheet1!$B$2:$B$3</c:f>
-              <c:numCache>
-                <c:formatCode>General</c:formatCode>
-                <c:ptCount val="2"/>
-                <c:pt idx="0">
-                  <c:v>11.0</c:v>
-                </c:pt>
-                <c:pt idx="1">
-                  <c:v>38.0</c:v>
-                </c:pt>
-              </c:numCache>
-            </c:numRef>
-          </c:val>
-        </c:ser>
-        <c:dLbls>
-          <c:numFmt formatCode="0&quot; запросов&quot;" sourceLinked="0"/>
-          <c:txPr>
-            <a:bodyPr wrap="none"/>
-            <a:lstStyle/>
-            <a:p>
-              <a:pPr>
-                <a:defRPr sz="1100" b="0">
-                  <a:solidFill>
-                    <a:srgbClr val="000000"/>
-                  </a:solidFill>
-                  <a:latin typeface="Play"/>
-                  <a:ea typeface="Play"/>
-                  <a:cs typeface="Play"/>
-                </a:defRPr>
-              </a:pPr>
-            </a:p>
-          </c:txPr>
-          <c:dLblPos val="outEnd"/>
-          <c:showLegendKey val="0"/>
-          <c:showVal val="1"/>
-          <c:showCatName val="0"/>
-          <c:showSerName val="0"/>
-          <c:showPercent val="0"/>
-          <c:showBubbleSize val="0"/>
-          <c:showLeaderLines val="1"/>
-        </c:dLbls>
-        <c:gapWidth val="60"/>
-        <c:axId val="-2068027336"/>
-        <c:axId val="-2113994440"/>
-      </c:barChart>
-      <c:catAx>
-        <c:axId val="-2068027336"/>
-        <c:scaling>
-          <c:orientation val="minMax"/>
-        </c:scaling>
-        <c:delete val="0"/>
-        <c:axPos val="b"/>
-        <c:majorTickMark val="out"/>
-        <c:minorTickMark val="none"/>
-        <c:tickLblPos val="nextTo"/>
-        <c:txPr>
-          <a:bodyPr/>
-          <a:lstStyle/>
-          <a:p>
-            <a:pPr>
-              <a:defRPr sz="1100" b="0">
-                <a:solidFill>
-                  <a:srgbClr val="000000"/>
-                </a:solidFill>
-                <a:latin typeface="Play"/>
-                <a:ea typeface="Play"/>
-                <a:cs typeface="Play"/>
-              </a:defRPr>
-            </a:pPr>
-          </a:p>
-        </c:txPr>
-        <c:crossAx val="-2113994440"/>
-        <c:crosses val="autoZero"/>
-        <c:auto val="1"/>
-        <c:lblAlgn val="ctr"/>
-        <c:lblOffset val="100"/>
-        <c:noMultiLvlLbl val="0"/>
-      </c:catAx>
-      <c:valAx>
-        <c:axId val="-2113994440"/>
-        <c:scaling/>
-        <c:delete val="0"/>
-        <c:axPos val="l"/>
-        <c:majorGridlines>
-          <c:spPr>
-            <a:ln w="9525">
-              <a:solidFill>
-                <a:srgbClr val="D1D1D1"/>
-              </a:solidFill>
-            </a:ln>
-          </c:spPr>
-        </c:majorGridlines>
-        <c:title>
-          <c:tx>
-            <c:rich>
-              <a:bodyPr rot="0" vert="horz"/>
-              <a:lstStyle/>
-              <a:p>
-                <a:pPr>
-                  <a:defRPr sz="1100" b="0">
-                    <a:solidFill>
-                      <a:srgbClr val="000000"/>
-                    </a:solidFill>
-                    <a:latin typeface="Play"/>
-                    <a:ea typeface="Play"/>
-                    <a:cs typeface="Play"/>
-                  </a:defRPr>
-                </a:pPr>
-                <a:r>
-                  <a:t>Запросы, запросов</a:t>
-                </a:r>
-              </a:p>
-            </c:rich>
-          </c:tx>
-          <c:layout/>
-          <c:overlay val="0"/>
-        </c:title>
-        <c:majorTickMark val="out"/>
-        <c:minorTickMark val="none"/>
-        <c:tickLblPos val="nextTo"/>
-        <c:txPr>
-          <a:bodyPr/>
-          <a:lstStyle/>
-          <a:p>
-            <a:pPr>
-              <a:defRPr sz="1100" b="0">
-                <a:solidFill>
-                  <a:srgbClr val="000000"/>
-                </a:solidFill>
-                <a:latin typeface="Play"/>
-                <a:ea typeface="Play"/>
-                <a:cs typeface="Play"/>
-              </a:defRPr>
-            </a:pPr>
-          </a:p>
-        </c:txPr>
-        <c:crossAx val="-2068027336"/>
-        <c:crosses val="autoZero"/>
-      </c:valAx>
-    </c:plotArea>
-    <c:dispBlanksAs val="gap"/>
-  </c:chart>
-  <c:txPr>
-    <a:bodyPr/>
-    <a:lstStyle/>
-    <a:p>
-      <a:pPr>
-        <a:defRPr sz="1200" b="0">
-          <a:solidFill>
-            <a:srgbClr val="000000"/>
-          </a:solidFill>
-          <a:latin typeface="Play"/>
-          <a:ea typeface="Play"/>
-          <a:cs typeface="Play"/>
-        </a:defRPr>
-      </a:pPr>
-      <a:endParaRPr lang="en-US"/>
-    </a:p>
-  </c:txPr>
-  <c:externalData r:id="rId1">
-    <c:autoUpdate val="0"/>
-  </c:externalData>
-</c:chartSpace>
-</file>
-
-<file path=ppt/charts/chart4.xml><?xml version="1.0" encoding="utf-8"?>
-<c:chartSpace xmlns:c="http://schemas.openxmlformats.org/drawingml/2006/chart" xmlns:a="http://schemas.openxmlformats.org/drawingml/2006/main" xmlns:r="http://schemas.openxmlformats.org/officeDocument/2006/relationships">
-  <c:date1904 val="0"/>
-  <c:chart>
-    <c:autoTitleDeleted val="1"/>
-    <c:plotArea>
-      <c:barChart>
-        <c:barDir val="col"/>
-        <c:grouping val="clustered"/>
-        <c:ser>
-          <c:idx val="0"/>
-          <c:order val="0"/>
-          <c:tx>
-            <c:strRef>
-              <c:f>Sheet1!$B$1</c:f>
-              <c:strCache>
-                <c:ptCount val="1"/>
-                <c:pt idx="0">
-                  <c:v>Стоимость (руб)</c:v>
-                </c:pt>
-              </c:strCache>
-            </c:strRef>
-          </c:tx>
-          <c:spPr>
-            <a:solidFill>
-              <a:srgbClr val="0077FF"/>
-            </a:solidFill>
-            <a:ln>
-              <a:solidFill>
-                <a:srgbClr val="0077FF"/>
-              </a:solidFill>
-            </a:ln>
-          </c:spPr>
-          <c:cat>
-            <c:strRef>
-              <c:f>Sheet1!$A$2:$A$2</c:f>
-              <c:strCache>
-                <c:ptCount val="1"/>
-                <c:pt idx="0">
-                  <c:v>Пилот</c:v>
-                </c:pt>
-              </c:strCache>
-            </c:strRef>
-          </c:cat>
-          <c:val>
-            <c:numRef>
-              <c:f>Sheet1!$B$2:$B$2</c:f>
-              <c:numCache>
-                <c:formatCode>General</c:formatCode>
-                <c:ptCount val="1"/>
-                <c:pt idx="0">
-                  <c:v>1400.0</c:v>
-                </c:pt>
-              </c:numCache>
-            </c:numRef>
-          </c:val>
-        </c:ser>
-        <c:dLbls>
-          <c:numFmt formatCode="0&quot; руб&quot;" sourceLinked="0"/>
-          <c:txPr>
-            <a:bodyPr wrap="none"/>
-            <a:lstStyle/>
-            <a:p>
-              <a:pPr>
-                <a:defRPr sz="1100" b="0">
-                  <a:solidFill>
-                    <a:srgbClr val="000000"/>
-                  </a:solidFill>
-                  <a:latin typeface="Play"/>
-                  <a:ea typeface="Play"/>
-                  <a:cs typeface="Play"/>
-                </a:defRPr>
-              </a:pPr>
-            </a:p>
-          </c:txPr>
-          <c:dLblPos val="outEnd"/>
-          <c:showLegendKey val="0"/>
-          <c:showVal val="1"/>
-          <c:showCatName val="0"/>
-          <c:showSerName val="0"/>
-          <c:showPercent val="0"/>
-          <c:showBubbleSize val="0"/>
-          <c:showLeaderLines val="1"/>
-        </c:dLbls>
-        <c:gapWidth val="60"/>
-        <c:axId val="-2068027336"/>
-        <c:axId val="-2113994440"/>
-      </c:barChart>
-      <c:catAx>
-        <c:axId val="-2068027336"/>
-        <c:scaling>
-          <c:orientation val="minMax"/>
-        </c:scaling>
-        <c:delete val="0"/>
-        <c:axPos val="b"/>
-        <c:majorTickMark val="out"/>
-        <c:minorTickMark val="none"/>
-        <c:tickLblPos val="nextTo"/>
-        <c:txPr>
-          <a:bodyPr/>
-          <a:lstStyle/>
-          <a:p>
-            <a:pPr>
-              <a:defRPr sz="1100" b="0">
-                <a:solidFill>
-                  <a:srgbClr val="000000"/>
-                </a:solidFill>
-                <a:latin typeface="Play"/>
-                <a:ea typeface="Play"/>
-                <a:cs typeface="Play"/>
-              </a:defRPr>
-            </a:pPr>
-          </a:p>
-        </c:txPr>
-        <c:crossAx val="-2113994440"/>
-        <c:crosses val="autoZero"/>
-        <c:auto val="1"/>
-        <c:lblAlgn val="ctr"/>
-        <c:lblOffset val="100"/>
-        <c:noMultiLvlLbl val="0"/>
-      </c:catAx>
-      <c:valAx>
-        <c:axId val="-2113994440"/>
-        <c:scaling/>
-        <c:delete val="0"/>
-        <c:axPos val="l"/>
-        <c:majorGridlines>
-          <c:spPr>
-            <a:ln w="9525">
-              <a:solidFill>
-                <a:srgbClr val="D1D1D1"/>
-              </a:solidFill>
-            </a:ln>
-          </c:spPr>
-        </c:majorGridlines>
-        <c:title>
-          <c:tx>
-            <c:rich>
-              <a:bodyPr rot="0" vert="horz"/>
-              <a:lstStyle/>
-              <a:p>
-                <a:pPr>
-                  <a:defRPr sz="1100" b="0">
-                    <a:solidFill>
-                      <a:srgbClr val="000000"/>
-                    </a:solidFill>
-                    <a:latin typeface="Play"/>
-                    <a:ea typeface="Play"/>
-                    <a:cs typeface="Play"/>
-                  </a:defRPr>
-                </a:pPr>
-                <a:r>
-                  <a:t>Стоимость (руб), руб</a:t>
-                </a:r>
-              </a:p>
-            </c:rich>
-          </c:tx>
-          <c:layout/>
-          <c:overlay val="0"/>
-        </c:title>
-        <c:majorTickMark val="out"/>
-        <c:minorTickMark val="none"/>
-        <c:tickLblPos val="nextTo"/>
-        <c:txPr>
-          <a:bodyPr/>
-          <a:lstStyle/>
-          <a:p>
-            <a:pPr>
-              <a:defRPr sz="1100" b="0">
-                <a:solidFill>
-                  <a:srgbClr val="000000"/>
-                </a:solidFill>
-                <a:latin typeface="Play"/>
-                <a:ea typeface="Play"/>
-                <a:cs typeface="Play"/>
-              </a:defRPr>
-            </a:pPr>
-          </a:p>
-        </c:txPr>
-        <c:crossAx val="-2068027336"/>
-        <c:crosses val="autoZero"/>
-      </c:valAx>
-    </c:plotArea>
+    <c:legend>
+      <c:legendPos val="b"/>
+      <c:overlay val="0"/>
+    </c:legend>
     <c:dispBlanksAs val="gap"/>
   </c:chart>
   <c:txPr>
@@ -6148,7 +5569,7 @@
                 <a:ea typeface="Play"/>
                 <a:cs typeface="Play"/>
               </a:rPr>
-              <a:t>Защита инициативы: сервис автоматической вёрстки презентаций</a:t>
+              <a:t>Автоматическая вёрстка презентаций: пилот и масштаб</a:t>
             </a:r>
           </a:p>
         </p:txBody>
@@ -6171,268 +5592,9 @@
         <p:nvPr/>
       </p:nvGrpSpPr>
       <p:grpSpPr/>
-      <p:pic>
-        <p:nvPicPr>
-          <p:cNvPr descr=" " id="2385" name="Google Shape;2385;p88"/>
-          <p:cNvPicPr preferRelativeResize="0"/>
-          <p:nvPr/>
-        </p:nvPicPr>
-        <p:blipFill rotWithShape="1">
-          <a:blip r:embed="rId2">
-            <a:alphaModFix/>
-          </a:blip>
-          <a:srcRect b="0" l="0" r="0" t="0"/>
-          <a:stretch/>
-        </p:blipFill>
-        <p:spPr>
-          <a:xfrm>
-            <a:off x="388142" y="2000324"/>
-            <a:ext cx="8755811" cy="9524"/>
-          </a:xfrm>
-          <a:prstGeom prst="rect">
-            <a:avLst/>
-          </a:prstGeom>
-          <a:noFill/>
-          <a:ln>
-            <a:noFill/>
-          </a:ln>
-        </p:spPr>
-      </p:pic>
-      <p:sp>
-        <p:nvSpPr>
-          <p:cNvPr id="2386" name="Google Shape;2386;p88"/>
-          <p:cNvSpPr/>
-          <p:nvPr/>
-        </p:nvSpPr>
-        <p:spPr>
-          <a:xfrm>
-            <a:off x="319086" y="1286042"/>
-            <a:ext cx="1690679" cy="1128566"/>
-          </a:xfrm>
-          <a:prstGeom prst="rect">
-            <a:avLst/>
-          </a:prstGeom>
-          <a:noFill/>
-          <a:ln>
-            <a:noFill/>
-          </a:ln>
-        </p:spPr>
-        <p:txBody>
-          <a:bodyPr anchorCtr="0" anchor="ctr" bIns="91425" lIns="91425" spcFirstLastPara="1" rIns="91425" wrap="square" tIns="91425">
-            <a:noAutofit/>
-          </a:bodyPr>
-          <a:lstStyle/>
-          <a:p>
-            <a:pPr indent="0" lvl="0" marL="0" rtl="0" algn="l">
-              <a:spcBef>
-                <a:spcPts val="0"/>
-              </a:spcBef>
-              <a:spcAft>
-                <a:spcPts val="0"/>
-              </a:spcAft>
-              <a:buNone/>
-            </a:pPr>
-            <a:r>
-              <a:t/>
-            </a:r>
-            <a:endParaRPr/>
-          </a:p>
-        </p:txBody>
-      </p:sp>
-      <p:sp>
-        <p:nvSpPr>
-          <p:cNvPr id="2388" name="Google Shape;2388;p88"/>
-          <p:cNvSpPr/>
-          <p:nvPr/>
-        </p:nvSpPr>
-        <p:spPr>
-          <a:xfrm>
-            <a:off x="2600312" y="1286042"/>
-            <a:ext cx="1690679" cy="1128566"/>
-          </a:xfrm>
-          <a:prstGeom prst="rect">
-            <a:avLst/>
-          </a:prstGeom>
-          <a:noFill/>
-          <a:ln>
-            <a:noFill/>
-          </a:ln>
-        </p:spPr>
-        <p:txBody>
-          <a:bodyPr anchorCtr="0" anchor="ctr" bIns="91425" lIns="91425" spcFirstLastPara="1" rIns="91425" wrap="square" tIns="91425">
-            <a:noAutofit/>
-          </a:bodyPr>
-          <a:lstStyle/>
-          <a:p>
-            <a:pPr indent="0" lvl="0" marL="0" rtl="0" algn="l">
-              <a:spcBef>
-                <a:spcPts val="0"/>
-              </a:spcBef>
-              <a:spcAft>
-                <a:spcPts val="0"/>
-              </a:spcAft>
-              <a:buNone/>
-            </a:pPr>
-            <a:r>
-              <a:t/>
-            </a:r>
-            <a:endParaRPr/>
-          </a:p>
-        </p:txBody>
-      </p:sp>
-      <p:sp>
-        <p:nvSpPr>
-          <p:cNvPr id="2390" name="Google Shape;2390;p88"/>
-          <p:cNvSpPr/>
-          <p:nvPr/>
-        </p:nvSpPr>
-        <p:spPr>
-          <a:xfrm>
-            <a:off x="4881537" y="1286042"/>
-            <a:ext cx="1690679" cy="1128566"/>
-          </a:xfrm>
-          <a:prstGeom prst="rect">
-            <a:avLst/>
-          </a:prstGeom>
-          <a:noFill/>
-          <a:ln>
-            <a:noFill/>
-          </a:ln>
-        </p:spPr>
-        <p:txBody>
-          <a:bodyPr anchorCtr="0" anchor="ctr" bIns="91425" lIns="91425" spcFirstLastPara="1" rIns="91425" wrap="square" tIns="91425">
-            <a:noAutofit/>
-          </a:bodyPr>
-          <a:lstStyle/>
-          <a:p>
-            <a:pPr indent="0" lvl="0" marL="0" rtl="0" algn="l">
-              <a:spcBef>
-                <a:spcPts val="0"/>
-              </a:spcBef>
-              <a:spcAft>
-                <a:spcPts val="0"/>
-              </a:spcAft>
-              <a:buNone/>
-            </a:pPr>
-            <a:r>
-              <a:t/>
-            </a:r>
-            <a:endParaRPr/>
-          </a:p>
-        </p:txBody>
-      </p:sp>
-      <p:sp>
-        <p:nvSpPr>
-          <p:cNvPr id="2392" name="Google Shape;2392;p88"/>
-          <p:cNvSpPr/>
-          <p:nvPr/>
-        </p:nvSpPr>
-        <p:spPr>
-          <a:xfrm>
-            <a:off x="7162763" y="1286042"/>
-            <a:ext cx="1690679" cy="1128566"/>
-          </a:xfrm>
-          <a:prstGeom prst="rect">
-            <a:avLst/>
-          </a:prstGeom>
-          <a:noFill/>
-          <a:ln>
-            <a:noFill/>
-          </a:ln>
-        </p:spPr>
-        <p:txBody>
-          <a:bodyPr anchorCtr="0" anchor="ctr" bIns="91425" lIns="91425" spcFirstLastPara="1" rIns="91425" wrap="square" tIns="91425">
-            <a:noAutofit/>
-          </a:bodyPr>
-          <a:lstStyle/>
-          <a:p>
-            <a:pPr indent="0" lvl="0" marL="0" rtl="0" algn="l">
-              <a:spcBef>
-                <a:spcPts val="0"/>
-              </a:spcBef>
-              <a:spcAft>
-                <a:spcPts val="0"/>
-              </a:spcAft>
-              <a:buNone/>
-            </a:pPr>
-            <a:r>
-              <a:t/>
-            </a:r>
-            <a:endParaRPr/>
-          </a:p>
-        </p:txBody>
-      </p:sp>
-      <p:pic>
-        <p:nvPicPr>
-          <p:cNvPr descr=" " id="2394" name="Google Shape;2394;p88"/>
-          <p:cNvPicPr preferRelativeResize="0"/>
-          <p:nvPr/>
-        </p:nvPicPr>
-        <p:blipFill rotWithShape="1">
-          <a:blip r:embed="rId3">
-            <a:alphaModFix/>
-          </a:blip>
-          <a:srcRect b="0" l="0" r="0" t="0"/>
-          <a:stretch/>
-        </p:blipFill>
-        <p:spPr>
-          <a:xfrm>
-            <a:off x="1" y="3684300"/>
-            <a:ext cx="7238962" cy="70126"/>
-          </a:xfrm>
-          <a:prstGeom prst="rect">
-            <a:avLst/>
-          </a:prstGeom>
-          <a:noFill/>
-          <a:ln>
-            <a:noFill/>
-          </a:ln>
-        </p:spPr>
-      </p:pic>
-      <p:sp>
-        <p:nvSpPr>
-          <p:cNvPr id="2399" name="Google Shape;2399;p88"/>
-          <p:cNvSpPr/>
-          <p:nvPr/>
-        </p:nvSpPr>
-        <p:spPr>
-          <a:xfrm>
-            <a:off x="4881537" y="3000319"/>
-            <a:ext cx="1690679" cy="1128566"/>
-          </a:xfrm>
-          <a:prstGeom prst="rect">
-            <a:avLst/>
-          </a:prstGeom>
-          <a:noFill/>
-          <a:ln>
-            <a:noFill/>
-          </a:ln>
-        </p:spPr>
-        <p:txBody>
-          <a:bodyPr anchorCtr="0" anchor="ctr" bIns="91425" lIns="91425" spcFirstLastPara="1" rIns="91425" wrap="square" tIns="91425">
-            <a:noAutofit/>
-          </a:bodyPr>
-          <a:lstStyle/>
-          <a:p>
-            <a:pPr indent="0" lvl="0" marL="0" rtl="0" algn="l">
-              <a:spcBef>
-                <a:spcPts val="0"/>
-              </a:spcBef>
-              <a:spcAft>
-                <a:spcPts val="0"/>
-              </a:spcAft>
-              <a:buNone/>
-            </a:pPr>
-            <a:r>
-              <a:t/>
-            </a:r>
-            <a:endParaRPr/>
-          </a:p>
-        </p:txBody>
-      </p:sp>
-      <p:sp>
-        <p:nvSpPr>
-          <p:cNvPr id="2400" name="title"/>
+      <p:sp>
+        <p:nvSpPr>
+          <p:cNvPr id="2" name="title"/>
           <p:cNvSpPr txBox="1"/>
           <p:nvPr/>
         </p:nvSpPr>
@@ -6474,21 +5636,21 @@
                 <a:ea typeface="Play"/>
                 <a:cs typeface="Play"/>
               </a:rPr>
-              <a:t>Текущие трудности в создании презентаций</a:t>
+              <a:t>Текущие трудности в сборке презентаций</a:t>
             </a:r>
           </a:p>
         </p:txBody>
       </p:sp>
       <p:sp>
         <p:nvSpPr>
-          <p:cNvPr id="2401" name="body_left"/>
+          <p:cNvPr id="3" name="body_left"/>
           <p:cNvSpPr txBox="1"/>
           <p:nvPr/>
         </p:nvSpPr>
         <p:spPr>
           <a:xfrm>
-            <a:off x="274320" y="2086975"/>
-            <a:ext cx="4035247" cy="1488440"/>
+            <a:off x="274320" y="1383652"/>
+            <a:ext cx="4035247" cy="2763396"/>
           </a:xfrm>
           <a:prstGeom prst="rect">
             <a:avLst/>
@@ -6505,7 +5667,7 @@
               <a:spcAft>
                 <a:spcPts val="300"/>
               </a:spcAft>
-              <a:defRPr sz="1400">
+              <a:defRPr sz="1800">
                 <a:solidFill>
                   <a:srgbClr val="000000"/>
                 </a:solidFill>
@@ -6515,7 +5677,7 @@
               </a:defRPr>
             </a:pPr>
             <a:r>
-              <a:rPr sz="1400">
+              <a:rPr sz="1800">
                 <a:solidFill>
                   <a:srgbClr val="000000"/>
                 </a:solidFill>
@@ -6523,7 +5685,7 @@
                 <a:ea typeface="Play"/>
                 <a:cs typeface="Play"/>
               </a:rPr>
-              <a:t>• 42 колоды за квартал, 12 слайдов каждая, 186 минут сборки</a:t>
+              <a:t>• 42 колоды, 186 мин на одну 12-слайдовую презентацию</a:t>
             </a:r>
           </a:p>
           <a:p>
@@ -6531,7 +5693,7 @@
               <a:spcAft>
                 <a:spcPts val="300"/>
               </a:spcAft>
-              <a:defRPr sz="1400">
+              <a:defRPr sz="1800">
                 <a:solidFill>
                   <a:srgbClr val="000000"/>
                 </a:solidFill>
@@ -6541,7 +5703,7 @@
               </a:defRPr>
             </a:pPr>
             <a:r>
-              <a:rPr sz="1400">
+              <a:rPr sz="1800">
                 <a:solidFill>
                   <a:srgbClr val="000000"/>
                 </a:solidFill>
@@ -6549,7 +5711,7 @@
                 <a:ea typeface="Play"/>
                 <a:cs typeface="Play"/>
               </a:rPr>
-              <a:t>• 74 минуты на правки после ревью дизайнера</a:t>
+              <a:t>• 74 мин на правки после ревью</a:t>
             </a:r>
           </a:p>
           <a:p>
@@ -6557,7 +5719,7 @@
               <a:spcAft>
                 <a:spcPts val="300"/>
               </a:spcAft>
-              <a:defRPr sz="1400">
+              <a:defRPr sz="1800">
                 <a:solidFill>
                   <a:srgbClr val="000000"/>
                 </a:solidFill>
@@ -6567,7 +5729,7 @@
               </a:defRPr>
             </a:pPr>
             <a:r>
-              <a:rPr sz="1400">
+              <a:rPr sz="1800">
                 <a:solidFill>
                   <a:srgbClr val="000000"/>
                 </a:solidFill>
@@ -6575,21 +5737,21 @@
                 <a:ea typeface="Play"/>
                 <a:cs typeface="Play"/>
               </a:rPr>
-              <a:t>• 19 из 42 колод нарушили фирменный стиль</a:t>
+              <a:t>• 19 колод нарушили фирменный стиль</a:t>
             </a:r>
           </a:p>
         </p:txBody>
       </p:sp>
       <p:sp>
         <p:nvSpPr>
-          <p:cNvPr id="2402" name="body_right"/>
+          <p:cNvPr id="4" name="body_right"/>
           <p:cNvSpPr txBox="1"/>
           <p:nvPr/>
         </p:nvSpPr>
         <p:spPr>
           <a:xfrm>
-            <a:off x="4583887" y="2086975"/>
-            <a:ext cx="4035247" cy="795020"/>
+            <a:off x="4583887" y="1383652"/>
+            <a:ext cx="4035247" cy="2763396"/>
           </a:xfrm>
           <a:prstGeom prst="rect">
             <a:avLst/>
@@ -6606,7 +5768,7 @@
               <a:spcAft>
                 <a:spcPts val="300"/>
               </a:spcAft>
-              <a:defRPr sz="1400">
+              <a:defRPr sz="1800">
                 <a:solidFill>
                   <a:srgbClr val="000000"/>
                 </a:solidFill>
@@ -6616,7 +5778,7 @@
               </a:defRPr>
             </a:pPr>
             <a:r>
-              <a:rPr sz="1400">
+              <a:rPr sz="1800">
                 <a:solidFill>
                   <a:srgbClr val="000000"/>
                 </a:solidFill>
@@ -6624,7 +5786,7 @@
                 <a:ea typeface="Play"/>
                 <a:cs typeface="Play"/>
               </a:rPr>
-              <a:t>• Дизайнеры 4 человека закрывают 11 запросов/неделю из 27</a:t>
+              <a:t>• Дизайн-отдел закрывает 11 запросов/неделю из 27</a:t>
             </a:r>
           </a:p>
           <a:p>
@@ -6632,7 +5794,7 @@
               <a:spcAft>
                 <a:spcPts val="300"/>
               </a:spcAft>
-              <a:defRPr sz="1400">
+              <a:defRPr sz="1800">
                 <a:solidFill>
                   <a:srgbClr val="000000"/>
                 </a:solidFill>
@@ -6642,7 +5804,7 @@
               </a:defRPr>
             </a:pPr>
             <a:r>
-              <a:rPr sz="1400">
+              <a:rPr sz="1800">
                 <a:solidFill>
                   <a:srgbClr val="000000"/>
                 </a:solidFill>
@@ -7200,7 +6362,7 @@
                 <a:ea typeface="Play"/>
                 <a:cs typeface="Play"/>
               </a:rPr>
-              <a:t>Возможность ускорить и стандартизировать процесс</a:t>
+              <a:t>Предлагаемый сервис автоматической вёрстки</a:t>
             </a:r>
           </a:p>
         </p:txBody>
@@ -7213,8 +6375,8 @@
         </p:nvSpPr>
         <p:spPr>
           <a:xfrm>
-            <a:off x="274320" y="2044378"/>
-            <a:ext cx="4035247" cy="1158240"/>
+            <a:off x="274320" y="2088404"/>
+            <a:ext cx="4035247" cy="1026160"/>
           </a:xfrm>
           <a:prstGeom prst="rect">
             <a:avLst/>
@@ -7231,7 +6393,7 @@
               <a:spcAft>
                 <a:spcPts val="300"/>
               </a:spcAft>
-              <a:defRPr sz="1600">
+              <a:defRPr sz="1400">
                 <a:solidFill>
                   <a:srgbClr val="000000"/>
                 </a:solidFill>
@@ -7241,7 +6403,7 @@
               </a:defRPr>
             </a:pPr>
             <a:r>
-              <a:rPr sz="1600">
+              <a:rPr sz="1400">
                 <a:solidFill>
                   <a:srgbClr val="000000"/>
                 </a:solidFill>
@@ -7249,7 +6411,7 @@
                 <a:ea typeface="Play"/>
                 <a:cs typeface="Play"/>
               </a:rPr>
-              <a:t>• Сократить время сборки до 4 минут</a:t>
+              <a:t>• Принимает шаблон pptx и материалы, автоматически строит дизайн-систему</a:t>
             </a:r>
           </a:p>
           <a:p>
@@ -7257,7 +6419,7 @@
               <a:spcAft>
                 <a:spcPts val="300"/>
               </a:spcAft>
-              <a:defRPr sz="1600">
+              <a:defRPr sz="1400">
                 <a:solidFill>
                   <a:srgbClr val="000000"/>
                 </a:solidFill>
@@ -7267,7 +6429,7 @@
               </a:defRPr>
             </a:pPr>
             <a:r>
-              <a:rPr sz="1600">
+              <a:rPr sz="1400">
                 <a:solidFill>
                   <a:srgbClr val="000000"/>
                 </a:solidFill>
@@ -7275,7 +6437,7 @@
                 <a:ea typeface="Play"/>
                 <a:cs typeface="Play"/>
               </a:rPr>
-              <a:t>• Снизить время до первой версии с 6 дней до 1 дня</a:t>
+              <a:t>• Генерирует план колоды и вёрстку по ролям страниц</a:t>
             </a:r>
           </a:p>
         </p:txBody>
@@ -7288,8 +6450,8 @@
         </p:nvSpPr>
         <p:spPr>
           <a:xfrm>
-            <a:off x="4583887" y="2044378"/>
-            <a:ext cx="4035247" cy="1158240"/>
+            <a:off x="4583887" y="2088404"/>
+            <a:ext cx="4035247" cy="1026160"/>
           </a:xfrm>
           <a:prstGeom prst="rect">
             <a:avLst/>
@@ -7306,7 +6468,7 @@
               <a:spcAft>
                 <a:spcPts val="300"/>
               </a:spcAft>
-              <a:defRPr sz="1600">
+              <a:defRPr sz="1400">
                 <a:solidFill>
                   <a:srgbClr val="000000"/>
                 </a:solidFill>
@@ -7316,7 +6478,7 @@
               </a:defRPr>
             </a:pPr>
             <a:r>
-              <a:rPr sz="1600">
+              <a:rPr sz="1400">
                 <a:solidFill>
                   <a:srgbClr val="000000"/>
                 </a:solidFill>
@@ -7324,7 +6486,7 @@
                 <a:ea typeface="Play"/>
                 <a:cs typeface="Play"/>
               </a:rPr>
-              <a:t>• Снизить нарушения фирменного стиля до 3 %</a:t>
+              <a:t>• Аудит качества проверяет стиль и данные до выдачи</a:t>
             </a:r>
           </a:p>
           <a:p>
@@ -7332,7 +6494,7 @@
               <a:spcAft>
                 <a:spcPts val="300"/>
               </a:spcAft>
-              <a:defRPr sz="1600">
+              <a:defRPr sz="1400">
                 <a:solidFill>
                   <a:srgbClr val="000000"/>
                 </a:solidFill>
@@ -7342,7 +6504,7 @@
               </a:defRPr>
             </a:pPr>
             <a:r>
-              <a:rPr sz="1600">
+              <a:rPr sz="1400">
                 <a:solidFill>
                   <a:srgbClr val="000000"/>
                 </a:solidFill>
@@ -7350,7 +6512,7 @@
                 <a:ea typeface="Play"/>
                 <a:cs typeface="Play"/>
               </a:rPr>
-              <a:t>• Освободить дизайнеров от рутинных задач</a:t>
+              <a:t>• Экспорт в pptx, pdf, html, слайды остаются редактируемыми</a:t>
             </a:r>
           </a:p>
         </p:txBody>
@@ -7539,88 +6701,6 @@
       </p:sp>
       <p:sp>
         <p:nvSpPr>
-          <p:cNvPr id="545" name="Google Shape;545;p53"/>
-          <p:cNvSpPr/>
-          <p:nvPr/>
-        </p:nvSpPr>
-        <p:spPr>
-          <a:xfrm>
-            <a:off x="5595727" y="1022533"/>
-            <a:ext cx="1395256" cy="1433588"/>
-          </a:xfrm>
-          <a:prstGeom prst="rect">
-            <a:avLst/>
-          </a:prstGeom>
-          <a:noFill/>
-          <a:ln>
-            <a:noFill/>
-          </a:ln>
-        </p:spPr>
-        <p:txBody>
-          <a:bodyPr anchorCtr="0" anchor="ctr" bIns="91425" lIns="91425" spcFirstLastPara="1" rIns="91425" wrap="square" tIns="91425">
-            <a:noAutofit/>
-          </a:bodyPr>
-          <a:lstStyle/>
-          <a:p>
-            <a:pPr indent="0" lvl="0" marL="0" rtl="0" algn="l">
-              <a:spcBef>
-                <a:spcPts val="0"/>
-              </a:spcBef>
-              <a:spcAft>
-                <a:spcPts val="0"/>
-              </a:spcAft>
-              <a:buNone/>
-            </a:pPr>
-            <a:r>
-              <a:t/>
-            </a:r>
-            <a:endParaRPr/>
-          </a:p>
-        </p:txBody>
-      </p:sp>
-      <p:sp>
-        <p:nvSpPr>
-          <p:cNvPr id="549" name="Google Shape;549;p53"/>
-          <p:cNvSpPr/>
-          <p:nvPr/>
-        </p:nvSpPr>
-        <p:spPr>
-          <a:xfrm>
-            <a:off x="7359897" y="1022533"/>
-            <a:ext cx="1395256" cy="1433588"/>
-          </a:xfrm>
-          <a:prstGeom prst="rect">
-            <a:avLst/>
-          </a:prstGeom>
-          <a:noFill/>
-          <a:ln>
-            <a:noFill/>
-          </a:ln>
-        </p:spPr>
-        <p:txBody>
-          <a:bodyPr anchorCtr="0" anchor="ctr" bIns="91425" lIns="91425" spcFirstLastPara="1" rIns="91425" wrap="square" tIns="91425">
-            <a:noAutofit/>
-          </a:bodyPr>
-          <a:lstStyle/>
-          <a:p>
-            <a:pPr indent="0" lvl="0" marL="0" rtl="0" algn="l">
-              <a:spcBef>
-                <a:spcPts val="0"/>
-              </a:spcBef>
-              <a:spcAft>
-                <a:spcPts val="0"/>
-              </a:spcAft>
-              <a:buNone/>
-            </a:pPr>
-            <a:r>
-              <a:t/>
-            </a:r>
-            <a:endParaRPr/>
-          </a:p>
-        </p:txBody>
-      </p:sp>
-      <p:sp>
-        <p:nvSpPr>
           <p:cNvPr id="553" name="Google Shape;553;p53"/>
           <p:cNvSpPr/>
           <p:nvPr/>
@@ -7785,130 +6865,7 @@
       </p:sp>
       <p:sp>
         <p:nvSpPr>
-          <p:cNvPr id="563" name="Google Shape;563;p53"/>
-          <p:cNvSpPr/>
-          <p:nvPr/>
-        </p:nvSpPr>
-        <p:spPr>
-          <a:xfrm>
-            <a:off x="3831556" y="2797849"/>
-            <a:ext cx="1395256" cy="1433588"/>
-          </a:xfrm>
-          <a:prstGeom prst="rect">
-            <a:avLst/>
-          </a:prstGeom>
-          <a:noFill/>
-          <a:ln>
-            <a:noFill/>
-          </a:ln>
-        </p:spPr>
-        <p:txBody>
-          <a:bodyPr anchorCtr="0" anchor="ctr" bIns="91425" lIns="91425" spcFirstLastPara="1" rIns="91425" wrap="square" tIns="91425">
-            <a:noAutofit/>
-          </a:bodyPr>
-          <a:lstStyle/>
-          <a:p>
-            <a:pPr indent="0" lvl="0" marL="0" rtl="0" algn="l">
-              <a:spcBef>
-                <a:spcPts val="0"/>
-              </a:spcBef>
-              <a:spcAft>
-                <a:spcPts val="0"/>
-              </a:spcAft>
-              <a:buNone/>
-            </a:pPr>
-            <a:r>
-              <a:t/>
-            </a:r>
-            <a:endParaRPr/>
-          </a:p>
-        </p:txBody>
-      </p:sp>
-      <p:sp>
-        <p:nvSpPr>
-          <p:cNvPr id="567" name="Google Shape;567;p53"/>
-          <p:cNvSpPr/>
-          <p:nvPr/>
-        </p:nvSpPr>
-        <p:spPr>
-          <a:xfrm>
-            <a:off x="5595727" y="2797849"/>
-            <a:ext cx="1395256" cy="1433588"/>
-          </a:xfrm>
-          <a:prstGeom prst="rect">
-            <a:avLst/>
-          </a:prstGeom>
-          <a:noFill/>
-          <a:ln>
-            <a:noFill/>
-          </a:ln>
-        </p:spPr>
-        <p:txBody>
-          <a:bodyPr anchorCtr="0" anchor="ctr" bIns="91425" lIns="91425" spcFirstLastPara="1" rIns="91425" wrap="square" tIns="91425">
-            <a:noAutofit/>
-          </a:bodyPr>
-          <a:lstStyle/>
-          <a:p>
-            <a:pPr indent="0" lvl="0" marL="0" rtl="0" algn="l">
-              <a:spcBef>
-                <a:spcPts val="0"/>
-              </a:spcBef>
-              <a:spcAft>
-                <a:spcPts val="0"/>
-              </a:spcAft>
-              <a:buNone/>
-            </a:pPr>
-            <a:r>
-              <a:t/>
-            </a:r>
-            <a:endParaRPr/>
-          </a:p>
-        </p:txBody>
-      </p:sp>
-      <p:sp>
-        <p:nvSpPr>
-          <p:cNvPr id="571" name="Google Shape;571;p53"/>
-          <p:cNvSpPr/>
-          <p:nvPr/>
-        </p:nvSpPr>
-        <p:spPr>
-          <a:xfrm>
-            <a:off x="7359897" y="2797849"/>
-            <a:ext cx="1395256" cy="1433588"/>
-          </a:xfrm>
-          <a:prstGeom prst="rect">
-            <a:avLst/>
-          </a:prstGeom>
-          <a:noFill/>
-          <a:ln>
-            <a:noFill/>
-          </a:ln>
-        </p:spPr>
-        <p:txBody>
-          <a:bodyPr anchorCtr="0" anchor="ctr" bIns="91425" lIns="91425" spcFirstLastPara="1" rIns="91425" wrap="square" tIns="91425">
-            <a:noAutofit/>
-          </a:bodyPr>
-          <a:lstStyle/>
-          <a:p>
-            <a:pPr indent="0" lvl="0" marL="0" rtl="0" algn="l">
-              <a:spcBef>
-                <a:spcPts val="0"/>
-              </a:spcBef>
-              <a:spcAft>
-                <a:spcPts val="0"/>
-              </a:spcAft>
-              <a:buNone/>
-            </a:pPr>
-            <a:r>
-              <a:t/>
-            </a:r>
-            <a:endParaRPr/>
-          </a:p>
-        </p:txBody>
-      </p:sp>
-      <p:sp>
-        <p:nvSpPr>
-          <p:cNvPr id="572" name="title"/>
+          <p:cNvPr id="560" name="title"/>
           <p:cNvSpPr txBox="1"/>
           <p:nvPr/>
         </p:nvSpPr>
@@ -7950,161 +6907,29 @@
                 <a:ea typeface="Play"/>
                 <a:cs typeface="Play"/>
               </a:rPr>
-              <a:t>Как работает сервис</a:t>
+              <a:t>Результаты пилота за 6 недель</a:t>
             </a:r>
           </a:p>
         </p:txBody>
       </p:sp>
-      <p:sp>
-        <p:nvSpPr>
-          <p:cNvPr id="573" name="body_left"/>
-          <p:cNvSpPr txBox="1"/>
+      <p:graphicFrame>
+        <p:nvGraphicFramePr>
+          <p:cNvPr id="561" name="Chart 560"/>
+          <p:cNvGraphicFramePr>
+            <a:graphicFrameLocks noGrp="1"/>
+          </p:cNvGraphicFramePr>
           <p:nvPr/>
-        </p:nvSpPr>
-        <p:spPr>
-          <a:xfrm>
-            <a:off x="274320" y="1935028"/>
-            <a:ext cx="4035247" cy="1290320"/>
-          </a:xfrm>
-          <a:prstGeom prst="rect">
-            <a:avLst/>
-          </a:prstGeom>
-          <a:noFill/>
-        </p:spPr>
-        <p:txBody>
-          <a:bodyPr wrap="square" lIns="76200" rIns="76200" tIns="50800" bIns="50800">
-            <a:spAutoFit/>
-          </a:bodyPr>
-          <a:lstStyle/>
-          <a:p>
-            <a:pPr algn="l">
-              <a:spcAft>
-                <a:spcPts val="300"/>
-              </a:spcAft>
-              <a:defRPr sz="1800">
-                <a:solidFill>
-                  <a:srgbClr val="000000"/>
-                </a:solidFill>
-                <a:latin typeface="Play"/>
-                <a:ea typeface="Play"/>
-                <a:cs typeface="Play"/>
-              </a:defRPr>
-            </a:pPr>
-            <a:r>
-              <a:rPr sz="1800">
-                <a:solidFill>
-                  <a:srgbClr val="000000"/>
-                </a:solidFill>
-                <a:latin typeface="Play"/>
-                <a:ea typeface="Play"/>
-                <a:cs typeface="Play"/>
-              </a:rPr>
-              <a:t>• Принимает шаблон pptx и материалы</a:t>
-            </a:r>
-          </a:p>
-          <a:p>
-            <a:pPr algn="l">
-              <a:spcAft>
-                <a:spcPts val="300"/>
-              </a:spcAft>
-              <a:defRPr sz="1800">
-                <a:solidFill>
-                  <a:srgbClr val="000000"/>
-                </a:solidFill>
-                <a:latin typeface="Play"/>
-                <a:ea typeface="Play"/>
-                <a:cs typeface="Play"/>
-              </a:defRPr>
-            </a:pPr>
-            <a:r>
-              <a:rPr sz="1800">
-                <a:solidFill>
-                  <a:srgbClr val="000000"/>
-                </a:solidFill>
-                <a:latin typeface="Play"/>
-                <a:ea typeface="Play"/>
-                <a:cs typeface="Play"/>
-              </a:rPr>
-              <a:t>• Автоматически формирует план колоды по дизайн-системе</a:t>
-            </a:r>
-          </a:p>
-        </p:txBody>
-      </p:sp>
-      <p:sp>
-        <p:nvSpPr>
-          <p:cNvPr id="574" name="body_right"/>
-          <p:cNvSpPr txBox="1"/>
-          <p:nvPr/>
-        </p:nvSpPr>
-        <p:spPr>
-          <a:xfrm>
-            <a:off x="4583887" y="1935028"/>
-            <a:ext cx="4035247" cy="1290320"/>
-          </a:xfrm>
-          <a:prstGeom prst="rect">
-            <a:avLst/>
-          </a:prstGeom>
-          <a:noFill/>
-        </p:spPr>
-        <p:txBody>
-          <a:bodyPr wrap="square" lIns="76200" rIns="76200" tIns="50800" bIns="50800">
-            <a:spAutoFit/>
-          </a:bodyPr>
-          <a:lstStyle/>
-          <a:p>
-            <a:pPr algn="l">
-              <a:spcAft>
-                <a:spcPts val="300"/>
-              </a:spcAft>
-              <a:defRPr sz="1800">
-                <a:solidFill>
-                  <a:srgbClr val="000000"/>
-                </a:solidFill>
-                <a:latin typeface="Play"/>
-                <a:ea typeface="Play"/>
-                <a:cs typeface="Play"/>
-              </a:defRPr>
-            </a:pPr>
-            <a:r>
-              <a:rPr sz="1800">
-                <a:solidFill>
-                  <a:srgbClr val="000000"/>
-                </a:solidFill>
-                <a:latin typeface="Play"/>
-                <a:ea typeface="Play"/>
-                <a:cs typeface="Play"/>
-              </a:rPr>
-              <a:t>• Вёрстка и аудит качества до выдачи</a:t>
-            </a:r>
-          </a:p>
-          <a:p>
-            <a:pPr algn="l">
-              <a:spcAft>
-                <a:spcPts val="300"/>
-              </a:spcAft>
-              <a:defRPr sz="1800">
-                <a:solidFill>
-                  <a:srgbClr val="000000"/>
-                </a:solidFill>
-                <a:latin typeface="Play"/>
-                <a:ea typeface="Play"/>
-                <a:cs typeface="Play"/>
-              </a:defRPr>
-            </a:pPr>
-            <a:r>
-              <a:rPr sz="1800">
-                <a:solidFill>
-                  <a:srgbClr val="000000"/>
-                </a:solidFill>
-                <a:latin typeface="Play"/>
-                <a:ea typeface="Play"/>
-                <a:cs typeface="Play"/>
-              </a:rPr>
-              <a:t>• Экспорт в pptx, pdf, html, слайды редактируемы</a:t>
-            </a:r>
-          </a:p>
-        </p:txBody>
-      </p:sp>
+        </p:nvGraphicFramePr>
+        <p:xfrm>
+          <a:off x="4583887" y="1414513"/>
+          <a:ext cx="4035247" cy="2851865"/>
+        </p:xfrm>
+        <a:graphic>
+          <a:graphicData uri="http://schemas.openxmlformats.org/drawingml/2006/chart">
+            <c:chart xmlns:c="http://schemas.openxmlformats.org/drawingml/2006/chart" r:id="rId2"/>
+          </a:graphicData>
+        </a:graphic>
+      </p:graphicFrame>
     </p:spTree>
   </p:cSld>
   <p:clrMapOvr>
@@ -8123,43 +6948,16 @@
         <p:nvPr/>
       </p:nvGrpSpPr>
       <p:grpSpPr/>
-      <p:pic>
-        <p:nvPicPr>
-          <p:cNvPr descr=" " id="2249" name="Google Shape;2249;p83"/>
-          <p:cNvPicPr preferRelativeResize="0"/>
-          <p:nvPr/>
-        </p:nvPicPr>
-        <p:blipFill rotWithShape="1">
-          <a:blip r:embed="rId2">
-            <a:alphaModFix/>
-          </a:blip>
-          <a:srcRect b="0" l="0" r="0" t="0"/>
-          <a:stretch/>
-        </p:blipFill>
-        <p:spPr>
-          <a:xfrm>
-            <a:off x="285748" y="3576507"/>
-            <a:ext cx="2381238" cy="28571"/>
-          </a:xfrm>
-          <a:prstGeom prst="rect">
-            <a:avLst/>
-          </a:prstGeom>
-          <a:noFill/>
-          <a:ln>
-            <a:noFill/>
-          </a:ln>
-        </p:spPr>
-      </p:pic>
-      <p:sp>
-        <p:nvSpPr>
-          <p:cNvPr id="2250" name="title"/>
+      <p:sp>
+        <p:nvSpPr>
+          <p:cNvPr id="2" name="title"/>
           <p:cNvSpPr txBox="1"/>
           <p:nvPr/>
         </p:nvSpPr>
         <p:spPr>
           <a:xfrm>
             <a:off x="274320" y="282943"/>
-            <a:ext cx="6792986" cy="932027"/>
+            <a:ext cx="6792986" cy="617220"/>
           </a:xfrm>
           <a:prstGeom prst="rect">
             <a:avLst/>
@@ -8194,29 +6992,187 @@
                 <a:ea typeface="Play"/>
                 <a:cs typeface="Play"/>
               </a:rPr>
-              <a:t>Сокращение времени сборки: 186 → 4 минуты</a:t>
+              <a:t>Ожидаемый эффект</a:t>
             </a:r>
           </a:p>
         </p:txBody>
       </p:sp>
-      <p:graphicFrame>
-        <p:nvGraphicFramePr>
-          <p:cNvPr id="2251" name="Chart 2250"/>
-          <p:cNvGraphicFramePr>
-            <a:graphicFrameLocks noGrp="1"/>
-          </p:cNvGraphicFramePr>
+      <p:sp>
+        <p:nvSpPr>
+          <p:cNvPr id="3" name="body_left"/>
+          <p:cNvSpPr txBox="1"/>
           <p:nvPr/>
-        </p:nvGraphicFramePr>
-        <p:xfrm>
-          <a:off x="4006215" y="1664127"/>
-          <a:ext cx="3457574" cy="2160270"/>
-        </p:xfrm>
-        <a:graphic>
-          <a:graphicData uri="http://schemas.openxmlformats.org/drawingml/2006/chart">
-            <c:chart xmlns:c="http://schemas.openxmlformats.org/drawingml/2006/chart" r:id="rId4"/>
-          </a:graphicData>
-        </a:graphic>
-      </p:graphicFrame>
+        </p:nvSpPr>
+        <p:spPr>
+          <a:xfrm>
+            <a:off x="274320" y="1414513"/>
+            <a:ext cx="3457574" cy="2602405"/>
+          </a:xfrm>
+          <a:prstGeom prst="rect">
+            <a:avLst/>
+          </a:prstGeom>
+          <a:noFill/>
+        </p:spPr>
+        <p:txBody>
+          <a:bodyPr wrap="square" lIns="76200" rIns="76200" tIns="50800" bIns="50800">
+            <a:spAutoFit/>
+          </a:bodyPr>
+          <a:lstStyle/>
+          <a:p>
+            <a:pPr algn="l">
+              <a:spcAft>
+                <a:spcPts val="300"/>
+              </a:spcAft>
+              <a:defRPr sz="1800" b="1">
+                <a:solidFill>
+                  <a:srgbClr val="000000"/>
+                </a:solidFill>
+                <a:latin typeface="Play"/>
+                <a:ea typeface="Play"/>
+                <a:cs typeface="Play"/>
+              </a:defRPr>
+            </a:pPr>
+            <a:r>
+              <a:rPr sz="1800" b="1">
+                <a:solidFill>
+                  <a:srgbClr val="000000"/>
+                </a:solidFill>
+                <a:latin typeface="Play"/>
+                <a:ea typeface="Play"/>
+                <a:cs typeface="Play"/>
+              </a:rPr>
+              <a:t>• Сокращение времени сборки с 186 до 4 минут</a:t>
+            </a:r>
+          </a:p>
+          <a:p>
+            <a:pPr algn="l">
+              <a:spcAft>
+                <a:spcPts val="300"/>
+              </a:spcAft>
+              <a:defRPr sz="1800" b="1">
+                <a:solidFill>
+                  <a:srgbClr val="000000"/>
+                </a:solidFill>
+                <a:latin typeface="Play"/>
+                <a:ea typeface="Play"/>
+                <a:cs typeface="Play"/>
+              </a:defRPr>
+            </a:pPr>
+            <a:r>
+              <a:rPr sz="1800" b="1">
+                <a:solidFill>
+                  <a:srgbClr val="000000"/>
+                </a:solidFill>
+                <a:latin typeface="Play"/>
+                <a:ea typeface="Play"/>
+                <a:cs typeface="Play"/>
+              </a:rPr>
+              <a:t>• Сокращение времени до первой версии с 6 до 1 дня</a:t>
+            </a:r>
+          </a:p>
+          <a:p>
+            <a:pPr algn="l">
+              <a:spcAft>
+                <a:spcPts val="300"/>
+              </a:spcAft>
+              <a:defRPr sz="1800" b="1">
+                <a:solidFill>
+                  <a:srgbClr val="000000"/>
+                </a:solidFill>
+                <a:latin typeface="Play"/>
+                <a:ea typeface="Play"/>
+                <a:cs typeface="Play"/>
+              </a:defRPr>
+            </a:pPr>
+            <a:r>
+              <a:rPr sz="1800" b="1">
+                <a:solidFill>
+                  <a:srgbClr val="000000"/>
+                </a:solidFill>
+                <a:latin typeface="Play"/>
+                <a:ea typeface="Play"/>
+                <a:cs typeface="Play"/>
+              </a:rPr>
+              <a:t>• Снижение нарушений стиля до 2 из 68 колод</a:t>
+            </a:r>
+          </a:p>
+        </p:txBody>
+      </p:sp>
+      <p:sp>
+        <p:nvSpPr>
+          <p:cNvPr id="4" name="body_right"/>
+          <p:cNvSpPr txBox="1"/>
+          <p:nvPr/>
+        </p:nvSpPr>
+        <p:spPr>
+          <a:xfrm>
+            <a:off x="4006215" y="1414513"/>
+            <a:ext cx="3457574" cy="2602405"/>
+          </a:xfrm>
+          <a:prstGeom prst="rect">
+            <a:avLst/>
+          </a:prstGeom>
+          <a:noFill/>
+        </p:spPr>
+        <p:txBody>
+          <a:bodyPr wrap="square" lIns="76200" rIns="76200" tIns="50800" bIns="50800">
+            <a:spAutoFit/>
+          </a:bodyPr>
+          <a:lstStyle/>
+          <a:p>
+            <a:pPr algn="l">
+              <a:spcAft>
+                <a:spcPts val="300"/>
+              </a:spcAft>
+              <a:defRPr sz="1800" b="1">
+                <a:solidFill>
+                  <a:srgbClr val="000000"/>
+                </a:solidFill>
+                <a:latin typeface="Play"/>
+                <a:ea typeface="Play"/>
+                <a:cs typeface="Play"/>
+              </a:defRPr>
+            </a:pPr>
+            <a:r>
+              <a:rPr sz="1800" b="1">
+                <a:solidFill>
+                  <a:srgbClr val="000000"/>
+                </a:solidFill>
+                <a:latin typeface="Play"/>
+                <a:ea typeface="Play"/>
+                <a:cs typeface="Play"/>
+              </a:rPr>
+              <a:t>• Увеличение объёма закрытых запросов до 38/нед</a:t>
+            </a:r>
+          </a:p>
+          <a:p>
+            <a:pPr algn="l">
+              <a:spcAft>
+                <a:spcPts val="300"/>
+              </a:spcAft>
+              <a:defRPr sz="1800" b="1">
+                <a:solidFill>
+                  <a:srgbClr val="000000"/>
+                </a:solidFill>
+                <a:latin typeface="Play"/>
+                <a:ea typeface="Play"/>
+                <a:cs typeface="Play"/>
+              </a:defRPr>
+            </a:pPr>
+            <a:r>
+              <a:rPr sz="1800" b="1">
+                <a:solidFill>
+                  <a:srgbClr val="000000"/>
+                </a:solidFill>
+                <a:latin typeface="Play"/>
+                <a:ea typeface="Play"/>
+                <a:cs typeface="Play"/>
+              </a:rPr>
+              <a:t>• Стоимость инференса за пилот – 1400 руб</a:t>
+            </a:r>
+          </a:p>
+        </p:txBody>
+      </p:sp>
     </p:spTree>
   </p:cSld>
   <p:clrMapOvr>
@@ -8237,55 +7193,14 @@
       <p:grpSpPr/>
       <p:sp>
         <p:nvSpPr>
-          <p:cNvPr id="2429" name="Google Shape;2429;p89"/>
-          <p:cNvSpPr/>
-          <p:nvPr/>
-        </p:nvSpPr>
-        <p:spPr>
-          <a:xfrm>
-            <a:off x="553415" y="1828897"/>
-            <a:ext cx="2232516" cy="1490254"/>
-          </a:xfrm>
-          <a:prstGeom prst="rect">
-            <a:avLst/>
-          </a:prstGeom>
-          <a:noFill/>
-          <a:ln>
-            <a:noFill/>
-          </a:ln>
-        </p:spPr>
-        <p:txBody>
-          <a:bodyPr anchorCtr="0" anchor="ctr" bIns="91425" lIns="91425" spcFirstLastPara="1" rIns="91425" wrap="square" tIns="91425">
-            <a:noAutofit/>
-          </a:bodyPr>
-          <a:lstStyle/>
-          <a:p>
-            <a:pPr indent="0" lvl="0" marL="0" rtl="0" algn="l">
-              <a:spcBef>
-                <a:spcPts val="0"/>
-              </a:spcBef>
-              <a:spcAft>
-                <a:spcPts val="0"/>
-              </a:spcAft>
-              <a:buNone/>
-            </a:pPr>
-            <a:r>
-              <a:t/>
-            </a:r>
-            <a:endParaRPr/>
-          </a:p>
-        </p:txBody>
-      </p:sp>
-      <p:sp>
-        <p:nvSpPr>
-          <p:cNvPr id="2430" name="title"/>
+          <p:cNvPr id="2" name="title"/>
           <p:cNvSpPr txBox="1"/>
           <p:nvPr/>
         </p:nvSpPr>
         <p:spPr>
           <a:xfrm>
             <a:off x="274320" y="282943"/>
-            <a:ext cx="6792986" cy="932027"/>
+            <a:ext cx="6792986" cy="617220"/>
           </a:xfrm>
           <a:prstGeom prst="rect">
             <a:avLst/>
@@ -8320,29 +7235,187 @@
                 <a:ea typeface="Play"/>
                 <a:cs typeface="Play"/>
               </a:rPr>
-              <a:t>Снижение нарушений фирменного стиля: 19/42 → 2/68</a:t>
+              <a:t>Ресурсы и сроки</a:t>
             </a:r>
           </a:p>
         </p:txBody>
       </p:sp>
-      <p:graphicFrame>
-        <p:nvGraphicFramePr>
-          <p:cNvPr id="2431" name="Chart 2430"/>
-          <p:cNvGraphicFramePr>
-            <a:graphicFrameLocks noGrp="1"/>
-          </p:cNvGraphicFramePr>
+      <p:sp>
+        <p:nvSpPr>
+          <p:cNvPr id="3" name="body_left"/>
+          <p:cNvSpPr txBox="1"/>
           <p:nvPr/>
-        </p:nvGraphicFramePr>
-        <p:xfrm>
-          <a:off x="4583887" y="1729321"/>
-          <a:ext cx="4035247" cy="2160270"/>
-        </p:xfrm>
-        <a:graphic>
-          <a:graphicData uri="http://schemas.openxmlformats.org/drawingml/2006/chart">
-            <c:chart xmlns:c="http://schemas.openxmlformats.org/drawingml/2006/chart" r:id="rId3"/>
-          </a:graphicData>
-        </a:graphic>
-      </p:graphicFrame>
+        </p:nvSpPr>
+        <p:spPr>
+          <a:xfrm>
+            <a:off x="274320" y="1414513"/>
+            <a:ext cx="4035247" cy="1790812"/>
+          </a:xfrm>
+          <a:prstGeom prst="rect">
+            <a:avLst/>
+          </a:prstGeom>
+          <a:noFill/>
+        </p:spPr>
+        <p:txBody>
+          <a:bodyPr wrap="square" lIns="76200" rIns="76200" tIns="50800" bIns="50800">
+            <a:spAutoFit/>
+          </a:bodyPr>
+          <a:lstStyle/>
+          <a:p>
+            <a:pPr algn="l">
+              <a:spcAft>
+                <a:spcPts val="300"/>
+              </a:spcAft>
+              <a:defRPr sz="1600">
+                <a:solidFill>
+                  <a:srgbClr val="000000"/>
+                </a:solidFill>
+                <a:latin typeface="Play"/>
+                <a:ea typeface="Play"/>
+                <a:cs typeface="Play"/>
+              </a:defRPr>
+            </a:pPr>
+            <a:r>
+              <a:rPr sz="1600">
+                <a:solidFill>
+                  <a:srgbClr val="000000"/>
+                </a:solidFill>
+                <a:latin typeface="Play"/>
+                <a:ea typeface="Play"/>
+                <a:cs typeface="Play"/>
+              </a:rPr>
+              <a:t>• Сервис работает на 2 vCPU / 2 ГБ RAM</a:t>
+            </a:r>
+          </a:p>
+          <a:p>
+            <a:pPr algn="l">
+              <a:spcAft>
+                <a:spcPts val="300"/>
+              </a:spcAft>
+              <a:defRPr sz="1600">
+                <a:solidFill>
+                  <a:srgbClr val="000000"/>
+                </a:solidFill>
+                <a:latin typeface="Play"/>
+                <a:ea typeface="Play"/>
+                <a:cs typeface="Play"/>
+              </a:defRPr>
+            </a:pPr>
+            <a:r>
+              <a:rPr sz="1600">
+                <a:solidFill>
+                  <a:srgbClr val="000000"/>
+                </a:solidFill>
+                <a:latin typeface="Play"/>
+                <a:ea typeface="Play"/>
+                <a:cs typeface="Play"/>
+              </a:rPr>
+              <a:t>• Модель gpt-oss-20b через OpenAI-совместимый протокол</a:t>
+            </a:r>
+          </a:p>
+          <a:p>
+            <a:pPr algn="l">
+              <a:spcAft>
+                <a:spcPts val="300"/>
+              </a:spcAft>
+              <a:defRPr sz="1600">
+                <a:solidFill>
+                  <a:srgbClr val="000000"/>
+                </a:solidFill>
+                <a:latin typeface="Play"/>
+                <a:ea typeface="Play"/>
+                <a:cs typeface="Play"/>
+              </a:defRPr>
+            </a:pPr>
+            <a:r>
+              <a:rPr sz="1600">
+                <a:solidFill>
+                  <a:srgbClr val="000000"/>
+                </a:solidFill>
+                <a:latin typeface="Play"/>
+                <a:ea typeface="Play"/>
+                <a:cs typeface="Play"/>
+              </a:rPr>
+              <a:t>• План: Q3 2026 – подключение 4 команд, домен и HTTPS</a:t>
+            </a:r>
+          </a:p>
+        </p:txBody>
+      </p:sp>
+      <p:sp>
+        <p:nvSpPr>
+          <p:cNvPr id="4" name="body_right"/>
+          <p:cNvSpPr txBox="1"/>
+          <p:nvPr/>
+        </p:nvSpPr>
+        <p:spPr>
+          <a:xfrm>
+            <a:off x="4583887" y="1414513"/>
+            <a:ext cx="4035247" cy="1790812"/>
+          </a:xfrm>
+          <a:prstGeom prst="rect">
+            <a:avLst/>
+          </a:prstGeom>
+          <a:noFill/>
+        </p:spPr>
+        <p:txBody>
+          <a:bodyPr wrap="square" lIns="76200" rIns="76200" tIns="50800" bIns="50800">
+            <a:spAutoFit/>
+          </a:bodyPr>
+          <a:lstStyle/>
+          <a:p>
+            <a:pPr algn="l">
+              <a:spcAft>
+                <a:spcPts val="300"/>
+              </a:spcAft>
+              <a:defRPr sz="1800">
+                <a:solidFill>
+                  <a:srgbClr val="000000"/>
+                </a:solidFill>
+                <a:latin typeface="Play"/>
+                <a:ea typeface="Play"/>
+                <a:cs typeface="Play"/>
+              </a:defRPr>
+            </a:pPr>
+            <a:r>
+              <a:rPr sz="1800">
+                <a:solidFill>
+                  <a:srgbClr val="000000"/>
+                </a:solidFill>
+                <a:latin typeface="Play"/>
+                <a:ea typeface="Play"/>
+                <a:cs typeface="Play"/>
+              </a:rPr>
+              <a:t>• Q4 2026 – доступ для всей компании, интеграция с хранилищем</a:t>
+            </a:r>
+          </a:p>
+          <a:p>
+            <a:pPr algn="l">
+              <a:spcAft>
+                <a:spcPts val="300"/>
+              </a:spcAft>
+              <a:defRPr sz="1800">
+                <a:solidFill>
+                  <a:srgbClr val="000000"/>
+                </a:solidFill>
+                <a:latin typeface="Play"/>
+                <a:ea typeface="Play"/>
+                <a:cs typeface="Play"/>
+              </a:defRPr>
+            </a:pPr>
+            <a:r>
+              <a:rPr sz="1800">
+                <a:solidFill>
+                  <a:srgbClr val="000000"/>
+                </a:solidFill>
+                <a:latin typeface="Play"/>
+                <a:ea typeface="Play"/>
+                <a:cs typeface="Play"/>
+              </a:rPr>
+              <a:t>• Q1 2027 – генерация иллюстраций под стиль шаблона</a:t>
+            </a:r>
+          </a:p>
+        </p:txBody>
+      </p:sp>
     </p:spTree>
   </p:cSld>
   <p:clrMapOvr>
@@ -8580,14 +7653,182 @@
       </p:sp>
       <p:sp>
         <p:nvSpPr>
-          <p:cNvPr id="1034" name="Google Shape;1034;p65"/>
+          <p:cNvPr id="1034" name="title"/>
+          <p:cNvSpPr txBox="1"/>
+          <p:nvPr/>
+        </p:nvSpPr>
+        <p:spPr>
+          <a:xfrm>
+            <a:off x="274320" y="282943"/>
+            <a:ext cx="6792986" cy="617220"/>
+          </a:xfrm>
+          <a:prstGeom prst="rect">
+            <a:avLst/>
+          </a:prstGeom>
+          <a:noFill/>
+        </p:spPr>
+        <p:txBody>
+          <a:bodyPr wrap="square" lIns="76200" rIns="76200" tIns="50800" bIns="50800">
+            <a:spAutoFit/>
+          </a:bodyPr>
+          <a:lstStyle/>
+          <a:p>
+            <a:pPr algn="l">
+              <a:spcAft>
+                <a:spcPts val="300"/>
+              </a:spcAft>
+              <a:defRPr sz="2438">
+                <a:solidFill>
+                  <a:srgbClr val="000000"/>
+                </a:solidFill>
+                <a:latin typeface="Play"/>
+                <a:ea typeface="Play"/>
+                <a:cs typeface="Play"/>
+              </a:defRPr>
+            </a:pPr>
+            <a:r>
+              <a:rPr sz="2438">
+                <a:solidFill>
+                  <a:srgbClr val="000000"/>
+                </a:solidFill>
+                <a:latin typeface="Play"/>
+                <a:ea typeface="Play"/>
+                <a:cs typeface="Play"/>
+              </a:rPr>
+              <a:t>Риски</a:t>
+            </a:r>
+          </a:p>
+        </p:txBody>
+      </p:sp>
+      <p:sp>
+        <p:nvSpPr>
+          <p:cNvPr id="1035" name="body"/>
+          <p:cNvSpPr txBox="1"/>
+          <p:nvPr/>
+        </p:nvSpPr>
+        <p:spPr>
+          <a:xfrm>
+            <a:off x="274320" y="1414513"/>
+            <a:ext cx="8344814" cy="1046136"/>
+          </a:xfrm>
+          <a:prstGeom prst="rect">
+            <a:avLst/>
+          </a:prstGeom>
+          <a:noFill/>
+        </p:spPr>
+        <p:txBody>
+          <a:bodyPr wrap="square" lIns="76200" rIns="76200" tIns="50800" bIns="50800">
+            <a:spAutoFit/>
+          </a:bodyPr>
+          <a:lstStyle/>
+          <a:p>
+            <a:pPr algn="l">
+              <a:spcAft>
+                <a:spcPts val="300"/>
+              </a:spcAft>
+              <a:defRPr sz="1400">
+                <a:solidFill>
+                  <a:srgbClr val="000000"/>
+                </a:solidFill>
+                <a:latin typeface="Play"/>
+                <a:ea typeface="Play"/>
+                <a:cs typeface="Play"/>
+              </a:defRPr>
+            </a:pPr>
+            <a:r>
+              <a:rPr sz="1400">
+                <a:solidFill>
+                  <a:srgbClr val="000000"/>
+                </a:solidFill>
+                <a:latin typeface="Play"/>
+                <a:ea typeface="Play"/>
+                <a:cs typeface="Play"/>
+              </a:rPr>
+              <a:t>• Слабая модель может выдумать неверные цифры – аудит проверяет</a:t>
+            </a:r>
+          </a:p>
+          <a:p>
+            <a:pPr algn="l">
+              <a:spcAft>
+                <a:spcPts val="300"/>
+              </a:spcAft>
+              <a:defRPr sz="1400">
+                <a:solidFill>
+                  <a:srgbClr val="000000"/>
+                </a:solidFill>
+                <a:latin typeface="Play"/>
+                <a:ea typeface="Play"/>
+                <a:cs typeface="Play"/>
+              </a:defRPr>
+            </a:pPr>
+            <a:r>
+              <a:rPr sz="1400">
+                <a:solidFill>
+                  <a:srgbClr val="000000"/>
+                </a:solidFill>
+                <a:latin typeface="Play"/>
+                <a:ea typeface="Play"/>
+                <a:cs typeface="Play"/>
+              </a:rPr>
+              <a:t>• Плохой шаблон приводит к использованию рабочей области вместо готовых страниц</a:t>
+            </a:r>
+          </a:p>
+          <a:p>
+            <a:pPr algn="l">
+              <a:spcAft>
+                <a:spcPts val="300"/>
+              </a:spcAft>
+              <a:defRPr sz="1400">
+                <a:solidFill>
+                  <a:srgbClr val="000000"/>
+                </a:solidFill>
+                <a:latin typeface="Play"/>
+                <a:ea typeface="Play"/>
+                <a:cs typeface="Play"/>
+              </a:defRPr>
+            </a:pPr>
+            <a:r>
+              <a:rPr sz="1400">
+                <a:solidFill>
+                  <a:srgbClr val="000000"/>
+                </a:solidFill>
+                <a:latin typeface="Play"/>
+                <a:ea typeface="Play"/>
+                <a:cs typeface="Play"/>
+              </a:rPr>
+              <a:t>• Нагрузка выше 20 одновременных задач требует внешней очереди</a:t>
+            </a:r>
+          </a:p>
+        </p:txBody>
+      </p:sp>
+    </p:spTree>
+  </p:cSld>
+  <p:clrMapOvr>
+    <a:masterClrMapping/>
+  </p:clrMapOvr>
+</p:sld>
+</file>
+
+<file path=ppt/slides/slide62.xml><?xml version="1.0" encoding="utf-8"?>
+<p:sld xmlns:a="http://schemas.openxmlformats.org/drawingml/2006/main" xmlns:p="http://schemas.openxmlformats.org/presentationml/2006/main" xmlns:r="http://schemas.openxmlformats.org/officeDocument/2006/relationships">
+  <p:cSld>
+    <p:spTree>
+      <p:nvGrpSpPr>
+        <p:cNvPr id="1" name=""/>
+        <p:cNvGrpSpPr/>
+        <p:nvPr/>
+      </p:nvGrpSpPr>
+      <p:grpSpPr/>
+      <p:sp>
+        <p:nvSpPr>
+          <p:cNvPr id="662" name="Google Shape;662;p55"/>
           <p:cNvSpPr/>
           <p:nvPr/>
         </p:nvSpPr>
         <p:spPr>
           <a:xfrm>
-            <a:off x="476248" y="1400327"/>
-            <a:ext cx="2412987" cy="1009519"/>
+            <a:off x="8667705" y="4666977"/>
+            <a:ext cx="190499" cy="190475"/>
           </a:xfrm>
           <a:prstGeom prst="rect">
             <a:avLst/>
@@ -8621,13 +7862,140 @@
       </p:sp>
       <p:sp>
         <p:nvSpPr>
-          <p:cNvPr id="1035" name="Google Shape;1035;p65"/>
+          <p:cNvPr id="663" name="Google Shape;663;p55"/>
           <p:cNvSpPr/>
           <p:nvPr/>
         </p:nvSpPr>
         <p:spPr>
           <a:xfrm>
-            <a:off x="476248" y="1400328"/>
+            <a:off x="285748" y="286047"/>
+            <a:ext cx="8572456" cy="3938075"/>
+          </a:xfrm>
+          <a:prstGeom prst="rect">
+            <a:avLst/>
+          </a:prstGeom>
+          <a:noFill/>
+          <a:ln>
+            <a:noFill/>
+          </a:ln>
+        </p:spPr>
+        <p:txBody>
+          <a:bodyPr anchorCtr="0" anchor="ctr" bIns="91425" lIns="91425" spcFirstLastPara="1" rIns="91425" wrap="square" tIns="91425">
+            <a:noAutofit/>
+          </a:bodyPr>
+          <a:lstStyle/>
+          <a:p>
+            <a:pPr indent="0" lvl="0" marL="0" rtl="0" algn="l">
+              <a:spcBef>
+                <a:spcPts val="0"/>
+              </a:spcBef>
+              <a:spcAft>
+                <a:spcPts val="0"/>
+              </a:spcAft>
+              <a:buNone/>
+            </a:pPr>
+            <a:r>
+              <a:t/>
+            </a:r>
+            <a:endParaRPr/>
+          </a:p>
+        </p:txBody>
+      </p:sp>
+      <p:sp>
+        <p:nvSpPr>
+          <p:cNvPr id="664" name="Google Shape;664;p55"/>
+          <p:cNvSpPr/>
+          <p:nvPr/>
+        </p:nvSpPr>
+        <p:spPr>
+          <a:xfrm>
+            <a:off x="285748" y="1209852"/>
+            <a:ext cx="8572456" cy="3014270"/>
+          </a:xfrm>
+          <a:prstGeom prst="rect">
+            <a:avLst/>
+          </a:prstGeom>
+          <a:noFill/>
+          <a:ln>
+            <a:noFill/>
+          </a:ln>
+        </p:spPr>
+        <p:txBody>
+          <a:bodyPr anchorCtr="0" anchor="ctr" bIns="91425" lIns="91425" spcFirstLastPara="1" rIns="91425" wrap="square" tIns="91425">
+            <a:noAutofit/>
+          </a:bodyPr>
+          <a:lstStyle/>
+          <a:p>
+            <a:pPr indent="0" lvl="0" marL="0" rtl="0" algn="l">
+              <a:spcBef>
+                <a:spcPts val="0"/>
+              </a:spcBef>
+              <a:spcAft>
+                <a:spcPts val="0"/>
+              </a:spcAft>
+              <a:buNone/>
+            </a:pPr>
+            <a:r>
+              <a:t/>
+            </a:r>
+            <a:endParaRPr/>
+          </a:p>
+        </p:txBody>
+      </p:sp>
+      <p:sp>
+        <p:nvSpPr>
+          <p:cNvPr id="665" name="Google Shape;665;p55"/>
+          <p:cNvSpPr/>
+          <p:nvPr/>
+        </p:nvSpPr>
+        <p:spPr>
+          <a:xfrm>
+            <a:off x="285749" y="1209852"/>
+            <a:ext cx="2071677" cy="3014270"/>
+          </a:xfrm>
+          <a:prstGeom prst="roundRect">
+            <a:avLst>
+              <a:gd fmla="val 4634" name="adj"/>
+            </a:avLst>
+          </a:prstGeom>
+          <a:solidFill>
+            <a:schemeClr val="lt2"/>
+          </a:solidFill>
+          <a:ln>
+            <a:noFill/>
+          </a:ln>
+        </p:spPr>
+        <p:txBody>
+          <a:bodyPr anchorCtr="0" anchor="ctr" bIns="91425" lIns="91425" spcFirstLastPara="1" rIns="91425" wrap="square" tIns="91425">
+            <a:noAutofit/>
+          </a:bodyPr>
+          <a:lstStyle/>
+          <a:p>
+            <a:pPr indent="0" lvl="0" marL="0" rtl="0" algn="l">
+              <a:spcBef>
+                <a:spcPts val="0"/>
+              </a:spcBef>
+              <a:spcAft>
+                <a:spcPts val="0"/>
+              </a:spcAft>
+              <a:buNone/>
+            </a:pPr>
+            <a:r>
+              <a:t/>
+            </a:r>
+            <a:endParaRPr/>
+          </a:p>
+        </p:txBody>
+      </p:sp>
+      <p:sp>
+        <p:nvSpPr>
+          <p:cNvPr id="667" name="Google Shape;667;p55"/>
+          <p:cNvSpPr/>
+          <p:nvPr/>
+        </p:nvSpPr>
+        <p:spPr>
+          <a:xfrm>
+            <a:off x="438148" y="1362233"/>
             <a:ext cx="76199" cy="76190"/>
           </a:xfrm>
           <a:prstGeom prst="roundRect">
@@ -8666,19 +8034,23 @@
       </p:sp>
       <p:sp>
         <p:nvSpPr>
-          <p:cNvPr id="1040" name="Google Shape;1040;p65"/>
+          <p:cNvPr id="670" name="Google Shape;670;p55"/>
           <p:cNvSpPr/>
           <p:nvPr/>
         </p:nvSpPr>
         <p:spPr>
           <a:xfrm>
-            <a:off x="3365480" y="1400327"/>
-            <a:ext cx="2412987" cy="1009519"/>
+            <a:off x="2452675" y="1209852"/>
+            <a:ext cx="2071677" cy="3014270"/>
           </a:xfrm>
-          <a:prstGeom prst="rect">
-            <a:avLst/>
+          <a:prstGeom prst="roundRect">
+            <a:avLst>
+              <a:gd fmla="val 4634" name="adj"/>
+            </a:avLst>
           </a:prstGeom>
-          <a:noFill/>
+          <a:solidFill>
+            <a:schemeClr val="lt2"/>
+          </a:solidFill>
           <a:ln>
             <a:noFill/>
           </a:ln>
@@ -8707,13 +8079,13 @@
       </p:sp>
       <p:sp>
         <p:nvSpPr>
-          <p:cNvPr id="1041" name="Google Shape;1041;p65"/>
+          <p:cNvPr id="672" name="Google Shape;672;p55"/>
           <p:cNvSpPr/>
           <p:nvPr/>
         </p:nvSpPr>
         <p:spPr>
           <a:xfrm>
-            <a:off x="3365480" y="1400328"/>
+            <a:off x="2605074" y="1362233"/>
             <a:ext cx="76199" cy="76190"/>
           </a:xfrm>
           <a:prstGeom prst="roundRect">
@@ -8752,13 +8124,58 @@
       </p:sp>
       <p:sp>
         <p:nvSpPr>
-          <p:cNvPr id="1046" name="Google Shape;1046;p65"/>
+          <p:cNvPr id="675" name="Google Shape;675;p55"/>
           <p:cNvSpPr/>
           <p:nvPr/>
         </p:nvSpPr>
         <p:spPr>
           <a:xfrm>
-            <a:off x="6254721" y="1400328"/>
+            <a:off x="4619601" y="1209852"/>
+            <a:ext cx="2071677" cy="3014270"/>
+          </a:xfrm>
+          <a:prstGeom prst="roundRect">
+            <a:avLst>
+              <a:gd fmla="val 4634" name="adj"/>
+            </a:avLst>
+          </a:prstGeom>
+          <a:solidFill>
+            <a:schemeClr val="lt2"/>
+          </a:solidFill>
+          <a:ln>
+            <a:noFill/>
+          </a:ln>
+        </p:spPr>
+        <p:txBody>
+          <a:bodyPr anchorCtr="0" anchor="ctr" bIns="91425" lIns="91425" spcFirstLastPara="1" rIns="91425" wrap="square" tIns="91425">
+            <a:noAutofit/>
+          </a:bodyPr>
+          <a:lstStyle/>
+          <a:p>
+            <a:pPr indent="0" lvl="0" marL="0" rtl="0" algn="l">
+              <a:spcBef>
+                <a:spcPts val="0"/>
+              </a:spcBef>
+              <a:spcAft>
+                <a:spcPts val="0"/>
+              </a:spcAft>
+              <a:buNone/>
+            </a:pPr>
+            <a:r>
+              <a:t/>
+            </a:r>
+            <a:endParaRPr/>
+          </a:p>
+        </p:txBody>
+      </p:sp>
+      <p:sp>
+        <p:nvSpPr>
+          <p:cNvPr id="677" name="Google Shape;677;p55"/>
+          <p:cNvSpPr/>
+          <p:nvPr/>
+        </p:nvSpPr>
+        <p:spPr>
+          <a:xfrm>
+            <a:off x="4772001" y="1362233"/>
             <a:ext cx="76199" cy="76190"/>
           </a:xfrm>
           <a:prstGeom prst="roundRect">
@@ -8797,14 +8214,104 @@
       </p:sp>
       <p:sp>
         <p:nvSpPr>
-          <p:cNvPr id="1047" name="title"/>
+          <p:cNvPr id="680" name="Google Shape;680;p55"/>
+          <p:cNvSpPr/>
+          <p:nvPr/>
+        </p:nvSpPr>
+        <p:spPr>
+          <a:xfrm>
+            <a:off x="6786527" y="1209852"/>
+            <a:ext cx="2071677" cy="3014270"/>
+          </a:xfrm>
+          <a:prstGeom prst="roundRect">
+            <a:avLst>
+              <a:gd fmla="val 4634" name="adj"/>
+            </a:avLst>
+          </a:prstGeom>
+          <a:solidFill>
+            <a:schemeClr val="lt2"/>
+          </a:solidFill>
+          <a:ln>
+            <a:noFill/>
+          </a:ln>
+        </p:spPr>
+        <p:txBody>
+          <a:bodyPr anchorCtr="0" anchor="ctr" bIns="91425" lIns="91425" spcFirstLastPara="1" rIns="91425" wrap="square" tIns="91425">
+            <a:noAutofit/>
+          </a:bodyPr>
+          <a:lstStyle/>
+          <a:p>
+            <a:pPr indent="0" lvl="0" marL="0" rtl="0" algn="l">
+              <a:spcBef>
+                <a:spcPts val="0"/>
+              </a:spcBef>
+              <a:spcAft>
+                <a:spcPts val="0"/>
+              </a:spcAft>
+              <a:buNone/>
+            </a:pPr>
+            <a:r>
+              <a:t/>
+            </a:r>
+            <a:endParaRPr/>
+          </a:p>
+        </p:txBody>
+      </p:sp>
+      <p:sp>
+        <p:nvSpPr>
+          <p:cNvPr id="682" name="Google Shape;682;p55"/>
+          <p:cNvSpPr/>
+          <p:nvPr/>
+        </p:nvSpPr>
+        <p:spPr>
+          <a:xfrm>
+            <a:off x="6938927" y="1362233"/>
+            <a:ext cx="76199" cy="76190"/>
+          </a:xfrm>
+          <a:prstGeom prst="roundRect">
+            <a:avLst>
+              <a:gd fmla="val 31500" name="adj"/>
+            </a:avLst>
+          </a:prstGeom>
+          <a:solidFill>
+            <a:srgbClr val="0077FF"/>
+          </a:solidFill>
+          <a:ln>
+            <a:noFill/>
+          </a:ln>
+        </p:spPr>
+        <p:txBody>
+          <a:bodyPr anchorCtr="0" anchor="ctr" bIns="91425" lIns="91425" spcFirstLastPara="1" rIns="91425" wrap="square" tIns="91425">
+            <a:noAutofit/>
+          </a:bodyPr>
+          <a:lstStyle/>
+          <a:p>
+            <a:pPr indent="0" lvl="0" marL="0" rtl="0" algn="l">
+              <a:spcBef>
+                <a:spcPts val="0"/>
+              </a:spcBef>
+              <a:spcAft>
+                <a:spcPts val="0"/>
+              </a:spcAft>
+              <a:buNone/>
+            </a:pPr>
+            <a:r>
+              <a:t/>
+            </a:r>
+            <a:endParaRPr/>
+          </a:p>
+        </p:txBody>
+      </p:sp>
+      <p:sp>
+        <p:nvSpPr>
+          <p:cNvPr id="683" name="title"/>
           <p:cNvSpPr txBox="1"/>
           <p:nvPr/>
         </p:nvSpPr>
         <p:spPr>
           <a:xfrm>
             <a:off x="274320" y="282943"/>
-            <a:ext cx="6792986" cy="932027"/>
+            <a:ext cx="6792986" cy="617220"/>
           </a:xfrm>
           <a:prstGeom prst="rect">
             <a:avLst/>
@@ -8839,357 +8346,21 @@
                 <a:ea typeface="Play"/>
                 <a:cs typeface="Play"/>
               </a:rPr>
-              <a:t>Увеличение объёма работы дизайнеров: 11/нед → 38/6н</a:t>
+              <a:t>План пилота</a:t>
             </a:r>
           </a:p>
         </p:txBody>
       </p:sp>
-      <p:graphicFrame>
-        <p:nvGraphicFramePr>
-          <p:cNvPr id="1048" name="Chart 1047"/>
-          <p:cNvGraphicFramePr>
-            <a:graphicFrameLocks noGrp="1"/>
-          </p:cNvGraphicFramePr>
+      <p:sp>
+        <p:nvSpPr>
+          <p:cNvPr id="684" name="body_left"/>
+          <p:cNvSpPr txBox="1"/>
           <p:nvPr/>
-        </p:nvGraphicFramePr>
-        <p:xfrm>
-          <a:off x="4583887" y="1628895"/>
-          <a:ext cx="4035247" cy="2160270"/>
-        </p:xfrm>
-        <a:graphic>
-          <a:graphicData uri="http://schemas.openxmlformats.org/drawingml/2006/chart">
-            <c:chart xmlns:c="http://schemas.openxmlformats.org/drawingml/2006/chart" r:id="rId4"/>
-          </a:graphicData>
-        </a:graphic>
-      </p:graphicFrame>
-    </p:spTree>
-  </p:cSld>
-  <p:clrMapOvr>
-    <a:masterClrMapping/>
-  </p:clrMapOvr>
-</p:sld>
-</file>
-
-<file path=ppt/slides/slide62.xml><?xml version="1.0" encoding="utf-8"?>
-<p:sld xmlns:a="http://schemas.openxmlformats.org/drawingml/2006/main" xmlns:p="http://schemas.openxmlformats.org/presentationml/2006/main" xmlns:r="http://schemas.openxmlformats.org/officeDocument/2006/relationships">
-  <p:cSld>
-    <p:spTree>
-      <p:nvGrpSpPr>
-        <p:cNvPr id="1" name=""/>
-        <p:cNvGrpSpPr/>
-        <p:nvPr/>
-      </p:nvGrpSpPr>
-      <p:grpSpPr/>
-      <p:pic>
-        <p:nvPicPr>
-          <p:cNvPr descr=" " id="2385" name="Google Shape;2385;p88"/>
-          <p:cNvPicPr preferRelativeResize="0"/>
-          <p:nvPr/>
-        </p:nvPicPr>
-        <p:blipFill rotWithShape="1">
-          <a:blip r:embed="rId2">
-            <a:alphaModFix/>
-          </a:blip>
-          <a:srcRect b="0" l="0" r="0" t="0"/>
-          <a:stretch/>
-        </p:blipFill>
+        </p:nvSpPr>
         <p:spPr>
           <a:xfrm>
-            <a:off x="388142" y="2000324"/>
-            <a:ext cx="8755811" cy="9524"/>
-          </a:xfrm>
-          <a:prstGeom prst="rect">
-            <a:avLst/>
-          </a:prstGeom>
-          <a:noFill/>
-          <a:ln>
-            <a:noFill/>
-          </a:ln>
-        </p:spPr>
-      </p:pic>
-      <p:sp>
-        <p:nvSpPr>
-          <p:cNvPr id="2386" name="Google Shape;2386;p88"/>
-          <p:cNvSpPr/>
-          <p:nvPr/>
-        </p:nvSpPr>
-        <p:spPr>
-          <a:xfrm>
-            <a:off x="319086" y="1286042"/>
-            <a:ext cx="1690679" cy="1128566"/>
-          </a:xfrm>
-          <a:prstGeom prst="rect">
-            <a:avLst/>
-          </a:prstGeom>
-          <a:noFill/>
-          <a:ln>
-            <a:noFill/>
-          </a:ln>
-        </p:spPr>
-        <p:txBody>
-          <a:bodyPr anchorCtr="0" anchor="ctr" bIns="91425" lIns="91425" spcFirstLastPara="1" rIns="91425" wrap="square" tIns="91425">
-            <a:noAutofit/>
-          </a:bodyPr>
-          <a:lstStyle/>
-          <a:p>
-            <a:pPr indent="0" lvl="0" marL="0" rtl="0" algn="l">
-              <a:spcBef>
-                <a:spcPts val="0"/>
-              </a:spcBef>
-              <a:spcAft>
-                <a:spcPts val="0"/>
-              </a:spcAft>
-              <a:buNone/>
-            </a:pPr>
-            <a:r>
-              <a:t/>
-            </a:r>
-            <a:endParaRPr/>
-          </a:p>
-        </p:txBody>
-      </p:sp>
-      <p:sp>
-        <p:nvSpPr>
-          <p:cNvPr id="2388" name="Google Shape;2388;p88"/>
-          <p:cNvSpPr/>
-          <p:nvPr/>
-        </p:nvSpPr>
-        <p:spPr>
-          <a:xfrm>
-            <a:off x="2600312" y="1286042"/>
-            <a:ext cx="1690679" cy="1128566"/>
-          </a:xfrm>
-          <a:prstGeom prst="rect">
-            <a:avLst/>
-          </a:prstGeom>
-          <a:noFill/>
-          <a:ln>
-            <a:noFill/>
-          </a:ln>
-        </p:spPr>
-        <p:txBody>
-          <a:bodyPr anchorCtr="0" anchor="ctr" bIns="91425" lIns="91425" spcFirstLastPara="1" rIns="91425" wrap="square" tIns="91425">
-            <a:noAutofit/>
-          </a:bodyPr>
-          <a:lstStyle/>
-          <a:p>
-            <a:pPr indent="0" lvl="0" marL="0" rtl="0" algn="l">
-              <a:spcBef>
-                <a:spcPts val="0"/>
-              </a:spcBef>
-              <a:spcAft>
-                <a:spcPts val="0"/>
-              </a:spcAft>
-              <a:buNone/>
-            </a:pPr>
-            <a:r>
-              <a:t/>
-            </a:r>
-            <a:endParaRPr/>
-          </a:p>
-        </p:txBody>
-      </p:sp>
-      <p:sp>
-        <p:nvSpPr>
-          <p:cNvPr id="2390" name="Google Shape;2390;p88"/>
-          <p:cNvSpPr/>
-          <p:nvPr/>
-        </p:nvSpPr>
-        <p:spPr>
-          <a:xfrm>
-            <a:off x="4881537" y="1286042"/>
-            <a:ext cx="1690679" cy="1128566"/>
-          </a:xfrm>
-          <a:prstGeom prst="rect">
-            <a:avLst/>
-          </a:prstGeom>
-          <a:noFill/>
-          <a:ln>
-            <a:noFill/>
-          </a:ln>
-        </p:spPr>
-        <p:txBody>
-          <a:bodyPr anchorCtr="0" anchor="ctr" bIns="91425" lIns="91425" spcFirstLastPara="1" rIns="91425" wrap="square" tIns="91425">
-            <a:noAutofit/>
-          </a:bodyPr>
-          <a:lstStyle/>
-          <a:p>
-            <a:pPr indent="0" lvl="0" marL="0" rtl="0" algn="l">
-              <a:spcBef>
-                <a:spcPts val="0"/>
-              </a:spcBef>
-              <a:spcAft>
-                <a:spcPts val="0"/>
-              </a:spcAft>
-              <a:buNone/>
-            </a:pPr>
-            <a:r>
-              <a:t/>
-            </a:r>
-            <a:endParaRPr/>
-          </a:p>
-        </p:txBody>
-      </p:sp>
-      <p:sp>
-        <p:nvSpPr>
-          <p:cNvPr id="2392" name="Google Shape;2392;p88"/>
-          <p:cNvSpPr/>
-          <p:nvPr/>
-        </p:nvSpPr>
-        <p:spPr>
-          <a:xfrm>
-            <a:off x="7162763" y="1286042"/>
-            <a:ext cx="1690679" cy="1128566"/>
-          </a:xfrm>
-          <a:prstGeom prst="rect">
-            <a:avLst/>
-          </a:prstGeom>
-          <a:noFill/>
-          <a:ln>
-            <a:noFill/>
-          </a:ln>
-        </p:spPr>
-        <p:txBody>
-          <a:bodyPr anchorCtr="0" anchor="ctr" bIns="91425" lIns="91425" spcFirstLastPara="1" rIns="91425" wrap="square" tIns="91425">
-            <a:noAutofit/>
-          </a:bodyPr>
-          <a:lstStyle/>
-          <a:p>
-            <a:pPr indent="0" lvl="0" marL="0" rtl="0" algn="l">
-              <a:spcBef>
-                <a:spcPts val="0"/>
-              </a:spcBef>
-              <a:spcAft>
-                <a:spcPts val="0"/>
-              </a:spcAft>
-              <a:buNone/>
-            </a:pPr>
-            <a:r>
-              <a:t/>
-            </a:r>
-            <a:endParaRPr/>
-          </a:p>
-        </p:txBody>
-      </p:sp>
-      <p:pic>
-        <p:nvPicPr>
-          <p:cNvPr descr=" " id="2394" name="Google Shape;2394;p88"/>
-          <p:cNvPicPr preferRelativeResize="0"/>
-          <p:nvPr/>
-        </p:nvPicPr>
-        <p:blipFill rotWithShape="1">
-          <a:blip r:embed="rId3">
-            <a:alphaModFix/>
-          </a:blip>
-          <a:srcRect b="0" l="0" r="0" t="0"/>
-          <a:stretch/>
-        </p:blipFill>
-        <p:spPr>
-          <a:xfrm>
-            <a:off x="1" y="3684300"/>
-            <a:ext cx="7238962" cy="70126"/>
-          </a:xfrm>
-          <a:prstGeom prst="rect">
-            <a:avLst/>
-          </a:prstGeom>
-          <a:noFill/>
-          <a:ln>
-            <a:noFill/>
-          </a:ln>
-        </p:spPr>
-      </p:pic>
-      <p:sp>
-        <p:nvSpPr>
-          <p:cNvPr id="2395" name="Google Shape;2395;p88"/>
-          <p:cNvSpPr/>
-          <p:nvPr/>
-        </p:nvSpPr>
-        <p:spPr>
-          <a:xfrm>
-            <a:off x="319086" y="3000319"/>
-            <a:ext cx="1690679" cy="1128566"/>
-          </a:xfrm>
-          <a:prstGeom prst="rect">
-            <a:avLst/>
-          </a:prstGeom>
-          <a:noFill/>
-          <a:ln>
-            <a:noFill/>
-          </a:ln>
-        </p:spPr>
-        <p:txBody>
-          <a:bodyPr anchorCtr="0" anchor="ctr" bIns="91425" lIns="91425" spcFirstLastPara="1" rIns="91425" wrap="square" tIns="91425">
-            <a:noAutofit/>
-          </a:bodyPr>
-          <a:lstStyle/>
-          <a:p>
-            <a:pPr indent="0" lvl="0" marL="0" rtl="0" algn="l">
-              <a:spcBef>
-                <a:spcPts val="0"/>
-              </a:spcBef>
-              <a:spcAft>
-                <a:spcPts val="0"/>
-              </a:spcAft>
-              <a:buNone/>
-            </a:pPr>
-            <a:r>
-              <a:t/>
-            </a:r>
-            <a:endParaRPr/>
-          </a:p>
-        </p:txBody>
-      </p:sp>
-      <p:sp>
-        <p:nvSpPr>
-          <p:cNvPr id="2397" name="Google Shape;2397;p88"/>
-          <p:cNvSpPr/>
-          <p:nvPr/>
-        </p:nvSpPr>
-        <p:spPr>
-          <a:xfrm>
-            <a:off x="2600312" y="3000319"/>
-            <a:ext cx="1690679" cy="1128566"/>
-          </a:xfrm>
-          <a:prstGeom prst="rect">
-            <a:avLst/>
-          </a:prstGeom>
-          <a:noFill/>
-          <a:ln>
-            <a:noFill/>
-          </a:ln>
-        </p:spPr>
-        <p:txBody>
-          <a:bodyPr anchorCtr="0" anchor="ctr" bIns="91425" lIns="91425" spcFirstLastPara="1" rIns="91425" wrap="square" tIns="91425">
-            <a:noAutofit/>
-          </a:bodyPr>
-          <a:lstStyle/>
-          <a:p>
-            <a:pPr indent="0" lvl="0" marL="0" rtl="0" algn="l">
-              <a:spcBef>
-                <a:spcPts val="0"/>
-              </a:spcBef>
-              <a:spcAft>
-                <a:spcPts val="0"/>
-              </a:spcAft>
-              <a:buNone/>
-            </a:pPr>
-            <a:r>
-              <a:t/>
-            </a:r>
-            <a:endParaRPr/>
-          </a:p>
-        </p:txBody>
-      </p:sp>
-      <p:sp>
-        <p:nvSpPr>
-          <p:cNvPr id="2398" name="title"/>
-          <p:cNvSpPr txBox="1"/>
-          <p:nvPr/>
-        </p:nvSpPr>
-        <p:spPr>
-          <a:xfrm>
-            <a:off x="274320" y="282943"/>
-            <a:ext cx="6792986" cy="932027"/>
+            <a:off x="274320" y="1882839"/>
+            <a:ext cx="4035247" cy="993140"/>
           </a:xfrm>
           <a:prstGeom prst="rect">
             <a:avLst/>
@@ -9206,7 +8377,7 @@
               <a:spcAft>
                 <a:spcPts val="300"/>
               </a:spcAft>
-              <a:defRPr sz="2438">
+              <a:defRPr sz="1800">
                 <a:solidFill>
                   <a:srgbClr val="000000"/>
                 </a:solidFill>
@@ -9216,7 +8387,7 @@
               </a:defRPr>
             </a:pPr>
             <a:r>
-              <a:rPr sz="2438">
+              <a:rPr sz="1800">
                 <a:solidFill>
                   <a:srgbClr val="000000"/>
                 </a:solidFill>
@@ -9224,29 +8395,112 @@
                 <a:ea typeface="Play"/>
                 <a:cs typeface="Play"/>
               </a:rPr>
-              <a:t>Стоимость пилота: 1 400 руб за 6 недель</a:t>
+              <a:t>• Подключить ещё 4 команды в Q3 2026</a:t>
+            </a:r>
+          </a:p>
+          <a:p>
+            <a:pPr algn="l">
+              <a:spcAft>
+                <a:spcPts val="300"/>
+              </a:spcAft>
+              <a:defRPr sz="1800">
+                <a:solidFill>
+                  <a:srgbClr val="000000"/>
+                </a:solidFill>
+                <a:latin typeface="Play"/>
+                <a:ea typeface="Play"/>
+                <a:cs typeface="Play"/>
+              </a:defRPr>
+            </a:pPr>
+            <a:r>
+              <a:rPr sz="1800">
+                <a:solidFill>
+                  <a:srgbClr val="000000"/>
+                </a:solidFill>
+                <a:latin typeface="Play"/>
+                <a:ea typeface="Play"/>
+                <a:cs typeface="Play"/>
+              </a:rPr>
+              <a:t>• Настроить домен и HTTPS</a:t>
             </a:r>
           </a:p>
         </p:txBody>
       </p:sp>
-      <p:graphicFrame>
-        <p:nvGraphicFramePr>
-          <p:cNvPr id="2399" name="Chart 2398"/>
-          <p:cNvGraphicFramePr>
-            <a:graphicFrameLocks noGrp="1"/>
-          </p:cNvGraphicFramePr>
+      <p:sp>
+        <p:nvSpPr>
+          <p:cNvPr id="685" name="body_right"/>
+          <p:cNvSpPr txBox="1"/>
           <p:nvPr/>
-        </p:nvGraphicFramePr>
-        <p:xfrm>
-          <a:off x="4583887" y="2009822"/>
-          <a:ext cx="4035247" cy="2160270"/>
-        </p:xfrm>
-        <a:graphic>
-          <a:graphicData uri="http://schemas.openxmlformats.org/drawingml/2006/chart">
-            <c:chart xmlns:c="http://schemas.openxmlformats.org/drawingml/2006/chart" r:id="rId4"/>
-          </a:graphicData>
-        </a:graphic>
-      </p:graphicFrame>
+        </p:nvSpPr>
+        <p:spPr>
+          <a:xfrm>
+            <a:off x="4583887" y="1882839"/>
+            <a:ext cx="4035247" cy="1290320"/>
+          </a:xfrm>
+          <a:prstGeom prst="rect">
+            <a:avLst/>
+          </a:prstGeom>
+          <a:noFill/>
+        </p:spPr>
+        <p:txBody>
+          <a:bodyPr wrap="square" lIns="76200" rIns="76200" tIns="50800" bIns="50800">
+            <a:spAutoFit/>
+          </a:bodyPr>
+          <a:lstStyle/>
+          <a:p>
+            <a:pPr algn="l">
+              <a:spcAft>
+                <a:spcPts val="300"/>
+              </a:spcAft>
+              <a:defRPr sz="1800">
+                <a:solidFill>
+                  <a:srgbClr val="000000"/>
+                </a:solidFill>
+                <a:latin typeface="Play"/>
+                <a:ea typeface="Play"/>
+                <a:cs typeface="Play"/>
+              </a:defRPr>
+            </a:pPr>
+            <a:r>
+              <a:rPr sz="1800">
+                <a:solidFill>
+                  <a:srgbClr val="000000"/>
+                </a:solidFill>
+                <a:latin typeface="Play"/>
+                <a:ea typeface="Play"/>
+                <a:cs typeface="Play"/>
+              </a:rPr>
+              <a:t>• Интегрировать с корпоративным хранилищем документов</a:t>
+            </a:r>
+          </a:p>
+          <a:p>
+            <a:pPr algn="l">
+              <a:spcAft>
+                <a:spcPts val="300"/>
+              </a:spcAft>
+              <a:defRPr sz="1800">
+                <a:solidFill>
+                  <a:srgbClr val="000000"/>
+                </a:solidFill>
+                <a:latin typeface="Play"/>
+                <a:ea typeface="Play"/>
+                <a:cs typeface="Play"/>
+              </a:defRPr>
+            </a:pPr>
+            <a:r>
+              <a:rPr sz="1800">
+                <a:solidFill>
+                  <a:srgbClr val="000000"/>
+                </a:solidFill>
+                <a:latin typeface="Play"/>
+                <a:ea typeface="Play"/>
+                <a:cs typeface="Play"/>
+              </a:rPr>
+              <a:t>• В Q1 2027 добавить генерацию иллюстраций</a:t>
+            </a:r>
+          </a:p>
+        </p:txBody>
+      </p:sp>
     </p:spTree>
   </p:cSld>
   <p:clrMapOvr>
@@ -9526,7 +8780,7 @@
                 <a:ea typeface="Play"/>
                 <a:cs typeface="Play"/>
               </a:rPr>
-              <a:t>Ключевые риски и меры</a:t>
+              <a:t>Что мы просим решить</a:t>
             </a:r>
           </a:p>
         </p:txBody>
@@ -9575,7 +8829,7 @@
                 <a:ea typeface="Play"/>
                 <a:cs typeface="Play"/>
               </a:rPr>
-              <a:t>• Модель может выдумать цифры – аудит проверяет</a:t>
+              <a:t>• Одобрить запуск сервиса на всю компанию</a:t>
             </a:r>
           </a:p>
           <a:p>
@@ -9601,7 +8855,7 @@
                 <a:ea typeface="Play"/>
                 <a:cs typeface="Play"/>
               </a:rPr>
-              <a:t>• Плохой шаблон – сервис использует рабочую область</a:t>
+              <a:t>• Предоставить ресурсы для масштабирования (серверы, лицензии)</a:t>
             </a:r>
           </a:p>
           <a:p>
@@ -9627,7 +8881,7 @@
                 <a:ea typeface="Play"/>
                 <a:cs typeface="Play"/>
               </a:rPr>
-              <a:t>• Нагрузка &gt;20 задач – нужна внешняя очередь</a:t>
+              <a:t>• Согласовать сроки и ответственных за интеграцию</a:t>
             </a:r>
           </a:p>
         </p:txBody>
@@ -9659,7 +8913,7 @@
         <p:spPr>
           <a:xfrm>
             <a:off x="1543608" y="159030"/>
-            <a:ext cx="7202525" cy="3314394"/>
+            <a:ext cx="7202525" cy="3282246"/>
           </a:xfrm>
           <a:prstGeom prst="roundRect">
             <a:avLst/>
@@ -9705,7 +8959,7 @@
         <p:spPr>
           <a:xfrm>
             <a:off x="1670608" y="286030"/>
-            <a:ext cx="6948525" cy="1183640"/>
+            <a:ext cx="6948525" cy="655320"/>
           </a:xfrm>
           <a:prstGeom prst="rect">
             <a:avLst/>
@@ -9740,7 +8994,7 @@
                 <a:ea typeface="Play"/>
                 <a:cs typeface="Play"/>
               </a:rPr>
-              <a:t>Решение: запуск сервиса на всю компанию</a:t>
+              <a:t>Вывод</a:t>
             </a:r>
           </a:p>
         </p:txBody>
@@ -9753,8 +9007,8 @@
         </p:nvSpPr>
         <p:spPr>
           <a:xfrm>
-            <a:off x="1670608" y="2188185"/>
-            <a:ext cx="6948525" cy="1158240"/>
+            <a:off x="1670608" y="1891876"/>
+            <a:ext cx="6948525" cy="1422400"/>
           </a:xfrm>
           <a:prstGeom prst="rect">
             <a:avLst/>
@@ -9789,7 +9043,7 @@
                 <a:ea typeface="Play"/>
                 <a:cs typeface="Play"/>
               </a:rPr>
-              <a:t>• Q3 2026 подключить 4 команды, Q4 2026 доступ для всей компании, Q1 2027 генерация иллюстраций</a:t>
+              <a:t>• Автоматизация вёрстки повышает скорость, качество и экономит ресурсы</a:t>
             </a:r>
           </a:p>
           <a:p>
@@ -9815,7 +9069,7 @@
                 <a:ea typeface="Play"/>
                 <a:cs typeface="Play"/>
               </a:rPr>
-              <a:t>• Требуем одобрение запуска и ресурсы</a:t>
+              <a:t>• Пилот показал значительный рост эффективности</a:t>
             </a:r>
           </a:p>
           <a:p>
@@ -9841,7 +9095,7 @@
                 <a:ea typeface="Play"/>
                 <a:cs typeface="Play"/>
               </a:rPr>
-              <a:t>• Ожидаем ускорение и стандартизацию</a:t>
+              <a:t>• Запуск на всю компанию – стратегический шаг к цифровой трансформации</a:t>
             </a:r>
           </a:p>
         </p:txBody>

--- a/samples/VK_Tech_шаблон__split.pptx
+++ b/samples/VK_Tech_шаблон__split.pptx
@@ -19,6 +19,8 @@
     <p:sldId id="317" r:id="rId69"/>
     <p:sldId id="318" r:id="rId70"/>
     <p:sldId id="319" r:id="rId71"/>
+    <p:sldId id="320" r:id="rId72"/>
+    <p:sldId id="321" r:id="rId73"/>
   </p:sldIdLst>
   <p:sldSz cy="5143500" cx="9144000"/>
   <p:notesSz cx="6858000" cy="9144000"/>
@@ -279,7 +281,7 @@
               <c:strCache>
                 <c:ptCount val="1"/>
                 <c:pt idx="0">
-                  <c:v>До</c:v>
+                  <c:v>Кол-во</c:v>
                 </c:pt>
               </c:strCache>
             </c:strRef>
@@ -296,114 +298,36 @@
           </c:spPr>
           <c:cat>
             <c:strRef>
-              <c:f>Sheet1!$A$2:$A$5</c:f>
+              <c:f>Sheet1!$A$2:$A$3</c:f>
               <c:strCache>
-                <c:ptCount val="4"/>
+                <c:ptCount val="2"/>
                 <c:pt idx="0">
-                  <c:v>Время на колоду (мин)</c:v>
+                  <c:v>Запросы</c:v>
                 </c:pt>
                 <c:pt idx="1">
-                  <c:v>Время до первой версии (дн)</c:v>
-                </c:pt>
-                <c:pt idx="2">
-                  <c:v>Нарушения стиля</c:v>
-                </c:pt>
-                <c:pt idx="3">
-                  <c:v>Запросы закрыты/нед</c:v>
+                  <c:v>Закрыто</c:v>
                 </c:pt>
               </c:strCache>
             </c:strRef>
           </c:cat>
           <c:val>
             <c:numRef>
-              <c:f>Sheet1!$B$2:$B$5</c:f>
+              <c:f>Sheet1!$B$2:$B$3</c:f>
               <c:numCache>
                 <c:formatCode>General</c:formatCode>
-                <c:ptCount val="4"/>
+                <c:ptCount val="2"/>
                 <c:pt idx="0">
-                  <c:v>186.0</c:v>
+                  <c:v>27.0</c:v>
                 </c:pt>
                 <c:pt idx="1">
-                  <c:v>6.0</c:v>
-                </c:pt>
-                <c:pt idx="2">
-                  <c:v>19.0</c:v>
-                </c:pt>
-                <c:pt idx="3">
                   <c:v>11.0</c:v>
                 </c:pt>
               </c:numCache>
             </c:numRef>
           </c:val>
         </c:ser>
-        <c:ser>
-          <c:idx val="1"/>
-          <c:order val="1"/>
-          <c:tx>
-            <c:strRef>
-              <c:f>Sheet1!$C$1</c:f>
-              <c:strCache>
-                <c:ptCount val="1"/>
-                <c:pt idx="0">
-                  <c:v>После</c:v>
-                </c:pt>
-              </c:strCache>
-            </c:strRef>
-          </c:tx>
-          <c:spPr>
-            <a:solidFill>
-              <a:srgbClr val="FFD91D"/>
-            </a:solidFill>
-            <a:ln>
-              <a:solidFill>
-                <a:srgbClr val="FFD91D"/>
-              </a:solidFill>
-            </a:ln>
-          </c:spPr>
-          <c:cat>
-            <c:strRef>
-              <c:f>Sheet1!$A$2:$A$5</c:f>
-              <c:strCache>
-                <c:ptCount val="4"/>
-                <c:pt idx="0">
-                  <c:v>Время на колоду (мин)</c:v>
-                </c:pt>
-                <c:pt idx="1">
-                  <c:v>Время до первой версии (дн)</c:v>
-                </c:pt>
-                <c:pt idx="2">
-                  <c:v>Нарушения стиля</c:v>
-                </c:pt>
-                <c:pt idx="3">
-                  <c:v>Запросы закрыты/нед</c:v>
-                </c:pt>
-              </c:strCache>
-            </c:strRef>
-          </c:cat>
-          <c:val>
-            <c:numRef>
-              <c:f>Sheet1!$C$2:$C$5</c:f>
-              <c:numCache>
-                <c:formatCode>General</c:formatCode>
-                <c:ptCount val="4"/>
-                <c:pt idx="0">
-                  <c:v>4.0</c:v>
-                </c:pt>
-                <c:pt idx="1">
-                  <c:v>1.0</c:v>
-                </c:pt>
-                <c:pt idx="2">
-                  <c:v>2.0</c:v>
-                </c:pt>
-                <c:pt idx="3">
-                  <c:v>38.0</c:v>
-                </c:pt>
-              </c:numCache>
-            </c:numRef>
-          </c:val>
-        </c:ser>
         <c:dLbls>
-          <c:numFmt formatCode="0" sourceLinked="0"/>
+          <c:numFmt formatCode="0&quot; запросов&quot;" sourceLinked="0"/>
           <c:txPr>
             <a:bodyPr wrap="none"/>
             <a:lstStyle/>
@@ -480,6 +404,31 @@
             </a:ln>
           </c:spPr>
         </c:majorGridlines>
+        <c:title>
+          <c:tx>
+            <c:rich>
+              <a:bodyPr rot="0" vert="horz"/>
+              <a:lstStyle/>
+              <a:p>
+                <a:pPr>
+                  <a:defRPr sz="1100" b="0">
+                    <a:solidFill>
+                      <a:srgbClr val="000000"/>
+                    </a:solidFill>
+                    <a:latin typeface="Play"/>
+                    <a:ea typeface="Play"/>
+                    <a:cs typeface="Play"/>
+                  </a:defRPr>
+                </a:pPr>
+                <a:r>
+                  <a:t>Кол-во, запросов</a:t>
+                </a:r>
+              </a:p>
+            </c:rich>
+          </c:tx>
+          <c:layout/>
+          <c:overlay val="0"/>
+        </c:title>
         <c:majorTickMark val="out"/>
         <c:minorTickMark val="none"/>
         <c:tickLblPos val="nextTo"/>
@@ -503,10 +452,648 @@
         <c:crosses val="autoZero"/>
       </c:valAx>
     </c:plotArea>
-    <c:legend>
-      <c:legendPos val="b"/>
-      <c:overlay val="0"/>
-    </c:legend>
+    <c:dispBlanksAs val="gap"/>
+  </c:chart>
+  <c:txPr>
+    <a:bodyPr/>
+    <a:lstStyle/>
+    <a:p>
+      <a:pPr>
+        <a:defRPr sz="1200" b="0">
+          <a:solidFill>
+            <a:srgbClr val="000000"/>
+          </a:solidFill>
+          <a:latin typeface="Play"/>
+          <a:ea typeface="Play"/>
+          <a:cs typeface="Play"/>
+        </a:defRPr>
+      </a:pPr>
+      <a:endParaRPr lang="en-US"/>
+    </a:p>
+  </c:txPr>
+  <c:externalData r:id="rId1">
+    <c:autoUpdate val="0"/>
+  </c:externalData>
+</c:chartSpace>
+</file>
+
+<file path=ppt/charts/chart2.xml><?xml version="1.0" encoding="utf-8"?>
+<c:chartSpace xmlns:c="http://schemas.openxmlformats.org/drawingml/2006/chart" xmlns:a="http://schemas.openxmlformats.org/drawingml/2006/main" xmlns:r="http://schemas.openxmlformats.org/officeDocument/2006/relationships">
+  <c:date1904 val="0"/>
+  <c:chart>
+    <c:autoTitleDeleted val="1"/>
+    <c:plotArea>
+      <c:barChart>
+        <c:barDir val="col"/>
+        <c:grouping val="clustered"/>
+        <c:ser>
+          <c:idx val="0"/>
+          <c:order val="0"/>
+          <c:tx>
+            <c:strRef>
+              <c:f>Sheet1!$B$1</c:f>
+              <c:strCache>
+                <c:ptCount val="1"/>
+                <c:pt idx="0">
+                  <c:v>Время</c:v>
+                </c:pt>
+              </c:strCache>
+            </c:strRef>
+          </c:tx>
+          <c:spPr>
+            <a:solidFill>
+              <a:srgbClr val="0077FF"/>
+            </a:solidFill>
+            <a:ln>
+              <a:solidFill>
+                <a:srgbClr val="0077FF"/>
+              </a:solidFill>
+            </a:ln>
+          </c:spPr>
+          <c:cat>
+            <c:strRef>
+              <c:f>Sheet1!$A$2:$A$3</c:f>
+              <c:strCache>
+                <c:ptCount val="2"/>
+                <c:pt idx="0">
+                  <c:v>Сейчас</c:v>
+                </c:pt>
+                <c:pt idx="1">
+                  <c:v>Сервис</c:v>
+                </c:pt>
+              </c:strCache>
+            </c:strRef>
+          </c:cat>
+          <c:val>
+            <c:numRef>
+              <c:f>Sheet1!$B$2:$B$3</c:f>
+              <c:numCache>
+                <c:formatCode>General</c:formatCode>
+                <c:ptCount val="2"/>
+                <c:pt idx="0">
+                  <c:v>186.0</c:v>
+                </c:pt>
+                <c:pt idx="1">
+                  <c:v>4.0</c:v>
+                </c:pt>
+              </c:numCache>
+            </c:numRef>
+          </c:val>
+        </c:ser>
+        <c:dLbls>
+          <c:numFmt formatCode="0&quot; мин&quot;" sourceLinked="0"/>
+          <c:txPr>
+            <a:bodyPr wrap="none"/>
+            <a:lstStyle/>
+            <a:p>
+              <a:pPr>
+                <a:defRPr sz="1100" b="0">
+                  <a:solidFill>
+                    <a:srgbClr val="000000"/>
+                  </a:solidFill>
+                  <a:latin typeface="Play"/>
+                  <a:ea typeface="Play"/>
+                  <a:cs typeface="Play"/>
+                </a:defRPr>
+              </a:pPr>
+            </a:p>
+          </c:txPr>
+          <c:dLblPos val="outEnd"/>
+          <c:showLegendKey val="0"/>
+          <c:showVal val="1"/>
+          <c:showCatName val="0"/>
+          <c:showSerName val="0"/>
+          <c:showPercent val="0"/>
+          <c:showBubbleSize val="0"/>
+          <c:showLeaderLines val="1"/>
+        </c:dLbls>
+        <c:gapWidth val="60"/>
+        <c:axId val="-2068027336"/>
+        <c:axId val="-2113994440"/>
+      </c:barChart>
+      <c:catAx>
+        <c:axId val="-2068027336"/>
+        <c:scaling>
+          <c:orientation val="minMax"/>
+        </c:scaling>
+        <c:delete val="0"/>
+        <c:axPos val="b"/>
+        <c:majorTickMark val="out"/>
+        <c:minorTickMark val="none"/>
+        <c:tickLblPos val="nextTo"/>
+        <c:txPr>
+          <a:bodyPr/>
+          <a:lstStyle/>
+          <a:p>
+            <a:pPr>
+              <a:defRPr sz="1100" b="0">
+                <a:solidFill>
+                  <a:srgbClr val="000000"/>
+                </a:solidFill>
+                <a:latin typeface="Play"/>
+                <a:ea typeface="Play"/>
+                <a:cs typeface="Play"/>
+              </a:defRPr>
+            </a:pPr>
+          </a:p>
+        </c:txPr>
+        <c:crossAx val="-2113994440"/>
+        <c:crosses val="autoZero"/>
+        <c:auto val="1"/>
+        <c:lblAlgn val="ctr"/>
+        <c:lblOffset val="100"/>
+        <c:noMultiLvlLbl val="0"/>
+      </c:catAx>
+      <c:valAx>
+        <c:axId val="-2113994440"/>
+        <c:scaling/>
+        <c:delete val="0"/>
+        <c:axPos val="l"/>
+        <c:majorGridlines>
+          <c:spPr>
+            <a:ln w="9525">
+              <a:solidFill>
+                <a:srgbClr val="D1D1D1"/>
+              </a:solidFill>
+            </a:ln>
+          </c:spPr>
+        </c:majorGridlines>
+        <c:title>
+          <c:tx>
+            <c:rich>
+              <a:bodyPr rot="0" vert="horz"/>
+              <a:lstStyle/>
+              <a:p>
+                <a:pPr>
+                  <a:defRPr sz="1100" b="0">
+                    <a:solidFill>
+                      <a:srgbClr val="000000"/>
+                    </a:solidFill>
+                    <a:latin typeface="Play"/>
+                    <a:ea typeface="Play"/>
+                    <a:cs typeface="Play"/>
+                  </a:defRPr>
+                </a:pPr>
+                <a:r>
+                  <a:t>Время, мин</a:t>
+                </a:r>
+              </a:p>
+            </c:rich>
+          </c:tx>
+          <c:layout/>
+          <c:overlay val="0"/>
+        </c:title>
+        <c:majorTickMark val="out"/>
+        <c:minorTickMark val="none"/>
+        <c:tickLblPos val="nextTo"/>
+        <c:txPr>
+          <a:bodyPr/>
+          <a:lstStyle/>
+          <a:p>
+            <a:pPr>
+              <a:defRPr sz="1100" b="0">
+                <a:solidFill>
+                  <a:srgbClr val="000000"/>
+                </a:solidFill>
+                <a:latin typeface="Play"/>
+                <a:ea typeface="Play"/>
+                <a:cs typeface="Play"/>
+              </a:defRPr>
+            </a:pPr>
+          </a:p>
+        </c:txPr>
+        <c:crossAx val="-2068027336"/>
+        <c:crosses val="autoZero"/>
+      </c:valAx>
+    </c:plotArea>
+    <c:dispBlanksAs val="gap"/>
+  </c:chart>
+  <c:txPr>
+    <a:bodyPr/>
+    <a:lstStyle/>
+    <a:p>
+      <a:pPr>
+        <a:defRPr sz="1200" b="0">
+          <a:solidFill>
+            <a:srgbClr val="000000"/>
+          </a:solidFill>
+          <a:latin typeface="Play"/>
+          <a:ea typeface="Play"/>
+          <a:cs typeface="Play"/>
+        </a:defRPr>
+      </a:pPr>
+      <a:endParaRPr lang="en-US"/>
+    </a:p>
+  </c:txPr>
+  <c:externalData r:id="rId1">
+    <c:autoUpdate val="0"/>
+  </c:externalData>
+</c:chartSpace>
+</file>
+
+<file path=ppt/charts/chart3.xml><?xml version="1.0" encoding="utf-8"?>
+<c:chartSpace xmlns:c="http://schemas.openxmlformats.org/drawingml/2006/chart" xmlns:a="http://schemas.openxmlformats.org/drawingml/2006/main" xmlns:r="http://schemas.openxmlformats.org/officeDocument/2006/relationships">
+  <c:date1904 val="0"/>
+  <c:chart>
+    <c:autoTitleDeleted val="1"/>
+    <c:plotArea>
+      <c:barChart>
+        <c:barDir val="col"/>
+        <c:grouping val="clustered"/>
+        <c:ser>
+          <c:idx val="0"/>
+          <c:order val="0"/>
+          <c:tx>
+            <c:strRef>
+              <c:f>Sheet1!$B$1</c:f>
+              <c:strCache>
+                <c:ptCount val="1"/>
+                <c:pt idx="0">
+                  <c:v>Нарушения</c:v>
+                </c:pt>
+              </c:strCache>
+            </c:strRef>
+          </c:tx>
+          <c:spPr>
+            <a:solidFill>
+              <a:srgbClr val="0077FF"/>
+            </a:solidFill>
+            <a:ln>
+              <a:solidFill>
+                <a:srgbClr val="0077FF"/>
+              </a:solidFill>
+            </a:ln>
+          </c:spPr>
+          <c:cat>
+            <c:strRef>
+              <c:f>Sheet1!$A$2:$A$3</c:f>
+              <c:strCache>
+                <c:ptCount val="2"/>
+                <c:pt idx="0">
+                  <c:v>Сейчас</c:v>
+                </c:pt>
+                <c:pt idx="1">
+                  <c:v>Сервис</c:v>
+                </c:pt>
+              </c:strCache>
+            </c:strRef>
+          </c:cat>
+          <c:val>
+            <c:numRef>
+              <c:f>Sheet1!$B$2:$B$3</c:f>
+              <c:numCache>
+                <c:formatCode>General</c:formatCode>
+                <c:ptCount val="2"/>
+                <c:pt idx="0">
+                  <c:v>19.0</c:v>
+                </c:pt>
+                <c:pt idx="1">
+                  <c:v>2.0</c:v>
+                </c:pt>
+              </c:numCache>
+            </c:numRef>
+          </c:val>
+        </c:ser>
+        <c:dLbls>
+          <c:numFmt formatCode="0&quot; колод&quot;" sourceLinked="0"/>
+          <c:txPr>
+            <a:bodyPr wrap="none"/>
+            <a:lstStyle/>
+            <a:p>
+              <a:pPr>
+                <a:defRPr sz="1100" b="0">
+                  <a:solidFill>
+                    <a:srgbClr val="000000"/>
+                  </a:solidFill>
+                  <a:latin typeface="Play"/>
+                  <a:ea typeface="Play"/>
+                  <a:cs typeface="Play"/>
+                </a:defRPr>
+              </a:pPr>
+            </a:p>
+          </c:txPr>
+          <c:dLblPos val="outEnd"/>
+          <c:showLegendKey val="0"/>
+          <c:showVal val="1"/>
+          <c:showCatName val="0"/>
+          <c:showSerName val="0"/>
+          <c:showPercent val="0"/>
+          <c:showBubbleSize val="0"/>
+          <c:showLeaderLines val="1"/>
+        </c:dLbls>
+        <c:gapWidth val="60"/>
+        <c:axId val="-2068027336"/>
+        <c:axId val="-2113994440"/>
+      </c:barChart>
+      <c:catAx>
+        <c:axId val="-2068027336"/>
+        <c:scaling>
+          <c:orientation val="minMax"/>
+        </c:scaling>
+        <c:delete val="0"/>
+        <c:axPos val="b"/>
+        <c:majorTickMark val="out"/>
+        <c:minorTickMark val="none"/>
+        <c:tickLblPos val="nextTo"/>
+        <c:txPr>
+          <a:bodyPr/>
+          <a:lstStyle/>
+          <a:p>
+            <a:pPr>
+              <a:defRPr sz="1100" b="0">
+                <a:solidFill>
+                  <a:srgbClr val="000000"/>
+                </a:solidFill>
+                <a:latin typeface="Play"/>
+                <a:ea typeface="Play"/>
+                <a:cs typeface="Play"/>
+              </a:defRPr>
+            </a:pPr>
+          </a:p>
+        </c:txPr>
+        <c:crossAx val="-2113994440"/>
+        <c:crosses val="autoZero"/>
+        <c:auto val="1"/>
+        <c:lblAlgn val="ctr"/>
+        <c:lblOffset val="100"/>
+        <c:noMultiLvlLbl val="0"/>
+      </c:catAx>
+      <c:valAx>
+        <c:axId val="-2113994440"/>
+        <c:scaling/>
+        <c:delete val="0"/>
+        <c:axPos val="l"/>
+        <c:majorGridlines>
+          <c:spPr>
+            <a:ln w="9525">
+              <a:solidFill>
+                <a:srgbClr val="D1D1D1"/>
+              </a:solidFill>
+            </a:ln>
+          </c:spPr>
+        </c:majorGridlines>
+        <c:title>
+          <c:tx>
+            <c:rich>
+              <a:bodyPr rot="0" vert="horz"/>
+              <a:lstStyle/>
+              <a:p>
+                <a:pPr>
+                  <a:defRPr sz="1100" b="0">
+                    <a:solidFill>
+                      <a:srgbClr val="000000"/>
+                    </a:solidFill>
+                    <a:latin typeface="Play"/>
+                    <a:ea typeface="Play"/>
+                    <a:cs typeface="Play"/>
+                  </a:defRPr>
+                </a:pPr>
+                <a:r>
+                  <a:t>Нарушения, колод</a:t>
+                </a:r>
+              </a:p>
+            </c:rich>
+          </c:tx>
+          <c:layout/>
+          <c:overlay val="0"/>
+        </c:title>
+        <c:majorTickMark val="out"/>
+        <c:minorTickMark val="none"/>
+        <c:tickLblPos val="nextTo"/>
+        <c:txPr>
+          <a:bodyPr/>
+          <a:lstStyle/>
+          <a:p>
+            <a:pPr>
+              <a:defRPr sz="1100" b="0">
+                <a:solidFill>
+                  <a:srgbClr val="000000"/>
+                </a:solidFill>
+                <a:latin typeface="Play"/>
+                <a:ea typeface="Play"/>
+                <a:cs typeface="Play"/>
+              </a:defRPr>
+            </a:pPr>
+          </a:p>
+        </c:txPr>
+        <c:crossAx val="-2068027336"/>
+        <c:crosses val="autoZero"/>
+      </c:valAx>
+    </c:plotArea>
+    <c:dispBlanksAs val="gap"/>
+  </c:chart>
+  <c:txPr>
+    <a:bodyPr/>
+    <a:lstStyle/>
+    <a:p>
+      <a:pPr>
+        <a:defRPr sz="1200" b="0">
+          <a:solidFill>
+            <a:srgbClr val="000000"/>
+          </a:solidFill>
+          <a:latin typeface="Play"/>
+          <a:ea typeface="Play"/>
+          <a:cs typeface="Play"/>
+        </a:defRPr>
+      </a:pPr>
+      <a:endParaRPr lang="en-US"/>
+    </a:p>
+  </c:txPr>
+  <c:externalData r:id="rId1">
+    <c:autoUpdate val="0"/>
+  </c:externalData>
+</c:chartSpace>
+</file>
+
+<file path=ppt/charts/chart4.xml><?xml version="1.0" encoding="utf-8"?>
+<c:chartSpace xmlns:c="http://schemas.openxmlformats.org/drawingml/2006/chart" xmlns:a="http://schemas.openxmlformats.org/drawingml/2006/main" xmlns:r="http://schemas.openxmlformats.org/officeDocument/2006/relationships">
+  <c:date1904 val="0"/>
+  <c:chart>
+    <c:autoTitleDeleted val="1"/>
+    <c:plotArea>
+      <c:barChart>
+        <c:barDir val="col"/>
+        <c:grouping val="clustered"/>
+        <c:ser>
+          <c:idx val="0"/>
+          <c:order val="0"/>
+          <c:tx>
+            <c:strRef>
+              <c:f>Sheet1!$B$1</c:f>
+              <c:strCache>
+                <c:ptCount val="1"/>
+                <c:pt idx="0">
+                  <c:v>Запросы</c:v>
+                </c:pt>
+              </c:strCache>
+            </c:strRef>
+          </c:tx>
+          <c:spPr>
+            <a:solidFill>
+              <a:srgbClr val="0077FF"/>
+            </a:solidFill>
+            <a:ln>
+              <a:solidFill>
+                <a:srgbClr val="0077FF"/>
+              </a:solidFill>
+            </a:ln>
+          </c:spPr>
+          <c:cat>
+            <c:strRef>
+              <c:f>Sheet1!$A$2:$A$3</c:f>
+              <c:strCache>
+                <c:ptCount val="2"/>
+                <c:pt idx="0">
+                  <c:v>Сейчас</c:v>
+                </c:pt>
+                <c:pt idx="1">
+                  <c:v>Сервис</c:v>
+                </c:pt>
+              </c:strCache>
+            </c:strRef>
+          </c:cat>
+          <c:val>
+            <c:numRef>
+              <c:f>Sheet1!$B$2:$B$3</c:f>
+              <c:numCache>
+                <c:formatCode>General</c:formatCode>
+                <c:ptCount val="2"/>
+                <c:pt idx="0">
+                  <c:v>11.0</c:v>
+                </c:pt>
+                <c:pt idx="1">
+                  <c:v>38.0</c:v>
+                </c:pt>
+              </c:numCache>
+            </c:numRef>
+          </c:val>
+        </c:ser>
+        <c:dLbls>
+          <c:numFmt formatCode="0&quot; запросов&quot;" sourceLinked="0"/>
+          <c:txPr>
+            <a:bodyPr wrap="none"/>
+            <a:lstStyle/>
+            <a:p>
+              <a:pPr>
+                <a:defRPr sz="1100" b="0">
+                  <a:solidFill>
+                    <a:srgbClr val="000000"/>
+                  </a:solidFill>
+                  <a:latin typeface="Play"/>
+                  <a:ea typeface="Play"/>
+                  <a:cs typeface="Play"/>
+                </a:defRPr>
+              </a:pPr>
+            </a:p>
+          </c:txPr>
+          <c:dLblPos val="outEnd"/>
+          <c:showLegendKey val="0"/>
+          <c:showVal val="1"/>
+          <c:showCatName val="0"/>
+          <c:showSerName val="0"/>
+          <c:showPercent val="0"/>
+          <c:showBubbleSize val="0"/>
+          <c:showLeaderLines val="1"/>
+        </c:dLbls>
+        <c:gapWidth val="60"/>
+        <c:axId val="-2068027336"/>
+        <c:axId val="-2113994440"/>
+      </c:barChart>
+      <c:catAx>
+        <c:axId val="-2068027336"/>
+        <c:scaling>
+          <c:orientation val="minMax"/>
+        </c:scaling>
+        <c:delete val="0"/>
+        <c:axPos val="b"/>
+        <c:majorTickMark val="out"/>
+        <c:minorTickMark val="none"/>
+        <c:tickLblPos val="nextTo"/>
+        <c:txPr>
+          <a:bodyPr/>
+          <a:lstStyle/>
+          <a:p>
+            <a:pPr>
+              <a:defRPr sz="1100" b="0">
+                <a:solidFill>
+                  <a:srgbClr val="000000"/>
+                </a:solidFill>
+                <a:latin typeface="Play"/>
+                <a:ea typeface="Play"/>
+                <a:cs typeface="Play"/>
+              </a:defRPr>
+            </a:pPr>
+          </a:p>
+        </c:txPr>
+        <c:crossAx val="-2113994440"/>
+        <c:crosses val="autoZero"/>
+        <c:auto val="1"/>
+        <c:lblAlgn val="ctr"/>
+        <c:lblOffset val="100"/>
+        <c:noMultiLvlLbl val="0"/>
+      </c:catAx>
+      <c:valAx>
+        <c:axId val="-2113994440"/>
+        <c:scaling/>
+        <c:delete val="0"/>
+        <c:axPos val="l"/>
+        <c:majorGridlines>
+          <c:spPr>
+            <a:ln w="9525">
+              <a:solidFill>
+                <a:srgbClr val="D1D1D1"/>
+              </a:solidFill>
+            </a:ln>
+          </c:spPr>
+        </c:majorGridlines>
+        <c:title>
+          <c:tx>
+            <c:rich>
+              <a:bodyPr rot="0" vert="horz"/>
+              <a:lstStyle/>
+              <a:p>
+                <a:pPr>
+                  <a:defRPr sz="1100" b="0">
+                    <a:solidFill>
+                      <a:srgbClr val="000000"/>
+                    </a:solidFill>
+                    <a:latin typeface="Play"/>
+                    <a:ea typeface="Play"/>
+                    <a:cs typeface="Play"/>
+                  </a:defRPr>
+                </a:pPr>
+                <a:r>
+                  <a:t>Запросы, запросов</a:t>
+                </a:r>
+              </a:p>
+            </c:rich>
+          </c:tx>
+          <c:layout/>
+          <c:overlay val="0"/>
+        </c:title>
+        <c:majorTickMark val="out"/>
+        <c:minorTickMark val="none"/>
+        <c:tickLblPos val="nextTo"/>
+        <c:txPr>
+          <a:bodyPr/>
+          <a:lstStyle/>
+          <a:p>
+            <a:pPr>
+              <a:defRPr sz="1100" b="0">
+                <a:solidFill>
+                  <a:srgbClr val="000000"/>
+                </a:solidFill>
+                <a:latin typeface="Play"/>
+                <a:ea typeface="Play"/>
+                <a:cs typeface="Play"/>
+              </a:defRPr>
+            </a:pPr>
+          </a:p>
+        </c:txPr>
+        <c:crossAx val="-2068027336"/>
+        <c:crosses val="autoZero"/>
+      </c:valAx>
+    </c:plotArea>
     <c:dispBlanksAs val="gap"/>
   </c:chart>
   <c:txPr>
@@ -2295,6 +2882,138 @@
 </file>
 
 <file path=ppt/notesSlides/notesSlide64.xml><?xml version="1.0" encoding="utf-8"?>
+<p:notes xmlns:a="http://schemas.openxmlformats.org/drawingml/2006/main" xmlns:p="http://schemas.openxmlformats.org/presentationml/2006/main" xmlns:r="http://schemas.openxmlformats.org/officeDocument/2006/relationships">
+  <p:cSld>
+    <p:spTree>
+      <p:nvGrpSpPr>
+        <p:cNvPr id="1" name=""/>
+        <p:cNvGrpSpPr/>
+        <p:nvPr/>
+      </p:nvGrpSpPr>
+      <p:grpSpPr>
+        <a:xfrm>
+          <a:off x="0" y="0"/>
+          <a:ext cx="0" cy="0"/>
+          <a:chOff x="0" y="0"/>
+          <a:chExt cx="0" cy="0"/>
+        </a:xfrm>
+      </p:grpSpPr>
+      <p:sp>
+        <p:nvSpPr>
+          <p:cNvPr id="2" name="Slide Image Placeholder 1"/>
+          <p:cNvSpPr>
+            <a:spLocks noGrp="1"/>
+          </p:cNvSpPr>
+          <p:nvPr>
+            <p:ph type="sldImg" idx="3"/>
+          </p:nvPr>
+        </p:nvSpPr>
+        <p:spPr/>
+      </p:sp>
+      <p:sp>
+        <p:nvSpPr>
+          <p:cNvPr id="3" name="Notes Placeholder 2"/>
+          <p:cNvSpPr>
+            <a:spLocks noGrp="1"/>
+          </p:cNvSpPr>
+          <p:nvPr>
+            <p:ph type="body" idx="1"/>
+          </p:nvPr>
+        </p:nvSpPr>
+        <p:spPr/>
+        <p:txBody>
+          <a:bodyPr/>
+          <a:lstStyle/>
+          <a:p/>
+        </p:txBody>
+      </p:sp>
+      <p:sp>
+        <p:nvSpPr>
+          <p:cNvPr id="4" name="Slide Number Placeholder 3"/>
+          <p:cNvSpPr>
+            <a:spLocks noGrp="1"/>
+          </p:cNvSpPr>
+          <p:nvPr>
+            <p:ph type="sldNum" idx="12"/>
+          </p:nvPr>
+        </p:nvSpPr>
+        <p:spPr/>
+      </p:sp>
+    </p:spTree>
+  </p:cSld>
+  <p:clrMapOvr>
+    <a:masterClrMapping/>
+  </p:clrMapOvr>
+</p:notes>
+</file>
+
+<file path=ppt/notesSlides/notesSlide65.xml><?xml version="1.0" encoding="utf-8"?>
+<p:notes xmlns:a="http://schemas.openxmlformats.org/drawingml/2006/main" xmlns:p="http://schemas.openxmlformats.org/presentationml/2006/main" xmlns:r="http://schemas.openxmlformats.org/officeDocument/2006/relationships">
+  <p:cSld>
+    <p:spTree>
+      <p:nvGrpSpPr>
+        <p:cNvPr id="1" name=""/>
+        <p:cNvGrpSpPr/>
+        <p:nvPr/>
+      </p:nvGrpSpPr>
+      <p:grpSpPr>
+        <a:xfrm>
+          <a:off x="0" y="0"/>
+          <a:ext cx="0" cy="0"/>
+          <a:chOff x="0" y="0"/>
+          <a:chExt cx="0" cy="0"/>
+        </a:xfrm>
+      </p:grpSpPr>
+      <p:sp>
+        <p:nvSpPr>
+          <p:cNvPr id="2" name="Slide Image Placeholder 1"/>
+          <p:cNvSpPr>
+            <a:spLocks noGrp="1"/>
+          </p:cNvSpPr>
+          <p:nvPr>
+            <p:ph type="sldImg" idx="3"/>
+          </p:nvPr>
+        </p:nvSpPr>
+        <p:spPr/>
+      </p:sp>
+      <p:sp>
+        <p:nvSpPr>
+          <p:cNvPr id="3" name="Notes Placeholder 2"/>
+          <p:cNvSpPr>
+            <a:spLocks noGrp="1"/>
+          </p:cNvSpPr>
+          <p:nvPr>
+            <p:ph type="body" idx="1"/>
+          </p:nvPr>
+        </p:nvSpPr>
+        <p:spPr/>
+        <p:txBody>
+          <a:bodyPr/>
+          <a:lstStyle/>
+          <a:p/>
+        </p:txBody>
+      </p:sp>
+      <p:sp>
+        <p:nvSpPr>
+          <p:cNvPr id="4" name="Slide Number Placeholder 3"/>
+          <p:cNvSpPr>
+            <a:spLocks noGrp="1"/>
+          </p:cNvSpPr>
+          <p:nvPr>
+            <p:ph type="sldNum" idx="12"/>
+          </p:nvPr>
+        </p:nvSpPr>
+        <p:spPr/>
+      </p:sp>
+    </p:spTree>
+  </p:cSld>
+  <p:clrMapOvr>
+    <a:masterClrMapping/>
+  </p:clrMapOvr>
+</p:notes>
+</file>
+
+<file path=ppt/notesSlides/notesSlide66.xml><?xml version="1.0" encoding="utf-8"?>
 <p:notes xmlns:a="http://schemas.openxmlformats.org/drawingml/2006/main" xmlns:p="http://schemas.openxmlformats.org/presentationml/2006/main" xmlns:r="http://schemas.openxmlformats.org/officeDocument/2006/relationships">
   <p:cSld>
     <p:spTree>
@@ -5569,7 +6288,7 @@
                 <a:ea typeface="Play"/>
                 <a:cs typeface="Play"/>
               </a:rPr>
-              <a:t>Автоматическая вёрстка презентаций: пилот и масштаб</a:t>
+              <a:t>Автоматическая вёрстка презентаций: инициатива запуска</a:t>
             </a:r>
           </a:p>
         </p:txBody>
@@ -5636,21 +6355,21 @@
                 <a:ea typeface="Play"/>
                 <a:cs typeface="Play"/>
               </a:rPr>
-              <a:t>Текущие трудности в сборке презентаций</a:t>
+              <a:t>Контекст и возможность: ручная сборка 42 колод</a:t>
             </a:r>
           </a:p>
         </p:txBody>
       </p:sp>
       <p:sp>
         <p:nvSpPr>
-          <p:cNvPr id="3" name="body_left"/>
+          <p:cNvPr id="3" name="body"/>
           <p:cNvSpPr txBox="1"/>
           <p:nvPr/>
         </p:nvSpPr>
         <p:spPr>
           <a:xfrm>
-            <a:off x="274320" y="1383652"/>
-            <a:ext cx="4035247" cy="2763396"/>
+            <a:off x="274320" y="1394994"/>
+            <a:ext cx="8344814" cy="398780"/>
           </a:xfrm>
           <a:prstGeom prst="rect">
             <a:avLst/>
@@ -5685,17 +6404,87 @@
                 <a:ea typeface="Play"/>
                 <a:cs typeface="Play"/>
               </a:rPr>
-              <a:t>• 42 колоды, 186 мин на одну 12-слайдовую презентацию</a:t>
+              <a:t>Средний срок ожидания в очереди – 6 рабочих дней</a:t>
             </a:r>
           </a:p>
+        </p:txBody>
+      </p:sp>
+      <p:sp>
+        <p:nvSpPr>
+          <p:cNvPr id="4" name="stat_0:bar"/>
+          <p:cNvSpPr/>
+          <p:nvPr/>
+        </p:nvSpPr>
+        <p:spPr>
+          <a:xfrm>
+            <a:off x="274320" y="2021231"/>
+            <a:ext cx="50800" cy="998728"/>
+          </a:xfrm>
+          <a:prstGeom prst="rect">
+            <a:avLst/>
+          </a:prstGeom>
+          <a:solidFill>
+            <a:srgbClr val="0077FF"/>
+          </a:solidFill>
+          <a:ln>
+            <a:noFill/>
+          </a:ln>
+          <a:effectLst/>
+        </p:spPr>
+        <p:style>
+          <a:lnRef idx="1">
+            <a:schemeClr val="accent1"/>
+          </a:lnRef>
+          <a:fillRef idx="3">
+            <a:schemeClr val="accent1"/>
+          </a:fillRef>
+          <a:effectRef idx="2">
+            <a:schemeClr val="accent1"/>
+          </a:effectRef>
+          <a:fontRef idx="minor">
+            <a:schemeClr val="lt1"/>
+          </a:fontRef>
+        </p:style>
+        <p:txBody>
+          <a:bodyPr rtlCol="0" anchor="ctr"/>
+          <a:lstStyle/>
           <a:p>
-            <a:pPr algn="l">
-              <a:spcAft>
-                <a:spcPts val="300"/>
-              </a:spcAft>
-              <a:defRPr sz="1800">
-                <a:solidFill>
-                  <a:srgbClr val="000000"/>
+            <a:pPr algn="ctr"/>
+          </a:p>
+        </p:txBody>
+      </p:sp>
+      <p:sp>
+        <p:nvSpPr>
+          <p:cNvPr id="5" name="stat_0"/>
+          <p:cNvSpPr txBox="1"/>
+          <p:nvPr/>
+        </p:nvSpPr>
+        <p:spPr>
+          <a:xfrm>
+            <a:off x="452119" y="1948079"/>
+            <a:ext cx="3827710" cy="1071880"/>
+          </a:xfrm>
+          <a:prstGeom prst="rect">
+            <a:avLst/>
+          </a:prstGeom>
+          <a:noFill/>
+        </p:spPr>
+        <p:txBody>
+          <a:bodyPr wrap="square" lIns="76200" rIns="76200" tIns="0" bIns="0">
+            <a:spAutoFit/>
+          </a:bodyPr>
+          <a:lstStyle/>
+          <a:p>
+            <a:pPr>
+              <a:lnSpc>
+                <a:spcPct val="100000"/>
+              </a:lnSpc>
+              <a:spcAft>
+                <a:spcPts val="200"/>
+              </a:spcAft>
+              <a:defRPr sz="3200" b="1">
+                <a:solidFill>
+                  <a:srgbClr val="0077FF"/>
                 </a:solidFill>
                 <a:latin typeface="Play"/>
                 <a:ea typeface="Play"/>
@@ -5703,23 +6492,23 @@
               </a:defRPr>
             </a:pPr>
             <a:r>
-              <a:rPr sz="1800">
-                <a:solidFill>
-                  <a:srgbClr val="000000"/>
+              <a:rPr sz="3200" b="1">
+                <a:solidFill>
+                  <a:srgbClr val="0077FF"/>
                 </a:solidFill>
                 <a:latin typeface="Play"/>
                 <a:ea typeface="Play"/>
                 <a:cs typeface="Play"/>
               </a:rPr>
-              <a:t>• 74 мин на правки после ревью</a:t>
+              <a:t>186 мин</a:t>
             </a:r>
           </a:p>
           <a:p>
-            <a:pPr algn="l">
+            <a:pPr>
               <a:spcAft>
                 <a:spcPts val="300"/>
               </a:spcAft>
-              <a:defRPr sz="1800">
+              <a:defRPr sz="1400" b="0">
                 <a:solidFill>
                   <a:srgbClr val="000000"/>
                 </a:solidFill>
@@ -5729,7 +6518,7 @@
               </a:defRPr>
             </a:pPr>
             <a:r>
-              <a:rPr sz="1800">
+              <a:rPr sz="1400" b="0">
                 <a:solidFill>
                   <a:srgbClr val="000000"/>
                 </a:solidFill>
@@ -5737,21 +6526,528 @@
                 <a:ea typeface="Play"/>
                 <a:cs typeface="Play"/>
               </a:rPr>
-              <a:t>• 19 колод нарушили фирменный стиль</a:t>
+              <a:t>42 колоды за квартал: 186 мин на сборку 12-слайдной презентации</a:t>
             </a:r>
           </a:p>
         </p:txBody>
       </p:sp>
       <p:sp>
         <p:nvSpPr>
-          <p:cNvPr id="4" name="body_right"/>
+          <p:cNvPr id="6" name="stat_1:bar"/>
+          <p:cNvSpPr/>
+          <p:nvPr/>
+        </p:nvSpPr>
+        <p:spPr>
+          <a:xfrm>
+            <a:off x="4613623" y="2021231"/>
+            <a:ext cx="50800" cy="998728"/>
+          </a:xfrm>
+          <a:prstGeom prst="rect">
+            <a:avLst/>
+          </a:prstGeom>
+          <a:solidFill>
+            <a:srgbClr val="0077FF"/>
+          </a:solidFill>
+          <a:ln>
+            <a:noFill/>
+          </a:ln>
+          <a:effectLst/>
+        </p:spPr>
+        <p:style>
+          <a:lnRef idx="1">
+            <a:schemeClr val="accent1"/>
+          </a:lnRef>
+          <a:fillRef idx="3">
+            <a:schemeClr val="accent1"/>
+          </a:fillRef>
+          <a:effectRef idx="2">
+            <a:schemeClr val="accent1"/>
+          </a:effectRef>
+          <a:fontRef idx="minor">
+            <a:schemeClr val="lt1"/>
+          </a:fontRef>
+        </p:style>
+        <p:txBody>
+          <a:bodyPr rtlCol="0" anchor="ctr"/>
+          <a:lstStyle/>
+          <a:p>
+            <a:pPr algn="ctr"/>
+          </a:p>
+        </p:txBody>
+      </p:sp>
+      <p:sp>
+        <p:nvSpPr>
+          <p:cNvPr id="7" name="stat_1"/>
           <p:cNvSpPr txBox="1"/>
           <p:nvPr/>
         </p:nvSpPr>
         <p:spPr>
           <a:xfrm>
-            <a:off x="4583887" y="1383652"/>
-            <a:ext cx="4035247" cy="2763396"/>
+            <a:off x="4791423" y="1948079"/>
+            <a:ext cx="3827710" cy="1071880"/>
+          </a:xfrm>
+          <a:prstGeom prst="rect">
+            <a:avLst/>
+          </a:prstGeom>
+          <a:noFill/>
+        </p:spPr>
+        <p:txBody>
+          <a:bodyPr wrap="square" lIns="76200" rIns="76200" tIns="0" bIns="0">
+            <a:spAutoFit/>
+          </a:bodyPr>
+          <a:lstStyle/>
+          <a:p>
+            <a:pPr>
+              <a:lnSpc>
+                <a:spcPct val="100000"/>
+              </a:lnSpc>
+              <a:spcAft>
+                <a:spcPts val="200"/>
+              </a:spcAft>
+              <a:defRPr sz="3200" b="1">
+                <a:solidFill>
+                  <a:srgbClr val="0077FF"/>
+                </a:solidFill>
+                <a:latin typeface="Play"/>
+                <a:ea typeface="Play"/>
+                <a:cs typeface="Play"/>
+              </a:defRPr>
+            </a:pPr>
+            <a:r>
+              <a:rPr sz="3200" b="1">
+                <a:solidFill>
+                  <a:srgbClr val="0077FF"/>
+                </a:solidFill>
+                <a:latin typeface="Play"/>
+                <a:ea typeface="Play"/>
+                <a:cs typeface="Play"/>
+              </a:rPr>
+              <a:t>74 мин</a:t>
+            </a:r>
+          </a:p>
+          <a:p>
+            <a:pPr>
+              <a:spcAft>
+                <a:spcPts val="300"/>
+              </a:spcAft>
+              <a:defRPr sz="1400" b="0">
+                <a:solidFill>
+                  <a:srgbClr val="000000"/>
+                </a:solidFill>
+                <a:latin typeface="Play"/>
+                <a:ea typeface="Play"/>
+                <a:cs typeface="Play"/>
+              </a:defRPr>
+            </a:pPr>
+            <a:r>
+              <a:rPr sz="1400" b="0">
+                <a:solidFill>
+                  <a:srgbClr val="000000"/>
+                </a:solidFill>
+                <a:latin typeface="Play"/>
+                <a:ea typeface="Play"/>
+                <a:cs typeface="Play"/>
+              </a:rPr>
+              <a:t>74 мин на правки после ревью дизайнера</a:t>
+            </a:r>
+          </a:p>
+        </p:txBody>
+      </p:sp>
+      <p:sp>
+        <p:nvSpPr>
+          <p:cNvPr id="8" name="stat_2:bar"/>
+          <p:cNvSpPr/>
+          <p:nvPr/>
+        </p:nvSpPr>
+        <p:spPr>
+          <a:xfrm>
+            <a:off x="274320" y="3361766"/>
+            <a:ext cx="50800" cy="998728"/>
+          </a:xfrm>
+          <a:prstGeom prst="rect">
+            <a:avLst/>
+          </a:prstGeom>
+          <a:solidFill>
+            <a:srgbClr val="0077FF"/>
+          </a:solidFill>
+          <a:ln>
+            <a:noFill/>
+          </a:ln>
+          <a:effectLst/>
+        </p:spPr>
+        <p:style>
+          <a:lnRef idx="1">
+            <a:schemeClr val="accent1"/>
+          </a:lnRef>
+          <a:fillRef idx="3">
+            <a:schemeClr val="accent1"/>
+          </a:fillRef>
+          <a:effectRef idx="2">
+            <a:schemeClr val="accent1"/>
+          </a:effectRef>
+          <a:fontRef idx="minor">
+            <a:schemeClr val="lt1"/>
+          </a:fontRef>
+        </p:style>
+        <p:txBody>
+          <a:bodyPr rtlCol="0" anchor="ctr"/>
+          <a:lstStyle/>
+          <a:p>
+            <a:pPr algn="ctr"/>
+          </a:p>
+        </p:txBody>
+      </p:sp>
+      <p:sp>
+        <p:nvSpPr>
+          <p:cNvPr id="9" name="stat_2"/>
+          <p:cNvSpPr txBox="1"/>
+          <p:nvPr/>
+        </p:nvSpPr>
+        <p:spPr>
+          <a:xfrm>
+            <a:off x="452119" y="3288614"/>
+            <a:ext cx="3827710" cy="1071880"/>
+          </a:xfrm>
+          <a:prstGeom prst="rect">
+            <a:avLst/>
+          </a:prstGeom>
+          <a:noFill/>
+        </p:spPr>
+        <p:txBody>
+          <a:bodyPr wrap="square" lIns="76200" rIns="76200" tIns="0" bIns="0">
+            <a:spAutoFit/>
+          </a:bodyPr>
+          <a:lstStyle/>
+          <a:p>
+            <a:pPr>
+              <a:lnSpc>
+                <a:spcPct val="100000"/>
+              </a:lnSpc>
+              <a:spcAft>
+                <a:spcPts val="200"/>
+              </a:spcAft>
+              <a:defRPr sz="3200" b="1">
+                <a:solidFill>
+                  <a:srgbClr val="0077FF"/>
+                </a:solidFill>
+                <a:latin typeface="Play"/>
+                <a:ea typeface="Play"/>
+                <a:cs typeface="Play"/>
+              </a:defRPr>
+            </a:pPr>
+            <a:r>
+              <a:rPr sz="3200" b="1">
+                <a:solidFill>
+                  <a:srgbClr val="0077FF"/>
+                </a:solidFill>
+                <a:latin typeface="Play"/>
+                <a:ea typeface="Play"/>
+                <a:cs typeface="Play"/>
+              </a:rPr>
+              <a:t>19</a:t>
+            </a:r>
+          </a:p>
+          <a:p>
+            <a:pPr>
+              <a:spcAft>
+                <a:spcPts val="300"/>
+              </a:spcAft>
+              <a:defRPr sz="1400" b="0">
+                <a:solidFill>
+                  <a:srgbClr val="000000"/>
+                </a:solidFill>
+                <a:latin typeface="Play"/>
+                <a:ea typeface="Play"/>
+                <a:cs typeface="Play"/>
+              </a:defRPr>
+            </a:pPr>
+            <a:r>
+              <a:rPr sz="1400" b="0">
+                <a:solidFill>
+                  <a:srgbClr val="000000"/>
+                </a:solidFill>
+                <a:latin typeface="Play"/>
+                <a:ea typeface="Play"/>
+                <a:cs typeface="Play"/>
+              </a:rPr>
+              <a:t>19 колод нарушили фирменный стиль (неправильные гарнитуры, цвета)</a:t>
+            </a:r>
+          </a:p>
+        </p:txBody>
+      </p:sp>
+      <p:sp>
+        <p:nvSpPr>
+          <p:cNvPr id="10" name="stat_3:bar"/>
+          <p:cNvSpPr/>
+          <p:nvPr/>
+        </p:nvSpPr>
+        <p:spPr>
+          <a:xfrm>
+            <a:off x="4613623" y="3361766"/>
+            <a:ext cx="50800" cy="998728"/>
+          </a:xfrm>
+          <a:prstGeom prst="rect">
+            <a:avLst/>
+          </a:prstGeom>
+          <a:solidFill>
+            <a:srgbClr val="0077FF"/>
+          </a:solidFill>
+          <a:ln>
+            <a:noFill/>
+          </a:ln>
+          <a:effectLst/>
+        </p:spPr>
+        <p:style>
+          <a:lnRef idx="1">
+            <a:schemeClr val="accent1"/>
+          </a:lnRef>
+          <a:fillRef idx="3">
+            <a:schemeClr val="accent1"/>
+          </a:fillRef>
+          <a:effectRef idx="2">
+            <a:schemeClr val="accent1"/>
+          </a:effectRef>
+          <a:fontRef idx="minor">
+            <a:schemeClr val="lt1"/>
+          </a:fontRef>
+        </p:style>
+        <p:txBody>
+          <a:bodyPr rtlCol="0" anchor="ctr"/>
+          <a:lstStyle/>
+          <a:p>
+            <a:pPr algn="ctr"/>
+          </a:p>
+        </p:txBody>
+      </p:sp>
+      <p:sp>
+        <p:nvSpPr>
+          <p:cNvPr id="11" name="stat_3"/>
+          <p:cNvSpPr txBox="1"/>
+          <p:nvPr/>
+        </p:nvSpPr>
+        <p:spPr>
+          <a:xfrm>
+            <a:off x="4791423" y="3288614"/>
+            <a:ext cx="3827710" cy="1071880"/>
+          </a:xfrm>
+          <a:prstGeom prst="rect">
+            <a:avLst/>
+          </a:prstGeom>
+          <a:noFill/>
+        </p:spPr>
+        <p:txBody>
+          <a:bodyPr wrap="square" lIns="76200" rIns="76200" tIns="0" bIns="0">
+            <a:spAutoFit/>
+          </a:bodyPr>
+          <a:lstStyle/>
+          <a:p>
+            <a:pPr>
+              <a:lnSpc>
+                <a:spcPct val="100000"/>
+              </a:lnSpc>
+              <a:spcAft>
+                <a:spcPts val="200"/>
+              </a:spcAft>
+              <a:defRPr sz="3200" b="1">
+                <a:solidFill>
+                  <a:srgbClr val="0077FF"/>
+                </a:solidFill>
+                <a:latin typeface="Play"/>
+                <a:ea typeface="Play"/>
+                <a:cs typeface="Play"/>
+              </a:defRPr>
+            </a:pPr>
+            <a:r>
+              <a:rPr sz="3200" b="1">
+                <a:solidFill>
+                  <a:srgbClr val="0077FF"/>
+                </a:solidFill>
+                <a:latin typeface="Play"/>
+                <a:ea typeface="Play"/>
+                <a:cs typeface="Play"/>
+              </a:rPr>
+              <a:t>11</a:t>
+            </a:r>
+          </a:p>
+          <a:p>
+            <a:pPr>
+              <a:spcAft>
+                <a:spcPts val="300"/>
+              </a:spcAft>
+              <a:defRPr sz="1400" b="0">
+                <a:solidFill>
+                  <a:srgbClr val="000000"/>
+                </a:solidFill>
+                <a:latin typeface="Play"/>
+                <a:ea typeface="Play"/>
+                <a:cs typeface="Play"/>
+              </a:defRPr>
+            </a:pPr>
+            <a:r>
+              <a:rPr sz="1400" b="0">
+                <a:solidFill>
+                  <a:srgbClr val="000000"/>
+                </a:solidFill>
+                <a:latin typeface="Play"/>
+                <a:ea typeface="Play"/>
+                <a:cs typeface="Play"/>
+              </a:rPr>
+              <a:t>Дизайнеры закрывают 11 запросов из 27 в неделю</a:t>
+            </a:r>
+          </a:p>
+        </p:txBody>
+      </p:sp>
+    </p:spTree>
+  </p:cSld>
+  <p:clrMapOvr>
+    <a:masterClrMapping/>
+  </p:clrMapOvr>
+</p:sld>
+</file>
+
+<file path=ppt/slides/slide57.xml><?xml version="1.0" encoding="utf-8"?>
+<p:sld xmlns:a="http://schemas.openxmlformats.org/drawingml/2006/main" xmlns:p="http://schemas.openxmlformats.org/presentationml/2006/main" xmlns:r="http://schemas.openxmlformats.org/officeDocument/2006/relationships">
+  <p:cSld>
+    <p:spTree>
+      <p:nvGrpSpPr>
+        <p:cNvPr id="1" name=""/>
+        <p:cNvGrpSpPr/>
+        <p:nvPr/>
+      </p:nvGrpSpPr>
+      <p:grpSpPr/>
+      <p:sp>
+        <p:nvSpPr>
+          <p:cNvPr id="532" name="Google Shape;532;p53"/>
+          <p:cNvSpPr/>
+          <p:nvPr/>
+        </p:nvSpPr>
+        <p:spPr>
+          <a:xfrm>
+            <a:off x="303214" y="1022533"/>
+            <a:ext cx="8451939" cy="1433588"/>
+          </a:xfrm>
+          <a:prstGeom prst="rect">
+            <a:avLst/>
+          </a:prstGeom>
+          <a:noFill/>
+          <a:ln>
+            <a:noFill/>
+          </a:ln>
+        </p:spPr>
+        <p:txBody>
+          <a:bodyPr anchorCtr="0" anchor="ctr" bIns="91425" lIns="91425" spcFirstLastPara="1" rIns="91425" wrap="square" tIns="91425">
+            <a:noAutofit/>
+          </a:bodyPr>
+          <a:lstStyle/>
+          <a:p>
+            <a:pPr indent="0" lvl="0" marL="0" rtl="0" algn="l">
+              <a:spcBef>
+                <a:spcPts val="0"/>
+              </a:spcBef>
+              <a:spcAft>
+                <a:spcPts val="0"/>
+              </a:spcAft>
+              <a:buNone/>
+            </a:pPr>
+            <a:r>
+              <a:t/>
+            </a:r>
+            <a:endParaRPr/>
+          </a:p>
+        </p:txBody>
+      </p:sp>
+      <p:sp>
+        <p:nvSpPr>
+          <p:cNvPr id="553" name="Google Shape;553;p53"/>
+          <p:cNvSpPr/>
+          <p:nvPr/>
+        </p:nvSpPr>
+        <p:spPr>
+          <a:xfrm>
+            <a:off x="276488" y="2955549"/>
+            <a:ext cx="8451939" cy="1433588"/>
+          </a:xfrm>
+          <a:prstGeom prst="rect">
+            <a:avLst/>
+          </a:prstGeom>
+          <a:noFill/>
+          <a:ln>
+            <a:noFill/>
+          </a:ln>
+        </p:spPr>
+        <p:txBody>
+          <a:bodyPr anchorCtr="0" anchor="ctr" bIns="91425" lIns="91425" spcFirstLastPara="1" rIns="91425" wrap="square" tIns="91425">
+            <a:noAutofit/>
+          </a:bodyPr>
+          <a:lstStyle/>
+          <a:p>
+            <a:pPr indent="0" lvl="0" marL="0" rtl="0" algn="l">
+              <a:spcBef>
+                <a:spcPts val="0"/>
+              </a:spcBef>
+              <a:spcAft>
+                <a:spcPts val="0"/>
+              </a:spcAft>
+              <a:buNone/>
+            </a:pPr>
+            <a:r>
+              <a:t/>
+            </a:r>
+            <a:endParaRPr/>
+          </a:p>
+        </p:txBody>
+      </p:sp>
+      <p:sp>
+        <p:nvSpPr>
+          <p:cNvPr id="554" name="Google Shape;554;p53"/>
+          <p:cNvSpPr/>
+          <p:nvPr/>
+        </p:nvSpPr>
+        <p:spPr>
+          <a:xfrm>
+            <a:off x="303214" y="2797849"/>
+            <a:ext cx="8451939" cy="1433588"/>
+          </a:xfrm>
+          <a:prstGeom prst="rect">
+            <a:avLst/>
+          </a:prstGeom>
+          <a:noFill/>
+          <a:ln>
+            <a:noFill/>
+          </a:ln>
+        </p:spPr>
+        <p:txBody>
+          <a:bodyPr anchorCtr="0" anchor="ctr" bIns="91425" lIns="91425" spcFirstLastPara="1" rIns="91425" wrap="square" tIns="91425">
+            <a:noAutofit/>
+          </a:bodyPr>
+          <a:lstStyle/>
+          <a:p>
+            <a:pPr indent="0" lvl="0" marL="0" rtl="0" algn="l">
+              <a:spcBef>
+                <a:spcPts val="0"/>
+              </a:spcBef>
+              <a:spcAft>
+                <a:spcPts val="0"/>
+              </a:spcAft>
+              <a:buNone/>
+            </a:pPr>
+            <a:r>
+              <a:t/>
+            </a:r>
+            <a:endParaRPr/>
+          </a:p>
+        </p:txBody>
+      </p:sp>
+      <p:sp>
+        <p:nvSpPr>
+          <p:cNvPr id="555" name="title"/>
+          <p:cNvSpPr txBox="1"/>
+          <p:nvPr/>
+        </p:nvSpPr>
+        <p:spPr>
+          <a:xfrm>
+            <a:off x="274320" y="282943"/>
+            <a:ext cx="6792986" cy="932027"/>
           </a:xfrm>
           <a:prstGeom prst="rect">
             <a:avLst/>
@@ -5768,7 +7064,7 @@
               <a:spcAft>
                 <a:spcPts val="300"/>
               </a:spcAft>
-              <a:defRPr sz="1800">
+              <a:defRPr sz="2438">
                 <a:solidFill>
                   <a:srgbClr val="000000"/>
                 </a:solidFill>
@@ -5778,7 +7074,7 @@
               </a:defRPr>
             </a:pPr>
             <a:r>
-              <a:rPr sz="1800">
+              <a:rPr sz="2438">
                 <a:solidFill>
                   <a:srgbClr val="000000"/>
                 </a:solidFill>
@@ -5786,37 +7082,29 @@
                 <a:ea typeface="Play"/>
                 <a:cs typeface="Play"/>
               </a:rPr>
-              <a:t>• Дизайн-отдел закрывает 11 запросов/неделю из 27</a:t>
-            </a:r>
-          </a:p>
-          <a:p>
-            <a:pPr algn="l">
-              <a:spcAft>
-                <a:spcPts val="300"/>
-              </a:spcAft>
-              <a:defRPr sz="1800">
-                <a:solidFill>
-                  <a:srgbClr val="000000"/>
-                </a:solidFill>
-                <a:latin typeface="Play"/>
-                <a:ea typeface="Play"/>
-                <a:cs typeface="Play"/>
-              </a:defRPr>
-            </a:pPr>
-            <a:r>
-              <a:rPr sz="1800">
-                <a:solidFill>
-                  <a:srgbClr val="000000"/>
-                </a:solidFill>
-                <a:latin typeface="Play"/>
-                <a:ea typeface="Play"/>
-                <a:cs typeface="Play"/>
-              </a:rPr>
-              <a:t>• Средний срок ожидания 6 рабочих дней</a:t>
+              <a:t>Нагрузка дизайнеров: 27 запросов, 11 закрыто</a:t>
             </a:r>
           </a:p>
         </p:txBody>
       </p:sp>
+      <p:graphicFrame>
+        <p:nvGraphicFramePr>
+          <p:cNvPr id="556" name="Chart 555"/>
+          <p:cNvGraphicFramePr>
+            <a:graphicFrameLocks noGrp="1"/>
+          </p:cNvGraphicFramePr>
+          <p:nvPr/>
+        </p:nvGraphicFramePr>
+        <p:xfrm>
+          <a:off x="4583887" y="1394994"/>
+          <a:ext cx="4035247" cy="3028415"/>
+        </p:xfrm>
+        <a:graphic>
+          <a:graphicData uri="http://schemas.openxmlformats.org/drawingml/2006/chart">
+            <c:chart xmlns:c="http://schemas.openxmlformats.org/drawingml/2006/chart" r:id="rId2"/>
+          </a:graphicData>
+        </a:graphic>
+      </p:graphicFrame>
     </p:spTree>
   </p:cSld>
   <p:clrMapOvr>
@@ -5825,7 +7113,2064 @@
 </p:sld>
 </file>
 
-<file path=ppt/slides/slide57.xml><?xml version="1.0" encoding="utf-8"?>
+<file path=ppt/slides/slide58.xml><?xml version="1.0" encoding="utf-8"?>
+<p:sld xmlns:a="http://schemas.openxmlformats.org/drawingml/2006/main" xmlns:p="http://schemas.openxmlformats.org/presentationml/2006/main" xmlns:r="http://schemas.openxmlformats.org/officeDocument/2006/relationships">
+  <p:cSld>
+    <p:spTree>
+      <p:nvGrpSpPr>
+        <p:cNvPr id="1" name=""/>
+        <p:cNvGrpSpPr/>
+        <p:nvPr/>
+      </p:nvGrpSpPr>
+      <p:grpSpPr/>
+      <p:sp>
+        <p:nvSpPr>
+          <p:cNvPr id="2" name="title"/>
+          <p:cNvSpPr txBox="1"/>
+          <p:nvPr/>
+        </p:nvSpPr>
+        <p:spPr>
+          <a:xfrm>
+            <a:off x="274320" y="282943"/>
+            <a:ext cx="6792986" cy="932027"/>
+          </a:xfrm>
+          <a:prstGeom prst="rect">
+            <a:avLst/>
+          </a:prstGeom>
+          <a:noFill/>
+        </p:spPr>
+        <p:txBody>
+          <a:bodyPr wrap="square" lIns="76200" rIns="76200" tIns="50800" bIns="50800">
+            <a:spAutoFit/>
+          </a:bodyPr>
+          <a:lstStyle/>
+          <a:p>
+            <a:pPr algn="l">
+              <a:spcAft>
+                <a:spcPts val="300"/>
+              </a:spcAft>
+              <a:defRPr sz="2438">
+                <a:solidFill>
+                  <a:srgbClr val="000000"/>
+                </a:solidFill>
+                <a:latin typeface="Play"/>
+                <a:ea typeface="Play"/>
+                <a:cs typeface="Play"/>
+              </a:defRPr>
+            </a:pPr>
+            <a:r>
+              <a:rPr sz="2438">
+                <a:solidFill>
+                  <a:srgbClr val="000000"/>
+                </a:solidFill>
+                <a:latin typeface="Play"/>
+                <a:ea typeface="Play"/>
+                <a:cs typeface="Play"/>
+              </a:rPr>
+              <a:t>Предложение: сервис принимает шаблон и материалы</a:t>
+            </a:r>
+          </a:p>
+        </p:txBody>
+      </p:sp>
+      <p:sp>
+        <p:nvSpPr>
+          <p:cNvPr id="3" name="body"/>
+          <p:cNvSpPr txBox="1"/>
+          <p:nvPr/>
+        </p:nvSpPr>
+        <p:spPr>
+          <a:xfrm>
+            <a:off x="274320" y="1669682"/>
+            <a:ext cx="4519476" cy="2479040"/>
+          </a:xfrm>
+          <a:prstGeom prst="rect">
+            <a:avLst/>
+          </a:prstGeom>
+          <a:noFill/>
+        </p:spPr>
+        <p:txBody>
+          <a:bodyPr wrap="square" lIns="76200" rIns="76200" tIns="50800" bIns="50800">
+            <a:spAutoFit/>
+          </a:bodyPr>
+          <a:lstStyle/>
+          <a:p>
+            <a:pPr algn="l">
+              <a:spcAft>
+                <a:spcPts val="300"/>
+              </a:spcAft>
+              <a:defRPr sz="1600" b="1">
+                <a:solidFill>
+                  <a:srgbClr val="000000"/>
+                </a:solidFill>
+                <a:latin typeface="Play"/>
+                <a:ea typeface="Play"/>
+                <a:cs typeface="Play"/>
+              </a:defRPr>
+            </a:pPr>
+            <a:r>
+              <a:rPr sz="1600" b="1">
+                <a:solidFill>
+                  <a:srgbClr val="000000"/>
+                </a:solidFill>
+                <a:latin typeface="Play"/>
+                <a:ea typeface="Play"/>
+                <a:cs typeface="Play"/>
+              </a:rPr>
+              <a:t>• Сервис принимает pptx шаблон и материалы (документы, таблицы, заметки)</a:t>
+            </a:r>
+          </a:p>
+          <a:p>
+            <a:pPr algn="l">
+              <a:spcAft>
+                <a:spcPts val="300"/>
+              </a:spcAft>
+              <a:defRPr sz="1600" b="1">
+                <a:solidFill>
+                  <a:srgbClr val="000000"/>
+                </a:solidFill>
+                <a:latin typeface="Play"/>
+                <a:ea typeface="Play"/>
+                <a:cs typeface="Play"/>
+              </a:defRPr>
+            </a:pPr>
+            <a:r>
+              <a:rPr sz="1600" b="1">
+                <a:solidFill>
+                  <a:srgbClr val="000000"/>
+                </a:solidFill>
+                <a:latin typeface="Play"/>
+                <a:ea typeface="Play"/>
+                <a:cs typeface="Play"/>
+              </a:rPr>
+              <a:t>• Автоматически преобразует шаблон в дизайн-систему (гарнитуры, шкала, палитра)</a:t>
+            </a:r>
+          </a:p>
+          <a:p>
+            <a:pPr algn="l">
+              <a:spcAft>
+                <a:spcPts val="300"/>
+              </a:spcAft>
+              <a:defRPr sz="1600" b="1">
+                <a:solidFill>
+                  <a:srgbClr val="000000"/>
+                </a:solidFill>
+                <a:latin typeface="Play"/>
+                <a:ea typeface="Play"/>
+                <a:cs typeface="Play"/>
+              </a:defRPr>
+            </a:pPr>
+            <a:r>
+              <a:rPr sz="1600" b="1">
+                <a:solidFill>
+                  <a:srgbClr val="000000"/>
+                </a:solidFill>
+                <a:latin typeface="Play"/>
+                <a:ea typeface="Play"/>
+                <a:cs typeface="Play"/>
+              </a:rPr>
+              <a:t>• Генерирует план колоды и вёрстку по ролям страниц</a:t>
+            </a:r>
+          </a:p>
+          <a:p>
+            <a:pPr algn="l">
+              <a:spcAft>
+                <a:spcPts val="300"/>
+              </a:spcAft>
+              <a:defRPr sz="1600" b="1">
+                <a:solidFill>
+                  <a:srgbClr val="000000"/>
+                </a:solidFill>
+                <a:latin typeface="Play"/>
+                <a:ea typeface="Play"/>
+                <a:cs typeface="Play"/>
+              </a:defRPr>
+            </a:pPr>
+            <a:r>
+              <a:rPr sz="1600" b="1">
+                <a:solidFill>
+                  <a:srgbClr val="000000"/>
+                </a:solidFill>
+                <a:latin typeface="Play"/>
+                <a:ea typeface="Play"/>
+                <a:cs typeface="Play"/>
+              </a:rPr>
+              <a:t>• Экспорт в pptx, pdf, html с редактируемыми слайдами</a:t>
+            </a:r>
+          </a:p>
+        </p:txBody>
+      </p:sp>
+      <p:grpSp>
+        <p:nvGrpSpPr>
+          <p:cNvPr id="4" name="illustration:builtin-presentation"/>
+          <p:cNvGrpSpPr/>
+          <p:nvPr/>
+        </p:nvGrpSpPr>
+        <p:grpSpPr>
+          <a:xfrm>
+            <a:off x="5725054" y="1790631"/>
+            <a:ext cx="2237140" cy="2237140"/>
+            <a:chOff x="5725054" y="1790631"/>
+            <a:chExt cx="2237140" cy="2237140"/>
+          </a:xfrm>
+        </p:grpSpPr>
+        <p:sp>
+          <p:nvSpPr>
+            <p:cNvPr id="5" name="Oval 4"/>
+            <p:cNvSpPr/>
+            <p:nvPr/>
+          </p:nvSpPr>
+          <p:spPr>
+            <a:xfrm>
+              <a:off x="5725054" y="1790631"/>
+              <a:ext cx="2237140" cy="2237140"/>
+            </a:xfrm>
+            <a:prstGeom prst="ellipse">
+              <a:avLst/>
+            </a:prstGeom>
+            <a:solidFill>
+              <a:srgbClr val="D6E9FF"/>
+            </a:solidFill>
+            <a:ln>
+              <a:noFill/>
+            </a:ln>
+            <a:effectLst/>
+          </p:spPr>
+          <p:style>
+            <a:lnRef idx="1">
+              <a:schemeClr val="accent1"/>
+            </a:lnRef>
+            <a:fillRef idx="3">
+              <a:schemeClr val="accent1"/>
+            </a:fillRef>
+            <a:effectRef idx="2">
+              <a:schemeClr val="accent1"/>
+            </a:effectRef>
+            <a:fontRef idx="minor">
+              <a:schemeClr val="lt1"/>
+            </a:fontRef>
+          </p:style>
+          <p:txBody>
+            <a:bodyPr rtlCol="0" anchor="ctr"/>
+            <a:lstStyle/>
+            <a:p>
+              <a:pPr algn="ctr"/>
+            </a:p>
+          </p:txBody>
+        </p:sp>
+        <p:sp>
+          <p:nvSpPr>
+            <p:cNvPr id="6" name="Rounded Rectangle 5"/>
+            <p:cNvSpPr/>
+            <p:nvPr/>
+          </p:nvSpPr>
+          <p:spPr>
+            <a:xfrm>
+              <a:off x="5813829" y="2092467"/>
+              <a:ext cx="2059589" cy="1331631"/>
+            </a:xfrm>
+            <a:prstGeom prst="roundRect">
+              <a:avLst>
+                <a:gd name="adj" fmla="val 9333"/>
+              </a:avLst>
+            </a:prstGeom>
+            <a:solidFill>
+              <a:srgbClr val="FFFFFF"/>
+            </a:solidFill>
+            <a:ln>
+              <a:noFill/>
+            </a:ln>
+            <a:effectLst/>
+          </p:spPr>
+          <p:style>
+            <a:lnRef idx="1">
+              <a:schemeClr val="accent1"/>
+            </a:lnRef>
+            <a:fillRef idx="3">
+              <a:schemeClr val="accent1"/>
+            </a:fillRef>
+            <a:effectRef idx="2">
+              <a:schemeClr val="accent1"/>
+            </a:effectRef>
+            <a:fontRef idx="minor">
+              <a:schemeClr val="lt1"/>
+            </a:fontRef>
+          </p:style>
+          <p:txBody>
+            <a:bodyPr rtlCol="0" anchor="ctr"/>
+            <a:lstStyle/>
+            <a:p>
+              <a:pPr algn="ctr"/>
+            </a:p>
+          </p:txBody>
+        </p:sp>
+        <p:sp>
+          <p:nvSpPr>
+            <p:cNvPr id="7" name="Rounded Rectangle 6"/>
+            <p:cNvSpPr/>
+            <p:nvPr/>
+          </p:nvSpPr>
+          <p:spPr>
+            <a:xfrm>
+              <a:off x="5813829" y="2092467"/>
+              <a:ext cx="2059589" cy="266326"/>
+            </a:xfrm>
+            <a:prstGeom prst="roundRect">
+              <a:avLst>
+                <a:gd name="adj" fmla="val 46666"/>
+              </a:avLst>
+            </a:prstGeom>
+            <a:solidFill>
+              <a:srgbClr val="0077FF"/>
+            </a:solidFill>
+            <a:ln>
+              <a:noFill/>
+            </a:ln>
+            <a:effectLst/>
+          </p:spPr>
+          <p:style>
+            <a:lnRef idx="1">
+              <a:schemeClr val="accent1"/>
+            </a:lnRef>
+            <a:fillRef idx="3">
+              <a:schemeClr val="accent1"/>
+            </a:fillRef>
+            <a:effectRef idx="2">
+              <a:schemeClr val="accent1"/>
+            </a:effectRef>
+            <a:fontRef idx="minor">
+              <a:schemeClr val="lt1"/>
+            </a:fontRef>
+          </p:style>
+          <p:txBody>
+            <a:bodyPr rtlCol="0" anchor="ctr"/>
+            <a:lstStyle/>
+            <a:p>
+              <a:pPr algn="ctr"/>
+            </a:p>
+          </p:txBody>
+        </p:sp>
+        <p:sp>
+          <p:nvSpPr>
+            <p:cNvPr id="8" name="Rectangle 7"/>
+            <p:cNvSpPr/>
+            <p:nvPr/>
+          </p:nvSpPr>
+          <p:spPr>
+            <a:xfrm>
+              <a:off x="5813829" y="2234508"/>
+              <a:ext cx="2059589" cy="124285"/>
+            </a:xfrm>
+            <a:prstGeom prst="rect">
+              <a:avLst/>
+            </a:prstGeom>
+            <a:solidFill>
+              <a:srgbClr val="0077FF"/>
+            </a:solidFill>
+            <a:ln>
+              <a:noFill/>
+            </a:ln>
+            <a:effectLst/>
+          </p:spPr>
+          <p:style>
+            <a:lnRef idx="1">
+              <a:schemeClr val="accent1"/>
+            </a:lnRef>
+            <a:fillRef idx="3">
+              <a:schemeClr val="accent1"/>
+            </a:fillRef>
+            <a:effectRef idx="2">
+              <a:schemeClr val="accent1"/>
+            </a:effectRef>
+            <a:fontRef idx="minor">
+              <a:schemeClr val="lt1"/>
+            </a:fontRef>
+          </p:style>
+          <p:txBody>
+            <a:bodyPr rtlCol="0" anchor="ctr"/>
+            <a:lstStyle/>
+            <a:p>
+              <a:pPr algn="ctr"/>
+            </a:p>
+          </p:txBody>
+        </p:sp>
+        <p:sp>
+          <p:nvSpPr>
+            <p:cNvPr id="9" name="Rounded Rectangle 8"/>
+            <p:cNvSpPr/>
+            <p:nvPr/>
+          </p:nvSpPr>
+          <p:spPr>
+            <a:xfrm>
+              <a:off x="6026890" y="2536344"/>
+              <a:ext cx="745713" cy="88775"/>
+            </a:xfrm>
+            <a:prstGeom prst="roundRect">
+              <a:avLst>
+                <a:gd name="adj" fmla="val 50000"/>
+              </a:avLst>
+            </a:prstGeom>
+            <a:solidFill>
+              <a:srgbClr val="000000"/>
+            </a:solidFill>
+            <a:ln>
+              <a:noFill/>
+            </a:ln>
+            <a:effectLst/>
+          </p:spPr>
+          <p:style>
+            <a:lnRef idx="1">
+              <a:schemeClr val="accent1"/>
+            </a:lnRef>
+            <a:fillRef idx="3">
+              <a:schemeClr val="accent1"/>
+            </a:fillRef>
+            <a:effectRef idx="2">
+              <a:schemeClr val="accent1"/>
+            </a:effectRef>
+            <a:fontRef idx="minor">
+              <a:schemeClr val="lt1"/>
+            </a:fontRef>
+          </p:style>
+          <p:txBody>
+            <a:bodyPr rtlCol="0" anchor="ctr"/>
+            <a:lstStyle/>
+            <a:p>
+              <a:pPr algn="ctr"/>
+            </a:p>
+          </p:txBody>
+        </p:sp>
+        <p:sp>
+          <p:nvSpPr>
+            <p:cNvPr id="10" name="Rounded Rectangle 9"/>
+            <p:cNvSpPr/>
+            <p:nvPr/>
+          </p:nvSpPr>
+          <p:spPr>
+            <a:xfrm>
+              <a:off x="6026890" y="2713895"/>
+              <a:ext cx="568162" cy="71020"/>
+            </a:xfrm>
+            <a:prstGeom prst="roundRect">
+              <a:avLst>
+                <a:gd name="adj" fmla="val 50000"/>
+              </a:avLst>
+            </a:prstGeom>
+            <a:solidFill>
+              <a:srgbClr val="B2B2B2"/>
+            </a:solidFill>
+            <a:ln>
+              <a:noFill/>
+            </a:ln>
+            <a:effectLst/>
+          </p:spPr>
+          <p:style>
+            <a:lnRef idx="1">
+              <a:schemeClr val="accent1"/>
+            </a:lnRef>
+            <a:fillRef idx="3">
+              <a:schemeClr val="accent1"/>
+            </a:fillRef>
+            <a:effectRef idx="2">
+              <a:schemeClr val="accent1"/>
+            </a:effectRef>
+            <a:fontRef idx="minor">
+              <a:schemeClr val="lt1"/>
+            </a:fontRef>
+          </p:style>
+          <p:txBody>
+            <a:bodyPr rtlCol="0" anchor="ctr"/>
+            <a:lstStyle/>
+            <a:p>
+              <a:pPr algn="ctr"/>
+            </a:p>
+          </p:txBody>
+        </p:sp>
+        <p:sp>
+          <p:nvSpPr>
+            <p:cNvPr id="11" name="Rounded Rectangle 10"/>
+            <p:cNvSpPr/>
+            <p:nvPr/>
+          </p:nvSpPr>
+          <p:spPr>
+            <a:xfrm>
+              <a:off x="6026890" y="2855936"/>
+              <a:ext cx="656938" cy="71020"/>
+            </a:xfrm>
+            <a:prstGeom prst="roundRect">
+              <a:avLst>
+                <a:gd name="adj" fmla="val 50000"/>
+              </a:avLst>
+            </a:prstGeom>
+            <a:solidFill>
+              <a:srgbClr val="B2B2B2"/>
+            </a:solidFill>
+            <a:ln>
+              <a:noFill/>
+            </a:ln>
+            <a:effectLst/>
+          </p:spPr>
+          <p:style>
+            <a:lnRef idx="1">
+              <a:schemeClr val="accent1"/>
+            </a:lnRef>
+            <a:fillRef idx="3">
+              <a:schemeClr val="accent1"/>
+            </a:fillRef>
+            <a:effectRef idx="2">
+              <a:schemeClr val="accent1"/>
+            </a:effectRef>
+            <a:fontRef idx="minor">
+              <a:schemeClr val="lt1"/>
+            </a:fontRef>
+          </p:style>
+          <p:txBody>
+            <a:bodyPr rtlCol="0" anchor="ctr"/>
+            <a:lstStyle/>
+            <a:p>
+              <a:pPr algn="ctr"/>
+            </a:p>
+          </p:txBody>
+        </p:sp>
+        <p:sp>
+          <p:nvSpPr>
+            <p:cNvPr id="12" name="Rounded Rectangle 11"/>
+            <p:cNvSpPr/>
+            <p:nvPr/>
+          </p:nvSpPr>
+          <p:spPr>
+            <a:xfrm>
+              <a:off x="6026890" y="2997976"/>
+              <a:ext cx="497142" cy="71020"/>
+            </a:xfrm>
+            <a:prstGeom prst="roundRect">
+              <a:avLst>
+                <a:gd name="adj" fmla="val 50000"/>
+              </a:avLst>
+            </a:prstGeom>
+            <a:solidFill>
+              <a:srgbClr val="B2B2B2"/>
+            </a:solidFill>
+            <a:ln>
+              <a:noFill/>
+            </a:ln>
+            <a:effectLst/>
+          </p:spPr>
+          <p:style>
+            <a:lnRef idx="1">
+              <a:schemeClr val="accent1"/>
+            </a:lnRef>
+            <a:fillRef idx="3">
+              <a:schemeClr val="accent1"/>
+            </a:fillRef>
+            <a:effectRef idx="2">
+              <a:schemeClr val="accent1"/>
+            </a:effectRef>
+            <a:fontRef idx="minor">
+              <a:schemeClr val="lt1"/>
+            </a:fontRef>
+          </p:style>
+          <p:txBody>
+            <a:bodyPr rtlCol="0" anchor="ctr"/>
+            <a:lstStyle/>
+            <a:p>
+              <a:pPr algn="ctr"/>
+            </a:p>
+          </p:txBody>
+        </p:sp>
+        <p:sp>
+          <p:nvSpPr>
+            <p:cNvPr id="13" name="Rounded Rectangle 12"/>
+            <p:cNvSpPr/>
+            <p:nvPr/>
+          </p:nvSpPr>
+          <p:spPr>
+            <a:xfrm>
+              <a:off x="6967910" y="2909201"/>
+              <a:ext cx="159795" cy="337346"/>
+            </a:xfrm>
+            <a:prstGeom prst="roundRect">
+              <a:avLst>
+                <a:gd name="adj" fmla="val 22222"/>
+              </a:avLst>
+            </a:prstGeom>
+            <a:solidFill>
+              <a:srgbClr val="B2B2B2"/>
+            </a:solidFill>
+            <a:ln>
+              <a:noFill/>
+            </a:ln>
+            <a:effectLst/>
+          </p:spPr>
+          <p:style>
+            <a:lnRef idx="1">
+              <a:schemeClr val="accent1"/>
+            </a:lnRef>
+            <a:fillRef idx="3">
+              <a:schemeClr val="accent1"/>
+            </a:fillRef>
+            <a:effectRef idx="2">
+              <a:schemeClr val="accent1"/>
+            </a:effectRef>
+            <a:fontRef idx="minor">
+              <a:schemeClr val="lt1"/>
+            </a:fontRef>
+          </p:style>
+          <p:txBody>
+            <a:bodyPr rtlCol="0" anchor="ctr"/>
+            <a:lstStyle/>
+            <a:p>
+              <a:pPr algn="ctr"/>
+            </a:p>
+          </p:txBody>
+        </p:sp>
+        <p:sp>
+          <p:nvSpPr>
+            <p:cNvPr id="14" name="Rounded Rectangle 13"/>
+            <p:cNvSpPr/>
+            <p:nvPr/>
+          </p:nvSpPr>
+          <p:spPr>
+            <a:xfrm>
+              <a:off x="7198726" y="2731650"/>
+              <a:ext cx="159795" cy="514897"/>
+            </a:xfrm>
+            <a:prstGeom prst="roundRect">
+              <a:avLst>
+                <a:gd name="adj" fmla="val 22222"/>
+              </a:avLst>
+            </a:prstGeom>
+            <a:solidFill>
+              <a:srgbClr val="FF6C6C"/>
+            </a:solidFill>
+            <a:ln>
+              <a:noFill/>
+            </a:ln>
+            <a:effectLst/>
+          </p:spPr>
+          <p:style>
+            <a:lnRef idx="1">
+              <a:schemeClr val="accent1"/>
+            </a:lnRef>
+            <a:fillRef idx="3">
+              <a:schemeClr val="accent1"/>
+            </a:fillRef>
+            <a:effectRef idx="2">
+              <a:schemeClr val="accent1"/>
+            </a:effectRef>
+            <a:fontRef idx="minor">
+              <a:schemeClr val="lt1"/>
+            </a:fontRef>
+          </p:style>
+          <p:txBody>
+            <a:bodyPr rtlCol="0" anchor="ctr"/>
+            <a:lstStyle/>
+            <a:p>
+              <a:pPr algn="ctr"/>
+            </a:p>
+          </p:txBody>
+        </p:sp>
+        <p:sp>
+          <p:nvSpPr>
+            <p:cNvPr id="15" name="Rounded Rectangle 14"/>
+            <p:cNvSpPr/>
+            <p:nvPr/>
+          </p:nvSpPr>
+          <p:spPr>
+            <a:xfrm>
+              <a:off x="7429542" y="2554099"/>
+              <a:ext cx="159795" cy="692448"/>
+            </a:xfrm>
+            <a:prstGeom prst="roundRect">
+              <a:avLst>
+                <a:gd name="adj" fmla="val 22222"/>
+              </a:avLst>
+            </a:prstGeom>
+            <a:solidFill>
+              <a:srgbClr val="0077FF"/>
+            </a:solidFill>
+            <a:ln>
+              <a:noFill/>
+            </a:ln>
+            <a:effectLst/>
+          </p:spPr>
+          <p:style>
+            <a:lnRef idx="1">
+              <a:schemeClr val="accent1"/>
+            </a:lnRef>
+            <a:fillRef idx="3">
+              <a:schemeClr val="accent1"/>
+            </a:fillRef>
+            <a:effectRef idx="2">
+              <a:schemeClr val="accent1"/>
+            </a:effectRef>
+            <a:fontRef idx="minor">
+              <a:schemeClr val="lt1"/>
+            </a:fontRef>
+          </p:style>
+          <p:txBody>
+            <a:bodyPr rtlCol="0" anchor="ctr"/>
+            <a:lstStyle/>
+            <a:p>
+              <a:pPr algn="ctr"/>
+            </a:p>
+          </p:txBody>
+        </p:sp>
+        <p:sp>
+          <p:nvSpPr>
+            <p:cNvPr id="16" name="Rectangle 15"/>
+            <p:cNvSpPr/>
+            <p:nvPr/>
+          </p:nvSpPr>
+          <p:spPr>
+            <a:xfrm>
+              <a:off x="6790359" y="3424098"/>
+              <a:ext cx="106530" cy="319591"/>
+            </a:xfrm>
+            <a:prstGeom prst="rect">
+              <a:avLst/>
+            </a:prstGeom>
+            <a:solidFill>
+              <a:srgbClr val="000000"/>
+            </a:solidFill>
+            <a:ln>
+              <a:noFill/>
+            </a:ln>
+            <a:effectLst/>
+          </p:spPr>
+          <p:style>
+            <a:lnRef idx="1">
+              <a:schemeClr val="accent1"/>
+            </a:lnRef>
+            <a:fillRef idx="3">
+              <a:schemeClr val="accent1"/>
+            </a:fillRef>
+            <a:effectRef idx="2">
+              <a:schemeClr val="accent1"/>
+            </a:effectRef>
+            <a:fontRef idx="minor">
+              <a:schemeClr val="lt1"/>
+            </a:fontRef>
+          </p:style>
+          <p:txBody>
+            <a:bodyPr rtlCol="0" anchor="ctr"/>
+            <a:lstStyle/>
+            <a:p>
+              <a:pPr algn="ctr"/>
+            </a:p>
+          </p:txBody>
+        </p:sp>
+        <p:sp>
+          <p:nvSpPr>
+            <p:cNvPr id="17" name="Rounded Rectangle 16"/>
+            <p:cNvSpPr/>
+            <p:nvPr/>
+          </p:nvSpPr>
+          <p:spPr>
+            <a:xfrm>
+              <a:off x="6399747" y="3708180"/>
+              <a:ext cx="887754" cy="106530"/>
+            </a:xfrm>
+            <a:prstGeom prst="roundRect">
+              <a:avLst>
+                <a:gd name="adj" fmla="val 50000"/>
+              </a:avLst>
+            </a:prstGeom>
+            <a:solidFill>
+              <a:srgbClr val="000000"/>
+            </a:solidFill>
+            <a:ln>
+              <a:noFill/>
+            </a:ln>
+            <a:effectLst/>
+          </p:spPr>
+          <p:style>
+            <a:lnRef idx="1">
+              <a:schemeClr val="accent1"/>
+            </a:lnRef>
+            <a:fillRef idx="3">
+              <a:schemeClr val="accent1"/>
+            </a:fillRef>
+            <a:effectRef idx="2">
+              <a:schemeClr val="accent1"/>
+            </a:effectRef>
+            <a:fontRef idx="minor">
+              <a:schemeClr val="lt1"/>
+            </a:fontRef>
+          </p:style>
+          <p:txBody>
+            <a:bodyPr rtlCol="0" anchor="ctr"/>
+            <a:lstStyle/>
+            <a:p>
+              <a:pPr algn="ctr"/>
+            </a:p>
+          </p:txBody>
+        </p:sp>
+      </p:grpSp>
+    </p:spTree>
+  </p:cSld>
+  <p:clrMapOvr>
+    <a:masterClrMapping/>
+  </p:clrMapOvr>
+</p:sld>
+</file>
+
+<file path=ppt/slides/slide59.xml><?xml version="1.0" encoding="utf-8"?>
+<p:sld xmlns:a="http://schemas.openxmlformats.org/drawingml/2006/main" xmlns:p="http://schemas.openxmlformats.org/presentationml/2006/main" xmlns:r="http://schemas.openxmlformats.org/officeDocument/2006/relationships">
+  <p:cSld>
+    <p:spTree>
+      <p:nvGrpSpPr>
+        <p:cNvPr id="1" name=""/>
+        <p:cNvGrpSpPr/>
+        <p:nvPr/>
+      </p:nvGrpSpPr>
+      <p:grpSpPr/>
+      <p:sp>
+        <p:nvSpPr>
+          <p:cNvPr id="2" name="title"/>
+          <p:cNvSpPr txBox="1"/>
+          <p:nvPr/>
+        </p:nvSpPr>
+        <p:spPr>
+          <a:xfrm>
+            <a:off x="274320" y="282943"/>
+            <a:ext cx="6792986" cy="932027"/>
+          </a:xfrm>
+          <a:prstGeom prst="rect">
+            <a:avLst/>
+          </a:prstGeom>
+          <a:noFill/>
+        </p:spPr>
+        <p:txBody>
+          <a:bodyPr wrap="square" lIns="76200" rIns="76200" tIns="50800" bIns="50800">
+            <a:spAutoFit/>
+          </a:bodyPr>
+          <a:lstStyle/>
+          <a:p>
+            <a:pPr algn="l">
+              <a:spcAft>
+                <a:spcPts val="300"/>
+              </a:spcAft>
+              <a:defRPr sz="2438">
+                <a:solidFill>
+                  <a:srgbClr val="000000"/>
+                </a:solidFill>
+                <a:latin typeface="Play"/>
+                <a:ea typeface="Play"/>
+                <a:cs typeface="Play"/>
+              </a:defRPr>
+            </a:pPr>
+            <a:r>
+              <a:rPr sz="2438">
+                <a:solidFill>
+                  <a:srgbClr val="000000"/>
+                </a:solidFill>
+                <a:latin typeface="Play"/>
+                <a:ea typeface="Play"/>
+                <a:cs typeface="Play"/>
+              </a:rPr>
+              <a:t>Предложение: аудит и автоматические правки</a:t>
+            </a:r>
+          </a:p>
+        </p:txBody>
+      </p:sp>
+      <p:sp>
+        <p:nvSpPr>
+          <p:cNvPr id="3" name="body"/>
+          <p:cNvSpPr txBox="1"/>
+          <p:nvPr/>
+        </p:nvSpPr>
+        <p:spPr>
+          <a:xfrm>
+            <a:off x="274320" y="1669682"/>
+            <a:ext cx="4519476" cy="2479040"/>
+          </a:xfrm>
+          <a:prstGeom prst="rect">
+            <a:avLst/>
+          </a:prstGeom>
+          <a:noFill/>
+        </p:spPr>
+        <p:txBody>
+          <a:bodyPr wrap="square" lIns="76200" rIns="76200" tIns="50800" bIns="50800">
+            <a:spAutoFit/>
+          </a:bodyPr>
+          <a:lstStyle/>
+          <a:p>
+            <a:pPr algn="l">
+              <a:spcAft>
+                <a:spcPts val="300"/>
+              </a:spcAft>
+              <a:defRPr sz="1800">
+                <a:solidFill>
+                  <a:srgbClr val="000000"/>
+                </a:solidFill>
+                <a:latin typeface="Play"/>
+                <a:ea typeface="Play"/>
+                <a:cs typeface="Play"/>
+              </a:defRPr>
+            </a:pPr>
+            <a:r>
+              <a:rPr sz="1800">
+                <a:solidFill>
+                  <a:srgbClr val="000000"/>
+                </a:solidFill>
+                <a:latin typeface="Play"/>
+                <a:ea typeface="Play"/>
+                <a:cs typeface="Play"/>
+              </a:rPr>
+              <a:t>• Аудит качества до выдачи результата</a:t>
+            </a:r>
+          </a:p>
+          <a:p>
+            <a:pPr algn="l">
+              <a:spcAft>
+                <a:spcPts val="300"/>
+              </a:spcAft>
+              <a:defRPr sz="1800">
+                <a:solidFill>
+                  <a:srgbClr val="000000"/>
+                </a:solidFill>
+                <a:latin typeface="Play"/>
+                <a:ea typeface="Play"/>
+                <a:cs typeface="Play"/>
+              </a:defRPr>
+            </a:pPr>
+            <a:r>
+              <a:rPr sz="1800">
+                <a:solidFill>
+                  <a:srgbClr val="000000"/>
+                </a:solidFill>
+                <a:latin typeface="Play"/>
+                <a:ea typeface="Play"/>
+                <a:cs typeface="Play"/>
+              </a:rPr>
+              <a:t>• Автоматические правки нарушений фирменного стиля</a:t>
+            </a:r>
+          </a:p>
+          <a:p>
+            <a:pPr algn="l">
+              <a:spcAft>
+                <a:spcPts val="300"/>
+              </a:spcAft>
+              <a:defRPr sz="1800">
+                <a:solidFill>
+                  <a:srgbClr val="000000"/>
+                </a:solidFill>
+                <a:latin typeface="Play"/>
+                <a:ea typeface="Play"/>
+                <a:cs typeface="Play"/>
+              </a:defRPr>
+            </a:pPr>
+            <a:r>
+              <a:rPr sz="1800">
+                <a:solidFill>
+                  <a:srgbClr val="000000"/>
+                </a:solidFill>
+                <a:latin typeface="Play"/>
+                <a:ea typeface="Play"/>
+                <a:cs typeface="Play"/>
+              </a:rPr>
+              <a:t>• Слайды остаются редактируемыми, без картинок</a:t>
+            </a:r>
+          </a:p>
+          <a:p>
+            <a:pPr algn="l">
+              <a:spcAft>
+                <a:spcPts val="300"/>
+              </a:spcAft>
+              <a:defRPr sz="1800">
+                <a:solidFill>
+                  <a:srgbClr val="000000"/>
+                </a:solidFill>
+                <a:latin typeface="Play"/>
+                <a:ea typeface="Play"/>
+                <a:cs typeface="Play"/>
+              </a:defRPr>
+            </a:pPr>
+            <a:r>
+              <a:rPr sz="1800">
+                <a:solidFill>
+                  <a:srgbClr val="000000"/>
+                </a:solidFill>
+                <a:latin typeface="Play"/>
+                <a:ea typeface="Play"/>
+                <a:cs typeface="Play"/>
+              </a:rPr>
+              <a:t>• Поддержка OpenAI-совместимых моделей (gpt-oss-20b)</a:t>
+            </a:r>
+          </a:p>
+        </p:txBody>
+      </p:sp>
+      <p:grpSp>
+        <p:nvGrpSpPr>
+          <p:cNvPr id="4" name="illustration:builtin-security"/>
+          <p:cNvGrpSpPr/>
+          <p:nvPr/>
+        </p:nvGrpSpPr>
+        <p:grpSpPr>
+          <a:xfrm>
+            <a:off x="5725054" y="1808386"/>
+            <a:ext cx="2343671" cy="2201630"/>
+            <a:chOff x="5725054" y="1808386"/>
+            <a:chExt cx="2343671" cy="2201630"/>
+          </a:xfrm>
+        </p:grpSpPr>
+        <p:sp>
+          <p:nvSpPr>
+            <p:cNvPr id="5" name="Oval 4"/>
+            <p:cNvSpPr/>
+            <p:nvPr/>
+          </p:nvSpPr>
+          <p:spPr>
+            <a:xfrm>
+              <a:off x="5742809" y="1808386"/>
+              <a:ext cx="2201630" cy="2201630"/>
+            </a:xfrm>
+            <a:prstGeom prst="ellipse">
+              <a:avLst/>
+            </a:prstGeom>
+            <a:solidFill>
+              <a:srgbClr val="D6E9FF"/>
+            </a:solidFill>
+            <a:ln>
+              <a:noFill/>
+            </a:ln>
+            <a:effectLst/>
+          </p:spPr>
+          <p:style>
+            <a:lnRef idx="1">
+              <a:schemeClr val="accent1"/>
+            </a:lnRef>
+            <a:fillRef idx="3">
+              <a:schemeClr val="accent1"/>
+            </a:fillRef>
+            <a:effectRef idx="2">
+              <a:schemeClr val="accent1"/>
+            </a:effectRef>
+            <a:fontRef idx="minor">
+              <a:schemeClr val="lt1"/>
+            </a:fontRef>
+          </p:style>
+          <p:txBody>
+            <a:bodyPr rtlCol="0" anchor="ctr"/>
+            <a:lstStyle/>
+            <a:p>
+              <a:pPr algn="ctr"/>
+            </a:p>
+          </p:txBody>
+        </p:sp>
+        <p:sp>
+          <p:nvSpPr>
+            <p:cNvPr id="6" name="Freeform 5"/>
+            <p:cNvSpPr/>
+            <p:nvPr/>
+          </p:nvSpPr>
+          <p:spPr>
+            <a:xfrm>
+              <a:off x="6026890" y="1932671"/>
+              <a:ext cx="1633468" cy="1970815"/>
+            </a:xfrm>
+            <a:custGeom>
+              <a:avLst/>
+              <a:gdLst/>
+              <a:ahLst/>
+              <a:cxnLst/>
+              <a:rect l="l" t="t" r="r" b="b"/>
+              <a:pathLst>
+                <a:path w="1633468" h="1970815">
+                  <a:moveTo>
+                    <a:pt x="816734" y="0"/>
+                  </a:moveTo>
+                  <a:lnTo>
+                    <a:pt x="1633468" y="319592"/>
+                  </a:lnTo>
+                  <a:lnTo>
+                    <a:pt x="1633468" y="869999"/>
+                  </a:lnTo>
+                  <a:lnTo>
+                    <a:pt x="1623543" y="1021149"/>
+                  </a:lnTo>
+                  <a:lnTo>
+                    <a:pt x="1594549" y="1165160"/>
+                  </a:lnTo>
+                  <a:lnTo>
+                    <a:pt x="1547658" y="1301288"/>
+                  </a:lnTo>
+                  <a:lnTo>
+                    <a:pt x="1484041" y="1428788"/>
+                  </a:lnTo>
+                  <a:lnTo>
+                    <a:pt x="1404871" y="1546912"/>
+                  </a:lnTo>
+                  <a:lnTo>
+                    <a:pt x="1311320" y="1654916"/>
+                  </a:lnTo>
+                  <a:lnTo>
+                    <a:pt x="1204558" y="1752054"/>
+                  </a:lnTo>
+                  <a:lnTo>
+                    <a:pt x="1085759" y="1837581"/>
+                  </a:lnTo>
+                  <a:lnTo>
+                    <a:pt x="956094" y="1910749"/>
+                  </a:lnTo>
+                  <a:lnTo>
+                    <a:pt x="816734" y="1970815"/>
+                  </a:lnTo>
+                  <a:lnTo>
+                    <a:pt x="677374" y="1910749"/>
+                  </a:lnTo>
+                  <a:lnTo>
+                    <a:pt x="547709" y="1837581"/>
+                  </a:lnTo>
+                  <a:lnTo>
+                    <a:pt x="428910" y="1752054"/>
+                  </a:lnTo>
+                  <a:lnTo>
+                    <a:pt x="322148" y="1654916"/>
+                  </a:lnTo>
+                  <a:lnTo>
+                    <a:pt x="228597" y="1546912"/>
+                  </a:lnTo>
+                  <a:lnTo>
+                    <a:pt x="149427" y="1428788"/>
+                  </a:lnTo>
+                  <a:lnTo>
+                    <a:pt x="85810" y="1301288"/>
+                  </a:lnTo>
+                  <a:lnTo>
+                    <a:pt x="38919" y="1165160"/>
+                  </a:lnTo>
+                  <a:lnTo>
+                    <a:pt x="9925" y="1021149"/>
+                  </a:lnTo>
+                  <a:lnTo>
+                    <a:pt x="0" y="869999"/>
+                  </a:lnTo>
+                  <a:lnTo>
+                    <a:pt x="0" y="319592"/>
+                  </a:lnTo>
+                  <a:close/>
+                </a:path>
+              </a:pathLst>
+            </a:custGeom>
+            <a:solidFill>
+              <a:srgbClr val="0077FF"/>
+            </a:solidFill>
+            <a:ln>
+              <a:noFill/>
+            </a:ln>
+            <a:effectLst/>
+          </p:spPr>
+          <p:style>
+            <a:lnRef idx="1">
+              <a:schemeClr val="accent1"/>
+            </a:lnRef>
+            <a:fillRef idx="3">
+              <a:schemeClr val="accent1"/>
+            </a:fillRef>
+            <a:effectRef idx="2">
+              <a:schemeClr val="accent1"/>
+            </a:effectRef>
+            <a:fontRef idx="minor">
+              <a:schemeClr val="lt1"/>
+            </a:fontRef>
+          </p:style>
+          <p:txBody>
+            <a:bodyPr rtlCol="0" anchor="ctr"/>
+            <a:lstStyle/>
+            <a:p>
+              <a:pPr algn="ctr"/>
+            </a:p>
+          </p:txBody>
+        </p:sp>
+        <p:sp>
+          <p:nvSpPr>
+            <p:cNvPr id="7" name="Freeform 6"/>
+            <p:cNvSpPr/>
+            <p:nvPr/>
+          </p:nvSpPr>
+          <p:spPr>
+            <a:xfrm>
+              <a:off x="6843624" y="2163487"/>
+              <a:ext cx="585918" cy="1473672"/>
+            </a:xfrm>
+            <a:custGeom>
+              <a:avLst/>
+              <a:gdLst/>
+              <a:ahLst/>
+              <a:cxnLst/>
+              <a:rect l="l" t="t" r="r" b="b"/>
+              <a:pathLst>
+                <a:path w="585918" h="1473672">
+                  <a:moveTo>
+                    <a:pt x="0" y="0"/>
+                  </a:moveTo>
+                  <a:lnTo>
+                    <a:pt x="585918" y="230817"/>
+                  </a:lnTo>
+                  <a:lnTo>
+                    <a:pt x="585918" y="656939"/>
+                  </a:lnTo>
+                  <a:lnTo>
+                    <a:pt x="578620" y="766576"/>
+                  </a:lnTo>
+                  <a:lnTo>
+                    <a:pt x="557368" y="871420"/>
+                  </a:lnTo>
+                  <a:lnTo>
+                    <a:pt x="523118" y="970937"/>
+                  </a:lnTo>
+                  <a:lnTo>
+                    <a:pt x="476831" y="1064595"/>
+                  </a:lnTo>
+                  <a:lnTo>
+                    <a:pt x="419464" y="1151862"/>
+                  </a:lnTo>
+                  <a:lnTo>
+                    <a:pt x="351977" y="1232203"/>
+                  </a:lnTo>
+                  <a:lnTo>
+                    <a:pt x="275328" y="1305088"/>
+                  </a:lnTo>
+                  <a:lnTo>
+                    <a:pt x="190477" y="1369983"/>
+                  </a:lnTo>
+                  <a:lnTo>
+                    <a:pt x="98381" y="1426355"/>
+                  </a:lnTo>
+                  <a:lnTo>
+                    <a:pt x="0" y="1473672"/>
+                  </a:lnTo>
+                  <a:close/>
+                </a:path>
+              </a:pathLst>
+            </a:custGeom>
+            <a:solidFill>
+              <a:srgbClr val="FF6C6C"/>
+            </a:solidFill>
+            <a:ln>
+              <a:noFill/>
+            </a:ln>
+            <a:effectLst/>
+          </p:spPr>
+          <p:style>
+            <a:lnRef idx="1">
+              <a:schemeClr val="accent1"/>
+            </a:lnRef>
+            <a:fillRef idx="3">
+              <a:schemeClr val="accent1"/>
+            </a:fillRef>
+            <a:effectRef idx="2">
+              <a:schemeClr val="accent1"/>
+            </a:effectRef>
+            <a:fontRef idx="minor">
+              <a:schemeClr val="lt1"/>
+            </a:fontRef>
+          </p:style>
+          <p:txBody>
+            <a:bodyPr rtlCol="0" anchor="ctr"/>
+            <a:lstStyle/>
+            <a:p>
+              <a:pPr algn="ctr"/>
+            </a:p>
+          </p:txBody>
+        </p:sp>
+        <p:sp>
+          <p:nvSpPr>
+            <p:cNvPr id="8" name="Freeform 7"/>
+            <p:cNvSpPr/>
+            <p:nvPr/>
+          </p:nvSpPr>
+          <p:spPr>
+            <a:xfrm>
+              <a:off x="6488522" y="2678385"/>
+              <a:ext cx="745714" cy="514897"/>
+            </a:xfrm>
+            <a:custGeom>
+              <a:avLst/>
+              <a:gdLst/>
+              <a:ahLst/>
+              <a:cxnLst/>
+              <a:rect l="l" t="t" r="r" b="b"/>
+              <a:pathLst>
+                <a:path w="745714" h="514897">
+                  <a:moveTo>
+                    <a:pt x="0" y="248571"/>
+                  </a:moveTo>
+                  <a:lnTo>
+                    <a:pt x="266327" y="514897"/>
+                  </a:lnTo>
+                  <a:lnTo>
+                    <a:pt x="745714" y="0"/>
+                  </a:lnTo>
+                </a:path>
+              </a:pathLst>
+            </a:custGeom>
+            <a:noFill/>
+            <a:ln w="142040" cap="rnd">
+              <a:solidFill>
+                <a:srgbClr val="FFFFFF"/>
+              </a:solidFill>
+              <a:round/>
+            </a:ln>
+            <a:effectLst/>
+          </p:spPr>
+          <p:style>
+            <a:lnRef idx="1">
+              <a:schemeClr val="accent1"/>
+            </a:lnRef>
+            <a:fillRef idx="3">
+              <a:schemeClr val="accent1"/>
+            </a:fillRef>
+            <a:effectRef idx="2">
+              <a:schemeClr val="accent1"/>
+            </a:effectRef>
+            <a:fontRef idx="minor">
+              <a:schemeClr val="lt1"/>
+            </a:fontRef>
+          </p:style>
+          <p:txBody>
+            <a:bodyPr rtlCol="0" anchor="ctr"/>
+            <a:lstStyle/>
+            <a:p>
+              <a:pPr algn="ctr"/>
+            </a:p>
+          </p:txBody>
+        </p:sp>
+        <p:sp>
+          <p:nvSpPr>
+            <p:cNvPr id="9" name="Oval 8"/>
+            <p:cNvSpPr/>
+            <p:nvPr/>
+          </p:nvSpPr>
+          <p:spPr>
+            <a:xfrm>
+              <a:off x="5725054" y="2198998"/>
+              <a:ext cx="177550" cy="177550"/>
+            </a:xfrm>
+            <a:prstGeom prst="ellipse">
+              <a:avLst/>
+            </a:prstGeom>
+            <a:solidFill>
+              <a:srgbClr val="FF6C6C"/>
+            </a:solidFill>
+            <a:ln>
+              <a:noFill/>
+            </a:ln>
+            <a:effectLst/>
+          </p:spPr>
+          <p:style>
+            <a:lnRef idx="1">
+              <a:schemeClr val="accent1"/>
+            </a:lnRef>
+            <a:fillRef idx="3">
+              <a:schemeClr val="accent1"/>
+            </a:fillRef>
+            <a:effectRef idx="2">
+              <a:schemeClr val="accent1"/>
+            </a:effectRef>
+            <a:fontRef idx="minor">
+              <a:schemeClr val="lt1"/>
+            </a:fontRef>
+          </p:style>
+          <p:txBody>
+            <a:bodyPr rtlCol="0" anchor="ctr"/>
+            <a:lstStyle/>
+            <a:p>
+              <a:pPr algn="ctr"/>
+            </a:p>
+          </p:txBody>
+        </p:sp>
+        <p:sp>
+          <p:nvSpPr>
+            <p:cNvPr id="10" name="Oval 9"/>
+            <p:cNvSpPr/>
+            <p:nvPr/>
+          </p:nvSpPr>
+          <p:spPr>
+            <a:xfrm>
+              <a:off x="7820154" y="3477364"/>
+              <a:ext cx="248571" cy="248571"/>
+            </a:xfrm>
+            <a:prstGeom prst="ellipse">
+              <a:avLst/>
+            </a:prstGeom>
+            <a:solidFill>
+              <a:srgbClr val="B2B2B2"/>
+            </a:solidFill>
+            <a:ln>
+              <a:noFill/>
+            </a:ln>
+            <a:effectLst/>
+          </p:spPr>
+          <p:style>
+            <a:lnRef idx="1">
+              <a:schemeClr val="accent1"/>
+            </a:lnRef>
+            <a:fillRef idx="3">
+              <a:schemeClr val="accent1"/>
+            </a:fillRef>
+            <a:effectRef idx="2">
+              <a:schemeClr val="accent1"/>
+            </a:effectRef>
+            <a:fontRef idx="minor">
+              <a:schemeClr val="lt1"/>
+            </a:fontRef>
+          </p:style>
+          <p:txBody>
+            <a:bodyPr rtlCol="0" anchor="ctr"/>
+            <a:lstStyle/>
+            <a:p>
+              <a:pPr algn="ctr"/>
+            </a:p>
+          </p:txBody>
+        </p:sp>
+      </p:grpSp>
+    </p:spTree>
+  </p:cSld>
+  <p:clrMapOvr>
+    <a:masterClrMapping/>
+  </p:clrMapOvr>
+</p:sld>
+</file>
+
+<file path=ppt/slides/slide60.xml><?xml version="1.0" encoding="utf-8"?>
+<p:sld xmlns:a="http://schemas.openxmlformats.org/drawingml/2006/main" xmlns:p="http://schemas.openxmlformats.org/presentationml/2006/main" xmlns:r="http://schemas.openxmlformats.org/officeDocument/2006/relationships">
+  <p:cSld>
+    <p:spTree>
+      <p:nvGrpSpPr>
+        <p:cNvPr id="1" name=""/>
+        <p:cNvGrpSpPr/>
+        <p:nvPr/>
+      </p:nvGrpSpPr>
+      <p:grpSpPr/>
+      <p:sp>
+        <p:nvSpPr>
+          <p:cNvPr id="1027" name="Google Shape;1027;p65"/>
+          <p:cNvSpPr/>
+          <p:nvPr/>
+        </p:nvSpPr>
+        <p:spPr>
+          <a:xfrm>
+            <a:off x="6064222" y="1209852"/>
+            <a:ext cx="2793985" cy="3014270"/>
+          </a:xfrm>
+          <a:prstGeom prst="roundRect">
+            <a:avLst>
+              <a:gd fmla="val 3436" name="adj"/>
+            </a:avLst>
+          </a:prstGeom>
+          <a:solidFill>
+            <a:schemeClr val="lt2"/>
+          </a:solidFill>
+          <a:ln>
+            <a:noFill/>
+          </a:ln>
+        </p:spPr>
+        <p:txBody>
+          <a:bodyPr anchorCtr="0" anchor="ctr" bIns="91425" lIns="91425" spcFirstLastPara="1" rIns="91425" wrap="square" tIns="91425">
+            <a:noAutofit/>
+          </a:bodyPr>
+          <a:lstStyle/>
+          <a:p>
+            <a:pPr indent="0" lvl="0" marL="0" rtl="0" algn="l">
+              <a:spcBef>
+                <a:spcPts val="0"/>
+              </a:spcBef>
+              <a:spcAft>
+                <a:spcPts val="0"/>
+              </a:spcAft>
+              <a:buNone/>
+            </a:pPr>
+            <a:r>
+              <a:t/>
+            </a:r>
+            <a:endParaRPr/>
+          </a:p>
+        </p:txBody>
+      </p:sp>
+      <p:sp>
+        <p:nvSpPr>
+          <p:cNvPr id="1029" name="Google Shape;1029;p65"/>
+          <p:cNvSpPr/>
+          <p:nvPr/>
+        </p:nvSpPr>
+        <p:spPr>
+          <a:xfrm>
+            <a:off x="3174981" y="1209852"/>
+            <a:ext cx="2793985" cy="3014270"/>
+          </a:xfrm>
+          <a:prstGeom prst="roundRect">
+            <a:avLst>
+              <a:gd fmla="val 3436" name="adj"/>
+            </a:avLst>
+          </a:prstGeom>
+          <a:solidFill>
+            <a:schemeClr val="lt2"/>
+          </a:solidFill>
+          <a:ln>
+            <a:noFill/>
+          </a:ln>
+        </p:spPr>
+        <p:txBody>
+          <a:bodyPr anchorCtr="0" anchor="ctr" bIns="91425" lIns="91425" spcFirstLastPara="1" rIns="91425" wrap="square" tIns="91425">
+            <a:noAutofit/>
+          </a:bodyPr>
+          <a:lstStyle/>
+          <a:p>
+            <a:pPr indent="0" lvl="0" marL="0" rtl="0" algn="l">
+              <a:spcBef>
+                <a:spcPts val="0"/>
+              </a:spcBef>
+              <a:spcAft>
+                <a:spcPts val="0"/>
+              </a:spcAft>
+              <a:buNone/>
+            </a:pPr>
+            <a:r>
+              <a:t/>
+            </a:r>
+            <a:endParaRPr/>
+          </a:p>
+        </p:txBody>
+      </p:sp>
+      <p:sp>
+        <p:nvSpPr>
+          <p:cNvPr id="1031" name="Google Shape;1031;p65"/>
+          <p:cNvSpPr/>
+          <p:nvPr/>
+        </p:nvSpPr>
+        <p:spPr>
+          <a:xfrm>
+            <a:off x="285749" y="1209852"/>
+            <a:ext cx="2793985" cy="3014270"/>
+          </a:xfrm>
+          <a:prstGeom prst="roundRect">
+            <a:avLst>
+              <a:gd fmla="val 3436" name="adj"/>
+            </a:avLst>
+          </a:prstGeom>
+          <a:solidFill>
+            <a:schemeClr val="lt2"/>
+          </a:solidFill>
+          <a:ln>
+            <a:noFill/>
+          </a:ln>
+        </p:spPr>
+        <p:txBody>
+          <a:bodyPr anchorCtr="0" anchor="ctr" bIns="91425" lIns="91425" spcFirstLastPara="1" rIns="91425" wrap="square" tIns="91425">
+            <a:noAutofit/>
+          </a:bodyPr>
+          <a:lstStyle/>
+          <a:p>
+            <a:pPr indent="0" lvl="0" marL="0" rtl="0" algn="l">
+              <a:spcBef>
+                <a:spcPts val="0"/>
+              </a:spcBef>
+              <a:spcAft>
+                <a:spcPts val="0"/>
+              </a:spcAft>
+              <a:buNone/>
+            </a:pPr>
+            <a:r>
+              <a:t/>
+            </a:r>
+            <a:endParaRPr/>
+          </a:p>
+        </p:txBody>
+      </p:sp>
+      <p:sp>
+        <p:nvSpPr>
+          <p:cNvPr id="1032" name="Google Shape;1032;p65"/>
+          <p:cNvSpPr/>
+          <p:nvPr/>
+        </p:nvSpPr>
+        <p:spPr>
+          <a:xfrm>
+            <a:off x="285748" y="286047"/>
+            <a:ext cx="8572456" cy="3938075"/>
+          </a:xfrm>
+          <a:prstGeom prst="rect">
+            <a:avLst/>
+          </a:prstGeom>
+          <a:noFill/>
+          <a:ln>
+            <a:noFill/>
+          </a:ln>
+        </p:spPr>
+        <p:txBody>
+          <a:bodyPr anchorCtr="0" anchor="ctr" bIns="91425" lIns="91425" spcFirstLastPara="1" rIns="91425" wrap="square" tIns="91425">
+            <a:noAutofit/>
+          </a:bodyPr>
+          <a:lstStyle/>
+          <a:p>
+            <a:pPr indent="0" lvl="0" marL="0" rtl="0" algn="l">
+              <a:spcBef>
+                <a:spcPts val="0"/>
+              </a:spcBef>
+              <a:spcAft>
+                <a:spcPts val="0"/>
+              </a:spcAft>
+              <a:buNone/>
+            </a:pPr>
+            <a:r>
+              <a:t/>
+            </a:r>
+            <a:endParaRPr/>
+          </a:p>
+        </p:txBody>
+      </p:sp>
+      <p:sp>
+        <p:nvSpPr>
+          <p:cNvPr id="1033" name="Google Shape;1033;p65"/>
+          <p:cNvSpPr/>
+          <p:nvPr/>
+        </p:nvSpPr>
+        <p:spPr>
+          <a:xfrm>
+            <a:off x="285748" y="1209852"/>
+            <a:ext cx="8572456" cy="3014270"/>
+          </a:xfrm>
+          <a:prstGeom prst="rect">
+            <a:avLst/>
+          </a:prstGeom>
+          <a:noFill/>
+          <a:ln>
+            <a:noFill/>
+          </a:ln>
+        </p:spPr>
+        <p:txBody>
+          <a:bodyPr anchorCtr="0" anchor="ctr" bIns="91425" lIns="91425" spcFirstLastPara="1" rIns="91425" wrap="square" tIns="91425">
+            <a:noAutofit/>
+          </a:bodyPr>
+          <a:lstStyle/>
+          <a:p>
+            <a:pPr indent="0" lvl="0" marL="0" rtl="0" algn="l">
+              <a:spcBef>
+                <a:spcPts val="0"/>
+              </a:spcBef>
+              <a:spcAft>
+                <a:spcPts val="0"/>
+              </a:spcAft>
+              <a:buNone/>
+            </a:pPr>
+            <a:r>
+              <a:t/>
+            </a:r>
+            <a:endParaRPr/>
+          </a:p>
+        </p:txBody>
+      </p:sp>
+      <p:sp>
+        <p:nvSpPr>
+          <p:cNvPr id="1034" name="Google Shape;1034;p65"/>
+          <p:cNvSpPr/>
+          <p:nvPr/>
+        </p:nvSpPr>
+        <p:spPr>
+          <a:xfrm>
+            <a:off x="476248" y="1400327"/>
+            <a:ext cx="2412987" cy="1009519"/>
+          </a:xfrm>
+          <a:prstGeom prst="rect">
+            <a:avLst/>
+          </a:prstGeom>
+          <a:noFill/>
+          <a:ln>
+            <a:noFill/>
+          </a:ln>
+        </p:spPr>
+        <p:txBody>
+          <a:bodyPr anchorCtr="0" anchor="ctr" bIns="91425" lIns="91425" spcFirstLastPara="1" rIns="91425" wrap="square" tIns="91425">
+            <a:noAutofit/>
+          </a:bodyPr>
+          <a:lstStyle/>
+          <a:p>
+            <a:pPr indent="0" lvl="0" marL="0" rtl="0" algn="l">
+              <a:spcBef>
+                <a:spcPts val="0"/>
+              </a:spcBef>
+              <a:spcAft>
+                <a:spcPts val="0"/>
+              </a:spcAft>
+              <a:buNone/>
+            </a:pPr>
+            <a:r>
+              <a:t/>
+            </a:r>
+            <a:endParaRPr/>
+          </a:p>
+        </p:txBody>
+      </p:sp>
+      <p:sp>
+        <p:nvSpPr>
+          <p:cNvPr id="1035" name="title"/>
+          <p:cNvSpPr txBox="1"/>
+          <p:nvPr/>
+        </p:nvSpPr>
+        <p:spPr>
+          <a:xfrm>
+            <a:off x="274320" y="282943"/>
+            <a:ext cx="6792986" cy="932027"/>
+          </a:xfrm>
+          <a:prstGeom prst="rect">
+            <a:avLst/>
+          </a:prstGeom>
+          <a:noFill/>
+        </p:spPr>
+        <p:txBody>
+          <a:bodyPr wrap="square" lIns="76200" rIns="76200" tIns="50800" bIns="50800">
+            <a:spAutoFit/>
+          </a:bodyPr>
+          <a:lstStyle/>
+          <a:p>
+            <a:pPr algn="l">
+              <a:spcAft>
+                <a:spcPts val="300"/>
+              </a:spcAft>
+              <a:defRPr sz="2438">
+                <a:solidFill>
+                  <a:srgbClr val="000000"/>
+                </a:solidFill>
+                <a:latin typeface="Play"/>
+                <a:ea typeface="Play"/>
+                <a:cs typeface="Play"/>
+              </a:defRPr>
+            </a:pPr>
+            <a:r>
+              <a:rPr sz="2438">
+                <a:solidFill>
+                  <a:srgbClr val="000000"/>
+                </a:solidFill>
+                <a:latin typeface="Play"/>
+                <a:ea typeface="Play"/>
+                <a:cs typeface="Play"/>
+              </a:rPr>
+              <a:t>Ожидаемый эффект: сокращение времени сборки</a:t>
+            </a:r>
+          </a:p>
+        </p:txBody>
+      </p:sp>
+      <p:graphicFrame>
+        <p:nvGraphicFramePr>
+          <p:cNvPr id="1036" name="Chart 1035"/>
+          <p:cNvGraphicFramePr>
+            <a:graphicFrameLocks noGrp="1"/>
+          </p:cNvGraphicFramePr>
+          <p:nvPr/>
+        </p:nvGraphicFramePr>
+        <p:xfrm>
+          <a:off x="4583887" y="1394994"/>
+          <a:ext cx="4035247" cy="3028415"/>
+        </p:xfrm>
+        <a:graphic>
+          <a:graphicData uri="http://schemas.openxmlformats.org/drawingml/2006/chart">
+            <c:chart xmlns:c="http://schemas.openxmlformats.org/drawingml/2006/chart" r:id="rId4"/>
+          </a:graphicData>
+        </a:graphic>
+      </p:graphicFrame>
+    </p:spTree>
+  </p:cSld>
+  <p:clrMapOvr>
+    <a:masterClrMapping/>
+  </p:clrMapOvr>
+</p:sld>
+</file>
+
+<file path=ppt/slides/slide61.xml><?xml version="1.0" encoding="utf-8"?>
+<p:sld xmlns:a="http://schemas.openxmlformats.org/drawingml/2006/main" xmlns:p="http://schemas.openxmlformats.org/presentationml/2006/main" xmlns:r="http://schemas.openxmlformats.org/officeDocument/2006/relationships">
+  <p:cSld>
+    <p:spTree>
+      <p:nvGrpSpPr>
+        <p:cNvPr id="1" name=""/>
+        <p:cNvGrpSpPr/>
+        <p:nvPr/>
+      </p:nvGrpSpPr>
+      <p:grpSpPr/>
+      <p:sp>
+        <p:nvSpPr>
+          <p:cNvPr id="2" name="title"/>
+          <p:cNvSpPr txBox="1"/>
+          <p:nvPr/>
+        </p:nvSpPr>
+        <p:spPr>
+          <a:xfrm>
+            <a:off x="274320" y="282943"/>
+            <a:ext cx="6792986" cy="932027"/>
+          </a:xfrm>
+          <a:prstGeom prst="rect">
+            <a:avLst/>
+          </a:prstGeom>
+          <a:noFill/>
+        </p:spPr>
+        <p:txBody>
+          <a:bodyPr wrap="square" lIns="76200" rIns="76200" tIns="50800" bIns="50800">
+            <a:spAutoFit/>
+          </a:bodyPr>
+          <a:lstStyle/>
+          <a:p>
+            <a:pPr algn="l">
+              <a:spcAft>
+                <a:spcPts val="300"/>
+              </a:spcAft>
+              <a:defRPr sz="2438">
+                <a:solidFill>
+                  <a:srgbClr val="000000"/>
+                </a:solidFill>
+                <a:latin typeface="Play"/>
+                <a:ea typeface="Play"/>
+                <a:cs typeface="Play"/>
+              </a:defRPr>
+            </a:pPr>
+            <a:r>
+              <a:rPr sz="2438">
+                <a:solidFill>
+                  <a:srgbClr val="000000"/>
+                </a:solidFill>
+                <a:latin typeface="Play"/>
+                <a:ea typeface="Play"/>
+                <a:cs typeface="Play"/>
+              </a:rPr>
+              <a:t>Ожидаемый эффект: снижение нарушений фирменного стиля</a:t>
+            </a:r>
+          </a:p>
+        </p:txBody>
+      </p:sp>
+      <p:graphicFrame>
+        <p:nvGraphicFramePr>
+          <p:cNvPr id="3" name="Chart 2"/>
+          <p:cNvGraphicFramePr>
+            <a:graphicFrameLocks noGrp="1"/>
+          </p:cNvGraphicFramePr>
+          <p:nvPr/>
+        </p:nvGraphicFramePr>
+        <p:xfrm>
+          <a:off x="4583887" y="1394994"/>
+          <a:ext cx="4035247" cy="3028415"/>
+        </p:xfrm>
+        <a:graphic>
+          <a:graphicData uri="http://schemas.openxmlformats.org/drawingml/2006/chart">
+            <c:chart xmlns:c="http://schemas.openxmlformats.org/drawingml/2006/chart" r:id="rId4"/>
+          </a:graphicData>
+        </a:graphic>
+      </p:graphicFrame>
+    </p:spTree>
+  </p:cSld>
+  <p:clrMapOvr>
+    <a:masterClrMapping/>
+  </p:clrMapOvr>
+</p:sld>
+</file>
+
+<file path=ppt/slides/slide62.xml><?xml version="1.0" encoding="utf-8"?>
+<p:sld xmlns:a="http://schemas.openxmlformats.org/drawingml/2006/main" xmlns:p="http://schemas.openxmlformats.org/presentationml/2006/main" xmlns:r="http://schemas.openxmlformats.org/officeDocument/2006/relationships">
+  <p:cSld>
+    <p:spTree>
+      <p:nvGrpSpPr>
+        <p:cNvPr id="1" name=""/>
+        <p:cNvGrpSpPr/>
+        <p:nvPr/>
+      </p:nvGrpSpPr>
+      <p:grpSpPr/>
+      <p:sp>
+        <p:nvSpPr>
+          <p:cNvPr id="532" name="Google Shape;532;p53"/>
+          <p:cNvSpPr/>
+          <p:nvPr/>
+        </p:nvSpPr>
+        <p:spPr>
+          <a:xfrm>
+            <a:off x="303214" y="1022533"/>
+            <a:ext cx="8451939" cy="1433588"/>
+          </a:xfrm>
+          <a:prstGeom prst="rect">
+            <a:avLst/>
+          </a:prstGeom>
+          <a:noFill/>
+          <a:ln>
+            <a:noFill/>
+          </a:ln>
+        </p:spPr>
+        <p:txBody>
+          <a:bodyPr anchorCtr="0" anchor="ctr" bIns="91425" lIns="91425" spcFirstLastPara="1" rIns="91425" wrap="square" tIns="91425">
+            <a:noAutofit/>
+          </a:bodyPr>
+          <a:lstStyle/>
+          <a:p>
+            <a:pPr indent="0" lvl="0" marL="0" rtl="0" algn="l">
+              <a:spcBef>
+                <a:spcPts val="0"/>
+              </a:spcBef>
+              <a:spcAft>
+                <a:spcPts val="0"/>
+              </a:spcAft>
+              <a:buNone/>
+            </a:pPr>
+            <a:r>
+              <a:t/>
+            </a:r>
+            <a:endParaRPr/>
+          </a:p>
+        </p:txBody>
+      </p:sp>
+      <p:sp>
+        <p:nvSpPr>
+          <p:cNvPr id="553" name="Google Shape;553;p53"/>
+          <p:cNvSpPr/>
+          <p:nvPr/>
+        </p:nvSpPr>
+        <p:spPr>
+          <a:xfrm>
+            <a:off x="276488" y="2955549"/>
+            <a:ext cx="8451939" cy="1433588"/>
+          </a:xfrm>
+          <a:prstGeom prst="rect">
+            <a:avLst/>
+          </a:prstGeom>
+          <a:noFill/>
+          <a:ln>
+            <a:noFill/>
+          </a:ln>
+        </p:spPr>
+        <p:txBody>
+          <a:bodyPr anchorCtr="0" anchor="ctr" bIns="91425" lIns="91425" spcFirstLastPara="1" rIns="91425" wrap="square" tIns="91425">
+            <a:noAutofit/>
+          </a:bodyPr>
+          <a:lstStyle/>
+          <a:p>
+            <a:pPr indent="0" lvl="0" marL="0" rtl="0" algn="l">
+              <a:spcBef>
+                <a:spcPts val="0"/>
+              </a:spcBef>
+              <a:spcAft>
+                <a:spcPts val="0"/>
+              </a:spcAft>
+              <a:buNone/>
+            </a:pPr>
+            <a:r>
+              <a:t/>
+            </a:r>
+            <a:endParaRPr/>
+          </a:p>
+        </p:txBody>
+      </p:sp>
+      <p:sp>
+        <p:nvSpPr>
+          <p:cNvPr id="554" name="Google Shape;554;p53"/>
+          <p:cNvSpPr/>
+          <p:nvPr/>
+        </p:nvSpPr>
+        <p:spPr>
+          <a:xfrm>
+            <a:off x="303214" y="2797849"/>
+            <a:ext cx="8451939" cy="1433588"/>
+          </a:xfrm>
+          <a:prstGeom prst="rect">
+            <a:avLst/>
+          </a:prstGeom>
+          <a:noFill/>
+          <a:ln>
+            <a:noFill/>
+          </a:ln>
+        </p:spPr>
+        <p:txBody>
+          <a:bodyPr anchorCtr="0" anchor="ctr" bIns="91425" lIns="91425" spcFirstLastPara="1" rIns="91425" wrap="square" tIns="91425">
+            <a:noAutofit/>
+          </a:bodyPr>
+          <a:lstStyle/>
+          <a:p>
+            <a:pPr indent="0" lvl="0" marL="0" rtl="0" algn="l">
+              <a:spcBef>
+                <a:spcPts val="0"/>
+              </a:spcBef>
+              <a:spcAft>
+                <a:spcPts val="0"/>
+              </a:spcAft>
+              <a:buNone/>
+            </a:pPr>
+            <a:r>
+              <a:t/>
+            </a:r>
+            <a:endParaRPr/>
+          </a:p>
+        </p:txBody>
+      </p:sp>
+      <p:sp>
+        <p:nvSpPr>
+          <p:cNvPr id="555" name="title"/>
+          <p:cNvSpPr txBox="1"/>
+          <p:nvPr/>
+        </p:nvSpPr>
+        <p:spPr>
+          <a:xfrm>
+            <a:off x="274320" y="282943"/>
+            <a:ext cx="6792986" cy="932027"/>
+          </a:xfrm>
+          <a:prstGeom prst="rect">
+            <a:avLst/>
+          </a:prstGeom>
+          <a:noFill/>
+        </p:spPr>
+        <p:txBody>
+          <a:bodyPr wrap="square" lIns="76200" rIns="76200" tIns="50800" bIns="50800">
+            <a:spAutoFit/>
+          </a:bodyPr>
+          <a:lstStyle/>
+          <a:p>
+            <a:pPr algn="l">
+              <a:spcAft>
+                <a:spcPts val="300"/>
+              </a:spcAft>
+              <a:defRPr sz="2438">
+                <a:solidFill>
+                  <a:srgbClr val="000000"/>
+                </a:solidFill>
+                <a:latin typeface="Play"/>
+                <a:ea typeface="Play"/>
+                <a:cs typeface="Play"/>
+              </a:defRPr>
+            </a:pPr>
+            <a:r>
+              <a:rPr sz="2438">
+                <a:solidFill>
+                  <a:srgbClr val="000000"/>
+                </a:solidFill>
+                <a:latin typeface="Play"/>
+                <a:ea typeface="Play"/>
+                <a:cs typeface="Play"/>
+              </a:rPr>
+              <a:t>Ожидаемый эффект: рост закрытых запросов</a:t>
+            </a:r>
+          </a:p>
+        </p:txBody>
+      </p:sp>
+      <p:graphicFrame>
+        <p:nvGraphicFramePr>
+          <p:cNvPr id="556" name="Chart 555"/>
+          <p:cNvGraphicFramePr>
+            <a:graphicFrameLocks noGrp="1"/>
+          </p:cNvGraphicFramePr>
+          <p:nvPr/>
+        </p:nvGraphicFramePr>
+        <p:xfrm>
+          <a:off x="4583887" y="1394994"/>
+          <a:ext cx="4035247" cy="3028415"/>
+        </p:xfrm>
+        <a:graphic>
+          <a:graphicData uri="http://schemas.openxmlformats.org/drawingml/2006/chart">
+            <c:chart xmlns:c="http://schemas.openxmlformats.org/drawingml/2006/chart" r:id="rId2"/>
+          </a:graphicData>
+        </a:graphic>
+      </p:graphicFrame>
+    </p:spTree>
+  </p:cSld>
+  <p:clrMapOvr>
+    <a:masterClrMapping/>
+  </p:clrMapOvr>
+</p:sld>
+</file>
+
+<file path=ppt/slides/slide63.xml><?xml version="1.0" encoding="utf-8"?>
 <p:sld xmlns:a="http://schemas.openxmlformats.org/drawingml/2006/main" xmlns:p="http://schemas.openxmlformats.org/presentationml/2006/main" xmlns:r="http://schemas.openxmlformats.org/officeDocument/2006/relationships">
   <p:cSld>
     <p:spTree>
@@ -6005,51 +9350,6 @@
       </p:sp>
       <p:sp>
         <p:nvSpPr>
-          <p:cNvPr id="667" name="Google Shape;667;p55"/>
-          <p:cNvSpPr/>
-          <p:nvPr/>
-        </p:nvSpPr>
-        <p:spPr>
-          <a:xfrm>
-            <a:off x="438148" y="1362233"/>
-            <a:ext cx="76199" cy="76190"/>
-          </a:xfrm>
-          <a:prstGeom prst="roundRect">
-            <a:avLst>
-              <a:gd fmla="val 31500" name="adj"/>
-            </a:avLst>
-          </a:prstGeom>
-          <a:solidFill>
-            <a:srgbClr val="0077FF"/>
-          </a:solidFill>
-          <a:ln>
-            <a:noFill/>
-          </a:ln>
-        </p:spPr>
-        <p:txBody>
-          <a:bodyPr anchorCtr="0" anchor="ctr" bIns="91425" lIns="91425" spcFirstLastPara="1" rIns="91425" wrap="square" tIns="91425">
-            <a:noAutofit/>
-          </a:bodyPr>
-          <a:lstStyle/>
-          <a:p>
-            <a:pPr indent="0" lvl="0" marL="0" rtl="0" algn="l">
-              <a:spcBef>
-                <a:spcPts val="0"/>
-              </a:spcBef>
-              <a:spcAft>
-                <a:spcPts val="0"/>
-              </a:spcAft>
-              <a:buNone/>
-            </a:pPr>
-            <a:r>
-              <a:t/>
-            </a:r>
-            <a:endParaRPr/>
-          </a:p>
-        </p:txBody>
-      </p:sp>
-      <p:sp>
-        <p:nvSpPr>
           <p:cNvPr id="670" name="Google Shape;670;p55"/>
           <p:cNvSpPr/>
           <p:nvPr/>
@@ -6066,51 +9366,6 @@
           </a:prstGeom>
           <a:solidFill>
             <a:schemeClr val="lt2"/>
-          </a:solidFill>
-          <a:ln>
-            <a:noFill/>
-          </a:ln>
-        </p:spPr>
-        <p:txBody>
-          <a:bodyPr anchorCtr="0" anchor="ctr" bIns="91425" lIns="91425" spcFirstLastPara="1" rIns="91425" wrap="square" tIns="91425">
-            <a:noAutofit/>
-          </a:bodyPr>
-          <a:lstStyle/>
-          <a:p>
-            <a:pPr indent="0" lvl="0" marL="0" rtl="0" algn="l">
-              <a:spcBef>
-                <a:spcPts val="0"/>
-              </a:spcBef>
-              <a:spcAft>
-                <a:spcPts val="0"/>
-              </a:spcAft>
-              <a:buNone/>
-            </a:pPr>
-            <a:r>
-              <a:t/>
-            </a:r>
-            <a:endParaRPr/>
-          </a:p>
-        </p:txBody>
-      </p:sp>
-      <p:sp>
-        <p:nvSpPr>
-          <p:cNvPr id="672" name="Google Shape;672;p55"/>
-          <p:cNvSpPr/>
-          <p:nvPr/>
-        </p:nvSpPr>
-        <p:spPr>
-          <a:xfrm>
-            <a:off x="2605074" y="1362233"/>
-            <a:ext cx="76199" cy="76190"/>
-          </a:xfrm>
-          <a:prstGeom prst="roundRect">
-            <a:avLst>
-              <a:gd fmla="val 31500" name="adj"/>
-            </a:avLst>
-          </a:prstGeom>
-          <a:solidFill>
-            <a:srgbClr val="0077FF"/>
           </a:solidFill>
           <a:ln>
             <a:noFill/>
@@ -6185,51 +9440,6 @@
       </p:sp>
       <p:sp>
         <p:nvSpPr>
-          <p:cNvPr id="677" name="Google Shape;677;p55"/>
-          <p:cNvSpPr/>
-          <p:nvPr/>
-        </p:nvSpPr>
-        <p:spPr>
-          <a:xfrm>
-            <a:off x="4772001" y="1362233"/>
-            <a:ext cx="76199" cy="76190"/>
-          </a:xfrm>
-          <a:prstGeom prst="roundRect">
-            <a:avLst>
-              <a:gd fmla="val 31500" name="adj"/>
-            </a:avLst>
-          </a:prstGeom>
-          <a:solidFill>
-            <a:srgbClr val="0077FF"/>
-          </a:solidFill>
-          <a:ln>
-            <a:noFill/>
-          </a:ln>
-        </p:spPr>
-        <p:txBody>
-          <a:bodyPr anchorCtr="0" anchor="ctr" bIns="91425" lIns="91425" spcFirstLastPara="1" rIns="91425" wrap="square" tIns="91425">
-            <a:noAutofit/>
-          </a:bodyPr>
-          <a:lstStyle/>
-          <a:p>
-            <a:pPr indent="0" lvl="0" marL="0" rtl="0" algn="l">
-              <a:spcBef>
-                <a:spcPts val="0"/>
-              </a:spcBef>
-              <a:spcAft>
-                <a:spcPts val="0"/>
-              </a:spcAft>
-              <a:buNone/>
-            </a:pPr>
-            <a:r>
-              <a:t/>
-            </a:r>
-            <a:endParaRPr/>
-          </a:p>
-        </p:txBody>
-      </p:sp>
-      <p:sp>
-        <p:nvSpPr>
           <p:cNvPr id="680" name="Google Shape;680;p55"/>
           <p:cNvSpPr/>
           <p:nvPr/>
@@ -6275,597 +9485,7 @@
       </p:sp>
       <p:sp>
         <p:nvSpPr>
-          <p:cNvPr id="682" name="Google Shape;682;p55"/>
-          <p:cNvSpPr/>
-          <p:nvPr/>
-        </p:nvSpPr>
-        <p:spPr>
-          <a:xfrm>
-            <a:off x="6938927" y="1362233"/>
-            <a:ext cx="76199" cy="76190"/>
-          </a:xfrm>
-          <a:prstGeom prst="roundRect">
-            <a:avLst>
-              <a:gd fmla="val 31500" name="adj"/>
-            </a:avLst>
-          </a:prstGeom>
-          <a:solidFill>
-            <a:srgbClr val="0077FF"/>
-          </a:solidFill>
-          <a:ln>
-            <a:noFill/>
-          </a:ln>
-        </p:spPr>
-        <p:txBody>
-          <a:bodyPr anchorCtr="0" anchor="ctr" bIns="91425" lIns="91425" spcFirstLastPara="1" rIns="91425" wrap="square" tIns="91425">
-            <a:noAutofit/>
-          </a:bodyPr>
-          <a:lstStyle/>
-          <a:p>
-            <a:pPr indent="0" lvl="0" marL="0" rtl="0" algn="l">
-              <a:spcBef>
-                <a:spcPts val="0"/>
-              </a:spcBef>
-              <a:spcAft>
-                <a:spcPts val="0"/>
-              </a:spcAft>
-              <a:buNone/>
-            </a:pPr>
-            <a:r>
-              <a:t/>
-            </a:r>
-            <a:endParaRPr/>
-          </a:p>
-        </p:txBody>
-      </p:sp>
-      <p:sp>
-        <p:nvSpPr>
-          <p:cNvPr id="683" name="title"/>
-          <p:cNvSpPr txBox="1"/>
-          <p:nvPr/>
-        </p:nvSpPr>
-        <p:spPr>
-          <a:xfrm>
-            <a:off x="274320" y="282943"/>
-            <a:ext cx="6792986" cy="932027"/>
-          </a:xfrm>
-          <a:prstGeom prst="rect">
-            <a:avLst/>
-          </a:prstGeom>
-          <a:noFill/>
-        </p:spPr>
-        <p:txBody>
-          <a:bodyPr wrap="square" lIns="76200" rIns="76200" tIns="50800" bIns="50800">
-            <a:spAutoFit/>
-          </a:bodyPr>
-          <a:lstStyle/>
-          <a:p>
-            <a:pPr algn="l">
-              <a:spcAft>
-                <a:spcPts val="300"/>
-              </a:spcAft>
-              <a:defRPr sz="2438">
-                <a:solidFill>
-                  <a:srgbClr val="000000"/>
-                </a:solidFill>
-                <a:latin typeface="Play"/>
-                <a:ea typeface="Play"/>
-                <a:cs typeface="Play"/>
-              </a:defRPr>
-            </a:pPr>
-            <a:r>
-              <a:rPr sz="2438">
-                <a:solidFill>
-                  <a:srgbClr val="000000"/>
-                </a:solidFill>
-                <a:latin typeface="Play"/>
-                <a:ea typeface="Play"/>
-                <a:cs typeface="Play"/>
-              </a:rPr>
-              <a:t>Предлагаемый сервис автоматической вёрстки</a:t>
-            </a:r>
-          </a:p>
-        </p:txBody>
-      </p:sp>
-      <p:sp>
-        <p:nvSpPr>
-          <p:cNvPr id="684" name="body_left"/>
-          <p:cNvSpPr txBox="1"/>
-          <p:nvPr/>
-        </p:nvSpPr>
-        <p:spPr>
-          <a:xfrm>
-            <a:off x="274320" y="2088404"/>
-            <a:ext cx="4035247" cy="1026160"/>
-          </a:xfrm>
-          <a:prstGeom prst="rect">
-            <a:avLst/>
-          </a:prstGeom>
-          <a:noFill/>
-        </p:spPr>
-        <p:txBody>
-          <a:bodyPr wrap="square" lIns="76200" rIns="76200" tIns="50800" bIns="50800">
-            <a:spAutoFit/>
-          </a:bodyPr>
-          <a:lstStyle/>
-          <a:p>
-            <a:pPr algn="l">
-              <a:spcAft>
-                <a:spcPts val="300"/>
-              </a:spcAft>
-              <a:defRPr sz="1400">
-                <a:solidFill>
-                  <a:srgbClr val="000000"/>
-                </a:solidFill>
-                <a:latin typeface="Play"/>
-                <a:ea typeface="Play"/>
-                <a:cs typeface="Play"/>
-              </a:defRPr>
-            </a:pPr>
-            <a:r>
-              <a:rPr sz="1400">
-                <a:solidFill>
-                  <a:srgbClr val="000000"/>
-                </a:solidFill>
-                <a:latin typeface="Play"/>
-                <a:ea typeface="Play"/>
-                <a:cs typeface="Play"/>
-              </a:rPr>
-              <a:t>• Принимает шаблон pptx и материалы, автоматически строит дизайн-систему</a:t>
-            </a:r>
-          </a:p>
-          <a:p>
-            <a:pPr algn="l">
-              <a:spcAft>
-                <a:spcPts val="300"/>
-              </a:spcAft>
-              <a:defRPr sz="1400">
-                <a:solidFill>
-                  <a:srgbClr val="000000"/>
-                </a:solidFill>
-                <a:latin typeface="Play"/>
-                <a:ea typeface="Play"/>
-                <a:cs typeface="Play"/>
-              </a:defRPr>
-            </a:pPr>
-            <a:r>
-              <a:rPr sz="1400">
-                <a:solidFill>
-                  <a:srgbClr val="000000"/>
-                </a:solidFill>
-                <a:latin typeface="Play"/>
-                <a:ea typeface="Play"/>
-                <a:cs typeface="Play"/>
-              </a:rPr>
-              <a:t>• Генерирует план колоды и вёрстку по ролям страниц</a:t>
-            </a:r>
-          </a:p>
-        </p:txBody>
-      </p:sp>
-      <p:sp>
-        <p:nvSpPr>
-          <p:cNvPr id="685" name="body_right"/>
-          <p:cNvSpPr txBox="1"/>
-          <p:nvPr/>
-        </p:nvSpPr>
-        <p:spPr>
-          <a:xfrm>
-            <a:off x="4583887" y="2088404"/>
-            <a:ext cx="4035247" cy="1026160"/>
-          </a:xfrm>
-          <a:prstGeom prst="rect">
-            <a:avLst/>
-          </a:prstGeom>
-          <a:noFill/>
-        </p:spPr>
-        <p:txBody>
-          <a:bodyPr wrap="square" lIns="76200" rIns="76200" tIns="50800" bIns="50800">
-            <a:spAutoFit/>
-          </a:bodyPr>
-          <a:lstStyle/>
-          <a:p>
-            <a:pPr algn="l">
-              <a:spcAft>
-                <a:spcPts val="300"/>
-              </a:spcAft>
-              <a:defRPr sz="1400">
-                <a:solidFill>
-                  <a:srgbClr val="000000"/>
-                </a:solidFill>
-                <a:latin typeface="Play"/>
-                <a:ea typeface="Play"/>
-                <a:cs typeface="Play"/>
-              </a:defRPr>
-            </a:pPr>
-            <a:r>
-              <a:rPr sz="1400">
-                <a:solidFill>
-                  <a:srgbClr val="000000"/>
-                </a:solidFill>
-                <a:latin typeface="Play"/>
-                <a:ea typeface="Play"/>
-                <a:cs typeface="Play"/>
-              </a:rPr>
-              <a:t>• Аудит качества проверяет стиль и данные до выдачи</a:t>
-            </a:r>
-          </a:p>
-          <a:p>
-            <a:pPr algn="l">
-              <a:spcAft>
-                <a:spcPts val="300"/>
-              </a:spcAft>
-              <a:defRPr sz="1400">
-                <a:solidFill>
-                  <a:srgbClr val="000000"/>
-                </a:solidFill>
-                <a:latin typeface="Play"/>
-                <a:ea typeface="Play"/>
-                <a:cs typeface="Play"/>
-              </a:defRPr>
-            </a:pPr>
-            <a:r>
-              <a:rPr sz="1400">
-                <a:solidFill>
-                  <a:srgbClr val="000000"/>
-                </a:solidFill>
-                <a:latin typeface="Play"/>
-                <a:ea typeface="Play"/>
-                <a:cs typeface="Play"/>
-              </a:rPr>
-              <a:t>• Экспорт в pptx, pdf, html, слайды остаются редактируемыми</a:t>
-            </a:r>
-          </a:p>
-        </p:txBody>
-      </p:sp>
-    </p:spTree>
-  </p:cSld>
-  <p:clrMapOvr>
-    <a:masterClrMapping/>
-  </p:clrMapOvr>
-</p:sld>
-</file>
-
-<file path=ppt/slides/slide58.xml><?xml version="1.0" encoding="utf-8"?>
-<p:sld xmlns:a="http://schemas.openxmlformats.org/drawingml/2006/main" xmlns:p="http://schemas.openxmlformats.org/presentationml/2006/main" xmlns:r="http://schemas.openxmlformats.org/officeDocument/2006/relationships">
-  <p:cSld>
-    <p:spTree>
-      <p:nvGrpSpPr>
-        <p:cNvPr id="1" name=""/>
-        <p:cNvGrpSpPr/>
-        <p:nvPr/>
-      </p:nvGrpSpPr>
-      <p:grpSpPr/>
-      <p:sp>
-        <p:nvSpPr>
-          <p:cNvPr id="532" name="Google Shape;532;p53"/>
-          <p:cNvSpPr/>
-          <p:nvPr/>
-        </p:nvSpPr>
-        <p:spPr>
-          <a:xfrm>
-            <a:off x="303214" y="1022533"/>
-            <a:ext cx="8451939" cy="1433588"/>
-          </a:xfrm>
-          <a:prstGeom prst="rect">
-            <a:avLst/>
-          </a:prstGeom>
-          <a:noFill/>
-          <a:ln>
-            <a:noFill/>
-          </a:ln>
-        </p:spPr>
-        <p:txBody>
-          <a:bodyPr anchorCtr="0" anchor="ctr" bIns="91425" lIns="91425" spcFirstLastPara="1" rIns="91425" wrap="square" tIns="91425">
-            <a:noAutofit/>
-          </a:bodyPr>
-          <a:lstStyle/>
-          <a:p>
-            <a:pPr indent="0" lvl="0" marL="0" rtl="0" algn="l">
-              <a:spcBef>
-                <a:spcPts val="0"/>
-              </a:spcBef>
-              <a:spcAft>
-                <a:spcPts val="0"/>
-              </a:spcAft>
-              <a:buNone/>
-            </a:pPr>
-            <a:r>
-              <a:t/>
-            </a:r>
-            <a:endParaRPr/>
-          </a:p>
-        </p:txBody>
-      </p:sp>
-      <p:sp>
-        <p:nvSpPr>
-          <p:cNvPr id="533" name="Google Shape;533;p53"/>
-          <p:cNvSpPr/>
-          <p:nvPr/>
-        </p:nvSpPr>
-        <p:spPr>
-          <a:xfrm>
-            <a:off x="303214" y="1022533"/>
-            <a:ext cx="1395256" cy="1433588"/>
-          </a:xfrm>
-          <a:prstGeom prst="rect">
-            <a:avLst/>
-          </a:prstGeom>
-          <a:noFill/>
-          <a:ln>
-            <a:noFill/>
-          </a:ln>
-        </p:spPr>
-        <p:txBody>
-          <a:bodyPr anchorCtr="0" anchor="ctr" bIns="91425" lIns="91425" spcFirstLastPara="1" rIns="91425" wrap="square" tIns="91425">
-            <a:noAutofit/>
-          </a:bodyPr>
-          <a:lstStyle/>
-          <a:p>
-            <a:pPr indent="0" lvl="0" marL="0" rtl="0" algn="l">
-              <a:spcBef>
-                <a:spcPts val="0"/>
-              </a:spcBef>
-              <a:spcAft>
-                <a:spcPts val="0"/>
-              </a:spcAft>
-              <a:buNone/>
-            </a:pPr>
-            <a:r>
-              <a:t/>
-            </a:r>
-            <a:endParaRPr/>
-          </a:p>
-        </p:txBody>
-      </p:sp>
-      <p:sp>
-        <p:nvSpPr>
-          <p:cNvPr id="537" name="Google Shape;537;p53"/>
-          <p:cNvSpPr/>
-          <p:nvPr/>
-        </p:nvSpPr>
-        <p:spPr>
-          <a:xfrm>
-            <a:off x="2067385" y="1022533"/>
-            <a:ext cx="1395256" cy="1433588"/>
-          </a:xfrm>
-          <a:prstGeom prst="rect">
-            <a:avLst/>
-          </a:prstGeom>
-          <a:noFill/>
-          <a:ln>
-            <a:noFill/>
-          </a:ln>
-        </p:spPr>
-        <p:txBody>
-          <a:bodyPr anchorCtr="0" anchor="ctr" bIns="91425" lIns="91425" spcFirstLastPara="1" rIns="91425" wrap="square" tIns="91425">
-            <a:noAutofit/>
-          </a:bodyPr>
-          <a:lstStyle/>
-          <a:p>
-            <a:pPr indent="0" lvl="0" marL="0" rtl="0" algn="l">
-              <a:spcBef>
-                <a:spcPts val="0"/>
-              </a:spcBef>
-              <a:spcAft>
-                <a:spcPts val="0"/>
-              </a:spcAft>
-              <a:buNone/>
-            </a:pPr>
-            <a:r>
-              <a:t/>
-            </a:r>
-            <a:endParaRPr/>
-          </a:p>
-        </p:txBody>
-      </p:sp>
-      <p:sp>
-        <p:nvSpPr>
-          <p:cNvPr id="541" name="Google Shape;541;p53"/>
-          <p:cNvSpPr/>
-          <p:nvPr/>
-        </p:nvSpPr>
-        <p:spPr>
-          <a:xfrm>
-            <a:off x="3831556" y="1022533"/>
-            <a:ext cx="1395256" cy="1433588"/>
-          </a:xfrm>
-          <a:prstGeom prst="rect">
-            <a:avLst/>
-          </a:prstGeom>
-          <a:noFill/>
-          <a:ln>
-            <a:noFill/>
-          </a:ln>
-        </p:spPr>
-        <p:txBody>
-          <a:bodyPr anchorCtr="0" anchor="ctr" bIns="91425" lIns="91425" spcFirstLastPara="1" rIns="91425" wrap="square" tIns="91425">
-            <a:noAutofit/>
-          </a:bodyPr>
-          <a:lstStyle/>
-          <a:p>
-            <a:pPr indent="0" lvl="0" marL="0" rtl="0" algn="l">
-              <a:spcBef>
-                <a:spcPts val="0"/>
-              </a:spcBef>
-              <a:spcAft>
-                <a:spcPts val="0"/>
-              </a:spcAft>
-              <a:buNone/>
-            </a:pPr>
-            <a:r>
-              <a:t/>
-            </a:r>
-            <a:endParaRPr/>
-          </a:p>
-        </p:txBody>
-      </p:sp>
-      <p:sp>
-        <p:nvSpPr>
-          <p:cNvPr id="553" name="Google Shape;553;p53"/>
-          <p:cNvSpPr/>
-          <p:nvPr/>
-        </p:nvSpPr>
-        <p:spPr>
-          <a:xfrm>
-            <a:off x="276488" y="2955549"/>
-            <a:ext cx="8451939" cy="1433588"/>
-          </a:xfrm>
-          <a:prstGeom prst="rect">
-            <a:avLst/>
-          </a:prstGeom>
-          <a:noFill/>
-          <a:ln>
-            <a:noFill/>
-          </a:ln>
-        </p:spPr>
-        <p:txBody>
-          <a:bodyPr anchorCtr="0" anchor="ctr" bIns="91425" lIns="91425" spcFirstLastPara="1" rIns="91425" wrap="square" tIns="91425">
-            <a:noAutofit/>
-          </a:bodyPr>
-          <a:lstStyle/>
-          <a:p>
-            <a:pPr indent="0" lvl="0" marL="0" rtl="0" algn="l">
-              <a:spcBef>
-                <a:spcPts val="0"/>
-              </a:spcBef>
-              <a:spcAft>
-                <a:spcPts val="0"/>
-              </a:spcAft>
-              <a:buNone/>
-            </a:pPr>
-            <a:r>
-              <a:t/>
-            </a:r>
-            <a:endParaRPr/>
-          </a:p>
-        </p:txBody>
-      </p:sp>
-      <p:sp>
-        <p:nvSpPr>
-          <p:cNvPr id="554" name="Google Shape;554;p53"/>
-          <p:cNvSpPr/>
-          <p:nvPr/>
-        </p:nvSpPr>
-        <p:spPr>
-          <a:xfrm>
-            <a:off x="303214" y="2797849"/>
-            <a:ext cx="8451939" cy="1433588"/>
-          </a:xfrm>
-          <a:prstGeom prst="rect">
-            <a:avLst/>
-          </a:prstGeom>
-          <a:noFill/>
-          <a:ln>
-            <a:noFill/>
-          </a:ln>
-        </p:spPr>
-        <p:txBody>
-          <a:bodyPr anchorCtr="0" anchor="ctr" bIns="91425" lIns="91425" spcFirstLastPara="1" rIns="91425" wrap="square" tIns="91425">
-            <a:noAutofit/>
-          </a:bodyPr>
-          <a:lstStyle/>
-          <a:p>
-            <a:pPr indent="0" lvl="0" marL="0" rtl="0" algn="l">
-              <a:spcBef>
-                <a:spcPts val="0"/>
-              </a:spcBef>
-              <a:spcAft>
-                <a:spcPts val="0"/>
-              </a:spcAft>
-              <a:buNone/>
-            </a:pPr>
-            <a:r>
-              <a:t/>
-            </a:r>
-            <a:endParaRPr/>
-          </a:p>
-        </p:txBody>
-      </p:sp>
-      <p:sp>
-        <p:nvSpPr>
-          <p:cNvPr id="555" name="Google Shape;555;p53"/>
-          <p:cNvSpPr/>
-          <p:nvPr/>
-        </p:nvSpPr>
-        <p:spPr>
-          <a:xfrm>
-            <a:off x="303214" y="2797849"/>
-            <a:ext cx="1395256" cy="1433588"/>
-          </a:xfrm>
-          <a:prstGeom prst="rect">
-            <a:avLst/>
-          </a:prstGeom>
-          <a:noFill/>
-          <a:ln>
-            <a:noFill/>
-          </a:ln>
-        </p:spPr>
-        <p:txBody>
-          <a:bodyPr anchorCtr="0" anchor="ctr" bIns="91425" lIns="91425" spcFirstLastPara="1" rIns="91425" wrap="square" tIns="91425">
-            <a:noAutofit/>
-          </a:bodyPr>
-          <a:lstStyle/>
-          <a:p>
-            <a:pPr indent="0" lvl="0" marL="0" rtl="0" algn="l">
-              <a:spcBef>
-                <a:spcPts val="0"/>
-              </a:spcBef>
-              <a:spcAft>
-                <a:spcPts val="0"/>
-              </a:spcAft>
-              <a:buNone/>
-            </a:pPr>
-            <a:r>
-              <a:t/>
-            </a:r>
-            <a:endParaRPr/>
-          </a:p>
-        </p:txBody>
-      </p:sp>
-      <p:sp>
-        <p:nvSpPr>
-          <p:cNvPr id="559" name="Google Shape;559;p53"/>
-          <p:cNvSpPr/>
-          <p:nvPr/>
-        </p:nvSpPr>
-        <p:spPr>
-          <a:xfrm>
-            <a:off x="2067385" y="2797849"/>
-            <a:ext cx="1395256" cy="1433588"/>
-          </a:xfrm>
-          <a:prstGeom prst="rect">
-            <a:avLst/>
-          </a:prstGeom>
-          <a:noFill/>
-          <a:ln>
-            <a:noFill/>
-          </a:ln>
-        </p:spPr>
-        <p:txBody>
-          <a:bodyPr anchorCtr="0" anchor="ctr" bIns="91425" lIns="91425" spcFirstLastPara="1" rIns="91425" wrap="square" tIns="91425">
-            <a:noAutofit/>
-          </a:bodyPr>
-          <a:lstStyle/>
-          <a:p>
-            <a:pPr indent="0" lvl="0" marL="0" rtl="0" algn="l">
-              <a:spcBef>
-                <a:spcPts val="0"/>
-              </a:spcBef>
-              <a:spcAft>
-                <a:spcPts val="0"/>
-              </a:spcAft>
-              <a:buNone/>
-            </a:pPr>
-            <a:r>
-              <a:t/>
-            </a:r>
-            <a:endParaRPr/>
-          </a:p>
-        </p:txBody>
-      </p:sp>
-      <p:sp>
-        <p:nvSpPr>
-          <p:cNvPr id="560" name="title"/>
+          <p:cNvPr id="681" name="title"/>
           <p:cNvSpPr txBox="1"/>
           <p:nvPr/>
         </p:nvSpPr>
@@ -6907,29 +9527,499 @@
                 <a:ea typeface="Play"/>
                 <a:cs typeface="Play"/>
               </a:rPr>
-              <a:t>Результаты пилота за 6 недель</a:t>
+              <a:t>Что потребуется: ресурсы и сроки</a:t>
             </a:r>
           </a:p>
         </p:txBody>
       </p:sp>
-      <p:graphicFrame>
-        <p:nvGraphicFramePr>
-          <p:cNvPr id="561" name="Chart 560"/>
-          <p:cNvGraphicFramePr>
-            <a:graphicFrameLocks noGrp="1"/>
-          </p:cNvGraphicFramePr>
+      <p:sp>
+        <p:nvSpPr>
+          <p:cNvPr id="682" name="stat_0:bar"/>
+          <p:cNvSpPr/>
           <p:nvPr/>
-        </p:nvGraphicFramePr>
-        <p:xfrm>
-          <a:off x="4583887" y="1414513"/>
-          <a:ext cx="4035247" cy="2851865"/>
-        </p:xfrm>
-        <a:graphic>
-          <a:graphicData uri="http://schemas.openxmlformats.org/drawingml/2006/chart">
-            <c:chart xmlns:c="http://schemas.openxmlformats.org/drawingml/2006/chart" r:id="rId2"/>
-          </a:graphicData>
-        </a:graphic>
-      </p:graphicFrame>
+        </p:nvSpPr>
+        <p:spPr>
+          <a:xfrm>
+            <a:off x="274320" y="1410462"/>
+            <a:ext cx="50800" cy="1130808"/>
+          </a:xfrm>
+          <a:prstGeom prst="rect">
+            <a:avLst/>
+          </a:prstGeom>
+          <a:solidFill>
+            <a:srgbClr val="0077FF"/>
+          </a:solidFill>
+          <a:ln>
+            <a:noFill/>
+          </a:ln>
+          <a:effectLst/>
+        </p:spPr>
+        <p:style>
+          <a:lnRef idx="1">
+            <a:schemeClr val="accent1"/>
+          </a:lnRef>
+          <a:fillRef idx="3">
+            <a:schemeClr val="accent1"/>
+          </a:fillRef>
+          <a:effectRef idx="2">
+            <a:schemeClr val="accent1"/>
+          </a:effectRef>
+          <a:fontRef idx="minor">
+            <a:schemeClr val="lt1"/>
+          </a:fontRef>
+        </p:style>
+        <p:txBody>
+          <a:bodyPr rtlCol="0" anchor="ctr"/>
+          <a:lstStyle/>
+          <a:p>
+            <a:pPr algn="ctr"/>
+          </a:p>
+        </p:txBody>
+      </p:sp>
+      <p:sp>
+        <p:nvSpPr>
+          <p:cNvPr id="683" name="stat_0"/>
+          <p:cNvSpPr txBox="1"/>
+          <p:nvPr/>
+        </p:nvSpPr>
+        <p:spPr>
+          <a:xfrm>
+            <a:off x="452119" y="1337310"/>
+            <a:ext cx="3827710" cy="1203960"/>
+          </a:xfrm>
+          <a:prstGeom prst="rect">
+            <a:avLst/>
+          </a:prstGeom>
+          <a:noFill/>
+        </p:spPr>
+        <p:txBody>
+          <a:bodyPr wrap="square" lIns="76200" rIns="76200" tIns="0" bIns="0">
+            <a:spAutoFit/>
+          </a:bodyPr>
+          <a:lstStyle/>
+          <a:p>
+            <a:pPr>
+              <a:lnSpc>
+                <a:spcPct val="100000"/>
+              </a:lnSpc>
+              <a:spcAft>
+                <a:spcPts val="200"/>
+              </a:spcAft>
+              <a:defRPr sz="3200" b="1">
+                <a:solidFill>
+                  <a:srgbClr val="0077FF"/>
+                </a:solidFill>
+                <a:latin typeface="Play"/>
+                <a:ea typeface="Play"/>
+                <a:cs typeface="Play"/>
+              </a:defRPr>
+            </a:pPr>
+            <a:r>
+              <a:rPr sz="3200" b="1">
+                <a:solidFill>
+                  <a:srgbClr val="0077FF"/>
+                </a:solidFill>
+                <a:latin typeface="Play"/>
+                <a:ea typeface="Play"/>
+                <a:cs typeface="Play"/>
+              </a:rPr>
+              <a:t>2 vCPU</a:t>
+            </a:r>
+          </a:p>
+          <a:p>
+            <a:pPr>
+              <a:spcAft>
+                <a:spcPts val="300"/>
+              </a:spcAft>
+              <a:defRPr sz="1800" b="0">
+                <a:solidFill>
+                  <a:srgbClr val="000000"/>
+                </a:solidFill>
+                <a:latin typeface="Play"/>
+                <a:ea typeface="Play"/>
+                <a:cs typeface="Play"/>
+              </a:defRPr>
+            </a:pPr>
+            <a:r>
+              <a:rPr sz="1800" b="0">
+                <a:solidFill>
+                  <a:srgbClr val="000000"/>
+                </a:solidFill>
+                <a:latin typeface="Play"/>
+                <a:ea typeface="Play"/>
+                <a:cs typeface="Play"/>
+              </a:rPr>
+              <a:t>Сервис работает на машине 2 vCPU / 2 ГБ RAM</a:t>
+            </a:r>
+          </a:p>
+        </p:txBody>
+      </p:sp>
+      <p:sp>
+        <p:nvSpPr>
+          <p:cNvPr id="684" name="stat_1:bar"/>
+          <p:cNvSpPr/>
+          <p:nvPr/>
+        </p:nvSpPr>
+        <p:spPr>
+          <a:xfrm>
+            <a:off x="4613623" y="1410462"/>
+            <a:ext cx="50800" cy="1130808"/>
+          </a:xfrm>
+          <a:prstGeom prst="rect">
+            <a:avLst/>
+          </a:prstGeom>
+          <a:solidFill>
+            <a:srgbClr val="0077FF"/>
+          </a:solidFill>
+          <a:ln>
+            <a:noFill/>
+          </a:ln>
+          <a:effectLst/>
+        </p:spPr>
+        <p:style>
+          <a:lnRef idx="1">
+            <a:schemeClr val="accent1"/>
+          </a:lnRef>
+          <a:fillRef idx="3">
+            <a:schemeClr val="accent1"/>
+          </a:fillRef>
+          <a:effectRef idx="2">
+            <a:schemeClr val="accent1"/>
+          </a:effectRef>
+          <a:fontRef idx="minor">
+            <a:schemeClr val="lt1"/>
+          </a:fontRef>
+        </p:style>
+        <p:txBody>
+          <a:bodyPr rtlCol="0" anchor="ctr"/>
+          <a:lstStyle/>
+          <a:p>
+            <a:pPr algn="ctr"/>
+          </a:p>
+        </p:txBody>
+      </p:sp>
+      <p:sp>
+        <p:nvSpPr>
+          <p:cNvPr id="685" name="stat_1"/>
+          <p:cNvSpPr txBox="1"/>
+          <p:nvPr/>
+        </p:nvSpPr>
+        <p:spPr>
+          <a:xfrm>
+            <a:off x="4791423" y="1337310"/>
+            <a:ext cx="3827710" cy="1203960"/>
+          </a:xfrm>
+          <a:prstGeom prst="rect">
+            <a:avLst/>
+          </a:prstGeom>
+          <a:noFill/>
+        </p:spPr>
+        <p:txBody>
+          <a:bodyPr wrap="square" lIns="76200" rIns="76200" tIns="0" bIns="0">
+            <a:spAutoFit/>
+          </a:bodyPr>
+          <a:lstStyle/>
+          <a:p>
+            <a:pPr>
+              <a:lnSpc>
+                <a:spcPct val="100000"/>
+              </a:lnSpc>
+              <a:spcAft>
+                <a:spcPts val="200"/>
+              </a:spcAft>
+              <a:defRPr sz="3200" b="1">
+                <a:solidFill>
+                  <a:srgbClr val="0077FF"/>
+                </a:solidFill>
+                <a:latin typeface="Play"/>
+                <a:ea typeface="Play"/>
+                <a:cs typeface="Play"/>
+              </a:defRPr>
+            </a:pPr>
+            <a:r>
+              <a:rPr sz="3200" b="1">
+                <a:solidFill>
+                  <a:srgbClr val="0077FF"/>
+                </a:solidFill>
+                <a:latin typeface="Play"/>
+                <a:ea typeface="Play"/>
+                <a:cs typeface="Play"/>
+              </a:rPr>
+              <a:t>6 нед.</a:t>
+            </a:r>
+          </a:p>
+          <a:p>
+            <a:pPr>
+              <a:spcAft>
+                <a:spcPts val="300"/>
+              </a:spcAft>
+              <a:defRPr sz="1800" b="0">
+                <a:solidFill>
+                  <a:srgbClr val="000000"/>
+                </a:solidFill>
+                <a:latin typeface="Play"/>
+                <a:ea typeface="Play"/>
+                <a:cs typeface="Play"/>
+              </a:defRPr>
+            </a:pPr>
+            <a:r>
+              <a:rPr sz="1800" b="0">
+                <a:solidFill>
+                  <a:srgbClr val="000000"/>
+                </a:solidFill>
+                <a:latin typeface="Play"/>
+                <a:ea typeface="Play"/>
+                <a:cs typeface="Play"/>
+              </a:rPr>
+              <a:t>Стоимость инференса за 6 недель – 1 400 руб</a:t>
+            </a:r>
+          </a:p>
+        </p:txBody>
+      </p:sp>
+      <p:sp>
+        <p:nvSpPr>
+          <p:cNvPr id="686" name="stat_2:bar"/>
+          <p:cNvSpPr/>
+          <p:nvPr/>
+        </p:nvSpPr>
+        <p:spPr>
+          <a:xfrm>
+            <a:off x="274320" y="3056381"/>
+            <a:ext cx="50800" cy="1130808"/>
+          </a:xfrm>
+          <a:prstGeom prst="rect">
+            <a:avLst/>
+          </a:prstGeom>
+          <a:solidFill>
+            <a:srgbClr val="0077FF"/>
+          </a:solidFill>
+          <a:ln>
+            <a:noFill/>
+          </a:ln>
+          <a:effectLst/>
+        </p:spPr>
+        <p:style>
+          <a:lnRef idx="1">
+            <a:schemeClr val="accent1"/>
+          </a:lnRef>
+          <a:fillRef idx="3">
+            <a:schemeClr val="accent1"/>
+          </a:fillRef>
+          <a:effectRef idx="2">
+            <a:schemeClr val="accent1"/>
+          </a:effectRef>
+          <a:fontRef idx="minor">
+            <a:schemeClr val="lt1"/>
+          </a:fontRef>
+        </p:style>
+        <p:txBody>
+          <a:bodyPr rtlCol="0" anchor="ctr"/>
+          <a:lstStyle/>
+          <a:p>
+            <a:pPr algn="ctr"/>
+          </a:p>
+        </p:txBody>
+      </p:sp>
+      <p:sp>
+        <p:nvSpPr>
+          <p:cNvPr id="687" name="stat_2"/>
+          <p:cNvSpPr txBox="1"/>
+          <p:nvPr/>
+        </p:nvSpPr>
+        <p:spPr>
+          <a:xfrm>
+            <a:off x="452119" y="2983229"/>
+            <a:ext cx="3827710" cy="1203960"/>
+          </a:xfrm>
+          <a:prstGeom prst="rect">
+            <a:avLst/>
+          </a:prstGeom>
+          <a:noFill/>
+        </p:spPr>
+        <p:txBody>
+          <a:bodyPr wrap="square" lIns="76200" rIns="76200" tIns="0" bIns="0">
+            <a:spAutoFit/>
+          </a:bodyPr>
+          <a:lstStyle/>
+          <a:p>
+            <a:pPr>
+              <a:lnSpc>
+                <a:spcPct val="100000"/>
+              </a:lnSpc>
+              <a:spcAft>
+                <a:spcPts val="200"/>
+              </a:spcAft>
+              <a:defRPr sz="3200" b="1">
+                <a:solidFill>
+                  <a:srgbClr val="0077FF"/>
+                </a:solidFill>
+                <a:latin typeface="Play"/>
+                <a:ea typeface="Play"/>
+                <a:cs typeface="Play"/>
+              </a:defRPr>
+            </a:pPr>
+            <a:r>
+              <a:rPr sz="3200" b="1">
+                <a:solidFill>
+                  <a:srgbClr val="0077FF"/>
+                </a:solidFill>
+                <a:latin typeface="Play"/>
+                <a:ea typeface="Play"/>
+                <a:cs typeface="Play"/>
+              </a:rPr>
+              <a:t>2026</a:t>
+            </a:r>
+          </a:p>
+          <a:p>
+            <a:pPr>
+              <a:spcAft>
+                <a:spcPts val="300"/>
+              </a:spcAft>
+              <a:defRPr sz="1800" b="0">
+                <a:solidFill>
+                  <a:srgbClr val="000000"/>
+                </a:solidFill>
+                <a:latin typeface="Play"/>
+                <a:ea typeface="Play"/>
+                <a:cs typeface="Play"/>
+              </a:defRPr>
+            </a:pPr>
+            <a:r>
+              <a:rPr sz="1800" b="0">
+                <a:solidFill>
+                  <a:srgbClr val="000000"/>
+                </a:solidFill>
+                <a:latin typeface="Play"/>
+                <a:ea typeface="Play"/>
+                <a:cs typeface="Play"/>
+              </a:rPr>
+              <a:t>Подключение 4 команд в Q3 2026</a:t>
+            </a:r>
+          </a:p>
+        </p:txBody>
+      </p:sp>
+      <p:sp>
+        <p:nvSpPr>
+          <p:cNvPr id="688" name="stat_3:bar"/>
+          <p:cNvSpPr/>
+          <p:nvPr/>
+        </p:nvSpPr>
+        <p:spPr>
+          <a:xfrm>
+            <a:off x="4613623" y="3056381"/>
+            <a:ext cx="50800" cy="1130808"/>
+          </a:xfrm>
+          <a:prstGeom prst="rect">
+            <a:avLst/>
+          </a:prstGeom>
+          <a:solidFill>
+            <a:srgbClr val="0077FF"/>
+          </a:solidFill>
+          <a:ln>
+            <a:noFill/>
+          </a:ln>
+          <a:effectLst/>
+        </p:spPr>
+        <p:style>
+          <a:lnRef idx="1">
+            <a:schemeClr val="accent1"/>
+          </a:lnRef>
+          <a:fillRef idx="3">
+            <a:schemeClr val="accent1"/>
+          </a:fillRef>
+          <a:effectRef idx="2">
+            <a:schemeClr val="accent1"/>
+          </a:effectRef>
+          <a:fontRef idx="minor">
+            <a:schemeClr val="lt1"/>
+          </a:fontRef>
+        </p:style>
+        <p:txBody>
+          <a:bodyPr rtlCol="0" anchor="ctr"/>
+          <a:lstStyle/>
+          <a:p>
+            <a:pPr algn="ctr"/>
+          </a:p>
+        </p:txBody>
+      </p:sp>
+      <p:sp>
+        <p:nvSpPr>
+          <p:cNvPr id="689" name="stat_3"/>
+          <p:cNvSpPr txBox="1"/>
+          <p:nvPr/>
+        </p:nvSpPr>
+        <p:spPr>
+          <a:xfrm>
+            <a:off x="4791423" y="2983229"/>
+            <a:ext cx="3827710" cy="1203960"/>
+          </a:xfrm>
+          <a:prstGeom prst="rect">
+            <a:avLst/>
+          </a:prstGeom>
+          <a:noFill/>
+        </p:spPr>
+        <p:txBody>
+          <a:bodyPr wrap="square" lIns="76200" rIns="76200" tIns="0" bIns="0">
+            <a:spAutoFit/>
+          </a:bodyPr>
+          <a:lstStyle/>
+          <a:p>
+            <a:pPr>
+              <a:lnSpc>
+                <a:spcPct val="100000"/>
+              </a:lnSpc>
+              <a:spcAft>
+                <a:spcPts val="200"/>
+              </a:spcAft>
+              <a:defRPr sz="3200" b="1">
+                <a:solidFill>
+                  <a:srgbClr val="0077FF"/>
+                </a:solidFill>
+                <a:latin typeface="Play"/>
+                <a:ea typeface="Play"/>
+                <a:cs typeface="Play"/>
+              </a:defRPr>
+            </a:pPr>
+            <a:r>
+              <a:rPr sz="3200" b="1">
+                <a:solidFill>
+                  <a:srgbClr val="0077FF"/>
+                </a:solidFill>
+                <a:latin typeface="Play"/>
+                <a:ea typeface="Play"/>
+                <a:cs typeface="Play"/>
+              </a:rPr>
+              <a:t>2026</a:t>
+            </a:r>
+          </a:p>
+          <a:p>
+            <a:pPr>
+              <a:spcAft>
+                <a:spcPts val="300"/>
+              </a:spcAft>
+              <a:defRPr sz="1800" b="0">
+                <a:solidFill>
+                  <a:srgbClr val="000000"/>
+                </a:solidFill>
+                <a:latin typeface="Play"/>
+                <a:ea typeface="Play"/>
+                <a:cs typeface="Play"/>
+              </a:defRPr>
+            </a:pPr>
+            <a:r>
+              <a:rPr sz="1800" b="0">
+                <a:solidFill>
+                  <a:srgbClr val="000000"/>
+                </a:solidFill>
+                <a:latin typeface="Play"/>
+                <a:ea typeface="Play"/>
+                <a:cs typeface="Play"/>
+              </a:rPr>
+              <a:t>Запуск для всей компании в Q4 2026</a:t>
+            </a:r>
+          </a:p>
+        </p:txBody>
+      </p:sp>
     </p:spTree>
   </p:cSld>
   <p:clrMapOvr>
@@ -6938,7 +10028,7 @@
 </p:sld>
 </file>
 
-<file path=ppt/slides/slide59.xml><?xml version="1.0" encoding="utf-8"?>
+<file path=ppt/slides/slide64.xml><?xml version="1.0" encoding="utf-8"?>
 <p:sld xmlns:a="http://schemas.openxmlformats.org/drawingml/2006/main" xmlns:p="http://schemas.openxmlformats.org/presentationml/2006/main" xmlns:r="http://schemas.openxmlformats.org/officeDocument/2006/relationships">
   <p:cSld>
     <p:spTree>
@@ -6992,40 +10082,54 @@
                 <a:ea typeface="Play"/>
                 <a:cs typeface="Play"/>
               </a:rPr>
-              <a:t>Ожидаемый эффект</a:t>
+              <a:t>План пилота: 6 недель, 2 команды</a:t>
             </a:r>
           </a:p>
         </p:txBody>
       </p:sp>
       <p:sp>
         <p:nvSpPr>
-          <p:cNvPr id="3" name="body_left"/>
-          <p:cNvSpPr txBox="1"/>
+          <p:cNvPr id="3" name="Pentagon 2"/>
+          <p:cNvSpPr/>
           <p:nvPr/>
         </p:nvSpPr>
         <p:spPr>
           <a:xfrm>
-            <a:off x="274320" y="1414513"/>
-            <a:ext cx="3457574" cy="2602405"/>
+            <a:off x="4583887" y="1373314"/>
+            <a:ext cx="4035247" cy="442341"/>
           </a:xfrm>
-          <a:prstGeom prst="rect">
+          <a:prstGeom prst="homePlate">
             <a:avLst/>
           </a:prstGeom>
-          <a:noFill/>
+          <a:solidFill>
+            <a:srgbClr val="0077FF"/>
+          </a:solidFill>
+          <a:ln>
+            <a:noFill/>
+          </a:ln>
         </p:spPr>
+        <p:style>
+          <a:lnRef idx="1">
+            <a:schemeClr val="accent1"/>
+          </a:lnRef>
+          <a:fillRef idx="3">
+            <a:schemeClr val="accent1"/>
+          </a:fillRef>
+          <a:effectRef idx="2">
+            <a:schemeClr val="accent1"/>
+          </a:effectRef>
+          <a:fontRef idx="minor">
+            <a:schemeClr val="lt1"/>
+          </a:fontRef>
+        </p:style>
         <p:txBody>
-          <a:bodyPr wrap="square" lIns="76200" rIns="76200" tIns="50800" bIns="50800">
-            <a:spAutoFit/>
-          </a:bodyPr>
+          <a:bodyPr rtlCol="0" anchor="ctr" wrap="square" lIns="12700" rIns="12700" tIns="12700" bIns="12700"/>
           <a:lstStyle/>
           <a:p>
-            <a:pPr algn="l">
-              <a:spcAft>
-                <a:spcPts val="300"/>
-              </a:spcAft>
-              <a:defRPr sz="1800" b="1">
-                <a:solidFill>
-                  <a:srgbClr val="000000"/>
+            <a:pPr algn="ctr">
+              <a:defRPr sz="1400" b="0">
+                <a:solidFill>
+                  <a:srgbClr val="FFFFFF"/>
                 </a:solidFill>
                 <a:latin typeface="Play"/>
                 <a:ea typeface="Play"/>
@@ -7033,25 +10137,62 @@
               </a:defRPr>
             </a:pPr>
             <a:r>
-              <a:rPr sz="1800" b="1">
-                <a:solidFill>
-                  <a:srgbClr val="000000"/>
+              <a:rPr sz="1400" b="0">
+                <a:solidFill>
+                  <a:srgbClr val="FFFFFF"/>
                 </a:solidFill>
                 <a:latin typeface="Play"/>
                 <a:ea typeface="Play"/>
                 <a:cs typeface="Play"/>
               </a:rPr>
-              <a:t>• Сокращение времени сборки с 186 до 4 минут</a:t>
+              <a:t>Неделя 1</a:t>
             </a:r>
           </a:p>
+        </p:txBody>
+      </p:sp>
+      <p:sp>
+        <p:nvSpPr>
+          <p:cNvPr id="4" name="Chevron 3"/>
+          <p:cNvSpPr/>
+          <p:nvPr/>
+        </p:nvSpPr>
+        <p:spPr>
+          <a:xfrm>
+            <a:off x="4583887" y="1887664"/>
+            <a:ext cx="4035247" cy="442341"/>
+          </a:xfrm>
+          <a:prstGeom prst="chevron">
+            <a:avLst/>
+          </a:prstGeom>
+          <a:solidFill>
+            <a:srgbClr val="0077FF"/>
+          </a:solidFill>
+          <a:ln>
+            <a:noFill/>
+          </a:ln>
+        </p:spPr>
+        <p:style>
+          <a:lnRef idx="1">
+            <a:schemeClr val="accent1"/>
+          </a:lnRef>
+          <a:fillRef idx="3">
+            <a:schemeClr val="accent1"/>
+          </a:fillRef>
+          <a:effectRef idx="2">
+            <a:schemeClr val="accent1"/>
+          </a:effectRef>
+          <a:fontRef idx="minor">
+            <a:schemeClr val="lt1"/>
+          </a:fontRef>
+        </p:style>
+        <p:txBody>
+          <a:bodyPr rtlCol="0" anchor="ctr" wrap="square" lIns="12700" rIns="12700" tIns="12700" bIns="12700"/>
+          <a:lstStyle/>
           <a:p>
-            <a:pPr algn="l">
-              <a:spcAft>
-                <a:spcPts val="300"/>
-              </a:spcAft>
-              <a:defRPr sz="1800" b="1">
-                <a:solidFill>
-                  <a:srgbClr val="000000"/>
+            <a:pPr algn="ctr">
+              <a:defRPr sz="1400" b="0">
+                <a:solidFill>
+                  <a:srgbClr val="FFFFFF"/>
                 </a:solidFill>
                 <a:latin typeface="Play"/>
                 <a:ea typeface="Play"/>
@@ -7059,25 +10200,62 @@
               </a:defRPr>
             </a:pPr>
             <a:r>
-              <a:rPr sz="1800" b="1">
-                <a:solidFill>
-                  <a:srgbClr val="000000"/>
+              <a:rPr sz="1400" b="0">
+                <a:solidFill>
+                  <a:srgbClr val="FFFFFF"/>
                 </a:solidFill>
                 <a:latin typeface="Play"/>
                 <a:ea typeface="Play"/>
                 <a:cs typeface="Play"/>
               </a:rPr>
-              <a:t>• Сокращение времени до первой версии с 6 до 1 дня</a:t>
+              <a:t>Неделя 2</a:t>
             </a:r>
           </a:p>
+        </p:txBody>
+      </p:sp>
+      <p:sp>
+        <p:nvSpPr>
+          <p:cNvPr id="5" name="Chevron 4"/>
+          <p:cNvSpPr/>
+          <p:nvPr/>
+        </p:nvSpPr>
+        <p:spPr>
+          <a:xfrm>
+            <a:off x="4583887" y="2402014"/>
+            <a:ext cx="4035247" cy="442341"/>
+          </a:xfrm>
+          <a:prstGeom prst="chevron">
+            <a:avLst/>
+          </a:prstGeom>
+          <a:solidFill>
+            <a:srgbClr val="0077FF"/>
+          </a:solidFill>
+          <a:ln>
+            <a:noFill/>
+          </a:ln>
+        </p:spPr>
+        <p:style>
+          <a:lnRef idx="1">
+            <a:schemeClr val="accent1"/>
+          </a:lnRef>
+          <a:fillRef idx="3">
+            <a:schemeClr val="accent1"/>
+          </a:fillRef>
+          <a:effectRef idx="2">
+            <a:schemeClr val="accent1"/>
+          </a:effectRef>
+          <a:fontRef idx="minor">
+            <a:schemeClr val="lt1"/>
+          </a:fontRef>
+        </p:style>
+        <p:txBody>
+          <a:bodyPr rtlCol="0" anchor="ctr" wrap="square" lIns="12700" rIns="12700" tIns="12700" bIns="12700"/>
+          <a:lstStyle/>
           <a:p>
-            <a:pPr algn="l">
-              <a:spcAft>
-                <a:spcPts val="300"/>
-              </a:spcAft>
-              <a:defRPr sz="1800" b="1">
-                <a:solidFill>
-                  <a:srgbClr val="000000"/>
+            <a:pPr algn="ctr">
+              <a:defRPr sz="1400" b="0">
+                <a:solidFill>
+                  <a:srgbClr val="FFFFFF"/>
                 </a:solidFill>
                 <a:latin typeface="Play"/>
                 <a:ea typeface="Play"/>
@@ -7085,48 +10263,62 @@
               </a:defRPr>
             </a:pPr>
             <a:r>
-              <a:rPr sz="1800" b="1">
-                <a:solidFill>
-                  <a:srgbClr val="000000"/>
+              <a:rPr sz="1400" b="0">
+                <a:solidFill>
+                  <a:srgbClr val="FFFFFF"/>
                 </a:solidFill>
                 <a:latin typeface="Play"/>
                 <a:ea typeface="Play"/>
                 <a:cs typeface="Play"/>
               </a:rPr>
-              <a:t>• Снижение нарушений стиля до 2 из 68 колод</a:t>
+              <a:t>Неделя 3</a:t>
             </a:r>
           </a:p>
         </p:txBody>
       </p:sp>
       <p:sp>
         <p:nvSpPr>
-          <p:cNvPr id="4" name="body_right"/>
-          <p:cNvSpPr txBox="1"/>
+          <p:cNvPr id="6" name="Chevron 5"/>
+          <p:cNvSpPr/>
           <p:nvPr/>
         </p:nvSpPr>
         <p:spPr>
           <a:xfrm>
-            <a:off x="4006215" y="1414513"/>
-            <a:ext cx="3457574" cy="2602405"/>
+            <a:off x="4583887" y="2916364"/>
+            <a:ext cx="4035247" cy="442341"/>
           </a:xfrm>
-          <a:prstGeom prst="rect">
+          <a:prstGeom prst="chevron">
             <a:avLst/>
           </a:prstGeom>
-          <a:noFill/>
+          <a:solidFill>
+            <a:srgbClr val="0077FF"/>
+          </a:solidFill>
+          <a:ln>
+            <a:noFill/>
+          </a:ln>
         </p:spPr>
+        <p:style>
+          <a:lnRef idx="1">
+            <a:schemeClr val="accent1"/>
+          </a:lnRef>
+          <a:fillRef idx="3">
+            <a:schemeClr val="accent1"/>
+          </a:fillRef>
+          <a:effectRef idx="2">
+            <a:schemeClr val="accent1"/>
+          </a:effectRef>
+          <a:fontRef idx="minor">
+            <a:schemeClr val="lt1"/>
+          </a:fontRef>
+        </p:style>
         <p:txBody>
-          <a:bodyPr wrap="square" lIns="76200" rIns="76200" tIns="50800" bIns="50800">
-            <a:spAutoFit/>
-          </a:bodyPr>
+          <a:bodyPr rtlCol="0" anchor="ctr" wrap="square" lIns="12700" rIns="12700" tIns="12700" bIns="12700"/>
           <a:lstStyle/>
           <a:p>
-            <a:pPr algn="l">
-              <a:spcAft>
-                <a:spcPts val="300"/>
-              </a:spcAft>
-              <a:defRPr sz="1800" b="1">
-                <a:solidFill>
-                  <a:srgbClr val="000000"/>
+            <a:pPr algn="ctr">
+              <a:defRPr sz="1400" b="0">
+                <a:solidFill>
+                  <a:srgbClr val="FFFFFF"/>
                 </a:solidFill>
                 <a:latin typeface="Play"/>
                 <a:ea typeface="Play"/>
@@ -7134,25 +10326,62 @@
               </a:defRPr>
             </a:pPr>
             <a:r>
-              <a:rPr sz="1800" b="1">
-                <a:solidFill>
-                  <a:srgbClr val="000000"/>
+              <a:rPr sz="1400" b="0">
+                <a:solidFill>
+                  <a:srgbClr val="FFFFFF"/>
                 </a:solidFill>
                 <a:latin typeface="Play"/>
                 <a:ea typeface="Play"/>
                 <a:cs typeface="Play"/>
               </a:rPr>
-              <a:t>• Увеличение объёма закрытых запросов до 38/нед</a:t>
+              <a:t>Неделя 4</a:t>
             </a:r>
           </a:p>
+        </p:txBody>
+      </p:sp>
+      <p:sp>
+        <p:nvSpPr>
+          <p:cNvPr id="7" name="Chevron 6"/>
+          <p:cNvSpPr/>
+          <p:nvPr/>
+        </p:nvSpPr>
+        <p:spPr>
+          <a:xfrm>
+            <a:off x="4583887" y="3430714"/>
+            <a:ext cx="4035247" cy="442341"/>
+          </a:xfrm>
+          <a:prstGeom prst="chevron">
+            <a:avLst/>
+          </a:prstGeom>
+          <a:solidFill>
+            <a:srgbClr val="0077FF"/>
+          </a:solidFill>
+          <a:ln>
+            <a:noFill/>
+          </a:ln>
+        </p:spPr>
+        <p:style>
+          <a:lnRef idx="1">
+            <a:schemeClr val="accent1"/>
+          </a:lnRef>
+          <a:fillRef idx="3">
+            <a:schemeClr val="accent1"/>
+          </a:fillRef>
+          <a:effectRef idx="2">
+            <a:schemeClr val="accent1"/>
+          </a:effectRef>
+          <a:fontRef idx="minor">
+            <a:schemeClr val="lt1"/>
+          </a:fontRef>
+        </p:style>
+        <p:txBody>
+          <a:bodyPr rtlCol="0" anchor="ctr" wrap="square" lIns="12700" rIns="12700" tIns="12700" bIns="12700"/>
+          <a:lstStyle/>
           <a:p>
-            <a:pPr algn="l">
-              <a:spcAft>
-                <a:spcPts val="300"/>
-              </a:spcAft>
-              <a:defRPr sz="1800" b="1">
-                <a:solidFill>
-                  <a:srgbClr val="000000"/>
+            <a:pPr algn="ctr">
+              <a:defRPr sz="1400" b="0">
+                <a:solidFill>
+                  <a:srgbClr val="FFFFFF"/>
                 </a:solidFill>
                 <a:latin typeface="Play"/>
                 <a:ea typeface="Play"/>
@@ -7160,15 +10389,78 @@
               </a:defRPr>
             </a:pPr>
             <a:r>
-              <a:rPr sz="1800" b="1">
-                <a:solidFill>
-                  <a:srgbClr val="000000"/>
+              <a:rPr sz="1400" b="0">
+                <a:solidFill>
+                  <a:srgbClr val="FFFFFF"/>
                 </a:solidFill>
                 <a:latin typeface="Play"/>
                 <a:ea typeface="Play"/>
                 <a:cs typeface="Play"/>
               </a:rPr>
-              <a:t>• Стоимость инференса за пилот – 1400 руб</a:t>
+              <a:t>Неделя 5</a:t>
+            </a:r>
+          </a:p>
+        </p:txBody>
+      </p:sp>
+      <p:sp>
+        <p:nvSpPr>
+          <p:cNvPr id="8" name="Chevron 7"/>
+          <p:cNvSpPr/>
+          <p:nvPr/>
+        </p:nvSpPr>
+        <p:spPr>
+          <a:xfrm>
+            <a:off x="4583887" y="3945064"/>
+            <a:ext cx="4035247" cy="442341"/>
+          </a:xfrm>
+          <a:prstGeom prst="chevron">
+            <a:avLst/>
+          </a:prstGeom>
+          <a:solidFill>
+            <a:srgbClr val="0077FF"/>
+          </a:solidFill>
+          <a:ln>
+            <a:noFill/>
+          </a:ln>
+        </p:spPr>
+        <p:style>
+          <a:lnRef idx="1">
+            <a:schemeClr val="accent1"/>
+          </a:lnRef>
+          <a:fillRef idx="3">
+            <a:schemeClr val="accent1"/>
+          </a:fillRef>
+          <a:effectRef idx="2">
+            <a:schemeClr val="accent1"/>
+          </a:effectRef>
+          <a:fontRef idx="minor">
+            <a:schemeClr val="lt1"/>
+          </a:fontRef>
+        </p:style>
+        <p:txBody>
+          <a:bodyPr rtlCol="0" anchor="ctr" wrap="square" lIns="12700" rIns="12700" tIns="12700" bIns="12700"/>
+          <a:lstStyle/>
+          <a:p>
+            <a:pPr algn="ctr">
+              <a:defRPr sz="1400" b="0">
+                <a:solidFill>
+                  <a:srgbClr val="FFFFFF"/>
+                </a:solidFill>
+                <a:latin typeface="Play"/>
+                <a:ea typeface="Play"/>
+                <a:cs typeface="Play"/>
+              </a:defRPr>
+            </a:pPr>
+            <a:r>
+              <a:rPr sz="1400" b="0">
+                <a:solidFill>
+                  <a:srgbClr val="FFFFFF"/>
+                </a:solidFill>
+                <a:latin typeface="Play"/>
+                <a:ea typeface="Play"/>
+                <a:cs typeface="Play"/>
+              </a:rPr>
+              <a:t>Неделя 6</a:t>
             </a:r>
           </a:p>
         </p:txBody>
@@ -7181,7 +10473,7 @@
 </p:sld>
 </file>
 
-<file path=ppt/slides/slide60.xml><?xml version="1.0" encoding="utf-8"?>
+<file path=ppt/slides/slide65.xml><?xml version="1.0" encoding="utf-8"?>
 <p:sld xmlns:a="http://schemas.openxmlformats.org/drawingml/2006/main" xmlns:p="http://schemas.openxmlformats.org/presentationml/2006/main" xmlns:r="http://schemas.openxmlformats.org/officeDocument/2006/relationships">
   <p:cSld>
     <p:spTree>
@@ -7193,261 +10485,59 @@
       <p:grpSpPr/>
       <p:sp>
         <p:nvSpPr>
-          <p:cNvPr id="2" name="title"/>
-          <p:cNvSpPr txBox="1"/>
+          <p:cNvPr id="1056" name="Google Shape;1056;p66"/>
+          <p:cNvSpPr/>
           <p:nvPr/>
         </p:nvSpPr>
         <p:spPr>
           <a:xfrm>
-            <a:off x="274320" y="282943"/>
-            <a:ext cx="6792986" cy="617220"/>
+            <a:off x="285748" y="276524"/>
+            <a:ext cx="8572456" cy="685711"/>
           </a:xfrm>
           <a:prstGeom prst="rect">
             <a:avLst/>
           </a:prstGeom>
           <a:noFill/>
+          <a:ln>
+            <a:noFill/>
+          </a:ln>
         </p:spPr>
         <p:txBody>
-          <a:bodyPr wrap="square" lIns="76200" rIns="76200" tIns="50800" bIns="50800">
-            <a:spAutoFit/>
+          <a:bodyPr anchorCtr="0" anchor="ctr" bIns="91425" lIns="91425" spcFirstLastPara="1" rIns="91425" wrap="square" tIns="91425">
+            <a:noAutofit/>
           </a:bodyPr>
           <a:lstStyle/>
           <a:p>
-            <a:pPr algn="l">
-              <a:spcAft>
-                <a:spcPts val="300"/>
-              </a:spcAft>
-              <a:defRPr sz="2438">
-                <a:solidFill>
-                  <a:srgbClr val="000000"/>
-                </a:solidFill>
-                <a:latin typeface="Play"/>
-                <a:ea typeface="Play"/>
-                <a:cs typeface="Play"/>
-              </a:defRPr>
+            <a:pPr indent="0" lvl="0" marL="0" rtl="0" algn="l">
+              <a:spcBef>
+                <a:spcPts val="0"/>
+              </a:spcBef>
+              <a:spcAft>
+                <a:spcPts val="0"/>
+              </a:spcAft>
+              <a:buNone/>
             </a:pPr>
             <a:r>
-              <a:rPr sz="2438">
-                <a:solidFill>
-                  <a:srgbClr val="000000"/>
-                </a:solidFill>
-                <a:latin typeface="Play"/>
-                <a:ea typeface="Play"/>
-                <a:cs typeface="Play"/>
-              </a:rPr>
-              <a:t>Ресурсы и сроки</a:t>
+              <a:t/>
             </a:r>
+            <a:endParaRPr/>
           </a:p>
         </p:txBody>
       </p:sp>
       <p:sp>
         <p:nvSpPr>
-          <p:cNvPr id="3" name="body_left"/>
-          <p:cNvSpPr txBox="1"/>
-          <p:nvPr/>
-        </p:nvSpPr>
-        <p:spPr>
-          <a:xfrm>
-            <a:off x="274320" y="1414513"/>
-            <a:ext cx="4035247" cy="1790812"/>
-          </a:xfrm>
-          <a:prstGeom prst="rect">
-            <a:avLst/>
-          </a:prstGeom>
-          <a:noFill/>
-        </p:spPr>
-        <p:txBody>
-          <a:bodyPr wrap="square" lIns="76200" rIns="76200" tIns="50800" bIns="50800">
-            <a:spAutoFit/>
-          </a:bodyPr>
-          <a:lstStyle/>
-          <a:p>
-            <a:pPr algn="l">
-              <a:spcAft>
-                <a:spcPts val="300"/>
-              </a:spcAft>
-              <a:defRPr sz="1600">
-                <a:solidFill>
-                  <a:srgbClr val="000000"/>
-                </a:solidFill>
-                <a:latin typeface="Play"/>
-                <a:ea typeface="Play"/>
-                <a:cs typeface="Play"/>
-              </a:defRPr>
-            </a:pPr>
-            <a:r>
-              <a:rPr sz="1600">
-                <a:solidFill>
-                  <a:srgbClr val="000000"/>
-                </a:solidFill>
-                <a:latin typeface="Play"/>
-                <a:ea typeface="Play"/>
-                <a:cs typeface="Play"/>
-              </a:rPr>
-              <a:t>• Сервис работает на 2 vCPU / 2 ГБ RAM</a:t>
-            </a:r>
-          </a:p>
-          <a:p>
-            <a:pPr algn="l">
-              <a:spcAft>
-                <a:spcPts val="300"/>
-              </a:spcAft>
-              <a:defRPr sz="1600">
-                <a:solidFill>
-                  <a:srgbClr val="000000"/>
-                </a:solidFill>
-                <a:latin typeface="Play"/>
-                <a:ea typeface="Play"/>
-                <a:cs typeface="Play"/>
-              </a:defRPr>
-            </a:pPr>
-            <a:r>
-              <a:rPr sz="1600">
-                <a:solidFill>
-                  <a:srgbClr val="000000"/>
-                </a:solidFill>
-                <a:latin typeface="Play"/>
-                <a:ea typeface="Play"/>
-                <a:cs typeface="Play"/>
-              </a:rPr>
-              <a:t>• Модель gpt-oss-20b через OpenAI-совместимый протокол</a:t>
-            </a:r>
-          </a:p>
-          <a:p>
-            <a:pPr algn="l">
-              <a:spcAft>
-                <a:spcPts val="300"/>
-              </a:spcAft>
-              <a:defRPr sz="1600">
-                <a:solidFill>
-                  <a:srgbClr val="000000"/>
-                </a:solidFill>
-                <a:latin typeface="Play"/>
-                <a:ea typeface="Play"/>
-                <a:cs typeface="Play"/>
-              </a:defRPr>
-            </a:pPr>
-            <a:r>
-              <a:rPr sz="1600">
-                <a:solidFill>
-                  <a:srgbClr val="000000"/>
-                </a:solidFill>
-                <a:latin typeface="Play"/>
-                <a:ea typeface="Play"/>
-                <a:cs typeface="Play"/>
-              </a:rPr>
-              <a:t>• План: Q3 2026 – подключение 4 команд, домен и HTTPS</a:t>
-            </a:r>
-          </a:p>
-        </p:txBody>
-      </p:sp>
-      <p:sp>
-        <p:nvSpPr>
-          <p:cNvPr id="4" name="body_right"/>
-          <p:cNvSpPr txBox="1"/>
-          <p:nvPr/>
-        </p:nvSpPr>
-        <p:spPr>
-          <a:xfrm>
-            <a:off x="4583887" y="1414513"/>
-            <a:ext cx="4035247" cy="1790812"/>
-          </a:xfrm>
-          <a:prstGeom prst="rect">
-            <a:avLst/>
-          </a:prstGeom>
-          <a:noFill/>
-        </p:spPr>
-        <p:txBody>
-          <a:bodyPr wrap="square" lIns="76200" rIns="76200" tIns="50800" bIns="50800">
-            <a:spAutoFit/>
-          </a:bodyPr>
-          <a:lstStyle/>
-          <a:p>
-            <a:pPr algn="l">
-              <a:spcAft>
-                <a:spcPts val="300"/>
-              </a:spcAft>
-              <a:defRPr sz="1800">
-                <a:solidFill>
-                  <a:srgbClr val="000000"/>
-                </a:solidFill>
-                <a:latin typeface="Play"/>
-                <a:ea typeface="Play"/>
-                <a:cs typeface="Play"/>
-              </a:defRPr>
-            </a:pPr>
-            <a:r>
-              <a:rPr sz="1800">
-                <a:solidFill>
-                  <a:srgbClr val="000000"/>
-                </a:solidFill>
-                <a:latin typeface="Play"/>
-                <a:ea typeface="Play"/>
-                <a:cs typeface="Play"/>
-              </a:rPr>
-              <a:t>• Q4 2026 – доступ для всей компании, интеграция с хранилищем</a:t>
-            </a:r>
-          </a:p>
-          <a:p>
-            <a:pPr algn="l">
-              <a:spcAft>
-                <a:spcPts val="300"/>
-              </a:spcAft>
-              <a:defRPr sz="1800">
-                <a:solidFill>
-                  <a:srgbClr val="000000"/>
-                </a:solidFill>
-                <a:latin typeface="Play"/>
-                <a:ea typeface="Play"/>
-                <a:cs typeface="Play"/>
-              </a:defRPr>
-            </a:pPr>
-            <a:r>
-              <a:rPr sz="1800">
-                <a:solidFill>
-                  <a:srgbClr val="000000"/>
-                </a:solidFill>
-                <a:latin typeface="Play"/>
-                <a:ea typeface="Play"/>
-                <a:cs typeface="Play"/>
-              </a:rPr>
-              <a:t>• Q1 2027 – генерация иллюстраций под стиль шаблона</a:t>
-            </a:r>
-          </a:p>
-        </p:txBody>
-      </p:sp>
-    </p:spTree>
-  </p:cSld>
-  <p:clrMapOvr>
-    <a:masterClrMapping/>
-  </p:clrMapOvr>
-</p:sld>
-</file>
-
-<file path=ppt/slides/slide61.xml><?xml version="1.0" encoding="utf-8"?>
-<p:sld xmlns:a="http://schemas.openxmlformats.org/drawingml/2006/main" xmlns:p="http://schemas.openxmlformats.org/presentationml/2006/main" xmlns:r="http://schemas.openxmlformats.org/officeDocument/2006/relationships">
-  <p:cSld>
-    <p:spTree>
-      <p:nvGrpSpPr>
-        <p:cNvPr id="1" name=""/>
-        <p:cNvGrpSpPr/>
-        <p:nvPr/>
-      </p:nvGrpSpPr>
-      <p:grpSpPr/>
-      <p:sp>
-        <p:nvSpPr>
-          <p:cNvPr id="1027" name="Google Shape;1027;p65"/>
+          <p:cNvPr id="1057" name="Google Shape;1057;p66"/>
           <p:cNvSpPr/>
           <p:nvPr/>
         </p:nvSpPr>
         <p:spPr>
           <a:xfrm>
-            <a:off x="6064222" y="1209852"/>
-            <a:ext cx="2793985" cy="3014270"/>
+            <a:off x="3838239" y="276524"/>
+            <a:ext cx="4948861" cy="1025866"/>
           </a:xfrm>
           <a:prstGeom prst="roundRect">
             <a:avLst>
-              <a:gd fmla="val 3436" name="adj"/>
+              <a:gd fmla="val 10361" name="adj"/>
             </a:avLst>
           </a:prstGeom>
           <a:solidFill>
@@ -7481,104 +10571,14 @@
       </p:sp>
       <p:sp>
         <p:nvSpPr>
-          <p:cNvPr id="1029" name="Google Shape;1029;p65"/>
+          <p:cNvPr id="1058" name="Google Shape;1058;p66"/>
           <p:cNvSpPr/>
           <p:nvPr/>
         </p:nvSpPr>
         <p:spPr>
           <a:xfrm>
-            <a:off x="3174981" y="1209852"/>
-            <a:ext cx="2793985" cy="3014270"/>
-          </a:xfrm>
-          <a:prstGeom prst="roundRect">
-            <a:avLst>
-              <a:gd fmla="val 3436" name="adj"/>
-            </a:avLst>
-          </a:prstGeom>
-          <a:solidFill>
-            <a:schemeClr val="lt2"/>
-          </a:solidFill>
-          <a:ln>
-            <a:noFill/>
-          </a:ln>
-        </p:spPr>
-        <p:txBody>
-          <a:bodyPr anchorCtr="0" anchor="ctr" bIns="91425" lIns="91425" spcFirstLastPara="1" rIns="91425" wrap="square" tIns="91425">
-            <a:noAutofit/>
-          </a:bodyPr>
-          <a:lstStyle/>
-          <a:p>
-            <a:pPr indent="0" lvl="0" marL="0" rtl="0" algn="l">
-              <a:spcBef>
-                <a:spcPts val="0"/>
-              </a:spcBef>
-              <a:spcAft>
-                <a:spcPts val="0"/>
-              </a:spcAft>
-              <a:buNone/>
-            </a:pPr>
-            <a:r>
-              <a:t/>
-            </a:r>
-            <a:endParaRPr/>
-          </a:p>
-        </p:txBody>
-      </p:sp>
-      <p:sp>
-        <p:nvSpPr>
-          <p:cNvPr id="1031" name="Google Shape;1031;p65"/>
-          <p:cNvSpPr/>
-          <p:nvPr/>
-        </p:nvSpPr>
-        <p:spPr>
-          <a:xfrm>
-            <a:off x="285749" y="1209852"/>
-            <a:ext cx="2793985" cy="3014270"/>
-          </a:xfrm>
-          <a:prstGeom prst="roundRect">
-            <a:avLst>
-              <a:gd fmla="val 3436" name="adj"/>
-            </a:avLst>
-          </a:prstGeom>
-          <a:solidFill>
-            <a:schemeClr val="lt2"/>
-          </a:solidFill>
-          <a:ln>
-            <a:noFill/>
-          </a:ln>
-        </p:spPr>
-        <p:txBody>
-          <a:bodyPr anchorCtr="0" anchor="ctr" bIns="91425" lIns="91425" spcFirstLastPara="1" rIns="91425" wrap="square" tIns="91425">
-            <a:noAutofit/>
-          </a:bodyPr>
-          <a:lstStyle/>
-          <a:p>
-            <a:pPr indent="0" lvl="0" marL="0" rtl="0" algn="l">
-              <a:spcBef>
-                <a:spcPts val="0"/>
-              </a:spcBef>
-              <a:spcAft>
-                <a:spcPts val="0"/>
-              </a:spcAft>
-              <a:buNone/>
-            </a:pPr>
-            <a:r>
-              <a:t/>
-            </a:r>
-            <a:endParaRPr/>
-          </a:p>
-        </p:txBody>
-      </p:sp>
-      <p:sp>
-        <p:nvSpPr>
-          <p:cNvPr id="1032" name="Google Shape;1032;p65"/>
-          <p:cNvSpPr/>
-          <p:nvPr/>
-        </p:nvSpPr>
-        <p:spPr>
-          <a:xfrm>
-            <a:off x="285748" y="286047"/>
-            <a:ext cx="8572456" cy="3938075"/>
+            <a:off x="4048160" y="486417"/>
+            <a:ext cx="4529021" cy="128571"/>
           </a:xfrm>
           <a:prstGeom prst="rect">
             <a:avLst/>
@@ -7612,55 +10612,14 @@
       </p:sp>
       <p:sp>
         <p:nvSpPr>
-          <p:cNvPr id="1033" name="Google Shape;1033;p65"/>
-          <p:cNvSpPr/>
-          <p:nvPr/>
-        </p:nvSpPr>
-        <p:spPr>
-          <a:xfrm>
-            <a:off x="285748" y="1209852"/>
-            <a:ext cx="8572456" cy="3014270"/>
-          </a:xfrm>
-          <a:prstGeom prst="rect">
-            <a:avLst/>
-          </a:prstGeom>
-          <a:noFill/>
-          <a:ln>
-            <a:noFill/>
-          </a:ln>
-        </p:spPr>
-        <p:txBody>
-          <a:bodyPr anchorCtr="0" anchor="ctr" bIns="91425" lIns="91425" spcFirstLastPara="1" rIns="91425" wrap="square" tIns="91425">
-            <a:noAutofit/>
-          </a:bodyPr>
-          <a:lstStyle/>
-          <a:p>
-            <a:pPr indent="0" lvl="0" marL="0" rtl="0" algn="l">
-              <a:spcBef>
-                <a:spcPts val="0"/>
-              </a:spcBef>
-              <a:spcAft>
-                <a:spcPts val="0"/>
-              </a:spcAft>
-              <a:buNone/>
-            </a:pPr>
-            <a:r>
-              <a:t/>
-            </a:r>
-            <a:endParaRPr/>
-          </a:p>
-        </p:txBody>
-      </p:sp>
-      <p:sp>
-        <p:nvSpPr>
-          <p:cNvPr id="1034" name="title"/>
+          <p:cNvPr id="1059" name="title"/>
           <p:cNvSpPr txBox="1"/>
           <p:nvPr/>
         </p:nvSpPr>
         <p:spPr>
           <a:xfrm>
             <a:off x="274320" y="282943"/>
-            <a:ext cx="6792986" cy="617220"/>
+            <a:ext cx="3412266" cy="932027"/>
           </a:xfrm>
           <a:prstGeom prst="rect">
             <a:avLst/>
@@ -7695,112 +10654,358 @@
                 <a:ea typeface="Play"/>
                 <a:cs typeface="Play"/>
               </a:rPr>
-              <a:t>Риски</a:t>
+              <a:t>Результаты пилота: эффективность</a:t>
             </a:r>
           </a:p>
         </p:txBody>
       </p:sp>
-      <p:sp>
-        <p:nvSpPr>
-          <p:cNvPr id="1035" name="body"/>
-          <p:cNvSpPr txBox="1"/>
+      <p:graphicFrame>
+        <p:nvGraphicFramePr>
+          <p:cNvPr id="1060" name="Table 1059"/>
+          <p:cNvGraphicFramePr>
+            <a:graphicFrameLocks noGrp="1"/>
+          </p:cNvGraphicFramePr>
           <p:nvPr/>
-        </p:nvSpPr>
-        <p:spPr>
-          <a:xfrm>
-            <a:off x="274320" y="1414513"/>
-            <a:ext cx="8344814" cy="1046136"/>
-          </a:xfrm>
-          <a:prstGeom prst="rect">
-            <a:avLst/>
-          </a:prstGeom>
-          <a:noFill/>
-        </p:spPr>
-        <p:txBody>
-          <a:bodyPr wrap="square" lIns="76200" rIns="76200" tIns="50800" bIns="50800">
-            <a:spAutoFit/>
-          </a:bodyPr>
-          <a:lstStyle/>
-          <a:p>
-            <a:pPr algn="l">
-              <a:spcAft>
-                <a:spcPts val="300"/>
-              </a:spcAft>
-              <a:defRPr sz="1400">
-                <a:solidFill>
-                  <a:srgbClr val="000000"/>
-                </a:solidFill>
-                <a:latin typeface="Play"/>
-                <a:ea typeface="Play"/>
-                <a:cs typeface="Play"/>
-              </a:defRPr>
-            </a:pPr>
-            <a:r>
-              <a:rPr sz="1400">
-                <a:solidFill>
-                  <a:srgbClr val="000000"/>
-                </a:solidFill>
-                <a:latin typeface="Play"/>
-                <a:ea typeface="Play"/>
-                <a:cs typeface="Play"/>
-              </a:rPr>
-              <a:t>• Слабая модель может выдумать неверные цифры – аудит проверяет</a:t>
-            </a:r>
-          </a:p>
-          <a:p>
-            <a:pPr algn="l">
-              <a:spcAft>
-                <a:spcPts val="300"/>
-              </a:spcAft>
-              <a:defRPr sz="1400">
-                <a:solidFill>
-                  <a:srgbClr val="000000"/>
-                </a:solidFill>
-                <a:latin typeface="Play"/>
-                <a:ea typeface="Play"/>
-                <a:cs typeface="Play"/>
-              </a:defRPr>
-            </a:pPr>
-            <a:r>
-              <a:rPr sz="1400">
-                <a:solidFill>
-                  <a:srgbClr val="000000"/>
-                </a:solidFill>
-                <a:latin typeface="Play"/>
-                <a:ea typeface="Play"/>
-                <a:cs typeface="Play"/>
-              </a:rPr>
-              <a:t>• Плохой шаблон приводит к использованию рабочей области вместо готовых страниц</a:t>
-            </a:r>
-          </a:p>
-          <a:p>
-            <a:pPr algn="l">
-              <a:spcAft>
-                <a:spcPts val="300"/>
-              </a:spcAft>
-              <a:defRPr sz="1400">
-                <a:solidFill>
-                  <a:srgbClr val="000000"/>
-                </a:solidFill>
-                <a:latin typeface="Play"/>
-                <a:ea typeface="Play"/>
-                <a:cs typeface="Play"/>
-              </a:defRPr>
-            </a:pPr>
-            <a:r>
-              <a:rPr sz="1400">
-                <a:solidFill>
-                  <a:srgbClr val="000000"/>
-                </a:solidFill>
-                <a:latin typeface="Play"/>
-                <a:ea typeface="Play"/>
-                <a:cs typeface="Play"/>
-              </a:rPr>
-              <a:t>• Нагрузка выше 20 одновременных задач требует внешней очереди</a:t>
-            </a:r>
-          </a:p>
-        </p:txBody>
-      </p:sp>
+        </p:nvGraphicFramePr>
+        <p:xfrm>
+          <a:off x="4583887" y="1394994"/>
+          <a:ext cx="4035247" cy="3028415"/>
+        </p:xfrm>
+        <a:graphic>
+          <a:graphicData uri="http://schemas.openxmlformats.org/drawingml/2006/table">
+            <a:tbl>
+              <a:tblPr firstRow="1" bandRow="1">
+                <a:tableStyleId>{5C22544A-7EE6-4342-B048-85BDC9FD1C3A}</a:tableStyleId>
+              </a:tblPr>
+              <a:tblGrid>
+                <a:gridCol w="1345082"/>
+                <a:gridCol w="1345082"/>
+                <a:gridCol w="1345083"/>
+              </a:tblGrid>
+              <a:tr h="757103">
+                <a:tc>
+                  <a:txBody>
+                    <a:bodyPr/>
+                    <a:lstStyle/>
+                    <a:p>
+                      <a:pPr>
+                        <a:defRPr sz="1300" b="1">
+                          <a:solidFill>
+                            <a:srgbClr val="FFFFFF"/>
+                          </a:solidFill>
+                          <a:latin typeface="Play"/>
+                          <a:ea typeface="Play"/>
+                          <a:cs typeface="Play"/>
+                        </a:defRPr>
+                      </a:pPr>
+                      <a:r>
+                        <a:t>Показатель</a:t>
+                      </a:r>
+                    </a:p>
+                  </a:txBody>
+                  <a:tcPr>
+                    <a:solidFill>
+                      <a:srgbClr val="0077FF"/>
+                    </a:solidFill>
+                  </a:tcPr>
+                </a:tc>
+                <a:tc>
+                  <a:txBody>
+                    <a:bodyPr/>
+                    <a:lstStyle/>
+                    <a:p>
+                      <a:pPr>
+                        <a:defRPr sz="1300" b="1">
+                          <a:solidFill>
+                            <a:srgbClr val="FFFFFF"/>
+                          </a:solidFill>
+                          <a:latin typeface="Play"/>
+                          <a:ea typeface="Play"/>
+                          <a:cs typeface="Play"/>
+                        </a:defRPr>
+                      </a:pPr>
+                      <a:r>
+                        <a:t>Сейчас</a:t>
+                      </a:r>
+                    </a:p>
+                  </a:txBody>
+                  <a:tcPr>
+                    <a:solidFill>
+                      <a:srgbClr val="0077FF"/>
+                    </a:solidFill>
+                  </a:tcPr>
+                </a:tc>
+                <a:tc>
+                  <a:txBody>
+                    <a:bodyPr/>
+                    <a:lstStyle/>
+                    <a:p>
+                      <a:pPr>
+                        <a:defRPr sz="1300" b="1">
+                          <a:solidFill>
+                            <a:srgbClr val="FFFFFF"/>
+                          </a:solidFill>
+                          <a:latin typeface="Play"/>
+                          <a:ea typeface="Play"/>
+                          <a:cs typeface="Play"/>
+                        </a:defRPr>
+                      </a:pPr>
+                      <a:r>
+                        <a:t>Сервис</a:t>
+                      </a:r>
+                    </a:p>
+                  </a:txBody>
+                  <a:tcPr>
+                    <a:solidFill>
+                      <a:srgbClr val="0077FF"/>
+                    </a:solidFill>
+                  </a:tcPr>
+                </a:tc>
+              </a:tr>
+              <a:tr h="757103">
+                <a:tc>
+                  <a:txBody>
+                    <a:bodyPr/>
+                    <a:lstStyle/>
+                    <a:p>
+                      <a:pPr>
+                        <a:defRPr sz="1300" b="0">
+                          <a:solidFill>
+                            <a:srgbClr val="000000"/>
+                          </a:solidFill>
+                          <a:latin typeface="Play"/>
+                          <a:ea typeface="Play"/>
+                          <a:cs typeface="Play"/>
+                        </a:defRPr>
+                      </a:pPr>
+                      <a:r>
+                        <a:t>Время, мин</a:t>
+                      </a:r>
+                    </a:p>
+                  </a:txBody>
+                  <a:tcPr>
+                    <a:solidFill>
+                      <a:srgbClr val="FFFFFF"/>
+                    </a:solidFill>
+                  </a:tcPr>
+                </a:tc>
+                <a:tc>
+                  <a:txBody>
+                    <a:bodyPr/>
+                    <a:lstStyle/>
+                    <a:p>
+                      <a:pPr>
+                        <a:defRPr sz="1300" b="0">
+                          <a:solidFill>
+                            <a:srgbClr val="000000"/>
+                          </a:solidFill>
+                          <a:latin typeface="Play"/>
+                          <a:ea typeface="Play"/>
+                          <a:cs typeface="Play"/>
+                        </a:defRPr>
+                      </a:pPr>
+                      <a:r>
+                        <a:t>186</a:t>
+                      </a:r>
+                    </a:p>
+                  </a:txBody>
+                  <a:tcPr>
+                    <a:solidFill>
+                      <a:srgbClr val="FFFFFF"/>
+                    </a:solidFill>
+                  </a:tcPr>
+                </a:tc>
+                <a:tc>
+                  <a:txBody>
+                    <a:bodyPr/>
+                    <a:lstStyle/>
+                    <a:p>
+                      <a:pPr>
+                        <a:defRPr sz="1300" b="0">
+                          <a:solidFill>
+                            <a:srgbClr val="000000"/>
+                          </a:solidFill>
+                          <a:latin typeface="Play"/>
+                          <a:ea typeface="Play"/>
+                          <a:cs typeface="Play"/>
+                        </a:defRPr>
+                      </a:pPr>
+                      <a:r>
+                        <a:t>4</a:t>
+                      </a:r>
+                    </a:p>
+                  </a:txBody>
+                  <a:tcPr>
+                    <a:solidFill>
+                      <a:srgbClr val="FFFFFF"/>
+                    </a:solidFill>
+                  </a:tcPr>
+                </a:tc>
+              </a:tr>
+              <a:tr h="757103">
+                <a:tc>
+                  <a:txBody>
+                    <a:bodyPr/>
+                    <a:lstStyle/>
+                    <a:p>
+                      <a:pPr>
+                        <a:defRPr sz="1300" b="0">
+                          <a:solidFill>
+                            <a:srgbClr val="000000"/>
+                          </a:solidFill>
+                          <a:latin typeface="Play"/>
+                          <a:ea typeface="Play"/>
+                          <a:cs typeface="Play"/>
+                        </a:defRPr>
+                      </a:pPr>
+                      <a:r>
+                        <a:t>Нарушения колод</a:t>
+                      </a:r>
+                    </a:p>
+                  </a:txBody>
+                  <a:tcPr>
+                    <a:solidFill>
+                      <a:srgbClr val="FFFFFF"/>
+                    </a:solidFill>
+                  </a:tcPr>
+                </a:tc>
+                <a:tc>
+                  <a:txBody>
+                    <a:bodyPr/>
+                    <a:lstStyle/>
+                    <a:p>
+                      <a:pPr>
+                        <a:defRPr sz="1300" b="0">
+                          <a:solidFill>
+                            <a:srgbClr val="000000"/>
+                          </a:solidFill>
+                          <a:latin typeface="Play"/>
+                          <a:ea typeface="Play"/>
+                          <a:cs typeface="Play"/>
+                        </a:defRPr>
+                      </a:pPr>
+                      <a:r>
+                        <a:t>19</a:t>
+                      </a:r>
+                    </a:p>
+                  </a:txBody>
+                  <a:tcPr>
+                    <a:solidFill>
+                      <a:srgbClr val="FFFFFF"/>
+                    </a:solidFill>
+                  </a:tcPr>
+                </a:tc>
+                <a:tc>
+                  <a:txBody>
+                    <a:bodyPr/>
+                    <a:lstStyle/>
+                    <a:p>
+                      <a:pPr>
+                        <a:defRPr sz="1300" b="0">
+                          <a:solidFill>
+                            <a:srgbClr val="000000"/>
+                          </a:solidFill>
+                          <a:latin typeface="Play"/>
+                          <a:ea typeface="Play"/>
+                          <a:cs typeface="Play"/>
+                        </a:defRPr>
+                      </a:pPr>
+                      <a:r>
+                        <a:t>2</a:t>
+                      </a:r>
+                    </a:p>
+                  </a:txBody>
+                  <a:tcPr>
+                    <a:solidFill>
+                      <a:srgbClr val="FFFFFF"/>
+                    </a:solidFill>
+                  </a:tcPr>
+                </a:tc>
+              </a:tr>
+              <a:tr h="757106">
+                <a:tc>
+                  <a:txBody>
+                    <a:bodyPr/>
+                    <a:lstStyle/>
+                    <a:p>
+                      <a:pPr>
+                        <a:defRPr sz="1300" b="0">
+                          <a:solidFill>
+                            <a:srgbClr val="000000"/>
+                          </a:solidFill>
+                          <a:latin typeface="Play"/>
+                          <a:ea typeface="Play"/>
+                          <a:cs typeface="Play"/>
+                        </a:defRPr>
+                      </a:pPr>
+                      <a:r>
+                        <a:t>Запросы, кол-во</a:t>
+                      </a:r>
+                    </a:p>
+                  </a:txBody>
+                  <a:tcPr>
+                    <a:solidFill>
+                      <a:srgbClr val="FFFFFF"/>
+                    </a:solidFill>
+                  </a:tcPr>
+                </a:tc>
+                <a:tc>
+                  <a:txBody>
+                    <a:bodyPr/>
+                    <a:lstStyle/>
+                    <a:p>
+                      <a:pPr>
+                        <a:defRPr sz="1300" b="0">
+                          <a:solidFill>
+                            <a:srgbClr val="000000"/>
+                          </a:solidFill>
+                          <a:latin typeface="Play"/>
+                          <a:ea typeface="Play"/>
+                          <a:cs typeface="Play"/>
+                        </a:defRPr>
+                      </a:pPr>
+                      <a:r>
+                        <a:t>11</a:t>
+                      </a:r>
+                    </a:p>
+                  </a:txBody>
+                  <a:tcPr>
+                    <a:solidFill>
+                      <a:srgbClr val="FFFFFF"/>
+                    </a:solidFill>
+                  </a:tcPr>
+                </a:tc>
+                <a:tc>
+                  <a:txBody>
+                    <a:bodyPr/>
+                    <a:lstStyle/>
+                    <a:p>
+                      <a:pPr>
+                        <a:defRPr sz="1300" b="0">
+                          <a:solidFill>
+                            <a:srgbClr val="000000"/>
+                          </a:solidFill>
+                          <a:latin typeface="Play"/>
+                          <a:ea typeface="Play"/>
+                          <a:cs typeface="Play"/>
+                        </a:defRPr>
+                      </a:pPr>
+                      <a:r>
+                        <a:t>38</a:t>
+                      </a:r>
+                    </a:p>
+                  </a:txBody>
+                  <a:tcPr>
+                    <a:solidFill>
+                      <a:srgbClr val="FFFFFF"/>
+                    </a:solidFill>
+                  </a:tcPr>
+                </a:tc>
+              </a:tr>
+            </a:tbl>
+          </a:graphicData>
+        </a:graphic>
+      </p:graphicFrame>
     </p:spTree>
   </p:cSld>
   <p:clrMapOvr>
@@ -7809,1092 +11014,7 @@
 </p:sld>
 </file>
 
-<file path=ppt/slides/slide62.xml><?xml version="1.0" encoding="utf-8"?>
-<p:sld xmlns:a="http://schemas.openxmlformats.org/drawingml/2006/main" xmlns:p="http://schemas.openxmlformats.org/presentationml/2006/main" xmlns:r="http://schemas.openxmlformats.org/officeDocument/2006/relationships">
-  <p:cSld>
-    <p:spTree>
-      <p:nvGrpSpPr>
-        <p:cNvPr id="1" name=""/>
-        <p:cNvGrpSpPr/>
-        <p:nvPr/>
-      </p:nvGrpSpPr>
-      <p:grpSpPr/>
-      <p:sp>
-        <p:nvSpPr>
-          <p:cNvPr id="662" name="Google Shape;662;p55"/>
-          <p:cNvSpPr/>
-          <p:nvPr/>
-        </p:nvSpPr>
-        <p:spPr>
-          <a:xfrm>
-            <a:off x="8667705" y="4666977"/>
-            <a:ext cx="190499" cy="190475"/>
-          </a:xfrm>
-          <a:prstGeom prst="rect">
-            <a:avLst/>
-          </a:prstGeom>
-          <a:noFill/>
-          <a:ln>
-            <a:noFill/>
-          </a:ln>
-        </p:spPr>
-        <p:txBody>
-          <a:bodyPr anchorCtr="0" anchor="ctr" bIns="91425" lIns="91425" spcFirstLastPara="1" rIns="91425" wrap="square" tIns="91425">
-            <a:noAutofit/>
-          </a:bodyPr>
-          <a:lstStyle/>
-          <a:p>
-            <a:pPr indent="0" lvl="0" marL="0" rtl="0" algn="l">
-              <a:spcBef>
-                <a:spcPts val="0"/>
-              </a:spcBef>
-              <a:spcAft>
-                <a:spcPts val="0"/>
-              </a:spcAft>
-              <a:buNone/>
-            </a:pPr>
-            <a:r>
-              <a:t/>
-            </a:r>
-            <a:endParaRPr/>
-          </a:p>
-        </p:txBody>
-      </p:sp>
-      <p:sp>
-        <p:nvSpPr>
-          <p:cNvPr id="663" name="Google Shape;663;p55"/>
-          <p:cNvSpPr/>
-          <p:nvPr/>
-        </p:nvSpPr>
-        <p:spPr>
-          <a:xfrm>
-            <a:off x="285748" y="286047"/>
-            <a:ext cx="8572456" cy="3938075"/>
-          </a:xfrm>
-          <a:prstGeom prst="rect">
-            <a:avLst/>
-          </a:prstGeom>
-          <a:noFill/>
-          <a:ln>
-            <a:noFill/>
-          </a:ln>
-        </p:spPr>
-        <p:txBody>
-          <a:bodyPr anchorCtr="0" anchor="ctr" bIns="91425" lIns="91425" spcFirstLastPara="1" rIns="91425" wrap="square" tIns="91425">
-            <a:noAutofit/>
-          </a:bodyPr>
-          <a:lstStyle/>
-          <a:p>
-            <a:pPr indent="0" lvl="0" marL="0" rtl="0" algn="l">
-              <a:spcBef>
-                <a:spcPts val="0"/>
-              </a:spcBef>
-              <a:spcAft>
-                <a:spcPts val="0"/>
-              </a:spcAft>
-              <a:buNone/>
-            </a:pPr>
-            <a:r>
-              <a:t/>
-            </a:r>
-            <a:endParaRPr/>
-          </a:p>
-        </p:txBody>
-      </p:sp>
-      <p:sp>
-        <p:nvSpPr>
-          <p:cNvPr id="664" name="Google Shape;664;p55"/>
-          <p:cNvSpPr/>
-          <p:nvPr/>
-        </p:nvSpPr>
-        <p:spPr>
-          <a:xfrm>
-            <a:off x="285748" y="1209852"/>
-            <a:ext cx="8572456" cy="3014270"/>
-          </a:xfrm>
-          <a:prstGeom prst="rect">
-            <a:avLst/>
-          </a:prstGeom>
-          <a:noFill/>
-          <a:ln>
-            <a:noFill/>
-          </a:ln>
-        </p:spPr>
-        <p:txBody>
-          <a:bodyPr anchorCtr="0" anchor="ctr" bIns="91425" lIns="91425" spcFirstLastPara="1" rIns="91425" wrap="square" tIns="91425">
-            <a:noAutofit/>
-          </a:bodyPr>
-          <a:lstStyle/>
-          <a:p>
-            <a:pPr indent="0" lvl="0" marL="0" rtl="0" algn="l">
-              <a:spcBef>
-                <a:spcPts val="0"/>
-              </a:spcBef>
-              <a:spcAft>
-                <a:spcPts val="0"/>
-              </a:spcAft>
-              <a:buNone/>
-            </a:pPr>
-            <a:r>
-              <a:t/>
-            </a:r>
-            <a:endParaRPr/>
-          </a:p>
-        </p:txBody>
-      </p:sp>
-      <p:sp>
-        <p:nvSpPr>
-          <p:cNvPr id="665" name="Google Shape;665;p55"/>
-          <p:cNvSpPr/>
-          <p:nvPr/>
-        </p:nvSpPr>
-        <p:spPr>
-          <a:xfrm>
-            <a:off x="285749" y="1209852"/>
-            <a:ext cx="2071677" cy="3014270"/>
-          </a:xfrm>
-          <a:prstGeom prst="roundRect">
-            <a:avLst>
-              <a:gd fmla="val 4634" name="adj"/>
-            </a:avLst>
-          </a:prstGeom>
-          <a:solidFill>
-            <a:schemeClr val="lt2"/>
-          </a:solidFill>
-          <a:ln>
-            <a:noFill/>
-          </a:ln>
-        </p:spPr>
-        <p:txBody>
-          <a:bodyPr anchorCtr="0" anchor="ctr" bIns="91425" lIns="91425" spcFirstLastPara="1" rIns="91425" wrap="square" tIns="91425">
-            <a:noAutofit/>
-          </a:bodyPr>
-          <a:lstStyle/>
-          <a:p>
-            <a:pPr indent="0" lvl="0" marL="0" rtl="0" algn="l">
-              <a:spcBef>
-                <a:spcPts val="0"/>
-              </a:spcBef>
-              <a:spcAft>
-                <a:spcPts val="0"/>
-              </a:spcAft>
-              <a:buNone/>
-            </a:pPr>
-            <a:r>
-              <a:t/>
-            </a:r>
-            <a:endParaRPr/>
-          </a:p>
-        </p:txBody>
-      </p:sp>
-      <p:sp>
-        <p:nvSpPr>
-          <p:cNvPr id="667" name="Google Shape;667;p55"/>
-          <p:cNvSpPr/>
-          <p:nvPr/>
-        </p:nvSpPr>
-        <p:spPr>
-          <a:xfrm>
-            <a:off x="438148" y="1362233"/>
-            <a:ext cx="76199" cy="76190"/>
-          </a:xfrm>
-          <a:prstGeom prst="roundRect">
-            <a:avLst>
-              <a:gd fmla="val 31500" name="adj"/>
-            </a:avLst>
-          </a:prstGeom>
-          <a:solidFill>
-            <a:srgbClr val="0077FF"/>
-          </a:solidFill>
-          <a:ln>
-            <a:noFill/>
-          </a:ln>
-        </p:spPr>
-        <p:txBody>
-          <a:bodyPr anchorCtr="0" anchor="ctr" bIns="91425" lIns="91425" spcFirstLastPara="1" rIns="91425" wrap="square" tIns="91425">
-            <a:noAutofit/>
-          </a:bodyPr>
-          <a:lstStyle/>
-          <a:p>
-            <a:pPr indent="0" lvl="0" marL="0" rtl="0" algn="l">
-              <a:spcBef>
-                <a:spcPts val="0"/>
-              </a:spcBef>
-              <a:spcAft>
-                <a:spcPts val="0"/>
-              </a:spcAft>
-              <a:buNone/>
-            </a:pPr>
-            <a:r>
-              <a:t/>
-            </a:r>
-            <a:endParaRPr/>
-          </a:p>
-        </p:txBody>
-      </p:sp>
-      <p:sp>
-        <p:nvSpPr>
-          <p:cNvPr id="670" name="Google Shape;670;p55"/>
-          <p:cNvSpPr/>
-          <p:nvPr/>
-        </p:nvSpPr>
-        <p:spPr>
-          <a:xfrm>
-            <a:off x="2452675" y="1209852"/>
-            <a:ext cx="2071677" cy="3014270"/>
-          </a:xfrm>
-          <a:prstGeom prst="roundRect">
-            <a:avLst>
-              <a:gd fmla="val 4634" name="adj"/>
-            </a:avLst>
-          </a:prstGeom>
-          <a:solidFill>
-            <a:schemeClr val="lt2"/>
-          </a:solidFill>
-          <a:ln>
-            <a:noFill/>
-          </a:ln>
-        </p:spPr>
-        <p:txBody>
-          <a:bodyPr anchorCtr="0" anchor="ctr" bIns="91425" lIns="91425" spcFirstLastPara="1" rIns="91425" wrap="square" tIns="91425">
-            <a:noAutofit/>
-          </a:bodyPr>
-          <a:lstStyle/>
-          <a:p>
-            <a:pPr indent="0" lvl="0" marL="0" rtl="0" algn="l">
-              <a:spcBef>
-                <a:spcPts val="0"/>
-              </a:spcBef>
-              <a:spcAft>
-                <a:spcPts val="0"/>
-              </a:spcAft>
-              <a:buNone/>
-            </a:pPr>
-            <a:r>
-              <a:t/>
-            </a:r>
-            <a:endParaRPr/>
-          </a:p>
-        </p:txBody>
-      </p:sp>
-      <p:sp>
-        <p:nvSpPr>
-          <p:cNvPr id="672" name="Google Shape;672;p55"/>
-          <p:cNvSpPr/>
-          <p:nvPr/>
-        </p:nvSpPr>
-        <p:spPr>
-          <a:xfrm>
-            <a:off x="2605074" y="1362233"/>
-            <a:ext cx="76199" cy="76190"/>
-          </a:xfrm>
-          <a:prstGeom prst="roundRect">
-            <a:avLst>
-              <a:gd fmla="val 31500" name="adj"/>
-            </a:avLst>
-          </a:prstGeom>
-          <a:solidFill>
-            <a:srgbClr val="0077FF"/>
-          </a:solidFill>
-          <a:ln>
-            <a:noFill/>
-          </a:ln>
-        </p:spPr>
-        <p:txBody>
-          <a:bodyPr anchorCtr="0" anchor="ctr" bIns="91425" lIns="91425" spcFirstLastPara="1" rIns="91425" wrap="square" tIns="91425">
-            <a:noAutofit/>
-          </a:bodyPr>
-          <a:lstStyle/>
-          <a:p>
-            <a:pPr indent="0" lvl="0" marL="0" rtl="0" algn="l">
-              <a:spcBef>
-                <a:spcPts val="0"/>
-              </a:spcBef>
-              <a:spcAft>
-                <a:spcPts val="0"/>
-              </a:spcAft>
-              <a:buNone/>
-            </a:pPr>
-            <a:r>
-              <a:t/>
-            </a:r>
-            <a:endParaRPr/>
-          </a:p>
-        </p:txBody>
-      </p:sp>
-      <p:sp>
-        <p:nvSpPr>
-          <p:cNvPr id="675" name="Google Shape;675;p55"/>
-          <p:cNvSpPr/>
-          <p:nvPr/>
-        </p:nvSpPr>
-        <p:spPr>
-          <a:xfrm>
-            <a:off x="4619601" y="1209852"/>
-            <a:ext cx="2071677" cy="3014270"/>
-          </a:xfrm>
-          <a:prstGeom prst="roundRect">
-            <a:avLst>
-              <a:gd fmla="val 4634" name="adj"/>
-            </a:avLst>
-          </a:prstGeom>
-          <a:solidFill>
-            <a:schemeClr val="lt2"/>
-          </a:solidFill>
-          <a:ln>
-            <a:noFill/>
-          </a:ln>
-        </p:spPr>
-        <p:txBody>
-          <a:bodyPr anchorCtr="0" anchor="ctr" bIns="91425" lIns="91425" spcFirstLastPara="1" rIns="91425" wrap="square" tIns="91425">
-            <a:noAutofit/>
-          </a:bodyPr>
-          <a:lstStyle/>
-          <a:p>
-            <a:pPr indent="0" lvl="0" marL="0" rtl="0" algn="l">
-              <a:spcBef>
-                <a:spcPts val="0"/>
-              </a:spcBef>
-              <a:spcAft>
-                <a:spcPts val="0"/>
-              </a:spcAft>
-              <a:buNone/>
-            </a:pPr>
-            <a:r>
-              <a:t/>
-            </a:r>
-            <a:endParaRPr/>
-          </a:p>
-        </p:txBody>
-      </p:sp>
-      <p:sp>
-        <p:nvSpPr>
-          <p:cNvPr id="677" name="Google Shape;677;p55"/>
-          <p:cNvSpPr/>
-          <p:nvPr/>
-        </p:nvSpPr>
-        <p:spPr>
-          <a:xfrm>
-            <a:off x="4772001" y="1362233"/>
-            <a:ext cx="76199" cy="76190"/>
-          </a:xfrm>
-          <a:prstGeom prst="roundRect">
-            <a:avLst>
-              <a:gd fmla="val 31500" name="adj"/>
-            </a:avLst>
-          </a:prstGeom>
-          <a:solidFill>
-            <a:srgbClr val="0077FF"/>
-          </a:solidFill>
-          <a:ln>
-            <a:noFill/>
-          </a:ln>
-        </p:spPr>
-        <p:txBody>
-          <a:bodyPr anchorCtr="0" anchor="ctr" bIns="91425" lIns="91425" spcFirstLastPara="1" rIns="91425" wrap="square" tIns="91425">
-            <a:noAutofit/>
-          </a:bodyPr>
-          <a:lstStyle/>
-          <a:p>
-            <a:pPr indent="0" lvl="0" marL="0" rtl="0" algn="l">
-              <a:spcBef>
-                <a:spcPts val="0"/>
-              </a:spcBef>
-              <a:spcAft>
-                <a:spcPts val="0"/>
-              </a:spcAft>
-              <a:buNone/>
-            </a:pPr>
-            <a:r>
-              <a:t/>
-            </a:r>
-            <a:endParaRPr/>
-          </a:p>
-        </p:txBody>
-      </p:sp>
-      <p:sp>
-        <p:nvSpPr>
-          <p:cNvPr id="680" name="Google Shape;680;p55"/>
-          <p:cNvSpPr/>
-          <p:nvPr/>
-        </p:nvSpPr>
-        <p:spPr>
-          <a:xfrm>
-            <a:off x="6786527" y="1209852"/>
-            <a:ext cx="2071677" cy="3014270"/>
-          </a:xfrm>
-          <a:prstGeom prst="roundRect">
-            <a:avLst>
-              <a:gd fmla="val 4634" name="adj"/>
-            </a:avLst>
-          </a:prstGeom>
-          <a:solidFill>
-            <a:schemeClr val="lt2"/>
-          </a:solidFill>
-          <a:ln>
-            <a:noFill/>
-          </a:ln>
-        </p:spPr>
-        <p:txBody>
-          <a:bodyPr anchorCtr="0" anchor="ctr" bIns="91425" lIns="91425" spcFirstLastPara="1" rIns="91425" wrap="square" tIns="91425">
-            <a:noAutofit/>
-          </a:bodyPr>
-          <a:lstStyle/>
-          <a:p>
-            <a:pPr indent="0" lvl="0" marL="0" rtl="0" algn="l">
-              <a:spcBef>
-                <a:spcPts val="0"/>
-              </a:spcBef>
-              <a:spcAft>
-                <a:spcPts val="0"/>
-              </a:spcAft>
-              <a:buNone/>
-            </a:pPr>
-            <a:r>
-              <a:t/>
-            </a:r>
-            <a:endParaRPr/>
-          </a:p>
-        </p:txBody>
-      </p:sp>
-      <p:sp>
-        <p:nvSpPr>
-          <p:cNvPr id="682" name="Google Shape;682;p55"/>
-          <p:cNvSpPr/>
-          <p:nvPr/>
-        </p:nvSpPr>
-        <p:spPr>
-          <a:xfrm>
-            <a:off x="6938927" y="1362233"/>
-            <a:ext cx="76199" cy="76190"/>
-          </a:xfrm>
-          <a:prstGeom prst="roundRect">
-            <a:avLst>
-              <a:gd fmla="val 31500" name="adj"/>
-            </a:avLst>
-          </a:prstGeom>
-          <a:solidFill>
-            <a:srgbClr val="0077FF"/>
-          </a:solidFill>
-          <a:ln>
-            <a:noFill/>
-          </a:ln>
-        </p:spPr>
-        <p:txBody>
-          <a:bodyPr anchorCtr="0" anchor="ctr" bIns="91425" lIns="91425" spcFirstLastPara="1" rIns="91425" wrap="square" tIns="91425">
-            <a:noAutofit/>
-          </a:bodyPr>
-          <a:lstStyle/>
-          <a:p>
-            <a:pPr indent="0" lvl="0" marL="0" rtl="0" algn="l">
-              <a:spcBef>
-                <a:spcPts val="0"/>
-              </a:spcBef>
-              <a:spcAft>
-                <a:spcPts val="0"/>
-              </a:spcAft>
-              <a:buNone/>
-            </a:pPr>
-            <a:r>
-              <a:t/>
-            </a:r>
-            <a:endParaRPr/>
-          </a:p>
-        </p:txBody>
-      </p:sp>
-      <p:sp>
-        <p:nvSpPr>
-          <p:cNvPr id="683" name="title"/>
-          <p:cNvSpPr txBox="1"/>
-          <p:nvPr/>
-        </p:nvSpPr>
-        <p:spPr>
-          <a:xfrm>
-            <a:off x="274320" y="282943"/>
-            <a:ext cx="6792986" cy="617220"/>
-          </a:xfrm>
-          <a:prstGeom prst="rect">
-            <a:avLst/>
-          </a:prstGeom>
-          <a:noFill/>
-        </p:spPr>
-        <p:txBody>
-          <a:bodyPr wrap="square" lIns="76200" rIns="76200" tIns="50800" bIns="50800">
-            <a:spAutoFit/>
-          </a:bodyPr>
-          <a:lstStyle/>
-          <a:p>
-            <a:pPr algn="l">
-              <a:spcAft>
-                <a:spcPts val="300"/>
-              </a:spcAft>
-              <a:defRPr sz="2438">
-                <a:solidFill>
-                  <a:srgbClr val="000000"/>
-                </a:solidFill>
-                <a:latin typeface="Play"/>
-                <a:ea typeface="Play"/>
-                <a:cs typeface="Play"/>
-              </a:defRPr>
-            </a:pPr>
-            <a:r>
-              <a:rPr sz="2438">
-                <a:solidFill>
-                  <a:srgbClr val="000000"/>
-                </a:solidFill>
-                <a:latin typeface="Play"/>
-                <a:ea typeface="Play"/>
-                <a:cs typeface="Play"/>
-              </a:rPr>
-              <a:t>План пилота</a:t>
-            </a:r>
-          </a:p>
-        </p:txBody>
-      </p:sp>
-      <p:sp>
-        <p:nvSpPr>
-          <p:cNvPr id="684" name="body_left"/>
-          <p:cNvSpPr txBox="1"/>
-          <p:nvPr/>
-        </p:nvSpPr>
-        <p:spPr>
-          <a:xfrm>
-            <a:off x="274320" y="1882839"/>
-            <a:ext cx="4035247" cy="993140"/>
-          </a:xfrm>
-          <a:prstGeom prst="rect">
-            <a:avLst/>
-          </a:prstGeom>
-          <a:noFill/>
-        </p:spPr>
-        <p:txBody>
-          <a:bodyPr wrap="square" lIns="76200" rIns="76200" tIns="50800" bIns="50800">
-            <a:spAutoFit/>
-          </a:bodyPr>
-          <a:lstStyle/>
-          <a:p>
-            <a:pPr algn="l">
-              <a:spcAft>
-                <a:spcPts val="300"/>
-              </a:spcAft>
-              <a:defRPr sz="1800">
-                <a:solidFill>
-                  <a:srgbClr val="000000"/>
-                </a:solidFill>
-                <a:latin typeface="Play"/>
-                <a:ea typeface="Play"/>
-                <a:cs typeface="Play"/>
-              </a:defRPr>
-            </a:pPr>
-            <a:r>
-              <a:rPr sz="1800">
-                <a:solidFill>
-                  <a:srgbClr val="000000"/>
-                </a:solidFill>
-                <a:latin typeface="Play"/>
-                <a:ea typeface="Play"/>
-                <a:cs typeface="Play"/>
-              </a:rPr>
-              <a:t>• Подключить ещё 4 команды в Q3 2026</a:t>
-            </a:r>
-          </a:p>
-          <a:p>
-            <a:pPr algn="l">
-              <a:spcAft>
-                <a:spcPts val="300"/>
-              </a:spcAft>
-              <a:defRPr sz="1800">
-                <a:solidFill>
-                  <a:srgbClr val="000000"/>
-                </a:solidFill>
-                <a:latin typeface="Play"/>
-                <a:ea typeface="Play"/>
-                <a:cs typeface="Play"/>
-              </a:defRPr>
-            </a:pPr>
-            <a:r>
-              <a:rPr sz="1800">
-                <a:solidFill>
-                  <a:srgbClr val="000000"/>
-                </a:solidFill>
-                <a:latin typeface="Play"/>
-                <a:ea typeface="Play"/>
-                <a:cs typeface="Play"/>
-              </a:rPr>
-              <a:t>• Настроить домен и HTTPS</a:t>
-            </a:r>
-          </a:p>
-        </p:txBody>
-      </p:sp>
-      <p:sp>
-        <p:nvSpPr>
-          <p:cNvPr id="685" name="body_right"/>
-          <p:cNvSpPr txBox="1"/>
-          <p:nvPr/>
-        </p:nvSpPr>
-        <p:spPr>
-          <a:xfrm>
-            <a:off x="4583887" y="1882839"/>
-            <a:ext cx="4035247" cy="1290320"/>
-          </a:xfrm>
-          <a:prstGeom prst="rect">
-            <a:avLst/>
-          </a:prstGeom>
-          <a:noFill/>
-        </p:spPr>
-        <p:txBody>
-          <a:bodyPr wrap="square" lIns="76200" rIns="76200" tIns="50800" bIns="50800">
-            <a:spAutoFit/>
-          </a:bodyPr>
-          <a:lstStyle/>
-          <a:p>
-            <a:pPr algn="l">
-              <a:spcAft>
-                <a:spcPts val="300"/>
-              </a:spcAft>
-              <a:defRPr sz="1800">
-                <a:solidFill>
-                  <a:srgbClr val="000000"/>
-                </a:solidFill>
-                <a:latin typeface="Play"/>
-                <a:ea typeface="Play"/>
-                <a:cs typeface="Play"/>
-              </a:defRPr>
-            </a:pPr>
-            <a:r>
-              <a:rPr sz="1800">
-                <a:solidFill>
-                  <a:srgbClr val="000000"/>
-                </a:solidFill>
-                <a:latin typeface="Play"/>
-                <a:ea typeface="Play"/>
-                <a:cs typeface="Play"/>
-              </a:rPr>
-              <a:t>• Интегрировать с корпоративным хранилищем документов</a:t>
-            </a:r>
-          </a:p>
-          <a:p>
-            <a:pPr algn="l">
-              <a:spcAft>
-                <a:spcPts val="300"/>
-              </a:spcAft>
-              <a:defRPr sz="1800">
-                <a:solidFill>
-                  <a:srgbClr val="000000"/>
-                </a:solidFill>
-                <a:latin typeface="Play"/>
-                <a:ea typeface="Play"/>
-                <a:cs typeface="Play"/>
-              </a:defRPr>
-            </a:pPr>
-            <a:r>
-              <a:rPr sz="1800">
-                <a:solidFill>
-                  <a:srgbClr val="000000"/>
-                </a:solidFill>
-                <a:latin typeface="Play"/>
-                <a:ea typeface="Play"/>
-                <a:cs typeface="Play"/>
-              </a:rPr>
-              <a:t>• В Q1 2027 добавить генерацию иллюстраций</a:t>
-            </a:r>
-          </a:p>
-        </p:txBody>
-      </p:sp>
-    </p:spTree>
-  </p:cSld>
-  <p:clrMapOvr>
-    <a:masterClrMapping/>
-  </p:clrMapOvr>
-</p:sld>
-</file>
-
-<file path=ppt/slides/slide63.xml><?xml version="1.0" encoding="utf-8"?>
-<p:sld xmlns:a="http://schemas.openxmlformats.org/drawingml/2006/main" xmlns:p="http://schemas.openxmlformats.org/presentationml/2006/main" xmlns:r="http://schemas.openxmlformats.org/officeDocument/2006/relationships">
-  <p:cSld>
-    <p:spTree>
-      <p:nvGrpSpPr>
-        <p:cNvPr id="1" name=""/>
-        <p:cNvGrpSpPr/>
-        <p:nvPr/>
-      </p:nvGrpSpPr>
-      <p:grpSpPr/>
-      <p:sp>
-        <p:nvSpPr>
-          <p:cNvPr id="1027" name="Google Shape;1027;p65"/>
-          <p:cNvSpPr/>
-          <p:nvPr/>
-        </p:nvSpPr>
-        <p:spPr>
-          <a:xfrm>
-            <a:off x="6064222" y="1209852"/>
-            <a:ext cx="2793985" cy="3014270"/>
-          </a:xfrm>
-          <a:prstGeom prst="roundRect">
-            <a:avLst>
-              <a:gd fmla="val 3436" name="adj"/>
-            </a:avLst>
-          </a:prstGeom>
-          <a:solidFill>
-            <a:schemeClr val="lt2"/>
-          </a:solidFill>
-          <a:ln>
-            <a:noFill/>
-          </a:ln>
-        </p:spPr>
-        <p:txBody>
-          <a:bodyPr anchorCtr="0" anchor="ctr" bIns="91425" lIns="91425" spcFirstLastPara="1" rIns="91425" wrap="square" tIns="91425">
-            <a:noAutofit/>
-          </a:bodyPr>
-          <a:lstStyle/>
-          <a:p>
-            <a:pPr indent="0" lvl="0" marL="0" rtl="0" algn="l">
-              <a:spcBef>
-                <a:spcPts val="0"/>
-              </a:spcBef>
-              <a:spcAft>
-                <a:spcPts val="0"/>
-              </a:spcAft>
-              <a:buNone/>
-            </a:pPr>
-            <a:r>
-              <a:t/>
-            </a:r>
-            <a:endParaRPr/>
-          </a:p>
-        </p:txBody>
-      </p:sp>
-      <p:sp>
-        <p:nvSpPr>
-          <p:cNvPr id="1029" name="Google Shape;1029;p65"/>
-          <p:cNvSpPr/>
-          <p:nvPr/>
-        </p:nvSpPr>
-        <p:spPr>
-          <a:xfrm>
-            <a:off x="3174981" y="1209852"/>
-            <a:ext cx="2793985" cy="3014270"/>
-          </a:xfrm>
-          <a:prstGeom prst="roundRect">
-            <a:avLst>
-              <a:gd fmla="val 3436" name="adj"/>
-            </a:avLst>
-          </a:prstGeom>
-          <a:solidFill>
-            <a:schemeClr val="lt2"/>
-          </a:solidFill>
-          <a:ln>
-            <a:noFill/>
-          </a:ln>
-        </p:spPr>
-        <p:txBody>
-          <a:bodyPr anchorCtr="0" anchor="ctr" bIns="91425" lIns="91425" spcFirstLastPara="1" rIns="91425" wrap="square" tIns="91425">
-            <a:noAutofit/>
-          </a:bodyPr>
-          <a:lstStyle/>
-          <a:p>
-            <a:pPr indent="0" lvl="0" marL="0" rtl="0" algn="l">
-              <a:spcBef>
-                <a:spcPts val="0"/>
-              </a:spcBef>
-              <a:spcAft>
-                <a:spcPts val="0"/>
-              </a:spcAft>
-              <a:buNone/>
-            </a:pPr>
-            <a:r>
-              <a:t/>
-            </a:r>
-            <a:endParaRPr/>
-          </a:p>
-        </p:txBody>
-      </p:sp>
-      <p:sp>
-        <p:nvSpPr>
-          <p:cNvPr id="1031" name="Google Shape;1031;p65"/>
-          <p:cNvSpPr/>
-          <p:nvPr/>
-        </p:nvSpPr>
-        <p:spPr>
-          <a:xfrm>
-            <a:off x="285749" y="1209852"/>
-            <a:ext cx="2793985" cy="3014270"/>
-          </a:xfrm>
-          <a:prstGeom prst="roundRect">
-            <a:avLst>
-              <a:gd fmla="val 3436" name="adj"/>
-            </a:avLst>
-          </a:prstGeom>
-          <a:solidFill>
-            <a:schemeClr val="lt2"/>
-          </a:solidFill>
-          <a:ln>
-            <a:noFill/>
-          </a:ln>
-        </p:spPr>
-        <p:txBody>
-          <a:bodyPr anchorCtr="0" anchor="ctr" bIns="91425" lIns="91425" spcFirstLastPara="1" rIns="91425" wrap="square" tIns="91425">
-            <a:noAutofit/>
-          </a:bodyPr>
-          <a:lstStyle/>
-          <a:p>
-            <a:pPr indent="0" lvl="0" marL="0" rtl="0" algn="l">
-              <a:spcBef>
-                <a:spcPts val="0"/>
-              </a:spcBef>
-              <a:spcAft>
-                <a:spcPts val="0"/>
-              </a:spcAft>
-              <a:buNone/>
-            </a:pPr>
-            <a:r>
-              <a:t/>
-            </a:r>
-            <a:endParaRPr/>
-          </a:p>
-        </p:txBody>
-      </p:sp>
-      <p:sp>
-        <p:nvSpPr>
-          <p:cNvPr id="1032" name="Google Shape;1032;p65"/>
-          <p:cNvSpPr/>
-          <p:nvPr/>
-        </p:nvSpPr>
-        <p:spPr>
-          <a:xfrm>
-            <a:off x="285748" y="286047"/>
-            <a:ext cx="8572456" cy="3938075"/>
-          </a:xfrm>
-          <a:prstGeom prst="rect">
-            <a:avLst/>
-          </a:prstGeom>
-          <a:noFill/>
-          <a:ln>
-            <a:noFill/>
-          </a:ln>
-        </p:spPr>
-        <p:txBody>
-          <a:bodyPr anchorCtr="0" anchor="ctr" bIns="91425" lIns="91425" spcFirstLastPara="1" rIns="91425" wrap="square" tIns="91425">
-            <a:noAutofit/>
-          </a:bodyPr>
-          <a:lstStyle/>
-          <a:p>
-            <a:pPr indent="0" lvl="0" marL="0" rtl="0" algn="l">
-              <a:spcBef>
-                <a:spcPts val="0"/>
-              </a:spcBef>
-              <a:spcAft>
-                <a:spcPts val="0"/>
-              </a:spcAft>
-              <a:buNone/>
-            </a:pPr>
-            <a:r>
-              <a:t/>
-            </a:r>
-            <a:endParaRPr/>
-          </a:p>
-        </p:txBody>
-      </p:sp>
-      <p:sp>
-        <p:nvSpPr>
-          <p:cNvPr id="1033" name="Google Shape;1033;p65"/>
-          <p:cNvSpPr/>
-          <p:nvPr/>
-        </p:nvSpPr>
-        <p:spPr>
-          <a:xfrm>
-            <a:off x="285748" y="1209852"/>
-            <a:ext cx="8572456" cy="3014270"/>
-          </a:xfrm>
-          <a:prstGeom prst="rect">
-            <a:avLst/>
-          </a:prstGeom>
-          <a:noFill/>
-          <a:ln>
-            <a:noFill/>
-          </a:ln>
-        </p:spPr>
-        <p:txBody>
-          <a:bodyPr anchorCtr="0" anchor="ctr" bIns="91425" lIns="91425" spcFirstLastPara="1" rIns="91425" wrap="square" tIns="91425">
-            <a:noAutofit/>
-          </a:bodyPr>
-          <a:lstStyle/>
-          <a:p>
-            <a:pPr indent="0" lvl="0" marL="0" rtl="0" algn="l">
-              <a:spcBef>
-                <a:spcPts val="0"/>
-              </a:spcBef>
-              <a:spcAft>
-                <a:spcPts val="0"/>
-              </a:spcAft>
-              <a:buNone/>
-            </a:pPr>
-            <a:r>
-              <a:t/>
-            </a:r>
-            <a:endParaRPr/>
-          </a:p>
-        </p:txBody>
-      </p:sp>
-      <p:sp>
-        <p:nvSpPr>
-          <p:cNvPr id="1034" name="title"/>
-          <p:cNvSpPr txBox="1"/>
-          <p:nvPr/>
-        </p:nvSpPr>
-        <p:spPr>
-          <a:xfrm>
-            <a:off x="274320" y="282943"/>
-            <a:ext cx="6792986" cy="617220"/>
-          </a:xfrm>
-          <a:prstGeom prst="rect">
-            <a:avLst/>
-          </a:prstGeom>
-          <a:noFill/>
-        </p:spPr>
-        <p:txBody>
-          <a:bodyPr wrap="square" lIns="76200" rIns="76200" tIns="50800" bIns="50800">
-            <a:spAutoFit/>
-          </a:bodyPr>
-          <a:lstStyle/>
-          <a:p>
-            <a:pPr algn="l">
-              <a:spcAft>
-                <a:spcPts val="300"/>
-              </a:spcAft>
-              <a:defRPr sz="2438">
-                <a:solidFill>
-                  <a:srgbClr val="000000"/>
-                </a:solidFill>
-                <a:latin typeface="Play"/>
-                <a:ea typeface="Play"/>
-                <a:cs typeface="Play"/>
-              </a:defRPr>
-            </a:pPr>
-            <a:r>
-              <a:rPr sz="2438">
-                <a:solidFill>
-                  <a:srgbClr val="000000"/>
-                </a:solidFill>
-                <a:latin typeface="Play"/>
-                <a:ea typeface="Play"/>
-                <a:cs typeface="Play"/>
-              </a:rPr>
-              <a:t>Что мы просим решить</a:t>
-            </a:r>
-          </a:p>
-        </p:txBody>
-      </p:sp>
-      <p:sp>
-        <p:nvSpPr>
-          <p:cNvPr id="1035" name="body"/>
-          <p:cNvSpPr txBox="1"/>
-          <p:nvPr/>
-        </p:nvSpPr>
-        <p:spPr>
-          <a:xfrm>
-            <a:off x="274320" y="1414513"/>
-            <a:ext cx="8344814" cy="1046136"/>
-          </a:xfrm>
-          <a:prstGeom prst="rect">
-            <a:avLst/>
-          </a:prstGeom>
-          <a:noFill/>
-        </p:spPr>
-        <p:txBody>
-          <a:bodyPr wrap="square" lIns="76200" rIns="76200" tIns="50800" bIns="50800">
-            <a:spAutoFit/>
-          </a:bodyPr>
-          <a:lstStyle/>
-          <a:p>
-            <a:pPr algn="l">
-              <a:spcAft>
-                <a:spcPts val="300"/>
-              </a:spcAft>
-              <a:defRPr sz="1800">
-                <a:solidFill>
-                  <a:srgbClr val="000000"/>
-                </a:solidFill>
-                <a:latin typeface="Play"/>
-                <a:ea typeface="Play"/>
-                <a:cs typeface="Play"/>
-              </a:defRPr>
-            </a:pPr>
-            <a:r>
-              <a:rPr sz="1800">
-                <a:solidFill>
-                  <a:srgbClr val="000000"/>
-                </a:solidFill>
-                <a:latin typeface="Play"/>
-                <a:ea typeface="Play"/>
-                <a:cs typeface="Play"/>
-              </a:rPr>
-              <a:t>• Одобрить запуск сервиса на всю компанию</a:t>
-            </a:r>
-          </a:p>
-          <a:p>
-            <a:pPr algn="l">
-              <a:spcAft>
-                <a:spcPts val="300"/>
-              </a:spcAft>
-              <a:defRPr sz="1800">
-                <a:solidFill>
-                  <a:srgbClr val="000000"/>
-                </a:solidFill>
-                <a:latin typeface="Play"/>
-                <a:ea typeface="Play"/>
-                <a:cs typeface="Play"/>
-              </a:defRPr>
-            </a:pPr>
-            <a:r>
-              <a:rPr sz="1800">
-                <a:solidFill>
-                  <a:srgbClr val="000000"/>
-                </a:solidFill>
-                <a:latin typeface="Play"/>
-                <a:ea typeface="Play"/>
-                <a:cs typeface="Play"/>
-              </a:rPr>
-              <a:t>• Предоставить ресурсы для масштабирования (серверы, лицензии)</a:t>
-            </a:r>
-          </a:p>
-          <a:p>
-            <a:pPr algn="l">
-              <a:spcAft>
-                <a:spcPts val="300"/>
-              </a:spcAft>
-              <a:defRPr sz="1800">
-                <a:solidFill>
-                  <a:srgbClr val="000000"/>
-                </a:solidFill>
-                <a:latin typeface="Play"/>
-                <a:ea typeface="Play"/>
-                <a:cs typeface="Play"/>
-              </a:defRPr>
-            </a:pPr>
-            <a:r>
-              <a:rPr sz="1800">
-                <a:solidFill>
-                  <a:srgbClr val="000000"/>
-                </a:solidFill>
-                <a:latin typeface="Play"/>
-                <a:ea typeface="Play"/>
-                <a:cs typeface="Play"/>
-              </a:rPr>
-              <a:t>• Согласовать сроки и ответственных за интеграцию</a:t>
-            </a:r>
-          </a:p>
-        </p:txBody>
-      </p:sp>
-    </p:spTree>
-  </p:cSld>
-  <p:clrMapOvr>
-    <a:masterClrMapping/>
-  </p:clrMapOvr>
-</p:sld>
-</file>
-
-<file path=ppt/slides/slide64.xml><?xml version="1.0" encoding="utf-8"?>
+<file path=ppt/slides/slide66.xml><?xml version="1.0" encoding="utf-8"?>
 <p:sld xmlns:a="http://schemas.openxmlformats.org/drawingml/2006/main" xmlns:p="http://schemas.openxmlformats.org/presentationml/2006/main" xmlns:r="http://schemas.openxmlformats.org/officeDocument/2006/relationships">
   <p:cSld>
     <p:spTree>
@@ -8913,7 +11033,7 @@
         <p:spPr>
           <a:xfrm>
             <a:off x="1543608" y="159030"/>
-            <a:ext cx="7202525" cy="3282246"/>
+            <a:ext cx="7202525" cy="3204328"/>
           </a:xfrm>
           <a:prstGeom prst="roundRect">
             <a:avLst/>
@@ -8959,7 +11079,7 @@
         <p:spPr>
           <a:xfrm>
             <a:off x="1670608" y="286030"/>
-            <a:ext cx="6948525" cy="655320"/>
+            <a:ext cx="6948525" cy="1183640"/>
           </a:xfrm>
           <a:prstGeom prst="rect">
             <a:avLst/>
@@ -8994,7 +11114,7 @@
                 <a:ea typeface="Play"/>
                 <a:cs typeface="Play"/>
               </a:rPr>
-              <a:t>Вывод</a:t>
+              <a:t>Что мы просим решить: запуск на всю компанию</a:t>
             </a:r>
           </a:p>
         </p:txBody>
@@ -9007,8 +11127,8 @@
         </p:nvSpPr>
         <p:spPr>
           <a:xfrm>
-            <a:off x="1670608" y="1891876"/>
-            <a:ext cx="6948525" cy="1422400"/>
+            <a:off x="1670608" y="2243218"/>
+            <a:ext cx="6948525" cy="993140"/>
           </a:xfrm>
           <a:prstGeom prst="rect">
             <a:avLst/>
@@ -9025,7 +11145,7 @@
               <a:spcAft>
                 <a:spcPts val="300"/>
               </a:spcAft>
-              <a:defRPr sz="1600">
+              <a:defRPr sz="1800">
                 <a:solidFill>
                   <a:srgbClr val="000000"/>
                 </a:solidFill>
@@ -9035,7 +11155,7 @@
               </a:defRPr>
             </a:pPr>
             <a:r>
-              <a:rPr sz="1600">
+              <a:rPr sz="1800">
                 <a:solidFill>
                   <a:srgbClr val="000000"/>
                 </a:solidFill>
@@ -9043,7 +11163,7 @@
                 <a:ea typeface="Play"/>
                 <a:cs typeface="Play"/>
               </a:rPr>
-              <a:t>• Автоматизация вёрстки повышает скорость, качество и экономит ресурсы</a:t>
+              <a:t>• Решение о запуске сервиса на всю компанию</a:t>
             </a:r>
           </a:p>
           <a:p>
@@ -9051,7 +11171,7 @@
               <a:spcAft>
                 <a:spcPts val="300"/>
               </a:spcAft>
-              <a:defRPr sz="1600">
+              <a:defRPr sz="1800">
                 <a:solidFill>
                   <a:srgbClr val="000000"/>
                 </a:solidFill>
@@ -9061,7 +11181,7 @@
               </a:defRPr>
             </a:pPr>
             <a:r>
-              <a:rPr sz="1600">
+              <a:rPr sz="1800">
                 <a:solidFill>
                   <a:srgbClr val="000000"/>
                 </a:solidFill>
@@ -9069,33 +11189,7 @@
                 <a:ea typeface="Play"/>
                 <a:cs typeface="Play"/>
               </a:rPr>
-              <a:t>• Пилот показал значительный рост эффективности</a:t>
-            </a:r>
-          </a:p>
-          <a:p>
-            <a:pPr algn="l">
-              <a:spcAft>
-                <a:spcPts val="300"/>
-              </a:spcAft>
-              <a:defRPr sz="1600">
-                <a:solidFill>
-                  <a:srgbClr val="000000"/>
-                </a:solidFill>
-                <a:latin typeface="Play"/>
-                <a:ea typeface="Play"/>
-                <a:cs typeface="Play"/>
-              </a:defRPr>
-            </a:pPr>
-            <a:r>
-              <a:rPr sz="1600">
-                <a:solidFill>
-                  <a:srgbClr val="000000"/>
-                </a:solidFill>
-                <a:latin typeface="Play"/>
-                <a:ea typeface="Play"/>
-                <a:cs typeface="Play"/>
-              </a:rPr>
-              <a:t>• Запуск на всю компанию – стратегический шаг к цифровой трансформации</a:t>
+              <a:t>• Поддержка интеграции с корпоративным хранилищем документов</a:t>
             </a:r>
           </a:p>
         </p:txBody>

--- a/samples/VK_Tech_шаблон__split.pptx
+++ b/samples/VK_Tech_шаблон__split.pptx
@@ -281,220 +281,6 @@
               <c:strCache>
                 <c:ptCount val="1"/>
                 <c:pt idx="0">
-                  <c:v>Кол-во</c:v>
-                </c:pt>
-              </c:strCache>
-            </c:strRef>
-          </c:tx>
-          <c:spPr>
-            <a:solidFill>
-              <a:srgbClr val="0077FF"/>
-            </a:solidFill>
-            <a:ln>
-              <a:solidFill>
-                <a:srgbClr val="0077FF"/>
-              </a:solidFill>
-            </a:ln>
-          </c:spPr>
-          <c:cat>
-            <c:strRef>
-              <c:f>Sheet1!$A$2:$A$3</c:f>
-              <c:strCache>
-                <c:ptCount val="2"/>
-                <c:pt idx="0">
-                  <c:v>Запросы</c:v>
-                </c:pt>
-                <c:pt idx="1">
-                  <c:v>Закрыто</c:v>
-                </c:pt>
-              </c:strCache>
-            </c:strRef>
-          </c:cat>
-          <c:val>
-            <c:numRef>
-              <c:f>Sheet1!$B$2:$B$3</c:f>
-              <c:numCache>
-                <c:formatCode>General</c:formatCode>
-                <c:ptCount val="2"/>
-                <c:pt idx="0">
-                  <c:v>27.0</c:v>
-                </c:pt>
-                <c:pt idx="1">
-                  <c:v>11.0</c:v>
-                </c:pt>
-              </c:numCache>
-            </c:numRef>
-          </c:val>
-        </c:ser>
-        <c:dLbls>
-          <c:numFmt formatCode="0&quot; запросов&quot;" sourceLinked="0"/>
-          <c:txPr>
-            <a:bodyPr wrap="none"/>
-            <a:lstStyle/>
-            <a:p>
-              <a:pPr>
-                <a:defRPr sz="1100" b="0">
-                  <a:solidFill>
-                    <a:srgbClr val="000000"/>
-                  </a:solidFill>
-                  <a:latin typeface="Play"/>
-                  <a:ea typeface="Play"/>
-                  <a:cs typeface="Play"/>
-                </a:defRPr>
-              </a:pPr>
-            </a:p>
-          </c:txPr>
-          <c:dLblPos val="outEnd"/>
-          <c:showLegendKey val="0"/>
-          <c:showVal val="1"/>
-          <c:showCatName val="0"/>
-          <c:showSerName val="0"/>
-          <c:showPercent val="0"/>
-          <c:showBubbleSize val="0"/>
-          <c:showLeaderLines val="1"/>
-        </c:dLbls>
-        <c:gapWidth val="60"/>
-        <c:axId val="-2068027336"/>
-        <c:axId val="-2113994440"/>
-      </c:barChart>
-      <c:catAx>
-        <c:axId val="-2068027336"/>
-        <c:scaling>
-          <c:orientation val="minMax"/>
-        </c:scaling>
-        <c:delete val="0"/>
-        <c:axPos val="b"/>
-        <c:majorTickMark val="out"/>
-        <c:minorTickMark val="none"/>
-        <c:tickLblPos val="nextTo"/>
-        <c:txPr>
-          <a:bodyPr/>
-          <a:lstStyle/>
-          <a:p>
-            <a:pPr>
-              <a:defRPr sz="1100" b="0">
-                <a:solidFill>
-                  <a:srgbClr val="000000"/>
-                </a:solidFill>
-                <a:latin typeface="Play"/>
-                <a:ea typeface="Play"/>
-                <a:cs typeface="Play"/>
-              </a:defRPr>
-            </a:pPr>
-          </a:p>
-        </c:txPr>
-        <c:crossAx val="-2113994440"/>
-        <c:crosses val="autoZero"/>
-        <c:auto val="1"/>
-        <c:lblAlgn val="ctr"/>
-        <c:lblOffset val="100"/>
-        <c:noMultiLvlLbl val="0"/>
-      </c:catAx>
-      <c:valAx>
-        <c:axId val="-2113994440"/>
-        <c:scaling/>
-        <c:delete val="0"/>
-        <c:axPos val="l"/>
-        <c:majorGridlines>
-          <c:spPr>
-            <a:ln w="9525">
-              <a:solidFill>
-                <a:srgbClr val="D1D1D1"/>
-              </a:solidFill>
-            </a:ln>
-          </c:spPr>
-        </c:majorGridlines>
-        <c:title>
-          <c:tx>
-            <c:rich>
-              <a:bodyPr rot="0" vert="horz"/>
-              <a:lstStyle/>
-              <a:p>
-                <a:pPr>
-                  <a:defRPr sz="1100" b="0">
-                    <a:solidFill>
-                      <a:srgbClr val="000000"/>
-                    </a:solidFill>
-                    <a:latin typeface="Play"/>
-                    <a:ea typeface="Play"/>
-                    <a:cs typeface="Play"/>
-                  </a:defRPr>
-                </a:pPr>
-                <a:r>
-                  <a:t>Кол-во, запросов</a:t>
-                </a:r>
-              </a:p>
-            </c:rich>
-          </c:tx>
-          <c:layout/>
-          <c:overlay val="0"/>
-        </c:title>
-        <c:majorTickMark val="out"/>
-        <c:minorTickMark val="none"/>
-        <c:tickLblPos val="nextTo"/>
-        <c:txPr>
-          <a:bodyPr/>
-          <a:lstStyle/>
-          <a:p>
-            <a:pPr>
-              <a:defRPr sz="1100" b="0">
-                <a:solidFill>
-                  <a:srgbClr val="000000"/>
-                </a:solidFill>
-                <a:latin typeface="Play"/>
-                <a:ea typeface="Play"/>
-                <a:cs typeface="Play"/>
-              </a:defRPr>
-            </a:pPr>
-          </a:p>
-        </c:txPr>
-        <c:crossAx val="-2068027336"/>
-        <c:crosses val="autoZero"/>
-      </c:valAx>
-    </c:plotArea>
-    <c:dispBlanksAs val="gap"/>
-  </c:chart>
-  <c:txPr>
-    <a:bodyPr/>
-    <a:lstStyle/>
-    <a:p>
-      <a:pPr>
-        <a:defRPr sz="1200" b="0">
-          <a:solidFill>
-            <a:srgbClr val="000000"/>
-          </a:solidFill>
-          <a:latin typeface="Play"/>
-          <a:ea typeface="Play"/>
-          <a:cs typeface="Play"/>
-        </a:defRPr>
-      </a:pPr>
-      <a:endParaRPr lang="en-US"/>
-    </a:p>
-  </c:txPr>
-  <c:externalData r:id="rId1">
-    <c:autoUpdate val="0"/>
-  </c:externalData>
-</c:chartSpace>
-</file>
-
-<file path=ppt/charts/chart2.xml><?xml version="1.0" encoding="utf-8"?>
-<c:chartSpace xmlns:c="http://schemas.openxmlformats.org/drawingml/2006/chart" xmlns:a="http://schemas.openxmlformats.org/drawingml/2006/main" xmlns:r="http://schemas.openxmlformats.org/officeDocument/2006/relationships">
-  <c:date1904 val="0"/>
-  <c:chart>
-    <c:autoTitleDeleted val="1"/>
-    <c:plotArea>
-      <c:barChart>
-        <c:barDir val="col"/>
-        <c:grouping val="clustered"/>
-        <c:ser>
-          <c:idx val="0"/>
-          <c:order val="0"/>
-          <c:tx>
-            <c:strRef>
-              <c:f>Sheet1!$B$1</c:f>
-              <c:strCache>
-                <c:ptCount val="1"/>
-                <c:pt idx="0">
                   <c:v>Время</c:v>
                 </c:pt>
               </c:strCache>
@@ -516,7 +302,7 @@
               <c:strCache>
                 <c:ptCount val="2"/>
                 <c:pt idx="0">
-                  <c:v>Сейчас</c:v>
+                  <c:v>Ручная</c:v>
                 </c:pt>
                 <c:pt idx="1">
                   <c:v>Сервис</c:v>
@@ -636,6 +422,220 @@
                 </a:pPr>
                 <a:r>
                   <a:t>Время, мин</a:t>
+                </a:r>
+              </a:p>
+            </c:rich>
+          </c:tx>
+          <c:layout/>
+          <c:overlay val="0"/>
+        </c:title>
+        <c:majorTickMark val="out"/>
+        <c:minorTickMark val="none"/>
+        <c:tickLblPos val="nextTo"/>
+        <c:txPr>
+          <a:bodyPr/>
+          <a:lstStyle/>
+          <a:p>
+            <a:pPr>
+              <a:defRPr sz="1100" b="0">
+                <a:solidFill>
+                  <a:srgbClr val="000000"/>
+                </a:solidFill>
+                <a:latin typeface="Play"/>
+                <a:ea typeface="Play"/>
+                <a:cs typeface="Play"/>
+              </a:defRPr>
+            </a:pPr>
+          </a:p>
+        </c:txPr>
+        <c:crossAx val="-2068027336"/>
+        <c:crosses val="autoZero"/>
+      </c:valAx>
+    </c:plotArea>
+    <c:dispBlanksAs val="gap"/>
+  </c:chart>
+  <c:txPr>
+    <a:bodyPr/>
+    <a:lstStyle/>
+    <a:p>
+      <a:pPr>
+        <a:defRPr sz="1200" b="0">
+          <a:solidFill>
+            <a:srgbClr val="000000"/>
+          </a:solidFill>
+          <a:latin typeface="Play"/>
+          <a:ea typeface="Play"/>
+          <a:cs typeface="Play"/>
+        </a:defRPr>
+      </a:pPr>
+      <a:endParaRPr lang="en-US"/>
+    </a:p>
+  </c:txPr>
+  <c:externalData r:id="rId1">
+    <c:autoUpdate val="0"/>
+  </c:externalData>
+</c:chartSpace>
+</file>
+
+<file path=ppt/charts/chart2.xml><?xml version="1.0" encoding="utf-8"?>
+<c:chartSpace xmlns:c="http://schemas.openxmlformats.org/drawingml/2006/chart" xmlns:a="http://schemas.openxmlformats.org/drawingml/2006/main" xmlns:r="http://schemas.openxmlformats.org/officeDocument/2006/relationships">
+  <c:date1904 val="0"/>
+  <c:chart>
+    <c:autoTitleDeleted val="1"/>
+    <c:plotArea>
+      <c:barChart>
+        <c:barDir val="col"/>
+        <c:grouping val="clustered"/>
+        <c:ser>
+          <c:idx val="0"/>
+          <c:order val="0"/>
+          <c:tx>
+            <c:strRef>
+              <c:f>Sheet1!$B$1</c:f>
+              <c:strCache>
+                <c:ptCount val="1"/>
+                <c:pt idx="0">
+                  <c:v>Срок</c:v>
+                </c:pt>
+              </c:strCache>
+            </c:strRef>
+          </c:tx>
+          <c:spPr>
+            <a:solidFill>
+              <a:srgbClr val="0077FF"/>
+            </a:solidFill>
+            <a:ln>
+              <a:solidFill>
+                <a:srgbClr val="0077FF"/>
+              </a:solidFill>
+            </a:ln>
+          </c:spPr>
+          <c:cat>
+            <c:strRef>
+              <c:f>Sheet1!$A$2:$A$3</c:f>
+              <c:strCache>
+                <c:ptCount val="2"/>
+                <c:pt idx="0">
+                  <c:v>6 дней</c:v>
+                </c:pt>
+                <c:pt idx="1">
+                  <c:v>1 день</c:v>
+                </c:pt>
+              </c:strCache>
+            </c:strRef>
+          </c:cat>
+          <c:val>
+            <c:numRef>
+              <c:f>Sheet1!$B$2:$B$3</c:f>
+              <c:numCache>
+                <c:formatCode>General</c:formatCode>
+                <c:ptCount val="2"/>
+                <c:pt idx="0">
+                  <c:v>6.0</c:v>
+                </c:pt>
+                <c:pt idx="1">
+                  <c:v>1.0</c:v>
+                </c:pt>
+              </c:numCache>
+            </c:numRef>
+          </c:val>
+        </c:ser>
+        <c:dLbls>
+          <c:numFmt formatCode="0&quot; дней&quot;" sourceLinked="0"/>
+          <c:txPr>
+            <a:bodyPr wrap="none"/>
+            <a:lstStyle/>
+            <a:p>
+              <a:pPr>
+                <a:defRPr sz="1100" b="0">
+                  <a:solidFill>
+                    <a:srgbClr val="000000"/>
+                  </a:solidFill>
+                  <a:latin typeface="Play"/>
+                  <a:ea typeface="Play"/>
+                  <a:cs typeface="Play"/>
+                </a:defRPr>
+              </a:pPr>
+            </a:p>
+          </c:txPr>
+          <c:dLblPos val="outEnd"/>
+          <c:showLegendKey val="0"/>
+          <c:showVal val="1"/>
+          <c:showCatName val="0"/>
+          <c:showSerName val="0"/>
+          <c:showPercent val="0"/>
+          <c:showBubbleSize val="0"/>
+          <c:showLeaderLines val="1"/>
+        </c:dLbls>
+        <c:gapWidth val="60"/>
+        <c:axId val="-2068027336"/>
+        <c:axId val="-2113994440"/>
+      </c:barChart>
+      <c:catAx>
+        <c:axId val="-2068027336"/>
+        <c:scaling>
+          <c:orientation val="minMax"/>
+        </c:scaling>
+        <c:delete val="0"/>
+        <c:axPos val="b"/>
+        <c:majorTickMark val="out"/>
+        <c:minorTickMark val="none"/>
+        <c:tickLblPos val="nextTo"/>
+        <c:txPr>
+          <a:bodyPr/>
+          <a:lstStyle/>
+          <a:p>
+            <a:pPr>
+              <a:defRPr sz="1100" b="0">
+                <a:solidFill>
+                  <a:srgbClr val="000000"/>
+                </a:solidFill>
+                <a:latin typeface="Play"/>
+                <a:ea typeface="Play"/>
+                <a:cs typeface="Play"/>
+              </a:defRPr>
+            </a:pPr>
+          </a:p>
+        </c:txPr>
+        <c:crossAx val="-2113994440"/>
+        <c:crosses val="autoZero"/>
+        <c:auto val="1"/>
+        <c:lblAlgn val="ctr"/>
+        <c:lblOffset val="100"/>
+        <c:noMultiLvlLbl val="0"/>
+      </c:catAx>
+      <c:valAx>
+        <c:axId val="-2113994440"/>
+        <c:scaling/>
+        <c:delete val="0"/>
+        <c:axPos val="l"/>
+        <c:majorGridlines>
+          <c:spPr>
+            <a:ln w="9525">
+              <a:solidFill>
+                <a:srgbClr val="D1D1D1"/>
+              </a:solidFill>
+            </a:ln>
+          </c:spPr>
+        </c:majorGridlines>
+        <c:title>
+          <c:tx>
+            <c:rich>
+              <a:bodyPr rot="0" vert="horz"/>
+              <a:lstStyle/>
+              <a:p>
+                <a:pPr>
+                  <a:defRPr sz="1100" b="0">
+                    <a:solidFill>
+                      <a:srgbClr val="000000"/>
+                    </a:solidFill>
+                    <a:latin typeface="Play"/>
+                    <a:ea typeface="Play"/>
+                    <a:cs typeface="Play"/>
+                  </a:defRPr>
+                </a:pPr>
+                <a:r>
+                  <a:t>Срок, дней</a:t>
                 </a:r>
               </a:p>
             </c:rich>
@@ -730,7 +730,7 @@
               <c:strCache>
                 <c:ptCount val="2"/>
                 <c:pt idx="0">
-                  <c:v>Сейчас</c:v>
+                  <c:v>Ручная</c:v>
                 </c:pt>
                 <c:pt idx="1">
                   <c:v>Сервис</c:v>
@@ -850,220 +850,6 @@
                 </a:pPr>
                 <a:r>
                   <a:t>Нарушения, колод</a:t>
-                </a:r>
-              </a:p>
-            </c:rich>
-          </c:tx>
-          <c:layout/>
-          <c:overlay val="0"/>
-        </c:title>
-        <c:majorTickMark val="out"/>
-        <c:minorTickMark val="none"/>
-        <c:tickLblPos val="nextTo"/>
-        <c:txPr>
-          <a:bodyPr/>
-          <a:lstStyle/>
-          <a:p>
-            <a:pPr>
-              <a:defRPr sz="1100" b="0">
-                <a:solidFill>
-                  <a:srgbClr val="000000"/>
-                </a:solidFill>
-                <a:latin typeface="Play"/>
-                <a:ea typeface="Play"/>
-                <a:cs typeface="Play"/>
-              </a:defRPr>
-            </a:pPr>
-          </a:p>
-        </c:txPr>
-        <c:crossAx val="-2068027336"/>
-        <c:crosses val="autoZero"/>
-      </c:valAx>
-    </c:plotArea>
-    <c:dispBlanksAs val="gap"/>
-  </c:chart>
-  <c:txPr>
-    <a:bodyPr/>
-    <a:lstStyle/>
-    <a:p>
-      <a:pPr>
-        <a:defRPr sz="1200" b="0">
-          <a:solidFill>
-            <a:srgbClr val="000000"/>
-          </a:solidFill>
-          <a:latin typeface="Play"/>
-          <a:ea typeface="Play"/>
-          <a:cs typeface="Play"/>
-        </a:defRPr>
-      </a:pPr>
-      <a:endParaRPr lang="en-US"/>
-    </a:p>
-  </c:txPr>
-  <c:externalData r:id="rId1">
-    <c:autoUpdate val="0"/>
-  </c:externalData>
-</c:chartSpace>
-</file>
-
-<file path=ppt/charts/chart4.xml><?xml version="1.0" encoding="utf-8"?>
-<c:chartSpace xmlns:c="http://schemas.openxmlformats.org/drawingml/2006/chart" xmlns:a="http://schemas.openxmlformats.org/drawingml/2006/main" xmlns:r="http://schemas.openxmlformats.org/officeDocument/2006/relationships">
-  <c:date1904 val="0"/>
-  <c:chart>
-    <c:autoTitleDeleted val="1"/>
-    <c:plotArea>
-      <c:barChart>
-        <c:barDir val="col"/>
-        <c:grouping val="clustered"/>
-        <c:ser>
-          <c:idx val="0"/>
-          <c:order val="0"/>
-          <c:tx>
-            <c:strRef>
-              <c:f>Sheet1!$B$1</c:f>
-              <c:strCache>
-                <c:ptCount val="1"/>
-                <c:pt idx="0">
-                  <c:v>Запросы</c:v>
-                </c:pt>
-              </c:strCache>
-            </c:strRef>
-          </c:tx>
-          <c:spPr>
-            <a:solidFill>
-              <a:srgbClr val="0077FF"/>
-            </a:solidFill>
-            <a:ln>
-              <a:solidFill>
-                <a:srgbClr val="0077FF"/>
-              </a:solidFill>
-            </a:ln>
-          </c:spPr>
-          <c:cat>
-            <c:strRef>
-              <c:f>Sheet1!$A$2:$A$3</c:f>
-              <c:strCache>
-                <c:ptCount val="2"/>
-                <c:pt idx="0">
-                  <c:v>Сейчас</c:v>
-                </c:pt>
-                <c:pt idx="1">
-                  <c:v>Сервис</c:v>
-                </c:pt>
-              </c:strCache>
-            </c:strRef>
-          </c:cat>
-          <c:val>
-            <c:numRef>
-              <c:f>Sheet1!$B$2:$B$3</c:f>
-              <c:numCache>
-                <c:formatCode>General</c:formatCode>
-                <c:ptCount val="2"/>
-                <c:pt idx="0">
-                  <c:v>11.0</c:v>
-                </c:pt>
-                <c:pt idx="1">
-                  <c:v>38.0</c:v>
-                </c:pt>
-              </c:numCache>
-            </c:numRef>
-          </c:val>
-        </c:ser>
-        <c:dLbls>
-          <c:numFmt formatCode="0&quot; запросов&quot;" sourceLinked="0"/>
-          <c:txPr>
-            <a:bodyPr wrap="none"/>
-            <a:lstStyle/>
-            <a:p>
-              <a:pPr>
-                <a:defRPr sz="1100" b="0">
-                  <a:solidFill>
-                    <a:srgbClr val="000000"/>
-                  </a:solidFill>
-                  <a:latin typeface="Play"/>
-                  <a:ea typeface="Play"/>
-                  <a:cs typeface="Play"/>
-                </a:defRPr>
-              </a:pPr>
-            </a:p>
-          </c:txPr>
-          <c:dLblPos val="outEnd"/>
-          <c:showLegendKey val="0"/>
-          <c:showVal val="1"/>
-          <c:showCatName val="0"/>
-          <c:showSerName val="0"/>
-          <c:showPercent val="0"/>
-          <c:showBubbleSize val="0"/>
-          <c:showLeaderLines val="1"/>
-        </c:dLbls>
-        <c:gapWidth val="60"/>
-        <c:axId val="-2068027336"/>
-        <c:axId val="-2113994440"/>
-      </c:barChart>
-      <c:catAx>
-        <c:axId val="-2068027336"/>
-        <c:scaling>
-          <c:orientation val="minMax"/>
-        </c:scaling>
-        <c:delete val="0"/>
-        <c:axPos val="b"/>
-        <c:majorTickMark val="out"/>
-        <c:minorTickMark val="none"/>
-        <c:tickLblPos val="nextTo"/>
-        <c:txPr>
-          <a:bodyPr/>
-          <a:lstStyle/>
-          <a:p>
-            <a:pPr>
-              <a:defRPr sz="1100" b="0">
-                <a:solidFill>
-                  <a:srgbClr val="000000"/>
-                </a:solidFill>
-                <a:latin typeface="Play"/>
-                <a:ea typeface="Play"/>
-                <a:cs typeface="Play"/>
-              </a:defRPr>
-            </a:pPr>
-          </a:p>
-        </c:txPr>
-        <c:crossAx val="-2113994440"/>
-        <c:crosses val="autoZero"/>
-        <c:auto val="1"/>
-        <c:lblAlgn val="ctr"/>
-        <c:lblOffset val="100"/>
-        <c:noMultiLvlLbl val="0"/>
-      </c:catAx>
-      <c:valAx>
-        <c:axId val="-2113994440"/>
-        <c:scaling/>
-        <c:delete val="0"/>
-        <c:axPos val="l"/>
-        <c:majorGridlines>
-          <c:spPr>
-            <a:ln w="9525">
-              <a:solidFill>
-                <a:srgbClr val="D1D1D1"/>
-              </a:solidFill>
-            </a:ln>
-          </c:spPr>
-        </c:majorGridlines>
-        <c:title>
-          <c:tx>
-            <c:rich>
-              <a:bodyPr rot="0" vert="horz"/>
-              <a:lstStyle/>
-              <a:p>
-                <a:pPr>
-                  <a:defRPr sz="1100" b="0">
-                    <a:solidFill>
-                      <a:srgbClr val="000000"/>
-                    </a:solidFill>
-                    <a:latin typeface="Play"/>
-                    <a:ea typeface="Play"/>
-                    <a:cs typeface="Play"/>
-                  </a:defRPr>
-                </a:pPr>
-                <a:r>
-                  <a:t>Запросы, запросов</a:t>
                 </a:r>
               </a:p>
             </c:rich>
@@ -6253,7 +6039,7 @@
         <p:spPr>
           <a:xfrm>
             <a:off x="2473726" y="1370485"/>
-            <a:ext cx="4288261" cy="800071"/>
+            <a:ext cx="4288261" cy="1887982"/>
           </a:xfrm>
           <a:prstGeom prst="rect">
             <a:avLst/>
@@ -6270,7 +6056,7 @@
               <a:spcAft>
                 <a:spcPts val="300"/>
               </a:spcAft>
-              <a:defRPr sz="1800" b="0">
+              <a:defRPr sz="2705" b="0">
                 <a:solidFill>
                   <a:srgbClr val="FFFFFF"/>
                 </a:solidFill>
@@ -6280,7 +6066,7 @@
               </a:defRPr>
             </a:pPr>
             <a:r>
-              <a:rPr sz="1800" b="0">
+              <a:rPr sz="2705" b="0">
                 <a:solidFill>
                   <a:srgbClr val="FFFFFF"/>
                 </a:solidFill>
@@ -6288,7 +6074,7 @@
                 <a:ea typeface="Play"/>
                 <a:cs typeface="Play"/>
               </a:rPr>
-              <a:t>Автоматическая вёрстка презентаций: инициатива запуска</a:t>
+              <a:t>Автоматическая вёрстка презентаций Защита инициативы перед руководством</a:t>
             </a:r>
           </a:p>
         </p:txBody>
@@ -6355,70 +6141,21 @@
                 <a:ea typeface="Play"/>
                 <a:cs typeface="Play"/>
               </a:rPr>
-              <a:t>Контекст и возможность: ручная сборка 42 колод</a:t>
+              <a:t>Сейчас: ручная сборка занимает 186 мин</a:t>
             </a:r>
           </a:p>
         </p:txBody>
       </p:sp>
       <p:sp>
         <p:nvSpPr>
-          <p:cNvPr id="3" name="body"/>
-          <p:cNvSpPr txBox="1"/>
-          <p:nvPr/>
-        </p:nvSpPr>
-        <p:spPr>
-          <a:xfrm>
-            <a:off x="274320" y="1394994"/>
-            <a:ext cx="8344814" cy="398780"/>
-          </a:xfrm>
-          <a:prstGeom prst="rect">
-            <a:avLst/>
-          </a:prstGeom>
-          <a:noFill/>
-        </p:spPr>
-        <p:txBody>
-          <a:bodyPr wrap="square" lIns="76200" rIns="76200" tIns="50800" bIns="50800">
-            <a:spAutoFit/>
-          </a:bodyPr>
-          <a:lstStyle/>
-          <a:p>
-            <a:pPr algn="l">
-              <a:spcAft>
-                <a:spcPts val="300"/>
-              </a:spcAft>
-              <a:defRPr sz="1800">
-                <a:solidFill>
-                  <a:srgbClr val="000000"/>
-                </a:solidFill>
-                <a:latin typeface="Play"/>
-                <a:ea typeface="Play"/>
-                <a:cs typeface="Play"/>
-              </a:defRPr>
-            </a:pPr>
-            <a:r>
-              <a:rPr sz="1800">
-                <a:solidFill>
-                  <a:srgbClr val="000000"/>
-                </a:solidFill>
-                <a:latin typeface="Play"/>
-                <a:ea typeface="Play"/>
-                <a:cs typeface="Play"/>
-              </a:rPr>
-              <a:t>Средний срок ожидания в очереди – 6 рабочих дней</a:t>
-            </a:r>
-          </a:p>
-        </p:txBody>
-      </p:sp>
-      <p:sp>
-        <p:nvSpPr>
-          <p:cNvPr id="4" name="stat_0:bar"/>
+          <p:cNvPr id="3" name="stat_0:bar"/>
           <p:cNvSpPr/>
           <p:nvPr/>
         </p:nvSpPr>
         <p:spPr>
           <a:xfrm>
-            <a:off x="274320" y="2021231"/>
-            <a:ext cx="50800" cy="998728"/>
+            <a:off x="274320" y="1468146"/>
+            <a:ext cx="50800" cy="1130808"/>
           </a:xfrm>
           <a:prstGeom prst="rect">
             <a:avLst/>
@@ -6455,14 +6192,14 @@
       </p:sp>
       <p:sp>
         <p:nvSpPr>
-          <p:cNvPr id="5" name="stat_0"/>
+          <p:cNvPr id="4" name="stat_0"/>
           <p:cNvSpPr txBox="1"/>
           <p:nvPr/>
         </p:nvSpPr>
         <p:spPr>
           <a:xfrm>
-            <a:off x="452119" y="1948079"/>
-            <a:ext cx="3827710" cy="1071880"/>
+            <a:off x="452119" y="1394994"/>
+            <a:ext cx="3827710" cy="1203960"/>
           </a:xfrm>
           <a:prstGeom prst="rect">
             <a:avLst/>
@@ -6508,7 +6245,7 @@
               <a:spcAft>
                 <a:spcPts val="300"/>
               </a:spcAft>
-              <a:defRPr sz="1400" b="0">
+              <a:defRPr sz="1800" b="0">
                 <a:solidFill>
                   <a:srgbClr val="000000"/>
                 </a:solidFill>
@@ -6518,7 +6255,7 @@
               </a:defRPr>
             </a:pPr>
             <a:r>
-              <a:rPr sz="1400" b="0">
+              <a:rPr sz="1800" b="0">
                 <a:solidFill>
                   <a:srgbClr val="000000"/>
                 </a:solidFill>
@@ -6526,21 +6263,21 @@
                 <a:ea typeface="Play"/>
                 <a:cs typeface="Play"/>
               </a:rPr>
-              <a:t>42 колоды за квартал: 186 мин на сборку 12-слайдной презентации</a:t>
+              <a:t>42 колоды, 12 слайдов, 186 мин сборки</a:t>
             </a:r>
           </a:p>
         </p:txBody>
       </p:sp>
       <p:sp>
         <p:nvSpPr>
-          <p:cNvPr id="6" name="stat_1:bar"/>
+          <p:cNvPr id="5" name="stat_1:bar"/>
           <p:cNvSpPr/>
           <p:nvPr/>
         </p:nvSpPr>
         <p:spPr>
           <a:xfrm>
-            <a:off x="4613623" y="2021231"/>
-            <a:ext cx="50800" cy="998728"/>
+            <a:off x="4613623" y="1468146"/>
+            <a:ext cx="50800" cy="833628"/>
           </a:xfrm>
           <a:prstGeom prst="rect">
             <a:avLst/>
@@ -6577,14 +6314,14 @@
       </p:sp>
       <p:sp>
         <p:nvSpPr>
-          <p:cNvPr id="7" name="stat_1"/>
+          <p:cNvPr id="6" name="stat_1"/>
           <p:cNvSpPr txBox="1"/>
           <p:nvPr/>
         </p:nvSpPr>
         <p:spPr>
           <a:xfrm>
-            <a:off x="4791423" y="1948079"/>
-            <a:ext cx="3827710" cy="1071880"/>
+            <a:off x="4791423" y="1394994"/>
+            <a:ext cx="3827710" cy="906780"/>
           </a:xfrm>
           <a:prstGeom prst="rect">
             <a:avLst/>
@@ -6630,7 +6367,7 @@
               <a:spcAft>
                 <a:spcPts val="300"/>
               </a:spcAft>
-              <a:defRPr sz="1400" b="0">
+              <a:defRPr sz="1800" b="0">
                 <a:solidFill>
                   <a:srgbClr val="000000"/>
                 </a:solidFill>
@@ -6640,7 +6377,7 @@
               </a:defRPr>
             </a:pPr>
             <a:r>
-              <a:rPr sz="1400" b="0">
+              <a:rPr sz="1800" b="0">
                 <a:solidFill>
                   <a:srgbClr val="000000"/>
                 </a:solidFill>
@@ -6648,21 +6385,21 @@
                 <a:ea typeface="Play"/>
                 <a:cs typeface="Play"/>
               </a:rPr>
-              <a:t>74 мин на правки после ревью дизайнера</a:t>
+              <a:t>74 мин правки после ревью</a:t>
             </a:r>
           </a:p>
         </p:txBody>
       </p:sp>
       <p:sp>
         <p:nvSpPr>
-          <p:cNvPr id="8" name="stat_2:bar"/>
+          <p:cNvPr id="7" name="stat_2:bar"/>
           <p:cNvSpPr/>
           <p:nvPr/>
         </p:nvSpPr>
         <p:spPr>
           <a:xfrm>
-            <a:off x="274320" y="3361766"/>
-            <a:ext cx="50800" cy="998728"/>
+            <a:off x="274320" y="3085224"/>
+            <a:ext cx="50800" cy="1130808"/>
           </a:xfrm>
           <a:prstGeom prst="rect">
             <a:avLst/>
@@ -6699,14 +6436,14 @@
       </p:sp>
       <p:sp>
         <p:nvSpPr>
-          <p:cNvPr id="9" name="stat_2"/>
+          <p:cNvPr id="8" name="stat_2"/>
           <p:cNvSpPr txBox="1"/>
           <p:nvPr/>
         </p:nvSpPr>
         <p:spPr>
           <a:xfrm>
-            <a:off x="452119" y="3288614"/>
-            <a:ext cx="3827710" cy="1071880"/>
+            <a:off x="452119" y="3012072"/>
+            <a:ext cx="3827710" cy="1203960"/>
           </a:xfrm>
           <a:prstGeom prst="rect">
             <a:avLst/>
@@ -6752,7 +6489,7 @@
               <a:spcAft>
                 <a:spcPts val="300"/>
               </a:spcAft>
-              <a:defRPr sz="1400" b="0">
+              <a:defRPr sz="1800" b="0">
                 <a:solidFill>
                   <a:srgbClr val="000000"/>
                 </a:solidFill>
@@ -6762,7 +6499,7 @@
               </a:defRPr>
             </a:pPr>
             <a:r>
-              <a:rPr sz="1400" b="0">
+              <a:rPr sz="1800" b="0">
                 <a:solidFill>
                   <a:srgbClr val="000000"/>
                 </a:solidFill>
@@ -6770,129 +6507,7 @@
                 <a:ea typeface="Play"/>
                 <a:cs typeface="Play"/>
               </a:rPr>
-              <a:t>19 колод нарушили фирменный стиль (неправильные гарнитуры, цвета)</a:t>
-            </a:r>
-          </a:p>
-        </p:txBody>
-      </p:sp>
-      <p:sp>
-        <p:nvSpPr>
-          <p:cNvPr id="10" name="stat_3:bar"/>
-          <p:cNvSpPr/>
-          <p:nvPr/>
-        </p:nvSpPr>
-        <p:spPr>
-          <a:xfrm>
-            <a:off x="4613623" y="3361766"/>
-            <a:ext cx="50800" cy="998728"/>
-          </a:xfrm>
-          <a:prstGeom prst="rect">
-            <a:avLst/>
-          </a:prstGeom>
-          <a:solidFill>
-            <a:srgbClr val="0077FF"/>
-          </a:solidFill>
-          <a:ln>
-            <a:noFill/>
-          </a:ln>
-          <a:effectLst/>
-        </p:spPr>
-        <p:style>
-          <a:lnRef idx="1">
-            <a:schemeClr val="accent1"/>
-          </a:lnRef>
-          <a:fillRef idx="3">
-            <a:schemeClr val="accent1"/>
-          </a:fillRef>
-          <a:effectRef idx="2">
-            <a:schemeClr val="accent1"/>
-          </a:effectRef>
-          <a:fontRef idx="minor">
-            <a:schemeClr val="lt1"/>
-          </a:fontRef>
-        </p:style>
-        <p:txBody>
-          <a:bodyPr rtlCol="0" anchor="ctr"/>
-          <a:lstStyle/>
-          <a:p>
-            <a:pPr algn="ctr"/>
-          </a:p>
-        </p:txBody>
-      </p:sp>
-      <p:sp>
-        <p:nvSpPr>
-          <p:cNvPr id="11" name="stat_3"/>
-          <p:cNvSpPr txBox="1"/>
-          <p:nvPr/>
-        </p:nvSpPr>
-        <p:spPr>
-          <a:xfrm>
-            <a:off x="4791423" y="3288614"/>
-            <a:ext cx="3827710" cy="1071880"/>
-          </a:xfrm>
-          <a:prstGeom prst="rect">
-            <a:avLst/>
-          </a:prstGeom>
-          <a:noFill/>
-        </p:spPr>
-        <p:txBody>
-          <a:bodyPr wrap="square" lIns="76200" rIns="76200" tIns="0" bIns="0">
-            <a:spAutoFit/>
-          </a:bodyPr>
-          <a:lstStyle/>
-          <a:p>
-            <a:pPr>
-              <a:lnSpc>
-                <a:spcPct val="100000"/>
-              </a:lnSpc>
-              <a:spcAft>
-                <a:spcPts val="200"/>
-              </a:spcAft>
-              <a:defRPr sz="3200" b="1">
-                <a:solidFill>
-                  <a:srgbClr val="0077FF"/>
-                </a:solidFill>
-                <a:latin typeface="Play"/>
-                <a:ea typeface="Play"/>
-                <a:cs typeface="Play"/>
-              </a:defRPr>
-            </a:pPr>
-            <a:r>
-              <a:rPr sz="3200" b="1">
-                <a:solidFill>
-                  <a:srgbClr val="0077FF"/>
-                </a:solidFill>
-                <a:latin typeface="Play"/>
-                <a:ea typeface="Play"/>
-                <a:cs typeface="Play"/>
-              </a:rPr>
-              <a:t>11</a:t>
-            </a:r>
-          </a:p>
-          <a:p>
-            <a:pPr>
-              <a:spcAft>
-                <a:spcPts val="300"/>
-              </a:spcAft>
-              <a:defRPr sz="1400" b="0">
-                <a:solidFill>
-                  <a:srgbClr val="000000"/>
-                </a:solidFill>
-                <a:latin typeface="Play"/>
-                <a:ea typeface="Play"/>
-                <a:cs typeface="Play"/>
-              </a:defRPr>
-            </a:pPr>
-            <a:r>
-              <a:rPr sz="1400" b="0">
-                <a:solidFill>
-                  <a:srgbClr val="000000"/>
-                </a:solidFill>
-                <a:latin typeface="Play"/>
-                <a:ea typeface="Play"/>
-                <a:cs typeface="Play"/>
-              </a:rPr>
-              <a:t>Дизайнеры закрывают 11 запросов из 27 в неделю</a:t>
+              <a:t>19 колод нарушили фирменный стиль</a:t>
             </a:r>
           </a:p>
         </p:txBody>
@@ -7082,29 +6697,304 @@
                 <a:ea typeface="Play"/>
                 <a:cs typeface="Play"/>
               </a:rPr>
-              <a:t>Нагрузка дизайнеров: 27 запросов, 11 закрыто</a:t>
+              <a:t>Дизайнеры ждут 6 дней, закрывают 11 запросов</a:t>
             </a:r>
           </a:p>
         </p:txBody>
       </p:sp>
-      <p:graphicFrame>
-        <p:nvGraphicFramePr>
-          <p:cNvPr id="556" name="Chart 555"/>
-          <p:cNvGraphicFramePr>
-            <a:graphicFrameLocks noGrp="1"/>
-          </p:cNvGraphicFramePr>
+      <p:sp>
+        <p:nvSpPr>
+          <p:cNvPr id="556" name="body"/>
+          <p:cNvSpPr txBox="1"/>
           <p:nvPr/>
-        </p:nvGraphicFramePr>
-        <p:xfrm>
-          <a:off x="4583887" y="1394994"/>
-          <a:ext cx="4035247" cy="3028415"/>
-        </p:xfrm>
-        <a:graphic>
-          <a:graphicData uri="http://schemas.openxmlformats.org/drawingml/2006/chart">
-            <c:chart xmlns:c="http://schemas.openxmlformats.org/drawingml/2006/chart" r:id="rId2"/>
-          </a:graphicData>
-        </a:graphic>
-      </p:graphicFrame>
+        </p:nvSpPr>
+        <p:spPr>
+          <a:xfrm>
+            <a:off x="274320" y="1394994"/>
+            <a:ext cx="8344814" cy="398780"/>
+          </a:xfrm>
+          <a:prstGeom prst="rect">
+            <a:avLst/>
+          </a:prstGeom>
+          <a:noFill/>
+        </p:spPr>
+        <p:txBody>
+          <a:bodyPr wrap="square" lIns="76200" rIns="76200" tIns="50800" bIns="50800">
+            <a:spAutoFit/>
+          </a:bodyPr>
+          <a:lstStyle/>
+          <a:p>
+            <a:pPr algn="l">
+              <a:spcAft>
+                <a:spcPts val="300"/>
+              </a:spcAft>
+              <a:defRPr sz="1800">
+                <a:solidFill>
+                  <a:srgbClr val="000000"/>
+                </a:solidFill>
+                <a:latin typeface="Play"/>
+                <a:ea typeface="Play"/>
+                <a:cs typeface="Play"/>
+              </a:defRPr>
+            </a:pPr>
+            <a:r>
+              <a:rPr sz="1800">
+                <a:solidFill>
+                  <a:srgbClr val="000000"/>
+                </a:solidFill>
+                <a:latin typeface="Play"/>
+                <a:ea typeface="Play"/>
+                <a:cs typeface="Play"/>
+              </a:rPr>
+              <a:t>Средний срок ожидания 6 рабочих дней</a:t>
+            </a:r>
+          </a:p>
+        </p:txBody>
+      </p:sp>
+      <p:sp>
+        <p:nvSpPr>
+          <p:cNvPr id="557" name="stat_0:bar"/>
+          <p:cNvSpPr/>
+          <p:nvPr/>
+        </p:nvSpPr>
+        <p:spPr>
+          <a:xfrm>
+            <a:off x="274320" y="2021231"/>
+            <a:ext cx="50800" cy="1130808"/>
+          </a:xfrm>
+          <a:prstGeom prst="rect">
+            <a:avLst/>
+          </a:prstGeom>
+          <a:solidFill>
+            <a:srgbClr val="0077FF"/>
+          </a:solidFill>
+          <a:ln>
+            <a:noFill/>
+          </a:ln>
+          <a:effectLst/>
+        </p:spPr>
+        <p:style>
+          <a:lnRef idx="1">
+            <a:schemeClr val="accent1"/>
+          </a:lnRef>
+          <a:fillRef idx="3">
+            <a:schemeClr val="accent1"/>
+          </a:fillRef>
+          <a:effectRef idx="2">
+            <a:schemeClr val="accent1"/>
+          </a:effectRef>
+          <a:fontRef idx="minor">
+            <a:schemeClr val="lt1"/>
+          </a:fontRef>
+        </p:style>
+        <p:txBody>
+          <a:bodyPr rtlCol="0" anchor="ctr"/>
+          <a:lstStyle/>
+          <a:p>
+            <a:pPr algn="ctr"/>
+          </a:p>
+        </p:txBody>
+      </p:sp>
+      <p:sp>
+        <p:nvSpPr>
+          <p:cNvPr id="558" name="stat_0"/>
+          <p:cNvSpPr txBox="1"/>
+          <p:nvPr/>
+        </p:nvSpPr>
+        <p:spPr>
+          <a:xfrm>
+            <a:off x="452119" y="1948079"/>
+            <a:ext cx="3827710" cy="1203960"/>
+          </a:xfrm>
+          <a:prstGeom prst="rect">
+            <a:avLst/>
+          </a:prstGeom>
+          <a:noFill/>
+        </p:spPr>
+        <p:txBody>
+          <a:bodyPr wrap="square" lIns="76200" rIns="76200" tIns="0" bIns="0">
+            <a:spAutoFit/>
+          </a:bodyPr>
+          <a:lstStyle/>
+          <a:p>
+            <a:pPr>
+              <a:lnSpc>
+                <a:spcPct val="100000"/>
+              </a:lnSpc>
+              <a:spcAft>
+                <a:spcPts val="200"/>
+              </a:spcAft>
+              <a:defRPr sz="3200" b="1">
+                <a:solidFill>
+                  <a:srgbClr val="0077FF"/>
+                </a:solidFill>
+                <a:latin typeface="Play"/>
+                <a:ea typeface="Play"/>
+                <a:cs typeface="Play"/>
+              </a:defRPr>
+            </a:pPr>
+            <a:r>
+              <a:rPr sz="3200" b="1">
+                <a:solidFill>
+                  <a:srgbClr val="0077FF"/>
+                </a:solidFill>
+                <a:latin typeface="Play"/>
+                <a:ea typeface="Play"/>
+                <a:cs typeface="Play"/>
+              </a:rPr>
+              <a:t>11</a:t>
+            </a:r>
+          </a:p>
+          <a:p>
+            <a:pPr>
+              <a:spcAft>
+                <a:spcPts val="300"/>
+              </a:spcAft>
+              <a:defRPr sz="1800" b="0">
+                <a:solidFill>
+                  <a:srgbClr val="000000"/>
+                </a:solidFill>
+                <a:latin typeface="Play"/>
+                <a:ea typeface="Play"/>
+                <a:cs typeface="Play"/>
+              </a:defRPr>
+            </a:pPr>
+            <a:r>
+              <a:rPr sz="1800" b="0">
+                <a:solidFill>
+                  <a:srgbClr val="000000"/>
+                </a:solidFill>
+                <a:latin typeface="Play"/>
+                <a:ea typeface="Play"/>
+                <a:cs typeface="Play"/>
+              </a:rPr>
+              <a:t>4 дизайнера закрывают 11 запросов/неделю</a:t>
+            </a:r>
+          </a:p>
+        </p:txBody>
+      </p:sp>
+      <p:sp>
+        <p:nvSpPr>
+          <p:cNvPr id="559" name="stat_1:bar"/>
+          <p:cNvSpPr/>
+          <p:nvPr/>
+        </p:nvSpPr>
+        <p:spPr>
+          <a:xfrm>
+            <a:off x="4613623" y="2021231"/>
+            <a:ext cx="50800" cy="833628"/>
+          </a:xfrm>
+          <a:prstGeom prst="rect">
+            <a:avLst/>
+          </a:prstGeom>
+          <a:solidFill>
+            <a:srgbClr val="0077FF"/>
+          </a:solidFill>
+          <a:ln>
+            <a:noFill/>
+          </a:ln>
+          <a:effectLst/>
+        </p:spPr>
+        <p:style>
+          <a:lnRef idx="1">
+            <a:schemeClr val="accent1"/>
+          </a:lnRef>
+          <a:fillRef idx="3">
+            <a:schemeClr val="accent1"/>
+          </a:fillRef>
+          <a:effectRef idx="2">
+            <a:schemeClr val="accent1"/>
+          </a:effectRef>
+          <a:fontRef idx="minor">
+            <a:schemeClr val="lt1"/>
+          </a:fontRef>
+        </p:style>
+        <p:txBody>
+          <a:bodyPr rtlCol="0" anchor="ctr"/>
+          <a:lstStyle/>
+          <a:p>
+            <a:pPr algn="ctr"/>
+          </a:p>
+        </p:txBody>
+      </p:sp>
+      <p:sp>
+        <p:nvSpPr>
+          <p:cNvPr id="560" name="stat_1"/>
+          <p:cNvSpPr txBox="1"/>
+          <p:nvPr/>
+        </p:nvSpPr>
+        <p:spPr>
+          <a:xfrm>
+            <a:off x="4791423" y="1948079"/>
+            <a:ext cx="3827710" cy="906780"/>
+          </a:xfrm>
+          <a:prstGeom prst="rect">
+            <a:avLst/>
+          </a:prstGeom>
+          <a:noFill/>
+        </p:spPr>
+        <p:txBody>
+          <a:bodyPr wrap="square" lIns="76200" rIns="76200" tIns="0" bIns="0">
+            <a:spAutoFit/>
+          </a:bodyPr>
+          <a:lstStyle/>
+          <a:p>
+            <a:pPr>
+              <a:lnSpc>
+                <a:spcPct val="100000"/>
+              </a:lnSpc>
+              <a:spcAft>
+                <a:spcPts val="200"/>
+              </a:spcAft>
+              <a:defRPr sz="3200" b="1">
+                <a:solidFill>
+                  <a:srgbClr val="0077FF"/>
+                </a:solidFill>
+                <a:latin typeface="Play"/>
+                <a:ea typeface="Play"/>
+                <a:cs typeface="Play"/>
+              </a:defRPr>
+            </a:pPr>
+            <a:r>
+              <a:rPr sz="3200" b="1">
+                <a:solidFill>
+                  <a:srgbClr val="0077FF"/>
+                </a:solidFill>
+                <a:latin typeface="Play"/>
+                <a:ea typeface="Play"/>
+                <a:cs typeface="Play"/>
+              </a:rPr>
+              <a:t>27</a:t>
+            </a:r>
+          </a:p>
+          <a:p>
+            <a:pPr>
+              <a:spcAft>
+                <a:spcPts val="300"/>
+              </a:spcAft>
+              <a:defRPr sz="1800" b="0">
+                <a:solidFill>
+                  <a:srgbClr val="000000"/>
+                </a:solidFill>
+                <a:latin typeface="Play"/>
+                <a:ea typeface="Play"/>
+                <a:cs typeface="Play"/>
+              </a:defRPr>
+            </a:pPr>
+            <a:r>
+              <a:rPr sz="1800" b="0">
+                <a:solidFill>
+                  <a:srgbClr val="000000"/>
+                </a:solidFill>
+                <a:latin typeface="Play"/>
+                <a:ea typeface="Play"/>
+                <a:cs typeface="Play"/>
+              </a:rPr>
+              <a:t>27 запросов поступает</a:t>
+            </a:r>
+          </a:p>
+        </p:txBody>
+      </p:sp>
     </p:spTree>
   </p:cSld>
   <p:clrMapOvr>
@@ -7167,7 +7057,7 @@
                 <a:ea typeface="Play"/>
                 <a:cs typeface="Play"/>
               </a:rPr>
-              <a:t>Предложение: сервис принимает шаблон и материалы</a:t>
+              <a:t>Сервис автоматической вёрстки: ускоряет сборку и устраняет ошибки</a:t>
             </a:r>
           </a:p>
         </p:txBody>
@@ -7180,8 +7070,8 @@
         </p:nvSpPr>
         <p:spPr>
           <a:xfrm>
-            <a:off x="274320" y="1669682"/>
-            <a:ext cx="4519476" cy="2479040"/>
+            <a:off x="274320" y="2115452"/>
+            <a:ext cx="4519476" cy="1587500"/>
           </a:xfrm>
           <a:prstGeom prst="rect">
             <a:avLst/>
@@ -7198,7 +7088,7 @@
               <a:spcAft>
                 <a:spcPts val="300"/>
               </a:spcAft>
-              <a:defRPr sz="1600" b="1">
+              <a:defRPr sz="1800" b="1">
                 <a:solidFill>
                   <a:srgbClr val="000000"/>
                 </a:solidFill>
@@ -7208,7 +7098,7 @@
               </a:defRPr>
             </a:pPr>
             <a:r>
-              <a:rPr sz="1600" b="1">
+              <a:rPr sz="1800" b="1">
                 <a:solidFill>
                   <a:srgbClr val="000000"/>
                 </a:solidFill>
@@ -7216,7 +7106,7 @@
                 <a:ea typeface="Play"/>
                 <a:cs typeface="Play"/>
               </a:rPr>
-              <a:t>• Сервис принимает pptx шаблон и материалы (документы, таблицы, заметки)</a:t>
+              <a:t>• Принимает шаблон pptx и материалы</a:t>
             </a:r>
           </a:p>
           <a:p>
@@ -7224,7 +7114,7 @@
               <a:spcAft>
                 <a:spcPts val="300"/>
               </a:spcAft>
-              <a:defRPr sz="1600" b="1">
+              <a:defRPr sz="1800" b="1">
                 <a:solidFill>
                   <a:srgbClr val="000000"/>
                 </a:solidFill>
@@ -7234,7 +7124,7 @@
               </a:defRPr>
             </a:pPr>
             <a:r>
-              <a:rPr sz="1600" b="1">
+              <a:rPr sz="1800" b="1">
                 <a:solidFill>
                   <a:srgbClr val="000000"/>
                 </a:solidFill>
@@ -7242,7 +7132,7 @@
                 <a:ea typeface="Play"/>
                 <a:cs typeface="Play"/>
               </a:rPr>
-              <a:t>• Автоматически преобразует шаблон в дизайн-систему (гарнитуры, шкала, палитра)</a:t>
+              <a:t>• Генерирует план колоды и вёрстку по дизайн-системе</a:t>
             </a:r>
           </a:p>
           <a:p>
@@ -7250,7 +7140,7 @@
               <a:spcAft>
                 <a:spcPts val="300"/>
               </a:spcAft>
-              <a:defRPr sz="1600" b="1">
+              <a:defRPr sz="1800" b="1">
                 <a:solidFill>
                   <a:srgbClr val="000000"/>
                 </a:solidFill>
@@ -7260,7 +7150,7 @@
               </a:defRPr>
             </a:pPr>
             <a:r>
-              <a:rPr sz="1600" b="1">
+              <a:rPr sz="1800" b="1">
                 <a:solidFill>
                   <a:srgbClr val="000000"/>
                 </a:solidFill>
@@ -7268,33 +7158,7 @@
                 <a:ea typeface="Play"/>
                 <a:cs typeface="Play"/>
               </a:rPr>
-              <a:t>• Генерирует план колоды и вёрстку по ролям страниц</a:t>
-            </a:r>
-          </a:p>
-          <a:p>
-            <a:pPr algn="l">
-              <a:spcAft>
-                <a:spcPts val="300"/>
-              </a:spcAft>
-              <a:defRPr sz="1600" b="1">
-                <a:solidFill>
-                  <a:srgbClr val="000000"/>
-                </a:solidFill>
-                <a:latin typeface="Play"/>
-                <a:ea typeface="Play"/>
-                <a:cs typeface="Play"/>
-              </a:defRPr>
-            </a:pPr>
-            <a:r>
-              <a:rPr sz="1600" b="1">
-                <a:solidFill>
-                  <a:srgbClr val="000000"/>
-                </a:solidFill>
-                <a:latin typeface="Play"/>
-                <a:ea typeface="Play"/>
-                <a:cs typeface="Play"/>
-              </a:rPr>
-              <a:t>• Экспорт в pptx, pdf, html с редактируемыми слайдами</a:t>
+              <a:t>• Экспорт в pptx, pdf, html</a:t>
             </a:r>
           </a:p>
         </p:txBody>
@@ -7926,14 +7790,55 @@
       <p:grpSpPr/>
       <p:sp>
         <p:nvSpPr>
-          <p:cNvPr id="2" name="title"/>
+          <p:cNvPr id="2429" name="Google Shape;2429;p89"/>
+          <p:cNvSpPr/>
+          <p:nvPr/>
+        </p:nvSpPr>
+        <p:spPr>
+          <a:xfrm>
+            <a:off x="553415" y="1828897"/>
+            <a:ext cx="2232516" cy="1490254"/>
+          </a:xfrm>
+          <a:prstGeom prst="rect">
+            <a:avLst/>
+          </a:prstGeom>
+          <a:noFill/>
+          <a:ln>
+            <a:noFill/>
+          </a:ln>
+        </p:spPr>
+        <p:txBody>
+          <a:bodyPr anchorCtr="0" anchor="ctr" bIns="91425" lIns="91425" spcFirstLastPara="1" rIns="91425" wrap="square" tIns="91425">
+            <a:noAutofit/>
+          </a:bodyPr>
+          <a:lstStyle/>
+          <a:p>
+            <a:pPr indent="0" lvl="0" marL="0" rtl="0" algn="l">
+              <a:spcBef>
+                <a:spcPts val="0"/>
+              </a:spcBef>
+              <a:spcAft>
+                <a:spcPts val="0"/>
+              </a:spcAft>
+              <a:buNone/>
+            </a:pPr>
+            <a:r>
+              <a:t/>
+            </a:r>
+            <a:endParaRPr/>
+          </a:p>
+        </p:txBody>
+      </p:sp>
+      <p:sp>
+        <p:nvSpPr>
+          <p:cNvPr id="2430" name="title"/>
           <p:cNvSpPr txBox="1"/>
           <p:nvPr/>
         </p:nvSpPr>
         <p:spPr>
           <a:xfrm>
             <a:off x="274320" y="282943"/>
-            <a:ext cx="6792986" cy="932027"/>
+            <a:ext cx="6792986" cy="617220"/>
           </a:xfrm>
           <a:prstGeom prst="rect">
             <a:avLst/>
@@ -7968,564 +7873,29 @@
                 <a:ea typeface="Play"/>
                 <a:cs typeface="Play"/>
               </a:rPr>
-              <a:t>Предложение: аудит и автоматические правки</a:t>
+              <a:t>Сборка колоды за 4 мин вместо 186</a:t>
             </a:r>
           </a:p>
         </p:txBody>
       </p:sp>
-      <p:sp>
-        <p:nvSpPr>
-          <p:cNvPr id="3" name="body"/>
-          <p:cNvSpPr txBox="1"/>
+      <p:graphicFrame>
+        <p:nvGraphicFramePr>
+          <p:cNvPr id="2431" name="Chart 2430"/>
+          <p:cNvGraphicFramePr>
+            <a:graphicFrameLocks noGrp="1"/>
+          </p:cNvGraphicFramePr>
           <p:nvPr/>
-        </p:nvSpPr>
-        <p:spPr>
-          <a:xfrm>
-            <a:off x="274320" y="1669682"/>
-            <a:ext cx="4519476" cy="2479040"/>
-          </a:xfrm>
-          <a:prstGeom prst="rect">
-            <a:avLst/>
-          </a:prstGeom>
-          <a:noFill/>
-        </p:spPr>
-        <p:txBody>
-          <a:bodyPr wrap="square" lIns="76200" rIns="76200" tIns="50800" bIns="50800">
-            <a:spAutoFit/>
-          </a:bodyPr>
-          <a:lstStyle/>
-          <a:p>
-            <a:pPr algn="l">
-              <a:spcAft>
-                <a:spcPts val="300"/>
-              </a:spcAft>
-              <a:defRPr sz="1800">
-                <a:solidFill>
-                  <a:srgbClr val="000000"/>
-                </a:solidFill>
-                <a:latin typeface="Play"/>
-                <a:ea typeface="Play"/>
-                <a:cs typeface="Play"/>
-              </a:defRPr>
-            </a:pPr>
-            <a:r>
-              <a:rPr sz="1800">
-                <a:solidFill>
-                  <a:srgbClr val="000000"/>
-                </a:solidFill>
-                <a:latin typeface="Play"/>
-                <a:ea typeface="Play"/>
-                <a:cs typeface="Play"/>
-              </a:rPr>
-              <a:t>• Аудит качества до выдачи результата</a:t>
-            </a:r>
-          </a:p>
-          <a:p>
-            <a:pPr algn="l">
-              <a:spcAft>
-                <a:spcPts val="300"/>
-              </a:spcAft>
-              <a:defRPr sz="1800">
-                <a:solidFill>
-                  <a:srgbClr val="000000"/>
-                </a:solidFill>
-                <a:latin typeface="Play"/>
-                <a:ea typeface="Play"/>
-                <a:cs typeface="Play"/>
-              </a:defRPr>
-            </a:pPr>
-            <a:r>
-              <a:rPr sz="1800">
-                <a:solidFill>
-                  <a:srgbClr val="000000"/>
-                </a:solidFill>
-                <a:latin typeface="Play"/>
-                <a:ea typeface="Play"/>
-                <a:cs typeface="Play"/>
-              </a:rPr>
-              <a:t>• Автоматические правки нарушений фирменного стиля</a:t>
-            </a:r>
-          </a:p>
-          <a:p>
-            <a:pPr algn="l">
-              <a:spcAft>
-                <a:spcPts val="300"/>
-              </a:spcAft>
-              <a:defRPr sz="1800">
-                <a:solidFill>
-                  <a:srgbClr val="000000"/>
-                </a:solidFill>
-                <a:latin typeface="Play"/>
-                <a:ea typeface="Play"/>
-                <a:cs typeface="Play"/>
-              </a:defRPr>
-            </a:pPr>
-            <a:r>
-              <a:rPr sz="1800">
-                <a:solidFill>
-                  <a:srgbClr val="000000"/>
-                </a:solidFill>
-                <a:latin typeface="Play"/>
-                <a:ea typeface="Play"/>
-                <a:cs typeface="Play"/>
-              </a:rPr>
-              <a:t>• Слайды остаются редактируемыми, без картинок</a:t>
-            </a:r>
-          </a:p>
-          <a:p>
-            <a:pPr algn="l">
-              <a:spcAft>
-                <a:spcPts val="300"/>
-              </a:spcAft>
-              <a:defRPr sz="1800">
-                <a:solidFill>
-                  <a:srgbClr val="000000"/>
-                </a:solidFill>
-                <a:latin typeface="Play"/>
-                <a:ea typeface="Play"/>
-                <a:cs typeface="Play"/>
-              </a:defRPr>
-            </a:pPr>
-            <a:r>
-              <a:rPr sz="1800">
-                <a:solidFill>
-                  <a:srgbClr val="000000"/>
-                </a:solidFill>
-                <a:latin typeface="Play"/>
-                <a:ea typeface="Play"/>
-                <a:cs typeface="Play"/>
-              </a:rPr>
-              <a:t>• Поддержка OpenAI-совместимых моделей (gpt-oss-20b)</a:t>
-            </a:r>
-          </a:p>
-        </p:txBody>
-      </p:sp>
-      <p:grpSp>
-        <p:nvGrpSpPr>
-          <p:cNvPr id="4" name="illustration:builtin-security"/>
-          <p:cNvGrpSpPr/>
-          <p:nvPr/>
-        </p:nvGrpSpPr>
-        <p:grpSpPr>
-          <a:xfrm>
-            <a:off x="5725054" y="1808386"/>
-            <a:ext cx="2343671" cy="2201630"/>
-            <a:chOff x="5725054" y="1808386"/>
-            <a:chExt cx="2343671" cy="2201630"/>
-          </a:xfrm>
-        </p:grpSpPr>
-        <p:sp>
-          <p:nvSpPr>
-            <p:cNvPr id="5" name="Oval 4"/>
-            <p:cNvSpPr/>
-            <p:nvPr/>
-          </p:nvSpPr>
-          <p:spPr>
-            <a:xfrm>
-              <a:off x="5742809" y="1808386"/>
-              <a:ext cx="2201630" cy="2201630"/>
-            </a:xfrm>
-            <a:prstGeom prst="ellipse">
-              <a:avLst/>
-            </a:prstGeom>
-            <a:solidFill>
-              <a:srgbClr val="D6E9FF"/>
-            </a:solidFill>
-            <a:ln>
-              <a:noFill/>
-            </a:ln>
-            <a:effectLst/>
-          </p:spPr>
-          <p:style>
-            <a:lnRef idx="1">
-              <a:schemeClr val="accent1"/>
-            </a:lnRef>
-            <a:fillRef idx="3">
-              <a:schemeClr val="accent1"/>
-            </a:fillRef>
-            <a:effectRef idx="2">
-              <a:schemeClr val="accent1"/>
-            </a:effectRef>
-            <a:fontRef idx="minor">
-              <a:schemeClr val="lt1"/>
-            </a:fontRef>
-          </p:style>
-          <p:txBody>
-            <a:bodyPr rtlCol="0" anchor="ctr"/>
-            <a:lstStyle/>
-            <a:p>
-              <a:pPr algn="ctr"/>
-            </a:p>
-          </p:txBody>
-        </p:sp>
-        <p:sp>
-          <p:nvSpPr>
-            <p:cNvPr id="6" name="Freeform 5"/>
-            <p:cNvSpPr/>
-            <p:nvPr/>
-          </p:nvSpPr>
-          <p:spPr>
-            <a:xfrm>
-              <a:off x="6026890" y="1932671"/>
-              <a:ext cx="1633468" cy="1970815"/>
-            </a:xfrm>
-            <a:custGeom>
-              <a:avLst/>
-              <a:gdLst/>
-              <a:ahLst/>
-              <a:cxnLst/>
-              <a:rect l="l" t="t" r="r" b="b"/>
-              <a:pathLst>
-                <a:path w="1633468" h="1970815">
-                  <a:moveTo>
-                    <a:pt x="816734" y="0"/>
-                  </a:moveTo>
-                  <a:lnTo>
-                    <a:pt x="1633468" y="319592"/>
-                  </a:lnTo>
-                  <a:lnTo>
-                    <a:pt x="1633468" y="869999"/>
-                  </a:lnTo>
-                  <a:lnTo>
-                    <a:pt x="1623543" y="1021149"/>
-                  </a:lnTo>
-                  <a:lnTo>
-                    <a:pt x="1594549" y="1165160"/>
-                  </a:lnTo>
-                  <a:lnTo>
-                    <a:pt x="1547658" y="1301288"/>
-                  </a:lnTo>
-                  <a:lnTo>
-                    <a:pt x="1484041" y="1428788"/>
-                  </a:lnTo>
-                  <a:lnTo>
-                    <a:pt x="1404871" y="1546912"/>
-                  </a:lnTo>
-                  <a:lnTo>
-                    <a:pt x="1311320" y="1654916"/>
-                  </a:lnTo>
-                  <a:lnTo>
-                    <a:pt x="1204558" y="1752054"/>
-                  </a:lnTo>
-                  <a:lnTo>
-                    <a:pt x="1085759" y="1837581"/>
-                  </a:lnTo>
-                  <a:lnTo>
-                    <a:pt x="956094" y="1910749"/>
-                  </a:lnTo>
-                  <a:lnTo>
-                    <a:pt x="816734" y="1970815"/>
-                  </a:lnTo>
-                  <a:lnTo>
-                    <a:pt x="677374" y="1910749"/>
-                  </a:lnTo>
-                  <a:lnTo>
-                    <a:pt x="547709" y="1837581"/>
-                  </a:lnTo>
-                  <a:lnTo>
-                    <a:pt x="428910" y="1752054"/>
-                  </a:lnTo>
-                  <a:lnTo>
-                    <a:pt x="322148" y="1654916"/>
-                  </a:lnTo>
-                  <a:lnTo>
-                    <a:pt x="228597" y="1546912"/>
-                  </a:lnTo>
-                  <a:lnTo>
-                    <a:pt x="149427" y="1428788"/>
-                  </a:lnTo>
-                  <a:lnTo>
-                    <a:pt x="85810" y="1301288"/>
-                  </a:lnTo>
-                  <a:lnTo>
-                    <a:pt x="38919" y="1165160"/>
-                  </a:lnTo>
-                  <a:lnTo>
-                    <a:pt x="9925" y="1021149"/>
-                  </a:lnTo>
-                  <a:lnTo>
-                    <a:pt x="0" y="869999"/>
-                  </a:lnTo>
-                  <a:lnTo>
-                    <a:pt x="0" y="319592"/>
-                  </a:lnTo>
-                  <a:close/>
-                </a:path>
-              </a:pathLst>
-            </a:custGeom>
-            <a:solidFill>
-              <a:srgbClr val="0077FF"/>
-            </a:solidFill>
-            <a:ln>
-              <a:noFill/>
-            </a:ln>
-            <a:effectLst/>
-          </p:spPr>
-          <p:style>
-            <a:lnRef idx="1">
-              <a:schemeClr val="accent1"/>
-            </a:lnRef>
-            <a:fillRef idx="3">
-              <a:schemeClr val="accent1"/>
-            </a:fillRef>
-            <a:effectRef idx="2">
-              <a:schemeClr val="accent1"/>
-            </a:effectRef>
-            <a:fontRef idx="minor">
-              <a:schemeClr val="lt1"/>
-            </a:fontRef>
-          </p:style>
-          <p:txBody>
-            <a:bodyPr rtlCol="0" anchor="ctr"/>
-            <a:lstStyle/>
-            <a:p>
-              <a:pPr algn="ctr"/>
-            </a:p>
-          </p:txBody>
-        </p:sp>
-        <p:sp>
-          <p:nvSpPr>
-            <p:cNvPr id="7" name="Freeform 6"/>
-            <p:cNvSpPr/>
-            <p:nvPr/>
-          </p:nvSpPr>
-          <p:spPr>
-            <a:xfrm>
-              <a:off x="6843624" y="2163487"/>
-              <a:ext cx="585918" cy="1473672"/>
-            </a:xfrm>
-            <a:custGeom>
-              <a:avLst/>
-              <a:gdLst/>
-              <a:ahLst/>
-              <a:cxnLst/>
-              <a:rect l="l" t="t" r="r" b="b"/>
-              <a:pathLst>
-                <a:path w="585918" h="1473672">
-                  <a:moveTo>
-                    <a:pt x="0" y="0"/>
-                  </a:moveTo>
-                  <a:lnTo>
-                    <a:pt x="585918" y="230817"/>
-                  </a:lnTo>
-                  <a:lnTo>
-                    <a:pt x="585918" y="656939"/>
-                  </a:lnTo>
-                  <a:lnTo>
-                    <a:pt x="578620" y="766576"/>
-                  </a:lnTo>
-                  <a:lnTo>
-                    <a:pt x="557368" y="871420"/>
-                  </a:lnTo>
-                  <a:lnTo>
-                    <a:pt x="523118" y="970937"/>
-                  </a:lnTo>
-                  <a:lnTo>
-                    <a:pt x="476831" y="1064595"/>
-                  </a:lnTo>
-                  <a:lnTo>
-                    <a:pt x="419464" y="1151862"/>
-                  </a:lnTo>
-                  <a:lnTo>
-                    <a:pt x="351977" y="1232203"/>
-                  </a:lnTo>
-                  <a:lnTo>
-                    <a:pt x="275328" y="1305088"/>
-                  </a:lnTo>
-                  <a:lnTo>
-                    <a:pt x="190477" y="1369983"/>
-                  </a:lnTo>
-                  <a:lnTo>
-                    <a:pt x="98381" y="1426355"/>
-                  </a:lnTo>
-                  <a:lnTo>
-                    <a:pt x="0" y="1473672"/>
-                  </a:lnTo>
-                  <a:close/>
-                </a:path>
-              </a:pathLst>
-            </a:custGeom>
-            <a:solidFill>
-              <a:srgbClr val="FF6C6C"/>
-            </a:solidFill>
-            <a:ln>
-              <a:noFill/>
-            </a:ln>
-            <a:effectLst/>
-          </p:spPr>
-          <p:style>
-            <a:lnRef idx="1">
-              <a:schemeClr val="accent1"/>
-            </a:lnRef>
-            <a:fillRef idx="3">
-              <a:schemeClr val="accent1"/>
-            </a:fillRef>
-            <a:effectRef idx="2">
-              <a:schemeClr val="accent1"/>
-            </a:effectRef>
-            <a:fontRef idx="minor">
-              <a:schemeClr val="lt1"/>
-            </a:fontRef>
-          </p:style>
-          <p:txBody>
-            <a:bodyPr rtlCol="0" anchor="ctr"/>
-            <a:lstStyle/>
-            <a:p>
-              <a:pPr algn="ctr"/>
-            </a:p>
-          </p:txBody>
-        </p:sp>
-        <p:sp>
-          <p:nvSpPr>
-            <p:cNvPr id="8" name="Freeform 7"/>
-            <p:cNvSpPr/>
-            <p:nvPr/>
-          </p:nvSpPr>
-          <p:spPr>
-            <a:xfrm>
-              <a:off x="6488522" y="2678385"/>
-              <a:ext cx="745714" cy="514897"/>
-            </a:xfrm>
-            <a:custGeom>
-              <a:avLst/>
-              <a:gdLst/>
-              <a:ahLst/>
-              <a:cxnLst/>
-              <a:rect l="l" t="t" r="r" b="b"/>
-              <a:pathLst>
-                <a:path w="745714" h="514897">
-                  <a:moveTo>
-                    <a:pt x="0" y="248571"/>
-                  </a:moveTo>
-                  <a:lnTo>
-                    <a:pt x="266327" y="514897"/>
-                  </a:lnTo>
-                  <a:lnTo>
-                    <a:pt x="745714" y="0"/>
-                  </a:lnTo>
-                </a:path>
-              </a:pathLst>
-            </a:custGeom>
-            <a:noFill/>
-            <a:ln w="142040" cap="rnd">
-              <a:solidFill>
-                <a:srgbClr val="FFFFFF"/>
-              </a:solidFill>
-              <a:round/>
-            </a:ln>
-            <a:effectLst/>
-          </p:spPr>
-          <p:style>
-            <a:lnRef idx="1">
-              <a:schemeClr val="accent1"/>
-            </a:lnRef>
-            <a:fillRef idx="3">
-              <a:schemeClr val="accent1"/>
-            </a:fillRef>
-            <a:effectRef idx="2">
-              <a:schemeClr val="accent1"/>
-            </a:effectRef>
-            <a:fontRef idx="minor">
-              <a:schemeClr val="lt1"/>
-            </a:fontRef>
-          </p:style>
-          <p:txBody>
-            <a:bodyPr rtlCol="0" anchor="ctr"/>
-            <a:lstStyle/>
-            <a:p>
-              <a:pPr algn="ctr"/>
-            </a:p>
-          </p:txBody>
-        </p:sp>
-        <p:sp>
-          <p:nvSpPr>
-            <p:cNvPr id="9" name="Oval 8"/>
-            <p:cNvSpPr/>
-            <p:nvPr/>
-          </p:nvSpPr>
-          <p:spPr>
-            <a:xfrm>
-              <a:off x="5725054" y="2198998"/>
-              <a:ext cx="177550" cy="177550"/>
-            </a:xfrm>
-            <a:prstGeom prst="ellipse">
-              <a:avLst/>
-            </a:prstGeom>
-            <a:solidFill>
-              <a:srgbClr val="FF6C6C"/>
-            </a:solidFill>
-            <a:ln>
-              <a:noFill/>
-            </a:ln>
-            <a:effectLst/>
-          </p:spPr>
-          <p:style>
-            <a:lnRef idx="1">
-              <a:schemeClr val="accent1"/>
-            </a:lnRef>
-            <a:fillRef idx="3">
-              <a:schemeClr val="accent1"/>
-            </a:fillRef>
-            <a:effectRef idx="2">
-              <a:schemeClr val="accent1"/>
-            </a:effectRef>
-            <a:fontRef idx="minor">
-              <a:schemeClr val="lt1"/>
-            </a:fontRef>
-          </p:style>
-          <p:txBody>
-            <a:bodyPr rtlCol="0" anchor="ctr"/>
-            <a:lstStyle/>
-            <a:p>
-              <a:pPr algn="ctr"/>
-            </a:p>
-          </p:txBody>
-        </p:sp>
-        <p:sp>
-          <p:nvSpPr>
-            <p:cNvPr id="10" name="Oval 9"/>
-            <p:cNvSpPr/>
-            <p:nvPr/>
-          </p:nvSpPr>
-          <p:spPr>
-            <a:xfrm>
-              <a:off x="7820154" y="3477364"/>
-              <a:ext cx="248571" cy="248571"/>
-            </a:xfrm>
-            <a:prstGeom prst="ellipse">
-              <a:avLst/>
-            </a:prstGeom>
-            <a:solidFill>
-              <a:srgbClr val="B2B2B2"/>
-            </a:solidFill>
-            <a:ln>
-              <a:noFill/>
-            </a:ln>
-            <a:effectLst/>
-          </p:spPr>
-          <p:style>
-            <a:lnRef idx="1">
-              <a:schemeClr val="accent1"/>
-            </a:lnRef>
-            <a:fillRef idx="3">
-              <a:schemeClr val="accent1"/>
-            </a:fillRef>
-            <a:effectRef idx="2">
-              <a:schemeClr val="accent1"/>
-            </a:effectRef>
-            <a:fontRef idx="minor">
-              <a:schemeClr val="lt1"/>
-            </a:fontRef>
-          </p:style>
-          <p:txBody>
-            <a:bodyPr rtlCol="0" anchor="ctr"/>
-            <a:lstStyle/>
-            <a:p>
-              <a:pPr algn="ctr"/>
-            </a:p>
-          </p:txBody>
-        </p:sp>
-      </p:grpSp>
+        </p:nvGraphicFramePr>
+        <p:xfrm>
+          <a:off x="4583887" y="1337310"/>
+          <a:ext cx="4035247" cy="3086100"/>
+        </p:xfrm>
+        <a:graphic>
+          <a:graphicData uri="http://schemas.openxmlformats.org/drawingml/2006/chart">
+            <c:chart xmlns:c="http://schemas.openxmlformats.org/drawingml/2006/chart" r:id="rId3"/>
+          </a:graphicData>
+        </a:graphic>
+      </p:graphicFrame>
     </p:spTree>
   </p:cSld>
   <p:clrMapOvr>
@@ -8846,7 +8216,7 @@
                 <a:ea typeface="Play"/>
                 <a:cs typeface="Play"/>
               </a:rPr>
-              <a:t>Ожидаемый эффект: сокращение времени сборки</a:t>
+              <a:t>Время до первой версии 1 день вместо 6</a:t>
             </a:r>
           </a:p>
         </p:txBody>
@@ -8896,7 +8266,7 @@
         <p:spPr>
           <a:xfrm>
             <a:off x="274320" y="282943"/>
-            <a:ext cx="6792986" cy="932027"/>
+            <a:ext cx="6792986" cy="617220"/>
           </a:xfrm>
           <a:prstGeom prst="rect">
             <a:avLst/>
@@ -8931,7 +8301,7 @@
                 <a:ea typeface="Play"/>
                 <a:cs typeface="Play"/>
               </a:rPr>
-              <a:t>Ожидаемый эффект: снижение нарушений фирменного стиля</a:t>
+              <a:t>Нарушения стиля 2/68 вместо 19/42</a:t>
             </a:r>
           </a:p>
         </p:txBody>
@@ -8945,8 +8315,8 @@
           <p:nvPr/>
         </p:nvGraphicFramePr>
         <p:xfrm>
-          <a:off x="4583887" y="1394994"/>
-          <a:ext cx="4035247" cy="3028415"/>
+          <a:off x="4583887" y="1337310"/>
+          <a:ext cx="4035247" cy="3086100"/>
         </p:xfrm>
         <a:graphic>
           <a:graphicData uri="http://schemas.openxmlformats.org/drawingml/2006/chart">
@@ -9139,29 +8509,304 @@
                 <a:ea typeface="Play"/>
                 <a:cs typeface="Play"/>
               </a:rPr>
-              <a:t>Ожидаемый эффект: рост закрытых запросов</a:t>
+              <a:t>Ресурсы: 1 машина 2 vCPU/2 GB RAM, 1400 руб инференса</a:t>
             </a:r>
           </a:p>
         </p:txBody>
       </p:sp>
-      <p:graphicFrame>
-        <p:nvGraphicFramePr>
-          <p:cNvPr id="556" name="Chart 555"/>
-          <p:cNvGraphicFramePr>
-            <a:graphicFrameLocks noGrp="1"/>
-          </p:cNvGraphicFramePr>
+      <p:sp>
+        <p:nvSpPr>
+          <p:cNvPr id="556" name="body"/>
+          <p:cNvSpPr txBox="1"/>
           <p:nvPr/>
-        </p:nvGraphicFramePr>
-        <p:xfrm>
-          <a:off x="4583887" y="1394994"/>
-          <a:ext cx="4035247" cy="3028415"/>
-        </p:xfrm>
-        <a:graphic>
-          <a:graphicData uri="http://schemas.openxmlformats.org/drawingml/2006/chart">
-            <c:chart xmlns:c="http://schemas.openxmlformats.org/drawingml/2006/chart" r:id="rId2"/>
-          </a:graphicData>
-        </a:graphic>
-      </p:graphicFrame>
+        </p:nvSpPr>
+        <p:spPr>
+          <a:xfrm>
+            <a:off x="274320" y="1917844"/>
+            <a:ext cx="8344814" cy="398780"/>
+          </a:xfrm>
+          <a:prstGeom prst="rect">
+            <a:avLst/>
+          </a:prstGeom>
+          <a:noFill/>
+        </p:spPr>
+        <p:txBody>
+          <a:bodyPr wrap="square" lIns="76200" rIns="76200" tIns="50800" bIns="50800">
+            <a:spAutoFit/>
+          </a:bodyPr>
+          <a:lstStyle/>
+          <a:p>
+            <a:pPr algn="l">
+              <a:spcAft>
+                <a:spcPts val="300"/>
+              </a:spcAft>
+              <a:defRPr sz="1800">
+                <a:solidFill>
+                  <a:srgbClr val="000000"/>
+                </a:solidFill>
+                <a:latin typeface="Play"/>
+                <a:ea typeface="Play"/>
+                <a:cs typeface="Play"/>
+              </a:defRPr>
+            </a:pPr>
+            <a:r>
+              <a:rPr sz="1800">
+                <a:solidFill>
+                  <a:srgbClr val="000000"/>
+                </a:solidFill>
+                <a:latin typeface="Play"/>
+                <a:ea typeface="Play"/>
+                <a:cs typeface="Play"/>
+              </a:rPr>
+              <a:t>Модель gpt-oss-20b</a:t>
+            </a:r>
+          </a:p>
+        </p:txBody>
+      </p:sp>
+      <p:sp>
+        <p:nvSpPr>
+          <p:cNvPr id="557" name="stat_0:bar"/>
+          <p:cNvSpPr/>
+          <p:nvPr/>
+        </p:nvSpPr>
+        <p:spPr>
+          <a:xfrm>
+            <a:off x="274320" y="2544081"/>
+            <a:ext cx="50800" cy="833628"/>
+          </a:xfrm>
+          <a:prstGeom prst="rect">
+            <a:avLst/>
+          </a:prstGeom>
+          <a:solidFill>
+            <a:srgbClr val="0077FF"/>
+          </a:solidFill>
+          <a:ln>
+            <a:noFill/>
+          </a:ln>
+          <a:effectLst/>
+        </p:spPr>
+        <p:style>
+          <a:lnRef idx="1">
+            <a:schemeClr val="accent1"/>
+          </a:lnRef>
+          <a:fillRef idx="3">
+            <a:schemeClr val="accent1"/>
+          </a:fillRef>
+          <a:effectRef idx="2">
+            <a:schemeClr val="accent1"/>
+          </a:effectRef>
+          <a:fontRef idx="minor">
+            <a:schemeClr val="lt1"/>
+          </a:fontRef>
+        </p:style>
+        <p:txBody>
+          <a:bodyPr rtlCol="0" anchor="ctr"/>
+          <a:lstStyle/>
+          <a:p>
+            <a:pPr algn="ctr"/>
+          </a:p>
+        </p:txBody>
+      </p:sp>
+      <p:sp>
+        <p:nvSpPr>
+          <p:cNvPr id="558" name="stat_0"/>
+          <p:cNvSpPr txBox="1"/>
+          <p:nvPr/>
+        </p:nvSpPr>
+        <p:spPr>
+          <a:xfrm>
+            <a:off x="452119" y="2470929"/>
+            <a:ext cx="3827710" cy="906780"/>
+          </a:xfrm>
+          <a:prstGeom prst="rect">
+            <a:avLst/>
+          </a:prstGeom>
+          <a:noFill/>
+        </p:spPr>
+        <p:txBody>
+          <a:bodyPr wrap="square" lIns="76200" rIns="76200" tIns="0" bIns="0">
+            <a:spAutoFit/>
+          </a:bodyPr>
+          <a:lstStyle/>
+          <a:p>
+            <a:pPr>
+              <a:lnSpc>
+                <a:spcPct val="100000"/>
+              </a:lnSpc>
+              <a:spcAft>
+                <a:spcPts val="200"/>
+              </a:spcAft>
+              <a:defRPr sz="3200" b="1">
+                <a:solidFill>
+                  <a:srgbClr val="0077FF"/>
+                </a:solidFill>
+                <a:latin typeface="Play"/>
+                <a:ea typeface="Play"/>
+                <a:cs typeface="Play"/>
+              </a:defRPr>
+            </a:pPr>
+            <a:r>
+              <a:rPr sz="3200" b="1">
+                <a:solidFill>
+                  <a:srgbClr val="0077FF"/>
+                </a:solidFill>
+                <a:latin typeface="Play"/>
+                <a:ea typeface="Play"/>
+                <a:cs typeface="Play"/>
+              </a:rPr>
+              <a:t>2 vCPU</a:t>
+            </a:r>
+          </a:p>
+          <a:p>
+            <a:pPr>
+              <a:spcAft>
+                <a:spcPts val="300"/>
+              </a:spcAft>
+              <a:defRPr sz="1800" b="0">
+                <a:solidFill>
+                  <a:srgbClr val="000000"/>
+                </a:solidFill>
+                <a:latin typeface="Play"/>
+                <a:ea typeface="Play"/>
+                <a:cs typeface="Play"/>
+              </a:defRPr>
+            </a:pPr>
+            <a:r>
+              <a:rPr sz="1800" b="0">
+                <a:solidFill>
+                  <a:srgbClr val="000000"/>
+                </a:solidFill>
+                <a:latin typeface="Play"/>
+                <a:ea typeface="Play"/>
+                <a:cs typeface="Play"/>
+              </a:rPr>
+              <a:t>1 машина 2 vCPU / 2 GB RAM</a:t>
+            </a:r>
+          </a:p>
+        </p:txBody>
+      </p:sp>
+      <p:sp>
+        <p:nvSpPr>
+          <p:cNvPr id="559" name="stat_1:bar"/>
+          <p:cNvSpPr/>
+          <p:nvPr/>
+        </p:nvSpPr>
+        <p:spPr>
+          <a:xfrm>
+            <a:off x="4613623" y="2544081"/>
+            <a:ext cx="50800" cy="833628"/>
+          </a:xfrm>
+          <a:prstGeom prst="rect">
+            <a:avLst/>
+          </a:prstGeom>
+          <a:solidFill>
+            <a:srgbClr val="0077FF"/>
+          </a:solidFill>
+          <a:ln>
+            <a:noFill/>
+          </a:ln>
+          <a:effectLst/>
+        </p:spPr>
+        <p:style>
+          <a:lnRef idx="1">
+            <a:schemeClr val="accent1"/>
+          </a:lnRef>
+          <a:fillRef idx="3">
+            <a:schemeClr val="accent1"/>
+          </a:fillRef>
+          <a:effectRef idx="2">
+            <a:schemeClr val="accent1"/>
+          </a:effectRef>
+          <a:fontRef idx="minor">
+            <a:schemeClr val="lt1"/>
+          </a:fontRef>
+        </p:style>
+        <p:txBody>
+          <a:bodyPr rtlCol="0" anchor="ctr"/>
+          <a:lstStyle/>
+          <a:p>
+            <a:pPr algn="ctr"/>
+          </a:p>
+        </p:txBody>
+      </p:sp>
+      <p:sp>
+        <p:nvSpPr>
+          <p:cNvPr id="560" name="stat_1"/>
+          <p:cNvSpPr txBox="1"/>
+          <p:nvPr/>
+        </p:nvSpPr>
+        <p:spPr>
+          <a:xfrm>
+            <a:off x="4791423" y="2470929"/>
+            <a:ext cx="3827710" cy="906780"/>
+          </a:xfrm>
+          <a:prstGeom prst="rect">
+            <a:avLst/>
+          </a:prstGeom>
+          <a:noFill/>
+        </p:spPr>
+        <p:txBody>
+          <a:bodyPr wrap="square" lIns="76200" rIns="76200" tIns="0" bIns="0">
+            <a:spAutoFit/>
+          </a:bodyPr>
+          <a:lstStyle/>
+          <a:p>
+            <a:pPr>
+              <a:lnSpc>
+                <a:spcPct val="100000"/>
+              </a:lnSpc>
+              <a:spcAft>
+                <a:spcPts val="200"/>
+              </a:spcAft>
+              <a:defRPr sz="3200" b="1">
+                <a:solidFill>
+                  <a:srgbClr val="0077FF"/>
+                </a:solidFill>
+                <a:latin typeface="Play"/>
+                <a:ea typeface="Play"/>
+                <a:cs typeface="Play"/>
+              </a:defRPr>
+            </a:pPr>
+            <a:r>
+              <a:rPr sz="3200" b="1">
+                <a:solidFill>
+                  <a:srgbClr val="0077FF"/>
+                </a:solidFill>
+                <a:latin typeface="Play"/>
+                <a:ea typeface="Play"/>
+                <a:cs typeface="Play"/>
+              </a:rPr>
+              <a:t>6 нед.</a:t>
+            </a:r>
+          </a:p>
+          <a:p>
+            <a:pPr>
+              <a:spcAft>
+                <a:spcPts val="300"/>
+              </a:spcAft>
+              <a:defRPr sz="1800" b="0">
+                <a:solidFill>
+                  <a:srgbClr val="000000"/>
+                </a:solidFill>
+                <a:latin typeface="Play"/>
+                <a:ea typeface="Play"/>
+                <a:cs typeface="Play"/>
+              </a:defRPr>
+            </a:pPr>
+            <a:r>
+              <a:rPr sz="1800" b="0">
+                <a:solidFill>
+                  <a:srgbClr val="000000"/>
+                </a:solidFill>
+                <a:latin typeface="Play"/>
+                <a:ea typeface="Play"/>
+                <a:cs typeface="Play"/>
+              </a:rPr>
+              <a:t>Инференс 6 недель 1400 руб</a:t>
+            </a:r>
+          </a:p>
+        </p:txBody>
+      </p:sp>
     </p:spTree>
   </p:cSld>
   <p:clrMapOvr>
@@ -9527,21 +9172,21 @@
                 <a:ea typeface="Play"/>
                 <a:cs typeface="Play"/>
               </a:rPr>
-              <a:t>Что потребуется: ресурсы и сроки</a:t>
+              <a:t>Пилот 6 недель, 68 презентаций</a:t>
             </a:r>
           </a:p>
         </p:txBody>
       </p:sp>
       <p:sp>
         <p:nvSpPr>
-          <p:cNvPr id="682" name="stat_0:bar"/>
+          <p:cNvPr id="682" name="Rectangle 681"/>
           <p:cNvSpPr/>
           <p:nvPr/>
         </p:nvSpPr>
         <p:spPr>
           <a:xfrm>
-            <a:off x="274320" y="1410462"/>
-            <a:ext cx="50800" cy="1130808"/>
+            <a:off x="4583887" y="2756916"/>
+            <a:ext cx="4035247" cy="92583"/>
           </a:xfrm>
           <a:prstGeom prst="rect">
             <a:avLst/>
@@ -9552,7 +9197,6 @@
           <a:ln>
             <a:noFill/>
           </a:ln>
-          <a:effectLst/>
         </p:spPr>
         <p:style>
           <a:lnRef idx="1">
@@ -9578,94 +9222,16 @@
       </p:sp>
       <p:sp>
         <p:nvSpPr>
-          <p:cNvPr id="683" name="stat_0"/>
-          <p:cNvSpPr txBox="1"/>
-          <p:nvPr/>
-        </p:nvSpPr>
-        <p:spPr>
-          <a:xfrm>
-            <a:off x="452119" y="1337310"/>
-            <a:ext cx="3827710" cy="1203960"/>
-          </a:xfrm>
-          <a:prstGeom prst="rect">
-            <a:avLst/>
-          </a:prstGeom>
-          <a:noFill/>
-        </p:spPr>
-        <p:txBody>
-          <a:bodyPr wrap="square" lIns="76200" rIns="76200" tIns="0" bIns="0">
-            <a:spAutoFit/>
-          </a:bodyPr>
-          <a:lstStyle/>
-          <a:p>
-            <a:pPr>
-              <a:lnSpc>
-                <a:spcPct val="100000"/>
-              </a:lnSpc>
-              <a:spcAft>
-                <a:spcPts val="200"/>
-              </a:spcAft>
-              <a:defRPr sz="3200" b="1">
-                <a:solidFill>
-                  <a:srgbClr val="0077FF"/>
-                </a:solidFill>
-                <a:latin typeface="Play"/>
-                <a:ea typeface="Play"/>
-                <a:cs typeface="Play"/>
-              </a:defRPr>
-            </a:pPr>
-            <a:r>
-              <a:rPr sz="3200" b="1">
-                <a:solidFill>
-                  <a:srgbClr val="0077FF"/>
-                </a:solidFill>
-                <a:latin typeface="Play"/>
-                <a:ea typeface="Play"/>
-                <a:cs typeface="Play"/>
-              </a:rPr>
-              <a:t>2 vCPU</a:t>
-            </a:r>
-          </a:p>
-          <a:p>
-            <a:pPr>
-              <a:spcAft>
-                <a:spcPts val="300"/>
-              </a:spcAft>
-              <a:defRPr sz="1800" b="0">
-                <a:solidFill>
-                  <a:srgbClr val="000000"/>
-                </a:solidFill>
-                <a:latin typeface="Play"/>
-                <a:ea typeface="Play"/>
-                <a:cs typeface="Play"/>
-              </a:defRPr>
-            </a:pPr>
-            <a:r>
-              <a:rPr sz="1800" b="0">
-                <a:solidFill>
-                  <a:srgbClr val="000000"/>
-                </a:solidFill>
-                <a:latin typeface="Play"/>
-                <a:ea typeface="Play"/>
-                <a:cs typeface="Play"/>
-              </a:rPr>
-              <a:t>Сервис работает на машине 2 vCPU / 2 ГБ RAM</a:t>
-            </a:r>
-          </a:p>
-        </p:txBody>
-      </p:sp>
-      <p:sp>
-        <p:nvSpPr>
-          <p:cNvPr id="684" name="stat_1:bar"/>
+          <p:cNvPr id="683" name="Oval 682"/>
           <p:cNvSpPr/>
           <p:nvPr/>
         </p:nvSpPr>
         <p:spPr>
           <a:xfrm>
-            <a:off x="4613623" y="1410462"/>
-            <a:ext cx="50800" cy="1130808"/>
+            <a:off x="5054665" y="2601445"/>
+            <a:ext cx="403524" cy="403524"/>
           </a:xfrm>
-          <a:prstGeom prst="rect">
+          <a:prstGeom prst="ellipse">
             <a:avLst/>
           </a:prstGeom>
           <a:solidFill>
@@ -9674,7 +9240,6 @@
           <a:ln>
             <a:noFill/>
           </a:ln>
-          <a:effectLst/>
         </p:spPr>
         <p:style>
           <a:lnRef idx="1">
@@ -9700,14 +9265,14 @@
       </p:sp>
       <p:sp>
         <p:nvSpPr>
-          <p:cNvPr id="685" name="stat_1"/>
+          <p:cNvPr id="684" name="TextBox 683"/>
           <p:cNvSpPr txBox="1"/>
           <p:nvPr/>
         </p:nvSpPr>
         <p:spPr>
           <a:xfrm>
-            <a:off x="4791423" y="1337310"/>
-            <a:ext cx="3827710" cy="1203960"/>
+            <a:off x="4583887" y="1337310"/>
+            <a:ext cx="2017623" cy="1172718"/>
           </a:xfrm>
           <a:prstGeom prst="rect">
             <a:avLst/>
@@ -9715,21 +9280,15 @@
           <a:noFill/>
         </p:spPr>
         <p:txBody>
-          <a:bodyPr wrap="square" lIns="76200" rIns="76200" tIns="0" bIns="0">
+          <a:bodyPr wrap="square" lIns="12700" rIns="12700" tIns="12700" bIns="12700">
             <a:spAutoFit/>
           </a:bodyPr>
           <a:lstStyle/>
           <a:p>
-            <a:pPr>
-              <a:lnSpc>
-                <a:spcPct val="100000"/>
-              </a:lnSpc>
-              <a:spcAft>
-                <a:spcPts val="200"/>
-              </a:spcAft>
-              <a:defRPr sz="3200" b="1">
-                <a:solidFill>
-                  <a:srgbClr val="0077FF"/>
+            <a:pPr algn="ctr">
+              <a:defRPr sz="1400" b="0">
+                <a:solidFill>
+                  <a:srgbClr val="000000"/>
                 </a:solidFill>
                 <a:latin typeface="Play"/>
                 <a:ea typeface="Play"/>
@@ -9737,57 +9296,31 @@
               </a:defRPr>
             </a:pPr>
             <a:r>
-              <a:rPr sz="3200" b="1">
-                <a:solidFill>
-                  <a:srgbClr val="0077FF"/>
+              <a:rPr sz="1400" b="0">
+                <a:solidFill>
+                  <a:srgbClr val="000000"/>
                 </a:solidFill>
                 <a:latin typeface="Play"/>
                 <a:ea typeface="Play"/>
                 <a:cs typeface="Play"/>
               </a:rPr>
-              <a:t>6 нед.</a:t>
-            </a:r>
-          </a:p>
-          <a:p>
-            <a:pPr>
-              <a:spcAft>
-                <a:spcPts val="300"/>
-              </a:spcAft>
-              <a:defRPr sz="1800" b="0">
-                <a:solidFill>
-                  <a:srgbClr val="000000"/>
-                </a:solidFill>
-                <a:latin typeface="Play"/>
-                <a:ea typeface="Play"/>
-                <a:cs typeface="Play"/>
-              </a:defRPr>
-            </a:pPr>
-            <a:r>
-              <a:rPr sz="1800" b="0">
-                <a:solidFill>
-                  <a:srgbClr val="000000"/>
-                </a:solidFill>
-                <a:latin typeface="Play"/>
-                <a:ea typeface="Play"/>
-                <a:cs typeface="Play"/>
-              </a:rPr>
-              <a:t>Стоимость инференса за 6 недель – 1 400 руб</a:t>
+              <a:t>Начало пилота</a:t>
             </a:r>
           </a:p>
         </p:txBody>
       </p:sp>
       <p:sp>
         <p:nvSpPr>
-          <p:cNvPr id="686" name="stat_2:bar"/>
+          <p:cNvPr id="685" name="Oval 684"/>
           <p:cNvSpPr/>
           <p:nvPr/>
         </p:nvSpPr>
         <p:spPr>
           <a:xfrm>
-            <a:off x="274320" y="3056381"/>
-            <a:ext cx="50800" cy="1130808"/>
+            <a:off x="6399748" y="2601445"/>
+            <a:ext cx="403524" cy="403524"/>
           </a:xfrm>
-          <a:prstGeom prst="rect">
+          <a:prstGeom prst="ellipse">
             <a:avLst/>
           </a:prstGeom>
           <a:solidFill>
@@ -9796,7 +9329,6 @@
           <a:ln>
             <a:noFill/>
           </a:ln>
-          <a:effectLst/>
         </p:spPr>
         <p:style>
           <a:lnRef idx="1">
@@ -9822,14 +9354,14 @@
       </p:sp>
       <p:sp>
         <p:nvSpPr>
-          <p:cNvPr id="687" name="stat_2"/>
+          <p:cNvPr id="686" name="TextBox 685"/>
           <p:cNvSpPr txBox="1"/>
           <p:nvPr/>
         </p:nvSpPr>
         <p:spPr>
           <a:xfrm>
-            <a:off x="452119" y="2983229"/>
-            <a:ext cx="3827710" cy="1203960"/>
+            <a:off x="5592698" y="3160440"/>
+            <a:ext cx="2017623" cy="1172718"/>
           </a:xfrm>
           <a:prstGeom prst="rect">
             <a:avLst/>
@@ -9837,21 +9369,15 @@
           <a:noFill/>
         </p:spPr>
         <p:txBody>
-          <a:bodyPr wrap="square" lIns="76200" rIns="76200" tIns="0" bIns="0">
+          <a:bodyPr wrap="square" lIns="12700" rIns="12700" tIns="12700" bIns="12700">
             <a:spAutoFit/>
           </a:bodyPr>
           <a:lstStyle/>
           <a:p>
-            <a:pPr>
-              <a:lnSpc>
-                <a:spcPct val="100000"/>
-              </a:lnSpc>
-              <a:spcAft>
-                <a:spcPts val="200"/>
-              </a:spcAft>
-              <a:defRPr sz="3200" b="1">
-                <a:solidFill>
-                  <a:srgbClr val="0077FF"/>
+            <a:pPr algn="ctr">
+              <a:defRPr sz="1400" b="0">
+                <a:solidFill>
+                  <a:srgbClr val="000000"/>
                 </a:solidFill>
                 <a:latin typeface="Play"/>
                 <a:ea typeface="Play"/>
@@ -9859,57 +9385,31 @@
               </a:defRPr>
             </a:pPr>
             <a:r>
-              <a:rPr sz="3200" b="1">
-                <a:solidFill>
-                  <a:srgbClr val="0077FF"/>
+              <a:rPr sz="1400" b="0">
+                <a:solidFill>
+                  <a:srgbClr val="000000"/>
                 </a:solidFill>
                 <a:latin typeface="Play"/>
                 <a:ea typeface="Play"/>
                 <a:cs typeface="Play"/>
               </a:rPr>
-              <a:t>2026</a:t>
-            </a:r>
-          </a:p>
-          <a:p>
-            <a:pPr>
-              <a:spcAft>
-                <a:spcPts val="300"/>
-              </a:spcAft>
-              <a:defRPr sz="1800" b="0">
-                <a:solidFill>
-                  <a:srgbClr val="000000"/>
-                </a:solidFill>
-                <a:latin typeface="Play"/>
-                <a:ea typeface="Play"/>
-                <a:cs typeface="Play"/>
-              </a:defRPr>
-            </a:pPr>
-            <a:r>
-              <a:rPr sz="1800" b="0">
-                <a:solidFill>
-                  <a:srgbClr val="000000"/>
-                </a:solidFill>
-                <a:latin typeface="Play"/>
-                <a:ea typeface="Play"/>
-                <a:cs typeface="Play"/>
-              </a:rPr>
-              <a:t>Подключение 4 команд в Q3 2026</a:t>
+              <a:t>Конец пилота</a:t>
             </a:r>
           </a:p>
         </p:txBody>
       </p:sp>
       <p:sp>
         <p:nvSpPr>
-          <p:cNvPr id="688" name="stat_3:bar"/>
+          <p:cNvPr id="687" name="Oval 686"/>
           <p:cNvSpPr/>
           <p:nvPr/>
         </p:nvSpPr>
         <p:spPr>
           <a:xfrm>
-            <a:off x="4613623" y="3056381"/>
-            <a:ext cx="50800" cy="1130808"/>
+            <a:off x="7744830" y="2601445"/>
+            <a:ext cx="403524" cy="403524"/>
           </a:xfrm>
-          <a:prstGeom prst="rect">
+          <a:prstGeom prst="ellipse">
             <a:avLst/>
           </a:prstGeom>
           <a:solidFill>
@@ -9918,7 +9418,6 @@
           <a:ln>
             <a:noFill/>
           </a:ln>
-          <a:effectLst/>
         </p:spPr>
         <p:style>
           <a:lnRef idx="1">
@@ -9944,14 +9443,14 @@
       </p:sp>
       <p:sp>
         <p:nvSpPr>
-          <p:cNvPr id="689" name="stat_3"/>
+          <p:cNvPr id="688" name="TextBox 687"/>
           <p:cNvSpPr txBox="1"/>
           <p:nvPr/>
         </p:nvSpPr>
         <p:spPr>
           <a:xfrm>
-            <a:off x="4791423" y="2983229"/>
-            <a:ext cx="3827710" cy="1203960"/>
+            <a:off x="6601510" y="1337310"/>
+            <a:ext cx="2017623" cy="1172718"/>
           </a:xfrm>
           <a:prstGeom prst="rect">
             <a:avLst/>
@@ -9959,21 +9458,15 @@
           <a:noFill/>
         </p:spPr>
         <p:txBody>
-          <a:bodyPr wrap="square" lIns="76200" rIns="76200" tIns="0" bIns="0">
+          <a:bodyPr wrap="square" lIns="12700" rIns="12700" tIns="12700" bIns="12700">
             <a:spAutoFit/>
           </a:bodyPr>
           <a:lstStyle/>
           <a:p>
-            <a:pPr>
-              <a:lnSpc>
-                <a:spcPct val="100000"/>
-              </a:lnSpc>
-              <a:spcAft>
-                <a:spcPts val="200"/>
-              </a:spcAft>
-              <a:defRPr sz="3200" b="1">
-                <a:solidFill>
-                  <a:srgbClr val="0077FF"/>
+            <a:pPr algn="ctr">
+              <a:defRPr sz="1400" b="0">
+                <a:solidFill>
+                  <a:srgbClr val="000000"/>
                 </a:solidFill>
                 <a:latin typeface="Play"/>
                 <a:ea typeface="Play"/>
@@ -9981,41 +9474,15 @@
               </a:defRPr>
             </a:pPr>
             <a:r>
-              <a:rPr sz="3200" b="1">
-                <a:solidFill>
-                  <a:srgbClr val="0077FF"/>
+              <a:rPr sz="1400" b="0">
+                <a:solidFill>
+                  <a:srgbClr val="000000"/>
                 </a:solidFill>
                 <a:latin typeface="Play"/>
                 <a:ea typeface="Play"/>
                 <a:cs typeface="Play"/>
               </a:rPr>
-              <a:t>2026</a:t>
-            </a:r>
-          </a:p>
-          <a:p>
-            <a:pPr>
-              <a:spcAft>
-                <a:spcPts val="300"/>
-              </a:spcAft>
-              <a:defRPr sz="1800" b="0">
-                <a:solidFill>
-                  <a:srgbClr val="000000"/>
-                </a:solidFill>
-                <a:latin typeface="Play"/>
-                <a:ea typeface="Play"/>
-                <a:cs typeface="Play"/>
-              </a:defRPr>
-            </a:pPr>
-            <a:r>
-              <a:rPr sz="1800" b="0">
-                <a:solidFill>
-                  <a:srgbClr val="000000"/>
-                </a:solidFill>
-                <a:latin typeface="Play"/>
-                <a:ea typeface="Play"/>
-                <a:cs typeface="Play"/>
-              </a:rPr>
-              <a:t>Запуск для всей компании в Q4 2026</a:t>
+              <a:t>Обзор результатов</a:t>
             </a:r>
           </a:p>
         </p:txBody>
@@ -10082,23 +9549,23 @@
                 <a:ea typeface="Play"/>
                 <a:cs typeface="Play"/>
               </a:rPr>
-              <a:t>План пилота: 6 недель, 2 команды</a:t>
+              <a:t>Расширение: Q3 2026 – Q1 2027</a:t>
             </a:r>
           </a:p>
         </p:txBody>
       </p:sp>
       <p:sp>
         <p:nvSpPr>
-          <p:cNvPr id="3" name="Pentagon 2"/>
+          <p:cNvPr id="3" name="Rectangle 2"/>
           <p:cNvSpPr/>
           <p:nvPr/>
         </p:nvSpPr>
         <p:spPr>
           <a:xfrm>
-            <a:off x="4583887" y="1373314"/>
-            <a:ext cx="4035247" cy="442341"/>
+            <a:off x="4583887" y="2756916"/>
+            <a:ext cx="4035247" cy="92583"/>
           </a:xfrm>
-          <a:prstGeom prst="homePlate">
+          <a:prstGeom prst="rect">
             <a:avLst/>
           </a:prstGeom>
           <a:solidFill>
@@ -10123,45 +9590,25 @@
           </a:fontRef>
         </p:style>
         <p:txBody>
-          <a:bodyPr rtlCol="0" anchor="ctr" wrap="square" lIns="12700" rIns="12700" tIns="12700" bIns="12700"/>
+          <a:bodyPr rtlCol="0" anchor="ctr"/>
           <a:lstStyle/>
           <a:p>
-            <a:pPr algn="ctr">
-              <a:defRPr sz="1400" b="0">
-                <a:solidFill>
-                  <a:srgbClr val="FFFFFF"/>
-                </a:solidFill>
-                <a:latin typeface="Play"/>
-                <a:ea typeface="Play"/>
-                <a:cs typeface="Play"/>
-              </a:defRPr>
-            </a:pPr>
-            <a:r>
-              <a:rPr sz="1400" b="0">
-                <a:solidFill>
-                  <a:srgbClr val="FFFFFF"/>
-                </a:solidFill>
-                <a:latin typeface="Play"/>
-                <a:ea typeface="Play"/>
-                <a:cs typeface="Play"/>
-              </a:rPr>
-              <a:t>Неделя 1</a:t>
-            </a:r>
+            <a:pPr algn="ctr"/>
           </a:p>
         </p:txBody>
       </p:sp>
       <p:sp>
         <p:nvSpPr>
-          <p:cNvPr id="4" name="Chevron 3"/>
+          <p:cNvPr id="4" name="Oval 3"/>
           <p:cNvSpPr/>
           <p:nvPr/>
         </p:nvSpPr>
         <p:spPr>
           <a:xfrm>
-            <a:off x="4583887" y="1887664"/>
-            <a:ext cx="4035247" cy="442341"/>
+            <a:off x="5054665" y="2601445"/>
+            <a:ext cx="403524" cy="403524"/>
           </a:xfrm>
-          <a:prstGeom prst="chevron">
+          <a:prstGeom prst="ellipse">
             <a:avLst/>
           </a:prstGeom>
           <a:solidFill>
@@ -10186,13 +9633,39 @@
           </a:fontRef>
         </p:style>
         <p:txBody>
-          <a:bodyPr rtlCol="0" anchor="ctr" wrap="square" lIns="12700" rIns="12700" tIns="12700" bIns="12700"/>
+          <a:bodyPr rtlCol="0" anchor="ctr"/>
+          <a:lstStyle/>
+          <a:p>
+            <a:pPr algn="ctr"/>
+          </a:p>
+        </p:txBody>
+      </p:sp>
+      <p:sp>
+        <p:nvSpPr>
+          <p:cNvPr id="5" name="TextBox 4"/>
+          <p:cNvSpPr txBox="1"/>
+          <p:nvPr/>
+        </p:nvSpPr>
+        <p:spPr>
+          <a:xfrm>
+            <a:off x="4583887" y="1337310"/>
+            <a:ext cx="2017623" cy="1172718"/>
+          </a:xfrm>
+          <a:prstGeom prst="rect">
+            <a:avLst/>
+          </a:prstGeom>
+          <a:noFill/>
+        </p:spPr>
+        <p:txBody>
+          <a:bodyPr wrap="square" lIns="12700" rIns="12700" tIns="12700" bIns="12700">
+            <a:spAutoFit/>
+          </a:bodyPr>
           <a:lstStyle/>
           <a:p>
             <a:pPr algn="ctr">
               <a:defRPr sz="1400" b="0">
                 <a:solidFill>
-                  <a:srgbClr val="FFFFFF"/>
+                  <a:srgbClr val="000000"/>
                 </a:solidFill>
                 <a:latin typeface="Play"/>
                 <a:ea typeface="Play"/>
@@ -10202,29 +9675,29 @@
             <a:r>
               <a:rPr sz="1400" b="0">
                 <a:solidFill>
-                  <a:srgbClr val="FFFFFF"/>
+                  <a:srgbClr val="000000"/>
                 </a:solidFill>
                 <a:latin typeface="Play"/>
                 <a:ea typeface="Play"/>
                 <a:cs typeface="Play"/>
               </a:rPr>
-              <a:t>Неделя 2</a:t>
+              <a:t>Q3 2026: подключение 4 команд</a:t>
             </a:r>
           </a:p>
         </p:txBody>
       </p:sp>
       <p:sp>
         <p:nvSpPr>
-          <p:cNvPr id="5" name="Chevron 4"/>
+          <p:cNvPr id="6" name="Oval 5"/>
           <p:cNvSpPr/>
           <p:nvPr/>
         </p:nvSpPr>
         <p:spPr>
           <a:xfrm>
-            <a:off x="4583887" y="2402014"/>
-            <a:ext cx="4035247" cy="442341"/>
+            <a:off x="6399748" y="2601445"/>
+            <a:ext cx="403524" cy="403524"/>
           </a:xfrm>
-          <a:prstGeom prst="chevron">
+          <a:prstGeom prst="ellipse">
             <a:avLst/>
           </a:prstGeom>
           <a:solidFill>
@@ -10249,13 +9722,39 @@
           </a:fontRef>
         </p:style>
         <p:txBody>
-          <a:bodyPr rtlCol="0" anchor="ctr" wrap="square" lIns="12700" rIns="12700" tIns="12700" bIns="12700"/>
+          <a:bodyPr rtlCol="0" anchor="ctr"/>
+          <a:lstStyle/>
+          <a:p>
+            <a:pPr algn="ctr"/>
+          </a:p>
+        </p:txBody>
+      </p:sp>
+      <p:sp>
+        <p:nvSpPr>
+          <p:cNvPr id="7" name="TextBox 6"/>
+          <p:cNvSpPr txBox="1"/>
+          <p:nvPr/>
+        </p:nvSpPr>
+        <p:spPr>
+          <a:xfrm>
+            <a:off x="5592698" y="3160440"/>
+            <a:ext cx="2017623" cy="1172718"/>
+          </a:xfrm>
+          <a:prstGeom prst="rect">
+            <a:avLst/>
+          </a:prstGeom>
+          <a:noFill/>
+        </p:spPr>
+        <p:txBody>
+          <a:bodyPr wrap="square" lIns="12700" rIns="12700" tIns="12700" bIns="12700">
+            <a:spAutoFit/>
+          </a:bodyPr>
           <a:lstStyle/>
           <a:p>
             <a:pPr algn="ctr">
               <a:defRPr sz="1400" b="0">
                 <a:solidFill>
-                  <a:srgbClr val="FFFFFF"/>
+                  <a:srgbClr val="000000"/>
                 </a:solidFill>
                 <a:latin typeface="Play"/>
                 <a:ea typeface="Play"/>
@@ -10265,29 +9764,29 @@
             <a:r>
               <a:rPr sz="1400" b="0">
                 <a:solidFill>
-                  <a:srgbClr val="FFFFFF"/>
+                  <a:srgbClr val="000000"/>
                 </a:solidFill>
                 <a:latin typeface="Play"/>
                 <a:ea typeface="Play"/>
                 <a:cs typeface="Play"/>
               </a:rPr>
-              <a:t>Неделя 3</a:t>
+              <a:t>Q4 2026: доступ для всей компании</a:t>
             </a:r>
           </a:p>
         </p:txBody>
       </p:sp>
       <p:sp>
         <p:nvSpPr>
-          <p:cNvPr id="6" name="Chevron 5"/>
+          <p:cNvPr id="8" name="Oval 7"/>
           <p:cNvSpPr/>
           <p:nvPr/>
         </p:nvSpPr>
         <p:spPr>
           <a:xfrm>
-            <a:off x="4583887" y="2916364"/>
-            <a:ext cx="4035247" cy="442341"/>
+            <a:off x="7744830" y="2601445"/>
+            <a:ext cx="403524" cy="403524"/>
           </a:xfrm>
-          <a:prstGeom prst="chevron">
+          <a:prstGeom prst="ellipse">
             <a:avLst/>
           </a:prstGeom>
           <a:solidFill>
@@ -10312,13 +9811,39 @@
           </a:fontRef>
         </p:style>
         <p:txBody>
-          <a:bodyPr rtlCol="0" anchor="ctr" wrap="square" lIns="12700" rIns="12700" tIns="12700" bIns="12700"/>
+          <a:bodyPr rtlCol="0" anchor="ctr"/>
+          <a:lstStyle/>
+          <a:p>
+            <a:pPr algn="ctr"/>
+          </a:p>
+        </p:txBody>
+      </p:sp>
+      <p:sp>
+        <p:nvSpPr>
+          <p:cNvPr id="9" name="TextBox 8"/>
+          <p:cNvSpPr txBox="1"/>
+          <p:nvPr/>
+        </p:nvSpPr>
+        <p:spPr>
+          <a:xfrm>
+            <a:off x="6601510" y="1337310"/>
+            <a:ext cx="2017623" cy="1172718"/>
+          </a:xfrm>
+          <a:prstGeom prst="rect">
+            <a:avLst/>
+          </a:prstGeom>
+          <a:noFill/>
+        </p:spPr>
+        <p:txBody>
+          <a:bodyPr wrap="square" lIns="12700" rIns="12700" tIns="12700" bIns="12700">
+            <a:spAutoFit/>
+          </a:bodyPr>
           <a:lstStyle/>
           <a:p>
             <a:pPr algn="ctr">
               <a:defRPr sz="1400" b="0">
                 <a:solidFill>
-                  <a:srgbClr val="FFFFFF"/>
+                  <a:srgbClr val="000000"/>
                 </a:solidFill>
                 <a:latin typeface="Play"/>
                 <a:ea typeface="Play"/>
@@ -10328,139 +9853,13 @@
             <a:r>
               <a:rPr sz="1400" b="0">
                 <a:solidFill>
-                  <a:srgbClr val="FFFFFF"/>
+                  <a:srgbClr val="000000"/>
                 </a:solidFill>
                 <a:latin typeface="Play"/>
                 <a:ea typeface="Play"/>
                 <a:cs typeface="Play"/>
               </a:rPr>
-              <a:t>Неделя 4</a:t>
-            </a:r>
-          </a:p>
-        </p:txBody>
-      </p:sp>
-      <p:sp>
-        <p:nvSpPr>
-          <p:cNvPr id="7" name="Chevron 6"/>
-          <p:cNvSpPr/>
-          <p:nvPr/>
-        </p:nvSpPr>
-        <p:spPr>
-          <a:xfrm>
-            <a:off x="4583887" y="3430714"/>
-            <a:ext cx="4035247" cy="442341"/>
-          </a:xfrm>
-          <a:prstGeom prst="chevron">
-            <a:avLst/>
-          </a:prstGeom>
-          <a:solidFill>
-            <a:srgbClr val="0077FF"/>
-          </a:solidFill>
-          <a:ln>
-            <a:noFill/>
-          </a:ln>
-        </p:spPr>
-        <p:style>
-          <a:lnRef idx="1">
-            <a:schemeClr val="accent1"/>
-          </a:lnRef>
-          <a:fillRef idx="3">
-            <a:schemeClr val="accent1"/>
-          </a:fillRef>
-          <a:effectRef idx="2">
-            <a:schemeClr val="accent1"/>
-          </a:effectRef>
-          <a:fontRef idx="minor">
-            <a:schemeClr val="lt1"/>
-          </a:fontRef>
-        </p:style>
-        <p:txBody>
-          <a:bodyPr rtlCol="0" anchor="ctr" wrap="square" lIns="12700" rIns="12700" tIns="12700" bIns="12700"/>
-          <a:lstStyle/>
-          <a:p>
-            <a:pPr algn="ctr">
-              <a:defRPr sz="1400" b="0">
-                <a:solidFill>
-                  <a:srgbClr val="FFFFFF"/>
-                </a:solidFill>
-                <a:latin typeface="Play"/>
-                <a:ea typeface="Play"/>
-                <a:cs typeface="Play"/>
-              </a:defRPr>
-            </a:pPr>
-            <a:r>
-              <a:rPr sz="1400" b="0">
-                <a:solidFill>
-                  <a:srgbClr val="FFFFFF"/>
-                </a:solidFill>
-                <a:latin typeface="Play"/>
-                <a:ea typeface="Play"/>
-                <a:cs typeface="Play"/>
-              </a:rPr>
-              <a:t>Неделя 5</a:t>
-            </a:r>
-          </a:p>
-        </p:txBody>
-      </p:sp>
-      <p:sp>
-        <p:nvSpPr>
-          <p:cNvPr id="8" name="Chevron 7"/>
-          <p:cNvSpPr/>
-          <p:nvPr/>
-        </p:nvSpPr>
-        <p:spPr>
-          <a:xfrm>
-            <a:off x="4583887" y="3945064"/>
-            <a:ext cx="4035247" cy="442341"/>
-          </a:xfrm>
-          <a:prstGeom prst="chevron">
-            <a:avLst/>
-          </a:prstGeom>
-          <a:solidFill>
-            <a:srgbClr val="0077FF"/>
-          </a:solidFill>
-          <a:ln>
-            <a:noFill/>
-          </a:ln>
-        </p:spPr>
-        <p:style>
-          <a:lnRef idx="1">
-            <a:schemeClr val="accent1"/>
-          </a:lnRef>
-          <a:fillRef idx="3">
-            <a:schemeClr val="accent1"/>
-          </a:fillRef>
-          <a:effectRef idx="2">
-            <a:schemeClr val="accent1"/>
-          </a:effectRef>
-          <a:fontRef idx="minor">
-            <a:schemeClr val="lt1"/>
-          </a:fontRef>
-        </p:style>
-        <p:txBody>
-          <a:bodyPr rtlCol="0" anchor="ctr" wrap="square" lIns="12700" rIns="12700" tIns="12700" bIns="12700"/>
-          <a:lstStyle/>
-          <a:p>
-            <a:pPr algn="ctr">
-              <a:defRPr sz="1400" b="0">
-                <a:solidFill>
-                  <a:srgbClr val="FFFFFF"/>
-                </a:solidFill>
-                <a:latin typeface="Play"/>
-                <a:ea typeface="Play"/>
-                <a:cs typeface="Play"/>
-              </a:defRPr>
-            </a:pPr>
-            <a:r>
-              <a:rPr sz="1400" b="0">
-                <a:solidFill>
-                  <a:srgbClr val="FFFFFF"/>
-                </a:solidFill>
-                <a:latin typeface="Play"/>
-                <a:ea typeface="Play"/>
-                <a:cs typeface="Play"/>
-              </a:rPr>
-              <a:t>Неделя 6</a:t>
+              <a:t>Q1 2027: генерация иллюстраций</a:t>
             </a:r>
           </a:p>
         </p:txBody>
@@ -10612,7 +10011,142 @@
       </p:sp>
       <p:sp>
         <p:nvSpPr>
-          <p:cNvPr id="1059" name="title"/>
+          <p:cNvPr id="1061" name="Google Shape;1061;p66"/>
+          <p:cNvSpPr/>
+          <p:nvPr/>
+        </p:nvSpPr>
+        <p:spPr>
+          <a:xfrm>
+            <a:off x="3838239" y="1462423"/>
+            <a:ext cx="4948861" cy="1025866"/>
+          </a:xfrm>
+          <a:prstGeom prst="roundRect">
+            <a:avLst>
+              <a:gd fmla="val 10361" name="adj"/>
+            </a:avLst>
+          </a:prstGeom>
+          <a:solidFill>
+            <a:schemeClr val="lt2"/>
+          </a:solidFill>
+          <a:ln>
+            <a:noFill/>
+          </a:ln>
+        </p:spPr>
+        <p:txBody>
+          <a:bodyPr anchorCtr="0" anchor="ctr" bIns="91425" lIns="91425" spcFirstLastPara="1" rIns="91425" wrap="square" tIns="91425">
+            <a:noAutofit/>
+          </a:bodyPr>
+          <a:lstStyle/>
+          <a:p>
+            <a:pPr indent="0" lvl="0" marL="0" rtl="0" algn="l">
+              <a:spcBef>
+                <a:spcPts val="0"/>
+              </a:spcBef>
+              <a:spcAft>
+                <a:spcPts val="0"/>
+              </a:spcAft>
+              <a:buNone/>
+            </a:pPr>
+            <a:r>
+              <a:t/>
+            </a:r>
+            <a:endParaRPr/>
+          </a:p>
+        </p:txBody>
+      </p:sp>
+      <p:sp>
+        <p:nvSpPr>
+          <p:cNvPr id="1065" name="Google Shape;1065;p66"/>
+          <p:cNvSpPr/>
+          <p:nvPr/>
+        </p:nvSpPr>
+        <p:spPr>
+          <a:xfrm>
+            <a:off x="3838239" y="2648322"/>
+            <a:ext cx="4948861" cy="1025866"/>
+          </a:xfrm>
+          <a:prstGeom prst="roundRect">
+            <a:avLst>
+              <a:gd fmla="val 10361" name="adj"/>
+            </a:avLst>
+          </a:prstGeom>
+          <a:solidFill>
+            <a:schemeClr val="lt2"/>
+          </a:solidFill>
+          <a:ln>
+            <a:noFill/>
+          </a:ln>
+        </p:spPr>
+        <p:txBody>
+          <a:bodyPr anchorCtr="0" anchor="ctr" bIns="91425" lIns="91425" spcFirstLastPara="1" rIns="91425" wrap="square" tIns="91425">
+            <a:noAutofit/>
+          </a:bodyPr>
+          <a:lstStyle/>
+          <a:p>
+            <a:pPr indent="0" lvl="0" marL="0" rtl="0" algn="l">
+              <a:spcBef>
+                <a:spcPts val="0"/>
+              </a:spcBef>
+              <a:spcAft>
+                <a:spcPts val="0"/>
+              </a:spcAft>
+              <a:buNone/>
+            </a:pPr>
+            <a:r>
+              <a:t/>
+            </a:r>
+            <a:endParaRPr/>
+          </a:p>
+        </p:txBody>
+      </p:sp>
+      <p:sp>
+        <p:nvSpPr>
+          <p:cNvPr id="1069" name="Google Shape;1069;p66"/>
+          <p:cNvSpPr/>
+          <p:nvPr/>
+        </p:nvSpPr>
+        <p:spPr>
+          <a:xfrm>
+            <a:off x="3838239" y="3834221"/>
+            <a:ext cx="4948861" cy="1025866"/>
+          </a:xfrm>
+          <a:prstGeom prst="roundRect">
+            <a:avLst>
+              <a:gd fmla="val 10361" name="adj"/>
+            </a:avLst>
+          </a:prstGeom>
+          <a:solidFill>
+            <a:schemeClr val="lt2"/>
+          </a:solidFill>
+          <a:ln>
+            <a:noFill/>
+          </a:ln>
+        </p:spPr>
+        <p:txBody>
+          <a:bodyPr anchorCtr="0" anchor="ctr" bIns="91425" lIns="91425" spcFirstLastPara="1" rIns="91425" wrap="square" tIns="91425">
+            <a:noAutofit/>
+          </a:bodyPr>
+          <a:lstStyle/>
+          <a:p>
+            <a:pPr indent="0" lvl="0" marL="0" rtl="0" algn="l">
+              <a:spcBef>
+                <a:spcPts val="0"/>
+              </a:spcBef>
+              <a:spcAft>
+                <a:spcPts val="0"/>
+              </a:spcAft>
+              <a:buNone/>
+            </a:pPr>
+            <a:r>
+              <a:t/>
+            </a:r>
+            <a:endParaRPr/>
+          </a:p>
+        </p:txBody>
+      </p:sp>
+      <p:sp>
+        <p:nvSpPr>
+          <p:cNvPr id="1070" name="title"/>
           <p:cNvSpPr txBox="1"/>
           <p:nvPr/>
         </p:nvSpPr>
@@ -10654,358 +10188,798 @@
                 <a:ea typeface="Play"/>
                 <a:cs typeface="Play"/>
               </a:rPr>
-              <a:t>Результаты пилота: эффективность</a:t>
+              <a:t>Запрос запуска на всю компанию</a:t>
             </a:r>
           </a:p>
         </p:txBody>
       </p:sp>
-      <p:graphicFrame>
-        <p:nvGraphicFramePr>
-          <p:cNvPr id="1060" name="Table 1059"/>
-          <p:cNvGraphicFramePr>
-            <a:graphicFrameLocks noGrp="1"/>
-          </p:cNvGraphicFramePr>
+      <p:sp>
+        <p:nvSpPr>
+          <p:cNvPr id="1071" name="body"/>
+          <p:cNvSpPr txBox="1"/>
           <p:nvPr/>
-        </p:nvGraphicFramePr>
-        <p:xfrm>
-          <a:off x="4583887" y="1394994"/>
-          <a:ext cx="4035247" cy="3028415"/>
-        </p:xfrm>
-        <a:graphic>
-          <a:graphicData uri="http://schemas.openxmlformats.org/drawingml/2006/table">
-            <a:tbl>
-              <a:tblPr firstRow="1" bandRow="1">
-                <a:tableStyleId>{5C22544A-7EE6-4342-B048-85BDC9FD1C3A}</a:tableStyleId>
-              </a:tblPr>
-              <a:tblGrid>
-                <a:gridCol w="1345082"/>
-                <a:gridCol w="1345082"/>
-                <a:gridCol w="1345083"/>
-              </a:tblGrid>
-              <a:tr h="757103">
-                <a:tc>
-                  <a:txBody>
-                    <a:bodyPr/>
-                    <a:lstStyle/>
-                    <a:p>
-                      <a:pPr>
-                        <a:defRPr sz="1300" b="1">
-                          <a:solidFill>
-                            <a:srgbClr val="FFFFFF"/>
-                          </a:solidFill>
-                          <a:latin typeface="Play"/>
-                          <a:ea typeface="Play"/>
-                          <a:cs typeface="Play"/>
-                        </a:defRPr>
-                      </a:pPr>
-                      <a:r>
-                        <a:t>Показатель</a:t>
-                      </a:r>
-                    </a:p>
-                  </a:txBody>
-                  <a:tcPr>
-                    <a:solidFill>
-                      <a:srgbClr val="0077FF"/>
-                    </a:solidFill>
-                  </a:tcPr>
-                </a:tc>
-                <a:tc>
-                  <a:txBody>
-                    <a:bodyPr/>
-                    <a:lstStyle/>
-                    <a:p>
-                      <a:pPr>
-                        <a:defRPr sz="1300" b="1">
-                          <a:solidFill>
-                            <a:srgbClr val="FFFFFF"/>
-                          </a:solidFill>
-                          <a:latin typeface="Play"/>
-                          <a:ea typeface="Play"/>
-                          <a:cs typeface="Play"/>
-                        </a:defRPr>
-                      </a:pPr>
-                      <a:r>
-                        <a:t>Сейчас</a:t>
-                      </a:r>
-                    </a:p>
-                  </a:txBody>
-                  <a:tcPr>
-                    <a:solidFill>
-                      <a:srgbClr val="0077FF"/>
-                    </a:solidFill>
-                  </a:tcPr>
-                </a:tc>
-                <a:tc>
-                  <a:txBody>
-                    <a:bodyPr/>
-                    <a:lstStyle/>
-                    <a:p>
-                      <a:pPr>
-                        <a:defRPr sz="1300" b="1">
-                          <a:solidFill>
-                            <a:srgbClr val="FFFFFF"/>
-                          </a:solidFill>
-                          <a:latin typeface="Play"/>
-                          <a:ea typeface="Play"/>
-                          <a:cs typeface="Play"/>
-                        </a:defRPr>
-                      </a:pPr>
-                      <a:r>
-                        <a:t>Сервис</a:t>
-                      </a:r>
-                    </a:p>
-                  </a:txBody>
-                  <a:tcPr>
-                    <a:solidFill>
-                      <a:srgbClr val="0077FF"/>
-                    </a:solidFill>
-                  </a:tcPr>
-                </a:tc>
-              </a:tr>
-              <a:tr h="757103">
-                <a:tc>
-                  <a:txBody>
-                    <a:bodyPr/>
-                    <a:lstStyle/>
-                    <a:p>
-                      <a:pPr>
-                        <a:defRPr sz="1300" b="0">
-                          <a:solidFill>
-                            <a:srgbClr val="000000"/>
-                          </a:solidFill>
-                          <a:latin typeface="Play"/>
-                          <a:ea typeface="Play"/>
-                          <a:cs typeface="Play"/>
-                        </a:defRPr>
-                      </a:pPr>
-                      <a:r>
-                        <a:t>Время, мин</a:t>
-                      </a:r>
-                    </a:p>
-                  </a:txBody>
-                  <a:tcPr>
-                    <a:solidFill>
-                      <a:srgbClr val="FFFFFF"/>
-                    </a:solidFill>
-                  </a:tcPr>
-                </a:tc>
-                <a:tc>
-                  <a:txBody>
-                    <a:bodyPr/>
-                    <a:lstStyle/>
-                    <a:p>
-                      <a:pPr>
-                        <a:defRPr sz="1300" b="0">
-                          <a:solidFill>
-                            <a:srgbClr val="000000"/>
-                          </a:solidFill>
-                          <a:latin typeface="Play"/>
-                          <a:ea typeface="Play"/>
-                          <a:cs typeface="Play"/>
-                        </a:defRPr>
-                      </a:pPr>
-                      <a:r>
-                        <a:t>186</a:t>
-                      </a:r>
-                    </a:p>
-                  </a:txBody>
-                  <a:tcPr>
-                    <a:solidFill>
-                      <a:srgbClr val="FFFFFF"/>
-                    </a:solidFill>
-                  </a:tcPr>
-                </a:tc>
-                <a:tc>
-                  <a:txBody>
-                    <a:bodyPr/>
-                    <a:lstStyle/>
-                    <a:p>
-                      <a:pPr>
-                        <a:defRPr sz="1300" b="0">
-                          <a:solidFill>
-                            <a:srgbClr val="000000"/>
-                          </a:solidFill>
-                          <a:latin typeface="Play"/>
-                          <a:ea typeface="Play"/>
-                          <a:cs typeface="Play"/>
-                        </a:defRPr>
-                      </a:pPr>
-                      <a:r>
-                        <a:t>4</a:t>
-                      </a:r>
-                    </a:p>
-                  </a:txBody>
-                  <a:tcPr>
-                    <a:solidFill>
-                      <a:srgbClr val="FFFFFF"/>
-                    </a:solidFill>
-                  </a:tcPr>
-                </a:tc>
-              </a:tr>
-              <a:tr h="757103">
-                <a:tc>
-                  <a:txBody>
-                    <a:bodyPr/>
-                    <a:lstStyle/>
-                    <a:p>
-                      <a:pPr>
-                        <a:defRPr sz="1300" b="0">
-                          <a:solidFill>
-                            <a:srgbClr val="000000"/>
-                          </a:solidFill>
-                          <a:latin typeface="Play"/>
-                          <a:ea typeface="Play"/>
-                          <a:cs typeface="Play"/>
-                        </a:defRPr>
-                      </a:pPr>
-                      <a:r>
-                        <a:t>Нарушения колод</a:t>
-                      </a:r>
-                    </a:p>
-                  </a:txBody>
-                  <a:tcPr>
-                    <a:solidFill>
-                      <a:srgbClr val="FFFFFF"/>
-                    </a:solidFill>
-                  </a:tcPr>
-                </a:tc>
-                <a:tc>
-                  <a:txBody>
-                    <a:bodyPr/>
-                    <a:lstStyle/>
-                    <a:p>
-                      <a:pPr>
-                        <a:defRPr sz="1300" b="0">
-                          <a:solidFill>
-                            <a:srgbClr val="000000"/>
-                          </a:solidFill>
-                          <a:latin typeface="Play"/>
-                          <a:ea typeface="Play"/>
-                          <a:cs typeface="Play"/>
-                        </a:defRPr>
-                      </a:pPr>
-                      <a:r>
-                        <a:t>19</a:t>
-                      </a:r>
-                    </a:p>
-                  </a:txBody>
-                  <a:tcPr>
-                    <a:solidFill>
-                      <a:srgbClr val="FFFFFF"/>
-                    </a:solidFill>
-                  </a:tcPr>
-                </a:tc>
-                <a:tc>
-                  <a:txBody>
-                    <a:bodyPr/>
-                    <a:lstStyle/>
-                    <a:p>
-                      <a:pPr>
-                        <a:defRPr sz="1300" b="0">
-                          <a:solidFill>
-                            <a:srgbClr val="000000"/>
-                          </a:solidFill>
-                          <a:latin typeface="Play"/>
-                          <a:ea typeface="Play"/>
-                          <a:cs typeface="Play"/>
-                        </a:defRPr>
-                      </a:pPr>
-                      <a:r>
-                        <a:t>2</a:t>
-                      </a:r>
-                    </a:p>
-                  </a:txBody>
-                  <a:tcPr>
-                    <a:solidFill>
-                      <a:srgbClr val="FFFFFF"/>
-                    </a:solidFill>
-                  </a:tcPr>
-                </a:tc>
-              </a:tr>
-              <a:tr h="757106">
-                <a:tc>
-                  <a:txBody>
-                    <a:bodyPr/>
-                    <a:lstStyle/>
-                    <a:p>
-                      <a:pPr>
-                        <a:defRPr sz="1300" b="0">
-                          <a:solidFill>
-                            <a:srgbClr val="000000"/>
-                          </a:solidFill>
-                          <a:latin typeface="Play"/>
-                          <a:ea typeface="Play"/>
-                          <a:cs typeface="Play"/>
-                        </a:defRPr>
-                      </a:pPr>
-                      <a:r>
-                        <a:t>Запросы, кол-во</a:t>
-                      </a:r>
-                    </a:p>
-                  </a:txBody>
-                  <a:tcPr>
-                    <a:solidFill>
-                      <a:srgbClr val="FFFFFF"/>
-                    </a:solidFill>
-                  </a:tcPr>
-                </a:tc>
-                <a:tc>
-                  <a:txBody>
-                    <a:bodyPr/>
-                    <a:lstStyle/>
-                    <a:p>
-                      <a:pPr>
-                        <a:defRPr sz="1300" b="0">
-                          <a:solidFill>
-                            <a:srgbClr val="000000"/>
-                          </a:solidFill>
-                          <a:latin typeface="Play"/>
-                          <a:ea typeface="Play"/>
-                          <a:cs typeface="Play"/>
-                        </a:defRPr>
-                      </a:pPr>
-                      <a:r>
-                        <a:t>11</a:t>
-                      </a:r>
-                    </a:p>
-                  </a:txBody>
-                  <a:tcPr>
-                    <a:solidFill>
-                      <a:srgbClr val="FFFFFF"/>
-                    </a:solidFill>
-                  </a:tcPr>
-                </a:tc>
-                <a:tc>
-                  <a:txBody>
-                    <a:bodyPr/>
-                    <a:lstStyle/>
-                    <a:p>
-                      <a:pPr>
-                        <a:defRPr sz="1300" b="0">
-                          <a:solidFill>
-                            <a:srgbClr val="000000"/>
-                          </a:solidFill>
-                          <a:latin typeface="Play"/>
-                          <a:ea typeface="Play"/>
-                          <a:cs typeface="Play"/>
-                        </a:defRPr>
-                      </a:pPr>
-                      <a:r>
-                        <a:t>38</a:t>
-                      </a:r>
-                    </a:p>
-                  </a:txBody>
-                  <a:tcPr>
-                    <a:solidFill>
-                      <a:srgbClr val="FFFFFF"/>
-                    </a:solidFill>
-                  </a:tcPr>
-                </a:tc>
-              </a:tr>
-            </a:tbl>
-          </a:graphicData>
-        </a:graphic>
-      </p:graphicFrame>
+        </p:nvSpPr>
+        <p:spPr>
+          <a:xfrm>
+            <a:off x="274320" y="2412632"/>
+            <a:ext cx="4519476" cy="993140"/>
+          </a:xfrm>
+          <a:prstGeom prst="rect">
+            <a:avLst/>
+          </a:prstGeom>
+          <a:noFill/>
+        </p:spPr>
+        <p:txBody>
+          <a:bodyPr wrap="square" lIns="76200" rIns="76200" tIns="50800" bIns="50800">
+            <a:spAutoFit/>
+          </a:bodyPr>
+          <a:lstStyle/>
+          <a:p>
+            <a:pPr algn="l">
+              <a:spcAft>
+                <a:spcPts val="300"/>
+              </a:spcAft>
+              <a:defRPr sz="1800">
+                <a:solidFill>
+                  <a:srgbClr val="000000"/>
+                </a:solidFill>
+                <a:latin typeface="Play"/>
+                <a:ea typeface="Play"/>
+                <a:cs typeface="Play"/>
+              </a:defRPr>
+            </a:pPr>
+            <a:r>
+              <a:rPr sz="1800">
+                <a:solidFill>
+                  <a:srgbClr val="000000"/>
+                </a:solidFill>
+                <a:latin typeface="Play"/>
+                <a:ea typeface="Play"/>
+                <a:cs typeface="Play"/>
+              </a:rPr>
+              <a:t>• Попросить одобрение запуска</a:t>
+            </a:r>
+          </a:p>
+          <a:p>
+            <a:pPr algn="l">
+              <a:spcAft>
+                <a:spcPts val="300"/>
+              </a:spcAft>
+              <a:defRPr sz="1800">
+                <a:solidFill>
+                  <a:srgbClr val="000000"/>
+                </a:solidFill>
+                <a:latin typeface="Play"/>
+                <a:ea typeface="Play"/>
+                <a:cs typeface="Play"/>
+              </a:defRPr>
+            </a:pPr>
+            <a:r>
+              <a:rPr sz="1800">
+                <a:solidFill>
+                  <a:srgbClr val="000000"/>
+                </a:solidFill>
+                <a:latin typeface="Play"/>
+                <a:ea typeface="Play"/>
+                <a:cs typeface="Play"/>
+              </a:rPr>
+              <a:t>• Предложить интеграцию с хранилищем документов</a:t>
+            </a:r>
+          </a:p>
+        </p:txBody>
+      </p:sp>
+      <p:grpSp>
+        <p:nvGrpSpPr>
+          <p:cNvPr id="2" name="illustration:builtin-launch"/>
+          <p:cNvGrpSpPr/>
+          <p:nvPr/>
+        </p:nvGrpSpPr>
+        <p:grpSpPr>
+          <a:xfrm>
+            <a:off x="5725054" y="1790631"/>
+            <a:ext cx="2325915" cy="2237140"/>
+            <a:chOff x="5725054" y="1790631"/>
+            <a:chExt cx="2325915" cy="2237140"/>
+          </a:xfrm>
+        </p:grpSpPr>
+        <p:sp>
+          <p:nvSpPr>
+            <p:cNvPr id="1072" name="Oval 1071"/>
+            <p:cNvSpPr/>
+            <p:nvPr/>
+          </p:nvSpPr>
+          <p:spPr>
+            <a:xfrm>
+              <a:off x="5725054" y="1790631"/>
+              <a:ext cx="2237140" cy="2237140"/>
+            </a:xfrm>
+            <a:prstGeom prst="ellipse">
+              <a:avLst/>
+            </a:prstGeom>
+            <a:solidFill>
+              <a:srgbClr val="D6E9FF"/>
+            </a:solidFill>
+            <a:ln>
+              <a:noFill/>
+            </a:ln>
+            <a:effectLst/>
+          </p:spPr>
+          <p:style>
+            <a:lnRef idx="1">
+              <a:schemeClr val="accent1"/>
+            </a:lnRef>
+            <a:fillRef idx="3">
+              <a:schemeClr val="accent1"/>
+            </a:fillRef>
+            <a:effectRef idx="2">
+              <a:schemeClr val="accent1"/>
+            </a:effectRef>
+            <a:fontRef idx="minor">
+              <a:schemeClr val="lt1"/>
+            </a:fontRef>
+          </p:style>
+          <p:txBody>
+            <a:bodyPr rtlCol="0" anchor="ctr"/>
+            <a:lstStyle/>
+            <a:p>
+              <a:pPr algn="ctr"/>
+            </a:p>
+          </p:txBody>
+        </p:sp>
+        <p:sp>
+          <p:nvSpPr>
+            <p:cNvPr id="3" name="Freeform 2"/>
+            <p:cNvSpPr/>
+            <p:nvPr/>
+          </p:nvSpPr>
+          <p:spPr>
+            <a:xfrm>
+              <a:off x="6401025" y="1897161"/>
+              <a:ext cx="885198" cy="1225101"/>
+            </a:xfrm>
+            <a:custGeom>
+              <a:avLst/>
+              <a:gdLst/>
+              <a:ahLst/>
+              <a:cxnLst/>
+              <a:rect l="l" t="t" r="r" b="b"/>
+              <a:pathLst>
+                <a:path w="885198" h="1225101">
+                  <a:moveTo>
+                    <a:pt x="442599" y="0"/>
+                  </a:moveTo>
+                  <a:lnTo>
+                    <a:pt x="547514" y="85597"/>
+                  </a:lnTo>
+                  <a:lnTo>
+                    <a:pt x="638473" y="181954"/>
+                  </a:lnTo>
+                  <a:lnTo>
+                    <a:pt x="715370" y="288112"/>
+                  </a:lnTo>
+                  <a:lnTo>
+                    <a:pt x="778099" y="403112"/>
+                  </a:lnTo>
+                  <a:lnTo>
+                    <a:pt x="826553" y="525995"/>
+                  </a:lnTo>
+                  <a:lnTo>
+                    <a:pt x="860625" y="655802"/>
+                  </a:lnTo>
+                  <a:lnTo>
+                    <a:pt x="880209" y="791575"/>
+                  </a:lnTo>
+                  <a:lnTo>
+                    <a:pt x="885198" y="932355"/>
+                  </a:lnTo>
+                  <a:lnTo>
+                    <a:pt x="875486" y="1077183"/>
+                  </a:lnTo>
+                  <a:lnTo>
+                    <a:pt x="850966" y="1225101"/>
+                  </a:lnTo>
+                  <a:lnTo>
+                    <a:pt x="34232" y="1225101"/>
+                  </a:lnTo>
+                  <a:lnTo>
+                    <a:pt x="9712" y="1077183"/>
+                  </a:lnTo>
+                  <a:lnTo>
+                    <a:pt x="0" y="932355"/>
+                  </a:lnTo>
+                  <a:lnTo>
+                    <a:pt x="4989" y="791575"/>
+                  </a:lnTo>
+                  <a:lnTo>
+                    <a:pt x="24573" y="655802"/>
+                  </a:lnTo>
+                  <a:lnTo>
+                    <a:pt x="58645" y="525995"/>
+                  </a:lnTo>
+                  <a:lnTo>
+                    <a:pt x="107099" y="403112"/>
+                  </a:lnTo>
+                  <a:lnTo>
+                    <a:pt x="169828" y="288112"/>
+                  </a:lnTo>
+                  <a:lnTo>
+                    <a:pt x="246725" y="181954"/>
+                  </a:lnTo>
+                  <a:lnTo>
+                    <a:pt x="337684" y="85597"/>
+                  </a:lnTo>
+                  <a:lnTo>
+                    <a:pt x="442599" y="0"/>
+                  </a:lnTo>
+                  <a:close/>
+                </a:path>
+              </a:pathLst>
+            </a:custGeom>
+            <a:solidFill>
+              <a:srgbClr val="0077FF"/>
+            </a:solidFill>
+            <a:ln>
+              <a:noFill/>
+            </a:ln>
+            <a:effectLst/>
+          </p:spPr>
+          <p:style>
+            <a:lnRef idx="1">
+              <a:schemeClr val="accent1"/>
+            </a:lnRef>
+            <a:fillRef idx="3">
+              <a:schemeClr val="accent1"/>
+            </a:fillRef>
+            <a:effectRef idx="2">
+              <a:schemeClr val="accent1"/>
+            </a:effectRef>
+            <a:fontRef idx="minor">
+              <a:schemeClr val="lt1"/>
+            </a:fontRef>
+          </p:style>
+          <p:txBody>
+            <a:bodyPr rtlCol="0" anchor="ctr"/>
+            <a:lstStyle/>
+            <a:p>
+              <a:pPr algn="ctr"/>
+            </a:p>
+          </p:txBody>
+        </p:sp>
+        <p:sp>
+          <p:nvSpPr>
+            <p:cNvPr id="1073" name="Oval 1072"/>
+            <p:cNvSpPr/>
+            <p:nvPr/>
+          </p:nvSpPr>
+          <p:spPr>
+            <a:xfrm>
+              <a:off x="6630563" y="2358793"/>
+              <a:ext cx="426122" cy="426122"/>
+            </a:xfrm>
+            <a:prstGeom prst="ellipse">
+              <a:avLst/>
+            </a:prstGeom>
+            <a:solidFill>
+              <a:srgbClr val="FFFFFF"/>
+            </a:solidFill>
+            <a:ln>
+              <a:noFill/>
+            </a:ln>
+            <a:effectLst/>
+          </p:spPr>
+          <p:style>
+            <a:lnRef idx="1">
+              <a:schemeClr val="accent1"/>
+            </a:lnRef>
+            <a:fillRef idx="3">
+              <a:schemeClr val="accent1"/>
+            </a:fillRef>
+            <a:effectRef idx="2">
+              <a:schemeClr val="accent1"/>
+            </a:effectRef>
+            <a:fontRef idx="minor">
+              <a:schemeClr val="lt1"/>
+            </a:fontRef>
+          </p:style>
+          <p:txBody>
+            <a:bodyPr rtlCol="0" anchor="ctr"/>
+            <a:lstStyle/>
+            <a:p>
+              <a:pPr algn="ctr"/>
+            </a:p>
+          </p:txBody>
+        </p:sp>
+        <p:sp>
+          <p:nvSpPr>
+            <p:cNvPr id="1074" name="Oval 1073"/>
+            <p:cNvSpPr/>
+            <p:nvPr/>
+          </p:nvSpPr>
+          <p:spPr>
+            <a:xfrm>
+              <a:off x="6719338" y="2447569"/>
+              <a:ext cx="248571" cy="248571"/>
+            </a:xfrm>
+            <a:prstGeom prst="ellipse">
+              <a:avLst/>
+            </a:prstGeom>
+            <a:solidFill>
+              <a:srgbClr val="FF6C6C"/>
+            </a:solidFill>
+            <a:ln>
+              <a:noFill/>
+            </a:ln>
+            <a:effectLst/>
+          </p:spPr>
+          <p:style>
+            <a:lnRef idx="1">
+              <a:schemeClr val="accent1"/>
+            </a:lnRef>
+            <a:fillRef idx="3">
+              <a:schemeClr val="accent1"/>
+            </a:fillRef>
+            <a:effectRef idx="2">
+              <a:schemeClr val="accent1"/>
+            </a:effectRef>
+            <a:fontRef idx="minor">
+              <a:schemeClr val="lt1"/>
+            </a:fontRef>
+          </p:style>
+          <p:txBody>
+            <a:bodyPr rtlCol="0" anchor="ctr"/>
+            <a:lstStyle/>
+            <a:p>
+              <a:pPr algn="ctr"/>
+            </a:p>
+          </p:txBody>
+        </p:sp>
+        <p:sp>
+          <p:nvSpPr>
+            <p:cNvPr id="4" name="Freeform 3"/>
+            <p:cNvSpPr/>
+            <p:nvPr/>
+          </p:nvSpPr>
+          <p:spPr>
+            <a:xfrm>
+              <a:off x="6133421" y="2909201"/>
+              <a:ext cx="355101" cy="585918"/>
+            </a:xfrm>
+            <a:custGeom>
+              <a:avLst/>
+              <a:gdLst/>
+              <a:ahLst/>
+              <a:cxnLst/>
+              <a:rect l="l" t="t" r="r" b="b"/>
+              <a:pathLst>
+                <a:path w="355101" h="585918">
+                  <a:moveTo>
+                    <a:pt x="301836" y="0"/>
+                  </a:moveTo>
+                  <a:lnTo>
+                    <a:pt x="0" y="372857"/>
+                  </a:lnTo>
+                  <a:lnTo>
+                    <a:pt x="0" y="585918"/>
+                  </a:lnTo>
+                  <a:lnTo>
+                    <a:pt x="355101" y="426122"/>
+                  </a:lnTo>
+                  <a:close/>
+                </a:path>
+              </a:pathLst>
+            </a:custGeom>
+            <a:solidFill>
+              <a:srgbClr val="FF6C6C"/>
+            </a:solidFill>
+            <a:ln>
+              <a:noFill/>
+            </a:ln>
+            <a:effectLst/>
+          </p:spPr>
+          <p:style>
+            <a:lnRef idx="1">
+              <a:schemeClr val="accent1"/>
+            </a:lnRef>
+            <a:fillRef idx="3">
+              <a:schemeClr val="accent1"/>
+            </a:fillRef>
+            <a:effectRef idx="2">
+              <a:schemeClr val="accent1"/>
+            </a:effectRef>
+            <a:fontRef idx="minor">
+              <a:schemeClr val="lt1"/>
+            </a:fontRef>
+          </p:style>
+          <p:txBody>
+            <a:bodyPr rtlCol="0" anchor="ctr"/>
+            <a:lstStyle/>
+            <a:p>
+              <a:pPr algn="ctr"/>
+            </a:p>
+          </p:txBody>
+        </p:sp>
+        <p:sp>
+          <p:nvSpPr>
+            <p:cNvPr id="5" name="Freeform 4"/>
+            <p:cNvSpPr/>
+            <p:nvPr/>
+          </p:nvSpPr>
+          <p:spPr>
+            <a:xfrm>
+              <a:off x="7198726" y="2909201"/>
+              <a:ext cx="355101" cy="585918"/>
+            </a:xfrm>
+            <a:custGeom>
+              <a:avLst/>
+              <a:gdLst/>
+              <a:ahLst/>
+              <a:cxnLst/>
+              <a:rect l="l" t="t" r="r" b="b"/>
+              <a:pathLst>
+                <a:path w="355101" h="585918">
+                  <a:moveTo>
+                    <a:pt x="53265" y="0"/>
+                  </a:moveTo>
+                  <a:lnTo>
+                    <a:pt x="355101" y="372857"/>
+                  </a:lnTo>
+                  <a:lnTo>
+                    <a:pt x="355101" y="585918"/>
+                  </a:lnTo>
+                  <a:lnTo>
+                    <a:pt x="0" y="426122"/>
+                  </a:lnTo>
+                  <a:close/>
+                </a:path>
+              </a:pathLst>
+            </a:custGeom>
+            <a:solidFill>
+              <a:srgbClr val="FF6C6C"/>
+            </a:solidFill>
+            <a:ln>
+              <a:noFill/>
+            </a:ln>
+            <a:effectLst/>
+          </p:spPr>
+          <p:style>
+            <a:lnRef idx="1">
+              <a:schemeClr val="accent1"/>
+            </a:lnRef>
+            <a:fillRef idx="3">
+              <a:schemeClr val="accent1"/>
+            </a:fillRef>
+            <a:effectRef idx="2">
+              <a:schemeClr val="accent1"/>
+            </a:effectRef>
+            <a:fontRef idx="minor">
+              <a:schemeClr val="lt1"/>
+            </a:fontRef>
+          </p:style>
+          <p:txBody>
+            <a:bodyPr rtlCol="0" anchor="ctr"/>
+            <a:lstStyle/>
+            <a:p>
+              <a:pPr algn="ctr"/>
+            </a:p>
+          </p:txBody>
+        </p:sp>
+        <p:sp>
+          <p:nvSpPr>
+            <p:cNvPr id="6" name="Freeform 5"/>
+            <p:cNvSpPr/>
+            <p:nvPr/>
+          </p:nvSpPr>
+          <p:spPr>
+            <a:xfrm>
+              <a:off x="6630563" y="3157772"/>
+              <a:ext cx="426122" cy="266326"/>
+            </a:xfrm>
+            <a:custGeom>
+              <a:avLst/>
+              <a:gdLst/>
+              <a:ahLst/>
+              <a:cxnLst/>
+              <a:rect l="l" t="t" r="r" b="b"/>
+              <a:pathLst>
+                <a:path w="426122" h="266326">
+                  <a:moveTo>
+                    <a:pt x="0" y="0"/>
+                  </a:moveTo>
+                  <a:lnTo>
+                    <a:pt x="426122" y="0"/>
+                  </a:lnTo>
+                  <a:lnTo>
+                    <a:pt x="355102" y="266326"/>
+                  </a:lnTo>
+                  <a:lnTo>
+                    <a:pt x="71020" y="266326"/>
+                  </a:lnTo>
+                  <a:close/>
+                </a:path>
+              </a:pathLst>
+            </a:custGeom>
+            <a:solidFill>
+              <a:srgbClr val="B2B2B2"/>
+            </a:solidFill>
+            <a:ln>
+              <a:noFill/>
+            </a:ln>
+            <a:effectLst/>
+          </p:spPr>
+          <p:style>
+            <a:lnRef idx="1">
+              <a:schemeClr val="accent1"/>
+            </a:lnRef>
+            <a:fillRef idx="3">
+              <a:schemeClr val="accent1"/>
+            </a:fillRef>
+            <a:effectRef idx="2">
+              <a:schemeClr val="accent1"/>
+            </a:effectRef>
+            <a:fontRef idx="minor">
+              <a:schemeClr val="lt1"/>
+            </a:fontRef>
+          </p:style>
+          <p:txBody>
+            <a:bodyPr rtlCol="0" anchor="ctr"/>
+            <a:lstStyle/>
+            <a:p>
+              <a:pPr algn="ctr"/>
+            </a:p>
+          </p:txBody>
+        </p:sp>
+        <p:sp>
+          <p:nvSpPr>
+            <p:cNvPr id="7" name="Freeform 6"/>
+            <p:cNvSpPr/>
+            <p:nvPr/>
+          </p:nvSpPr>
+          <p:spPr>
+            <a:xfrm>
+              <a:off x="6701583" y="3424098"/>
+              <a:ext cx="284082" cy="497143"/>
+            </a:xfrm>
+            <a:custGeom>
+              <a:avLst/>
+              <a:gdLst/>
+              <a:ahLst/>
+              <a:cxnLst/>
+              <a:rect l="l" t="t" r="r" b="b"/>
+              <a:pathLst>
+                <a:path w="284082" h="497143">
+                  <a:moveTo>
+                    <a:pt x="0" y="0"/>
+                  </a:moveTo>
+                  <a:lnTo>
+                    <a:pt x="284082" y="0"/>
+                  </a:lnTo>
+                  <a:lnTo>
+                    <a:pt x="282022" y="66653"/>
+                  </a:lnTo>
+                  <a:lnTo>
+                    <a:pt x="276127" y="128405"/>
+                  </a:lnTo>
+                  <a:lnTo>
+                    <a:pt x="266824" y="185683"/>
+                  </a:lnTo>
+                  <a:lnTo>
+                    <a:pt x="254537" y="238913"/>
+                  </a:lnTo>
+                  <a:lnTo>
+                    <a:pt x="239694" y="288521"/>
+                  </a:lnTo>
+                  <a:lnTo>
+                    <a:pt x="222720" y="334932"/>
+                  </a:lnTo>
+                  <a:lnTo>
+                    <a:pt x="204042" y="378574"/>
+                  </a:lnTo>
+                  <a:lnTo>
+                    <a:pt x="184085" y="419873"/>
+                  </a:lnTo>
+                  <a:lnTo>
+                    <a:pt x="163276" y="459253"/>
+                  </a:lnTo>
+                  <a:lnTo>
+                    <a:pt x="142041" y="497143"/>
+                  </a:lnTo>
+                  <a:lnTo>
+                    <a:pt x="120806" y="459253"/>
+                  </a:lnTo>
+                  <a:lnTo>
+                    <a:pt x="99997" y="419873"/>
+                  </a:lnTo>
+                  <a:lnTo>
+                    <a:pt x="80040" y="378574"/>
+                  </a:lnTo>
+                  <a:lnTo>
+                    <a:pt x="61362" y="334932"/>
+                  </a:lnTo>
+                  <a:lnTo>
+                    <a:pt x="44388" y="288521"/>
+                  </a:lnTo>
+                  <a:lnTo>
+                    <a:pt x="29545" y="238913"/>
+                  </a:lnTo>
+                  <a:lnTo>
+                    <a:pt x="17258" y="185683"/>
+                  </a:lnTo>
+                  <a:lnTo>
+                    <a:pt x="7955" y="128405"/>
+                  </a:lnTo>
+                  <a:lnTo>
+                    <a:pt x="2060" y="66653"/>
+                  </a:lnTo>
+                  <a:lnTo>
+                    <a:pt x="0" y="0"/>
+                  </a:lnTo>
+                  <a:close/>
+                </a:path>
+              </a:pathLst>
+            </a:custGeom>
+            <a:solidFill>
+              <a:srgbClr val="FF6C6C"/>
+            </a:solidFill>
+            <a:ln>
+              <a:noFill/>
+            </a:ln>
+            <a:effectLst/>
+          </p:spPr>
+          <p:style>
+            <a:lnRef idx="1">
+              <a:schemeClr val="accent1"/>
+            </a:lnRef>
+            <a:fillRef idx="3">
+              <a:schemeClr val="accent1"/>
+            </a:fillRef>
+            <a:effectRef idx="2">
+              <a:schemeClr val="accent1"/>
+            </a:effectRef>
+            <a:fontRef idx="minor">
+              <a:schemeClr val="lt1"/>
+            </a:fontRef>
+          </p:style>
+          <p:txBody>
+            <a:bodyPr rtlCol="0" anchor="ctr"/>
+            <a:lstStyle/>
+            <a:p>
+              <a:pPr algn="ctr"/>
+            </a:p>
+          </p:txBody>
+        </p:sp>
+        <p:sp>
+          <p:nvSpPr>
+            <p:cNvPr id="1075" name="Oval 1074"/>
+            <p:cNvSpPr/>
+            <p:nvPr/>
+          </p:nvSpPr>
+          <p:spPr>
+            <a:xfrm>
+              <a:off x="5822707" y="2278895"/>
+              <a:ext cx="124285" cy="124285"/>
+            </a:xfrm>
+            <a:prstGeom prst="ellipse">
+              <a:avLst/>
+            </a:prstGeom>
+            <a:solidFill>
+              <a:srgbClr val="0077FF"/>
+            </a:solidFill>
+            <a:ln>
+              <a:noFill/>
+            </a:ln>
+            <a:effectLst/>
+          </p:spPr>
+          <p:style>
+            <a:lnRef idx="1">
+              <a:schemeClr val="accent1"/>
+            </a:lnRef>
+            <a:fillRef idx="3">
+              <a:schemeClr val="accent1"/>
+            </a:fillRef>
+            <a:effectRef idx="2">
+              <a:schemeClr val="accent1"/>
+            </a:effectRef>
+            <a:fontRef idx="minor">
+              <a:schemeClr val="lt1"/>
+            </a:fontRef>
+          </p:style>
+          <p:txBody>
+            <a:bodyPr rtlCol="0" anchor="ctr"/>
+            <a:lstStyle/>
+            <a:p>
+              <a:pPr algn="ctr"/>
+            </a:p>
+          </p:txBody>
+        </p:sp>
+        <p:sp>
+          <p:nvSpPr>
+            <p:cNvPr id="1076" name="Oval 1075"/>
+            <p:cNvSpPr/>
+            <p:nvPr/>
+          </p:nvSpPr>
+          <p:spPr>
+            <a:xfrm>
+              <a:off x="7784644" y="2110222"/>
+              <a:ext cx="177550" cy="177550"/>
+            </a:xfrm>
+            <a:prstGeom prst="ellipse">
+              <a:avLst/>
+            </a:prstGeom>
+            <a:solidFill>
+              <a:srgbClr val="FF6C6C"/>
+            </a:solidFill>
+            <a:ln>
+              <a:noFill/>
+            </a:ln>
+            <a:effectLst/>
+          </p:spPr>
+          <p:style>
+            <a:lnRef idx="1">
+              <a:schemeClr val="accent1"/>
+            </a:lnRef>
+            <a:fillRef idx="3">
+              <a:schemeClr val="accent1"/>
+            </a:fillRef>
+            <a:effectRef idx="2">
+              <a:schemeClr val="accent1"/>
+            </a:effectRef>
+            <a:fontRef idx="minor">
+              <a:schemeClr val="lt1"/>
+            </a:fontRef>
+          </p:style>
+          <p:txBody>
+            <a:bodyPr rtlCol="0" anchor="ctr"/>
+            <a:lstStyle/>
+            <a:p>
+              <a:pPr algn="ctr"/>
+            </a:p>
+          </p:txBody>
+        </p:sp>
+        <p:sp>
+          <p:nvSpPr>
+            <p:cNvPr id="1077" name="Oval 1076"/>
+            <p:cNvSpPr/>
+            <p:nvPr/>
+          </p:nvSpPr>
+          <p:spPr>
+            <a:xfrm>
+              <a:off x="7944439" y="3299813"/>
+              <a:ext cx="106530" cy="106530"/>
+            </a:xfrm>
+            <a:prstGeom prst="ellipse">
+              <a:avLst/>
+            </a:prstGeom>
+            <a:solidFill>
+              <a:srgbClr val="0077FF"/>
+            </a:solidFill>
+            <a:ln>
+              <a:noFill/>
+            </a:ln>
+            <a:effectLst/>
+          </p:spPr>
+          <p:style>
+            <a:lnRef idx="1">
+              <a:schemeClr val="accent1"/>
+            </a:lnRef>
+            <a:fillRef idx="3">
+              <a:schemeClr val="accent1"/>
+            </a:fillRef>
+            <a:effectRef idx="2">
+              <a:schemeClr val="accent1"/>
+            </a:effectRef>
+            <a:fontRef idx="minor">
+              <a:schemeClr val="lt1"/>
+            </a:fontRef>
+          </p:style>
+          <p:txBody>
+            <a:bodyPr rtlCol="0" anchor="ctr"/>
+            <a:lstStyle/>
+            <a:p>
+              <a:pPr algn="ctr"/>
+            </a:p>
+          </p:txBody>
+        </p:sp>
+      </p:grpSp>
     </p:spTree>
   </p:cSld>
   <p:clrMapOvr>
@@ -11033,7 +11007,7 @@
         <p:spPr>
           <a:xfrm>
             <a:off x="1543608" y="159030"/>
-            <a:ext cx="7202525" cy="3204328"/>
+            <a:ext cx="7202525" cy="3006208"/>
           </a:xfrm>
           <a:prstGeom prst="roundRect">
             <a:avLst/>
@@ -11114,7 +11088,7 @@
                 <a:ea typeface="Play"/>
                 <a:cs typeface="Play"/>
               </a:rPr>
-              <a:t>Что мы просим решить: запуск на всю компанию</a:t>
+              <a:t>Экономия времени и повышение качества</a:t>
             </a:r>
           </a:p>
         </p:txBody>
@@ -11127,8 +11101,8 @@
         </p:nvSpPr>
         <p:spPr>
           <a:xfrm>
-            <a:off x="1670608" y="2243218"/>
-            <a:ext cx="6948525" cy="993140"/>
+            <a:off x="1670608" y="2342278"/>
+            <a:ext cx="6948525" cy="695960"/>
           </a:xfrm>
           <a:prstGeom prst="rect">
             <a:avLst/>
@@ -11163,7 +11137,7 @@
                 <a:ea typeface="Play"/>
                 <a:cs typeface="Play"/>
               </a:rPr>
-              <a:t>• Решение о запуске сервиса на всю компанию</a:t>
+              <a:t>• Сборка колоды сократилась до 4 мин</a:t>
             </a:r>
           </a:p>
           <a:p>
@@ -11189,7 +11163,7 @@
                 <a:ea typeface="Play"/>
                 <a:cs typeface="Play"/>
               </a:rPr>
-              <a:t>• Поддержка интеграции с корпоративным хранилищем документов</a:t>
+              <a:t>• Нарушения стиля уменьшились до 2/68</a:t>
             </a:r>
           </a:p>
         </p:txBody>
